--- a/docs/decks/L03.pptx
+++ b/docs/decks/L03.pptx
@@ -13800,7 +13800,7 @@
             </a:avLst>
           </a:prstGeom>
           <a:solidFill>
-            <a:srgbClr val="ECEBFB"/>
+            <a:srgbClr val="F8F0E2"/>
           </a:solidFill>
           <a:ln/>
         </p:spPr>
@@ -13832,13 +13832,13 @@
             <a:r>
               <a:rPr lang="en-US" sz="900" b="1" spc="100" kern="0" dirty="0">
                 <a:solidFill>
-                  <a:srgbClr val="4038C4"/>
+                  <a:srgbClr val="9A5B12"/>
                 </a:solidFill>
                 <a:latin typeface="Courier New" pitchFamily="34" charset="0"/>
                 <a:ea typeface="Courier New" pitchFamily="34" charset="-122"/>
                 <a:cs typeface="Courier New" pitchFamily="34" charset="-120"/>
               </a:rPr>
-              <a:t>ТЕОРІЯ</a:t>
+              <a:t>РЕФЛЕКСІЯ</a:t>
             </a:r>
             <a:endParaRPr lang="en-US" sz="900" dirty="0"/>
           </a:p>
@@ -15090,7 +15090,7 @@
             </a:avLst>
           </a:prstGeom>
           <a:solidFill>
-            <a:srgbClr val="ECEBFB"/>
+            <a:srgbClr val="F8F0E2"/>
           </a:solidFill>
           <a:ln/>
         </p:spPr>
@@ -15122,13 +15122,13 @@
             <a:r>
               <a:rPr lang="en-US" sz="900" b="1" spc="100" kern="0" dirty="0">
                 <a:solidFill>
-                  <a:srgbClr val="4038C4"/>
+                  <a:srgbClr val="9A5B12"/>
                 </a:solidFill>
                 <a:latin typeface="Courier New" pitchFamily="34" charset="0"/>
                 <a:ea typeface="Courier New" pitchFamily="34" charset="-122"/>
                 <a:cs typeface="Courier New" pitchFamily="34" charset="-120"/>
               </a:rPr>
-              <a:t>ТЕОРІЯ</a:t>
+              <a:t>РЕФЛЕКСІЯ</a:t>
             </a:r>
             <a:endParaRPr lang="en-US" sz="900" dirty="0"/>
           </a:p>

--- a/docs/decks/L03.pptx
+++ b/docs/decks/L03.pptx
@@ -17045,9 +17045,14 @@
             </a:avLst>
           </a:prstGeom>
           <a:solidFill>
-            <a:srgbClr val="ECEBFB"/>
+            <a:srgbClr val="FFFFFF"/>
           </a:solidFill>
-          <a:ln/>
+          <a:ln w="12700">
+            <a:solidFill>
+              <a:srgbClr val="E4E6EC"/>
+            </a:solidFill>
+            <a:prstDash val="solid"/>
+          </a:ln>
         </p:spPr>
       </p:sp>
       <p:sp>
@@ -17065,7 +17070,7 @@
             <a:avLst/>
           </a:prstGeom>
           <a:solidFill>
-            <a:srgbClr val="4038C4"/>
+            <a:srgbClr val="1B1D23"/>
           </a:solidFill>
           <a:ln/>
         </p:spPr>
@@ -17097,7 +17102,7 @@
             <a:r>
               <a:rPr lang="en-US" sz="1200" b="1" dirty="0">
                 <a:solidFill>
-                  <a:srgbClr val="ECEBFB"/>
+                  <a:srgbClr val="FFFFFF"/>
                 </a:solidFill>
                 <a:latin typeface="Courier New" pitchFamily="34" charset="0"/>
                 <a:ea typeface="Courier New" pitchFamily="34" charset="-122"/>
@@ -17136,7 +17141,7 @@
             <a:r>
               <a:rPr lang="en-US" sz="1450" b="1" dirty="0">
                 <a:solidFill>
-                  <a:srgbClr val="4038C4"/>
+                  <a:srgbClr val="1B1D23"/>
                 </a:solidFill>
                 <a:latin typeface="Calibri" pitchFamily="34" charset="0"/>
                 <a:ea typeface="Calibri" pitchFamily="34" charset="-122"/>
@@ -17165,9 +17170,14 @@
             </a:avLst>
           </a:prstGeom>
           <a:solidFill>
-            <a:srgbClr val="ECEBFB"/>
+            <a:srgbClr val="FFFFFF"/>
           </a:solidFill>
-          <a:ln/>
+          <a:ln w="12700">
+            <a:solidFill>
+              <a:srgbClr val="E4E6EC"/>
+            </a:solidFill>
+            <a:prstDash val="solid"/>
+          </a:ln>
         </p:spPr>
       </p:sp>
       <p:sp>
@@ -17185,7 +17195,7 @@
             <a:avLst/>
           </a:prstGeom>
           <a:solidFill>
-            <a:srgbClr val="4038C4"/>
+            <a:srgbClr val="1B1D23"/>
           </a:solidFill>
           <a:ln/>
         </p:spPr>
@@ -17217,7 +17227,7 @@
             <a:r>
               <a:rPr lang="en-US" sz="1200" b="1" dirty="0">
                 <a:solidFill>
-                  <a:srgbClr val="ECEBFB"/>
+                  <a:srgbClr val="FFFFFF"/>
                 </a:solidFill>
                 <a:latin typeface="Courier New" pitchFamily="34" charset="0"/>
                 <a:ea typeface="Courier New" pitchFamily="34" charset="-122"/>
@@ -17256,7 +17266,7 @@
             <a:r>
               <a:rPr lang="en-US" sz="1450" b="1" dirty="0">
                 <a:solidFill>
-                  <a:srgbClr val="4038C4"/>
+                  <a:srgbClr val="1B1D23"/>
                 </a:solidFill>
                 <a:latin typeface="Calibri" pitchFamily="34" charset="0"/>
                 <a:ea typeface="Calibri" pitchFamily="34" charset="-122"/>
@@ -17285,9 +17295,14 @@
             </a:avLst>
           </a:prstGeom>
           <a:solidFill>
-            <a:srgbClr val="ECEBFB"/>
+            <a:srgbClr val="FFFFFF"/>
           </a:solidFill>
-          <a:ln/>
+          <a:ln w="12700">
+            <a:solidFill>
+              <a:srgbClr val="E4E6EC"/>
+            </a:solidFill>
+            <a:prstDash val="solid"/>
+          </a:ln>
         </p:spPr>
       </p:sp>
       <p:sp>
@@ -17305,7 +17320,7 @@
             <a:avLst/>
           </a:prstGeom>
           <a:solidFill>
-            <a:srgbClr val="4038C4"/>
+            <a:srgbClr val="1B1D23"/>
           </a:solidFill>
           <a:ln/>
         </p:spPr>
@@ -17337,7 +17352,7 @@
             <a:r>
               <a:rPr lang="en-US" sz="1200" b="1" dirty="0">
                 <a:solidFill>
-                  <a:srgbClr val="ECEBFB"/>
+                  <a:srgbClr val="FFFFFF"/>
                 </a:solidFill>
                 <a:latin typeface="Courier New" pitchFamily="34" charset="0"/>
                 <a:ea typeface="Courier New" pitchFamily="34" charset="-122"/>
@@ -17376,7 +17391,7 @@
             <a:r>
               <a:rPr lang="en-US" sz="1450" b="1" dirty="0">
                 <a:solidFill>
-                  <a:srgbClr val="4038C4"/>
+                  <a:srgbClr val="1B1D23"/>
                 </a:solidFill>
                 <a:latin typeface="Calibri" pitchFamily="34" charset="0"/>
                 <a:ea typeface="Calibri" pitchFamily="34" charset="-122"/>
@@ -17405,9 +17420,14 @@
             </a:avLst>
           </a:prstGeom>
           <a:solidFill>
-            <a:srgbClr val="ECEBFB"/>
+            <a:srgbClr val="FFFFFF"/>
           </a:solidFill>
-          <a:ln/>
+          <a:ln w="12700">
+            <a:solidFill>
+              <a:srgbClr val="E4E6EC"/>
+            </a:solidFill>
+            <a:prstDash val="solid"/>
+          </a:ln>
         </p:spPr>
       </p:sp>
       <p:sp>
@@ -17425,7 +17445,7 @@
             <a:avLst/>
           </a:prstGeom>
           <a:solidFill>
-            <a:srgbClr val="4038C4"/>
+            <a:srgbClr val="1B1D23"/>
           </a:solidFill>
           <a:ln/>
         </p:spPr>
@@ -17457,7 +17477,7 @@
             <a:r>
               <a:rPr lang="en-US" sz="1200" b="1" dirty="0">
                 <a:solidFill>
-                  <a:srgbClr val="ECEBFB"/>
+                  <a:srgbClr val="FFFFFF"/>
                 </a:solidFill>
                 <a:latin typeface="Courier New" pitchFamily="34" charset="0"/>
                 <a:ea typeface="Courier New" pitchFamily="34" charset="-122"/>
@@ -17496,7 +17516,7 @@
             <a:r>
               <a:rPr lang="en-US" sz="1450" b="1" dirty="0">
                 <a:solidFill>
-                  <a:srgbClr val="4038C4"/>
+                  <a:srgbClr val="1B1D23"/>
                 </a:solidFill>
                 <a:latin typeface="Calibri" pitchFamily="34" charset="0"/>
                 <a:ea typeface="Calibri" pitchFamily="34" charset="-122"/>
@@ -17525,9 +17545,14 @@
             </a:avLst>
           </a:prstGeom>
           <a:solidFill>
-            <a:srgbClr val="ECEBFB"/>
+            <a:srgbClr val="FFFFFF"/>
           </a:solidFill>
-          <a:ln/>
+          <a:ln w="12700">
+            <a:solidFill>
+              <a:srgbClr val="E4E6EC"/>
+            </a:solidFill>
+            <a:prstDash val="solid"/>
+          </a:ln>
         </p:spPr>
       </p:sp>
       <p:sp>
@@ -17545,7 +17570,7 @@
             <a:avLst/>
           </a:prstGeom>
           <a:solidFill>
-            <a:srgbClr val="4038C4"/>
+            <a:srgbClr val="1B1D23"/>
           </a:solidFill>
           <a:ln/>
         </p:spPr>
@@ -17577,7 +17602,7 @@
             <a:r>
               <a:rPr lang="en-US" sz="1200" b="1" dirty="0">
                 <a:solidFill>
-                  <a:srgbClr val="ECEBFB"/>
+                  <a:srgbClr val="FFFFFF"/>
                 </a:solidFill>
                 <a:latin typeface="Courier New" pitchFamily="34" charset="0"/>
                 <a:ea typeface="Courier New" pitchFamily="34" charset="-122"/>
@@ -17616,7 +17641,7 @@
             <a:r>
               <a:rPr lang="en-US" sz="1450" b="1" dirty="0">
                 <a:solidFill>
-                  <a:srgbClr val="4038C4"/>
+                  <a:srgbClr val="1B1D23"/>
                 </a:solidFill>
                 <a:latin typeface="Calibri" pitchFamily="34" charset="0"/>
                 <a:ea typeface="Calibri" pitchFamily="34" charset="-122"/>

--- a/docs/decks/L03.pptx
+++ b/docs/decks/L03.pptx
@@ -8343,7 +8343,7 @@
         </p:nvSpPr>
         <p:spPr>
           <a:xfrm>
-            <a:off x="566928" y="4434840"/>
+            <a:off x="566928" y="4937760"/>
             <a:ext cx="11064240" cy="914400"/>
           </a:xfrm>
           <a:prstGeom prst="roundRect">
@@ -8365,7 +8365,7 @@
         </p:nvSpPr>
         <p:spPr>
           <a:xfrm>
-            <a:off x="786384" y="4581144"/>
+            <a:off x="786384" y="5084064"/>
             <a:ext cx="10625328" cy="621792"/>
           </a:xfrm>
           <a:prstGeom prst="rect">

--- a/docs/decks/L03.pptx
+++ b/docs/decks/L03.pptx
@@ -9309,9 +9309,14 @@
             </a:avLst>
           </a:prstGeom>
           <a:solidFill>
-            <a:srgbClr val="141018"/>
+            <a:srgbClr val="F5F4FA"/>
           </a:solidFill>
-          <a:ln/>
+          <a:ln w="12700">
+            <a:solidFill>
+              <a:srgbClr val="E6E7EC"/>
+            </a:solidFill>
+            <a:prstDash val="solid"/>
+          </a:ln>
         </p:spPr>
       </p:sp>
       <p:sp>
@@ -9344,7 +9349,7 @@
             <a:r>
               <a:rPr lang="en-US" sz="1200" dirty="0">
                 <a:solidFill>
-                  <a:srgbClr val="ECE8F6"/>
+                  <a:srgbClr val="23262F"/>
                 </a:solidFill>
                 <a:latin typeface="Courier New" pitchFamily="34" charset="0"/>
                 <a:ea typeface="Courier New" pitchFamily="34" charset="-122"/>
@@ -9361,7 +9366,7 @@
             <a:r>
               <a:rPr lang="en-US" sz="1200" dirty="0">
                 <a:solidFill>
-                  <a:srgbClr val="C3E88D"/>
+                  <a:srgbClr val="177245"/>
                 </a:solidFill>
                 <a:latin typeface="Courier New" pitchFamily="34" charset="0"/>
                 <a:ea typeface="Courier New" pitchFamily="34" charset="-122"/>
@@ -9381,7 +9386,7 @@
             <a:r>
               <a:rPr lang="en-US" sz="1200" dirty="0">
                 <a:solidFill>
-                  <a:srgbClr val="82AAFF"/>
+                  <a:srgbClr val="5A05F4"/>
                 </a:solidFill>
                 <a:latin typeface="Courier New" pitchFamily="34" charset="0"/>
                 <a:ea typeface="Courier New" pitchFamily="34" charset="-122"/>
@@ -9401,7 +9406,7 @@
             <a:r>
               <a:rPr lang="en-US" sz="1200" dirty="0">
                 <a:solidFill>
-                  <a:srgbClr val="ECE8F6"/>
+                  <a:srgbClr val="23262F"/>
                 </a:solidFill>
                 <a:latin typeface="Courier New" pitchFamily="34" charset="0"/>
                 <a:ea typeface="Courier New" pitchFamily="34" charset="-122"/>
@@ -9421,7 +9426,7 @@
             <a:r>
               <a:rPr lang="en-US" sz="1200" dirty="0">
                 <a:solidFill>
-                  <a:srgbClr val="ECE8F6"/>
+                  <a:srgbClr val="23262F"/>
                 </a:solidFill>
                 <a:latin typeface="Courier New" pitchFamily="34" charset="0"/>
                 <a:ea typeface="Courier New" pitchFamily="34" charset="-122"/>
@@ -9441,7 +9446,7 @@
             <a:r>
               <a:rPr lang="en-US" sz="1200" dirty="0">
                 <a:solidFill>
-                  <a:srgbClr val="ECE8F6"/>
+                  <a:srgbClr val="23262F"/>
                 </a:solidFill>
                 <a:latin typeface="Courier New" pitchFamily="34" charset="0"/>
                 <a:ea typeface="Courier New" pitchFamily="34" charset="-122"/>
@@ -21199,9 +21204,14 @@
             </a:avLst>
           </a:prstGeom>
           <a:solidFill>
-            <a:srgbClr val="141018"/>
+            <a:srgbClr val="F5F4FA"/>
           </a:solidFill>
-          <a:ln/>
+          <a:ln w="12700">
+            <a:solidFill>
+              <a:srgbClr val="E6E7EC"/>
+            </a:solidFill>
+            <a:prstDash val="solid"/>
+          </a:ln>
         </p:spPr>
       </p:sp>
       <p:sp>
@@ -21234,7 +21244,7 @@
             <a:r>
               <a:rPr lang="en-US" sz="1100" dirty="0">
                 <a:solidFill>
-                  <a:srgbClr val="82AAFF"/>
+                  <a:srgbClr val="5A05F4"/>
                 </a:solidFill>
                 <a:latin typeface="Courier New" pitchFamily="34" charset="0"/>
                 <a:ea typeface="Courier New" pitchFamily="34" charset="-122"/>
@@ -21254,7 +21264,7 @@
             <a:r>
               <a:rPr lang="en-US" sz="1100" dirty="0">
                 <a:solidFill>
-                  <a:srgbClr val="ECE8F6"/>
+                  <a:srgbClr val="23262F"/>
                 </a:solidFill>
                 <a:latin typeface="Courier New" pitchFamily="34" charset="0"/>
                 <a:ea typeface="Courier New" pitchFamily="34" charset="-122"/>
@@ -21271,7 +21281,7 @@
             <a:r>
               <a:rPr lang="en-US" sz="1100" dirty="0">
                 <a:solidFill>
-                  <a:srgbClr val="C3E88D"/>
+                  <a:srgbClr val="177245"/>
                 </a:solidFill>
                 <a:latin typeface="Courier New" pitchFamily="34" charset="0"/>
                 <a:ea typeface="Courier New" pitchFamily="34" charset="-122"/>
@@ -21291,7 +21301,7 @@
             <a:r>
               <a:rPr lang="en-US" sz="1100" dirty="0">
                 <a:solidFill>
-                  <a:srgbClr val="82AAFF"/>
+                  <a:srgbClr val="5A05F4"/>
                 </a:solidFill>
                 <a:latin typeface="Courier New" pitchFamily="34" charset="0"/>
                 <a:ea typeface="Courier New" pitchFamily="34" charset="-122"/>
@@ -21311,7 +21321,7 @@
             <a:r>
               <a:rPr lang="en-US" sz="1100" dirty="0">
                 <a:solidFill>
-                  <a:srgbClr val="ECE8F6"/>
+                  <a:srgbClr val="23262F"/>
                 </a:solidFill>
                 <a:latin typeface="Courier New" pitchFamily="34" charset="0"/>
                 <a:ea typeface="Courier New" pitchFamily="34" charset="-122"/>
@@ -21331,7 +21341,7 @@
             <a:r>
               <a:rPr lang="en-US" sz="1100" dirty="0">
                 <a:solidFill>
-                  <a:srgbClr val="ECE8F6"/>
+                  <a:srgbClr val="23262F"/>
                 </a:solidFill>
                 <a:latin typeface="Courier New" pitchFamily="34" charset="0"/>
                 <a:ea typeface="Courier New" pitchFamily="34" charset="-122"/>
@@ -21351,7 +21361,7 @@
             <a:r>
               <a:rPr lang="en-US" sz="1100" dirty="0">
                 <a:solidFill>
-                  <a:srgbClr val="ECE8F6"/>
+                  <a:srgbClr val="23262F"/>
                 </a:solidFill>
                 <a:latin typeface="Courier New" pitchFamily="34" charset="0"/>
                 <a:ea typeface="Courier New" pitchFamily="34" charset="-122"/>
@@ -21368,7 +21378,7 @@
             <a:r>
               <a:rPr lang="en-US" sz="1100" dirty="0">
                 <a:solidFill>
-                  <a:srgbClr val="C3E88D"/>
+                  <a:srgbClr val="177245"/>
                 </a:solidFill>
                 <a:latin typeface="Courier New" pitchFamily="34" charset="0"/>
                 <a:ea typeface="Courier New" pitchFamily="34" charset="-122"/>
@@ -21388,7 +21398,7 @@
             <a:r>
               <a:rPr lang="en-US" sz="1100" dirty="0">
                 <a:solidFill>
-                  <a:srgbClr val="82AAFF"/>
+                  <a:srgbClr val="5A05F4"/>
                 </a:solidFill>
                 <a:latin typeface="Courier New" pitchFamily="34" charset="0"/>
                 <a:ea typeface="Courier New" pitchFamily="34" charset="-122"/>
@@ -21405,7 +21415,7 @@
             <a:r>
               <a:rPr lang="en-US" sz="1100" dirty="0">
                 <a:solidFill>
-                  <a:srgbClr val="6A7385"/>
+                  <a:srgbClr val="8A7FA6"/>
                 </a:solidFill>
                 <a:latin typeface="Courier New" pitchFamily="34" charset="0"/>
                 <a:ea typeface="Courier New" pitchFamily="34" charset="-122"/>
@@ -21425,7 +21435,7 @@
             <a:r>
               <a:rPr lang="en-US" sz="1100" dirty="0">
                 <a:solidFill>
-                  <a:srgbClr val="ECE8F6"/>
+                  <a:srgbClr val="23262F"/>
                 </a:solidFill>
                 <a:latin typeface="Courier New" pitchFamily="34" charset="0"/>
                 <a:ea typeface="Courier New" pitchFamily="34" charset="-122"/>
@@ -21445,7 +21455,7 @@
             <a:r>
               <a:rPr lang="en-US" sz="1100" dirty="0">
                 <a:solidFill>
-                  <a:srgbClr val="82AAFF"/>
+                  <a:srgbClr val="5A05F4"/>
                 </a:solidFill>
                 <a:latin typeface="Courier New" pitchFamily="34" charset="0"/>
                 <a:ea typeface="Courier New" pitchFamily="34" charset="-122"/>
@@ -21465,7 +21475,7 @@
             <a:r>
               <a:rPr lang="en-US" sz="1100" dirty="0">
                 <a:solidFill>
-                  <a:srgbClr val="ECE8F6"/>
+                  <a:srgbClr val="23262F"/>
                 </a:solidFill>
                 <a:latin typeface="Courier New" pitchFamily="34" charset="0"/>
                 <a:ea typeface="Courier New" pitchFamily="34" charset="-122"/>
@@ -21485,7 +21495,7 @@
             <a:r>
               <a:rPr lang="en-US" sz="1100" dirty="0">
                 <a:solidFill>
-                  <a:srgbClr val="ECE8F6"/>
+                  <a:srgbClr val="23262F"/>
                 </a:solidFill>
                 <a:latin typeface="Courier New" pitchFamily="34" charset="0"/>
                 <a:ea typeface="Courier New" pitchFamily="34" charset="-122"/>
@@ -21502,7 +21512,7 @@
             <a:r>
               <a:rPr lang="en-US" sz="1100" dirty="0">
                 <a:solidFill>
-                  <a:srgbClr val="6A7385"/>
+                  <a:srgbClr val="8A7FA6"/>
                 </a:solidFill>
                 <a:latin typeface="Courier New" pitchFamily="34" charset="0"/>
                 <a:ea typeface="Courier New" pitchFamily="34" charset="-122"/>
@@ -22773,9 +22783,14 @@
             </a:avLst>
           </a:prstGeom>
           <a:solidFill>
-            <a:srgbClr val="141018"/>
+            <a:srgbClr val="F5F4FA"/>
           </a:solidFill>
-          <a:ln/>
+          <a:ln w="12700">
+            <a:solidFill>
+              <a:srgbClr val="E6E7EC"/>
+            </a:solidFill>
+            <a:prstDash val="solid"/>
+          </a:ln>
         </p:spPr>
       </p:sp>
       <p:sp>
@@ -22808,7 +22823,7 @@
             <a:r>
               <a:rPr lang="en-US" sz="1150" dirty="0">
                 <a:solidFill>
-                  <a:srgbClr val="6A7385"/>
+                  <a:srgbClr val="8A7FA6"/>
                 </a:solidFill>
                 <a:latin typeface="Courier New" pitchFamily="34" charset="0"/>
                 <a:ea typeface="Courier New" pitchFamily="34" charset="-122"/>
@@ -22828,7 +22843,7 @@
             <a:r>
               <a:rPr lang="en-US" sz="1150" dirty="0">
                 <a:solidFill>
-                  <a:srgbClr val="82AAFF"/>
+                  <a:srgbClr val="5A05F4"/>
                 </a:solidFill>
                 <a:latin typeface="Courier New" pitchFamily="34" charset="0"/>
                 <a:ea typeface="Courier New" pitchFamily="34" charset="-122"/>
@@ -22848,7 +22863,7 @@
             <a:r>
               <a:rPr lang="en-US" sz="1150" dirty="0">
                 <a:solidFill>
-                  <a:srgbClr val="ECE8F6"/>
+                  <a:srgbClr val="23262F"/>
                 </a:solidFill>
                 <a:latin typeface="Courier New" pitchFamily="34" charset="0"/>
                 <a:ea typeface="Courier New" pitchFamily="34" charset="-122"/>
@@ -22865,7 +22880,7 @@
             <a:r>
               <a:rPr lang="en-US" sz="1150" dirty="0">
                 <a:solidFill>
-                  <a:srgbClr val="6A7385"/>
+                  <a:srgbClr val="8A7FA6"/>
                 </a:solidFill>
                 <a:latin typeface="Courier New" pitchFamily="34" charset="0"/>
                 <a:ea typeface="Courier New" pitchFamily="34" charset="-122"/>
@@ -22885,7 +22900,7 @@
             <a:r>
               <a:rPr lang="en-US" sz="1150" dirty="0">
                 <a:solidFill>
-                  <a:srgbClr val="ECE8F6"/>
+                  <a:srgbClr val="23262F"/>
                 </a:solidFill>
                 <a:latin typeface="Courier New" pitchFamily="34" charset="0"/>
                 <a:ea typeface="Courier New" pitchFamily="34" charset="-122"/>
@@ -22905,7 +22920,7 @@
             <a:r>
               <a:rPr lang="en-US" sz="1150" dirty="0">
                 <a:solidFill>
-                  <a:srgbClr val="ECE8F6"/>
+                  <a:srgbClr val="23262F"/>
                 </a:solidFill>
                 <a:latin typeface="Courier New" pitchFamily="34" charset="0"/>
                 <a:ea typeface="Courier New" pitchFamily="34" charset="-122"/>
@@ -22925,7 +22940,7 @@
             <a:r>
               <a:rPr lang="en-US" sz="1150" dirty="0">
                 <a:solidFill>
-                  <a:srgbClr val="ECE8F6"/>
+                  <a:srgbClr val="23262F"/>
                 </a:solidFill>
                 <a:latin typeface="Courier New" pitchFamily="34" charset="0"/>
                 <a:ea typeface="Courier New" pitchFamily="34" charset="-122"/>
@@ -22945,7 +22960,7 @@
             <a:r>
               <a:rPr lang="en-US" sz="1150" dirty="0">
                 <a:solidFill>
-                  <a:srgbClr val="C3E88D"/>
+                  <a:srgbClr val="177245"/>
                 </a:solidFill>
                 <a:latin typeface="Courier New" pitchFamily="34" charset="0"/>
                 <a:ea typeface="Courier New" pitchFamily="34" charset="-122"/>
@@ -22965,7 +22980,7 @@
             <a:r>
               <a:rPr lang="en-US" sz="1150" dirty="0">
                 <a:solidFill>
-                  <a:srgbClr val="82AAFF"/>
+                  <a:srgbClr val="5A05F4"/>
                 </a:solidFill>
                 <a:latin typeface="Courier New" pitchFamily="34" charset="0"/>
                 <a:ea typeface="Courier New" pitchFamily="34" charset="-122"/>

--- a/docs/decks/L03.pptx
+++ b/docs/decks/L03.pptx
@@ -525,7 +525,7 @@
           <a:p>
             <a:r>
               <a:rPr lang="en-US" dirty="0"/>
-              <a:t/>
+              <a:t>Вітаю на третьому уроці — і на першому уроці тижня «Routing + cost». Одна модель на все — найдорожчий і найкрихкіший спосіб жити: «як скинути пароль» і розбір скарги на повернення коштів — різні задачі, а платите ви за них однією топовою моделлю. Сьогодні сервіс навчиться обирати модель під задачу. Розберемо конфіг адаптера — побачимо, як дві «моделі» живуть на одному mock і навіщо там drop_params та num_retries: 0. Напишемо роутер — функцію на десять рядків, яка стане єдиною точкою рішення про модель. Побачимо розподіл трафіку в базі — перший операційний доказ, що routing працює. І зрозуміємо, чому додати нового провайдера має коштувати рядків у YAML, а не рефакторингу. А заодно закладемо фундамент тижня 4: система, яка вміє обирати між моделями, — за один крок від системи, яка вміє переживати падіння однієї з них.</a:t>
             </a:r>
             <a:endParaRPr lang="en-US" dirty="0"/>
           </a:p>
@@ -613,7 +613,7 @@
           <a:p>
             <a:r>
               <a:rPr lang="en-US" dirty="0"/>
-              <a:t/>
+              <a:t>Кілька наслідків цієї форми, які варто проговорити наперед. Перший рядок — if (def != "mock") return def. З одним реальним ключем роутер вироджується: щойно MODEL не «mock», функція одразу повертає задану модель, бо другої реальної моделі в конфізі просто немає. Це не «роутинг вимкнули» — це чесний стан контуру з одним провайдером. Повернути маршрутизацію на реальних моделях — це другий блок у YAML gateway і друга гілка в профіль. Тримайте це в голові до фінального уроку: там буде порада «поживіть тиждень на реальному ключі», і без другої моделі головний важіль вартості з уроку 4 на реальному ключі не працює. Далі: Route() — чиста функція, рядок на вході, ім'я моделі на виході. Її можна протестувати без стека, бази і навіть без mock: таблиця «повідомлення → очікувана модель» і десяток assert'ів. Це найдешевші тести курсу — і саме вони рятують, коли хтось «трохи поправить» маркери: зміна політики маршрутизації стає видимою в діфі тестів, а не в рахунку наприкінці місяця. Конфлікти: «дякую, але хочу повернути гроші» містить і подяку, і ескалацію — правило чесно відправить його на strong, бо ескалаційний маркер сильніший. І це правильний дефолт: помилка «переплатили за просте» дешевша за «зекономили на скарзі». І мова: маркери навмисно двомовні — «поверн», «refund». У проді словники розповзаються по мовах і синонімах — саме тоді класифікація інтенту з наступного щабля починає окупатися.</a:t>
             </a:r>
             <a:endParaRPr lang="en-US" dirty="0"/>
           </a:p>
@@ -701,7 +701,7 @@
           <a:p>
             <a:r>
               <a:rPr lang="en-US" dirty="0"/>
-              <a:t/>
+              <a:t>Куди Route() росте в дорослих системах? Три типові щаблі. Правила за ключовими словами — наш сьогоднішній рівень: дешево, прозоро, зрозуміло на розборі; ламається на перефразуваннях. Класифікація інтенту — маленька дешева модель першим кроком визначає тип задачі, і вже тип вирішує маршрут. Парадокс тільки на перший погляд: витратити копійку на класифікацію, щоб зекономити гривню на генерації. Маршрут за контекстом — тенант, фіча, пріоритет клієнта, ліміт бюджету: текст повідомлення — лише один із сигналів. З практики, щоб щаблі не здавалися теорією. В агентній системі, яку я супроводжую, всередині кожного запуску є допоміжна LLM-задача — спланувати пошук по пам'яті розмови. Довго вона їхала на тій самій моделі, що й основна відповідь, — поки окремим свідомим рішенням її не перевели на дешеву: якість планування не змінилася, а це був множник на кожен запуск. Мораль: маршрутизуйте не лише запити користувачів — службові виклики теж трафік, і часто найжирніший. Другий приклад: повідомлення з вкладеним зображенням має їхати на модель, яка вміє бачити, — маршрут за можливістю такий самий законний критерій, як за складністю. І новий вимір: сучасні моделі мають режим мислення — «думай довше за більші гроші». Вибір більше не бінарний: та сама модель у глибокому режимі коштує і триває в рази більше. Правило те саме: дешевий режим — дефолт, дорогий — за явним критерієм, і це рішення теж має лежати в одній точці й потрапляти в лог. Окрема порада: політика маршрутизації має існувати і в одному людському реченні поруч із кодом — код каже «як», речення каже «чому»; губиться зазвичай саме друге.</a:t>
             </a:r>
             <a:endParaRPr lang="en-US" dirty="0"/>
           </a:p>
@@ -789,7 +789,7 @@
           <a:p>
             <a:r>
               <a:rPr lang="en-US" dirty="0"/>
-              <a:t/>
+              <a:t>Маршрутизація виглядає як безкоштовна оптимізація: обрали дешевшу модель — заплатили менше. Але саме рішення теж має ціну, і на певному рівні складності воно починає з'їдати ту економію, за якою ви йшли. Правила і маркери в тексті — частки мілісекунди, нуль токенів: доречні, поки класів мало і вони описуються словником. Це наш випадок. Дешева модель-класифікатор — це додатковий виклик: своя латентність і свої токени. Доречна, коли словники розповзлися по мовах і синонімах, а класів більше трьох. Класифікація за схожістю, embeddings, — виклик за векторами плюс сховище й індекс: коли класів десятки і вони змінюються без релізу. Арифметика, яку варто зробити до впровадження другого рядка: якщо класифікатор додає, скажімо, 300 мс до кожного запиту, ви щойно погіршили latency всім користувачам — включно з тими, чиї запити й так ішли на дешеву модель. І якщо він коштує токенів, економія від правильного маршруту мусить перевищити вартість самого рішення — інакше ви побудували складність, яка платить сама собі. Звідси принцип: рішення про модель — теж виклик, теж латентність, теж гроші. Починайте з найдешевшого способу, який закриває поточні класи, і рухайтеся вгору лише тоді, коли зміряли, що дешевший більше не працює.</a:t>
             </a:r>
             <a:endParaRPr lang="en-US" dirty="0"/>
           </a:p>
@@ -877,7 +877,7 @@
           <a:p>
             <a:r>
               <a:rPr lang="en-US" dirty="0"/>
-              <a:t/>
+              <a:t>Друга властивість, про яку згадують після першої скарги: маршрут має бути стабільним для користувача, а не для окремого запиту. Уявіть розмову, де перше питання пішло на сильну модель, друге — на дешеву, третє знову на сильну: людина бачить, як співрозмовник то розумніє, то тупіє, то міняє тон і довжину відповідей. Формально кожен окремий вибір був правильний. Сумарно — досвід зламаний. Лікування нехитре: якщо маршрут не диктується самою задачею — ескалація завжди їде на сильну модель, — тримайте його стабільним у межах сесії. Наприклад, обирайте за хешем ідентифікатора розмови, а не заново на кожну репліку. І зверніть увагу: це той самий механізм, який знадобиться для A/B промптів з уроку 2 і для canary з уроку 11. Стабільний вибір за ключем користувача — базова операція, яку варто написати один раз. Типова помилка тут — роутинг за випадковим числом, «щоб рівномірно розподілити». Рівномірність ви отримаєте, а разом із нею — систему, поведінка якої не відтворюється: та сама людина з тим самим питанням двічі отримує різні відповіді, і жодна скарга не діагностується. Випадковість у виборі моделі допустима лише там, де ви свідомо міряєте — експеримент, — і навіть там ключем має бути користувач, а не запит.</a:t>
             </a:r>
             <a:endParaRPr lang="en-US" dirty="0"/>
           </a:p>
@@ -965,7 +965,7 @@
           <a:p>
             <a:r>
               <a:rPr lang="en-US" dirty="0"/>
-              <a:t/>
+              <a:t>Найчастіше заперечення до цього уроку: «у нас один провайдер і одна модель, роутинг не про нас». Насправді роутинг — це не про вибір моделі, а про одну точку, де ухвалюється рішення про виклик. Модель — лише один із параметрів цього рішення, і навіть із однією моделлю обирати є що. Max_tokens: коротка відповідь на FAQ, довга на скаргу — стеля вартості на клас запиту, а не на всю систему. Temperature: мінімальна для довідкових відповідей, вища для формулювань — передбачуваність там, де вона потрібна. Версія промпта: ескалації — свій промпт, FAQ — свій; той самий реєстр з уроку 2, без нових механізмів. Набір інструментів: read-only для загальних питань, повний для авторизованих — менша поверхня для injection, урок 8. Бюджет часу: жорсткий таймаут для інтерактивних, вільніший для фонових — latency під очікування користувача, урок 7. І режим мислення: увімкнений лише для складних класів — найдорожчий параметр у сучасних API не для FAQ. Тобто Route() віддає не «назву моделі», а профіль виклику. Коли з'явиться друга модель, до профілю додасться ще одне поле — і жоден інший шар системи цього не помітить. Саме тому одна точка рішення важливіша за сам вибір: вона перетворює десяток розкиданих if-ів у структуру, в якій видно всі рішення разом. Мінімальний корисний роутер існує навіть при одній моделі: він розводить FAQ і скарги за довжиною відповіді й версією промпта — і вже цим економить гроші і прибирає «чому бот раптом розписався на три абзаци».</a:t>
             </a:r>
             <a:endParaRPr lang="en-US" dirty="0"/>
           </a:p>
@@ -1053,7 +1053,7 @@
           <a:p>
             <a:r>
               <a:rPr lang="en-US" dirty="0"/>
-              <a:t/>
+              <a:t>Поруч із питанням «куди йде запит» живе питання «хто підхопить, якщо основна модель впала». Це теж політика, і задається вона тим самим набором імен з конфіга. Для нашого стека природний порядок — mock-strong, потім mock-mini: у разі збою сильної моделі краще відповісти дешевшою, ніж не відповісти взагалі. Маленьке чесне попередження наперед: на mock резервного провайдера фізично немає, тож у коді тижня 4 роль резерву зіграє той самий mock — політика лишиться вашою, зміниться лише те, хто її втілює. Сьогодні ми цю чергу лише фіксуємо як рішення — записуємо поруч із роутером, обговорюємо з командою. Оживе вона на тижні 4, коли з'явиться механізм fallback і керовані збої. Порядок не випадковий: політика без механізму — це просто текст, але механізм без заздалегідь продуманої політики — це імпровізація під час інциденту, тобто найгірший момент для ухвалення рішень. І практична зв'язка: routing і fallback користуються одним словником імен з конфіга адаптера. Кожна зміна в наборі моделей — додали tier, перейменували, вивели з експлуатації — має пройти по обох списках одночасно. Ім'я, яке живе в роутері, але зникло з конфіга, — помилка на першому ж запиті; ім'я у fallback-черзі, якого ніхто не тестував, — помилка рівно в момент інциденту, коли вона найдорожча.</a:t>
             </a:r>
             <a:endParaRPr lang="en-US" dirty="0"/>
           </a:p>
@@ -1141,7 +1141,7 @@
           <a:p>
             <a:r>
               <a:rPr lang="en-US" dirty="0"/>
-              <a:t/>
+              <a:t>Перевірка, що архітектура зібрана правильно: скільки коштує підключити реального провайдера — наприклад, хмарний деплой тієї ж моделі? Відповідь — один блок у YAML. І, якщо хочемо пустити на нього трафік, — рядок у Route() або у fallback-порядку. Код виклику, парсинг відповіді, логування — не змінюються взагалі: для сервісу це просто ще одне ім'я моделі. Ключ, зверніть увагу, живе у змінних середовища gateway — рівно за принципом з уроку 1: секрети не перетинають межу адаптера. І лайфхак, який окупається при першому ж переїзді: називайте моделі в конфізі за роллю — mini, strong, — а не за вендором. Тоді «переїхати з провайдера А на провайдера Б» — це заміна правої частини YAML при незмінних іменах, і жоден рядок сервісу, лога чи дашборда не дізнається про переїзд.</a:t>
             </a:r>
             <a:endParaRPr lang="en-US" dirty="0"/>
           </a:p>
@@ -1229,7 +1229,7 @@
           <a:p>
             <a:r>
               <a:rPr lang="en-US" dirty="0"/>
-              <a:t/>
+              <a:t>Це опційний блок — і він же опційна частина ДЗ тижня 2. Два маршрути — мінімум, з якого все починається; наступний природний крок — три рівні замість двох. FAQ-tier — типові питання: найдешевша модель або взагалі заготовлені відповіді. Standard-tier — звичайний діалог: робоча модель. Escalation-tier — скарги, повернення, юридично чутливе: найсильніша модель. Механічно це ще одна гілка в Route() і ще одне ім'я в конфізі — після сьогоднішнього уроку ви вмієте і те, і те. Змістовно — вправа на політику: де провести межі між рівнями і як сформулювати їх так, щоб рішення можна було захистити цифрами. Частка трафіку і вартість кожного tier — усе вже є в лозі. Почніть із розподілу SELECT model, count(*) за кілька днів: якщо 80% трафіку — три однакові питання, FAQ-tier окупається одразу.</a:t>
             </a:r>
             <a:endParaRPr lang="en-US" dirty="0"/>
           </a:p>
@@ -1317,7 +1317,7 @@
           <a:p>
             <a:r>
               <a:rPr lang="en-US" dirty="0"/>
-              <a:t/>
+              <a:t>Перш ніж перейти до екрана — що саме ви зараз побачите і навіщо. Послідовність така: спершу конфіг gateway — дві «моделі», mock-mini і mock-strong, на одному mock. Потім Route() у сервісі — та сама функція на десять рядків, точка рішення. Далі кілька питань обох типів: звичайні — «як скинути пароль» — і ескалації — «поверніть гроші, терміново». І нарешті розподіл у базі: SELECT model, count(*) FROM requests GROUP BY model — дві моделі, різні лічильники. Навіщо це все: побачити перший операційний доказ, що routing працює. Не «код написаний», а «трафік розведений» — різниця між цими двома формулюваннями і є темою сьогоднішнього уроку. [Ведучому: демо йде на бранчі еталона тижня 2; перед записом — down -v і свіжий up. Українські ескалації на Windows/Git Bash не вводити інлайном у curl — кирилиця манглиться навіть після chcp 65001, інтент не матчиться і роутер виглядає зламаним при здоровій системі: тіло з файлу (--data-binary @body.json) або чат в UI. Після up дочекатися готовності gateway (health-ендпоінт або ~30 с): до готовності запити падають тихо — status=0, нульові токени. Перший запит після up — повільний: зробити прогрівний запит службовим повідомленням поза демо. Порти 4200/8080/4000/5432 мають бути вільні; якщо ні — файл зсунутих портів у стартері.]</a:t>
             </a:r>
             <a:endParaRPr lang="en-US" dirty="0"/>
           </a:p>
@@ -1405,7 +1405,7 @@
           <a:p>
             <a:r>
               <a:rPr lang="en-US" dirty="0"/>
-              <a:t/>
+              <a:t>Крок перший: прочитати конфіг. Відкрити gateway/litellm-config.yaml, знайти mock-mini і mock-strong, переконатися, що обидві дивляться на той самий mock. Звернути увагу на drop_params і num_retries: 0 — і пояснити собі, навіщо вони. Крок другий: написати роутер. Додати Route(message) у сервіс: ескалаційні маркери — «поверн», «терміново», «скарг», «refund» — ідуть на mock-strong, решта — на mock-mini. Жорсткий MODEL лишити тільки як дефолт для реального ключа. Крок третій: побачити розподіл. Надіслати кілька звичайних питань і кілька ескалацій. Увага: українські ескалації на Windows/Git Bash шліть тілом із файлу — --data @body.json — або через чат в UI: інлайнова кирилиця в curl псується, маркери не спрацюють, і роутер виглядатиме зламаним, хоч він здоровий. Потім SELECT model, count(*) FROM requests GROUP BY model — дві моделі, різні лічильники. Це перший операційний доказ, що routing працює: не «код написаний», а «трафік розведений». Крок четвертий: додати «третього провайдера» на папері. Виписати YAML-блок для хмарного провайдера і місце, де він став би у fallback-порядку. Переконатися, що код сервісу не змінився б узагалі — у цьому й сенс адаптера. І опційний п'ятий: накидати tier-політику — сформулювати межі трьох рівнів для свого трафіку і прикинути по лозі, яка частка запитів впаде в кожен.</a:t>
             </a:r>
             <a:endParaRPr lang="en-US" dirty="0"/>
           </a:p>
@@ -1493,7 +1493,7 @@
           <a:p>
             <a:r>
               <a:rPr lang="en-US" dirty="0"/>
-              <a:t/>
+              <a:t>Домовимось про результат уроку — конкретними діями, а не «зрозуміти» чи «ознайомитись». Після сьогоднішнього заняття ви зможете: написати Route() — роутер на десять рядків, який розводить ескалації і звичайні питання по двох моделях; довести в базі, що routing працює, — одним SQL-запитом побачити дві моделі з різними лічильниками; пояснити, чому рішення про модель живе в сервісі, а виконання виклику — в адаптері, і чим це відрізняється від галочки в конфізі інструмента; додати нового провайдера одним блоком у YAML — без жодної зміни коду сервісу; розрізнити alias і snapshot у назві моделі та пояснити, чому в production модель пінять; і сформулювати fallback-порядок — політику, яка оживе механізмом на тижні 4. Кожен пункт ви перевірите руками ще сьогодні — у лабораторній.</a:t>
             </a:r>
             <a:endParaRPr lang="en-US" dirty="0"/>
           </a:p>
@@ -1581,7 +1581,7 @@
           <a:p>
             <a:r>
               <a:rPr lang="en-US" dirty="0"/>
-              <a:t/>
+              <a:t>Зафіксуємо, що ми щойно побачили — і що це доводить. Перше: трафік реально розведений. SELECT model, count(*) показує дві моделі з різними лічильниками — це операційний доказ, а не «код написаний». Механіка маршрутизації справжня, навіть якщо обидва імені поки дивляться на той самий mock. Друге: рішення читається. Уся політика — в одній функції на десять рядків, і кожен її вибір — задокументована подія в лозі. Ви можете за хвилину пояснити, чому конкретний запит пішов на конкретну модель, — а це і був критерій з принципу уроку: інакше не маршрутизація, а лотерея з логами. Третє: розширення дешеве. «Третій провайдер» на папері зайняв один YAML-блок і жодного рядка коду сервісу — межа «сервіс вирішує, адаптер виконує» тримається не на словах, а на архітектурі. Разом ці три картинки — фундамент тижня: наступного уроку на це саме поле model ляже вартість кожного запиту, і розподіл трафіку перетвориться на розподіл грошей.</a:t>
             </a:r>
             <a:endParaRPr lang="en-US" dirty="0"/>
           </a:p>
@@ -1669,7 +1669,7 @@
           <a:p>
             <a:r>
               <a:rPr lang="en-US" dirty="0"/>
-              <a:t/>
+              <a:t>Перш ніж розійтися — чесна перевірка, без оцінок. Чотири пункти обов'язкової доріжки. Перший: routing розводить запити по двох моделях, і це видно в БД — не «я написав функцію», а «SELECT показує дві моделі з різними лічильниками». Другий: можу пояснити, чому рішення живе в сервісі, а виконання — в адаптері. Це головна межа архітектури, і сьогодні вона вперше запрацювала по-справжньому. Третій: можу пояснити, як додати реального провайдера без зміни коду сервісу — один блок у YAML, рядок у роутері, ключ у змінних середовища gateway. Четвертий: fallback-порядок сформульований і записаний — одним рядком, поруч із роутером. Він чекає на тиждень 4, коли з'явиться механізм. Якщо всі чотири пункти — «так», ви готові до наступного уроку. Де завагалися — туди і повертайтеся в матеріалі. Питання, які лишилися, — несіть у канал потоку або на Q&amp;A.</a:t>
             </a:r>
             <a:endParaRPr lang="en-US" dirty="0"/>
           </a:p>
@@ -1757,7 +1757,7 @@
           <a:p>
             <a:r>
               <a:rPr lang="en-US" dirty="0"/>
-              <a:t/>
+              <a:t>Чотири способи зіпсувати собі тиждень маршрутизації — всі перевірені чужими граблями. Топова модель на весь трафік «щоб напевно»: «напевно» коштує порядок грошей і не дає жодної гарантії якості на простих задачах — ми бачили це в першому блоці. Routing і fallback у конфізі gateway'я: воно працює — але ви збудували не механізм, а залежність від прапорців конкретного інструмента. Через півроку ніхто не пояснить, чому запит пішов саме туди. Слати всім провайдерам однаковий запит і дивуватися різним помилкам: провайдери «сумісні за стандартом», але розходяться в дрібницях. Нормалізація — робота адаптера; переконайтеся, що вона увімкнена, а не понадіялися на стандарт. І хардкод назв моделей по всьому коду: ім'я моделі має зустрічатися в сервісі один раз — у точці рішення. Все інше — розповзання політики по кодовій базі, і кожна зміна набору моделей перетворюється на пошук по всіх файлах.</a:t>
             </a:r>
             <a:endParaRPr lang="en-US" dirty="0"/>
           </a:p>
@@ -1845,7 +1845,7 @@
           <a:p>
             <a:r>
               <a:rPr lang="en-US" dirty="0"/>
-              <a:t/>
+              <a:t>Обов'язково — до наступного уроку, без здачі. Перше: закріпити лабу — роутер працює, SELECT model, count(*) FROM requests GROUP BY model показує дві моделі. Друге: переконатися, що жорстке ім'я моделі лишилося тільки в одному місці — у точці рішення. Третє: записати свій fallback-порядок одним рядком — він знадобиться на тижні 4. Опційно: сформулювати tier-політику на три рівні і оцінити по лозі частку трафіку кожного — це та сама вправа з опційного блоку уроку. І про ДЗ тижня: воно здається після наступного уроку. ДЗ тижня 2 об'єднує routing і cost: сьогоднішня частина вже у вас в руках, після уроку 4 додасться облік вартості — і тиждень здається одним PR. Критерії приймання будуть у файлі ДЗ після наступного уроку.</a:t>
             </a:r>
             <a:endParaRPr lang="en-US" dirty="0"/>
           </a:p>
@@ -1933,7 +1933,7 @@
           <a:p>
             <a:r>
               <a:rPr lang="en-US" dirty="0"/>
-              <a:t/>
+              <a:t>Підсумуємо. Дешеве — дешевій моделі, складне — сильній, і кожне рішення задокументоване: якщо ви не можете за хвилину пояснити, чому запит пішов на цю модель, у вас не маршрутизація, а лотерея з логами. Сервіс вирішує, адаптер виконує: політика маршрутизації — це код у Route(), який можна прочитати і протестувати, а нормалізація розбіжностей провайдерів — конфіг адаптера. Назва моделі — не константа: alias оновлюється під вами без вашого коміта, тому в production-конфізі стоїть snapshot, а оновлення — окрема свідома зміна. Route() віддає не назву моделі, а профіль виклику — і тому одна точка рішення важливіша за сам вибір: вона працює навіть тоді, коли модель одна. І fallback-порядок ви сьогодні оголосили й записали — механізм для нього з'явиться на тижні 4. Наступний урок — токеноміка і cost attribution. Routing розвів трафік по моделях — а скільки це коштує? Поки що поле cost_usd у лозі порожнє, і на питання «скільки коштує наш AI» система відповідає мовчанням. Розберемо, як рахувати вартість кожного запиту в момент запиту, оживимо плитку «Вартість сьогодні» і повісимо бюджет — щоб про перевитрату ви дізнавалися з консолі, а не з рахунку наприкінці місяця. До зустрічі.</a:t>
             </a:r>
             <a:endParaRPr lang="en-US" dirty="0"/>
           </a:p>
@@ -2021,7 +2021,7 @@
           <a:p>
             <a:r>
               <a:rPr lang="en-US" dirty="0"/>
-              <a:t/>
+              <a:t>Маршрут такий. Спершу проблема: три біди однієї моделі — гроші, залежність від одного провайдера і несумісність у дрібницях. Далі межа відповідальності з уроку 1, яка сьогодні вперше працює по-справжньому: сервіс вирішує, адаптер виконує. Потім розтин конфіга адаптера — дві «моделі» на одному mock і чому назва моделі — не константа: alias проти snapshot. Центральний блок — Route(): роутер на десять рядків, одна точка рішення. Після нього — куди ця функція росте: маршрут за задачею, ціна самого рішення, стабільність маршруту для користувача. Далі fallback-порядок — політика, яку ми сьогодні лише оголосимо, і перевірка архітектури: додати провайдера без зміни коду. Опційний блок — tier-система на три рівні. І класика: лабораторна, антипатерни тижня, домашнє завдання. [Ведучому: демо цього уроку йде на бранчі еталона тижня 2; перед показом — свіжий стан стека.]</a:t>
             </a:r>
             <a:endParaRPr lang="en-US" dirty="0"/>
           </a:p>
@@ -2109,7 +2109,7 @@
           <a:p>
             <a:r>
               <a:rPr lang="en-US" dirty="0"/>
-              <a:t/>
+              <a:t>Домовимось про шість слів. Gateway-адаптер — єдиний вихід із нашої системи до провайдерів: він виконує виклик, згладжує розбіжності їхніх API і тримає ключі. Роутер, у нас це функція Route, — точка рішення в сервісі: приймає повідомлення і повертає ім'я моделі. Alias — рухома назва моделі на кшталт «остання версія сімейства»: зручно, але змінюється під вами. Snapshot — зафіксована версія з датою чи ідентифікатором: не змінюється, але й не оновлюється сама. Fallback-порядок — оголошена черга «якщо ця модель недоступна, пробуємо наступну»; сьогодні ми її лише запишемо, механізм з'явиться на тижні 4. І tier — рівень обслуговування: набір правил «які питання яку модель отримують», опційна частина уроку. Ці слова звучатимуть постійно — далі розберемо кожне на місці.</a:t>
             </a:r>
             <a:endParaRPr lang="en-US" dirty="0"/>
           </a:p>
@@ -2197,7 +2197,7 @@
           <a:p>
             <a:r>
               <a:rPr lang="en-US" dirty="0"/>
-              <a:t/>
+              <a:t>Чому «одна модель на все» — погана ідея? Три біди. Перша — гроші. «Як скинути пароль?» і розбір скарги на повернення коштів — різні задачі, але платите ви за них однією топовою моделлю. На масовому трафіку підтримки різниця між дешевою і сильною моделлю — це порядок вартості: не «трохи дорожче», а вдесятеро. Ганяти FAQ через флагманську модель — все одно що викликати таксі бізнес-класу, щоб винести сміття. Друга — залежність. Один провайдер — це одна точка відмови, яка вам не належить. Ліміти запитів, деградації, зміни API трапляються регулярно і, за законом жанру, у ваш найгірший момент. Поки модель одна, будь-яка її проблема — проблема всієї системи, і плану Б не існує навіть теоретично. Третя, про яку рідко попереджають, — несумісність у дрібницях. Провайдери «сумісні за стандартом», але розходяться в деталях: одне й те саме поле конфігурації один приймає, інший відкидає з помилкою. З практики: я бачив, як цілий канал ліг просто тому, що апстрім відхиляв поле, яке «мало бути валідним», — а клієнтський код слав його всім однаково. Хтось у ланцюгу має згладжувати ці розбіжності — і це точно не ваш прикладний код.</a:t>
             </a:r>
             <a:endParaRPr lang="en-US" dirty="0"/>
           </a:p>
@@ -2285,7 +2285,7 @@
           <a:p>
             <a:r>
               <a:rPr lang="en-US" dirty="0"/>
-              <a:t/>
+              <a:t>З уроку 1 у нас є головна межа архітектури: вирішує сервіс, виконує адаптер. Сьогодні ця межа вперше працює по-справжньому. LiteLLM-адаптер дає єдиний виклик до десятків провайдерів: ваш код каже «виклич модель X» — і не знає, що в X інший формат помилок, інша автентифікація чи інший ліміт на поля. Нормалізація цих розбіжностей — робота адаптера, і саме тому третя біда з попереднього блоку лікується конфігом, а не патчами по всьому коду. А от рішення, яку модель викликати, живе в сервісі — свідомо. LiteLLM уміє і роутити, і фейлитись сам, через свій конфіг. Ми це не вмикаємо, і це принципова позиція курсу, а не обмеження інструмента. Рішення — це код: його можна прочитати, протестувати, залогувати і пояснити на розборі інциденту. Конфіг стороннього інструмента — це рішення, яке ви орендуєте: воно працює, поки ви користуєтесь цим інструментом, і зникає з переходом на інший. Механізми переносяться, прапорці — ні. І типова помилка: побачити в документації адаптера розділ про routing і fallback — і перенести туди все. Через півроку ніхто в команді не може відповісти, чому запит пішов саме на цю модель: логіка розмазана між YAML, дефолтами інструмента і його версією.</a:t>
             </a:r>
             <a:endParaRPr lang="en-US" dirty="0"/>
           </a:p>
@@ -2373,7 +2373,7 @@
           <a:p>
             <a:r>
               <a:rPr lang="en-US" dirty="0"/>
-              <a:t/>
+              <a:t>Відкриймо конфіг gateway — gateway/litellm-config.yaml. Перший рядок коментаря задає тон: «тут лише список моделей і ключі». Ось робочий фрагмент тижня. mock-mini і mock-strong — обидві вказують на той самий mock-провайдер. Це не халтура, а навчальний прийом: механіка маршрутизації справжня — сервіс реально обирає між двома іменами, база реально показує розподіл, — а рахунок нульовий. Коли з'явиться реальний ключ, зміняться лише праві частини цього YAML. Дві дрібниці в litellm_settings варті окремого погляду. Перша: drop_params: true — адаптер мовчки відкидає поля, які конкретний провайдер не приймає. Це і є та сама страховка від «валідного поля, що кладе канал» з блоку 01. Друга: num_retries: 0 — адаптер не ретраїть збої сам: помилка долітає до сервісу, який вирішує, що з нею робити. Приховані ретраї — це рішення, які хтось ухвалює за вас і без сліду в лозі. Зверніть увагу, як обидва налаштування працюють на ту саму межу: нормалізацію робить адаптер, а рішення лишаються сервісу.</a:t>
             </a:r>
             <a:endParaRPr lang="en-US" dirty="0"/>
           </a:p>
@@ -2461,7 +2461,7 @@
           <a:p>
             <a:r>
               <a:rPr lang="en-US" dirty="0"/>
-              <a:t/>
+              <a:t>У конфізі ви пишете назву моделі — і виглядає це як стабільна константа. Насправді назви бувають двох різних сортів, і різницю варто знати до першого сюрпризу. Alias — умовно «остання версія сімейства». Зручний тим, що ви автоматично отримуєте покращення, — і небезпечний тим самим: постачальник оновлює модель за цією назвою, і поведінка вашої системи змінюється без жодного вашого коміта. Snapshot — конкретна зафіксована версія з датою чи ідентифікатором. Вона не змінюється під вами, але й не оновлюється сама, і колись її виведуть з обігу. Для production-контуру правило однозначне: у конфізі стоїть snapshot, а оновлення до нового — окрема свідома зміна, яка проходить через ті самі перевірки якості, що й зміна промпта — уроки 10 і 11. Інакше ви отримуєте «регресію без коміта» з уроку 2, тільки цього разу винуватець узагалі поза вашою організацією: git чистий, промпт не змінювався, а відповіді інші. У нашому конфізі ви побачите саме alias'и — і це свідомо: реальний ключ у курсі опційний, механіку ми перевіряємо на mock, а поруч стоїть коментар із прикладом запіненого снапшота. Коли ваша система піде на справжнього провайдера, це перше, що варто змінити. І практичний наслідок для лога: у полі model має стояти те, що реально обслужило запит, включно з версією снапшота. «Gpt-подібна модель» у звіті через три місяці не скаже нічого, а «модель X, снапшот від дати Y» дозволяє порівняти два періоди.</a:t>
             </a:r>
             <a:endParaRPr lang="en-US" dirty="0"/>
           </a:p>
@@ -2549,7 +2549,7 @@
           <a:p>
             <a:r>
               <a:rPr lang="en-US" dirty="0"/>
-              <a:t/>
+              <a:t>Уся сьогоднішня «магія» в сервісі — одна функція і один рядок у /chat. Прочитаймо її як операційне рішення, а не як код. Перше: жорстка змінна MODEL зникла зі шляху рішення — вона лишилася тільки дефолтом для сценарію з реальним ключем. Друге: політика явна і вміщається в одне речення — «повернення, скарги і термінове йдуть на сильну модель, решта — на дешеву». Третє: обрана модель уже їде в лог — поле model пишеться з першого дня, тобто кожне рішення роутера — задокументована подія, яку можна порахувати. Так, це правила по ключових словах, і на проді ви швидко впретеся в їхні межі. Але зверніть увагу, що саме тут важливо: не спосіб класифікації, а те, що в системі з'явилася одна точка, де ухвалюється рішення про модель. Помінявши нутрощі Route(), ви не чіпаєте більше нічого.</a:t>
             </a:r>
             <a:endParaRPr lang="en-US" dirty="0"/>
           </a:p>
@@ -3782,7 +3782,7 @@
         </p:nvSpPr>
         <p:spPr>
           <a:xfrm>
-            <a:off x="1280160" y="1024128"/>
+            <a:off x="1280160" y="1193140"/>
             <a:ext cx="777240" cy="256032"/>
           </a:xfrm>
           <a:prstGeom prst="roundRect">
@@ -3804,7 +3804,7 @@
         </p:nvSpPr>
         <p:spPr>
           <a:xfrm>
-            <a:off x="1280160" y="1024128"/>
+            <a:off x="1280160" y="1193140"/>
             <a:ext cx="777240" cy="256032"/>
           </a:xfrm>
           <a:prstGeom prst="rect">
@@ -3861,7 +3861,7 @@
       </p:pic>
       <p:sp>
         <p:nvSpPr>
-          <p:cNvPr id="7" name="Shape 4"/>
+          <p:cNvPr id="8" name="Shape 4"/>
           <p:cNvSpPr/>
           <p:nvPr/>
         </p:nvSpPr>
@@ -3883,7 +3883,7 @@
       </p:sp>
       <p:sp>
         <p:nvSpPr>
-          <p:cNvPr id="8" name="Shape 5"/>
+          <p:cNvPr id="9" name="Shape 5"/>
           <p:cNvSpPr/>
           <p:nvPr/>
         </p:nvSpPr>
@@ -3903,7 +3903,7 @@
       </p:sp>
       <p:sp>
         <p:nvSpPr>
-          <p:cNvPr id="9" name="Text 6"/>
+          <p:cNvPr id="10" name="Text 6"/>
           <p:cNvSpPr/>
           <p:nvPr/>
         </p:nvSpPr>
@@ -3942,7 +3942,7 @@
       </p:sp>
       <p:sp>
         <p:nvSpPr>
-          <p:cNvPr id="10" name="Text 7"/>
+          <p:cNvPr id="11" name="Text 7"/>
           <p:cNvSpPr/>
           <p:nvPr/>
         </p:nvSpPr>
@@ -3981,7 +3981,7 @@
       </p:sp>
       <p:sp>
         <p:nvSpPr>
-          <p:cNvPr id="11" name="Text 8"/>
+          <p:cNvPr id="12" name="Text 8"/>
           <p:cNvSpPr/>
           <p:nvPr/>
         </p:nvSpPr>
@@ -4023,7 +4023,7 @@
       </p:sp>
       <p:sp>
         <p:nvSpPr>
-          <p:cNvPr id="12" name="Shape 9"/>
+          <p:cNvPr id="13" name="Shape 9"/>
           <p:cNvSpPr/>
           <p:nvPr/>
         </p:nvSpPr>
@@ -4050,7 +4050,7 @@
       </p:sp>
       <p:sp>
         <p:nvSpPr>
-          <p:cNvPr id="13" name="Shape 10"/>
+          <p:cNvPr id="14" name="Shape 10"/>
           <p:cNvSpPr/>
           <p:nvPr/>
         </p:nvSpPr>
@@ -4070,7 +4070,7 @@
       </p:sp>
       <p:sp>
         <p:nvSpPr>
-          <p:cNvPr id="14" name="Text 11"/>
+          <p:cNvPr id="15" name="Text 11"/>
           <p:cNvSpPr/>
           <p:nvPr/>
         </p:nvSpPr>
@@ -4109,7 +4109,7 @@
       </p:sp>
       <p:sp>
         <p:nvSpPr>
-          <p:cNvPr id="15" name="Text 12"/>
+          <p:cNvPr id="16" name="Text 12"/>
           <p:cNvSpPr/>
           <p:nvPr/>
         </p:nvSpPr>
@@ -4148,7 +4148,7 @@
       </p:sp>
       <p:sp>
         <p:nvSpPr>
-          <p:cNvPr id="16" name="Text 13"/>
+          <p:cNvPr id="17" name="Text 13"/>
           <p:cNvSpPr/>
           <p:nvPr/>
         </p:nvSpPr>
@@ -4190,7 +4190,7 @@
       </p:sp>
       <p:sp>
         <p:nvSpPr>
-          <p:cNvPr id="17" name="Shape 14"/>
+          <p:cNvPr id="18" name="Shape 14"/>
           <p:cNvSpPr/>
           <p:nvPr/>
         </p:nvSpPr>
@@ -4212,7 +4212,7 @@
       </p:sp>
       <p:sp>
         <p:nvSpPr>
-          <p:cNvPr id="18" name="Shape 15"/>
+          <p:cNvPr id="19" name="Shape 15"/>
           <p:cNvSpPr/>
           <p:nvPr/>
         </p:nvSpPr>
@@ -4232,7 +4232,7 @@
       </p:sp>
       <p:sp>
         <p:nvSpPr>
-          <p:cNvPr id="19" name="Text 16"/>
+          <p:cNvPr id="20" name="Text 16"/>
           <p:cNvSpPr/>
           <p:nvPr/>
         </p:nvSpPr>
@@ -4271,7 +4271,7 @@
       </p:sp>
       <p:sp>
         <p:nvSpPr>
-          <p:cNvPr id="20" name="Text 17"/>
+          <p:cNvPr id="21" name="Text 17"/>
           <p:cNvSpPr/>
           <p:nvPr/>
         </p:nvSpPr>
@@ -4310,7 +4310,7 @@
       </p:sp>
       <p:sp>
         <p:nvSpPr>
-          <p:cNvPr id="21" name="Text 18"/>
+          <p:cNvPr id="22" name="Text 18"/>
           <p:cNvSpPr/>
           <p:nvPr/>
         </p:nvSpPr>
@@ -4352,7 +4352,7 @@
       </p:sp>
       <p:sp>
         <p:nvSpPr>
-          <p:cNvPr id="22" name="Shape 19"/>
+          <p:cNvPr id="23" name="Shape 19"/>
           <p:cNvSpPr/>
           <p:nvPr/>
         </p:nvSpPr>
@@ -4374,7 +4374,7 @@
       </p:sp>
       <p:sp>
         <p:nvSpPr>
-          <p:cNvPr id="23" name="Text 20"/>
+          <p:cNvPr id="24" name="Text 20"/>
           <p:cNvSpPr/>
           <p:nvPr/>
         </p:nvSpPr>
@@ -4413,7 +4413,7 @@
       </p:sp>
       <p:sp>
         <p:nvSpPr>
-          <p:cNvPr id="24" name="Text 21"/>
+          <p:cNvPr id="25" name="Text 21"/>
           <p:cNvSpPr/>
           <p:nvPr/>
         </p:nvSpPr>
@@ -4619,7 +4619,7 @@
         </p:nvSpPr>
         <p:spPr>
           <a:xfrm>
-            <a:off x="1280160" y="1024128"/>
+            <a:off x="1280160" y="1193140"/>
             <a:ext cx="777240" cy="256032"/>
           </a:xfrm>
           <a:prstGeom prst="roundRect">
@@ -4641,7 +4641,7 @@
         </p:nvSpPr>
         <p:spPr>
           <a:xfrm>
-            <a:off x="1280160" y="1024128"/>
+            <a:off x="1280160" y="1193140"/>
             <a:ext cx="777240" cy="256032"/>
           </a:xfrm>
           <a:prstGeom prst="rect">
@@ -4698,7 +4698,7 @@
       </p:pic>
       <p:sp>
         <p:nvSpPr>
-          <p:cNvPr id="7" name="Shape 4"/>
+          <p:cNvPr id="8" name="Shape 4"/>
           <p:cNvSpPr/>
           <p:nvPr/>
         </p:nvSpPr>
@@ -4725,7 +4725,7 @@
       </p:sp>
       <p:sp>
         <p:nvSpPr>
-          <p:cNvPr id="8" name="Text 5"/>
+          <p:cNvPr id="9" name="Text 5"/>
           <p:cNvSpPr/>
           <p:nvPr/>
         </p:nvSpPr>
@@ -4764,7 +4764,7 @@
       </p:sp>
       <p:sp>
         <p:nvSpPr>
-          <p:cNvPr id="9" name="Text 6"/>
+          <p:cNvPr id="10" name="Text 6"/>
           <p:cNvSpPr/>
           <p:nvPr/>
         </p:nvSpPr>
@@ -4803,7 +4803,7 @@
       </p:sp>
       <p:sp>
         <p:nvSpPr>
-          <p:cNvPr id="10" name="Shape 7"/>
+          <p:cNvPr id="11" name="Shape 7"/>
           <p:cNvSpPr/>
           <p:nvPr/>
         </p:nvSpPr>
@@ -4825,7 +4825,7 @@
       </p:sp>
       <p:sp>
         <p:nvSpPr>
-          <p:cNvPr id="11" name="Text 8"/>
+          <p:cNvPr id="12" name="Text 8"/>
           <p:cNvSpPr/>
           <p:nvPr/>
         </p:nvSpPr>
@@ -4864,7 +4864,7 @@
       </p:sp>
       <p:sp>
         <p:nvSpPr>
-          <p:cNvPr id="12" name="Text 9"/>
+          <p:cNvPr id="13" name="Text 9"/>
           <p:cNvSpPr/>
           <p:nvPr/>
         </p:nvSpPr>
@@ -4903,7 +4903,7 @@
       </p:sp>
       <p:sp>
         <p:nvSpPr>
-          <p:cNvPr id="13" name="Shape 10"/>
+          <p:cNvPr id="14" name="Shape 10"/>
           <p:cNvSpPr/>
           <p:nvPr/>
         </p:nvSpPr>
@@ -4925,7 +4925,7 @@
       </p:sp>
       <p:sp>
         <p:nvSpPr>
-          <p:cNvPr id="14" name="Text 11"/>
+          <p:cNvPr id="15" name="Text 11"/>
           <p:cNvSpPr/>
           <p:nvPr/>
         </p:nvSpPr>
@@ -4964,7 +4964,7 @@
       </p:sp>
       <p:sp>
         <p:nvSpPr>
-          <p:cNvPr id="15" name="Text 12"/>
+          <p:cNvPr id="16" name="Text 12"/>
           <p:cNvSpPr/>
           <p:nvPr/>
         </p:nvSpPr>
@@ -5003,7 +5003,7 @@
       </p:sp>
       <p:sp>
         <p:nvSpPr>
-          <p:cNvPr id="16" name="Shape 13"/>
+          <p:cNvPr id="17" name="Shape 13"/>
           <p:cNvSpPr/>
           <p:nvPr/>
         </p:nvSpPr>
@@ -5025,7 +5025,7 @@
       </p:sp>
       <p:sp>
         <p:nvSpPr>
-          <p:cNvPr id="17" name="Text 14"/>
+          <p:cNvPr id="18" name="Text 14"/>
           <p:cNvSpPr/>
           <p:nvPr/>
         </p:nvSpPr>
@@ -5064,7 +5064,7 @@
       </p:sp>
       <p:sp>
         <p:nvSpPr>
-          <p:cNvPr id="18" name="Text 15"/>
+          <p:cNvPr id="19" name="Text 15"/>
           <p:cNvSpPr/>
           <p:nvPr/>
         </p:nvSpPr>
@@ -6204,7 +6204,7 @@
       </p:graphicFrame>
       <p:sp>
         <p:nvSpPr>
-          <p:cNvPr id="8" name="Shape 4"/>
+          <p:cNvPr id="9" name="Shape 4"/>
           <p:cNvSpPr/>
           <p:nvPr/>
         </p:nvSpPr>
@@ -6226,7 +6226,7 @@
       </p:sp>
       <p:sp>
         <p:nvSpPr>
-          <p:cNvPr id="9" name="Text 5"/>
+          <p:cNvPr id="10" name="Text 5"/>
           <p:cNvSpPr/>
           <p:nvPr/>
         </p:nvSpPr>
@@ -6511,7 +6511,7 @@
       </p:pic>
       <p:sp>
         <p:nvSpPr>
-          <p:cNvPr id="7" name="Shape 4"/>
+          <p:cNvPr id="8" name="Shape 4"/>
           <p:cNvSpPr/>
           <p:nvPr/>
         </p:nvSpPr>
@@ -6533,7 +6533,7 @@
       </p:sp>
       <p:sp>
         <p:nvSpPr>
-          <p:cNvPr id="8" name="Text 5"/>
+          <p:cNvPr id="9" name="Text 5"/>
           <p:cNvSpPr/>
           <p:nvPr/>
         </p:nvSpPr>
@@ -6572,7 +6572,7 @@
       </p:sp>
       <p:sp>
         <p:nvSpPr>
-          <p:cNvPr id="9" name="Shape 6"/>
+          <p:cNvPr id="10" name="Shape 6"/>
           <p:cNvSpPr/>
           <p:nvPr/>
         </p:nvSpPr>
@@ -6595,7 +6595,7 @@
       </p:sp>
       <p:sp>
         <p:nvSpPr>
-          <p:cNvPr id="10" name="Shape 7"/>
+          <p:cNvPr id="11" name="Shape 7"/>
           <p:cNvSpPr/>
           <p:nvPr/>
         </p:nvSpPr>
@@ -6615,7 +6615,7 @@
       </p:sp>
       <p:sp>
         <p:nvSpPr>
-          <p:cNvPr id="11" name="Shape 8"/>
+          <p:cNvPr id="12" name="Shape 8"/>
           <p:cNvSpPr/>
           <p:nvPr/>
         </p:nvSpPr>
@@ -6637,7 +6637,7 @@
       </p:sp>
       <p:sp>
         <p:nvSpPr>
-          <p:cNvPr id="12" name="Text 9"/>
+          <p:cNvPr id="13" name="Text 9"/>
           <p:cNvSpPr/>
           <p:nvPr/>
         </p:nvSpPr>
@@ -6676,7 +6676,7 @@
       </p:sp>
       <p:sp>
         <p:nvSpPr>
-          <p:cNvPr id="13" name="Shape 10"/>
+          <p:cNvPr id="14" name="Shape 10"/>
           <p:cNvSpPr/>
           <p:nvPr/>
         </p:nvSpPr>
@@ -6699,7 +6699,7 @@
       </p:sp>
       <p:sp>
         <p:nvSpPr>
-          <p:cNvPr id="14" name="Shape 11"/>
+          <p:cNvPr id="15" name="Shape 11"/>
           <p:cNvSpPr/>
           <p:nvPr/>
         </p:nvSpPr>
@@ -6719,7 +6719,7 @@
       </p:sp>
       <p:sp>
         <p:nvSpPr>
-          <p:cNvPr id="15" name="Shape 12"/>
+          <p:cNvPr id="16" name="Shape 12"/>
           <p:cNvSpPr/>
           <p:nvPr/>
         </p:nvSpPr>
@@ -6741,7 +6741,7 @@
       </p:sp>
       <p:sp>
         <p:nvSpPr>
-          <p:cNvPr id="16" name="Text 13"/>
+          <p:cNvPr id="17" name="Text 13"/>
           <p:cNvSpPr/>
           <p:nvPr/>
         </p:nvSpPr>
@@ -6780,7 +6780,7 @@
       </p:sp>
       <p:sp>
         <p:nvSpPr>
-          <p:cNvPr id="17" name="Text 14"/>
+          <p:cNvPr id="18" name="Text 14"/>
           <p:cNvSpPr/>
           <p:nvPr/>
         </p:nvSpPr>
@@ -6819,7 +6819,7 @@
       </p:sp>
       <p:sp>
         <p:nvSpPr>
-          <p:cNvPr id="18" name="Shape 15"/>
+          <p:cNvPr id="19" name="Shape 15"/>
           <p:cNvSpPr/>
           <p:nvPr/>
         </p:nvSpPr>
@@ -6841,7 +6841,7 @@
       </p:sp>
       <p:sp>
         <p:nvSpPr>
-          <p:cNvPr id="19" name="Text 16"/>
+          <p:cNvPr id="20" name="Text 16"/>
           <p:cNvSpPr/>
           <p:nvPr/>
         </p:nvSpPr>
@@ -6880,7 +6880,7 @@
       </p:sp>
       <p:sp>
         <p:nvSpPr>
-          <p:cNvPr id="20" name="Text 17"/>
+          <p:cNvPr id="21" name="Text 17"/>
           <p:cNvSpPr/>
           <p:nvPr/>
         </p:nvSpPr>
@@ -6914,7 +6914,7 @@
                 <a:ea typeface="Montserrat" pitchFamily="34" charset="-122"/>
                 <a:cs typeface="Montserrat" pitchFamily="34" charset="-120"/>
               </a:rPr>
-              <a:t>Маршрут, який не диктується задачею, тримайте стабільним у межах сесії: вибір за хешем ідентифікатора розмови, а не заново на кожну репліку. Ескалація — виняток.</a:t>
+              <a:t>Маршрут стабільний у межах сесії: вибір за хешем розмови, не на кожну репліку.</a:t>
             </a:r>
             <a:endParaRPr lang="en-US" sz="1300" dirty="0"/>
           </a:p>
@@ -6922,7 +6922,7 @@
       </p:sp>
       <p:sp>
         <p:nvSpPr>
-          <p:cNvPr id="21" name="Shape 18"/>
+          <p:cNvPr id="22" name="Shape 18"/>
           <p:cNvSpPr/>
           <p:nvPr/>
         </p:nvSpPr>
@@ -6944,7 +6944,7 @@
       </p:sp>
       <p:sp>
         <p:nvSpPr>
-          <p:cNvPr id="22" name="Text 19"/>
+          <p:cNvPr id="23" name="Text 19"/>
           <p:cNvSpPr/>
           <p:nvPr/>
         </p:nvSpPr>
@@ -6983,7 +6983,7 @@
       </p:sp>
       <p:sp>
         <p:nvSpPr>
-          <p:cNvPr id="23" name="Text 20"/>
+          <p:cNvPr id="24" name="Text 20"/>
           <p:cNvSpPr/>
           <p:nvPr/>
         </p:nvSpPr>
@@ -7017,7 +7017,7 @@
                 <a:ea typeface="Montserrat" pitchFamily="34" charset="-122"/>
                 <a:cs typeface="Montserrat" pitchFamily="34" charset="-120"/>
               </a:rPr>
-              <a:t>Роутинг за випадковим числом «щоб рівномірно розподілити»: непередбачувано для користувача і невідтворювано для вас.</a:t>
+              <a:t>Роутинг за випадковим числом: непередбачувано і невідтворювано.</a:t>
             </a:r>
             <a:endParaRPr lang="en-US" sz="1300" dirty="0"/>
           </a:p>
@@ -7189,7 +7189,7 @@
         </p:nvSpPr>
         <p:spPr>
           <a:xfrm>
-            <a:off x="1280160" y="1024128"/>
+            <a:off x="1280160" y="1193140"/>
             <a:ext cx="777240" cy="256032"/>
           </a:xfrm>
           <a:prstGeom prst="roundRect">
@@ -7211,7 +7211,7 @@
         </p:nvSpPr>
         <p:spPr>
           <a:xfrm>
-            <a:off x="1280160" y="1024128"/>
+            <a:off x="1280160" y="1193140"/>
             <a:ext cx="777240" cy="256032"/>
           </a:xfrm>
           <a:prstGeom prst="rect">
@@ -8329,7 +8329,7 @@
       </p:graphicFrame>
       <p:sp>
         <p:nvSpPr>
-          <p:cNvPr id="8" name="Shape 4"/>
+          <p:cNvPr id="9" name="Shape 4"/>
           <p:cNvSpPr/>
           <p:nvPr/>
         </p:nvSpPr>
@@ -8356,7 +8356,7 @@
       </p:sp>
       <p:sp>
         <p:nvSpPr>
-          <p:cNvPr id="9" name="Text 5"/>
+          <p:cNvPr id="10" name="Text 5"/>
           <p:cNvSpPr/>
           <p:nvPr/>
         </p:nvSpPr>
@@ -8562,7 +8562,7 @@
         </p:nvSpPr>
         <p:spPr>
           <a:xfrm>
-            <a:off x="1280160" y="1024128"/>
+            <a:off x="1280160" y="1193140"/>
             <a:ext cx="777240" cy="256032"/>
           </a:xfrm>
           <a:prstGeom prst="roundRect">
@@ -8584,7 +8584,7 @@
         </p:nvSpPr>
         <p:spPr>
           <a:xfrm>
-            <a:off x="1280160" y="1024128"/>
+            <a:off x="1280160" y="1193140"/>
             <a:ext cx="777240" cy="256032"/>
           </a:xfrm>
           <a:prstGeom prst="rect">
@@ -8641,7 +8641,7 @@
       </p:pic>
       <p:sp>
         <p:nvSpPr>
-          <p:cNvPr id="7" name="Shape 4"/>
+          <p:cNvPr id="8" name="Shape 4"/>
           <p:cNvSpPr/>
           <p:nvPr/>
         </p:nvSpPr>
@@ -8663,7 +8663,7 @@
       </p:sp>
       <p:sp>
         <p:nvSpPr>
-          <p:cNvPr id="8" name="Text 5"/>
+          <p:cNvPr id="9" name="Text 5"/>
           <p:cNvSpPr/>
           <p:nvPr/>
         </p:nvSpPr>
@@ -8702,7 +8702,7 @@
       </p:sp>
       <p:sp>
         <p:nvSpPr>
-          <p:cNvPr id="9" name="Shape 6"/>
+          <p:cNvPr id="10" name="Shape 6"/>
           <p:cNvSpPr/>
           <p:nvPr/>
         </p:nvSpPr>
@@ -8725,7 +8725,7 @@
       </p:sp>
       <p:sp>
         <p:nvSpPr>
-          <p:cNvPr id="10" name="Shape 7"/>
+          <p:cNvPr id="11" name="Shape 7"/>
           <p:cNvSpPr/>
           <p:nvPr/>
         </p:nvSpPr>
@@ -8745,7 +8745,7 @@
       </p:sp>
       <p:sp>
         <p:nvSpPr>
-          <p:cNvPr id="11" name="Shape 8"/>
+          <p:cNvPr id="12" name="Shape 8"/>
           <p:cNvSpPr/>
           <p:nvPr/>
         </p:nvSpPr>
@@ -8767,7 +8767,7 @@
       </p:sp>
       <p:sp>
         <p:nvSpPr>
-          <p:cNvPr id="12" name="Text 9"/>
+          <p:cNvPr id="13" name="Text 9"/>
           <p:cNvSpPr/>
           <p:nvPr/>
         </p:nvSpPr>
@@ -8806,7 +8806,7 @@
       </p:sp>
       <p:sp>
         <p:nvSpPr>
-          <p:cNvPr id="13" name="Text 10"/>
+          <p:cNvPr id="14" name="Text 10"/>
           <p:cNvSpPr/>
           <p:nvPr/>
         </p:nvSpPr>
@@ -8845,7 +8845,7 @@
       </p:sp>
       <p:sp>
         <p:nvSpPr>
-          <p:cNvPr id="14" name="Shape 11"/>
+          <p:cNvPr id="15" name="Shape 11"/>
           <p:cNvSpPr/>
           <p:nvPr/>
         </p:nvSpPr>
@@ -8867,7 +8867,7 @@
       </p:sp>
       <p:sp>
         <p:nvSpPr>
-          <p:cNvPr id="15" name="Text 12"/>
+          <p:cNvPr id="16" name="Text 12"/>
           <p:cNvSpPr/>
           <p:nvPr/>
         </p:nvSpPr>
@@ -8906,7 +8906,7 @@
       </p:sp>
       <p:sp>
         <p:nvSpPr>
-          <p:cNvPr id="16" name="Text 13"/>
+          <p:cNvPr id="17" name="Text 13"/>
           <p:cNvSpPr/>
           <p:nvPr/>
         </p:nvSpPr>
@@ -8948,7 +8948,7 @@
       </p:sp>
       <p:sp>
         <p:nvSpPr>
-          <p:cNvPr id="17" name="Shape 14"/>
+          <p:cNvPr id="18" name="Shape 14"/>
           <p:cNvSpPr/>
           <p:nvPr/>
         </p:nvSpPr>
@@ -8970,7 +8970,7 @@
       </p:sp>
       <p:sp>
         <p:nvSpPr>
-          <p:cNvPr id="18" name="Text 15"/>
+          <p:cNvPr id="19" name="Text 15"/>
           <p:cNvSpPr/>
           <p:nvPr/>
         </p:nvSpPr>
@@ -9009,7 +9009,7 @@
       </p:sp>
       <p:sp>
         <p:nvSpPr>
-          <p:cNvPr id="19" name="Text 16"/>
+          <p:cNvPr id="20" name="Text 16"/>
           <p:cNvSpPr/>
           <p:nvPr/>
         </p:nvSpPr>
@@ -9215,7 +9215,7 @@
         </p:nvSpPr>
         <p:spPr>
           <a:xfrm>
-            <a:off x="1280160" y="1024128"/>
+            <a:off x="1280160" y="1193140"/>
             <a:ext cx="777240" cy="256032"/>
           </a:xfrm>
           <a:prstGeom prst="roundRect">
@@ -9237,7 +9237,7 @@
         </p:nvSpPr>
         <p:spPr>
           <a:xfrm>
-            <a:off x="1280160" y="1024128"/>
+            <a:off x="1280160" y="1193140"/>
             <a:ext cx="777240" cy="256032"/>
           </a:xfrm>
           <a:prstGeom prst="rect">
@@ -9294,7 +9294,7 @@
       </p:pic>
       <p:sp>
         <p:nvSpPr>
-          <p:cNvPr id="7" name="Shape 4"/>
+          <p:cNvPr id="8" name="Shape 4"/>
           <p:cNvSpPr/>
           <p:nvPr/>
         </p:nvSpPr>
@@ -9321,7 +9321,7 @@
       </p:sp>
       <p:sp>
         <p:nvSpPr>
-          <p:cNvPr id="8" name="Text 5"/>
+          <p:cNvPr id="9" name="Text 5"/>
           <p:cNvSpPr/>
           <p:nvPr/>
         </p:nvSpPr>
@@ -9460,7 +9460,7 @@
       </p:sp>
       <p:sp>
         <p:nvSpPr>
-          <p:cNvPr id="9" name="Shape 6"/>
+          <p:cNvPr id="10" name="Shape 6"/>
           <p:cNvSpPr/>
           <p:nvPr/>
         </p:nvSpPr>
@@ -9482,7 +9482,7 @@
       </p:sp>
       <p:sp>
         <p:nvSpPr>
-          <p:cNvPr id="10" name="Text 7"/>
+          <p:cNvPr id="11" name="Text 7"/>
           <p:cNvSpPr/>
           <p:nvPr/>
         </p:nvSpPr>
@@ -9521,7 +9521,7 @@
       </p:sp>
       <p:sp>
         <p:nvSpPr>
-          <p:cNvPr id="11" name="Shape 8"/>
+          <p:cNvPr id="12" name="Shape 8"/>
           <p:cNvSpPr/>
           <p:nvPr/>
         </p:nvSpPr>
@@ -9544,7 +9544,7 @@
       </p:sp>
       <p:sp>
         <p:nvSpPr>
-          <p:cNvPr id="12" name="Shape 9"/>
+          <p:cNvPr id="13" name="Shape 9"/>
           <p:cNvSpPr/>
           <p:nvPr/>
         </p:nvSpPr>
@@ -9564,7 +9564,7 @@
       </p:sp>
       <p:sp>
         <p:nvSpPr>
-          <p:cNvPr id="13" name="Shape 10"/>
+          <p:cNvPr id="14" name="Shape 10"/>
           <p:cNvSpPr/>
           <p:nvPr/>
         </p:nvSpPr>
@@ -9591,7 +9591,7 @@
       </p:sp>
       <p:sp>
         <p:nvSpPr>
-          <p:cNvPr id="14" name="Text 11"/>
+          <p:cNvPr id="15" name="Text 11"/>
           <p:cNvSpPr/>
           <p:nvPr/>
         </p:nvSpPr>
@@ -9630,7 +9630,7 @@
       </p:sp>
       <p:sp>
         <p:nvSpPr>
-          <p:cNvPr id="15" name="Shape 12"/>
+          <p:cNvPr id="16" name="Shape 12"/>
           <p:cNvSpPr/>
           <p:nvPr/>
         </p:nvSpPr>
@@ -9653,7 +9653,7 @@
       </p:sp>
       <p:sp>
         <p:nvSpPr>
-          <p:cNvPr id="16" name="Shape 13"/>
+          <p:cNvPr id="17" name="Shape 13"/>
           <p:cNvSpPr/>
           <p:nvPr/>
         </p:nvSpPr>
@@ -9673,7 +9673,7 @@
       </p:sp>
       <p:sp>
         <p:nvSpPr>
-          <p:cNvPr id="17" name="Shape 14"/>
+          <p:cNvPr id="18" name="Shape 14"/>
           <p:cNvSpPr/>
           <p:nvPr/>
         </p:nvSpPr>
@@ -9695,7 +9695,7 @@
       </p:sp>
       <p:sp>
         <p:nvSpPr>
-          <p:cNvPr id="18" name="Text 15"/>
+          <p:cNvPr id="19" name="Text 15"/>
           <p:cNvSpPr/>
           <p:nvPr/>
         </p:nvSpPr>
@@ -9734,7 +9734,7 @@
       </p:sp>
       <p:sp>
         <p:nvSpPr>
-          <p:cNvPr id="19" name="Shape 16"/>
+          <p:cNvPr id="20" name="Shape 16"/>
           <p:cNvSpPr/>
           <p:nvPr/>
         </p:nvSpPr>
@@ -9756,7 +9756,7 @@
       </p:sp>
       <p:sp>
         <p:nvSpPr>
-          <p:cNvPr id="20" name="Text 17"/>
+          <p:cNvPr id="21" name="Text 17"/>
           <p:cNvSpPr/>
           <p:nvPr/>
         </p:nvSpPr>
@@ -9795,7 +9795,7 @@
       </p:sp>
       <p:sp>
         <p:nvSpPr>
-          <p:cNvPr id="21" name="Text 18"/>
+          <p:cNvPr id="22" name="Text 18"/>
           <p:cNvSpPr/>
           <p:nvPr/>
         </p:nvSpPr>
@@ -10141,7 +10141,7 @@
       </p:pic>
       <p:sp>
         <p:nvSpPr>
-          <p:cNvPr id="9" name="Shape 6"/>
+          <p:cNvPr id="10" name="Shape 6"/>
           <p:cNvSpPr/>
           <p:nvPr/>
         </p:nvSpPr>
@@ -10163,7 +10163,7 @@
       </p:sp>
       <p:sp>
         <p:nvSpPr>
-          <p:cNvPr id="10" name="Shape 7"/>
+          <p:cNvPr id="11" name="Shape 7"/>
           <p:cNvSpPr/>
           <p:nvPr/>
         </p:nvSpPr>
@@ -10183,7 +10183,7 @@
       </p:sp>
       <p:sp>
         <p:nvSpPr>
-          <p:cNvPr id="11" name="Text 8"/>
+          <p:cNvPr id="12" name="Text 8"/>
           <p:cNvSpPr/>
           <p:nvPr/>
         </p:nvSpPr>
@@ -10222,7 +10222,7 @@
       </p:sp>
       <p:sp>
         <p:nvSpPr>
-          <p:cNvPr id="12" name="Text 9"/>
+          <p:cNvPr id="13" name="Text 9"/>
           <p:cNvSpPr/>
           <p:nvPr/>
         </p:nvSpPr>
@@ -10261,7 +10261,7 @@
       </p:sp>
       <p:sp>
         <p:nvSpPr>
-          <p:cNvPr id="13" name="Text 10"/>
+          <p:cNvPr id="14" name="Text 10"/>
           <p:cNvSpPr/>
           <p:nvPr/>
         </p:nvSpPr>
@@ -10303,7 +10303,7 @@
       </p:sp>
       <p:sp>
         <p:nvSpPr>
-          <p:cNvPr id="14" name="Shape 11"/>
+          <p:cNvPr id="15" name="Shape 11"/>
           <p:cNvSpPr/>
           <p:nvPr/>
         </p:nvSpPr>
@@ -10325,7 +10325,7 @@
       </p:sp>
       <p:sp>
         <p:nvSpPr>
-          <p:cNvPr id="15" name="Shape 12"/>
+          <p:cNvPr id="16" name="Shape 12"/>
           <p:cNvSpPr/>
           <p:nvPr/>
         </p:nvSpPr>
@@ -10345,7 +10345,7 @@
       </p:sp>
       <p:sp>
         <p:nvSpPr>
-          <p:cNvPr id="16" name="Text 13"/>
+          <p:cNvPr id="17" name="Text 13"/>
           <p:cNvSpPr/>
           <p:nvPr/>
         </p:nvSpPr>
@@ -10384,7 +10384,7 @@
       </p:sp>
       <p:sp>
         <p:nvSpPr>
-          <p:cNvPr id="17" name="Text 14"/>
+          <p:cNvPr id="18" name="Text 14"/>
           <p:cNvSpPr/>
           <p:nvPr/>
         </p:nvSpPr>
@@ -10423,7 +10423,7 @@
       </p:sp>
       <p:sp>
         <p:nvSpPr>
-          <p:cNvPr id="18" name="Text 15"/>
+          <p:cNvPr id="19" name="Text 15"/>
           <p:cNvSpPr/>
           <p:nvPr/>
         </p:nvSpPr>
@@ -10465,7 +10465,7 @@
       </p:sp>
       <p:sp>
         <p:nvSpPr>
-          <p:cNvPr id="19" name="Shape 16"/>
+          <p:cNvPr id="20" name="Shape 16"/>
           <p:cNvSpPr/>
           <p:nvPr/>
         </p:nvSpPr>
@@ -10487,7 +10487,7 @@
       </p:sp>
       <p:sp>
         <p:nvSpPr>
-          <p:cNvPr id="20" name="Shape 17"/>
+          <p:cNvPr id="21" name="Shape 17"/>
           <p:cNvSpPr/>
           <p:nvPr/>
         </p:nvSpPr>
@@ -10507,7 +10507,7 @@
       </p:sp>
       <p:sp>
         <p:nvSpPr>
-          <p:cNvPr id="21" name="Text 18"/>
+          <p:cNvPr id="22" name="Text 18"/>
           <p:cNvSpPr/>
           <p:nvPr/>
         </p:nvSpPr>
@@ -10546,7 +10546,7 @@
       </p:sp>
       <p:sp>
         <p:nvSpPr>
-          <p:cNvPr id="22" name="Text 19"/>
+          <p:cNvPr id="23" name="Text 19"/>
           <p:cNvSpPr/>
           <p:nvPr/>
         </p:nvSpPr>
@@ -10585,7 +10585,7 @@
       </p:sp>
       <p:sp>
         <p:nvSpPr>
-          <p:cNvPr id="23" name="Text 20"/>
+          <p:cNvPr id="24" name="Text 20"/>
           <p:cNvSpPr/>
           <p:nvPr/>
         </p:nvSpPr>
@@ -10627,7 +10627,7 @@
       </p:sp>
       <p:sp>
         <p:nvSpPr>
-          <p:cNvPr id="24" name="Shape 21"/>
+          <p:cNvPr id="25" name="Shape 21"/>
           <p:cNvSpPr/>
           <p:nvPr/>
         </p:nvSpPr>
@@ -10654,7 +10654,7 @@
       </p:sp>
       <p:sp>
         <p:nvSpPr>
-          <p:cNvPr id="25" name="Text 22"/>
+          <p:cNvPr id="26" name="Text 22"/>
           <p:cNvSpPr/>
           <p:nvPr/>
         </p:nvSpPr>
@@ -10693,7 +10693,7 @@
       </p:sp>
       <p:sp>
         <p:nvSpPr>
-          <p:cNvPr id="26" name="Text 23"/>
+          <p:cNvPr id="27" name="Text 23"/>
           <p:cNvSpPr/>
           <p:nvPr/>
         </p:nvSpPr>
@@ -10735,7 +10735,7 @@
       </p:sp>
       <p:sp>
         <p:nvSpPr>
-          <p:cNvPr id="27" name="Shape 24"/>
+          <p:cNvPr id="28" name="Shape 24"/>
           <p:cNvSpPr/>
           <p:nvPr/>
         </p:nvSpPr>
@@ -10757,7 +10757,7 @@
       </p:sp>
       <p:sp>
         <p:nvSpPr>
-          <p:cNvPr id="28" name="Text 25"/>
+          <p:cNvPr id="29" name="Text 25"/>
           <p:cNvSpPr/>
           <p:nvPr/>
         </p:nvSpPr>
@@ -10796,7 +10796,7 @@
       </p:sp>
       <p:sp>
         <p:nvSpPr>
-          <p:cNvPr id="29" name="Text 26"/>
+          <p:cNvPr id="30" name="Text 26"/>
           <p:cNvSpPr/>
           <p:nvPr/>
         </p:nvSpPr>
@@ -11042,7 +11042,7 @@
       </p:pic>
       <p:sp>
         <p:nvSpPr>
-          <p:cNvPr id="6" name="Shape 3"/>
+          <p:cNvPr id="7" name="Shape 3"/>
           <p:cNvSpPr/>
           <p:nvPr/>
         </p:nvSpPr>
@@ -11064,7 +11064,7 @@
       </p:sp>
       <p:sp>
         <p:nvSpPr>
-          <p:cNvPr id="7" name="Shape 4"/>
+          <p:cNvPr id="8" name="Shape 4"/>
           <p:cNvSpPr/>
           <p:nvPr/>
         </p:nvSpPr>
@@ -11084,7 +11084,7 @@
       </p:sp>
       <p:sp>
         <p:nvSpPr>
-          <p:cNvPr id="8" name="Text 5"/>
+          <p:cNvPr id="9" name="Text 5"/>
           <p:cNvSpPr/>
           <p:nvPr/>
         </p:nvSpPr>
@@ -11123,7 +11123,7 @@
       </p:sp>
       <p:sp>
         <p:nvSpPr>
-          <p:cNvPr id="9" name="Text 6"/>
+          <p:cNvPr id="10" name="Text 6"/>
           <p:cNvSpPr/>
           <p:nvPr/>
         </p:nvSpPr>
@@ -11162,7 +11162,7 @@
       </p:sp>
       <p:sp>
         <p:nvSpPr>
-          <p:cNvPr id="10" name="Text 7"/>
+          <p:cNvPr id="11" name="Text 7"/>
           <p:cNvSpPr/>
           <p:nvPr/>
         </p:nvSpPr>
@@ -11204,7 +11204,7 @@
       </p:sp>
       <p:sp>
         <p:nvSpPr>
-          <p:cNvPr id="11" name="Shape 8"/>
+          <p:cNvPr id="12" name="Shape 8"/>
           <p:cNvSpPr/>
           <p:nvPr/>
         </p:nvSpPr>
@@ -11226,7 +11226,7 @@
       </p:sp>
       <p:sp>
         <p:nvSpPr>
-          <p:cNvPr id="12" name="Shape 9"/>
+          <p:cNvPr id="13" name="Shape 9"/>
           <p:cNvSpPr/>
           <p:nvPr/>
         </p:nvSpPr>
@@ -11246,7 +11246,7 @@
       </p:sp>
       <p:sp>
         <p:nvSpPr>
-          <p:cNvPr id="13" name="Text 10"/>
+          <p:cNvPr id="14" name="Text 10"/>
           <p:cNvSpPr/>
           <p:nvPr/>
         </p:nvSpPr>
@@ -11285,7 +11285,7 @@
       </p:sp>
       <p:sp>
         <p:nvSpPr>
-          <p:cNvPr id="14" name="Text 11"/>
+          <p:cNvPr id="15" name="Text 11"/>
           <p:cNvSpPr/>
           <p:nvPr/>
         </p:nvSpPr>
@@ -11324,7 +11324,7 @@
       </p:sp>
       <p:sp>
         <p:nvSpPr>
-          <p:cNvPr id="15" name="Text 12"/>
+          <p:cNvPr id="16" name="Text 12"/>
           <p:cNvSpPr/>
           <p:nvPr/>
         </p:nvSpPr>
@@ -11366,7 +11366,7 @@
       </p:sp>
       <p:sp>
         <p:nvSpPr>
-          <p:cNvPr id="16" name="Shape 13"/>
+          <p:cNvPr id="17" name="Shape 13"/>
           <p:cNvSpPr/>
           <p:nvPr/>
         </p:nvSpPr>
@@ -11388,7 +11388,7 @@
       </p:sp>
       <p:sp>
         <p:nvSpPr>
-          <p:cNvPr id="17" name="Shape 14"/>
+          <p:cNvPr id="18" name="Shape 14"/>
           <p:cNvSpPr/>
           <p:nvPr/>
         </p:nvSpPr>
@@ -11408,7 +11408,7 @@
       </p:sp>
       <p:sp>
         <p:nvSpPr>
-          <p:cNvPr id="18" name="Text 15"/>
+          <p:cNvPr id="19" name="Text 15"/>
           <p:cNvSpPr/>
           <p:nvPr/>
         </p:nvSpPr>
@@ -11447,7 +11447,7 @@
       </p:sp>
       <p:sp>
         <p:nvSpPr>
-          <p:cNvPr id="19" name="Text 16"/>
+          <p:cNvPr id="20" name="Text 16"/>
           <p:cNvSpPr/>
           <p:nvPr/>
         </p:nvSpPr>
@@ -11486,7 +11486,7 @@
       </p:sp>
       <p:sp>
         <p:nvSpPr>
-          <p:cNvPr id="20" name="Text 17"/>
+          <p:cNvPr id="21" name="Text 17"/>
           <p:cNvSpPr/>
           <p:nvPr/>
         </p:nvSpPr>
@@ -11528,7 +11528,7 @@
       </p:sp>
       <p:sp>
         <p:nvSpPr>
-          <p:cNvPr id="21" name="Shape 18"/>
+          <p:cNvPr id="22" name="Shape 18"/>
           <p:cNvSpPr/>
           <p:nvPr/>
         </p:nvSpPr>
@@ -11550,7 +11550,7 @@
       </p:sp>
       <p:sp>
         <p:nvSpPr>
-          <p:cNvPr id="22" name="Shape 19"/>
+          <p:cNvPr id="23" name="Shape 19"/>
           <p:cNvSpPr/>
           <p:nvPr/>
         </p:nvSpPr>
@@ -11570,7 +11570,7 @@
       </p:sp>
       <p:sp>
         <p:nvSpPr>
-          <p:cNvPr id="23" name="Text 20"/>
+          <p:cNvPr id="24" name="Text 20"/>
           <p:cNvSpPr/>
           <p:nvPr/>
         </p:nvSpPr>
@@ -11609,7 +11609,7 @@
       </p:sp>
       <p:sp>
         <p:nvSpPr>
-          <p:cNvPr id="24" name="Text 21"/>
+          <p:cNvPr id="25" name="Text 21"/>
           <p:cNvSpPr/>
           <p:nvPr/>
         </p:nvSpPr>
@@ -11648,7 +11648,7 @@
       </p:sp>
       <p:sp>
         <p:nvSpPr>
-          <p:cNvPr id="25" name="Text 22"/>
+          <p:cNvPr id="26" name="Text 22"/>
           <p:cNvSpPr/>
           <p:nvPr/>
         </p:nvSpPr>
@@ -11690,7 +11690,7 @@
       </p:sp>
       <p:sp>
         <p:nvSpPr>
-          <p:cNvPr id="26" name="Shape 23"/>
+          <p:cNvPr id="27" name="Shape 23"/>
           <p:cNvSpPr/>
           <p:nvPr/>
         </p:nvSpPr>
@@ -11712,7 +11712,7 @@
       </p:sp>
       <p:sp>
         <p:nvSpPr>
-          <p:cNvPr id="27" name="Text 24"/>
+          <p:cNvPr id="28" name="Text 24"/>
           <p:cNvSpPr/>
           <p:nvPr/>
         </p:nvSpPr>
@@ -11751,7 +11751,7 @@
       </p:sp>
       <p:sp>
         <p:nvSpPr>
-          <p:cNvPr id="28" name="Text 25"/>
+          <p:cNvPr id="29" name="Text 25"/>
           <p:cNvSpPr/>
           <p:nvPr/>
         </p:nvSpPr>
@@ -11997,7 +11997,7 @@
       </p:pic>
       <p:sp>
         <p:nvSpPr>
-          <p:cNvPr id="6" name="Shape 3"/>
+          <p:cNvPr id="7" name="Shape 3"/>
           <p:cNvSpPr/>
           <p:nvPr/>
         </p:nvSpPr>
@@ -12017,7 +12017,7 @@
       </p:sp>
       <p:sp>
         <p:nvSpPr>
-          <p:cNvPr id="7" name="Text 4"/>
+          <p:cNvPr id="8" name="Text 4"/>
           <p:cNvSpPr/>
           <p:nvPr/>
         </p:nvSpPr>
@@ -12056,7 +12056,7 @@
       </p:sp>
       <p:sp>
         <p:nvSpPr>
-          <p:cNvPr id="8" name="Text 5"/>
+          <p:cNvPr id="9" name="Text 5"/>
           <p:cNvSpPr/>
           <p:nvPr/>
         </p:nvSpPr>
@@ -12109,7 +12109,7 @@
       </p:sp>
       <p:sp>
         <p:nvSpPr>
-          <p:cNvPr id="9" name="Shape 6"/>
+          <p:cNvPr id="10" name="Shape 6"/>
           <p:cNvSpPr/>
           <p:nvPr/>
         </p:nvSpPr>
@@ -12129,7 +12129,7 @@
       </p:sp>
       <p:sp>
         <p:nvSpPr>
-          <p:cNvPr id="10" name="Text 7"/>
+          <p:cNvPr id="11" name="Text 7"/>
           <p:cNvSpPr/>
           <p:nvPr/>
         </p:nvSpPr>
@@ -12168,7 +12168,7 @@
       </p:sp>
       <p:sp>
         <p:nvSpPr>
-          <p:cNvPr id="11" name="Text 8"/>
+          <p:cNvPr id="12" name="Text 8"/>
           <p:cNvSpPr/>
           <p:nvPr/>
         </p:nvSpPr>
@@ -12221,7 +12221,7 @@
       </p:sp>
       <p:sp>
         <p:nvSpPr>
-          <p:cNvPr id="12" name="Shape 9"/>
+          <p:cNvPr id="13" name="Shape 9"/>
           <p:cNvSpPr/>
           <p:nvPr/>
         </p:nvSpPr>
@@ -12241,7 +12241,7 @@
       </p:sp>
       <p:sp>
         <p:nvSpPr>
-          <p:cNvPr id="13" name="Text 10"/>
+          <p:cNvPr id="14" name="Text 10"/>
           <p:cNvSpPr/>
           <p:nvPr/>
         </p:nvSpPr>
@@ -12280,7 +12280,7 @@
       </p:sp>
       <p:sp>
         <p:nvSpPr>
-          <p:cNvPr id="14" name="Text 11"/>
+          <p:cNvPr id="15" name="Text 11"/>
           <p:cNvSpPr/>
           <p:nvPr/>
         </p:nvSpPr>
@@ -12333,7 +12333,7 @@
       </p:sp>
       <p:sp>
         <p:nvSpPr>
-          <p:cNvPr id="15" name="Shape 12"/>
+          <p:cNvPr id="16" name="Shape 12"/>
           <p:cNvSpPr/>
           <p:nvPr/>
         </p:nvSpPr>
@@ -12353,7 +12353,7 @@
       </p:sp>
       <p:sp>
         <p:nvSpPr>
-          <p:cNvPr id="16" name="Text 13"/>
+          <p:cNvPr id="17" name="Text 13"/>
           <p:cNvSpPr/>
           <p:nvPr/>
         </p:nvSpPr>
@@ -12392,7 +12392,7 @@
       </p:sp>
       <p:sp>
         <p:nvSpPr>
-          <p:cNvPr id="17" name="Text 14"/>
+          <p:cNvPr id="18" name="Text 14"/>
           <p:cNvSpPr/>
           <p:nvPr/>
         </p:nvSpPr>
@@ -12445,7 +12445,7 @@
       </p:sp>
       <p:sp>
         <p:nvSpPr>
-          <p:cNvPr id="18" name="Shape 15"/>
+          <p:cNvPr id="19" name="Shape 15"/>
           <p:cNvSpPr/>
           <p:nvPr/>
         </p:nvSpPr>
@@ -12465,7 +12465,7 @@
       </p:sp>
       <p:sp>
         <p:nvSpPr>
-          <p:cNvPr id="19" name="Text 16"/>
+          <p:cNvPr id="20" name="Text 16"/>
           <p:cNvSpPr/>
           <p:nvPr/>
         </p:nvSpPr>
@@ -12504,7 +12504,7 @@
       </p:sp>
       <p:sp>
         <p:nvSpPr>
-          <p:cNvPr id="20" name="Text 17"/>
+          <p:cNvPr id="21" name="Text 17"/>
           <p:cNvSpPr/>
           <p:nvPr/>
         </p:nvSpPr>
@@ -12803,7 +12803,7 @@
       </p:pic>
       <p:sp>
         <p:nvSpPr>
-          <p:cNvPr id="7" name="Shape 4"/>
+          <p:cNvPr id="8" name="Shape 4"/>
           <p:cNvSpPr/>
           <p:nvPr/>
         </p:nvSpPr>
@@ -12830,7 +12830,7 @@
       </p:sp>
       <p:sp>
         <p:nvSpPr>
-          <p:cNvPr id="8" name="Shape 5"/>
+          <p:cNvPr id="9" name="Shape 5"/>
           <p:cNvSpPr/>
           <p:nvPr/>
         </p:nvSpPr>
@@ -12850,7 +12850,7 @@
       </p:sp>
       <p:sp>
         <p:nvSpPr>
-          <p:cNvPr id="9" name="Text 6"/>
+          <p:cNvPr id="10" name="Text 6"/>
           <p:cNvSpPr/>
           <p:nvPr/>
         </p:nvSpPr>
@@ -12889,7 +12889,7 @@
       </p:sp>
       <p:sp>
         <p:nvSpPr>
-          <p:cNvPr id="10" name="Text 7"/>
+          <p:cNvPr id="11" name="Text 7"/>
           <p:cNvSpPr/>
           <p:nvPr/>
         </p:nvSpPr>
@@ -12928,7 +12928,7 @@
       </p:sp>
       <p:sp>
         <p:nvSpPr>
-          <p:cNvPr id="11" name="Text 8"/>
+          <p:cNvPr id="12" name="Text 8"/>
           <p:cNvSpPr/>
           <p:nvPr/>
         </p:nvSpPr>
@@ -12970,7 +12970,7 @@
       </p:sp>
       <p:sp>
         <p:nvSpPr>
-          <p:cNvPr id="12" name="Shape 9"/>
+          <p:cNvPr id="13" name="Shape 9"/>
           <p:cNvSpPr/>
           <p:nvPr/>
         </p:nvSpPr>
@@ -12997,7 +12997,7 @@
       </p:sp>
       <p:sp>
         <p:nvSpPr>
-          <p:cNvPr id="13" name="Shape 10"/>
+          <p:cNvPr id="14" name="Shape 10"/>
           <p:cNvSpPr/>
           <p:nvPr/>
         </p:nvSpPr>
@@ -13017,7 +13017,7 @@
       </p:sp>
       <p:sp>
         <p:nvSpPr>
-          <p:cNvPr id="14" name="Text 11"/>
+          <p:cNvPr id="15" name="Text 11"/>
           <p:cNvSpPr/>
           <p:nvPr/>
         </p:nvSpPr>
@@ -13056,7 +13056,7 @@
       </p:sp>
       <p:sp>
         <p:nvSpPr>
-          <p:cNvPr id="15" name="Text 12"/>
+          <p:cNvPr id="16" name="Text 12"/>
           <p:cNvSpPr/>
           <p:nvPr/>
         </p:nvSpPr>
@@ -13095,7 +13095,7 @@
       </p:sp>
       <p:sp>
         <p:nvSpPr>
-          <p:cNvPr id="16" name="Text 13"/>
+          <p:cNvPr id="17" name="Text 13"/>
           <p:cNvSpPr/>
           <p:nvPr/>
         </p:nvSpPr>
@@ -13137,7 +13137,7 @@
       </p:sp>
       <p:sp>
         <p:nvSpPr>
-          <p:cNvPr id="17" name="Shape 14"/>
+          <p:cNvPr id="18" name="Shape 14"/>
           <p:cNvSpPr/>
           <p:nvPr/>
         </p:nvSpPr>
@@ -13164,7 +13164,7 @@
       </p:sp>
       <p:sp>
         <p:nvSpPr>
-          <p:cNvPr id="18" name="Shape 15"/>
+          <p:cNvPr id="19" name="Shape 15"/>
           <p:cNvSpPr/>
           <p:nvPr/>
         </p:nvSpPr>
@@ -13184,7 +13184,7 @@
       </p:sp>
       <p:sp>
         <p:nvSpPr>
-          <p:cNvPr id="19" name="Text 16"/>
+          <p:cNvPr id="20" name="Text 16"/>
           <p:cNvSpPr/>
           <p:nvPr/>
         </p:nvSpPr>
@@ -13223,7 +13223,7 @@
       </p:sp>
       <p:sp>
         <p:nvSpPr>
-          <p:cNvPr id="20" name="Text 17"/>
+          <p:cNvPr id="21" name="Text 17"/>
           <p:cNvSpPr/>
           <p:nvPr/>
         </p:nvSpPr>
@@ -13262,7 +13262,7 @@
       </p:sp>
       <p:sp>
         <p:nvSpPr>
-          <p:cNvPr id="21" name="Text 18"/>
+          <p:cNvPr id="22" name="Text 18"/>
           <p:cNvSpPr/>
           <p:nvPr/>
         </p:nvSpPr>
@@ -13304,7 +13304,7 @@
       </p:sp>
       <p:sp>
         <p:nvSpPr>
-          <p:cNvPr id="22" name="Shape 19"/>
+          <p:cNvPr id="23" name="Shape 19"/>
           <p:cNvSpPr/>
           <p:nvPr/>
         </p:nvSpPr>
@@ -13331,7 +13331,7 @@
       </p:sp>
       <p:sp>
         <p:nvSpPr>
-          <p:cNvPr id="23" name="Shape 20"/>
+          <p:cNvPr id="24" name="Shape 20"/>
           <p:cNvSpPr/>
           <p:nvPr/>
         </p:nvSpPr>
@@ -13351,7 +13351,7 @@
       </p:sp>
       <p:sp>
         <p:nvSpPr>
-          <p:cNvPr id="24" name="Text 21"/>
+          <p:cNvPr id="25" name="Text 21"/>
           <p:cNvSpPr/>
           <p:nvPr/>
         </p:nvSpPr>
@@ -13390,7 +13390,7 @@
       </p:sp>
       <p:sp>
         <p:nvSpPr>
-          <p:cNvPr id="25" name="Text 22"/>
+          <p:cNvPr id="26" name="Text 22"/>
           <p:cNvSpPr/>
           <p:nvPr/>
         </p:nvSpPr>
@@ -13429,7 +13429,7 @@
       </p:sp>
       <p:sp>
         <p:nvSpPr>
-          <p:cNvPr id="26" name="Text 23"/>
+          <p:cNvPr id="27" name="Text 23"/>
           <p:cNvSpPr/>
           <p:nvPr/>
         </p:nvSpPr>
@@ -13471,7 +13471,7 @@
       </p:sp>
       <p:sp>
         <p:nvSpPr>
-          <p:cNvPr id="27" name="Shape 24"/>
+          <p:cNvPr id="28" name="Shape 24"/>
           <p:cNvSpPr/>
           <p:nvPr/>
         </p:nvSpPr>
@@ -13498,7 +13498,7 @@
       </p:sp>
       <p:sp>
         <p:nvSpPr>
-          <p:cNvPr id="28" name="Shape 25"/>
+          <p:cNvPr id="29" name="Shape 25"/>
           <p:cNvSpPr/>
           <p:nvPr/>
         </p:nvSpPr>
@@ -13518,7 +13518,7 @@
       </p:sp>
       <p:sp>
         <p:nvSpPr>
-          <p:cNvPr id="29" name="Text 26"/>
+          <p:cNvPr id="30" name="Text 26"/>
           <p:cNvSpPr/>
           <p:nvPr/>
         </p:nvSpPr>
@@ -13557,7 +13557,7 @@
       </p:sp>
       <p:sp>
         <p:nvSpPr>
-          <p:cNvPr id="30" name="Text 27"/>
+          <p:cNvPr id="31" name="Text 27"/>
           <p:cNvSpPr/>
           <p:nvPr/>
         </p:nvSpPr>
@@ -13596,7 +13596,7 @@
       </p:sp>
       <p:sp>
         <p:nvSpPr>
-          <p:cNvPr id="31" name="Text 28"/>
+          <p:cNvPr id="32" name="Text 28"/>
           <p:cNvSpPr/>
           <p:nvPr/>
         </p:nvSpPr>
@@ -13842,7 +13842,7 @@
       </p:pic>
       <p:sp>
         <p:nvSpPr>
-          <p:cNvPr id="6" name="Shape 3"/>
+          <p:cNvPr id="7" name="Shape 3"/>
           <p:cNvSpPr/>
           <p:nvPr/>
         </p:nvSpPr>
@@ -13864,7 +13864,7 @@
       </p:sp>
       <p:sp>
         <p:nvSpPr>
-          <p:cNvPr id="7" name="Text 4"/>
+          <p:cNvPr id="8" name="Text 4"/>
           <p:cNvSpPr/>
           <p:nvPr/>
         </p:nvSpPr>
@@ -13903,7 +13903,7 @@
       </p:sp>
       <p:sp>
         <p:nvSpPr>
-          <p:cNvPr id="8" name="Text 5"/>
+          <p:cNvPr id="9" name="Text 5"/>
           <p:cNvSpPr/>
           <p:nvPr/>
         </p:nvSpPr>
@@ -13945,7 +13945,7 @@
       </p:sp>
       <p:sp>
         <p:nvSpPr>
-          <p:cNvPr id="9" name="Shape 6"/>
+          <p:cNvPr id="10" name="Shape 6"/>
           <p:cNvSpPr/>
           <p:nvPr/>
         </p:nvSpPr>
@@ -13967,7 +13967,7 @@
       </p:sp>
       <p:sp>
         <p:nvSpPr>
-          <p:cNvPr id="10" name="Text 7"/>
+          <p:cNvPr id="11" name="Text 7"/>
           <p:cNvSpPr/>
           <p:nvPr/>
         </p:nvSpPr>
@@ -14006,7 +14006,7 @@
       </p:sp>
       <p:sp>
         <p:nvSpPr>
-          <p:cNvPr id="11" name="Text 8"/>
+          <p:cNvPr id="12" name="Text 8"/>
           <p:cNvSpPr/>
           <p:nvPr/>
         </p:nvSpPr>
@@ -14048,7 +14048,7 @@
       </p:sp>
       <p:sp>
         <p:nvSpPr>
-          <p:cNvPr id="12" name="Shape 9"/>
+          <p:cNvPr id="13" name="Shape 9"/>
           <p:cNvSpPr/>
           <p:nvPr/>
         </p:nvSpPr>
@@ -14075,7 +14075,7 @@
       </p:sp>
       <p:sp>
         <p:nvSpPr>
-          <p:cNvPr id="13" name="Text 10"/>
+          <p:cNvPr id="14" name="Text 10"/>
           <p:cNvSpPr/>
           <p:nvPr/>
         </p:nvSpPr>
@@ -14114,7 +14114,7 @@
       </p:sp>
       <p:sp>
         <p:nvSpPr>
-          <p:cNvPr id="14" name="Text 11"/>
+          <p:cNvPr id="15" name="Text 11"/>
           <p:cNvSpPr/>
           <p:nvPr/>
         </p:nvSpPr>
@@ -14156,7 +14156,7 @@
       </p:sp>
       <p:sp>
         <p:nvSpPr>
-          <p:cNvPr id="15" name="Shape 12"/>
+          <p:cNvPr id="16" name="Shape 12"/>
           <p:cNvSpPr/>
           <p:nvPr/>
         </p:nvSpPr>
@@ -14183,7 +14183,7 @@
       </p:sp>
       <p:sp>
         <p:nvSpPr>
-          <p:cNvPr id="16" name="Text 13"/>
+          <p:cNvPr id="17" name="Text 13"/>
           <p:cNvSpPr/>
           <p:nvPr/>
         </p:nvSpPr>
@@ -14429,7 +14429,7 @@
       </p:pic>
       <p:sp>
         <p:nvSpPr>
-          <p:cNvPr id="6" name="Shape 3"/>
+          <p:cNvPr id="7" name="Shape 3"/>
           <p:cNvSpPr/>
           <p:nvPr/>
         </p:nvSpPr>
@@ -14456,7 +14456,7 @@
       </p:sp>
       <p:sp>
         <p:nvSpPr>
-          <p:cNvPr id="7" name="Shape 4"/>
+          <p:cNvPr id="8" name="Shape 4"/>
           <p:cNvSpPr/>
           <p:nvPr/>
         </p:nvSpPr>
@@ -14483,14 +14483,54 @@
       </p:sp>
       <p:sp>
         <p:nvSpPr>
-          <p:cNvPr id="8" name="Text 5"/>
-          <p:cNvSpPr/>
-          <p:nvPr/>
-        </p:nvSpPr>
-        <p:spPr>
-          <a:xfrm>
-            <a:off x="978408" y="2157984"/>
-            <a:ext cx="256032" cy="256032"/>
+          <p:cNvPr id="9" name="Shape 5"/>
+          <p:cNvSpPr/>
+          <p:nvPr/>
+        </p:nvSpPr>
+        <p:spPr>
+          <a:xfrm rot="2700000">
+            <a:off x="1041227" y="2297430"/>
+            <a:ext cx="58156" cy="27432"/>
+          </a:xfrm>
+          <a:prstGeom prst="rect">
+            <a:avLst/>
+          </a:prstGeom>
+          <a:solidFill>
+            <a:srgbClr val="5A05F4"/>
+          </a:solidFill>
+          <a:ln/>
+        </p:spPr>
+      </p:sp>
+      <p:sp>
+        <p:nvSpPr>
+          <p:cNvPr id="10" name="Shape 6"/>
+          <p:cNvSpPr/>
+          <p:nvPr/>
+        </p:nvSpPr>
+        <p:spPr>
+          <a:xfrm rot="-3000000">
+            <a:off x="1069025" y="2271370"/>
+            <a:ext cx="121432" cy="27432"/>
+          </a:xfrm>
+          <a:prstGeom prst="rect">
+            <a:avLst/>
+          </a:prstGeom>
+          <a:solidFill>
+            <a:srgbClr val="5A05F4"/>
+          </a:solidFill>
+          <a:ln/>
+        </p:spPr>
+      </p:sp>
+      <p:sp>
+        <p:nvSpPr>
+          <p:cNvPr id="11" name="Text 7"/>
+          <p:cNvSpPr/>
+          <p:nvPr/>
+        </p:nvSpPr>
+        <p:spPr>
+          <a:xfrm>
+            <a:off x="1362456" y="2103120"/>
+            <a:ext cx="4617720" cy="384048"/>
           </a:xfrm>
           <a:prstGeom prst="rect">
             <a:avLst/>
@@ -14502,57 +14542,18 @@
           <a:bodyPr wrap="square" lIns="0" tIns="0" rIns="0" bIns="0" rtlCol="0" anchor="ctr"/>
           <a:lstStyle/>
           <a:p>
-            <a:pPr algn="ctr" indent="0" marL="0">
-              <a:buNone/>
-            </a:pPr>
-            <a:r>
-              <a:rPr lang="en-US" sz="1000" b="1" dirty="0">
-                <a:solidFill>
-                  <a:srgbClr val="5A05F4"/>
+            <a:pPr indent="0" marL="0">
+              <a:buNone/>
+            </a:pPr>
+            <a:r>
+              <a:rPr lang="en-US" sz="1250" dirty="0">
+                <a:solidFill>
+                  <a:srgbClr val="111318"/>
                 </a:solidFill>
                 <a:latin typeface="Montserrat" pitchFamily="34" charset="0"/>
                 <a:ea typeface="Montserrat" pitchFamily="34" charset="-122"/>
                 <a:cs typeface="Montserrat" pitchFamily="34" charset="-120"/>
               </a:rPr>
-              <a:t>✓</a:t>
-            </a:r>
-            <a:endParaRPr lang="en-US" sz="1000" dirty="0"/>
-          </a:p>
-        </p:txBody>
-      </p:sp>
-      <p:sp>
-        <p:nvSpPr>
-          <p:cNvPr id="9" name="Text 6"/>
-          <p:cNvSpPr/>
-          <p:nvPr/>
-        </p:nvSpPr>
-        <p:spPr>
-          <a:xfrm>
-            <a:off x="1362456" y="2103120"/>
-            <a:ext cx="4617720" cy="384048"/>
-          </a:xfrm>
-          <a:prstGeom prst="rect">
-            <a:avLst/>
-          </a:prstGeom>
-          <a:noFill/>
-          <a:ln/>
-        </p:spPr>
-        <p:txBody>
-          <a:bodyPr wrap="square" lIns="0" tIns="0" rIns="0" bIns="0" rtlCol="0" anchor="ctr"/>
-          <a:lstStyle/>
-          <a:p>
-            <a:pPr indent="0" marL="0">
-              <a:buNone/>
-            </a:pPr>
-            <a:r>
-              <a:rPr lang="en-US" sz="1250" dirty="0">
-                <a:solidFill>
-                  <a:srgbClr val="111318"/>
-                </a:solidFill>
-                <a:latin typeface="Montserrat" pitchFamily="34" charset="0"/>
-                <a:ea typeface="Montserrat" pitchFamily="34" charset="-122"/>
-                <a:cs typeface="Montserrat" pitchFamily="34" charset="-120"/>
-              </a:rPr>
               <a:t>звичайне питання і ескалація дають різні моделі</a:t>
             </a:r>
             <a:endParaRPr lang="en-US" sz="1250" dirty="0"/>
@@ -14561,7 +14562,7 @@
       </p:sp>
       <p:sp>
         <p:nvSpPr>
-          <p:cNvPr id="10" name="Shape 7"/>
+          <p:cNvPr id="12" name="Shape 8"/>
           <p:cNvSpPr/>
           <p:nvPr/>
         </p:nvSpPr>
@@ -14588,14 +14589,54 @@
       </p:sp>
       <p:sp>
         <p:nvSpPr>
-          <p:cNvPr id="11" name="Text 8"/>
-          <p:cNvSpPr/>
-          <p:nvPr/>
-        </p:nvSpPr>
-        <p:spPr>
-          <a:xfrm>
-            <a:off x="978408" y="2724912"/>
-            <a:ext cx="256032" cy="256032"/>
+          <p:cNvPr id="13" name="Shape 9"/>
+          <p:cNvSpPr/>
+          <p:nvPr/>
+        </p:nvSpPr>
+        <p:spPr>
+          <a:xfrm rot="2700000">
+            <a:off x="1041227" y="2864358"/>
+            <a:ext cx="58156" cy="27432"/>
+          </a:xfrm>
+          <a:prstGeom prst="rect">
+            <a:avLst/>
+          </a:prstGeom>
+          <a:solidFill>
+            <a:srgbClr val="5A05F4"/>
+          </a:solidFill>
+          <a:ln/>
+        </p:spPr>
+      </p:sp>
+      <p:sp>
+        <p:nvSpPr>
+          <p:cNvPr id="14" name="Shape 10"/>
+          <p:cNvSpPr/>
+          <p:nvPr/>
+        </p:nvSpPr>
+        <p:spPr>
+          <a:xfrm rot="-3000000">
+            <a:off x="1069025" y="2838298"/>
+            <a:ext cx="121432" cy="27432"/>
+          </a:xfrm>
+          <a:prstGeom prst="rect">
+            <a:avLst/>
+          </a:prstGeom>
+          <a:solidFill>
+            <a:srgbClr val="5A05F4"/>
+          </a:solidFill>
+          <a:ln/>
+        </p:spPr>
+      </p:sp>
+      <p:sp>
+        <p:nvSpPr>
+          <p:cNvPr id="15" name="Text 11"/>
+          <p:cNvSpPr/>
+          <p:nvPr/>
+        </p:nvSpPr>
+        <p:spPr>
+          <a:xfrm>
+            <a:off x="1362456" y="2670048"/>
+            <a:ext cx="4617720" cy="384048"/>
           </a:xfrm>
           <a:prstGeom prst="rect">
             <a:avLst/>
@@ -14607,57 +14648,18 @@
           <a:bodyPr wrap="square" lIns="0" tIns="0" rIns="0" bIns="0" rtlCol="0" anchor="ctr"/>
           <a:lstStyle/>
           <a:p>
-            <a:pPr algn="ctr" indent="0" marL="0">
-              <a:buNone/>
-            </a:pPr>
-            <a:r>
-              <a:rPr lang="en-US" sz="1000" b="1" dirty="0">
-                <a:solidFill>
-                  <a:srgbClr val="5A05F4"/>
+            <a:pPr indent="0" marL="0">
+              <a:buNone/>
+            </a:pPr>
+            <a:r>
+              <a:rPr lang="en-US" sz="1250" dirty="0">
+                <a:solidFill>
+                  <a:srgbClr val="111318"/>
                 </a:solidFill>
                 <a:latin typeface="Montserrat" pitchFamily="34" charset="0"/>
                 <a:ea typeface="Montserrat" pitchFamily="34" charset="-122"/>
                 <a:cs typeface="Montserrat" pitchFamily="34" charset="-120"/>
               </a:rPr>
-              <a:t>✓</a:t>
-            </a:r>
-            <a:endParaRPr lang="en-US" sz="1000" dirty="0"/>
-          </a:p>
-        </p:txBody>
-      </p:sp>
-      <p:sp>
-        <p:nvSpPr>
-          <p:cNvPr id="12" name="Text 9"/>
-          <p:cNvSpPr/>
-          <p:nvPr/>
-        </p:nvSpPr>
-        <p:spPr>
-          <a:xfrm>
-            <a:off x="1362456" y="2670048"/>
-            <a:ext cx="4617720" cy="384048"/>
-          </a:xfrm>
-          <a:prstGeom prst="rect">
-            <a:avLst/>
-          </a:prstGeom>
-          <a:noFill/>
-          <a:ln/>
-        </p:spPr>
-        <p:txBody>
-          <a:bodyPr wrap="square" lIns="0" tIns="0" rIns="0" bIns="0" rtlCol="0" anchor="ctr"/>
-          <a:lstStyle/>
-          <a:p>
-            <a:pPr indent="0" marL="0">
-              <a:buNone/>
-            </a:pPr>
-            <a:r>
-              <a:rPr lang="en-US" sz="1250" dirty="0">
-                <a:solidFill>
-                  <a:srgbClr val="111318"/>
-                </a:solidFill>
-                <a:latin typeface="Montserrat" pitchFamily="34" charset="0"/>
-                <a:ea typeface="Montserrat" pitchFamily="34" charset="-122"/>
-                <a:cs typeface="Montserrat" pitchFamily="34" charset="-120"/>
-              </a:rPr>
               <a:t>поясню, чому рішення в сервісі, а не в адаптері</a:t>
             </a:r>
             <a:endParaRPr lang="en-US" sz="1250" dirty="0"/>
@@ -14666,7 +14668,7 @@
       </p:sp>
       <p:sp>
         <p:nvSpPr>
-          <p:cNvPr id="13" name="Shape 10"/>
+          <p:cNvPr id="16" name="Shape 12"/>
           <p:cNvSpPr/>
           <p:nvPr/>
         </p:nvSpPr>
@@ -14693,14 +14695,54 @@
       </p:sp>
       <p:sp>
         <p:nvSpPr>
-          <p:cNvPr id="14" name="Text 11"/>
-          <p:cNvSpPr/>
-          <p:nvPr/>
-        </p:nvSpPr>
-        <p:spPr>
-          <a:xfrm>
-            <a:off x="6144768" y="2157984"/>
-            <a:ext cx="256032" cy="256032"/>
+          <p:cNvPr id="17" name="Shape 13"/>
+          <p:cNvSpPr/>
+          <p:nvPr/>
+        </p:nvSpPr>
+        <p:spPr>
+          <a:xfrm rot="2700000">
+            <a:off x="6207587" y="2297430"/>
+            <a:ext cx="58156" cy="27432"/>
+          </a:xfrm>
+          <a:prstGeom prst="rect">
+            <a:avLst/>
+          </a:prstGeom>
+          <a:solidFill>
+            <a:srgbClr val="5A05F4"/>
+          </a:solidFill>
+          <a:ln/>
+        </p:spPr>
+      </p:sp>
+      <p:sp>
+        <p:nvSpPr>
+          <p:cNvPr id="18" name="Shape 14"/>
+          <p:cNvSpPr/>
+          <p:nvPr/>
+        </p:nvSpPr>
+        <p:spPr>
+          <a:xfrm rot="-3000000">
+            <a:off x="6235385" y="2271370"/>
+            <a:ext cx="121432" cy="27432"/>
+          </a:xfrm>
+          <a:prstGeom prst="rect">
+            <a:avLst/>
+          </a:prstGeom>
+          <a:solidFill>
+            <a:srgbClr val="5A05F4"/>
+          </a:solidFill>
+          <a:ln/>
+        </p:spPr>
+      </p:sp>
+      <p:sp>
+        <p:nvSpPr>
+          <p:cNvPr id="19" name="Text 15"/>
+          <p:cNvSpPr/>
+          <p:nvPr/>
+        </p:nvSpPr>
+        <p:spPr>
+          <a:xfrm>
+            <a:off x="6528816" y="2103120"/>
+            <a:ext cx="4617720" cy="384048"/>
           </a:xfrm>
           <a:prstGeom prst="rect">
             <a:avLst/>
@@ -14712,57 +14754,18 @@
           <a:bodyPr wrap="square" lIns="0" tIns="0" rIns="0" bIns="0" rtlCol="0" anchor="ctr"/>
           <a:lstStyle/>
           <a:p>
-            <a:pPr algn="ctr" indent="0" marL="0">
-              <a:buNone/>
-            </a:pPr>
-            <a:r>
-              <a:rPr lang="en-US" sz="1000" b="1" dirty="0">
-                <a:solidFill>
-                  <a:srgbClr val="5A05F4"/>
+            <a:pPr indent="0" marL="0">
+              <a:buNone/>
+            </a:pPr>
+            <a:r>
+              <a:rPr lang="en-US" sz="1250" dirty="0">
+                <a:solidFill>
+                  <a:srgbClr val="111318"/>
                 </a:solidFill>
                 <a:latin typeface="Montserrat" pitchFamily="34" charset="0"/>
                 <a:ea typeface="Montserrat" pitchFamily="34" charset="-122"/>
                 <a:cs typeface="Montserrat" pitchFamily="34" charset="-120"/>
               </a:rPr>
-              <a:t>✓</a:t>
-            </a:r>
-            <a:endParaRPr lang="en-US" sz="1000" dirty="0"/>
-          </a:p>
-        </p:txBody>
-      </p:sp>
-      <p:sp>
-        <p:nvSpPr>
-          <p:cNvPr id="15" name="Text 12"/>
-          <p:cNvSpPr/>
-          <p:nvPr/>
-        </p:nvSpPr>
-        <p:spPr>
-          <a:xfrm>
-            <a:off x="6528816" y="2103120"/>
-            <a:ext cx="4617720" cy="384048"/>
-          </a:xfrm>
-          <a:prstGeom prst="rect">
-            <a:avLst/>
-          </a:prstGeom>
-          <a:noFill/>
-          <a:ln/>
-        </p:spPr>
-        <p:txBody>
-          <a:bodyPr wrap="square" lIns="0" tIns="0" rIns="0" bIns="0" rtlCol="0" anchor="ctr"/>
-          <a:lstStyle/>
-          <a:p>
-            <a:pPr indent="0" marL="0">
-              <a:buNone/>
-            </a:pPr>
-            <a:r>
-              <a:rPr lang="en-US" sz="1250" dirty="0">
-                <a:solidFill>
-                  <a:srgbClr val="111318"/>
-                </a:solidFill>
-                <a:latin typeface="Montserrat" pitchFamily="34" charset="0"/>
-                <a:ea typeface="Montserrat" pitchFamily="34" charset="-122"/>
-                <a:cs typeface="Montserrat" pitchFamily="34" charset="-120"/>
-              </a:rPr>
               <a:t>додам провайдера, не чіпаючи код сервісу</a:t>
             </a:r>
             <a:endParaRPr lang="en-US" sz="1250" dirty="0"/>
@@ -14771,7 +14774,7 @@
       </p:sp>
       <p:sp>
         <p:nvSpPr>
-          <p:cNvPr id="16" name="Shape 13"/>
+          <p:cNvPr id="20" name="Shape 16"/>
           <p:cNvSpPr/>
           <p:nvPr/>
         </p:nvSpPr>
@@ -14798,14 +14801,54 @@
       </p:sp>
       <p:sp>
         <p:nvSpPr>
-          <p:cNvPr id="17" name="Text 14"/>
-          <p:cNvSpPr/>
-          <p:nvPr/>
-        </p:nvSpPr>
-        <p:spPr>
-          <a:xfrm>
-            <a:off x="6144768" y="2724912"/>
-            <a:ext cx="256032" cy="256032"/>
+          <p:cNvPr id="21" name="Shape 17"/>
+          <p:cNvSpPr/>
+          <p:nvPr/>
+        </p:nvSpPr>
+        <p:spPr>
+          <a:xfrm rot="2700000">
+            <a:off x="6207587" y="2864358"/>
+            <a:ext cx="58156" cy="27432"/>
+          </a:xfrm>
+          <a:prstGeom prst="rect">
+            <a:avLst/>
+          </a:prstGeom>
+          <a:solidFill>
+            <a:srgbClr val="5A05F4"/>
+          </a:solidFill>
+          <a:ln/>
+        </p:spPr>
+      </p:sp>
+      <p:sp>
+        <p:nvSpPr>
+          <p:cNvPr id="22" name="Shape 18"/>
+          <p:cNvSpPr/>
+          <p:nvPr/>
+        </p:nvSpPr>
+        <p:spPr>
+          <a:xfrm rot="-3000000">
+            <a:off x="6235385" y="2838298"/>
+            <a:ext cx="121432" cy="27432"/>
+          </a:xfrm>
+          <a:prstGeom prst="rect">
+            <a:avLst/>
+          </a:prstGeom>
+          <a:solidFill>
+            <a:srgbClr val="5A05F4"/>
+          </a:solidFill>
+          <a:ln/>
+        </p:spPr>
+      </p:sp>
+      <p:sp>
+        <p:nvSpPr>
+          <p:cNvPr id="23" name="Text 19"/>
+          <p:cNvSpPr/>
+          <p:nvPr/>
+        </p:nvSpPr>
+        <p:spPr>
+          <a:xfrm>
+            <a:off x="6528816" y="2670048"/>
+            <a:ext cx="4617720" cy="384048"/>
           </a:xfrm>
           <a:prstGeom prst="rect">
             <a:avLst/>
@@ -14817,57 +14860,18 @@
           <a:bodyPr wrap="square" lIns="0" tIns="0" rIns="0" bIns="0" rtlCol="0" anchor="ctr"/>
           <a:lstStyle/>
           <a:p>
-            <a:pPr algn="ctr" indent="0" marL="0">
-              <a:buNone/>
-            </a:pPr>
-            <a:r>
-              <a:rPr lang="en-US" sz="1000" b="1" dirty="0">
-                <a:solidFill>
-                  <a:srgbClr val="5A05F4"/>
+            <a:pPr indent="0" marL="0">
+              <a:buNone/>
+            </a:pPr>
+            <a:r>
+              <a:rPr lang="en-US" sz="1250" dirty="0">
+                <a:solidFill>
+                  <a:srgbClr val="111318"/>
                 </a:solidFill>
                 <a:latin typeface="Montserrat" pitchFamily="34" charset="0"/>
                 <a:ea typeface="Montserrat" pitchFamily="34" charset="-122"/>
                 <a:cs typeface="Montserrat" pitchFamily="34" charset="-120"/>
               </a:rPr>
-              <a:t>✓</a:t>
-            </a:r>
-            <a:endParaRPr lang="en-US" sz="1000" dirty="0"/>
-          </a:p>
-        </p:txBody>
-      </p:sp>
-      <p:sp>
-        <p:nvSpPr>
-          <p:cNvPr id="18" name="Text 15"/>
-          <p:cNvSpPr/>
-          <p:nvPr/>
-        </p:nvSpPr>
-        <p:spPr>
-          <a:xfrm>
-            <a:off x="6528816" y="2670048"/>
-            <a:ext cx="4617720" cy="384048"/>
-          </a:xfrm>
-          <a:prstGeom prst="rect">
-            <a:avLst/>
-          </a:prstGeom>
-          <a:noFill/>
-          <a:ln/>
-        </p:spPr>
-        <p:txBody>
-          <a:bodyPr wrap="square" lIns="0" tIns="0" rIns="0" bIns="0" rtlCol="0" anchor="ctr"/>
-          <a:lstStyle/>
-          <a:p>
-            <a:pPr indent="0" marL="0">
-              <a:buNone/>
-            </a:pPr>
-            <a:r>
-              <a:rPr lang="en-US" sz="1250" dirty="0">
-                <a:solidFill>
-                  <a:srgbClr val="111318"/>
-                </a:solidFill>
-                <a:latin typeface="Montserrat" pitchFamily="34" charset="0"/>
-                <a:ea typeface="Montserrat" pitchFamily="34" charset="-122"/>
-                <a:cs typeface="Montserrat" pitchFamily="34" charset="-120"/>
-              </a:rPr>
               <a:t>мій fallback-порядок записаний</a:t>
             </a:r>
             <a:endParaRPr lang="en-US" sz="1250" dirty="0"/>
@@ -14876,7 +14880,7 @@
       </p:sp>
       <p:sp>
         <p:nvSpPr>
-          <p:cNvPr id="19" name="Text 16"/>
+          <p:cNvPr id="24" name="Text 20"/>
           <p:cNvSpPr/>
           <p:nvPr/>
         </p:nvSpPr>
@@ -15119,7 +15123,7 @@
       </p:pic>
       <p:sp>
         <p:nvSpPr>
-          <p:cNvPr id="6" name="Shape 3"/>
+          <p:cNvPr id="7" name="Shape 3"/>
           <p:cNvSpPr/>
           <p:nvPr/>
         </p:nvSpPr>
@@ -15146,7 +15150,7 @@
       </p:sp>
       <p:sp>
         <p:nvSpPr>
-          <p:cNvPr id="7" name="Shape 4"/>
+          <p:cNvPr id="8" name="Shape 4"/>
           <p:cNvSpPr/>
           <p:nvPr/>
         </p:nvSpPr>
@@ -15166,14 +15170,54 @@
       </p:sp>
       <p:sp>
         <p:nvSpPr>
-          <p:cNvPr id="8" name="Text 5"/>
-          <p:cNvSpPr/>
-          <p:nvPr/>
-        </p:nvSpPr>
-        <p:spPr>
-          <a:xfrm>
-            <a:off x="768096" y="2020824"/>
-            <a:ext cx="384048" cy="384048"/>
+          <p:cNvPr id="9" name="Shape 5"/>
+          <p:cNvSpPr/>
+          <p:nvPr/>
+        </p:nvSpPr>
+        <p:spPr>
+          <a:xfrm rot="2700000">
+            <a:off x="871789" y="2197102"/>
+            <a:ext cx="176662" cy="31492"/>
+          </a:xfrm>
+          <a:prstGeom prst="rect">
+            <a:avLst/>
+          </a:prstGeom>
+          <a:solidFill>
+            <a:srgbClr val="C62A2A"/>
+          </a:solidFill>
+          <a:ln/>
+        </p:spPr>
+      </p:sp>
+      <p:sp>
+        <p:nvSpPr>
+          <p:cNvPr id="10" name="Shape 6"/>
+          <p:cNvSpPr/>
+          <p:nvPr/>
+        </p:nvSpPr>
+        <p:spPr>
+          <a:xfrm rot="-2700000">
+            <a:off x="871789" y="2197102"/>
+            <a:ext cx="176662" cy="31492"/>
+          </a:xfrm>
+          <a:prstGeom prst="rect">
+            <a:avLst/>
+          </a:prstGeom>
+          <a:solidFill>
+            <a:srgbClr val="C62A2A"/>
+          </a:solidFill>
+          <a:ln/>
+        </p:spPr>
+      </p:sp>
+      <p:sp>
+        <p:nvSpPr>
+          <p:cNvPr id="11" name="Text 7"/>
+          <p:cNvSpPr/>
+          <p:nvPr/>
+        </p:nvSpPr>
+        <p:spPr>
+          <a:xfrm>
+            <a:off x="1298448" y="1828800"/>
+            <a:ext cx="10149840" cy="777240"/>
           </a:xfrm>
           <a:prstGeom prst="rect">
             <a:avLst/>
@@ -15185,71 +15229,32 @@
           <a:bodyPr wrap="square" lIns="0" tIns="0" rIns="0" bIns="0" rtlCol="0" anchor="ctr"/>
           <a:lstStyle/>
           <a:p>
-            <a:pPr algn="ctr" indent="0" marL="0">
-              <a:buNone/>
-            </a:pPr>
-            <a:r>
-              <a:rPr lang="en-US" sz="1300" b="1" dirty="0">
-                <a:solidFill>
-                  <a:srgbClr val="C62A2A"/>
+            <a:pPr indent="0" marL="0">
+              <a:buNone/>
+            </a:pPr>
+            <a:r>
+              <a:rPr lang="en-US" sz="1350" b="1" dirty="0">
+                <a:solidFill>
+                  <a:srgbClr val="111318"/>
                 </a:solidFill>
                 <a:latin typeface="Montserrat" pitchFamily="34" charset="0"/>
                 <a:ea typeface="Montserrat" pitchFamily="34" charset="-122"/>
                 <a:cs typeface="Montserrat" pitchFamily="34" charset="-120"/>
               </a:rPr>
-              <a:t>✕</a:t>
-            </a:r>
-            <a:endParaRPr lang="en-US" sz="1300" dirty="0"/>
-          </a:p>
-        </p:txBody>
-      </p:sp>
-      <p:sp>
-        <p:nvSpPr>
-          <p:cNvPr id="9" name="Text 6"/>
-          <p:cNvSpPr/>
-          <p:nvPr/>
-        </p:nvSpPr>
-        <p:spPr>
-          <a:xfrm>
-            <a:off x="1298448" y="1828800"/>
-            <a:ext cx="10149840" cy="777240"/>
-          </a:xfrm>
-          <a:prstGeom prst="rect">
-            <a:avLst/>
-          </a:prstGeom>
-          <a:noFill/>
-          <a:ln/>
-        </p:spPr>
-        <p:txBody>
-          <a:bodyPr wrap="square" lIns="0" tIns="0" rIns="0" bIns="0" rtlCol="0" anchor="ctr"/>
-          <a:lstStyle/>
-          <a:p>
+              <a:t>Рішення про модель — у конфізі адаптера   </a:t>
+            </a:r>
             <a:pPr indent="0" marL="0">
               <a:buNone/>
             </a:pPr>
             <a:r>
-              <a:rPr lang="en-US" sz="1350" b="1" dirty="0">
-                <a:solidFill>
-                  <a:srgbClr val="111318"/>
+              <a:rPr lang="en-US" sz="1200" dirty="0">
+                <a:solidFill>
+                  <a:srgbClr val="555B66"/>
                 </a:solidFill>
                 <a:latin typeface="Montserrat" pitchFamily="34" charset="0"/>
                 <a:ea typeface="Montserrat" pitchFamily="34" charset="-122"/>
                 <a:cs typeface="Montserrat" pitchFamily="34" charset="-120"/>
               </a:rPr>
-              <a:t>Рішення про модель — у конфізі адаптера   </a:t>
-            </a:r>
-            <a:pPr indent="0" marL="0">
-              <a:buNone/>
-            </a:pPr>
-            <a:r>
-              <a:rPr lang="en-US" sz="1200" dirty="0">
-                <a:solidFill>
-                  <a:srgbClr val="555B66"/>
-                </a:solidFill>
-                <a:latin typeface="Montserrat" pitchFamily="34" charset="0"/>
-                <a:ea typeface="Montserrat" pitchFamily="34" charset="-122"/>
-                <a:cs typeface="Montserrat" pitchFamily="34" charset="-120"/>
-              </a:rPr>
               <a:t>прапорці не переносяться між інструментами, механізми — так</a:t>
             </a:r>
             <a:endParaRPr lang="en-US" sz="1350" dirty="0"/>
@@ -15258,7 +15263,7 @@
       </p:sp>
       <p:sp>
         <p:nvSpPr>
-          <p:cNvPr id="10" name="Shape 7"/>
+          <p:cNvPr id="12" name="Shape 8"/>
           <p:cNvSpPr/>
           <p:nvPr/>
         </p:nvSpPr>
@@ -15285,7 +15290,7 @@
       </p:sp>
       <p:sp>
         <p:nvSpPr>
-          <p:cNvPr id="11" name="Shape 8"/>
+          <p:cNvPr id="13" name="Shape 9"/>
           <p:cNvSpPr/>
           <p:nvPr/>
         </p:nvSpPr>
@@ -15305,14 +15310,54 @@
       </p:sp>
       <p:sp>
         <p:nvSpPr>
-          <p:cNvPr id="12" name="Text 9"/>
-          <p:cNvSpPr/>
-          <p:nvPr/>
-        </p:nvSpPr>
-        <p:spPr>
-          <a:xfrm>
-            <a:off x="768096" y="2935224"/>
-            <a:ext cx="384048" cy="384048"/>
+          <p:cNvPr id="14" name="Shape 10"/>
+          <p:cNvSpPr/>
+          <p:nvPr/>
+        </p:nvSpPr>
+        <p:spPr>
+          <a:xfrm rot="2700000">
+            <a:off x="871789" y="3111502"/>
+            <a:ext cx="176662" cy="31492"/>
+          </a:xfrm>
+          <a:prstGeom prst="rect">
+            <a:avLst/>
+          </a:prstGeom>
+          <a:solidFill>
+            <a:srgbClr val="C62A2A"/>
+          </a:solidFill>
+          <a:ln/>
+        </p:spPr>
+      </p:sp>
+      <p:sp>
+        <p:nvSpPr>
+          <p:cNvPr id="15" name="Shape 11"/>
+          <p:cNvSpPr/>
+          <p:nvPr/>
+        </p:nvSpPr>
+        <p:spPr>
+          <a:xfrm rot="-2700000">
+            <a:off x="871789" y="3111502"/>
+            <a:ext cx="176662" cy="31492"/>
+          </a:xfrm>
+          <a:prstGeom prst="rect">
+            <a:avLst/>
+          </a:prstGeom>
+          <a:solidFill>
+            <a:srgbClr val="C62A2A"/>
+          </a:solidFill>
+          <a:ln/>
+        </p:spPr>
+      </p:sp>
+      <p:sp>
+        <p:nvSpPr>
+          <p:cNvPr id="16" name="Text 12"/>
+          <p:cNvSpPr/>
+          <p:nvPr/>
+        </p:nvSpPr>
+        <p:spPr>
+          <a:xfrm>
+            <a:off x="1298448" y="2743200"/>
+            <a:ext cx="10149840" cy="777240"/>
           </a:xfrm>
           <a:prstGeom prst="rect">
             <a:avLst/>
@@ -15324,71 +15369,32 @@
           <a:bodyPr wrap="square" lIns="0" tIns="0" rIns="0" bIns="0" rtlCol="0" anchor="ctr"/>
           <a:lstStyle/>
           <a:p>
-            <a:pPr algn="ctr" indent="0" marL="0">
-              <a:buNone/>
-            </a:pPr>
-            <a:r>
-              <a:rPr lang="en-US" sz="1300" b="1" dirty="0">
-                <a:solidFill>
-                  <a:srgbClr val="C62A2A"/>
+            <a:pPr indent="0" marL="0">
+              <a:buNone/>
+            </a:pPr>
+            <a:r>
+              <a:rPr lang="en-US" sz="1350" b="1" dirty="0">
+                <a:solidFill>
+                  <a:srgbClr val="111318"/>
                 </a:solidFill>
                 <a:latin typeface="Montserrat" pitchFamily="34" charset="0"/>
                 <a:ea typeface="Montserrat" pitchFamily="34" charset="-122"/>
                 <a:cs typeface="Montserrat" pitchFamily="34" charset="-120"/>
               </a:rPr>
-              <a:t>✕</a:t>
-            </a:r>
-            <a:endParaRPr lang="en-US" sz="1300" dirty="0"/>
-          </a:p>
-        </p:txBody>
-      </p:sp>
-      <p:sp>
-        <p:nvSpPr>
-          <p:cNvPr id="13" name="Text 10"/>
-          <p:cNvSpPr/>
-          <p:nvPr/>
-        </p:nvSpPr>
-        <p:spPr>
-          <a:xfrm>
-            <a:off x="1298448" y="2743200"/>
-            <a:ext cx="10149840" cy="777240"/>
-          </a:xfrm>
-          <a:prstGeom prst="rect">
-            <a:avLst/>
-          </a:prstGeom>
-          <a:noFill/>
-          <a:ln/>
-        </p:spPr>
-        <p:txBody>
-          <a:bodyPr wrap="square" lIns="0" tIns="0" rIns="0" bIns="0" rtlCol="0" anchor="ctr"/>
-          <a:lstStyle/>
-          <a:p>
+              <a:t>Жорстке ім'я моделі по всьому коду   </a:t>
+            </a:r>
             <a:pPr indent="0" marL="0">
               <a:buNone/>
             </a:pPr>
             <a:r>
-              <a:rPr lang="en-US" sz="1350" b="1" dirty="0">
-                <a:solidFill>
-                  <a:srgbClr val="111318"/>
+              <a:rPr lang="en-US" sz="1200" dirty="0">
+                <a:solidFill>
+                  <a:srgbClr val="555B66"/>
                 </a:solidFill>
                 <a:latin typeface="Montserrat" pitchFamily="34" charset="0"/>
                 <a:ea typeface="Montserrat" pitchFamily="34" charset="-122"/>
                 <a:cs typeface="Montserrat" pitchFamily="34" charset="-120"/>
               </a:rPr>
-              <a:t>Жорстке ім'я моделі по всьому коду   </a:t>
-            </a:r>
-            <a:pPr indent="0" marL="0">
-              <a:buNone/>
-            </a:pPr>
-            <a:r>
-              <a:rPr lang="en-US" sz="1200" dirty="0">
-                <a:solidFill>
-                  <a:srgbClr val="555B66"/>
-                </a:solidFill>
-                <a:latin typeface="Montserrat" pitchFamily="34" charset="0"/>
-                <a:ea typeface="Montserrat" pitchFamily="34" charset="-122"/>
-                <a:cs typeface="Montserrat" pitchFamily="34" charset="-120"/>
-              </a:rPr>
               <a:t>заміна провайдера перетворюється на пошук рядків</a:t>
             </a:r>
             <a:endParaRPr lang="en-US" sz="1350" dirty="0"/>
@@ -15397,7 +15403,7 @@
       </p:sp>
       <p:sp>
         <p:nvSpPr>
-          <p:cNvPr id="14" name="Shape 11"/>
+          <p:cNvPr id="17" name="Shape 13"/>
           <p:cNvSpPr/>
           <p:nvPr/>
         </p:nvSpPr>
@@ -15424,7 +15430,7 @@
       </p:sp>
       <p:sp>
         <p:nvSpPr>
-          <p:cNvPr id="15" name="Shape 12"/>
+          <p:cNvPr id="18" name="Shape 14"/>
           <p:cNvSpPr/>
           <p:nvPr/>
         </p:nvSpPr>
@@ -15444,14 +15450,54 @@
       </p:sp>
       <p:sp>
         <p:nvSpPr>
-          <p:cNvPr id="16" name="Text 13"/>
-          <p:cNvSpPr/>
-          <p:nvPr/>
-        </p:nvSpPr>
-        <p:spPr>
-          <a:xfrm>
-            <a:off x="768096" y="3849624"/>
-            <a:ext cx="384048" cy="384048"/>
+          <p:cNvPr id="19" name="Shape 15"/>
+          <p:cNvSpPr/>
+          <p:nvPr/>
+        </p:nvSpPr>
+        <p:spPr>
+          <a:xfrm rot="2700000">
+            <a:off x="871789" y="4025902"/>
+            <a:ext cx="176662" cy="31492"/>
+          </a:xfrm>
+          <a:prstGeom prst="rect">
+            <a:avLst/>
+          </a:prstGeom>
+          <a:solidFill>
+            <a:srgbClr val="C62A2A"/>
+          </a:solidFill>
+          <a:ln/>
+        </p:spPr>
+      </p:sp>
+      <p:sp>
+        <p:nvSpPr>
+          <p:cNvPr id="20" name="Shape 16"/>
+          <p:cNvSpPr/>
+          <p:nvPr/>
+        </p:nvSpPr>
+        <p:spPr>
+          <a:xfrm rot="-2700000">
+            <a:off x="871789" y="4025902"/>
+            <a:ext cx="176662" cy="31492"/>
+          </a:xfrm>
+          <a:prstGeom prst="rect">
+            <a:avLst/>
+          </a:prstGeom>
+          <a:solidFill>
+            <a:srgbClr val="C62A2A"/>
+          </a:solidFill>
+          <a:ln/>
+        </p:spPr>
+      </p:sp>
+      <p:sp>
+        <p:nvSpPr>
+          <p:cNvPr id="21" name="Text 17"/>
+          <p:cNvSpPr/>
+          <p:nvPr/>
+        </p:nvSpPr>
+        <p:spPr>
+          <a:xfrm>
+            <a:off x="1298448" y="3657600"/>
+            <a:ext cx="10149840" cy="777240"/>
           </a:xfrm>
           <a:prstGeom prst="rect">
             <a:avLst/>
@@ -15463,71 +15509,32 @@
           <a:bodyPr wrap="square" lIns="0" tIns="0" rIns="0" bIns="0" rtlCol="0" anchor="ctr"/>
           <a:lstStyle/>
           <a:p>
-            <a:pPr algn="ctr" indent="0" marL="0">
-              <a:buNone/>
-            </a:pPr>
-            <a:r>
-              <a:rPr lang="en-US" sz="1300" b="1" dirty="0">
-                <a:solidFill>
-                  <a:srgbClr val="C62A2A"/>
+            <a:pPr indent="0" marL="0">
+              <a:buNone/>
+            </a:pPr>
+            <a:r>
+              <a:rPr lang="en-US" sz="1350" b="1" dirty="0">
+                <a:solidFill>
+                  <a:srgbClr val="111318"/>
                 </a:solidFill>
                 <a:latin typeface="Montserrat" pitchFamily="34" charset="0"/>
                 <a:ea typeface="Montserrat" pitchFamily="34" charset="-122"/>
                 <a:cs typeface="Montserrat" pitchFamily="34" charset="-120"/>
               </a:rPr>
-              <a:t>✕</a:t>
-            </a:r>
-            <a:endParaRPr lang="en-US" sz="1300" dirty="0"/>
-          </a:p>
-        </p:txBody>
-      </p:sp>
-      <p:sp>
-        <p:nvSpPr>
-          <p:cNvPr id="17" name="Text 14"/>
-          <p:cNvSpPr/>
-          <p:nvPr/>
-        </p:nvSpPr>
-        <p:spPr>
-          <a:xfrm>
-            <a:off x="1298448" y="3657600"/>
-            <a:ext cx="10149840" cy="777240"/>
-          </a:xfrm>
-          <a:prstGeom prst="rect">
-            <a:avLst/>
-          </a:prstGeom>
-          <a:noFill/>
-          <a:ln/>
-        </p:spPr>
-        <p:txBody>
-          <a:bodyPr wrap="square" lIns="0" tIns="0" rIns="0" bIns="0" rtlCol="0" anchor="ctr"/>
-          <a:lstStyle/>
-          <a:p>
+              <a:t>Роутинг за випадковим числом   </a:t>
+            </a:r>
             <a:pPr indent="0" marL="0">
               <a:buNone/>
             </a:pPr>
             <a:r>
-              <a:rPr lang="en-US" sz="1350" b="1" dirty="0">
-                <a:solidFill>
-                  <a:srgbClr val="111318"/>
+              <a:rPr lang="en-US" sz="1200" dirty="0">
+                <a:solidFill>
+                  <a:srgbClr val="555B66"/>
                 </a:solidFill>
                 <a:latin typeface="Montserrat" pitchFamily="34" charset="0"/>
                 <a:ea typeface="Montserrat" pitchFamily="34" charset="-122"/>
                 <a:cs typeface="Montserrat" pitchFamily="34" charset="-120"/>
               </a:rPr>
-              <a:t>Роутинг за випадковим числом   </a:t>
-            </a:r>
-            <a:pPr indent="0" marL="0">
-              <a:buNone/>
-            </a:pPr>
-            <a:r>
-              <a:rPr lang="en-US" sz="1200" dirty="0">
-                <a:solidFill>
-                  <a:srgbClr val="555B66"/>
-                </a:solidFill>
-                <a:latin typeface="Montserrat" pitchFamily="34" charset="0"/>
-                <a:ea typeface="Montserrat" pitchFamily="34" charset="-122"/>
-                <a:cs typeface="Montserrat" pitchFamily="34" charset="-120"/>
-              </a:rPr>
               <a:t>непередбачувано для користувача, невідтворювано для вас</a:t>
             </a:r>
             <a:endParaRPr lang="en-US" sz="1350" dirty="0"/>
@@ -15536,7 +15543,7 @@
       </p:sp>
       <p:sp>
         <p:nvSpPr>
-          <p:cNvPr id="18" name="Shape 15"/>
+          <p:cNvPr id="22" name="Shape 18"/>
           <p:cNvSpPr/>
           <p:nvPr/>
         </p:nvSpPr>
@@ -15563,7 +15570,7 @@
       </p:sp>
       <p:sp>
         <p:nvSpPr>
-          <p:cNvPr id="19" name="Shape 16"/>
+          <p:cNvPr id="23" name="Shape 19"/>
           <p:cNvSpPr/>
           <p:nvPr/>
         </p:nvSpPr>
@@ -15583,46 +15590,47 @@
       </p:sp>
       <p:sp>
         <p:nvSpPr>
-          <p:cNvPr id="20" name="Text 17"/>
-          <p:cNvSpPr/>
-          <p:nvPr/>
-        </p:nvSpPr>
-        <p:spPr>
-          <a:xfrm>
-            <a:off x="768096" y="4764024"/>
-            <a:ext cx="384048" cy="384048"/>
-          </a:xfrm>
-          <a:prstGeom prst="rect">
-            <a:avLst/>
-          </a:prstGeom>
-          <a:noFill/>
-          <a:ln/>
-        </p:spPr>
-        <p:txBody>
-          <a:bodyPr wrap="square" lIns="0" tIns="0" rIns="0" bIns="0" rtlCol="0" anchor="ctr"/>
-          <a:lstStyle/>
-          <a:p>
-            <a:pPr algn="ctr" indent="0" marL="0">
-              <a:buNone/>
-            </a:pPr>
-            <a:r>
-              <a:rPr lang="en-US" sz="1300" b="1" dirty="0">
-                <a:solidFill>
-                  <a:srgbClr val="C62A2A"/>
-                </a:solidFill>
-                <a:latin typeface="Montserrat" pitchFamily="34" charset="0"/>
-                <a:ea typeface="Montserrat" pitchFamily="34" charset="-122"/>
-                <a:cs typeface="Montserrat" pitchFamily="34" charset="-120"/>
-              </a:rPr>
-              <a:t>✕</a:t>
-            </a:r>
-            <a:endParaRPr lang="en-US" sz="1300" dirty="0"/>
-          </a:p>
-        </p:txBody>
-      </p:sp>
-      <p:sp>
-        <p:nvSpPr>
-          <p:cNvPr id="21" name="Text 18"/>
+          <p:cNvPr id="24" name="Shape 20"/>
+          <p:cNvSpPr/>
+          <p:nvPr/>
+        </p:nvSpPr>
+        <p:spPr>
+          <a:xfrm rot="2700000">
+            <a:off x="871789" y="4940302"/>
+            <a:ext cx="176662" cy="31492"/>
+          </a:xfrm>
+          <a:prstGeom prst="rect">
+            <a:avLst/>
+          </a:prstGeom>
+          <a:solidFill>
+            <a:srgbClr val="C62A2A"/>
+          </a:solidFill>
+          <a:ln/>
+        </p:spPr>
+      </p:sp>
+      <p:sp>
+        <p:nvSpPr>
+          <p:cNvPr id="25" name="Shape 21"/>
+          <p:cNvSpPr/>
+          <p:nvPr/>
+        </p:nvSpPr>
+        <p:spPr>
+          <a:xfrm rot="-2700000">
+            <a:off x="871789" y="4940302"/>
+            <a:ext cx="176662" cy="31492"/>
+          </a:xfrm>
+          <a:prstGeom prst="rect">
+            <a:avLst/>
+          </a:prstGeom>
+          <a:solidFill>
+            <a:srgbClr val="C62A2A"/>
+          </a:solidFill>
+          <a:ln/>
+        </p:spPr>
+      </p:sp>
+      <p:sp>
+        <p:nvSpPr>
+          <p:cNvPr id="26" name="Text 22"/>
           <p:cNvSpPr/>
           <p:nvPr/>
         </p:nvSpPr>
@@ -15879,7 +15887,7 @@
       </p:pic>
       <p:sp>
         <p:nvSpPr>
-          <p:cNvPr id="6" name="Shape 3"/>
+          <p:cNvPr id="7" name="Shape 3"/>
           <p:cNvSpPr/>
           <p:nvPr/>
         </p:nvSpPr>
@@ -15906,7 +15914,7 @@
       </p:sp>
       <p:sp>
         <p:nvSpPr>
-          <p:cNvPr id="7" name="Text 4"/>
+          <p:cNvPr id="8" name="Text 4"/>
           <p:cNvSpPr/>
           <p:nvPr/>
         </p:nvSpPr>
@@ -15945,7 +15953,7 @@
       </p:sp>
       <p:sp>
         <p:nvSpPr>
-          <p:cNvPr id="8" name="Text 5"/>
+          <p:cNvPr id="9" name="Text 5"/>
           <p:cNvSpPr/>
           <p:nvPr/>
         </p:nvSpPr>
@@ -16045,7 +16053,7 @@
       </p:sp>
       <p:sp>
         <p:nvSpPr>
-          <p:cNvPr id="9" name="Shape 6"/>
+          <p:cNvPr id="10" name="Shape 6"/>
           <p:cNvSpPr/>
           <p:nvPr/>
         </p:nvSpPr>
@@ -16067,7 +16075,7 @@
       </p:sp>
       <p:sp>
         <p:nvSpPr>
-          <p:cNvPr id="10" name="Text 7"/>
+          <p:cNvPr id="11" name="Text 7"/>
           <p:cNvSpPr/>
           <p:nvPr/>
         </p:nvSpPr>
@@ -16106,7 +16114,7 @@
       </p:sp>
       <p:sp>
         <p:nvSpPr>
-          <p:cNvPr id="11" name="Text 8"/>
+          <p:cNvPr id="12" name="Text 8"/>
           <p:cNvSpPr/>
           <p:nvPr/>
         </p:nvSpPr>
@@ -16148,7 +16156,7 @@
       </p:sp>
       <p:sp>
         <p:nvSpPr>
-          <p:cNvPr id="12" name="Shape 9"/>
+          <p:cNvPr id="13" name="Shape 9"/>
           <p:cNvSpPr/>
           <p:nvPr/>
         </p:nvSpPr>
@@ -16175,7 +16183,7 @@
       </p:sp>
       <p:sp>
         <p:nvSpPr>
-          <p:cNvPr id="13" name="Text 10"/>
+          <p:cNvPr id="14" name="Text 10"/>
           <p:cNvSpPr/>
           <p:nvPr/>
         </p:nvSpPr>
@@ -16214,7 +16222,7 @@
       </p:sp>
       <p:sp>
         <p:nvSpPr>
-          <p:cNvPr id="14" name="Text 11"/>
+          <p:cNvPr id="15" name="Text 11"/>
           <p:cNvSpPr/>
           <p:nvPr/>
         </p:nvSpPr>
@@ -16980,7 +16988,7 @@
       </p:pic>
       <p:sp>
         <p:nvSpPr>
-          <p:cNvPr id="6" name="Shape 3"/>
+          <p:cNvPr id="7" name="Shape 3"/>
           <p:cNvSpPr/>
           <p:nvPr/>
         </p:nvSpPr>
@@ -17007,7 +17015,7 @@
       </p:sp>
       <p:sp>
         <p:nvSpPr>
-          <p:cNvPr id="7" name="Shape 4"/>
+          <p:cNvPr id="8" name="Shape 4"/>
           <p:cNvSpPr/>
           <p:nvPr/>
         </p:nvSpPr>
@@ -17027,7 +17035,7 @@
       </p:sp>
       <p:sp>
         <p:nvSpPr>
-          <p:cNvPr id="8" name="Text 5"/>
+          <p:cNvPr id="9" name="Text 5"/>
           <p:cNvSpPr/>
           <p:nvPr/>
         </p:nvSpPr>
@@ -17066,7 +17074,7 @@
       </p:sp>
       <p:sp>
         <p:nvSpPr>
-          <p:cNvPr id="9" name="Text 6"/>
+          <p:cNvPr id="10" name="Text 6"/>
           <p:cNvSpPr/>
           <p:nvPr/>
         </p:nvSpPr>
@@ -17105,7 +17113,7 @@
       </p:sp>
       <p:sp>
         <p:nvSpPr>
-          <p:cNvPr id="10" name="Shape 7"/>
+          <p:cNvPr id="11" name="Shape 7"/>
           <p:cNvSpPr/>
           <p:nvPr/>
         </p:nvSpPr>
@@ -17132,7 +17140,7 @@
       </p:sp>
       <p:sp>
         <p:nvSpPr>
-          <p:cNvPr id="11" name="Shape 8"/>
+          <p:cNvPr id="12" name="Shape 8"/>
           <p:cNvSpPr/>
           <p:nvPr/>
         </p:nvSpPr>
@@ -17152,7 +17160,7 @@
       </p:sp>
       <p:sp>
         <p:nvSpPr>
-          <p:cNvPr id="12" name="Text 9"/>
+          <p:cNvPr id="13" name="Text 9"/>
           <p:cNvSpPr/>
           <p:nvPr/>
         </p:nvSpPr>
@@ -17191,7 +17199,7 @@
       </p:sp>
       <p:sp>
         <p:nvSpPr>
-          <p:cNvPr id="13" name="Text 10"/>
+          <p:cNvPr id="14" name="Text 10"/>
           <p:cNvSpPr/>
           <p:nvPr/>
         </p:nvSpPr>
@@ -17230,7 +17238,7 @@
       </p:sp>
       <p:sp>
         <p:nvSpPr>
-          <p:cNvPr id="14" name="Shape 11"/>
+          <p:cNvPr id="15" name="Shape 11"/>
           <p:cNvSpPr/>
           <p:nvPr/>
         </p:nvSpPr>
@@ -17257,7 +17265,7 @@
       </p:sp>
       <p:sp>
         <p:nvSpPr>
-          <p:cNvPr id="15" name="Shape 12"/>
+          <p:cNvPr id="16" name="Shape 12"/>
           <p:cNvSpPr/>
           <p:nvPr/>
         </p:nvSpPr>
@@ -17277,7 +17285,7 @@
       </p:sp>
       <p:sp>
         <p:nvSpPr>
-          <p:cNvPr id="16" name="Text 13"/>
+          <p:cNvPr id="17" name="Text 13"/>
           <p:cNvSpPr/>
           <p:nvPr/>
         </p:nvSpPr>
@@ -17316,7 +17324,7 @@
       </p:sp>
       <p:sp>
         <p:nvSpPr>
-          <p:cNvPr id="17" name="Text 14"/>
+          <p:cNvPr id="18" name="Text 14"/>
           <p:cNvSpPr/>
           <p:nvPr/>
         </p:nvSpPr>
@@ -17355,7 +17363,7 @@
       </p:sp>
       <p:sp>
         <p:nvSpPr>
-          <p:cNvPr id="18" name="Shape 15"/>
+          <p:cNvPr id="19" name="Shape 15"/>
           <p:cNvSpPr/>
           <p:nvPr/>
         </p:nvSpPr>
@@ -17382,7 +17390,7 @@
       </p:sp>
       <p:sp>
         <p:nvSpPr>
-          <p:cNvPr id="19" name="Shape 16"/>
+          <p:cNvPr id="20" name="Shape 16"/>
           <p:cNvSpPr/>
           <p:nvPr/>
         </p:nvSpPr>
@@ -17402,7 +17410,7 @@
       </p:sp>
       <p:sp>
         <p:nvSpPr>
-          <p:cNvPr id="20" name="Text 17"/>
+          <p:cNvPr id="21" name="Text 17"/>
           <p:cNvSpPr/>
           <p:nvPr/>
         </p:nvSpPr>
@@ -17441,7 +17449,7 @@
       </p:sp>
       <p:sp>
         <p:nvSpPr>
-          <p:cNvPr id="21" name="Text 18"/>
+          <p:cNvPr id="22" name="Text 18"/>
           <p:cNvSpPr/>
           <p:nvPr/>
         </p:nvSpPr>
@@ -17480,7 +17488,7 @@
       </p:sp>
       <p:sp>
         <p:nvSpPr>
-          <p:cNvPr id="22" name="Shape 19"/>
+          <p:cNvPr id="23" name="Shape 19"/>
           <p:cNvSpPr/>
           <p:nvPr/>
         </p:nvSpPr>
@@ -17507,7 +17515,7 @@
       </p:sp>
       <p:sp>
         <p:nvSpPr>
-          <p:cNvPr id="23" name="Shape 20"/>
+          <p:cNvPr id="24" name="Shape 20"/>
           <p:cNvSpPr/>
           <p:nvPr/>
         </p:nvSpPr>
@@ -17527,7 +17535,7 @@
       </p:sp>
       <p:sp>
         <p:nvSpPr>
-          <p:cNvPr id="24" name="Text 21"/>
+          <p:cNvPr id="25" name="Text 21"/>
           <p:cNvSpPr/>
           <p:nvPr/>
         </p:nvSpPr>
@@ -17566,7 +17574,7 @@
       </p:sp>
       <p:sp>
         <p:nvSpPr>
-          <p:cNvPr id="25" name="Text 22"/>
+          <p:cNvPr id="26" name="Text 22"/>
           <p:cNvSpPr/>
           <p:nvPr/>
         </p:nvSpPr>
@@ -17605,7 +17613,7 @@
       </p:sp>
       <p:sp>
         <p:nvSpPr>
-          <p:cNvPr id="26" name="Shape 23"/>
+          <p:cNvPr id="27" name="Shape 23"/>
           <p:cNvSpPr/>
           <p:nvPr/>
         </p:nvSpPr>
@@ -17632,7 +17640,7 @@
       </p:sp>
       <p:sp>
         <p:nvSpPr>
-          <p:cNvPr id="27" name="Shape 24"/>
+          <p:cNvPr id="28" name="Shape 24"/>
           <p:cNvSpPr/>
           <p:nvPr/>
         </p:nvSpPr>
@@ -17652,7 +17660,7 @@
       </p:sp>
       <p:sp>
         <p:nvSpPr>
-          <p:cNvPr id="28" name="Text 25"/>
+          <p:cNvPr id="29" name="Text 25"/>
           <p:cNvSpPr/>
           <p:nvPr/>
         </p:nvSpPr>
@@ -17691,7 +17699,7 @@
       </p:sp>
       <p:sp>
         <p:nvSpPr>
-          <p:cNvPr id="29" name="Text 26"/>
+          <p:cNvPr id="30" name="Text 26"/>
           <p:cNvSpPr/>
           <p:nvPr/>
         </p:nvSpPr>
@@ -17730,7 +17738,7 @@
       </p:sp>
       <p:sp>
         <p:nvSpPr>
-          <p:cNvPr id="30" name="Shape 27"/>
+          <p:cNvPr id="31" name="Shape 27"/>
           <p:cNvSpPr/>
           <p:nvPr/>
         </p:nvSpPr>
@@ -17757,7 +17765,7 @@
       </p:sp>
       <p:sp>
         <p:nvSpPr>
-          <p:cNvPr id="31" name="Shape 28"/>
+          <p:cNvPr id="32" name="Shape 28"/>
           <p:cNvSpPr/>
           <p:nvPr/>
         </p:nvSpPr>
@@ -17777,7 +17785,7 @@
       </p:sp>
       <p:sp>
         <p:nvSpPr>
-          <p:cNvPr id="32" name="Text 29"/>
+          <p:cNvPr id="33" name="Text 29"/>
           <p:cNvSpPr/>
           <p:nvPr/>
         </p:nvSpPr>
@@ -17816,7 +17824,7 @@
       </p:sp>
       <p:sp>
         <p:nvSpPr>
-          <p:cNvPr id="33" name="Text 30"/>
+          <p:cNvPr id="34" name="Text 30"/>
           <p:cNvSpPr/>
           <p:nvPr/>
         </p:nvSpPr>
@@ -17855,7 +17863,7 @@
       </p:sp>
       <p:sp>
         <p:nvSpPr>
-          <p:cNvPr id="34" name="Shape 31"/>
+          <p:cNvPr id="35" name="Shape 31"/>
           <p:cNvSpPr/>
           <p:nvPr/>
         </p:nvSpPr>
@@ -17882,7 +17890,7 @@
       </p:sp>
       <p:sp>
         <p:nvSpPr>
-          <p:cNvPr id="35" name="Shape 32"/>
+          <p:cNvPr id="36" name="Shape 32"/>
           <p:cNvSpPr/>
           <p:nvPr/>
         </p:nvSpPr>
@@ -17902,7 +17910,7 @@
       </p:sp>
       <p:sp>
         <p:nvSpPr>
-          <p:cNvPr id="36" name="Text 33"/>
+          <p:cNvPr id="37" name="Text 33"/>
           <p:cNvSpPr/>
           <p:nvPr/>
         </p:nvSpPr>
@@ -17941,7 +17949,7 @@
       </p:sp>
       <p:sp>
         <p:nvSpPr>
-          <p:cNvPr id="37" name="Text 34"/>
+          <p:cNvPr id="38" name="Text 34"/>
           <p:cNvSpPr/>
           <p:nvPr/>
         </p:nvSpPr>
@@ -17980,7 +17988,7 @@
       </p:sp>
       <p:sp>
         <p:nvSpPr>
-          <p:cNvPr id="38" name="Shape 35"/>
+          <p:cNvPr id="39" name="Shape 35"/>
           <p:cNvSpPr/>
           <p:nvPr/>
         </p:nvSpPr>
@@ -18002,7 +18010,7 @@
       </p:sp>
       <p:sp>
         <p:nvSpPr>
-          <p:cNvPr id="39" name="Shape 36"/>
+          <p:cNvPr id="40" name="Shape 36"/>
           <p:cNvSpPr/>
           <p:nvPr/>
         </p:nvSpPr>
@@ -18022,7 +18030,7 @@
       </p:sp>
       <p:sp>
         <p:nvSpPr>
-          <p:cNvPr id="40" name="Text 37"/>
+          <p:cNvPr id="41" name="Text 37"/>
           <p:cNvSpPr/>
           <p:nvPr/>
         </p:nvSpPr>
@@ -18061,7 +18069,7 @@
       </p:sp>
       <p:sp>
         <p:nvSpPr>
-          <p:cNvPr id="41" name="Text 38"/>
+          <p:cNvPr id="42" name="Text 38"/>
           <p:cNvSpPr/>
           <p:nvPr/>
         </p:nvSpPr>
@@ -18100,7 +18108,7 @@
       </p:sp>
       <p:sp>
         <p:nvSpPr>
-          <p:cNvPr id="42" name="Shape 39"/>
+          <p:cNvPr id="43" name="Shape 39"/>
           <p:cNvSpPr/>
           <p:nvPr/>
         </p:nvSpPr>
@@ -18127,7 +18135,7 @@
       </p:sp>
       <p:sp>
         <p:nvSpPr>
-          <p:cNvPr id="43" name="Shape 40"/>
+          <p:cNvPr id="44" name="Shape 40"/>
           <p:cNvSpPr/>
           <p:nvPr/>
         </p:nvSpPr>
@@ -18147,7 +18155,7 @@
       </p:sp>
       <p:sp>
         <p:nvSpPr>
-          <p:cNvPr id="44" name="Text 41"/>
+          <p:cNvPr id="45" name="Text 41"/>
           <p:cNvSpPr/>
           <p:nvPr/>
         </p:nvSpPr>
@@ -18186,7 +18194,7 @@
       </p:sp>
       <p:sp>
         <p:nvSpPr>
-          <p:cNvPr id="45" name="Text 42"/>
+          <p:cNvPr id="46" name="Text 42"/>
           <p:cNvSpPr/>
           <p:nvPr/>
         </p:nvSpPr>
@@ -18225,7 +18233,7 @@
       </p:sp>
       <p:sp>
         <p:nvSpPr>
-          <p:cNvPr id="46" name="Shape 43"/>
+          <p:cNvPr id="47" name="Shape 43"/>
           <p:cNvSpPr/>
           <p:nvPr/>
         </p:nvSpPr>
@@ -18252,7 +18260,7 @@
       </p:sp>
       <p:sp>
         <p:nvSpPr>
-          <p:cNvPr id="47" name="Shape 44"/>
+          <p:cNvPr id="48" name="Shape 44"/>
           <p:cNvSpPr/>
           <p:nvPr/>
         </p:nvSpPr>
@@ -18272,7 +18280,7 @@
       </p:sp>
       <p:sp>
         <p:nvSpPr>
-          <p:cNvPr id="48" name="Text 45"/>
+          <p:cNvPr id="49" name="Text 45"/>
           <p:cNvSpPr/>
           <p:nvPr/>
         </p:nvSpPr>
@@ -18311,7 +18319,7 @@
       </p:sp>
       <p:sp>
         <p:nvSpPr>
-          <p:cNvPr id="49" name="Text 46"/>
+          <p:cNvPr id="50" name="Text 46"/>
           <p:cNvSpPr/>
           <p:nvPr/>
         </p:nvSpPr>
@@ -18350,7 +18358,7 @@
       </p:sp>
       <p:sp>
         <p:nvSpPr>
-          <p:cNvPr id="50" name="Shape 47"/>
+          <p:cNvPr id="51" name="Shape 47"/>
           <p:cNvSpPr/>
           <p:nvPr/>
         </p:nvSpPr>
@@ -18377,7 +18385,7 @@
       </p:sp>
       <p:sp>
         <p:nvSpPr>
-          <p:cNvPr id="51" name="Text 48"/>
+          <p:cNvPr id="52" name="Text 48"/>
           <p:cNvSpPr/>
           <p:nvPr/>
         </p:nvSpPr>
@@ -18665,7 +18673,7 @@
       </p:pic>
       <p:sp>
         <p:nvSpPr>
-          <p:cNvPr id="7" name="Shape 4"/>
+          <p:cNvPr id="8" name="Shape 4"/>
           <p:cNvSpPr/>
           <p:nvPr/>
         </p:nvSpPr>
@@ -18692,7 +18700,7 @@
       </p:sp>
       <p:sp>
         <p:nvSpPr>
-          <p:cNvPr id="8" name="Text 5"/>
+          <p:cNvPr id="9" name="Text 5"/>
           <p:cNvSpPr/>
           <p:nvPr/>
         </p:nvSpPr>
@@ -18731,7 +18739,7 @@
       </p:sp>
       <p:sp>
         <p:nvSpPr>
-          <p:cNvPr id="9" name="Text 6"/>
+          <p:cNvPr id="10" name="Text 6"/>
           <p:cNvSpPr/>
           <p:nvPr/>
         </p:nvSpPr>
@@ -18773,7 +18781,7 @@
       </p:sp>
       <p:sp>
         <p:nvSpPr>
-          <p:cNvPr id="10" name="Shape 7"/>
+          <p:cNvPr id="11" name="Shape 7"/>
           <p:cNvSpPr/>
           <p:nvPr/>
         </p:nvSpPr>
@@ -18800,7 +18808,7 @@
       </p:sp>
       <p:sp>
         <p:nvSpPr>
-          <p:cNvPr id="11" name="Text 8"/>
+          <p:cNvPr id="12" name="Text 8"/>
           <p:cNvSpPr/>
           <p:nvPr/>
         </p:nvSpPr>
@@ -18839,7 +18847,7 @@
       </p:sp>
       <p:sp>
         <p:nvSpPr>
-          <p:cNvPr id="12" name="Text 9"/>
+          <p:cNvPr id="13" name="Text 9"/>
           <p:cNvSpPr/>
           <p:nvPr/>
         </p:nvSpPr>
@@ -18881,7 +18889,7 @@
       </p:sp>
       <p:sp>
         <p:nvSpPr>
-          <p:cNvPr id="13" name="Shape 10"/>
+          <p:cNvPr id="14" name="Shape 10"/>
           <p:cNvSpPr/>
           <p:nvPr/>
         </p:nvSpPr>
@@ -18908,7 +18916,7 @@
       </p:sp>
       <p:sp>
         <p:nvSpPr>
-          <p:cNvPr id="14" name="Text 11"/>
+          <p:cNvPr id="15" name="Text 11"/>
           <p:cNvSpPr/>
           <p:nvPr/>
         </p:nvSpPr>
@@ -18947,7 +18955,7 @@
       </p:sp>
       <p:sp>
         <p:nvSpPr>
-          <p:cNvPr id="15" name="Text 12"/>
+          <p:cNvPr id="16" name="Text 12"/>
           <p:cNvSpPr/>
           <p:nvPr/>
         </p:nvSpPr>
@@ -18989,7 +18997,7 @@
       </p:sp>
       <p:sp>
         <p:nvSpPr>
-          <p:cNvPr id="16" name="Shape 13"/>
+          <p:cNvPr id="17" name="Shape 13"/>
           <p:cNvSpPr/>
           <p:nvPr/>
         </p:nvSpPr>
@@ -19016,7 +19024,7 @@
       </p:sp>
       <p:sp>
         <p:nvSpPr>
-          <p:cNvPr id="17" name="Text 14"/>
+          <p:cNvPr id="18" name="Text 14"/>
           <p:cNvSpPr/>
           <p:nvPr/>
         </p:nvSpPr>
@@ -19055,7 +19063,7 @@
       </p:sp>
       <p:sp>
         <p:nvSpPr>
-          <p:cNvPr id="18" name="Text 15"/>
+          <p:cNvPr id="19" name="Text 15"/>
           <p:cNvSpPr/>
           <p:nvPr/>
         </p:nvSpPr>
@@ -19097,7 +19105,7 @@
       </p:sp>
       <p:sp>
         <p:nvSpPr>
-          <p:cNvPr id="19" name="Shape 16"/>
+          <p:cNvPr id="20" name="Shape 16"/>
           <p:cNvSpPr/>
           <p:nvPr/>
         </p:nvSpPr>
@@ -19124,7 +19132,7 @@
       </p:sp>
       <p:sp>
         <p:nvSpPr>
-          <p:cNvPr id="20" name="Text 17"/>
+          <p:cNvPr id="21" name="Text 17"/>
           <p:cNvSpPr/>
           <p:nvPr/>
         </p:nvSpPr>
@@ -19163,7 +19171,7 @@
       </p:sp>
       <p:sp>
         <p:nvSpPr>
-          <p:cNvPr id="21" name="Text 18"/>
+          <p:cNvPr id="22" name="Text 18"/>
           <p:cNvSpPr/>
           <p:nvPr/>
         </p:nvSpPr>
@@ -19205,7 +19213,7 @@
       </p:sp>
       <p:sp>
         <p:nvSpPr>
-          <p:cNvPr id="22" name="Shape 19"/>
+          <p:cNvPr id="23" name="Shape 19"/>
           <p:cNvSpPr/>
           <p:nvPr/>
         </p:nvSpPr>
@@ -19232,7 +19240,7 @@
       </p:sp>
       <p:sp>
         <p:nvSpPr>
-          <p:cNvPr id="23" name="Text 20"/>
+          <p:cNvPr id="24" name="Text 20"/>
           <p:cNvSpPr/>
           <p:nvPr/>
         </p:nvSpPr>
@@ -19271,7 +19279,7 @@
       </p:sp>
       <p:sp>
         <p:nvSpPr>
-          <p:cNvPr id="24" name="Text 21"/>
+          <p:cNvPr id="25" name="Text 21"/>
           <p:cNvSpPr/>
           <p:nvPr/>
         </p:nvSpPr>
@@ -19313,7 +19321,7 @@
       </p:sp>
       <p:sp>
         <p:nvSpPr>
-          <p:cNvPr id="25" name="Shape 22"/>
+          <p:cNvPr id="26" name="Shape 22"/>
           <p:cNvSpPr/>
           <p:nvPr/>
         </p:nvSpPr>
@@ -19340,7 +19348,7 @@
       </p:sp>
       <p:sp>
         <p:nvSpPr>
-          <p:cNvPr id="26" name="Text 23"/>
+          <p:cNvPr id="27" name="Text 23"/>
           <p:cNvSpPr/>
           <p:nvPr/>
         </p:nvSpPr>
@@ -19625,7 +19633,7 @@
       </p:pic>
       <p:sp>
         <p:nvSpPr>
-          <p:cNvPr id="7" name="Shape 4"/>
+          <p:cNvPr id="8" name="Shape 4"/>
           <p:cNvSpPr/>
           <p:nvPr/>
         </p:nvSpPr>
@@ -19647,7 +19655,7 @@
       </p:sp>
       <p:sp>
         <p:nvSpPr>
-          <p:cNvPr id="8" name="Shape 5"/>
+          <p:cNvPr id="9" name="Shape 5"/>
           <p:cNvSpPr/>
           <p:nvPr/>
         </p:nvSpPr>
@@ -19667,7 +19675,7 @@
       </p:sp>
       <p:sp>
         <p:nvSpPr>
-          <p:cNvPr id="9" name="Text 6"/>
+          <p:cNvPr id="10" name="Text 6"/>
           <p:cNvSpPr/>
           <p:nvPr/>
         </p:nvSpPr>
@@ -19706,7 +19714,7 @@
       </p:sp>
       <p:sp>
         <p:nvSpPr>
-          <p:cNvPr id="10" name="Text 7"/>
+          <p:cNvPr id="11" name="Text 7"/>
           <p:cNvSpPr/>
           <p:nvPr/>
         </p:nvSpPr>
@@ -19745,7 +19753,7 @@
       </p:sp>
       <p:sp>
         <p:nvSpPr>
-          <p:cNvPr id="11" name="Text 8"/>
+          <p:cNvPr id="12" name="Text 8"/>
           <p:cNvSpPr/>
           <p:nvPr/>
         </p:nvSpPr>
@@ -19787,7 +19795,7 @@
       </p:sp>
       <p:sp>
         <p:nvSpPr>
-          <p:cNvPr id="12" name="Shape 9"/>
+          <p:cNvPr id="13" name="Shape 9"/>
           <p:cNvSpPr/>
           <p:nvPr/>
         </p:nvSpPr>
@@ -19809,7 +19817,7 @@
       </p:sp>
       <p:sp>
         <p:nvSpPr>
-          <p:cNvPr id="13" name="Shape 10"/>
+          <p:cNvPr id="14" name="Shape 10"/>
           <p:cNvSpPr/>
           <p:nvPr/>
         </p:nvSpPr>
@@ -19829,7 +19837,7 @@
       </p:sp>
       <p:sp>
         <p:nvSpPr>
-          <p:cNvPr id="14" name="Text 11"/>
+          <p:cNvPr id="15" name="Text 11"/>
           <p:cNvSpPr/>
           <p:nvPr/>
         </p:nvSpPr>
@@ -19868,7 +19876,7 @@
       </p:sp>
       <p:sp>
         <p:nvSpPr>
-          <p:cNvPr id="15" name="Text 12"/>
+          <p:cNvPr id="16" name="Text 12"/>
           <p:cNvSpPr/>
           <p:nvPr/>
         </p:nvSpPr>
@@ -19907,7 +19915,7 @@
       </p:sp>
       <p:sp>
         <p:nvSpPr>
-          <p:cNvPr id="16" name="Text 13"/>
+          <p:cNvPr id="17" name="Text 13"/>
           <p:cNvSpPr/>
           <p:nvPr/>
         </p:nvSpPr>
@@ -19949,7 +19957,7 @@
       </p:sp>
       <p:sp>
         <p:nvSpPr>
-          <p:cNvPr id="17" name="Shape 14"/>
+          <p:cNvPr id="18" name="Shape 14"/>
           <p:cNvSpPr/>
           <p:nvPr/>
         </p:nvSpPr>
@@ -19971,7 +19979,7 @@
       </p:sp>
       <p:sp>
         <p:nvSpPr>
-          <p:cNvPr id="18" name="Shape 15"/>
+          <p:cNvPr id="19" name="Shape 15"/>
           <p:cNvSpPr/>
           <p:nvPr/>
         </p:nvSpPr>
@@ -19991,7 +19999,7 @@
       </p:sp>
       <p:sp>
         <p:nvSpPr>
-          <p:cNvPr id="19" name="Text 16"/>
+          <p:cNvPr id="20" name="Text 16"/>
           <p:cNvSpPr/>
           <p:nvPr/>
         </p:nvSpPr>
@@ -20030,7 +20038,7 @@
       </p:sp>
       <p:sp>
         <p:nvSpPr>
-          <p:cNvPr id="20" name="Text 17"/>
+          <p:cNvPr id="21" name="Text 17"/>
           <p:cNvSpPr/>
           <p:nvPr/>
         </p:nvSpPr>
@@ -20069,7 +20077,7 @@
       </p:sp>
       <p:sp>
         <p:nvSpPr>
-          <p:cNvPr id="21" name="Text 18"/>
+          <p:cNvPr id="22" name="Text 18"/>
           <p:cNvSpPr/>
           <p:nvPr/>
         </p:nvSpPr>
@@ -20111,7 +20119,7 @@
       </p:sp>
       <p:sp>
         <p:nvSpPr>
-          <p:cNvPr id="22" name="Shape 19"/>
+          <p:cNvPr id="23" name="Shape 19"/>
           <p:cNvSpPr/>
           <p:nvPr/>
         </p:nvSpPr>
@@ -20133,7 +20141,7 @@
       </p:sp>
       <p:sp>
         <p:nvSpPr>
-          <p:cNvPr id="23" name="Text 20"/>
+          <p:cNvPr id="24" name="Text 20"/>
           <p:cNvSpPr/>
           <p:nvPr/>
         </p:nvSpPr>
@@ -20172,7 +20180,7 @@
       </p:sp>
       <p:sp>
         <p:nvSpPr>
-          <p:cNvPr id="24" name="Text 21"/>
+          <p:cNvPr id="25" name="Text 21"/>
           <p:cNvSpPr/>
           <p:nvPr/>
         </p:nvSpPr>
@@ -20457,7 +20465,7 @@
       </p:pic>
       <p:sp>
         <p:nvSpPr>
-          <p:cNvPr id="7" name="Shape 4"/>
+          <p:cNvPr id="8" name="Shape 4"/>
           <p:cNvSpPr/>
           <p:nvPr/>
         </p:nvSpPr>
@@ -20479,7 +20487,7 @@
       </p:sp>
       <p:sp>
         <p:nvSpPr>
-          <p:cNvPr id="8" name="Text 5"/>
+          <p:cNvPr id="9" name="Text 5"/>
           <p:cNvSpPr/>
           <p:nvPr/>
         </p:nvSpPr>
@@ -20518,7 +20526,7 @@
       </p:sp>
       <p:sp>
         <p:nvSpPr>
-          <p:cNvPr id="9" name="Text 6"/>
+          <p:cNvPr id="10" name="Text 6"/>
           <p:cNvSpPr/>
           <p:nvPr/>
         </p:nvSpPr>
@@ -20557,7 +20565,7 @@
       </p:sp>
       <p:sp>
         <p:nvSpPr>
-          <p:cNvPr id="10" name="Text 7"/>
+          <p:cNvPr id="11" name="Text 7"/>
           <p:cNvSpPr/>
           <p:nvPr/>
         </p:nvSpPr>
@@ -20596,7 +20604,7 @@
       </p:sp>
       <p:sp>
         <p:nvSpPr>
-          <p:cNvPr id="11" name="Shape 8"/>
+          <p:cNvPr id="12" name="Shape 8"/>
           <p:cNvSpPr/>
           <p:nvPr/>
         </p:nvSpPr>
@@ -20623,7 +20631,7 @@
       </p:sp>
       <p:sp>
         <p:nvSpPr>
-          <p:cNvPr id="12" name="Text 9"/>
+          <p:cNvPr id="13" name="Text 9"/>
           <p:cNvSpPr/>
           <p:nvPr/>
         </p:nvSpPr>
@@ -20662,7 +20670,7 @@
       </p:sp>
       <p:sp>
         <p:nvSpPr>
-          <p:cNvPr id="13" name="Text 10"/>
+          <p:cNvPr id="14" name="Text 10"/>
           <p:cNvSpPr/>
           <p:nvPr/>
         </p:nvSpPr>
@@ -20701,7 +20709,7 @@
       </p:sp>
       <p:sp>
         <p:nvSpPr>
-          <p:cNvPr id="14" name="Text 11"/>
+          <p:cNvPr id="15" name="Text 11"/>
           <p:cNvSpPr/>
           <p:nvPr/>
         </p:nvSpPr>
@@ -20740,7 +20748,7 @@
       </p:sp>
       <p:sp>
         <p:nvSpPr>
-          <p:cNvPr id="15" name="Shape 12"/>
+          <p:cNvPr id="16" name="Shape 12"/>
           <p:cNvSpPr/>
           <p:nvPr/>
         </p:nvSpPr>
@@ -20762,7 +20770,7 @@
       </p:sp>
       <p:sp>
         <p:nvSpPr>
-          <p:cNvPr id="16" name="Text 13"/>
+          <p:cNvPr id="17" name="Text 13"/>
           <p:cNvSpPr/>
           <p:nvPr/>
         </p:nvSpPr>
@@ -20801,7 +20809,7 @@
       </p:sp>
       <p:sp>
         <p:nvSpPr>
-          <p:cNvPr id="17" name="Text 14"/>
+          <p:cNvPr id="18" name="Text 14"/>
           <p:cNvSpPr/>
           <p:nvPr/>
         </p:nvSpPr>
@@ -20835,7 +20843,7 @@
                 <a:ea typeface="Montserrat" pitchFamily="34" charset="-122"/>
                 <a:cs typeface="Montserrat" pitchFamily="34" charset="-120"/>
               </a:rPr>
-              <a:t>Рішення — це код: його читають, тестують, логують і пояснюють на розборі. Конфіг чужого інструмента — рішення, яке ви орендуєте.</a:t>
+              <a:t>Рішення — це код. Конфіг чужого інструмента — орендоване рішення.</a:t>
             </a:r>
             <a:endParaRPr lang="en-US" sz="1300" dirty="0"/>
           </a:p>
@@ -20843,7 +20851,7 @@
       </p:sp>
       <p:sp>
         <p:nvSpPr>
-          <p:cNvPr id="18" name="Shape 15"/>
+          <p:cNvPr id="19" name="Shape 15"/>
           <p:cNvSpPr/>
           <p:nvPr/>
         </p:nvSpPr>
@@ -20865,7 +20873,7 @@
       </p:sp>
       <p:sp>
         <p:nvSpPr>
-          <p:cNvPr id="19" name="Text 16"/>
+          <p:cNvPr id="20" name="Text 16"/>
           <p:cNvSpPr/>
           <p:nvPr/>
         </p:nvSpPr>
@@ -20904,7 +20912,7 @@
       </p:sp>
       <p:sp>
         <p:nvSpPr>
-          <p:cNvPr id="20" name="Text 17"/>
+          <p:cNvPr id="21" name="Text 17"/>
           <p:cNvSpPr/>
           <p:nvPr/>
         </p:nvSpPr>
@@ -20938,7 +20946,7 @@
                 <a:ea typeface="Montserrat" pitchFamily="34" charset="-122"/>
                 <a:cs typeface="Montserrat" pitchFamily="34" charset="-120"/>
               </a:rPr>
-              <a:t>Побачити роутинг у документації адаптера і віддати рішення туди: механізми переносяться, прапорці — ні.</a:t>
+              <a:t>Віддати роутинг адаптеру: механізми переносяться, прапорці — ні.</a:t>
             </a:r>
             <a:endParaRPr lang="en-US" sz="1300" dirty="0"/>
           </a:p>
@@ -21110,7 +21118,7 @@
         </p:nvSpPr>
         <p:spPr>
           <a:xfrm>
-            <a:off x="1280160" y="1024128"/>
+            <a:off x="1280160" y="1193140"/>
             <a:ext cx="777240" cy="256032"/>
           </a:xfrm>
           <a:prstGeom prst="roundRect">
@@ -21132,7 +21140,7 @@
         </p:nvSpPr>
         <p:spPr>
           <a:xfrm>
-            <a:off x="1280160" y="1024128"/>
+            <a:off x="1280160" y="1193140"/>
             <a:ext cx="777240" cy="256032"/>
           </a:xfrm>
           <a:prstGeom prst="rect">
@@ -21189,7 +21197,7 @@
       </p:pic>
       <p:sp>
         <p:nvSpPr>
-          <p:cNvPr id="7" name="Shape 4"/>
+          <p:cNvPr id="8" name="Shape 4"/>
           <p:cNvSpPr/>
           <p:nvPr/>
         </p:nvSpPr>
@@ -21216,7 +21224,7 @@
       </p:sp>
       <p:sp>
         <p:nvSpPr>
-          <p:cNvPr id="8" name="Text 5"/>
+          <p:cNvPr id="9" name="Text 5"/>
           <p:cNvSpPr/>
           <p:nvPr/>
         </p:nvSpPr>
@@ -21526,7 +21534,7 @@
       </p:sp>
       <p:sp>
         <p:nvSpPr>
-          <p:cNvPr id="9" name="Shape 6"/>
+          <p:cNvPr id="10" name="Shape 6"/>
           <p:cNvSpPr/>
           <p:nvPr/>
         </p:nvSpPr>
@@ -21553,7 +21561,7 @@
       </p:sp>
       <p:sp>
         <p:nvSpPr>
-          <p:cNvPr id="10" name="Text 7"/>
+          <p:cNvPr id="11" name="Text 7"/>
           <p:cNvSpPr/>
           <p:nvPr/>
         </p:nvSpPr>
@@ -21592,7 +21600,7 @@
       </p:sp>
       <p:sp>
         <p:nvSpPr>
-          <p:cNvPr id="11" name="Text 8"/>
+          <p:cNvPr id="12" name="Text 8"/>
           <p:cNvSpPr/>
           <p:nvPr/>
         </p:nvSpPr>
@@ -21634,7 +21642,7 @@
       </p:sp>
       <p:sp>
         <p:nvSpPr>
-          <p:cNvPr id="12" name="Shape 9"/>
+          <p:cNvPr id="13" name="Shape 9"/>
           <p:cNvSpPr/>
           <p:nvPr/>
         </p:nvSpPr>
@@ -21656,7 +21664,7 @@
       </p:sp>
       <p:sp>
         <p:nvSpPr>
-          <p:cNvPr id="13" name="Text 10"/>
+          <p:cNvPr id="14" name="Text 10"/>
           <p:cNvSpPr/>
           <p:nvPr/>
         </p:nvSpPr>
@@ -21695,7 +21703,7 @@
       </p:sp>
       <p:sp>
         <p:nvSpPr>
-          <p:cNvPr id="14" name="Text 11"/>
+          <p:cNvPr id="15" name="Text 11"/>
           <p:cNvSpPr/>
           <p:nvPr/>
         </p:nvSpPr>
@@ -21737,7 +21745,7 @@
       </p:sp>
       <p:sp>
         <p:nvSpPr>
-          <p:cNvPr id="15" name="Shape 12"/>
+          <p:cNvPr id="16" name="Shape 12"/>
           <p:cNvSpPr/>
           <p:nvPr/>
         </p:nvSpPr>
@@ -21759,7 +21767,7 @@
       </p:sp>
       <p:sp>
         <p:nvSpPr>
-          <p:cNvPr id="16" name="Text 13"/>
+          <p:cNvPr id="17" name="Text 13"/>
           <p:cNvSpPr/>
           <p:nvPr/>
         </p:nvSpPr>
@@ -21798,7 +21806,7 @@
       </p:sp>
       <p:sp>
         <p:nvSpPr>
-          <p:cNvPr id="17" name="Text 14"/>
+          <p:cNvPr id="18" name="Text 14"/>
           <p:cNvSpPr/>
           <p:nvPr/>
         </p:nvSpPr>
@@ -21840,7 +21848,7 @@
       </p:sp>
       <p:sp>
         <p:nvSpPr>
-          <p:cNvPr id="18" name="Shape 15"/>
+          <p:cNvPr id="19" name="Shape 15"/>
           <p:cNvSpPr/>
           <p:nvPr/>
         </p:nvSpPr>
@@ -21867,7 +21875,7 @@
       </p:sp>
       <p:sp>
         <p:nvSpPr>
-          <p:cNvPr id="19" name="Text 16"/>
+          <p:cNvPr id="20" name="Text 16"/>
           <p:cNvSpPr/>
           <p:nvPr/>
         </p:nvSpPr>
@@ -22073,7 +22081,7 @@
         </p:nvSpPr>
         <p:spPr>
           <a:xfrm>
-            <a:off x="1280160" y="1024128"/>
+            <a:off x="1280160" y="1193140"/>
             <a:ext cx="777240" cy="256032"/>
           </a:xfrm>
           <a:prstGeom prst="roundRect">
@@ -22095,7 +22103,7 @@
         </p:nvSpPr>
         <p:spPr>
           <a:xfrm>
-            <a:off x="1280160" y="1024128"/>
+            <a:off x="1280160" y="1193140"/>
             <a:ext cx="777240" cy="256032"/>
           </a:xfrm>
           <a:prstGeom prst="rect">
@@ -22152,7 +22160,7 @@
       </p:pic>
       <p:sp>
         <p:nvSpPr>
-          <p:cNvPr id="7" name="Shape 4"/>
+          <p:cNvPr id="8" name="Shape 4"/>
           <p:cNvSpPr/>
           <p:nvPr/>
         </p:nvSpPr>
@@ -22174,7 +22182,7 @@
       </p:sp>
       <p:sp>
         <p:nvSpPr>
-          <p:cNvPr id="8" name="Text 5"/>
+          <p:cNvPr id="9" name="Text 5"/>
           <p:cNvSpPr/>
           <p:nvPr/>
         </p:nvSpPr>
@@ -22213,7 +22221,7 @@
       </p:sp>
       <p:sp>
         <p:nvSpPr>
-          <p:cNvPr id="9" name="Text 6"/>
+          <p:cNvPr id="10" name="Text 6"/>
           <p:cNvSpPr/>
           <p:nvPr/>
         </p:nvSpPr>
@@ -22255,7 +22263,7 @@
       </p:sp>
       <p:sp>
         <p:nvSpPr>
-          <p:cNvPr id="10" name="Shape 7"/>
+          <p:cNvPr id="11" name="Shape 7"/>
           <p:cNvSpPr/>
           <p:nvPr/>
         </p:nvSpPr>
@@ -22277,7 +22285,7 @@
       </p:sp>
       <p:sp>
         <p:nvSpPr>
-          <p:cNvPr id="11" name="Text 8"/>
+          <p:cNvPr id="12" name="Text 8"/>
           <p:cNvSpPr/>
           <p:nvPr/>
         </p:nvSpPr>
@@ -22316,7 +22324,7 @@
       </p:sp>
       <p:sp>
         <p:nvSpPr>
-          <p:cNvPr id="12" name="Text 9"/>
+          <p:cNvPr id="13" name="Text 9"/>
           <p:cNvSpPr/>
           <p:nvPr/>
         </p:nvSpPr>
@@ -22358,7 +22366,7 @@
       </p:sp>
       <p:sp>
         <p:nvSpPr>
-          <p:cNvPr id="13" name="Shape 10"/>
+          <p:cNvPr id="14" name="Shape 10"/>
           <p:cNvSpPr/>
           <p:nvPr/>
         </p:nvSpPr>
@@ -22380,7 +22388,7 @@
       </p:sp>
       <p:sp>
         <p:nvSpPr>
-          <p:cNvPr id="14" name="Text 11"/>
+          <p:cNvPr id="15" name="Text 11"/>
           <p:cNvSpPr/>
           <p:nvPr/>
         </p:nvSpPr>
@@ -22419,7 +22427,7 @@
       </p:sp>
       <p:sp>
         <p:nvSpPr>
-          <p:cNvPr id="15" name="Text 12"/>
+          <p:cNvPr id="16" name="Text 12"/>
           <p:cNvSpPr/>
           <p:nvPr/>
         </p:nvSpPr>
@@ -22461,7 +22469,7 @@
       </p:sp>
       <p:sp>
         <p:nvSpPr>
-          <p:cNvPr id="16" name="Shape 13"/>
+          <p:cNvPr id="17" name="Shape 13"/>
           <p:cNvSpPr/>
           <p:nvPr/>
         </p:nvSpPr>
@@ -22483,7 +22491,7 @@
       </p:sp>
       <p:sp>
         <p:nvSpPr>
-          <p:cNvPr id="17" name="Text 14"/>
+          <p:cNvPr id="18" name="Text 14"/>
           <p:cNvSpPr/>
           <p:nvPr/>
         </p:nvSpPr>
@@ -22768,7 +22776,7 @@
       </p:pic>
       <p:sp>
         <p:nvSpPr>
-          <p:cNvPr id="7" name="Shape 4"/>
+          <p:cNvPr id="8" name="Shape 4"/>
           <p:cNvSpPr/>
           <p:nvPr/>
         </p:nvSpPr>
@@ -22795,7 +22803,7 @@
       </p:sp>
       <p:sp>
         <p:nvSpPr>
-          <p:cNvPr id="8" name="Text 5"/>
+          <p:cNvPr id="9" name="Text 5"/>
           <p:cNvSpPr/>
           <p:nvPr/>
         </p:nvSpPr>
@@ -22994,7 +23002,7 @@
       </p:sp>
       <p:sp>
         <p:nvSpPr>
-          <p:cNvPr id="9" name="Shape 6"/>
+          <p:cNvPr id="10" name="Shape 6"/>
           <p:cNvSpPr/>
           <p:nvPr/>
         </p:nvSpPr>
@@ -23021,7 +23029,7 @@
       </p:sp>
       <p:sp>
         <p:nvSpPr>
-          <p:cNvPr id="10" name="Text 7"/>
+          <p:cNvPr id="11" name="Text 7"/>
           <p:cNvSpPr/>
           <p:nvPr/>
         </p:nvSpPr>
@@ -23060,7 +23068,7 @@
       </p:sp>
       <p:sp>
         <p:nvSpPr>
-          <p:cNvPr id="11" name="Shape 8"/>
+          <p:cNvPr id="12" name="Shape 8"/>
           <p:cNvSpPr/>
           <p:nvPr/>
         </p:nvSpPr>
@@ -23083,7 +23091,7 @@
       </p:sp>
       <p:sp>
         <p:nvSpPr>
-          <p:cNvPr id="12" name="Shape 9"/>
+          <p:cNvPr id="13" name="Shape 9"/>
           <p:cNvSpPr/>
           <p:nvPr/>
         </p:nvSpPr>
@@ -23103,7 +23111,7 @@
       </p:sp>
       <p:sp>
         <p:nvSpPr>
-          <p:cNvPr id="13" name="Shape 10"/>
+          <p:cNvPr id="14" name="Shape 10"/>
           <p:cNvSpPr/>
           <p:nvPr/>
         </p:nvSpPr>
@@ -23125,7 +23133,7 @@
       </p:sp>
       <p:sp>
         <p:nvSpPr>
-          <p:cNvPr id="14" name="Text 11"/>
+          <p:cNvPr id="15" name="Text 11"/>
           <p:cNvSpPr/>
           <p:nvPr/>
         </p:nvSpPr>
@@ -23164,7 +23172,7 @@
       </p:sp>
       <p:sp>
         <p:nvSpPr>
-          <p:cNvPr id="15" name="Shape 12"/>
+          <p:cNvPr id="16" name="Shape 12"/>
           <p:cNvSpPr/>
           <p:nvPr/>
         </p:nvSpPr>
@@ -23187,7 +23195,7 @@
       </p:sp>
       <p:sp>
         <p:nvSpPr>
-          <p:cNvPr id="16" name="Shape 13"/>
+          <p:cNvPr id="17" name="Shape 13"/>
           <p:cNvSpPr/>
           <p:nvPr/>
         </p:nvSpPr>
@@ -23207,7 +23215,7 @@
       </p:sp>
       <p:sp>
         <p:nvSpPr>
-          <p:cNvPr id="17" name="Shape 14"/>
+          <p:cNvPr id="18" name="Shape 14"/>
           <p:cNvSpPr/>
           <p:nvPr/>
         </p:nvSpPr>
@@ -23229,7 +23237,7 @@
       </p:sp>
       <p:sp>
         <p:nvSpPr>
-          <p:cNvPr id="18" name="Text 15"/>
+          <p:cNvPr id="19" name="Text 15"/>
           <p:cNvSpPr/>
           <p:nvPr/>
         </p:nvSpPr>
@@ -23268,7 +23276,7 @@
       </p:sp>
       <p:sp>
         <p:nvSpPr>
-          <p:cNvPr id="19" name="Shape 16"/>
+          <p:cNvPr id="20" name="Shape 16"/>
           <p:cNvSpPr/>
           <p:nvPr/>
         </p:nvSpPr>
@@ -23290,7 +23298,7 @@
       </p:sp>
       <p:sp>
         <p:nvSpPr>
-          <p:cNvPr id="20" name="Text 17"/>
+          <p:cNvPr id="21" name="Text 17"/>
           <p:cNvSpPr/>
           <p:nvPr/>
         </p:nvSpPr>

--- a/docs/decks/L03.pptx
+++ b/docs/decks/L03.pptx
@@ -525,7 +525,7 @@
           <a:p>
             <a:r>
               <a:rPr lang="en-US" dirty="0"/>
-              <a:t>Вітаю на третьому уроці — і на першому уроці тижня «Routing + cost». Одна модель на все — найдорожчий і найкрихкіший спосіб жити: «як скинути пароль» і розбір скарги на повернення коштів — різні задачі, а платите ви за них однією топовою моделлю. Сьогодні сервіс навчиться обирати модель під задачу. Розберемо конфіг адаптера — побачимо, як дві «моделі» живуть на одному mock і навіщо там drop_params та num_retries: 0. Напишемо роутер — функцію на десять рядків, яка стане єдиною точкою рішення про модель. Побачимо розподіл трафіку в базі — перший операційний доказ, що routing працює. І зрозуміємо, чому додати нового провайдера має коштувати рядків у YAML, а не рефакторингу. А заодно закладемо фундамент тижня 4: система, яка вміє обирати між моделями, — за один крок від системи, яка вміє переживати падіння однієї з них.</a:t>
+              <a:t/>
             </a:r>
             <a:endParaRPr lang="en-US" dirty="0"/>
           </a:p>
@@ -613,7 +613,7 @@
           <a:p>
             <a:r>
               <a:rPr lang="en-US" dirty="0"/>
-              <a:t>Кілька наслідків цієї форми, які варто проговорити наперед. Перший рядок — if (def != "mock") return def. З одним реальним ключем роутер вироджується: щойно MODEL не «mock», функція одразу повертає задану модель, бо другої реальної моделі в конфізі просто немає. Це не «роутинг вимкнули» — це чесний стан контуру з одним провайдером. Повернути маршрутизацію на реальних моделях — це другий блок у YAML gateway і друга гілка в профіль. Тримайте це в голові до фінального уроку: там буде порада «поживіть тиждень на реальному ключі», і без другої моделі головний важіль вартості з уроку 4 на реальному ключі не працює. Далі: Route() — чиста функція, рядок на вході, ім'я моделі на виході. Її можна протестувати без стека, бази і навіть без mock: таблиця «повідомлення → очікувана модель» і десяток assert'ів. Це найдешевші тести курсу — і саме вони рятують, коли хтось «трохи поправить» маркери: зміна політики маршрутизації стає видимою в діфі тестів, а не в рахунку наприкінці місяця. Конфлікти: «дякую, але хочу повернути гроші» містить і подяку, і ескалацію — правило чесно відправить його на strong, бо ескалаційний маркер сильніший. І це правильний дефолт: помилка «переплатили за просте» дешевша за «зекономили на скарзі». І мова: маркери навмисно двомовні — «поверн», «refund». У проді словники розповзаються по мовах і синонімах — саме тоді класифікація інтенту з наступного щабля починає окупатися.</a:t>
+              <a:t/>
             </a:r>
             <a:endParaRPr lang="en-US" dirty="0"/>
           </a:p>
@@ -701,7 +701,7 @@
           <a:p>
             <a:r>
               <a:rPr lang="en-US" dirty="0"/>
-              <a:t>Куди Route() росте в дорослих системах? Три типові щаблі. Правила за ключовими словами — наш сьогоднішній рівень: дешево, прозоро, зрозуміло на розборі; ламається на перефразуваннях. Класифікація інтенту — маленька дешева модель першим кроком визначає тип задачі, і вже тип вирішує маршрут. Парадокс тільки на перший погляд: витратити копійку на класифікацію, щоб зекономити гривню на генерації. Маршрут за контекстом — тенант, фіча, пріоритет клієнта, ліміт бюджету: текст повідомлення — лише один із сигналів. З практики, щоб щаблі не здавалися теорією. В агентній системі, яку я супроводжую, всередині кожного запуску є допоміжна LLM-задача — спланувати пошук по пам'яті розмови. Довго вона їхала на тій самій моделі, що й основна відповідь, — поки окремим свідомим рішенням її не перевели на дешеву: якість планування не змінилася, а це був множник на кожен запуск. Мораль: маршрутизуйте не лише запити користувачів — службові виклики теж трафік, і часто найжирніший. Другий приклад: повідомлення з вкладеним зображенням має їхати на модель, яка вміє бачити, — маршрут за можливістю такий самий законний критерій, як за складністю. І новий вимір: сучасні моделі мають режим мислення — «думай довше за більші гроші». Вибір більше не бінарний: та сама модель у глибокому режимі коштує і триває в рази більше. Правило те саме: дешевий режим — дефолт, дорогий — за явним критерієм, і це рішення теж має лежати в одній точці й потрапляти в лог. Окрема порада: політика маршрутизації має існувати і в одному людському реченні поруч із кодом — код каже «як», речення каже «чому»; губиться зазвичай саме друге.</a:t>
+              <a:t/>
             </a:r>
             <a:endParaRPr lang="en-US" dirty="0"/>
           </a:p>
@@ -789,7 +789,7 @@
           <a:p>
             <a:r>
               <a:rPr lang="en-US" dirty="0"/>
-              <a:t>Маршрутизація виглядає як безкоштовна оптимізація: обрали дешевшу модель — заплатили менше. Але саме рішення теж має ціну, і на певному рівні складності воно починає з'їдати ту економію, за якою ви йшли. Правила і маркери в тексті — частки мілісекунди, нуль токенів: доречні, поки класів мало і вони описуються словником. Це наш випадок. Дешева модель-класифікатор — це додатковий виклик: своя латентність і свої токени. Доречна, коли словники розповзлися по мовах і синонімах, а класів більше трьох. Класифікація за схожістю, embeddings, — виклик за векторами плюс сховище й індекс: коли класів десятки і вони змінюються без релізу. Арифметика, яку варто зробити до впровадження другого рядка: якщо класифікатор додає, скажімо, 300 мс до кожного запиту, ви щойно погіршили latency всім користувачам — включно з тими, чиї запити й так ішли на дешеву модель. І якщо він коштує токенів, економія від правильного маршруту мусить перевищити вартість самого рішення — інакше ви побудували складність, яка платить сама собі. Звідси принцип: рішення про модель — теж виклик, теж латентність, теж гроші. Починайте з найдешевшого способу, який закриває поточні класи, і рухайтеся вгору лише тоді, коли зміряли, що дешевший більше не працює.</a:t>
+              <a:t/>
             </a:r>
             <a:endParaRPr lang="en-US" dirty="0"/>
           </a:p>
@@ -877,7 +877,7 @@
           <a:p>
             <a:r>
               <a:rPr lang="en-US" dirty="0"/>
-              <a:t>Друга властивість, про яку згадують після першої скарги: маршрут має бути стабільним для користувача, а не для окремого запиту. Уявіть розмову, де перше питання пішло на сильну модель, друге — на дешеву, третє знову на сильну: людина бачить, як співрозмовник то розумніє, то тупіє, то міняє тон і довжину відповідей. Формально кожен окремий вибір був правильний. Сумарно — досвід зламаний. Лікування нехитре: якщо маршрут не диктується самою задачею — ескалація завжди їде на сильну модель, — тримайте його стабільним у межах сесії. Наприклад, обирайте за хешем ідентифікатора розмови, а не заново на кожну репліку. І зверніть увагу: це той самий механізм, який знадобиться для A/B промптів з уроку 2 і для canary з уроку 11. Стабільний вибір за ключем користувача — базова операція, яку варто написати один раз. Типова помилка тут — роутинг за випадковим числом, «щоб рівномірно розподілити». Рівномірність ви отримаєте, а разом із нею — систему, поведінка якої не відтворюється: та сама людина з тим самим питанням двічі отримує різні відповіді, і жодна скарга не діагностується. Випадковість у виборі моделі допустима лише там, де ви свідомо міряєте — експеримент, — і навіть там ключем має бути користувач, а не запит.</a:t>
+              <a:t/>
             </a:r>
             <a:endParaRPr lang="en-US" dirty="0"/>
           </a:p>
@@ -965,7 +965,7 @@
           <a:p>
             <a:r>
               <a:rPr lang="en-US" dirty="0"/>
-              <a:t>Найчастіше заперечення до цього уроку: «у нас один провайдер і одна модель, роутинг не про нас». Насправді роутинг — це не про вибір моделі, а про одну точку, де ухвалюється рішення про виклик. Модель — лише один із параметрів цього рішення, і навіть із однією моделлю обирати є що. Max_tokens: коротка відповідь на FAQ, довга на скаргу — стеля вартості на клас запиту, а не на всю систему. Temperature: мінімальна для довідкових відповідей, вища для формулювань — передбачуваність там, де вона потрібна. Версія промпта: ескалації — свій промпт, FAQ — свій; той самий реєстр з уроку 2, без нових механізмів. Набір інструментів: read-only для загальних питань, повний для авторизованих — менша поверхня для injection, урок 8. Бюджет часу: жорсткий таймаут для інтерактивних, вільніший для фонових — latency під очікування користувача, урок 7. І режим мислення: увімкнений лише для складних класів — найдорожчий параметр у сучасних API не для FAQ. Тобто Route() віддає не «назву моделі», а профіль виклику. Коли з'явиться друга модель, до профілю додасться ще одне поле — і жоден інший шар системи цього не помітить. Саме тому одна точка рішення важливіша за сам вибір: вона перетворює десяток розкиданих if-ів у структуру, в якій видно всі рішення разом. Мінімальний корисний роутер існує навіть при одній моделі: він розводить FAQ і скарги за довжиною відповіді й версією промпта — і вже цим економить гроші і прибирає «чому бот раптом розписався на три абзаци».</a:t>
+              <a:t/>
             </a:r>
             <a:endParaRPr lang="en-US" dirty="0"/>
           </a:p>
@@ -1053,7 +1053,7 @@
           <a:p>
             <a:r>
               <a:rPr lang="en-US" dirty="0"/>
-              <a:t>Поруч із питанням «куди йде запит» живе питання «хто підхопить, якщо основна модель впала». Це теж політика, і задається вона тим самим набором імен з конфіга. Для нашого стека природний порядок — mock-strong, потім mock-mini: у разі збою сильної моделі краще відповісти дешевшою, ніж не відповісти взагалі. Маленьке чесне попередження наперед: на mock резервного провайдера фізично немає, тож у коді тижня 4 роль резерву зіграє той самий mock — політика лишиться вашою, зміниться лише те, хто її втілює. Сьогодні ми цю чергу лише фіксуємо як рішення — записуємо поруч із роутером, обговорюємо з командою. Оживе вона на тижні 4, коли з'явиться механізм fallback і керовані збої. Порядок не випадковий: політика без механізму — це просто текст, але механізм без заздалегідь продуманої політики — це імпровізація під час інциденту, тобто найгірший момент для ухвалення рішень. І практична зв'язка: routing і fallback користуються одним словником імен з конфіга адаптера. Кожна зміна в наборі моделей — додали tier, перейменували, вивели з експлуатації — має пройти по обох списках одночасно. Ім'я, яке живе в роутері, але зникло з конфіга, — помилка на першому ж запиті; ім'я у fallback-черзі, якого ніхто не тестував, — помилка рівно в момент інциденту, коли вона найдорожча.</a:t>
+              <a:t/>
             </a:r>
             <a:endParaRPr lang="en-US" dirty="0"/>
           </a:p>
@@ -1141,7 +1141,7 @@
           <a:p>
             <a:r>
               <a:rPr lang="en-US" dirty="0"/>
-              <a:t>Перевірка, що архітектура зібрана правильно: скільки коштує підключити реального провайдера — наприклад, хмарний деплой тієї ж моделі? Відповідь — один блок у YAML. І, якщо хочемо пустити на нього трафік, — рядок у Route() або у fallback-порядку. Код виклику, парсинг відповіді, логування — не змінюються взагалі: для сервісу це просто ще одне ім'я моделі. Ключ, зверніть увагу, живе у змінних середовища gateway — рівно за принципом з уроку 1: секрети не перетинають межу адаптера. І лайфхак, який окупається при першому ж переїзді: називайте моделі в конфізі за роллю — mini, strong, — а не за вендором. Тоді «переїхати з провайдера А на провайдера Б» — це заміна правої частини YAML при незмінних іменах, і жоден рядок сервісу, лога чи дашборда не дізнається про переїзд.</a:t>
+              <a:t/>
             </a:r>
             <a:endParaRPr lang="en-US" dirty="0"/>
           </a:p>
@@ -1229,7 +1229,7 @@
           <a:p>
             <a:r>
               <a:rPr lang="en-US" dirty="0"/>
-              <a:t>Це опційний блок — і він же опційна частина ДЗ тижня 2. Два маршрути — мінімум, з якого все починається; наступний природний крок — три рівні замість двох. FAQ-tier — типові питання: найдешевша модель або взагалі заготовлені відповіді. Standard-tier — звичайний діалог: робоча модель. Escalation-tier — скарги, повернення, юридично чутливе: найсильніша модель. Механічно це ще одна гілка в Route() і ще одне ім'я в конфізі — після сьогоднішнього уроку ви вмієте і те, і те. Змістовно — вправа на політику: де провести межі між рівнями і як сформулювати їх так, щоб рішення можна було захистити цифрами. Частка трафіку і вартість кожного tier — усе вже є в лозі. Почніть із розподілу SELECT model, count(*) за кілька днів: якщо 80% трафіку — три однакові питання, FAQ-tier окупається одразу.</a:t>
+              <a:t/>
             </a:r>
             <a:endParaRPr lang="en-US" dirty="0"/>
           </a:p>
@@ -1317,7 +1317,7 @@
           <a:p>
             <a:r>
               <a:rPr lang="en-US" dirty="0"/>
-              <a:t>Перш ніж перейти до екрана — що саме ви зараз побачите і навіщо. Послідовність така: спершу конфіг gateway — дві «моделі», mock-mini і mock-strong, на одному mock. Потім Route() у сервісі — та сама функція на десять рядків, точка рішення. Далі кілька питань обох типів: звичайні — «як скинути пароль» — і ескалації — «поверніть гроші, терміново». І нарешті розподіл у базі: SELECT model, count(*) FROM requests GROUP BY model — дві моделі, різні лічильники. Навіщо це все: побачити перший операційний доказ, що routing працює. Не «код написаний», а «трафік розведений» — різниця між цими двома формулюваннями і є темою сьогоднішнього уроку. [Ведучому: демо йде на бранчі еталона тижня 2; перед записом — down -v і свіжий up. Українські ескалації на Windows/Git Bash не вводити інлайном у curl — кирилиця манглиться навіть після chcp 65001, інтент не матчиться і роутер виглядає зламаним при здоровій системі: тіло з файлу (--data-binary @body.json) або чат в UI. Після up дочекатися готовності gateway (health-ендпоінт або ~30 с): до готовності запити падають тихо — status=0, нульові токени. Перший запит після up — повільний: зробити прогрівний запит службовим повідомленням поза демо. Порти 4200/8080/4000/5432 мають бути вільні; якщо ні — файл зсунутих портів у стартері.]</a:t>
+              <a:t/>
             </a:r>
             <a:endParaRPr lang="en-US" dirty="0"/>
           </a:p>
@@ -1405,7 +1405,7 @@
           <a:p>
             <a:r>
               <a:rPr lang="en-US" dirty="0"/>
-              <a:t>Крок перший: прочитати конфіг. Відкрити gateway/litellm-config.yaml, знайти mock-mini і mock-strong, переконатися, що обидві дивляться на той самий mock. Звернути увагу на drop_params і num_retries: 0 — і пояснити собі, навіщо вони. Крок другий: написати роутер. Додати Route(message) у сервіс: ескалаційні маркери — «поверн», «терміново», «скарг», «refund» — ідуть на mock-strong, решта — на mock-mini. Жорсткий MODEL лишити тільки як дефолт для реального ключа. Крок третій: побачити розподіл. Надіслати кілька звичайних питань і кілька ескалацій. Увага: українські ескалації на Windows/Git Bash шліть тілом із файлу — --data @body.json — або через чат в UI: інлайнова кирилиця в curl псується, маркери не спрацюють, і роутер виглядатиме зламаним, хоч він здоровий. Потім SELECT model, count(*) FROM requests GROUP BY model — дві моделі, різні лічильники. Це перший операційний доказ, що routing працює: не «код написаний», а «трафік розведений». Крок четвертий: додати «третього провайдера» на папері. Виписати YAML-блок для хмарного провайдера і місце, де він став би у fallback-порядку. Переконатися, що код сервісу не змінився б узагалі — у цьому й сенс адаптера. І опційний п'ятий: накидати tier-політику — сформулювати межі трьох рівнів для свого трафіку і прикинути по лозі, яка частка запитів впаде в кожен.</a:t>
+              <a:t/>
             </a:r>
             <a:endParaRPr lang="en-US" dirty="0"/>
           </a:p>
@@ -1493,7 +1493,7 @@
           <a:p>
             <a:r>
               <a:rPr lang="en-US" dirty="0"/>
-              <a:t>Домовимось про результат уроку — конкретними діями, а не «зрозуміти» чи «ознайомитись». Після сьогоднішнього заняття ви зможете: написати Route() — роутер на десять рядків, який розводить ескалації і звичайні питання по двох моделях; довести в базі, що routing працює, — одним SQL-запитом побачити дві моделі з різними лічильниками; пояснити, чому рішення про модель живе в сервісі, а виконання виклику — в адаптері, і чим це відрізняється від галочки в конфізі інструмента; додати нового провайдера одним блоком у YAML — без жодної зміни коду сервісу; розрізнити alias і snapshot у назві моделі та пояснити, чому в production модель пінять; і сформулювати fallback-порядок — політику, яка оживе механізмом на тижні 4. Кожен пункт ви перевірите руками ще сьогодні — у лабораторній.</a:t>
+              <a:t/>
             </a:r>
             <a:endParaRPr lang="en-US" dirty="0"/>
           </a:p>
@@ -1581,7 +1581,7 @@
           <a:p>
             <a:r>
               <a:rPr lang="en-US" dirty="0"/>
-              <a:t>Зафіксуємо, що ми щойно побачили — і що це доводить. Перше: трафік реально розведений. SELECT model, count(*) показує дві моделі з різними лічильниками — це операційний доказ, а не «код написаний». Механіка маршрутизації справжня, навіть якщо обидва імені поки дивляться на той самий mock. Друге: рішення читається. Уся політика — в одній функції на десять рядків, і кожен її вибір — задокументована подія в лозі. Ви можете за хвилину пояснити, чому конкретний запит пішов на конкретну модель, — а це і був критерій з принципу уроку: інакше не маршрутизація, а лотерея з логами. Третє: розширення дешеве. «Третій провайдер» на папері зайняв один YAML-блок і жодного рядка коду сервісу — межа «сервіс вирішує, адаптер виконує» тримається не на словах, а на архітектурі. Разом ці три картинки — фундамент тижня: наступного уроку на це саме поле model ляже вартість кожного запиту, і розподіл трафіку перетвориться на розподіл грошей.</a:t>
+              <a:t/>
             </a:r>
             <a:endParaRPr lang="en-US" dirty="0"/>
           </a:p>
@@ -1669,7 +1669,7 @@
           <a:p>
             <a:r>
               <a:rPr lang="en-US" dirty="0"/>
-              <a:t>Перш ніж розійтися — чесна перевірка, без оцінок. Чотири пункти обов'язкової доріжки. Перший: routing розводить запити по двох моделях, і це видно в БД — не «я написав функцію», а «SELECT показує дві моделі з різними лічильниками». Другий: можу пояснити, чому рішення живе в сервісі, а виконання — в адаптері. Це головна межа архітектури, і сьогодні вона вперше запрацювала по-справжньому. Третій: можу пояснити, як додати реального провайдера без зміни коду сервісу — один блок у YAML, рядок у роутері, ключ у змінних середовища gateway. Четвертий: fallback-порядок сформульований і записаний — одним рядком, поруч із роутером. Він чекає на тиждень 4, коли з'явиться механізм. Якщо всі чотири пункти — «так», ви готові до наступного уроку. Де завагалися — туди і повертайтеся в матеріалі. Питання, які лишилися, — несіть у канал потоку або на Q&amp;A.</a:t>
+              <a:t/>
             </a:r>
             <a:endParaRPr lang="en-US" dirty="0"/>
           </a:p>
@@ -1757,7 +1757,7 @@
           <a:p>
             <a:r>
               <a:rPr lang="en-US" dirty="0"/>
-              <a:t>Чотири способи зіпсувати собі тиждень маршрутизації — всі перевірені чужими граблями. Топова модель на весь трафік «щоб напевно»: «напевно» коштує порядок грошей і не дає жодної гарантії якості на простих задачах — ми бачили це в першому блоці. Routing і fallback у конфізі gateway'я: воно працює — але ви збудували не механізм, а залежність від прапорців конкретного інструмента. Через півроку ніхто не пояснить, чому запит пішов саме туди. Слати всім провайдерам однаковий запит і дивуватися різним помилкам: провайдери «сумісні за стандартом», але розходяться в дрібницях. Нормалізація — робота адаптера; переконайтеся, що вона увімкнена, а не понадіялися на стандарт. І хардкод назв моделей по всьому коду: ім'я моделі має зустрічатися в сервісі один раз — у точці рішення. Все інше — розповзання політики по кодовій базі, і кожна зміна набору моделей перетворюється на пошук по всіх файлах.</a:t>
+              <a:t/>
             </a:r>
             <a:endParaRPr lang="en-US" dirty="0"/>
           </a:p>
@@ -1845,7 +1845,7 @@
           <a:p>
             <a:r>
               <a:rPr lang="en-US" dirty="0"/>
-              <a:t>Обов'язково — до наступного уроку, без здачі. Перше: закріпити лабу — роутер працює, SELECT model, count(*) FROM requests GROUP BY model показує дві моделі. Друге: переконатися, що жорстке ім'я моделі лишилося тільки в одному місці — у точці рішення. Третє: записати свій fallback-порядок одним рядком — він знадобиться на тижні 4. Опційно: сформулювати tier-політику на три рівні і оцінити по лозі частку трафіку кожного — це та сама вправа з опційного блоку уроку. І про ДЗ тижня: воно здається після наступного уроку. ДЗ тижня 2 об'єднує routing і cost: сьогоднішня частина вже у вас в руках, після уроку 4 додасться облік вартості — і тиждень здається одним PR. Критерії приймання будуть у файлі ДЗ після наступного уроку.</a:t>
+              <a:t/>
             </a:r>
             <a:endParaRPr lang="en-US" dirty="0"/>
           </a:p>
@@ -1933,7 +1933,7 @@
           <a:p>
             <a:r>
               <a:rPr lang="en-US" dirty="0"/>
-              <a:t>Підсумуємо. Дешеве — дешевій моделі, складне — сильній, і кожне рішення задокументоване: якщо ви не можете за хвилину пояснити, чому запит пішов на цю модель, у вас не маршрутизація, а лотерея з логами. Сервіс вирішує, адаптер виконує: політика маршрутизації — це код у Route(), який можна прочитати і протестувати, а нормалізація розбіжностей провайдерів — конфіг адаптера. Назва моделі — не константа: alias оновлюється під вами без вашого коміта, тому в production-конфізі стоїть snapshot, а оновлення — окрема свідома зміна. Route() віддає не назву моделі, а профіль виклику — і тому одна точка рішення важливіша за сам вибір: вона працює навіть тоді, коли модель одна. І fallback-порядок ви сьогодні оголосили й записали — механізм для нього з'явиться на тижні 4. Наступний урок — токеноміка і cost attribution. Routing розвів трафік по моделях — а скільки це коштує? Поки що поле cost_usd у лозі порожнє, і на питання «скільки коштує наш AI» система відповідає мовчанням. Розберемо, як рахувати вартість кожного запиту в момент запиту, оживимо плитку «Вартість сьогодні» і повісимо бюджет — щоб про перевитрату ви дізнавалися з консолі, а не з рахунку наприкінці місяця. До зустрічі.</a:t>
+              <a:t/>
             </a:r>
             <a:endParaRPr lang="en-US" dirty="0"/>
           </a:p>
@@ -2021,7 +2021,7 @@
           <a:p>
             <a:r>
               <a:rPr lang="en-US" dirty="0"/>
-              <a:t>Маршрут такий. Спершу проблема: три біди однієї моделі — гроші, залежність від одного провайдера і несумісність у дрібницях. Далі межа відповідальності з уроку 1, яка сьогодні вперше працює по-справжньому: сервіс вирішує, адаптер виконує. Потім розтин конфіга адаптера — дві «моделі» на одному mock і чому назва моделі — не константа: alias проти snapshot. Центральний блок — Route(): роутер на десять рядків, одна точка рішення. Після нього — куди ця функція росте: маршрут за задачею, ціна самого рішення, стабільність маршруту для користувача. Далі fallback-порядок — політика, яку ми сьогодні лише оголосимо, і перевірка архітектури: додати провайдера без зміни коду. Опційний блок — tier-система на три рівні. І класика: лабораторна, антипатерни тижня, домашнє завдання. [Ведучому: демо цього уроку йде на бранчі еталона тижня 2; перед показом — свіжий стан стека.]</a:t>
+              <a:t/>
             </a:r>
             <a:endParaRPr lang="en-US" dirty="0"/>
           </a:p>
@@ -2109,7 +2109,7 @@
           <a:p>
             <a:r>
               <a:rPr lang="en-US" dirty="0"/>
-              <a:t>Домовимось про шість слів. Gateway-адаптер — єдиний вихід із нашої системи до провайдерів: він виконує виклик, згладжує розбіжності їхніх API і тримає ключі. Роутер, у нас це функція Route, — точка рішення в сервісі: приймає повідомлення і повертає ім'я моделі. Alias — рухома назва моделі на кшталт «остання версія сімейства»: зручно, але змінюється під вами. Snapshot — зафіксована версія з датою чи ідентифікатором: не змінюється, але й не оновлюється сама. Fallback-порядок — оголошена черга «якщо ця модель недоступна, пробуємо наступну»; сьогодні ми її лише запишемо, механізм з'явиться на тижні 4. І tier — рівень обслуговування: набір правил «які питання яку модель отримують», опційна частина уроку. Ці слова звучатимуть постійно — далі розберемо кожне на місці.</a:t>
+              <a:t/>
             </a:r>
             <a:endParaRPr lang="en-US" dirty="0"/>
           </a:p>
@@ -2197,7 +2197,7 @@
           <a:p>
             <a:r>
               <a:rPr lang="en-US" dirty="0"/>
-              <a:t>Чому «одна модель на все» — погана ідея? Три біди. Перша — гроші. «Як скинути пароль?» і розбір скарги на повернення коштів — різні задачі, але платите ви за них однією топовою моделлю. На масовому трафіку підтримки різниця між дешевою і сильною моделлю — це порядок вартості: не «трохи дорожче», а вдесятеро. Ганяти FAQ через флагманську модель — все одно що викликати таксі бізнес-класу, щоб винести сміття. Друга — залежність. Один провайдер — це одна точка відмови, яка вам не належить. Ліміти запитів, деградації, зміни API трапляються регулярно і, за законом жанру, у ваш найгірший момент. Поки модель одна, будь-яка її проблема — проблема всієї системи, і плану Б не існує навіть теоретично. Третя, про яку рідко попереджають, — несумісність у дрібницях. Провайдери «сумісні за стандартом», але розходяться в деталях: одне й те саме поле конфігурації один приймає, інший відкидає з помилкою. З практики: я бачив, як цілий канал ліг просто тому, що апстрім відхиляв поле, яке «мало бути валідним», — а клієнтський код слав його всім однаково. Хтось у ланцюгу має згладжувати ці розбіжності — і це точно не ваш прикладний код.</a:t>
+              <a:t/>
             </a:r>
             <a:endParaRPr lang="en-US" dirty="0"/>
           </a:p>
@@ -2285,7 +2285,7 @@
           <a:p>
             <a:r>
               <a:rPr lang="en-US" dirty="0"/>
-              <a:t>З уроку 1 у нас є головна межа архітектури: вирішує сервіс, виконує адаптер. Сьогодні ця межа вперше працює по-справжньому. LiteLLM-адаптер дає єдиний виклик до десятків провайдерів: ваш код каже «виклич модель X» — і не знає, що в X інший формат помилок, інша автентифікація чи інший ліміт на поля. Нормалізація цих розбіжностей — робота адаптера, і саме тому третя біда з попереднього блоку лікується конфігом, а не патчами по всьому коду. А от рішення, яку модель викликати, живе в сервісі — свідомо. LiteLLM уміє і роутити, і фейлитись сам, через свій конфіг. Ми це не вмикаємо, і це принципова позиція курсу, а не обмеження інструмента. Рішення — це код: його можна прочитати, протестувати, залогувати і пояснити на розборі інциденту. Конфіг стороннього інструмента — це рішення, яке ви орендуєте: воно працює, поки ви користуєтесь цим інструментом, і зникає з переходом на інший. Механізми переносяться, прапорці — ні. І типова помилка: побачити в документації адаптера розділ про routing і fallback — і перенести туди все. Через півроку ніхто в команді не може відповісти, чому запит пішов саме на цю модель: логіка розмазана між YAML, дефолтами інструмента і його версією.</a:t>
+              <a:t/>
             </a:r>
             <a:endParaRPr lang="en-US" dirty="0"/>
           </a:p>
@@ -2373,7 +2373,7 @@
           <a:p>
             <a:r>
               <a:rPr lang="en-US" dirty="0"/>
-              <a:t>Відкриймо конфіг gateway — gateway/litellm-config.yaml. Перший рядок коментаря задає тон: «тут лише список моделей і ключі». Ось робочий фрагмент тижня. mock-mini і mock-strong — обидві вказують на той самий mock-провайдер. Це не халтура, а навчальний прийом: механіка маршрутизації справжня — сервіс реально обирає між двома іменами, база реально показує розподіл, — а рахунок нульовий. Коли з'явиться реальний ключ, зміняться лише праві частини цього YAML. Дві дрібниці в litellm_settings варті окремого погляду. Перша: drop_params: true — адаптер мовчки відкидає поля, які конкретний провайдер не приймає. Це і є та сама страховка від «валідного поля, що кладе канал» з блоку 01. Друга: num_retries: 0 — адаптер не ретраїть збої сам: помилка долітає до сервісу, який вирішує, що з нею робити. Приховані ретраї — це рішення, які хтось ухвалює за вас і без сліду в лозі. Зверніть увагу, як обидва налаштування працюють на ту саму межу: нормалізацію робить адаптер, а рішення лишаються сервісу.</a:t>
+              <a:t/>
             </a:r>
             <a:endParaRPr lang="en-US" dirty="0"/>
           </a:p>
@@ -2461,7 +2461,7 @@
           <a:p>
             <a:r>
               <a:rPr lang="en-US" dirty="0"/>
-              <a:t>У конфізі ви пишете назву моделі — і виглядає це як стабільна константа. Насправді назви бувають двох різних сортів, і різницю варто знати до першого сюрпризу. Alias — умовно «остання версія сімейства». Зручний тим, що ви автоматично отримуєте покращення, — і небезпечний тим самим: постачальник оновлює модель за цією назвою, і поведінка вашої системи змінюється без жодного вашого коміта. Snapshot — конкретна зафіксована версія з датою чи ідентифікатором. Вона не змінюється під вами, але й не оновлюється сама, і колись її виведуть з обігу. Для production-контуру правило однозначне: у конфізі стоїть snapshot, а оновлення до нового — окрема свідома зміна, яка проходить через ті самі перевірки якості, що й зміна промпта — уроки 10 і 11. Інакше ви отримуєте «регресію без коміта» з уроку 2, тільки цього разу винуватець узагалі поза вашою організацією: git чистий, промпт не змінювався, а відповіді інші. У нашому конфізі ви побачите саме alias'и — і це свідомо: реальний ключ у курсі опційний, механіку ми перевіряємо на mock, а поруч стоїть коментар із прикладом запіненого снапшота. Коли ваша система піде на справжнього провайдера, це перше, що варто змінити. І практичний наслідок для лога: у полі model має стояти те, що реально обслужило запит, включно з версією снапшота. «Gpt-подібна модель» у звіті через три місяці не скаже нічого, а «модель X, снапшот від дати Y» дозволяє порівняти два періоди.</a:t>
+              <a:t/>
             </a:r>
             <a:endParaRPr lang="en-US" dirty="0"/>
           </a:p>
@@ -2549,7 +2549,7 @@
           <a:p>
             <a:r>
               <a:rPr lang="en-US" dirty="0"/>
-              <a:t>Уся сьогоднішня «магія» в сервісі — одна функція і один рядок у /chat. Прочитаймо її як операційне рішення, а не як код. Перше: жорстка змінна MODEL зникла зі шляху рішення — вона лишилася тільки дефолтом для сценарію з реальним ключем. Друге: політика явна і вміщається в одне речення — «повернення, скарги і термінове йдуть на сильну модель, решта — на дешеву». Третє: обрана модель уже їде в лог — поле model пишеться з першого дня, тобто кожне рішення роутера — задокументована подія, яку можна порахувати. Так, це правила по ключових словах, і на проді ви швидко впретеся в їхні межі. Але зверніть увагу, що саме тут важливо: не спосіб класифікації, а те, що в системі з'явилася одна точка, де ухвалюється рішення про модель. Помінявши нутрощі Route(), ви не чіпаєте більше нічого.</a:t>
+              <a:t/>
             </a:r>
             <a:endParaRPr lang="en-US" dirty="0"/>
           </a:p>
@@ -3861,7 +3861,7 @@
       </p:pic>
       <p:sp>
         <p:nvSpPr>
-          <p:cNvPr id="8" name="Shape 4"/>
+          <p:cNvPr id="7" name="Shape 4"/>
           <p:cNvSpPr/>
           <p:nvPr/>
         </p:nvSpPr>
@@ -3883,7 +3883,7 @@
       </p:sp>
       <p:sp>
         <p:nvSpPr>
-          <p:cNvPr id="9" name="Shape 5"/>
+          <p:cNvPr id="8" name="Shape 5"/>
           <p:cNvSpPr/>
           <p:nvPr/>
         </p:nvSpPr>
@@ -3903,7 +3903,7 @@
       </p:sp>
       <p:sp>
         <p:nvSpPr>
-          <p:cNvPr id="10" name="Text 6"/>
+          <p:cNvPr id="9" name="Text 6"/>
           <p:cNvSpPr/>
           <p:nvPr/>
         </p:nvSpPr>
@@ -3942,7 +3942,7 @@
       </p:sp>
       <p:sp>
         <p:nvSpPr>
-          <p:cNvPr id="11" name="Text 7"/>
+          <p:cNvPr id="10" name="Text 7"/>
           <p:cNvSpPr/>
           <p:nvPr/>
         </p:nvSpPr>
@@ -3981,7 +3981,7 @@
       </p:sp>
       <p:sp>
         <p:nvSpPr>
-          <p:cNvPr id="12" name="Text 8"/>
+          <p:cNvPr id="11" name="Text 8"/>
           <p:cNvSpPr/>
           <p:nvPr/>
         </p:nvSpPr>
@@ -4023,7 +4023,7 @@
       </p:sp>
       <p:sp>
         <p:nvSpPr>
-          <p:cNvPr id="13" name="Shape 9"/>
+          <p:cNvPr id="12" name="Shape 9"/>
           <p:cNvSpPr/>
           <p:nvPr/>
         </p:nvSpPr>
@@ -4050,7 +4050,7 @@
       </p:sp>
       <p:sp>
         <p:nvSpPr>
-          <p:cNvPr id="14" name="Shape 10"/>
+          <p:cNvPr id="13" name="Shape 10"/>
           <p:cNvSpPr/>
           <p:nvPr/>
         </p:nvSpPr>
@@ -4070,7 +4070,7 @@
       </p:sp>
       <p:sp>
         <p:nvSpPr>
-          <p:cNvPr id="15" name="Text 11"/>
+          <p:cNvPr id="14" name="Text 11"/>
           <p:cNvSpPr/>
           <p:nvPr/>
         </p:nvSpPr>
@@ -4109,7 +4109,7 @@
       </p:sp>
       <p:sp>
         <p:nvSpPr>
-          <p:cNvPr id="16" name="Text 12"/>
+          <p:cNvPr id="15" name="Text 12"/>
           <p:cNvSpPr/>
           <p:nvPr/>
         </p:nvSpPr>
@@ -4148,7 +4148,7 @@
       </p:sp>
       <p:sp>
         <p:nvSpPr>
-          <p:cNvPr id="17" name="Text 13"/>
+          <p:cNvPr id="16" name="Text 13"/>
           <p:cNvSpPr/>
           <p:nvPr/>
         </p:nvSpPr>
@@ -4190,7 +4190,7 @@
       </p:sp>
       <p:sp>
         <p:nvSpPr>
-          <p:cNvPr id="18" name="Shape 14"/>
+          <p:cNvPr id="17" name="Shape 14"/>
           <p:cNvSpPr/>
           <p:nvPr/>
         </p:nvSpPr>
@@ -4212,7 +4212,7 @@
       </p:sp>
       <p:sp>
         <p:nvSpPr>
-          <p:cNvPr id="19" name="Shape 15"/>
+          <p:cNvPr id="18" name="Shape 15"/>
           <p:cNvSpPr/>
           <p:nvPr/>
         </p:nvSpPr>
@@ -4232,7 +4232,7 @@
       </p:sp>
       <p:sp>
         <p:nvSpPr>
-          <p:cNvPr id="20" name="Text 16"/>
+          <p:cNvPr id="19" name="Text 16"/>
           <p:cNvSpPr/>
           <p:nvPr/>
         </p:nvSpPr>
@@ -4271,7 +4271,7 @@
       </p:sp>
       <p:sp>
         <p:nvSpPr>
-          <p:cNvPr id="21" name="Text 17"/>
+          <p:cNvPr id="20" name="Text 17"/>
           <p:cNvSpPr/>
           <p:nvPr/>
         </p:nvSpPr>
@@ -4310,7 +4310,7 @@
       </p:sp>
       <p:sp>
         <p:nvSpPr>
-          <p:cNvPr id="22" name="Text 18"/>
+          <p:cNvPr id="21" name="Text 18"/>
           <p:cNvSpPr/>
           <p:nvPr/>
         </p:nvSpPr>
@@ -4352,7 +4352,7 @@
       </p:sp>
       <p:sp>
         <p:nvSpPr>
-          <p:cNvPr id="23" name="Shape 19"/>
+          <p:cNvPr id="22" name="Shape 19"/>
           <p:cNvSpPr/>
           <p:nvPr/>
         </p:nvSpPr>
@@ -4374,7 +4374,7 @@
       </p:sp>
       <p:sp>
         <p:nvSpPr>
-          <p:cNvPr id="24" name="Text 20"/>
+          <p:cNvPr id="23" name="Text 20"/>
           <p:cNvSpPr/>
           <p:nvPr/>
         </p:nvSpPr>
@@ -4413,7 +4413,7 @@
       </p:sp>
       <p:sp>
         <p:nvSpPr>
-          <p:cNvPr id="25" name="Text 21"/>
+          <p:cNvPr id="24" name="Text 21"/>
           <p:cNvSpPr/>
           <p:nvPr/>
         </p:nvSpPr>
@@ -4698,7 +4698,7 @@
       </p:pic>
       <p:sp>
         <p:nvSpPr>
-          <p:cNvPr id="8" name="Shape 4"/>
+          <p:cNvPr id="7" name="Shape 4"/>
           <p:cNvSpPr/>
           <p:nvPr/>
         </p:nvSpPr>
@@ -4725,7 +4725,7 @@
       </p:sp>
       <p:sp>
         <p:nvSpPr>
-          <p:cNvPr id="9" name="Text 5"/>
+          <p:cNvPr id="8" name="Text 5"/>
           <p:cNvSpPr/>
           <p:nvPr/>
         </p:nvSpPr>
@@ -4764,7 +4764,7 @@
       </p:sp>
       <p:sp>
         <p:nvSpPr>
-          <p:cNvPr id="10" name="Text 6"/>
+          <p:cNvPr id="9" name="Text 6"/>
           <p:cNvSpPr/>
           <p:nvPr/>
         </p:nvSpPr>
@@ -4803,7 +4803,7 @@
       </p:sp>
       <p:sp>
         <p:nvSpPr>
-          <p:cNvPr id="11" name="Shape 7"/>
+          <p:cNvPr id="10" name="Shape 7"/>
           <p:cNvSpPr/>
           <p:nvPr/>
         </p:nvSpPr>
@@ -4825,7 +4825,7 @@
       </p:sp>
       <p:sp>
         <p:nvSpPr>
-          <p:cNvPr id="12" name="Text 8"/>
+          <p:cNvPr id="11" name="Text 8"/>
           <p:cNvSpPr/>
           <p:nvPr/>
         </p:nvSpPr>
@@ -4864,7 +4864,7 @@
       </p:sp>
       <p:sp>
         <p:nvSpPr>
-          <p:cNvPr id="13" name="Text 9"/>
+          <p:cNvPr id="12" name="Text 9"/>
           <p:cNvSpPr/>
           <p:nvPr/>
         </p:nvSpPr>
@@ -4903,7 +4903,7 @@
       </p:sp>
       <p:sp>
         <p:nvSpPr>
-          <p:cNvPr id="14" name="Shape 10"/>
+          <p:cNvPr id="13" name="Shape 10"/>
           <p:cNvSpPr/>
           <p:nvPr/>
         </p:nvSpPr>
@@ -4925,7 +4925,7 @@
       </p:sp>
       <p:sp>
         <p:nvSpPr>
-          <p:cNvPr id="15" name="Text 11"/>
+          <p:cNvPr id="14" name="Text 11"/>
           <p:cNvSpPr/>
           <p:nvPr/>
         </p:nvSpPr>
@@ -4964,7 +4964,7 @@
       </p:sp>
       <p:sp>
         <p:nvSpPr>
-          <p:cNvPr id="16" name="Text 12"/>
+          <p:cNvPr id="15" name="Text 12"/>
           <p:cNvSpPr/>
           <p:nvPr/>
         </p:nvSpPr>
@@ -5003,7 +5003,7 @@
       </p:sp>
       <p:sp>
         <p:nvSpPr>
-          <p:cNvPr id="17" name="Shape 13"/>
+          <p:cNvPr id="16" name="Shape 13"/>
           <p:cNvSpPr/>
           <p:nvPr/>
         </p:nvSpPr>
@@ -5025,7 +5025,7 @@
       </p:sp>
       <p:sp>
         <p:nvSpPr>
-          <p:cNvPr id="18" name="Text 14"/>
+          <p:cNvPr id="17" name="Text 14"/>
           <p:cNvSpPr/>
           <p:nvPr/>
         </p:nvSpPr>
@@ -5064,7 +5064,7 @@
       </p:sp>
       <p:sp>
         <p:nvSpPr>
-          <p:cNvPr id="19" name="Text 15"/>
+          <p:cNvPr id="18" name="Text 15"/>
           <p:cNvSpPr/>
           <p:nvPr/>
         </p:nvSpPr>
@@ -6204,7 +6204,7 @@
       </p:graphicFrame>
       <p:sp>
         <p:nvSpPr>
-          <p:cNvPr id="9" name="Shape 4"/>
+          <p:cNvPr id="8" name="Shape 4"/>
           <p:cNvSpPr/>
           <p:nvPr/>
         </p:nvSpPr>
@@ -6226,7 +6226,7 @@
       </p:sp>
       <p:sp>
         <p:nvSpPr>
-          <p:cNvPr id="10" name="Text 5"/>
+          <p:cNvPr id="9" name="Text 5"/>
           <p:cNvSpPr/>
           <p:nvPr/>
         </p:nvSpPr>
@@ -6511,7 +6511,7 @@
       </p:pic>
       <p:sp>
         <p:nvSpPr>
-          <p:cNvPr id="8" name="Shape 4"/>
+          <p:cNvPr id="7" name="Shape 4"/>
           <p:cNvSpPr/>
           <p:nvPr/>
         </p:nvSpPr>
@@ -6533,7 +6533,7 @@
       </p:sp>
       <p:sp>
         <p:nvSpPr>
-          <p:cNvPr id="9" name="Text 5"/>
+          <p:cNvPr id="8" name="Text 5"/>
           <p:cNvSpPr/>
           <p:nvPr/>
         </p:nvSpPr>
@@ -6572,7 +6572,7 @@
       </p:sp>
       <p:sp>
         <p:nvSpPr>
-          <p:cNvPr id="10" name="Shape 6"/>
+          <p:cNvPr id="9" name="Shape 6"/>
           <p:cNvSpPr/>
           <p:nvPr/>
         </p:nvSpPr>
@@ -6595,7 +6595,7 @@
       </p:sp>
       <p:sp>
         <p:nvSpPr>
-          <p:cNvPr id="11" name="Shape 7"/>
+          <p:cNvPr id="10" name="Shape 7"/>
           <p:cNvSpPr/>
           <p:nvPr/>
         </p:nvSpPr>
@@ -6615,7 +6615,7 @@
       </p:sp>
       <p:sp>
         <p:nvSpPr>
-          <p:cNvPr id="12" name="Shape 8"/>
+          <p:cNvPr id="11" name="Shape 8"/>
           <p:cNvSpPr/>
           <p:nvPr/>
         </p:nvSpPr>
@@ -6637,7 +6637,7 @@
       </p:sp>
       <p:sp>
         <p:nvSpPr>
-          <p:cNvPr id="13" name="Text 9"/>
+          <p:cNvPr id="12" name="Text 9"/>
           <p:cNvSpPr/>
           <p:nvPr/>
         </p:nvSpPr>
@@ -6676,7 +6676,7 @@
       </p:sp>
       <p:sp>
         <p:nvSpPr>
-          <p:cNvPr id="14" name="Shape 10"/>
+          <p:cNvPr id="13" name="Shape 10"/>
           <p:cNvSpPr/>
           <p:nvPr/>
         </p:nvSpPr>
@@ -6699,7 +6699,7 @@
       </p:sp>
       <p:sp>
         <p:nvSpPr>
-          <p:cNvPr id="15" name="Shape 11"/>
+          <p:cNvPr id="14" name="Shape 11"/>
           <p:cNvSpPr/>
           <p:nvPr/>
         </p:nvSpPr>
@@ -6719,7 +6719,7 @@
       </p:sp>
       <p:sp>
         <p:nvSpPr>
-          <p:cNvPr id="16" name="Shape 12"/>
+          <p:cNvPr id="15" name="Shape 12"/>
           <p:cNvSpPr/>
           <p:nvPr/>
         </p:nvSpPr>
@@ -6741,7 +6741,7 @@
       </p:sp>
       <p:sp>
         <p:nvSpPr>
-          <p:cNvPr id="17" name="Text 13"/>
+          <p:cNvPr id="16" name="Text 13"/>
           <p:cNvSpPr/>
           <p:nvPr/>
         </p:nvSpPr>
@@ -6780,7 +6780,7 @@
       </p:sp>
       <p:sp>
         <p:nvSpPr>
-          <p:cNvPr id="18" name="Text 14"/>
+          <p:cNvPr id="17" name="Text 14"/>
           <p:cNvSpPr/>
           <p:nvPr/>
         </p:nvSpPr>
@@ -6819,7 +6819,7 @@
       </p:sp>
       <p:sp>
         <p:nvSpPr>
-          <p:cNvPr id="19" name="Shape 15"/>
+          <p:cNvPr id="18" name="Shape 15"/>
           <p:cNvSpPr/>
           <p:nvPr/>
         </p:nvSpPr>
@@ -6841,7 +6841,7 @@
       </p:sp>
       <p:sp>
         <p:nvSpPr>
-          <p:cNvPr id="20" name="Text 16"/>
+          <p:cNvPr id="19" name="Text 16"/>
           <p:cNvSpPr/>
           <p:nvPr/>
         </p:nvSpPr>
@@ -6880,7 +6880,7 @@
       </p:sp>
       <p:sp>
         <p:nvSpPr>
-          <p:cNvPr id="21" name="Text 17"/>
+          <p:cNvPr id="20" name="Text 17"/>
           <p:cNvSpPr/>
           <p:nvPr/>
         </p:nvSpPr>
@@ -6922,7 +6922,7 @@
       </p:sp>
       <p:sp>
         <p:nvSpPr>
-          <p:cNvPr id="22" name="Shape 18"/>
+          <p:cNvPr id="21" name="Shape 18"/>
           <p:cNvSpPr/>
           <p:nvPr/>
         </p:nvSpPr>
@@ -6944,7 +6944,7 @@
       </p:sp>
       <p:sp>
         <p:nvSpPr>
-          <p:cNvPr id="23" name="Text 19"/>
+          <p:cNvPr id="22" name="Text 19"/>
           <p:cNvSpPr/>
           <p:nvPr/>
         </p:nvSpPr>
@@ -6983,7 +6983,7 @@
       </p:sp>
       <p:sp>
         <p:nvSpPr>
-          <p:cNvPr id="24" name="Text 20"/>
+          <p:cNvPr id="23" name="Text 20"/>
           <p:cNvSpPr/>
           <p:nvPr/>
         </p:nvSpPr>
@@ -8329,7 +8329,7 @@
       </p:graphicFrame>
       <p:sp>
         <p:nvSpPr>
-          <p:cNvPr id="9" name="Shape 4"/>
+          <p:cNvPr id="8" name="Shape 4"/>
           <p:cNvSpPr/>
           <p:nvPr/>
         </p:nvSpPr>
@@ -8356,7 +8356,7 @@
       </p:sp>
       <p:sp>
         <p:nvSpPr>
-          <p:cNvPr id="10" name="Text 5"/>
+          <p:cNvPr id="9" name="Text 5"/>
           <p:cNvSpPr/>
           <p:nvPr/>
         </p:nvSpPr>
@@ -8641,7 +8641,7 @@
       </p:pic>
       <p:sp>
         <p:nvSpPr>
-          <p:cNvPr id="8" name="Shape 4"/>
+          <p:cNvPr id="7" name="Shape 4"/>
           <p:cNvSpPr/>
           <p:nvPr/>
         </p:nvSpPr>
@@ -8663,7 +8663,7 @@
       </p:sp>
       <p:sp>
         <p:nvSpPr>
-          <p:cNvPr id="9" name="Text 5"/>
+          <p:cNvPr id="8" name="Text 5"/>
           <p:cNvSpPr/>
           <p:nvPr/>
         </p:nvSpPr>
@@ -8702,7 +8702,7 @@
       </p:sp>
       <p:sp>
         <p:nvSpPr>
-          <p:cNvPr id="10" name="Shape 6"/>
+          <p:cNvPr id="9" name="Shape 6"/>
           <p:cNvSpPr/>
           <p:nvPr/>
         </p:nvSpPr>
@@ -8725,7 +8725,7 @@
       </p:sp>
       <p:sp>
         <p:nvSpPr>
-          <p:cNvPr id="11" name="Shape 7"/>
+          <p:cNvPr id="10" name="Shape 7"/>
           <p:cNvSpPr/>
           <p:nvPr/>
         </p:nvSpPr>
@@ -8745,7 +8745,7 @@
       </p:sp>
       <p:sp>
         <p:nvSpPr>
-          <p:cNvPr id="12" name="Shape 8"/>
+          <p:cNvPr id="11" name="Shape 8"/>
           <p:cNvSpPr/>
           <p:nvPr/>
         </p:nvSpPr>
@@ -8767,7 +8767,7 @@
       </p:sp>
       <p:sp>
         <p:nvSpPr>
-          <p:cNvPr id="13" name="Text 9"/>
+          <p:cNvPr id="12" name="Text 9"/>
           <p:cNvSpPr/>
           <p:nvPr/>
         </p:nvSpPr>
@@ -8806,7 +8806,7 @@
       </p:sp>
       <p:sp>
         <p:nvSpPr>
-          <p:cNvPr id="14" name="Text 10"/>
+          <p:cNvPr id="13" name="Text 10"/>
           <p:cNvSpPr/>
           <p:nvPr/>
         </p:nvSpPr>
@@ -8845,7 +8845,7 @@
       </p:sp>
       <p:sp>
         <p:nvSpPr>
-          <p:cNvPr id="15" name="Shape 11"/>
+          <p:cNvPr id="14" name="Shape 11"/>
           <p:cNvSpPr/>
           <p:nvPr/>
         </p:nvSpPr>
@@ -8867,7 +8867,7 @@
       </p:sp>
       <p:sp>
         <p:nvSpPr>
-          <p:cNvPr id="16" name="Text 12"/>
+          <p:cNvPr id="15" name="Text 12"/>
           <p:cNvSpPr/>
           <p:nvPr/>
         </p:nvSpPr>
@@ -8906,7 +8906,7 @@
       </p:sp>
       <p:sp>
         <p:nvSpPr>
-          <p:cNvPr id="17" name="Text 13"/>
+          <p:cNvPr id="16" name="Text 13"/>
           <p:cNvSpPr/>
           <p:nvPr/>
         </p:nvSpPr>
@@ -8948,7 +8948,7 @@
       </p:sp>
       <p:sp>
         <p:nvSpPr>
-          <p:cNvPr id="18" name="Shape 14"/>
+          <p:cNvPr id="17" name="Shape 14"/>
           <p:cNvSpPr/>
           <p:nvPr/>
         </p:nvSpPr>
@@ -8970,7 +8970,7 @@
       </p:sp>
       <p:sp>
         <p:nvSpPr>
-          <p:cNvPr id="19" name="Text 15"/>
+          <p:cNvPr id="18" name="Text 15"/>
           <p:cNvSpPr/>
           <p:nvPr/>
         </p:nvSpPr>
@@ -9009,7 +9009,7 @@
       </p:sp>
       <p:sp>
         <p:nvSpPr>
-          <p:cNvPr id="20" name="Text 16"/>
+          <p:cNvPr id="19" name="Text 16"/>
           <p:cNvSpPr/>
           <p:nvPr/>
         </p:nvSpPr>
@@ -9294,7 +9294,7 @@
       </p:pic>
       <p:sp>
         <p:nvSpPr>
-          <p:cNvPr id="8" name="Shape 4"/>
+          <p:cNvPr id="7" name="Shape 4"/>
           <p:cNvSpPr/>
           <p:nvPr/>
         </p:nvSpPr>
@@ -9321,7 +9321,7 @@
       </p:sp>
       <p:sp>
         <p:nvSpPr>
-          <p:cNvPr id="9" name="Text 5"/>
+          <p:cNvPr id="8" name="Text 5"/>
           <p:cNvSpPr/>
           <p:nvPr/>
         </p:nvSpPr>
@@ -9460,7 +9460,7 @@
       </p:sp>
       <p:sp>
         <p:nvSpPr>
-          <p:cNvPr id="10" name="Shape 6"/>
+          <p:cNvPr id="9" name="Shape 6"/>
           <p:cNvSpPr/>
           <p:nvPr/>
         </p:nvSpPr>
@@ -9482,7 +9482,7 @@
       </p:sp>
       <p:sp>
         <p:nvSpPr>
-          <p:cNvPr id="11" name="Text 7"/>
+          <p:cNvPr id="10" name="Text 7"/>
           <p:cNvSpPr/>
           <p:nvPr/>
         </p:nvSpPr>
@@ -9521,7 +9521,7 @@
       </p:sp>
       <p:sp>
         <p:nvSpPr>
-          <p:cNvPr id="12" name="Shape 8"/>
+          <p:cNvPr id="11" name="Shape 8"/>
           <p:cNvSpPr/>
           <p:nvPr/>
         </p:nvSpPr>
@@ -9544,7 +9544,7 @@
       </p:sp>
       <p:sp>
         <p:nvSpPr>
-          <p:cNvPr id="13" name="Shape 9"/>
+          <p:cNvPr id="12" name="Shape 9"/>
           <p:cNvSpPr/>
           <p:nvPr/>
         </p:nvSpPr>
@@ -9564,7 +9564,7 @@
       </p:sp>
       <p:sp>
         <p:nvSpPr>
-          <p:cNvPr id="14" name="Shape 10"/>
+          <p:cNvPr id="13" name="Shape 10"/>
           <p:cNvSpPr/>
           <p:nvPr/>
         </p:nvSpPr>
@@ -9591,7 +9591,7 @@
       </p:sp>
       <p:sp>
         <p:nvSpPr>
-          <p:cNvPr id="15" name="Text 11"/>
+          <p:cNvPr id="14" name="Text 11"/>
           <p:cNvSpPr/>
           <p:nvPr/>
         </p:nvSpPr>
@@ -9630,7 +9630,7 @@
       </p:sp>
       <p:sp>
         <p:nvSpPr>
-          <p:cNvPr id="16" name="Shape 12"/>
+          <p:cNvPr id="15" name="Shape 12"/>
           <p:cNvSpPr/>
           <p:nvPr/>
         </p:nvSpPr>
@@ -9653,7 +9653,7 @@
       </p:sp>
       <p:sp>
         <p:nvSpPr>
-          <p:cNvPr id="17" name="Shape 13"/>
+          <p:cNvPr id="16" name="Shape 13"/>
           <p:cNvSpPr/>
           <p:nvPr/>
         </p:nvSpPr>
@@ -9673,7 +9673,7 @@
       </p:sp>
       <p:sp>
         <p:nvSpPr>
-          <p:cNvPr id="18" name="Shape 14"/>
+          <p:cNvPr id="17" name="Shape 14"/>
           <p:cNvSpPr/>
           <p:nvPr/>
         </p:nvSpPr>
@@ -9695,7 +9695,7 @@
       </p:sp>
       <p:sp>
         <p:nvSpPr>
-          <p:cNvPr id="19" name="Text 15"/>
+          <p:cNvPr id="18" name="Text 15"/>
           <p:cNvSpPr/>
           <p:nvPr/>
         </p:nvSpPr>
@@ -9734,7 +9734,7 @@
       </p:sp>
       <p:sp>
         <p:nvSpPr>
-          <p:cNvPr id="20" name="Shape 16"/>
+          <p:cNvPr id="19" name="Shape 16"/>
           <p:cNvSpPr/>
           <p:nvPr/>
         </p:nvSpPr>
@@ -9756,7 +9756,7 @@
       </p:sp>
       <p:sp>
         <p:nvSpPr>
-          <p:cNvPr id="21" name="Text 17"/>
+          <p:cNvPr id="20" name="Text 17"/>
           <p:cNvSpPr/>
           <p:nvPr/>
         </p:nvSpPr>
@@ -9795,7 +9795,7 @@
       </p:sp>
       <p:sp>
         <p:nvSpPr>
-          <p:cNvPr id="22" name="Text 18"/>
+          <p:cNvPr id="21" name="Text 18"/>
           <p:cNvSpPr/>
           <p:nvPr/>
         </p:nvSpPr>
@@ -10141,7 +10141,7 @@
       </p:pic>
       <p:sp>
         <p:nvSpPr>
-          <p:cNvPr id="10" name="Shape 6"/>
+          <p:cNvPr id="9" name="Shape 6"/>
           <p:cNvSpPr/>
           <p:nvPr/>
         </p:nvSpPr>
@@ -10163,7 +10163,7 @@
       </p:sp>
       <p:sp>
         <p:nvSpPr>
-          <p:cNvPr id="11" name="Shape 7"/>
+          <p:cNvPr id="10" name="Shape 7"/>
           <p:cNvSpPr/>
           <p:nvPr/>
         </p:nvSpPr>
@@ -10183,7 +10183,7 @@
       </p:sp>
       <p:sp>
         <p:nvSpPr>
-          <p:cNvPr id="12" name="Text 8"/>
+          <p:cNvPr id="11" name="Text 8"/>
           <p:cNvSpPr/>
           <p:nvPr/>
         </p:nvSpPr>
@@ -10222,7 +10222,7 @@
       </p:sp>
       <p:sp>
         <p:nvSpPr>
-          <p:cNvPr id="13" name="Text 9"/>
+          <p:cNvPr id="12" name="Text 9"/>
           <p:cNvSpPr/>
           <p:nvPr/>
         </p:nvSpPr>
@@ -10261,7 +10261,7 @@
       </p:sp>
       <p:sp>
         <p:nvSpPr>
-          <p:cNvPr id="14" name="Text 10"/>
+          <p:cNvPr id="13" name="Text 10"/>
           <p:cNvSpPr/>
           <p:nvPr/>
         </p:nvSpPr>
@@ -10303,7 +10303,7 @@
       </p:sp>
       <p:sp>
         <p:nvSpPr>
-          <p:cNvPr id="15" name="Shape 11"/>
+          <p:cNvPr id="14" name="Shape 11"/>
           <p:cNvSpPr/>
           <p:nvPr/>
         </p:nvSpPr>
@@ -10325,7 +10325,7 @@
       </p:sp>
       <p:sp>
         <p:nvSpPr>
-          <p:cNvPr id="16" name="Shape 12"/>
+          <p:cNvPr id="15" name="Shape 12"/>
           <p:cNvSpPr/>
           <p:nvPr/>
         </p:nvSpPr>
@@ -10345,7 +10345,7 @@
       </p:sp>
       <p:sp>
         <p:nvSpPr>
-          <p:cNvPr id="17" name="Text 13"/>
+          <p:cNvPr id="16" name="Text 13"/>
           <p:cNvSpPr/>
           <p:nvPr/>
         </p:nvSpPr>
@@ -10384,7 +10384,7 @@
       </p:sp>
       <p:sp>
         <p:nvSpPr>
-          <p:cNvPr id="18" name="Text 14"/>
+          <p:cNvPr id="17" name="Text 14"/>
           <p:cNvSpPr/>
           <p:nvPr/>
         </p:nvSpPr>
@@ -10423,7 +10423,7 @@
       </p:sp>
       <p:sp>
         <p:nvSpPr>
-          <p:cNvPr id="19" name="Text 15"/>
+          <p:cNvPr id="18" name="Text 15"/>
           <p:cNvSpPr/>
           <p:nvPr/>
         </p:nvSpPr>
@@ -10465,7 +10465,7 @@
       </p:sp>
       <p:sp>
         <p:nvSpPr>
-          <p:cNvPr id="20" name="Shape 16"/>
+          <p:cNvPr id="19" name="Shape 16"/>
           <p:cNvSpPr/>
           <p:nvPr/>
         </p:nvSpPr>
@@ -10487,7 +10487,7 @@
       </p:sp>
       <p:sp>
         <p:nvSpPr>
-          <p:cNvPr id="21" name="Shape 17"/>
+          <p:cNvPr id="20" name="Shape 17"/>
           <p:cNvSpPr/>
           <p:nvPr/>
         </p:nvSpPr>
@@ -10507,7 +10507,7 @@
       </p:sp>
       <p:sp>
         <p:nvSpPr>
-          <p:cNvPr id="22" name="Text 18"/>
+          <p:cNvPr id="21" name="Text 18"/>
           <p:cNvSpPr/>
           <p:nvPr/>
         </p:nvSpPr>
@@ -10546,7 +10546,7 @@
       </p:sp>
       <p:sp>
         <p:nvSpPr>
-          <p:cNvPr id="23" name="Text 19"/>
+          <p:cNvPr id="22" name="Text 19"/>
           <p:cNvSpPr/>
           <p:nvPr/>
         </p:nvSpPr>
@@ -10585,7 +10585,7 @@
       </p:sp>
       <p:sp>
         <p:nvSpPr>
-          <p:cNvPr id="24" name="Text 20"/>
+          <p:cNvPr id="23" name="Text 20"/>
           <p:cNvSpPr/>
           <p:nvPr/>
         </p:nvSpPr>
@@ -10627,7 +10627,7 @@
       </p:sp>
       <p:sp>
         <p:nvSpPr>
-          <p:cNvPr id="25" name="Shape 21"/>
+          <p:cNvPr id="24" name="Shape 21"/>
           <p:cNvSpPr/>
           <p:nvPr/>
         </p:nvSpPr>
@@ -10654,7 +10654,7 @@
       </p:sp>
       <p:sp>
         <p:nvSpPr>
-          <p:cNvPr id="26" name="Text 22"/>
+          <p:cNvPr id="25" name="Text 22"/>
           <p:cNvSpPr/>
           <p:nvPr/>
         </p:nvSpPr>
@@ -10693,7 +10693,7 @@
       </p:sp>
       <p:sp>
         <p:nvSpPr>
-          <p:cNvPr id="27" name="Text 23"/>
+          <p:cNvPr id="26" name="Text 23"/>
           <p:cNvSpPr/>
           <p:nvPr/>
         </p:nvSpPr>
@@ -10735,7 +10735,7 @@
       </p:sp>
       <p:sp>
         <p:nvSpPr>
-          <p:cNvPr id="28" name="Shape 24"/>
+          <p:cNvPr id="27" name="Shape 24"/>
           <p:cNvSpPr/>
           <p:nvPr/>
         </p:nvSpPr>
@@ -10757,7 +10757,7 @@
       </p:sp>
       <p:sp>
         <p:nvSpPr>
-          <p:cNvPr id="29" name="Text 25"/>
+          <p:cNvPr id="28" name="Text 25"/>
           <p:cNvSpPr/>
           <p:nvPr/>
         </p:nvSpPr>
@@ -10796,7 +10796,7 @@
       </p:sp>
       <p:sp>
         <p:nvSpPr>
-          <p:cNvPr id="30" name="Text 26"/>
+          <p:cNvPr id="29" name="Text 26"/>
           <p:cNvSpPr/>
           <p:nvPr/>
         </p:nvSpPr>
@@ -11042,7 +11042,7 @@
       </p:pic>
       <p:sp>
         <p:nvSpPr>
-          <p:cNvPr id="7" name="Shape 3"/>
+          <p:cNvPr id="6" name="Shape 3"/>
           <p:cNvSpPr/>
           <p:nvPr/>
         </p:nvSpPr>
@@ -11064,7 +11064,7 @@
       </p:sp>
       <p:sp>
         <p:nvSpPr>
-          <p:cNvPr id="8" name="Shape 4"/>
+          <p:cNvPr id="7" name="Shape 4"/>
           <p:cNvSpPr/>
           <p:nvPr/>
         </p:nvSpPr>
@@ -11084,7 +11084,7 @@
       </p:sp>
       <p:sp>
         <p:nvSpPr>
-          <p:cNvPr id="9" name="Text 5"/>
+          <p:cNvPr id="8" name="Text 5"/>
           <p:cNvSpPr/>
           <p:nvPr/>
         </p:nvSpPr>
@@ -11123,7 +11123,7 @@
       </p:sp>
       <p:sp>
         <p:nvSpPr>
-          <p:cNvPr id="10" name="Text 6"/>
+          <p:cNvPr id="9" name="Text 6"/>
           <p:cNvSpPr/>
           <p:nvPr/>
         </p:nvSpPr>
@@ -11162,7 +11162,7 @@
       </p:sp>
       <p:sp>
         <p:nvSpPr>
-          <p:cNvPr id="11" name="Text 7"/>
+          <p:cNvPr id="10" name="Text 7"/>
           <p:cNvSpPr/>
           <p:nvPr/>
         </p:nvSpPr>
@@ -11204,7 +11204,7 @@
       </p:sp>
       <p:sp>
         <p:nvSpPr>
-          <p:cNvPr id="12" name="Shape 8"/>
+          <p:cNvPr id="11" name="Shape 8"/>
           <p:cNvSpPr/>
           <p:nvPr/>
         </p:nvSpPr>
@@ -11226,7 +11226,7 @@
       </p:sp>
       <p:sp>
         <p:nvSpPr>
-          <p:cNvPr id="13" name="Shape 9"/>
+          <p:cNvPr id="12" name="Shape 9"/>
           <p:cNvSpPr/>
           <p:nvPr/>
         </p:nvSpPr>
@@ -11246,7 +11246,7 @@
       </p:sp>
       <p:sp>
         <p:nvSpPr>
-          <p:cNvPr id="14" name="Text 10"/>
+          <p:cNvPr id="13" name="Text 10"/>
           <p:cNvSpPr/>
           <p:nvPr/>
         </p:nvSpPr>
@@ -11285,7 +11285,7 @@
       </p:sp>
       <p:sp>
         <p:nvSpPr>
-          <p:cNvPr id="15" name="Text 11"/>
+          <p:cNvPr id="14" name="Text 11"/>
           <p:cNvSpPr/>
           <p:nvPr/>
         </p:nvSpPr>
@@ -11324,7 +11324,7 @@
       </p:sp>
       <p:sp>
         <p:nvSpPr>
-          <p:cNvPr id="16" name="Text 12"/>
+          <p:cNvPr id="15" name="Text 12"/>
           <p:cNvSpPr/>
           <p:nvPr/>
         </p:nvSpPr>
@@ -11366,7 +11366,7 @@
       </p:sp>
       <p:sp>
         <p:nvSpPr>
-          <p:cNvPr id="17" name="Shape 13"/>
+          <p:cNvPr id="16" name="Shape 13"/>
           <p:cNvSpPr/>
           <p:nvPr/>
         </p:nvSpPr>
@@ -11388,7 +11388,7 @@
       </p:sp>
       <p:sp>
         <p:nvSpPr>
-          <p:cNvPr id="18" name="Shape 14"/>
+          <p:cNvPr id="17" name="Shape 14"/>
           <p:cNvSpPr/>
           <p:nvPr/>
         </p:nvSpPr>
@@ -11408,7 +11408,7 @@
       </p:sp>
       <p:sp>
         <p:nvSpPr>
-          <p:cNvPr id="19" name="Text 15"/>
+          <p:cNvPr id="18" name="Text 15"/>
           <p:cNvSpPr/>
           <p:nvPr/>
         </p:nvSpPr>
@@ -11447,7 +11447,7 @@
       </p:sp>
       <p:sp>
         <p:nvSpPr>
-          <p:cNvPr id="20" name="Text 16"/>
+          <p:cNvPr id="19" name="Text 16"/>
           <p:cNvSpPr/>
           <p:nvPr/>
         </p:nvSpPr>
@@ -11486,7 +11486,7 @@
       </p:sp>
       <p:sp>
         <p:nvSpPr>
-          <p:cNvPr id="21" name="Text 17"/>
+          <p:cNvPr id="20" name="Text 17"/>
           <p:cNvSpPr/>
           <p:nvPr/>
         </p:nvSpPr>
@@ -11528,7 +11528,7 @@
       </p:sp>
       <p:sp>
         <p:nvSpPr>
-          <p:cNvPr id="22" name="Shape 18"/>
+          <p:cNvPr id="21" name="Shape 18"/>
           <p:cNvSpPr/>
           <p:nvPr/>
         </p:nvSpPr>
@@ -11550,7 +11550,7 @@
       </p:sp>
       <p:sp>
         <p:nvSpPr>
-          <p:cNvPr id="23" name="Shape 19"/>
+          <p:cNvPr id="22" name="Shape 19"/>
           <p:cNvSpPr/>
           <p:nvPr/>
         </p:nvSpPr>
@@ -11570,7 +11570,7 @@
       </p:sp>
       <p:sp>
         <p:nvSpPr>
-          <p:cNvPr id="24" name="Text 20"/>
+          <p:cNvPr id="23" name="Text 20"/>
           <p:cNvSpPr/>
           <p:nvPr/>
         </p:nvSpPr>
@@ -11609,7 +11609,7 @@
       </p:sp>
       <p:sp>
         <p:nvSpPr>
-          <p:cNvPr id="25" name="Text 21"/>
+          <p:cNvPr id="24" name="Text 21"/>
           <p:cNvSpPr/>
           <p:nvPr/>
         </p:nvSpPr>
@@ -11648,7 +11648,7 @@
       </p:sp>
       <p:sp>
         <p:nvSpPr>
-          <p:cNvPr id="26" name="Text 22"/>
+          <p:cNvPr id="25" name="Text 22"/>
           <p:cNvSpPr/>
           <p:nvPr/>
         </p:nvSpPr>
@@ -11690,7 +11690,7 @@
       </p:sp>
       <p:sp>
         <p:nvSpPr>
-          <p:cNvPr id="27" name="Shape 23"/>
+          <p:cNvPr id="26" name="Shape 23"/>
           <p:cNvSpPr/>
           <p:nvPr/>
         </p:nvSpPr>
@@ -11712,7 +11712,7 @@
       </p:sp>
       <p:sp>
         <p:nvSpPr>
-          <p:cNvPr id="28" name="Text 24"/>
+          <p:cNvPr id="27" name="Text 24"/>
           <p:cNvSpPr/>
           <p:nvPr/>
         </p:nvSpPr>
@@ -11751,7 +11751,7 @@
       </p:sp>
       <p:sp>
         <p:nvSpPr>
-          <p:cNvPr id="29" name="Text 25"/>
+          <p:cNvPr id="28" name="Text 25"/>
           <p:cNvSpPr/>
           <p:nvPr/>
         </p:nvSpPr>
@@ -11997,7 +11997,7 @@
       </p:pic>
       <p:sp>
         <p:nvSpPr>
-          <p:cNvPr id="7" name="Shape 3"/>
+          <p:cNvPr id="6" name="Shape 3"/>
           <p:cNvSpPr/>
           <p:nvPr/>
         </p:nvSpPr>
@@ -12017,7 +12017,7 @@
       </p:sp>
       <p:sp>
         <p:nvSpPr>
-          <p:cNvPr id="8" name="Text 4"/>
+          <p:cNvPr id="7" name="Text 4"/>
           <p:cNvSpPr/>
           <p:nvPr/>
         </p:nvSpPr>
@@ -12056,7 +12056,7 @@
       </p:sp>
       <p:sp>
         <p:nvSpPr>
-          <p:cNvPr id="9" name="Text 5"/>
+          <p:cNvPr id="8" name="Text 5"/>
           <p:cNvSpPr/>
           <p:nvPr/>
         </p:nvSpPr>
@@ -12109,7 +12109,7 @@
       </p:sp>
       <p:sp>
         <p:nvSpPr>
-          <p:cNvPr id="10" name="Shape 6"/>
+          <p:cNvPr id="9" name="Shape 6"/>
           <p:cNvSpPr/>
           <p:nvPr/>
         </p:nvSpPr>
@@ -12129,7 +12129,7 @@
       </p:sp>
       <p:sp>
         <p:nvSpPr>
-          <p:cNvPr id="11" name="Text 7"/>
+          <p:cNvPr id="10" name="Text 7"/>
           <p:cNvSpPr/>
           <p:nvPr/>
         </p:nvSpPr>
@@ -12168,7 +12168,7 @@
       </p:sp>
       <p:sp>
         <p:nvSpPr>
-          <p:cNvPr id="12" name="Text 8"/>
+          <p:cNvPr id="11" name="Text 8"/>
           <p:cNvSpPr/>
           <p:nvPr/>
         </p:nvSpPr>
@@ -12221,7 +12221,7 @@
       </p:sp>
       <p:sp>
         <p:nvSpPr>
-          <p:cNvPr id="13" name="Shape 9"/>
+          <p:cNvPr id="12" name="Shape 9"/>
           <p:cNvSpPr/>
           <p:nvPr/>
         </p:nvSpPr>
@@ -12241,7 +12241,7 @@
       </p:sp>
       <p:sp>
         <p:nvSpPr>
-          <p:cNvPr id="14" name="Text 10"/>
+          <p:cNvPr id="13" name="Text 10"/>
           <p:cNvSpPr/>
           <p:nvPr/>
         </p:nvSpPr>
@@ -12280,7 +12280,7 @@
       </p:sp>
       <p:sp>
         <p:nvSpPr>
-          <p:cNvPr id="15" name="Text 11"/>
+          <p:cNvPr id="14" name="Text 11"/>
           <p:cNvSpPr/>
           <p:nvPr/>
         </p:nvSpPr>
@@ -12333,7 +12333,7 @@
       </p:sp>
       <p:sp>
         <p:nvSpPr>
-          <p:cNvPr id="16" name="Shape 12"/>
+          <p:cNvPr id="15" name="Shape 12"/>
           <p:cNvSpPr/>
           <p:nvPr/>
         </p:nvSpPr>
@@ -12353,7 +12353,7 @@
       </p:sp>
       <p:sp>
         <p:nvSpPr>
-          <p:cNvPr id="17" name="Text 13"/>
+          <p:cNvPr id="16" name="Text 13"/>
           <p:cNvSpPr/>
           <p:nvPr/>
         </p:nvSpPr>
@@ -12392,7 +12392,7 @@
       </p:sp>
       <p:sp>
         <p:nvSpPr>
-          <p:cNvPr id="18" name="Text 14"/>
+          <p:cNvPr id="17" name="Text 14"/>
           <p:cNvSpPr/>
           <p:nvPr/>
         </p:nvSpPr>
@@ -12445,7 +12445,7 @@
       </p:sp>
       <p:sp>
         <p:nvSpPr>
-          <p:cNvPr id="19" name="Shape 15"/>
+          <p:cNvPr id="18" name="Shape 15"/>
           <p:cNvSpPr/>
           <p:nvPr/>
         </p:nvSpPr>
@@ -12465,7 +12465,7 @@
       </p:sp>
       <p:sp>
         <p:nvSpPr>
-          <p:cNvPr id="20" name="Text 16"/>
+          <p:cNvPr id="19" name="Text 16"/>
           <p:cNvSpPr/>
           <p:nvPr/>
         </p:nvSpPr>
@@ -12504,7 +12504,7 @@
       </p:sp>
       <p:sp>
         <p:nvSpPr>
-          <p:cNvPr id="21" name="Text 17"/>
+          <p:cNvPr id="20" name="Text 17"/>
           <p:cNvSpPr/>
           <p:nvPr/>
         </p:nvSpPr>
@@ -12803,7 +12803,7 @@
       </p:pic>
       <p:sp>
         <p:nvSpPr>
-          <p:cNvPr id="8" name="Shape 4"/>
+          <p:cNvPr id="7" name="Shape 4"/>
           <p:cNvSpPr/>
           <p:nvPr/>
         </p:nvSpPr>
@@ -12830,7 +12830,7 @@
       </p:sp>
       <p:sp>
         <p:nvSpPr>
-          <p:cNvPr id="9" name="Shape 5"/>
+          <p:cNvPr id="8" name="Shape 5"/>
           <p:cNvSpPr/>
           <p:nvPr/>
         </p:nvSpPr>
@@ -12850,7 +12850,7 @@
       </p:sp>
       <p:sp>
         <p:nvSpPr>
-          <p:cNvPr id="10" name="Text 6"/>
+          <p:cNvPr id="9" name="Text 6"/>
           <p:cNvSpPr/>
           <p:nvPr/>
         </p:nvSpPr>
@@ -12889,7 +12889,7 @@
       </p:sp>
       <p:sp>
         <p:nvSpPr>
-          <p:cNvPr id="11" name="Text 7"/>
+          <p:cNvPr id="10" name="Text 7"/>
           <p:cNvSpPr/>
           <p:nvPr/>
         </p:nvSpPr>
@@ -12928,7 +12928,7 @@
       </p:sp>
       <p:sp>
         <p:nvSpPr>
-          <p:cNvPr id="12" name="Text 8"/>
+          <p:cNvPr id="11" name="Text 8"/>
           <p:cNvSpPr/>
           <p:nvPr/>
         </p:nvSpPr>
@@ -12970,7 +12970,7 @@
       </p:sp>
       <p:sp>
         <p:nvSpPr>
-          <p:cNvPr id="13" name="Shape 9"/>
+          <p:cNvPr id="12" name="Shape 9"/>
           <p:cNvSpPr/>
           <p:nvPr/>
         </p:nvSpPr>
@@ -12997,7 +12997,7 @@
       </p:sp>
       <p:sp>
         <p:nvSpPr>
-          <p:cNvPr id="14" name="Shape 10"/>
+          <p:cNvPr id="13" name="Shape 10"/>
           <p:cNvSpPr/>
           <p:nvPr/>
         </p:nvSpPr>
@@ -13017,7 +13017,7 @@
       </p:sp>
       <p:sp>
         <p:nvSpPr>
-          <p:cNvPr id="15" name="Text 11"/>
+          <p:cNvPr id="14" name="Text 11"/>
           <p:cNvSpPr/>
           <p:nvPr/>
         </p:nvSpPr>
@@ -13056,7 +13056,7 @@
       </p:sp>
       <p:sp>
         <p:nvSpPr>
-          <p:cNvPr id="16" name="Text 12"/>
+          <p:cNvPr id="15" name="Text 12"/>
           <p:cNvSpPr/>
           <p:nvPr/>
         </p:nvSpPr>
@@ -13095,7 +13095,7 @@
       </p:sp>
       <p:sp>
         <p:nvSpPr>
-          <p:cNvPr id="17" name="Text 13"/>
+          <p:cNvPr id="16" name="Text 13"/>
           <p:cNvSpPr/>
           <p:nvPr/>
         </p:nvSpPr>
@@ -13137,7 +13137,7 @@
       </p:sp>
       <p:sp>
         <p:nvSpPr>
-          <p:cNvPr id="18" name="Shape 14"/>
+          <p:cNvPr id="17" name="Shape 14"/>
           <p:cNvSpPr/>
           <p:nvPr/>
         </p:nvSpPr>
@@ -13164,7 +13164,7 @@
       </p:sp>
       <p:sp>
         <p:nvSpPr>
-          <p:cNvPr id="19" name="Shape 15"/>
+          <p:cNvPr id="18" name="Shape 15"/>
           <p:cNvSpPr/>
           <p:nvPr/>
         </p:nvSpPr>
@@ -13184,7 +13184,7 @@
       </p:sp>
       <p:sp>
         <p:nvSpPr>
-          <p:cNvPr id="20" name="Text 16"/>
+          <p:cNvPr id="19" name="Text 16"/>
           <p:cNvSpPr/>
           <p:nvPr/>
         </p:nvSpPr>
@@ -13223,7 +13223,7 @@
       </p:sp>
       <p:sp>
         <p:nvSpPr>
-          <p:cNvPr id="21" name="Text 17"/>
+          <p:cNvPr id="20" name="Text 17"/>
           <p:cNvSpPr/>
           <p:nvPr/>
         </p:nvSpPr>
@@ -13262,7 +13262,7 @@
       </p:sp>
       <p:sp>
         <p:nvSpPr>
-          <p:cNvPr id="22" name="Text 18"/>
+          <p:cNvPr id="21" name="Text 18"/>
           <p:cNvSpPr/>
           <p:nvPr/>
         </p:nvSpPr>
@@ -13304,7 +13304,7 @@
       </p:sp>
       <p:sp>
         <p:nvSpPr>
-          <p:cNvPr id="23" name="Shape 19"/>
+          <p:cNvPr id="22" name="Shape 19"/>
           <p:cNvSpPr/>
           <p:nvPr/>
         </p:nvSpPr>
@@ -13331,7 +13331,7 @@
       </p:sp>
       <p:sp>
         <p:nvSpPr>
-          <p:cNvPr id="24" name="Shape 20"/>
+          <p:cNvPr id="23" name="Shape 20"/>
           <p:cNvSpPr/>
           <p:nvPr/>
         </p:nvSpPr>
@@ -13351,7 +13351,7 @@
       </p:sp>
       <p:sp>
         <p:nvSpPr>
-          <p:cNvPr id="25" name="Text 21"/>
+          <p:cNvPr id="24" name="Text 21"/>
           <p:cNvSpPr/>
           <p:nvPr/>
         </p:nvSpPr>
@@ -13390,7 +13390,7 @@
       </p:sp>
       <p:sp>
         <p:nvSpPr>
-          <p:cNvPr id="26" name="Text 22"/>
+          <p:cNvPr id="25" name="Text 22"/>
           <p:cNvSpPr/>
           <p:nvPr/>
         </p:nvSpPr>
@@ -13429,7 +13429,7 @@
       </p:sp>
       <p:sp>
         <p:nvSpPr>
-          <p:cNvPr id="27" name="Text 23"/>
+          <p:cNvPr id="26" name="Text 23"/>
           <p:cNvSpPr/>
           <p:nvPr/>
         </p:nvSpPr>
@@ -13471,7 +13471,7 @@
       </p:sp>
       <p:sp>
         <p:nvSpPr>
-          <p:cNvPr id="28" name="Shape 24"/>
+          <p:cNvPr id="27" name="Shape 24"/>
           <p:cNvSpPr/>
           <p:nvPr/>
         </p:nvSpPr>
@@ -13498,7 +13498,7 @@
       </p:sp>
       <p:sp>
         <p:nvSpPr>
-          <p:cNvPr id="29" name="Shape 25"/>
+          <p:cNvPr id="28" name="Shape 25"/>
           <p:cNvSpPr/>
           <p:nvPr/>
         </p:nvSpPr>
@@ -13518,7 +13518,7 @@
       </p:sp>
       <p:sp>
         <p:nvSpPr>
-          <p:cNvPr id="30" name="Text 26"/>
+          <p:cNvPr id="29" name="Text 26"/>
           <p:cNvSpPr/>
           <p:nvPr/>
         </p:nvSpPr>
@@ -13557,7 +13557,7 @@
       </p:sp>
       <p:sp>
         <p:nvSpPr>
-          <p:cNvPr id="31" name="Text 27"/>
+          <p:cNvPr id="30" name="Text 27"/>
           <p:cNvSpPr/>
           <p:nvPr/>
         </p:nvSpPr>
@@ -13596,7 +13596,7 @@
       </p:sp>
       <p:sp>
         <p:nvSpPr>
-          <p:cNvPr id="32" name="Text 28"/>
+          <p:cNvPr id="31" name="Text 28"/>
           <p:cNvSpPr/>
           <p:nvPr/>
         </p:nvSpPr>
@@ -13842,7 +13842,7 @@
       </p:pic>
       <p:sp>
         <p:nvSpPr>
-          <p:cNvPr id="7" name="Shape 3"/>
+          <p:cNvPr id="6" name="Shape 3"/>
           <p:cNvSpPr/>
           <p:nvPr/>
         </p:nvSpPr>
@@ -13864,7 +13864,7 @@
       </p:sp>
       <p:sp>
         <p:nvSpPr>
-          <p:cNvPr id="8" name="Text 4"/>
+          <p:cNvPr id="7" name="Text 4"/>
           <p:cNvSpPr/>
           <p:nvPr/>
         </p:nvSpPr>
@@ -13903,7 +13903,7 @@
       </p:sp>
       <p:sp>
         <p:nvSpPr>
-          <p:cNvPr id="9" name="Text 5"/>
+          <p:cNvPr id="8" name="Text 5"/>
           <p:cNvSpPr/>
           <p:nvPr/>
         </p:nvSpPr>
@@ -13945,7 +13945,7 @@
       </p:sp>
       <p:sp>
         <p:nvSpPr>
-          <p:cNvPr id="10" name="Shape 6"/>
+          <p:cNvPr id="9" name="Shape 6"/>
           <p:cNvSpPr/>
           <p:nvPr/>
         </p:nvSpPr>
@@ -13967,7 +13967,7 @@
       </p:sp>
       <p:sp>
         <p:nvSpPr>
-          <p:cNvPr id="11" name="Text 7"/>
+          <p:cNvPr id="10" name="Text 7"/>
           <p:cNvSpPr/>
           <p:nvPr/>
         </p:nvSpPr>
@@ -14006,7 +14006,7 @@
       </p:sp>
       <p:sp>
         <p:nvSpPr>
-          <p:cNvPr id="12" name="Text 8"/>
+          <p:cNvPr id="11" name="Text 8"/>
           <p:cNvSpPr/>
           <p:nvPr/>
         </p:nvSpPr>
@@ -14048,7 +14048,7 @@
       </p:sp>
       <p:sp>
         <p:nvSpPr>
-          <p:cNvPr id="13" name="Shape 9"/>
+          <p:cNvPr id="12" name="Shape 9"/>
           <p:cNvSpPr/>
           <p:nvPr/>
         </p:nvSpPr>
@@ -14075,7 +14075,7 @@
       </p:sp>
       <p:sp>
         <p:nvSpPr>
-          <p:cNvPr id="14" name="Text 10"/>
+          <p:cNvPr id="13" name="Text 10"/>
           <p:cNvSpPr/>
           <p:nvPr/>
         </p:nvSpPr>
@@ -14114,7 +14114,7 @@
       </p:sp>
       <p:sp>
         <p:nvSpPr>
-          <p:cNvPr id="15" name="Text 11"/>
+          <p:cNvPr id="14" name="Text 11"/>
           <p:cNvSpPr/>
           <p:nvPr/>
         </p:nvSpPr>
@@ -14156,7 +14156,7 @@
       </p:sp>
       <p:sp>
         <p:nvSpPr>
-          <p:cNvPr id="16" name="Shape 12"/>
+          <p:cNvPr id="15" name="Shape 12"/>
           <p:cNvSpPr/>
           <p:nvPr/>
         </p:nvSpPr>
@@ -14183,7 +14183,7 @@
       </p:sp>
       <p:sp>
         <p:nvSpPr>
-          <p:cNvPr id="17" name="Text 13"/>
+          <p:cNvPr id="16" name="Text 13"/>
           <p:cNvSpPr/>
           <p:nvPr/>
         </p:nvSpPr>
@@ -14429,7 +14429,7 @@
       </p:pic>
       <p:sp>
         <p:nvSpPr>
-          <p:cNvPr id="7" name="Shape 3"/>
+          <p:cNvPr id="6" name="Shape 3"/>
           <p:cNvSpPr/>
           <p:nvPr/>
         </p:nvSpPr>
@@ -14456,7 +14456,7 @@
       </p:sp>
       <p:sp>
         <p:nvSpPr>
-          <p:cNvPr id="8" name="Shape 4"/>
+          <p:cNvPr id="7" name="Shape 4"/>
           <p:cNvSpPr/>
           <p:nvPr/>
         </p:nvSpPr>
@@ -14483,7 +14483,7 @@
       </p:sp>
       <p:sp>
         <p:nvSpPr>
-          <p:cNvPr id="9" name="Shape 5"/>
+          <p:cNvPr id="8" name="Shape 5"/>
           <p:cNvSpPr/>
           <p:nvPr/>
         </p:nvSpPr>
@@ -14503,7 +14503,7 @@
       </p:sp>
       <p:sp>
         <p:nvSpPr>
-          <p:cNvPr id="10" name="Shape 6"/>
+          <p:cNvPr id="9" name="Shape 6"/>
           <p:cNvSpPr/>
           <p:nvPr/>
         </p:nvSpPr>
@@ -14523,7 +14523,7 @@
       </p:sp>
       <p:sp>
         <p:nvSpPr>
-          <p:cNvPr id="11" name="Text 7"/>
+          <p:cNvPr id="10" name="Text 7"/>
           <p:cNvSpPr/>
           <p:nvPr/>
         </p:nvSpPr>
@@ -14562,7 +14562,7 @@
       </p:sp>
       <p:sp>
         <p:nvSpPr>
-          <p:cNvPr id="12" name="Shape 8"/>
+          <p:cNvPr id="11" name="Shape 8"/>
           <p:cNvSpPr/>
           <p:nvPr/>
         </p:nvSpPr>
@@ -14589,7 +14589,7 @@
       </p:sp>
       <p:sp>
         <p:nvSpPr>
-          <p:cNvPr id="13" name="Shape 9"/>
+          <p:cNvPr id="12" name="Shape 9"/>
           <p:cNvSpPr/>
           <p:nvPr/>
         </p:nvSpPr>
@@ -14609,7 +14609,7 @@
       </p:sp>
       <p:sp>
         <p:nvSpPr>
-          <p:cNvPr id="14" name="Shape 10"/>
+          <p:cNvPr id="13" name="Shape 10"/>
           <p:cNvSpPr/>
           <p:nvPr/>
         </p:nvSpPr>
@@ -14629,7 +14629,7 @@
       </p:sp>
       <p:sp>
         <p:nvSpPr>
-          <p:cNvPr id="15" name="Text 11"/>
+          <p:cNvPr id="14" name="Text 11"/>
           <p:cNvSpPr/>
           <p:nvPr/>
         </p:nvSpPr>
@@ -14668,7 +14668,7 @@
       </p:sp>
       <p:sp>
         <p:nvSpPr>
-          <p:cNvPr id="16" name="Shape 12"/>
+          <p:cNvPr id="15" name="Shape 12"/>
           <p:cNvSpPr/>
           <p:nvPr/>
         </p:nvSpPr>
@@ -14695,7 +14695,7 @@
       </p:sp>
       <p:sp>
         <p:nvSpPr>
-          <p:cNvPr id="17" name="Shape 13"/>
+          <p:cNvPr id="16" name="Shape 13"/>
           <p:cNvSpPr/>
           <p:nvPr/>
         </p:nvSpPr>
@@ -14715,7 +14715,7 @@
       </p:sp>
       <p:sp>
         <p:nvSpPr>
-          <p:cNvPr id="18" name="Shape 14"/>
+          <p:cNvPr id="17" name="Shape 14"/>
           <p:cNvSpPr/>
           <p:nvPr/>
         </p:nvSpPr>
@@ -14735,7 +14735,7 @@
       </p:sp>
       <p:sp>
         <p:nvSpPr>
-          <p:cNvPr id="19" name="Text 15"/>
+          <p:cNvPr id="18" name="Text 15"/>
           <p:cNvSpPr/>
           <p:nvPr/>
         </p:nvSpPr>
@@ -14774,7 +14774,7 @@
       </p:sp>
       <p:sp>
         <p:nvSpPr>
-          <p:cNvPr id="20" name="Shape 16"/>
+          <p:cNvPr id="19" name="Shape 16"/>
           <p:cNvSpPr/>
           <p:nvPr/>
         </p:nvSpPr>
@@ -14801,7 +14801,7 @@
       </p:sp>
       <p:sp>
         <p:nvSpPr>
-          <p:cNvPr id="21" name="Shape 17"/>
+          <p:cNvPr id="20" name="Shape 17"/>
           <p:cNvSpPr/>
           <p:nvPr/>
         </p:nvSpPr>
@@ -14821,7 +14821,7 @@
       </p:sp>
       <p:sp>
         <p:nvSpPr>
-          <p:cNvPr id="22" name="Shape 18"/>
+          <p:cNvPr id="21" name="Shape 18"/>
           <p:cNvSpPr/>
           <p:nvPr/>
         </p:nvSpPr>
@@ -14841,7 +14841,7 @@
       </p:sp>
       <p:sp>
         <p:nvSpPr>
-          <p:cNvPr id="23" name="Text 19"/>
+          <p:cNvPr id="22" name="Text 19"/>
           <p:cNvSpPr/>
           <p:nvPr/>
         </p:nvSpPr>
@@ -14880,7 +14880,7 @@
       </p:sp>
       <p:sp>
         <p:nvSpPr>
-          <p:cNvPr id="24" name="Text 20"/>
+          <p:cNvPr id="23" name="Text 20"/>
           <p:cNvSpPr/>
           <p:nvPr/>
         </p:nvSpPr>
@@ -15123,7 +15123,7 @@
       </p:pic>
       <p:sp>
         <p:nvSpPr>
-          <p:cNvPr id="7" name="Shape 3"/>
+          <p:cNvPr id="6" name="Shape 3"/>
           <p:cNvSpPr/>
           <p:nvPr/>
         </p:nvSpPr>
@@ -15150,7 +15150,7 @@
       </p:sp>
       <p:sp>
         <p:nvSpPr>
-          <p:cNvPr id="8" name="Shape 4"/>
+          <p:cNvPr id="7" name="Shape 4"/>
           <p:cNvSpPr/>
           <p:nvPr/>
         </p:nvSpPr>
@@ -15170,7 +15170,7 @@
       </p:sp>
       <p:sp>
         <p:nvSpPr>
-          <p:cNvPr id="9" name="Shape 5"/>
+          <p:cNvPr id="8" name="Shape 5"/>
           <p:cNvSpPr/>
           <p:nvPr/>
         </p:nvSpPr>
@@ -15190,7 +15190,7 @@
       </p:sp>
       <p:sp>
         <p:nvSpPr>
-          <p:cNvPr id="10" name="Shape 6"/>
+          <p:cNvPr id="9" name="Shape 6"/>
           <p:cNvSpPr/>
           <p:nvPr/>
         </p:nvSpPr>
@@ -15210,7 +15210,7 @@
       </p:sp>
       <p:sp>
         <p:nvSpPr>
-          <p:cNvPr id="11" name="Text 7"/>
+          <p:cNvPr id="10" name="Text 7"/>
           <p:cNvSpPr/>
           <p:nvPr/>
         </p:nvSpPr>
@@ -15263,7 +15263,7 @@
       </p:sp>
       <p:sp>
         <p:nvSpPr>
-          <p:cNvPr id="12" name="Shape 8"/>
+          <p:cNvPr id="11" name="Shape 8"/>
           <p:cNvSpPr/>
           <p:nvPr/>
         </p:nvSpPr>
@@ -15290,7 +15290,7 @@
       </p:sp>
       <p:sp>
         <p:nvSpPr>
-          <p:cNvPr id="13" name="Shape 9"/>
+          <p:cNvPr id="12" name="Shape 9"/>
           <p:cNvSpPr/>
           <p:nvPr/>
         </p:nvSpPr>
@@ -15310,7 +15310,7 @@
       </p:sp>
       <p:sp>
         <p:nvSpPr>
-          <p:cNvPr id="14" name="Shape 10"/>
+          <p:cNvPr id="13" name="Shape 10"/>
           <p:cNvSpPr/>
           <p:nvPr/>
         </p:nvSpPr>
@@ -15330,7 +15330,7 @@
       </p:sp>
       <p:sp>
         <p:nvSpPr>
-          <p:cNvPr id="15" name="Shape 11"/>
+          <p:cNvPr id="14" name="Shape 11"/>
           <p:cNvSpPr/>
           <p:nvPr/>
         </p:nvSpPr>
@@ -15350,7 +15350,7 @@
       </p:sp>
       <p:sp>
         <p:nvSpPr>
-          <p:cNvPr id="16" name="Text 12"/>
+          <p:cNvPr id="15" name="Text 12"/>
           <p:cNvSpPr/>
           <p:nvPr/>
         </p:nvSpPr>
@@ -15403,7 +15403,7 @@
       </p:sp>
       <p:sp>
         <p:nvSpPr>
-          <p:cNvPr id="17" name="Shape 13"/>
+          <p:cNvPr id="16" name="Shape 13"/>
           <p:cNvSpPr/>
           <p:nvPr/>
         </p:nvSpPr>
@@ -15430,7 +15430,7 @@
       </p:sp>
       <p:sp>
         <p:nvSpPr>
-          <p:cNvPr id="18" name="Shape 14"/>
+          <p:cNvPr id="17" name="Shape 14"/>
           <p:cNvSpPr/>
           <p:nvPr/>
         </p:nvSpPr>
@@ -15450,7 +15450,7 @@
       </p:sp>
       <p:sp>
         <p:nvSpPr>
-          <p:cNvPr id="19" name="Shape 15"/>
+          <p:cNvPr id="18" name="Shape 15"/>
           <p:cNvSpPr/>
           <p:nvPr/>
         </p:nvSpPr>
@@ -15470,7 +15470,7 @@
       </p:sp>
       <p:sp>
         <p:nvSpPr>
-          <p:cNvPr id="20" name="Shape 16"/>
+          <p:cNvPr id="19" name="Shape 16"/>
           <p:cNvSpPr/>
           <p:nvPr/>
         </p:nvSpPr>
@@ -15490,7 +15490,7 @@
       </p:sp>
       <p:sp>
         <p:nvSpPr>
-          <p:cNvPr id="21" name="Text 17"/>
+          <p:cNvPr id="20" name="Text 17"/>
           <p:cNvSpPr/>
           <p:nvPr/>
         </p:nvSpPr>
@@ -15543,7 +15543,7 @@
       </p:sp>
       <p:sp>
         <p:nvSpPr>
-          <p:cNvPr id="22" name="Shape 18"/>
+          <p:cNvPr id="21" name="Shape 18"/>
           <p:cNvSpPr/>
           <p:nvPr/>
         </p:nvSpPr>
@@ -15570,7 +15570,7 @@
       </p:sp>
       <p:sp>
         <p:nvSpPr>
-          <p:cNvPr id="23" name="Shape 19"/>
+          <p:cNvPr id="22" name="Shape 19"/>
           <p:cNvSpPr/>
           <p:nvPr/>
         </p:nvSpPr>
@@ -15590,7 +15590,7 @@
       </p:sp>
       <p:sp>
         <p:nvSpPr>
-          <p:cNvPr id="24" name="Shape 20"/>
+          <p:cNvPr id="23" name="Shape 20"/>
           <p:cNvSpPr/>
           <p:nvPr/>
         </p:nvSpPr>
@@ -15610,7 +15610,7 @@
       </p:sp>
       <p:sp>
         <p:nvSpPr>
-          <p:cNvPr id="25" name="Shape 21"/>
+          <p:cNvPr id="24" name="Shape 21"/>
           <p:cNvSpPr/>
           <p:nvPr/>
         </p:nvSpPr>
@@ -15630,7 +15630,7 @@
       </p:sp>
       <p:sp>
         <p:nvSpPr>
-          <p:cNvPr id="26" name="Text 22"/>
+          <p:cNvPr id="25" name="Text 22"/>
           <p:cNvSpPr/>
           <p:nvPr/>
         </p:nvSpPr>
@@ -15887,7 +15887,7 @@
       </p:pic>
       <p:sp>
         <p:nvSpPr>
-          <p:cNvPr id="7" name="Shape 3"/>
+          <p:cNvPr id="6" name="Shape 3"/>
           <p:cNvSpPr/>
           <p:nvPr/>
         </p:nvSpPr>
@@ -15914,7 +15914,7 @@
       </p:sp>
       <p:sp>
         <p:nvSpPr>
-          <p:cNvPr id="8" name="Text 4"/>
+          <p:cNvPr id="7" name="Text 4"/>
           <p:cNvSpPr/>
           <p:nvPr/>
         </p:nvSpPr>
@@ -15953,7 +15953,7 @@
       </p:sp>
       <p:sp>
         <p:nvSpPr>
-          <p:cNvPr id="9" name="Text 5"/>
+          <p:cNvPr id="8" name="Text 5"/>
           <p:cNvSpPr/>
           <p:nvPr/>
         </p:nvSpPr>
@@ -16053,7 +16053,7 @@
       </p:sp>
       <p:sp>
         <p:nvSpPr>
-          <p:cNvPr id="10" name="Shape 6"/>
+          <p:cNvPr id="9" name="Shape 6"/>
           <p:cNvSpPr/>
           <p:nvPr/>
         </p:nvSpPr>
@@ -16075,7 +16075,7 @@
       </p:sp>
       <p:sp>
         <p:nvSpPr>
-          <p:cNvPr id="11" name="Text 7"/>
+          <p:cNvPr id="10" name="Text 7"/>
           <p:cNvSpPr/>
           <p:nvPr/>
         </p:nvSpPr>
@@ -16114,7 +16114,7 @@
       </p:sp>
       <p:sp>
         <p:nvSpPr>
-          <p:cNvPr id="12" name="Text 8"/>
+          <p:cNvPr id="11" name="Text 8"/>
           <p:cNvSpPr/>
           <p:nvPr/>
         </p:nvSpPr>
@@ -16156,7 +16156,7 @@
       </p:sp>
       <p:sp>
         <p:nvSpPr>
-          <p:cNvPr id="13" name="Shape 9"/>
+          <p:cNvPr id="12" name="Shape 9"/>
           <p:cNvSpPr/>
           <p:nvPr/>
         </p:nvSpPr>
@@ -16183,7 +16183,7 @@
       </p:sp>
       <p:sp>
         <p:nvSpPr>
-          <p:cNvPr id="14" name="Text 10"/>
+          <p:cNvPr id="13" name="Text 10"/>
           <p:cNvSpPr/>
           <p:nvPr/>
         </p:nvSpPr>
@@ -16222,7 +16222,7 @@
       </p:sp>
       <p:sp>
         <p:nvSpPr>
-          <p:cNvPr id="15" name="Text 11"/>
+          <p:cNvPr id="14" name="Text 11"/>
           <p:cNvSpPr/>
           <p:nvPr/>
         </p:nvSpPr>
@@ -16988,7 +16988,7 @@
       </p:pic>
       <p:sp>
         <p:nvSpPr>
-          <p:cNvPr id="7" name="Shape 3"/>
+          <p:cNvPr id="6" name="Shape 3"/>
           <p:cNvSpPr/>
           <p:nvPr/>
         </p:nvSpPr>
@@ -17015,7 +17015,7 @@
       </p:sp>
       <p:sp>
         <p:nvSpPr>
-          <p:cNvPr id="8" name="Shape 4"/>
+          <p:cNvPr id="7" name="Shape 4"/>
           <p:cNvSpPr/>
           <p:nvPr/>
         </p:nvSpPr>
@@ -17035,7 +17035,7 @@
       </p:sp>
       <p:sp>
         <p:nvSpPr>
-          <p:cNvPr id="9" name="Text 5"/>
+          <p:cNvPr id="8" name="Text 5"/>
           <p:cNvSpPr/>
           <p:nvPr/>
         </p:nvSpPr>
@@ -17074,7 +17074,7 @@
       </p:sp>
       <p:sp>
         <p:nvSpPr>
-          <p:cNvPr id="10" name="Text 6"/>
+          <p:cNvPr id="9" name="Text 6"/>
           <p:cNvSpPr/>
           <p:nvPr/>
         </p:nvSpPr>
@@ -17113,7 +17113,7 @@
       </p:sp>
       <p:sp>
         <p:nvSpPr>
-          <p:cNvPr id="11" name="Shape 7"/>
+          <p:cNvPr id="10" name="Shape 7"/>
           <p:cNvSpPr/>
           <p:nvPr/>
         </p:nvSpPr>
@@ -17140,7 +17140,7 @@
       </p:sp>
       <p:sp>
         <p:nvSpPr>
-          <p:cNvPr id="12" name="Shape 8"/>
+          <p:cNvPr id="11" name="Shape 8"/>
           <p:cNvSpPr/>
           <p:nvPr/>
         </p:nvSpPr>
@@ -17160,7 +17160,7 @@
       </p:sp>
       <p:sp>
         <p:nvSpPr>
-          <p:cNvPr id="13" name="Text 9"/>
+          <p:cNvPr id="12" name="Text 9"/>
           <p:cNvSpPr/>
           <p:nvPr/>
         </p:nvSpPr>
@@ -17199,7 +17199,7 @@
       </p:sp>
       <p:sp>
         <p:nvSpPr>
-          <p:cNvPr id="14" name="Text 10"/>
+          <p:cNvPr id="13" name="Text 10"/>
           <p:cNvSpPr/>
           <p:nvPr/>
         </p:nvSpPr>
@@ -17238,7 +17238,7 @@
       </p:sp>
       <p:sp>
         <p:nvSpPr>
-          <p:cNvPr id="15" name="Shape 11"/>
+          <p:cNvPr id="14" name="Shape 11"/>
           <p:cNvSpPr/>
           <p:nvPr/>
         </p:nvSpPr>
@@ -17265,7 +17265,7 @@
       </p:sp>
       <p:sp>
         <p:nvSpPr>
-          <p:cNvPr id="16" name="Shape 12"/>
+          <p:cNvPr id="15" name="Shape 12"/>
           <p:cNvSpPr/>
           <p:nvPr/>
         </p:nvSpPr>
@@ -17285,7 +17285,7 @@
       </p:sp>
       <p:sp>
         <p:nvSpPr>
-          <p:cNvPr id="17" name="Text 13"/>
+          <p:cNvPr id="16" name="Text 13"/>
           <p:cNvSpPr/>
           <p:nvPr/>
         </p:nvSpPr>
@@ -17324,7 +17324,7 @@
       </p:sp>
       <p:sp>
         <p:nvSpPr>
-          <p:cNvPr id="18" name="Text 14"/>
+          <p:cNvPr id="17" name="Text 14"/>
           <p:cNvSpPr/>
           <p:nvPr/>
         </p:nvSpPr>
@@ -17363,7 +17363,7 @@
       </p:sp>
       <p:sp>
         <p:nvSpPr>
-          <p:cNvPr id="19" name="Shape 15"/>
+          <p:cNvPr id="18" name="Shape 15"/>
           <p:cNvSpPr/>
           <p:nvPr/>
         </p:nvSpPr>
@@ -17390,7 +17390,7 @@
       </p:sp>
       <p:sp>
         <p:nvSpPr>
-          <p:cNvPr id="20" name="Shape 16"/>
+          <p:cNvPr id="19" name="Shape 16"/>
           <p:cNvSpPr/>
           <p:nvPr/>
         </p:nvSpPr>
@@ -17410,7 +17410,7 @@
       </p:sp>
       <p:sp>
         <p:nvSpPr>
-          <p:cNvPr id="21" name="Text 17"/>
+          <p:cNvPr id="20" name="Text 17"/>
           <p:cNvSpPr/>
           <p:nvPr/>
         </p:nvSpPr>
@@ -17449,7 +17449,7 @@
       </p:sp>
       <p:sp>
         <p:nvSpPr>
-          <p:cNvPr id="22" name="Text 18"/>
+          <p:cNvPr id="21" name="Text 18"/>
           <p:cNvSpPr/>
           <p:nvPr/>
         </p:nvSpPr>
@@ -17488,7 +17488,7 @@
       </p:sp>
       <p:sp>
         <p:nvSpPr>
-          <p:cNvPr id="23" name="Shape 19"/>
+          <p:cNvPr id="22" name="Shape 19"/>
           <p:cNvSpPr/>
           <p:nvPr/>
         </p:nvSpPr>
@@ -17515,7 +17515,7 @@
       </p:sp>
       <p:sp>
         <p:nvSpPr>
-          <p:cNvPr id="24" name="Shape 20"/>
+          <p:cNvPr id="23" name="Shape 20"/>
           <p:cNvSpPr/>
           <p:nvPr/>
         </p:nvSpPr>
@@ -17535,7 +17535,7 @@
       </p:sp>
       <p:sp>
         <p:nvSpPr>
-          <p:cNvPr id="25" name="Text 21"/>
+          <p:cNvPr id="24" name="Text 21"/>
           <p:cNvSpPr/>
           <p:nvPr/>
         </p:nvSpPr>
@@ -17574,7 +17574,7 @@
       </p:sp>
       <p:sp>
         <p:nvSpPr>
-          <p:cNvPr id="26" name="Text 22"/>
+          <p:cNvPr id="25" name="Text 22"/>
           <p:cNvSpPr/>
           <p:nvPr/>
         </p:nvSpPr>
@@ -17613,7 +17613,7 @@
       </p:sp>
       <p:sp>
         <p:nvSpPr>
-          <p:cNvPr id="27" name="Shape 23"/>
+          <p:cNvPr id="26" name="Shape 23"/>
           <p:cNvSpPr/>
           <p:nvPr/>
         </p:nvSpPr>
@@ -17640,7 +17640,7 @@
       </p:sp>
       <p:sp>
         <p:nvSpPr>
-          <p:cNvPr id="28" name="Shape 24"/>
+          <p:cNvPr id="27" name="Shape 24"/>
           <p:cNvSpPr/>
           <p:nvPr/>
         </p:nvSpPr>
@@ -17660,7 +17660,7 @@
       </p:sp>
       <p:sp>
         <p:nvSpPr>
-          <p:cNvPr id="29" name="Text 25"/>
+          <p:cNvPr id="28" name="Text 25"/>
           <p:cNvSpPr/>
           <p:nvPr/>
         </p:nvSpPr>
@@ -17699,7 +17699,7 @@
       </p:sp>
       <p:sp>
         <p:nvSpPr>
-          <p:cNvPr id="30" name="Text 26"/>
+          <p:cNvPr id="29" name="Text 26"/>
           <p:cNvSpPr/>
           <p:nvPr/>
         </p:nvSpPr>
@@ -17738,7 +17738,7 @@
       </p:sp>
       <p:sp>
         <p:nvSpPr>
-          <p:cNvPr id="31" name="Shape 27"/>
+          <p:cNvPr id="30" name="Shape 27"/>
           <p:cNvSpPr/>
           <p:nvPr/>
         </p:nvSpPr>
@@ -17765,7 +17765,7 @@
       </p:sp>
       <p:sp>
         <p:nvSpPr>
-          <p:cNvPr id="32" name="Shape 28"/>
+          <p:cNvPr id="31" name="Shape 28"/>
           <p:cNvSpPr/>
           <p:nvPr/>
         </p:nvSpPr>
@@ -17785,7 +17785,7 @@
       </p:sp>
       <p:sp>
         <p:nvSpPr>
-          <p:cNvPr id="33" name="Text 29"/>
+          <p:cNvPr id="32" name="Text 29"/>
           <p:cNvSpPr/>
           <p:nvPr/>
         </p:nvSpPr>
@@ -17824,7 +17824,7 @@
       </p:sp>
       <p:sp>
         <p:nvSpPr>
-          <p:cNvPr id="34" name="Text 30"/>
+          <p:cNvPr id="33" name="Text 30"/>
           <p:cNvSpPr/>
           <p:nvPr/>
         </p:nvSpPr>
@@ -17863,7 +17863,7 @@
       </p:sp>
       <p:sp>
         <p:nvSpPr>
-          <p:cNvPr id="35" name="Shape 31"/>
+          <p:cNvPr id="34" name="Shape 31"/>
           <p:cNvSpPr/>
           <p:nvPr/>
         </p:nvSpPr>
@@ -17890,7 +17890,7 @@
       </p:sp>
       <p:sp>
         <p:nvSpPr>
-          <p:cNvPr id="36" name="Shape 32"/>
+          <p:cNvPr id="35" name="Shape 32"/>
           <p:cNvSpPr/>
           <p:nvPr/>
         </p:nvSpPr>
@@ -17910,7 +17910,7 @@
       </p:sp>
       <p:sp>
         <p:nvSpPr>
-          <p:cNvPr id="37" name="Text 33"/>
+          <p:cNvPr id="36" name="Text 33"/>
           <p:cNvSpPr/>
           <p:nvPr/>
         </p:nvSpPr>
@@ -17949,7 +17949,7 @@
       </p:sp>
       <p:sp>
         <p:nvSpPr>
-          <p:cNvPr id="38" name="Text 34"/>
+          <p:cNvPr id="37" name="Text 34"/>
           <p:cNvSpPr/>
           <p:nvPr/>
         </p:nvSpPr>
@@ -17988,7 +17988,7 @@
       </p:sp>
       <p:sp>
         <p:nvSpPr>
-          <p:cNvPr id="39" name="Shape 35"/>
+          <p:cNvPr id="38" name="Shape 35"/>
           <p:cNvSpPr/>
           <p:nvPr/>
         </p:nvSpPr>
@@ -18010,7 +18010,7 @@
       </p:sp>
       <p:sp>
         <p:nvSpPr>
-          <p:cNvPr id="40" name="Shape 36"/>
+          <p:cNvPr id="39" name="Shape 36"/>
           <p:cNvSpPr/>
           <p:nvPr/>
         </p:nvSpPr>
@@ -18030,7 +18030,7 @@
       </p:sp>
       <p:sp>
         <p:nvSpPr>
-          <p:cNvPr id="41" name="Text 37"/>
+          <p:cNvPr id="40" name="Text 37"/>
           <p:cNvSpPr/>
           <p:nvPr/>
         </p:nvSpPr>
@@ -18069,7 +18069,7 @@
       </p:sp>
       <p:sp>
         <p:nvSpPr>
-          <p:cNvPr id="42" name="Text 38"/>
+          <p:cNvPr id="41" name="Text 38"/>
           <p:cNvSpPr/>
           <p:nvPr/>
         </p:nvSpPr>
@@ -18108,7 +18108,7 @@
       </p:sp>
       <p:sp>
         <p:nvSpPr>
-          <p:cNvPr id="43" name="Shape 39"/>
+          <p:cNvPr id="42" name="Shape 39"/>
           <p:cNvSpPr/>
           <p:nvPr/>
         </p:nvSpPr>
@@ -18135,7 +18135,7 @@
       </p:sp>
       <p:sp>
         <p:nvSpPr>
-          <p:cNvPr id="44" name="Shape 40"/>
+          <p:cNvPr id="43" name="Shape 40"/>
           <p:cNvSpPr/>
           <p:nvPr/>
         </p:nvSpPr>
@@ -18155,7 +18155,7 @@
       </p:sp>
       <p:sp>
         <p:nvSpPr>
-          <p:cNvPr id="45" name="Text 41"/>
+          <p:cNvPr id="44" name="Text 41"/>
           <p:cNvSpPr/>
           <p:nvPr/>
         </p:nvSpPr>
@@ -18194,7 +18194,7 @@
       </p:sp>
       <p:sp>
         <p:nvSpPr>
-          <p:cNvPr id="46" name="Text 42"/>
+          <p:cNvPr id="45" name="Text 42"/>
           <p:cNvSpPr/>
           <p:nvPr/>
         </p:nvSpPr>
@@ -18233,7 +18233,7 @@
       </p:sp>
       <p:sp>
         <p:nvSpPr>
-          <p:cNvPr id="47" name="Shape 43"/>
+          <p:cNvPr id="46" name="Shape 43"/>
           <p:cNvSpPr/>
           <p:nvPr/>
         </p:nvSpPr>
@@ -18260,7 +18260,7 @@
       </p:sp>
       <p:sp>
         <p:nvSpPr>
-          <p:cNvPr id="48" name="Shape 44"/>
+          <p:cNvPr id="47" name="Shape 44"/>
           <p:cNvSpPr/>
           <p:nvPr/>
         </p:nvSpPr>
@@ -18280,7 +18280,7 @@
       </p:sp>
       <p:sp>
         <p:nvSpPr>
-          <p:cNvPr id="49" name="Text 45"/>
+          <p:cNvPr id="48" name="Text 45"/>
           <p:cNvSpPr/>
           <p:nvPr/>
         </p:nvSpPr>
@@ -18319,7 +18319,7 @@
       </p:sp>
       <p:sp>
         <p:nvSpPr>
-          <p:cNvPr id="50" name="Text 46"/>
+          <p:cNvPr id="49" name="Text 46"/>
           <p:cNvSpPr/>
           <p:nvPr/>
         </p:nvSpPr>
@@ -18358,7 +18358,7 @@
       </p:sp>
       <p:sp>
         <p:nvSpPr>
-          <p:cNvPr id="51" name="Shape 47"/>
+          <p:cNvPr id="50" name="Shape 47"/>
           <p:cNvSpPr/>
           <p:nvPr/>
         </p:nvSpPr>
@@ -18385,7 +18385,7 @@
       </p:sp>
       <p:sp>
         <p:nvSpPr>
-          <p:cNvPr id="52" name="Text 48"/>
+          <p:cNvPr id="51" name="Text 48"/>
           <p:cNvSpPr/>
           <p:nvPr/>
         </p:nvSpPr>
@@ -18673,7 +18673,7 @@
       </p:pic>
       <p:sp>
         <p:nvSpPr>
-          <p:cNvPr id="8" name="Shape 4"/>
+          <p:cNvPr id="7" name="Shape 4"/>
           <p:cNvSpPr/>
           <p:nvPr/>
         </p:nvSpPr>
@@ -18700,7 +18700,7 @@
       </p:sp>
       <p:sp>
         <p:nvSpPr>
-          <p:cNvPr id="9" name="Text 5"/>
+          <p:cNvPr id="8" name="Text 5"/>
           <p:cNvSpPr/>
           <p:nvPr/>
         </p:nvSpPr>
@@ -18739,7 +18739,7 @@
       </p:sp>
       <p:sp>
         <p:nvSpPr>
-          <p:cNvPr id="10" name="Text 6"/>
+          <p:cNvPr id="9" name="Text 6"/>
           <p:cNvSpPr/>
           <p:nvPr/>
         </p:nvSpPr>
@@ -18781,7 +18781,7 @@
       </p:sp>
       <p:sp>
         <p:nvSpPr>
-          <p:cNvPr id="11" name="Shape 7"/>
+          <p:cNvPr id="10" name="Shape 7"/>
           <p:cNvSpPr/>
           <p:nvPr/>
         </p:nvSpPr>
@@ -18808,7 +18808,7 @@
       </p:sp>
       <p:sp>
         <p:nvSpPr>
-          <p:cNvPr id="12" name="Text 8"/>
+          <p:cNvPr id="11" name="Text 8"/>
           <p:cNvSpPr/>
           <p:nvPr/>
         </p:nvSpPr>
@@ -18847,7 +18847,7 @@
       </p:sp>
       <p:sp>
         <p:nvSpPr>
-          <p:cNvPr id="13" name="Text 9"/>
+          <p:cNvPr id="12" name="Text 9"/>
           <p:cNvSpPr/>
           <p:nvPr/>
         </p:nvSpPr>
@@ -18889,7 +18889,7 @@
       </p:sp>
       <p:sp>
         <p:nvSpPr>
-          <p:cNvPr id="14" name="Shape 10"/>
+          <p:cNvPr id="13" name="Shape 10"/>
           <p:cNvSpPr/>
           <p:nvPr/>
         </p:nvSpPr>
@@ -18916,7 +18916,7 @@
       </p:sp>
       <p:sp>
         <p:nvSpPr>
-          <p:cNvPr id="15" name="Text 11"/>
+          <p:cNvPr id="14" name="Text 11"/>
           <p:cNvSpPr/>
           <p:nvPr/>
         </p:nvSpPr>
@@ -18955,7 +18955,7 @@
       </p:sp>
       <p:sp>
         <p:nvSpPr>
-          <p:cNvPr id="16" name="Text 12"/>
+          <p:cNvPr id="15" name="Text 12"/>
           <p:cNvSpPr/>
           <p:nvPr/>
         </p:nvSpPr>
@@ -18997,7 +18997,7 @@
       </p:sp>
       <p:sp>
         <p:nvSpPr>
-          <p:cNvPr id="17" name="Shape 13"/>
+          <p:cNvPr id="16" name="Shape 13"/>
           <p:cNvSpPr/>
           <p:nvPr/>
         </p:nvSpPr>
@@ -19024,7 +19024,7 @@
       </p:sp>
       <p:sp>
         <p:nvSpPr>
-          <p:cNvPr id="18" name="Text 14"/>
+          <p:cNvPr id="17" name="Text 14"/>
           <p:cNvSpPr/>
           <p:nvPr/>
         </p:nvSpPr>
@@ -19063,7 +19063,7 @@
       </p:sp>
       <p:sp>
         <p:nvSpPr>
-          <p:cNvPr id="19" name="Text 15"/>
+          <p:cNvPr id="18" name="Text 15"/>
           <p:cNvSpPr/>
           <p:nvPr/>
         </p:nvSpPr>
@@ -19105,7 +19105,7 @@
       </p:sp>
       <p:sp>
         <p:nvSpPr>
-          <p:cNvPr id="20" name="Shape 16"/>
+          <p:cNvPr id="19" name="Shape 16"/>
           <p:cNvSpPr/>
           <p:nvPr/>
         </p:nvSpPr>
@@ -19132,7 +19132,7 @@
       </p:sp>
       <p:sp>
         <p:nvSpPr>
-          <p:cNvPr id="21" name="Text 17"/>
+          <p:cNvPr id="20" name="Text 17"/>
           <p:cNvSpPr/>
           <p:nvPr/>
         </p:nvSpPr>
@@ -19171,7 +19171,7 @@
       </p:sp>
       <p:sp>
         <p:nvSpPr>
-          <p:cNvPr id="22" name="Text 18"/>
+          <p:cNvPr id="21" name="Text 18"/>
           <p:cNvSpPr/>
           <p:nvPr/>
         </p:nvSpPr>
@@ -19213,7 +19213,7 @@
       </p:sp>
       <p:sp>
         <p:nvSpPr>
-          <p:cNvPr id="23" name="Shape 19"/>
+          <p:cNvPr id="22" name="Shape 19"/>
           <p:cNvSpPr/>
           <p:nvPr/>
         </p:nvSpPr>
@@ -19240,7 +19240,7 @@
       </p:sp>
       <p:sp>
         <p:nvSpPr>
-          <p:cNvPr id="24" name="Text 20"/>
+          <p:cNvPr id="23" name="Text 20"/>
           <p:cNvSpPr/>
           <p:nvPr/>
         </p:nvSpPr>
@@ -19279,7 +19279,7 @@
       </p:sp>
       <p:sp>
         <p:nvSpPr>
-          <p:cNvPr id="25" name="Text 21"/>
+          <p:cNvPr id="24" name="Text 21"/>
           <p:cNvSpPr/>
           <p:nvPr/>
         </p:nvSpPr>
@@ -19321,7 +19321,7 @@
       </p:sp>
       <p:sp>
         <p:nvSpPr>
-          <p:cNvPr id="26" name="Shape 22"/>
+          <p:cNvPr id="25" name="Shape 22"/>
           <p:cNvSpPr/>
           <p:nvPr/>
         </p:nvSpPr>
@@ -19348,7 +19348,7 @@
       </p:sp>
       <p:sp>
         <p:nvSpPr>
-          <p:cNvPr id="27" name="Text 23"/>
+          <p:cNvPr id="26" name="Text 23"/>
           <p:cNvSpPr/>
           <p:nvPr/>
         </p:nvSpPr>
@@ -19633,7 +19633,7 @@
       </p:pic>
       <p:sp>
         <p:nvSpPr>
-          <p:cNvPr id="8" name="Shape 4"/>
+          <p:cNvPr id="7" name="Shape 4"/>
           <p:cNvSpPr/>
           <p:nvPr/>
         </p:nvSpPr>
@@ -19655,7 +19655,7 @@
       </p:sp>
       <p:sp>
         <p:nvSpPr>
-          <p:cNvPr id="9" name="Shape 5"/>
+          <p:cNvPr id="8" name="Shape 5"/>
           <p:cNvSpPr/>
           <p:nvPr/>
         </p:nvSpPr>
@@ -19675,7 +19675,7 @@
       </p:sp>
       <p:sp>
         <p:nvSpPr>
-          <p:cNvPr id="10" name="Text 6"/>
+          <p:cNvPr id="9" name="Text 6"/>
           <p:cNvSpPr/>
           <p:nvPr/>
         </p:nvSpPr>
@@ -19714,7 +19714,7 @@
       </p:sp>
       <p:sp>
         <p:nvSpPr>
-          <p:cNvPr id="11" name="Text 7"/>
+          <p:cNvPr id="10" name="Text 7"/>
           <p:cNvSpPr/>
           <p:nvPr/>
         </p:nvSpPr>
@@ -19753,7 +19753,7 @@
       </p:sp>
       <p:sp>
         <p:nvSpPr>
-          <p:cNvPr id="12" name="Text 8"/>
+          <p:cNvPr id="11" name="Text 8"/>
           <p:cNvSpPr/>
           <p:nvPr/>
         </p:nvSpPr>
@@ -19795,7 +19795,7 @@
       </p:sp>
       <p:sp>
         <p:nvSpPr>
-          <p:cNvPr id="13" name="Shape 9"/>
+          <p:cNvPr id="12" name="Shape 9"/>
           <p:cNvSpPr/>
           <p:nvPr/>
         </p:nvSpPr>
@@ -19817,7 +19817,7 @@
       </p:sp>
       <p:sp>
         <p:nvSpPr>
-          <p:cNvPr id="14" name="Shape 10"/>
+          <p:cNvPr id="13" name="Shape 10"/>
           <p:cNvSpPr/>
           <p:nvPr/>
         </p:nvSpPr>
@@ -19837,7 +19837,7 @@
       </p:sp>
       <p:sp>
         <p:nvSpPr>
-          <p:cNvPr id="15" name="Text 11"/>
+          <p:cNvPr id="14" name="Text 11"/>
           <p:cNvSpPr/>
           <p:nvPr/>
         </p:nvSpPr>
@@ -19876,7 +19876,7 @@
       </p:sp>
       <p:sp>
         <p:nvSpPr>
-          <p:cNvPr id="16" name="Text 12"/>
+          <p:cNvPr id="15" name="Text 12"/>
           <p:cNvSpPr/>
           <p:nvPr/>
         </p:nvSpPr>
@@ -19915,7 +19915,7 @@
       </p:sp>
       <p:sp>
         <p:nvSpPr>
-          <p:cNvPr id="17" name="Text 13"/>
+          <p:cNvPr id="16" name="Text 13"/>
           <p:cNvSpPr/>
           <p:nvPr/>
         </p:nvSpPr>
@@ -19957,7 +19957,7 @@
       </p:sp>
       <p:sp>
         <p:nvSpPr>
-          <p:cNvPr id="18" name="Shape 14"/>
+          <p:cNvPr id="17" name="Shape 14"/>
           <p:cNvSpPr/>
           <p:nvPr/>
         </p:nvSpPr>
@@ -19979,7 +19979,7 @@
       </p:sp>
       <p:sp>
         <p:nvSpPr>
-          <p:cNvPr id="19" name="Shape 15"/>
+          <p:cNvPr id="18" name="Shape 15"/>
           <p:cNvSpPr/>
           <p:nvPr/>
         </p:nvSpPr>
@@ -19999,7 +19999,7 @@
       </p:sp>
       <p:sp>
         <p:nvSpPr>
-          <p:cNvPr id="20" name="Text 16"/>
+          <p:cNvPr id="19" name="Text 16"/>
           <p:cNvSpPr/>
           <p:nvPr/>
         </p:nvSpPr>
@@ -20038,7 +20038,7 @@
       </p:sp>
       <p:sp>
         <p:nvSpPr>
-          <p:cNvPr id="21" name="Text 17"/>
+          <p:cNvPr id="20" name="Text 17"/>
           <p:cNvSpPr/>
           <p:nvPr/>
         </p:nvSpPr>
@@ -20077,7 +20077,7 @@
       </p:sp>
       <p:sp>
         <p:nvSpPr>
-          <p:cNvPr id="22" name="Text 18"/>
+          <p:cNvPr id="21" name="Text 18"/>
           <p:cNvSpPr/>
           <p:nvPr/>
         </p:nvSpPr>
@@ -20119,7 +20119,7 @@
       </p:sp>
       <p:sp>
         <p:nvSpPr>
-          <p:cNvPr id="23" name="Shape 19"/>
+          <p:cNvPr id="22" name="Shape 19"/>
           <p:cNvSpPr/>
           <p:nvPr/>
         </p:nvSpPr>
@@ -20141,7 +20141,7 @@
       </p:sp>
       <p:sp>
         <p:nvSpPr>
-          <p:cNvPr id="24" name="Text 20"/>
+          <p:cNvPr id="23" name="Text 20"/>
           <p:cNvSpPr/>
           <p:nvPr/>
         </p:nvSpPr>
@@ -20180,7 +20180,7 @@
       </p:sp>
       <p:sp>
         <p:nvSpPr>
-          <p:cNvPr id="25" name="Text 21"/>
+          <p:cNvPr id="24" name="Text 21"/>
           <p:cNvSpPr/>
           <p:nvPr/>
         </p:nvSpPr>
@@ -20465,7 +20465,7 @@
       </p:pic>
       <p:sp>
         <p:nvSpPr>
-          <p:cNvPr id="8" name="Shape 4"/>
+          <p:cNvPr id="7" name="Shape 4"/>
           <p:cNvSpPr/>
           <p:nvPr/>
         </p:nvSpPr>
@@ -20487,7 +20487,7 @@
       </p:sp>
       <p:sp>
         <p:nvSpPr>
-          <p:cNvPr id="9" name="Text 5"/>
+          <p:cNvPr id="8" name="Text 5"/>
           <p:cNvSpPr/>
           <p:nvPr/>
         </p:nvSpPr>
@@ -20526,7 +20526,7 @@
       </p:sp>
       <p:sp>
         <p:nvSpPr>
-          <p:cNvPr id="10" name="Text 6"/>
+          <p:cNvPr id="9" name="Text 6"/>
           <p:cNvSpPr/>
           <p:nvPr/>
         </p:nvSpPr>
@@ -20565,7 +20565,7 @@
       </p:sp>
       <p:sp>
         <p:nvSpPr>
-          <p:cNvPr id="11" name="Text 7"/>
+          <p:cNvPr id="10" name="Text 7"/>
           <p:cNvSpPr/>
           <p:nvPr/>
         </p:nvSpPr>
@@ -20604,7 +20604,7 @@
       </p:sp>
       <p:sp>
         <p:nvSpPr>
-          <p:cNvPr id="12" name="Shape 8"/>
+          <p:cNvPr id="11" name="Shape 8"/>
           <p:cNvSpPr/>
           <p:nvPr/>
         </p:nvSpPr>
@@ -20631,7 +20631,7 @@
       </p:sp>
       <p:sp>
         <p:nvSpPr>
-          <p:cNvPr id="13" name="Text 9"/>
+          <p:cNvPr id="12" name="Text 9"/>
           <p:cNvSpPr/>
           <p:nvPr/>
         </p:nvSpPr>
@@ -20670,7 +20670,7 @@
       </p:sp>
       <p:sp>
         <p:nvSpPr>
-          <p:cNvPr id="14" name="Text 10"/>
+          <p:cNvPr id="13" name="Text 10"/>
           <p:cNvSpPr/>
           <p:nvPr/>
         </p:nvSpPr>
@@ -20709,7 +20709,7 @@
       </p:sp>
       <p:sp>
         <p:nvSpPr>
-          <p:cNvPr id="15" name="Text 11"/>
+          <p:cNvPr id="14" name="Text 11"/>
           <p:cNvSpPr/>
           <p:nvPr/>
         </p:nvSpPr>
@@ -20748,7 +20748,7 @@
       </p:sp>
       <p:sp>
         <p:nvSpPr>
-          <p:cNvPr id="16" name="Shape 12"/>
+          <p:cNvPr id="15" name="Shape 12"/>
           <p:cNvSpPr/>
           <p:nvPr/>
         </p:nvSpPr>
@@ -20770,7 +20770,7 @@
       </p:sp>
       <p:sp>
         <p:nvSpPr>
-          <p:cNvPr id="17" name="Text 13"/>
+          <p:cNvPr id="16" name="Text 13"/>
           <p:cNvSpPr/>
           <p:nvPr/>
         </p:nvSpPr>
@@ -20809,7 +20809,7 @@
       </p:sp>
       <p:sp>
         <p:nvSpPr>
-          <p:cNvPr id="18" name="Text 14"/>
+          <p:cNvPr id="17" name="Text 14"/>
           <p:cNvSpPr/>
           <p:nvPr/>
         </p:nvSpPr>
@@ -20851,7 +20851,7 @@
       </p:sp>
       <p:sp>
         <p:nvSpPr>
-          <p:cNvPr id="19" name="Shape 15"/>
+          <p:cNvPr id="18" name="Shape 15"/>
           <p:cNvSpPr/>
           <p:nvPr/>
         </p:nvSpPr>
@@ -20873,7 +20873,7 @@
       </p:sp>
       <p:sp>
         <p:nvSpPr>
-          <p:cNvPr id="20" name="Text 16"/>
+          <p:cNvPr id="19" name="Text 16"/>
           <p:cNvSpPr/>
           <p:nvPr/>
         </p:nvSpPr>
@@ -20912,7 +20912,7 @@
       </p:sp>
       <p:sp>
         <p:nvSpPr>
-          <p:cNvPr id="21" name="Text 17"/>
+          <p:cNvPr id="20" name="Text 17"/>
           <p:cNvSpPr/>
           <p:nvPr/>
         </p:nvSpPr>
@@ -21197,7 +21197,7 @@
       </p:pic>
       <p:sp>
         <p:nvSpPr>
-          <p:cNvPr id="8" name="Shape 4"/>
+          <p:cNvPr id="7" name="Shape 4"/>
           <p:cNvSpPr/>
           <p:nvPr/>
         </p:nvSpPr>
@@ -21224,7 +21224,7 @@
       </p:sp>
       <p:sp>
         <p:nvSpPr>
-          <p:cNvPr id="9" name="Text 5"/>
+          <p:cNvPr id="8" name="Text 5"/>
           <p:cNvSpPr/>
           <p:nvPr/>
         </p:nvSpPr>
@@ -21534,7 +21534,7 @@
       </p:sp>
       <p:sp>
         <p:nvSpPr>
-          <p:cNvPr id="10" name="Shape 6"/>
+          <p:cNvPr id="9" name="Shape 6"/>
           <p:cNvSpPr/>
           <p:nvPr/>
         </p:nvSpPr>
@@ -21561,7 +21561,7 @@
       </p:sp>
       <p:sp>
         <p:nvSpPr>
-          <p:cNvPr id="11" name="Text 7"/>
+          <p:cNvPr id="10" name="Text 7"/>
           <p:cNvSpPr/>
           <p:nvPr/>
         </p:nvSpPr>
@@ -21600,7 +21600,7 @@
       </p:sp>
       <p:sp>
         <p:nvSpPr>
-          <p:cNvPr id="12" name="Text 8"/>
+          <p:cNvPr id="11" name="Text 8"/>
           <p:cNvSpPr/>
           <p:nvPr/>
         </p:nvSpPr>
@@ -21642,7 +21642,7 @@
       </p:sp>
       <p:sp>
         <p:nvSpPr>
-          <p:cNvPr id="13" name="Shape 9"/>
+          <p:cNvPr id="12" name="Shape 9"/>
           <p:cNvSpPr/>
           <p:nvPr/>
         </p:nvSpPr>
@@ -21664,7 +21664,7 @@
       </p:sp>
       <p:sp>
         <p:nvSpPr>
-          <p:cNvPr id="14" name="Text 10"/>
+          <p:cNvPr id="13" name="Text 10"/>
           <p:cNvSpPr/>
           <p:nvPr/>
         </p:nvSpPr>
@@ -21703,7 +21703,7 @@
       </p:sp>
       <p:sp>
         <p:nvSpPr>
-          <p:cNvPr id="15" name="Text 11"/>
+          <p:cNvPr id="14" name="Text 11"/>
           <p:cNvSpPr/>
           <p:nvPr/>
         </p:nvSpPr>
@@ -21745,7 +21745,7 @@
       </p:sp>
       <p:sp>
         <p:nvSpPr>
-          <p:cNvPr id="16" name="Shape 12"/>
+          <p:cNvPr id="15" name="Shape 12"/>
           <p:cNvSpPr/>
           <p:nvPr/>
         </p:nvSpPr>
@@ -21767,7 +21767,7 @@
       </p:sp>
       <p:sp>
         <p:nvSpPr>
-          <p:cNvPr id="17" name="Text 13"/>
+          <p:cNvPr id="16" name="Text 13"/>
           <p:cNvSpPr/>
           <p:nvPr/>
         </p:nvSpPr>
@@ -21806,7 +21806,7 @@
       </p:sp>
       <p:sp>
         <p:nvSpPr>
-          <p:cNvPr id="18" name="Text 14"/>
+          <p:cNvPr id="17" name="Text 14"/>
           <p:cNvSpPr/>
           <p:nvPr/>
         </p:nvSpPr>
@@ -21848,7 +21848,7 @@
       </p:sp>
       <p:sp>
         <p:nvSpPr>
-          <p:cNvPr id="19" name="Shape 15"/>
+          <p:cNvPr id="18" name="Shape 15"/>
           <p:cNvSpPr/>
           <p:nvPr/>
         </p:nvSpPr>
@@ -21875,7 +21875,7 @@
       </p:sp>
       <p:sp>
         <p:nvSpPr>
-          <p:cNvPr id="20" name="Text 16"/>
+          <p:cNvPr id="19" name="Text 16"/>
           <p:cNvSpPr/>
           <p:nvPr/>
         </p:nvSpPr>
@@ -22160,7 +22160,7 @@
       </p:pic>
       <p:sp>
         <p:nvSpPr>
-          <p:cNvPr id="8" name="Shape 4"/>
+          <p:cNvPr id="7" name="Shape 4"/>
           <p:cNvSpPr/>
           <p:nvPr/>
         </p:nvSpPr>
@@ -22182,7 +22182,7 @@
       </p:sp>
       <p:sp>
         <p:nvSpPr>
-          <p:cNvPr id="9" name="Text 5"/>
+          <p:cNvPr id="8" name="Text 5"/>
           <p:cNvSpPr/>
           <p:nvPr/>
         </p:nvSpPr>
@@ -22221,7 +22221,7 @@
       </p:sp>
       <p:sp>
         <p:nvSpPr>
-          <p:cNvPr id="10" name="Text 6"/>
+          <p:cNvPr id="9" name="Text 6"/>
           <p:cNvSpPr/>
           <p:nvPr/>
         </p:nvSpPr>
@@ -22263,7 +22263,7 @@
       </p:sp>
       <p:sp>
         <p:nvSpPr>
-          <p:cNvPr id="11" name="Shape 7"/>
+          <p:cNvPr id="10" name="Shape 7"/>
           <p:cNvSpPr/>
           <p:nvPr/>
         </p:nvSpPr>
@@ -22285,7 +22285,7 @@
       </p:sp>
       <p:sp>
         <p:nvSpPr>
-          <p:cNvPr id="12" name="Text 8"/>
+          <p:cNvPr id="11" name="Text 8"/>
           <p:cNvSpPr/>
           <p:nvPr/>
         </p:nvSpPr>
@@ -22324,7 +22324,7 @@
       </p:sp>
       <p:sp>
         <p:nvSpPr>
-          <p:cNvPr id="13" name="Text 9"/>
+          <p:cNvPr id="12" name="Text 9"/>
           <p:cNvSpPr/>
           <p:nvPr/>
         </p:nvSpPr>
@@ -22366,7 +22366,7 @@
       </p:sp>
       <p:sp>
         <p:nvSpPr>
-          <p:cNvPr id="14" name="Shape 10"/>
+          <p:cNvPr id="13" name="Shape 10"/>
           <p:cNvSpPr/>
           <p:nvPr/>
         </p:nvSpPr>
@@ -22388,7 +22388,7 @@
       </p:sp>
       <p:sp>
         <p:nvSpPr>
-          <p:cNvPr id="15" name="Text 11"/>
+          <p:cNvPr id="14" name="Text 11"/>
           <p:cNvSpPr/>
           <p:nvPr/>
         </p:nvSpPr>
@@ -22427,7 +22427,7 @@
       </p:sp>
       <p:sp>
         <p:nvSpPr>
-          <p:cNvPr id="16" name="Text 12"/>
+          <p:cNvPr id="15" name="Text 12"/>
           <p:cNvSpPr/>
           <p:nvPr/>
         </p:nvSpPr>
@@ -22469,7 +22469,7 @@
       </p:sp>
       <p:sp>
         <p:nvSpPr>
-          <p:cNvPr id="17" name="Shape 13"/>
+          <p:cNvPr id="16" name="Shape 13"/>
           <p:cNvSpPr/>
           <p:nvPr/>
         </p:nvSpPr>
@@ -22491,7 +22491,7 @@
       </p:sp>
       <p:sp>
         <p:nvSpPr>
-          <p:cNvPr id="18" name="Text 14"/>
+          <p:cNvPr id="17" name="Text 14"/>
           <p:cNvSpPr/>
           <p:nvPr/>
         </p:nvSpPr>
@@ -22776,7 +22776,7 @@
       </p:pic>
       <p:sp>
         <p:nvSpPr>
-          <p:cNvPr id="8" name="Shape 4"/>
+          <p:cNvPr id="7" name="Shape 4"/>
           <p:cNvSpPr/>
           <p:nvPr/>
         </p:nvSpPr>
@@ -22803,7 +22803,7 @@
       </p:sp>
       <p:sp>
         <p:nvSpPr>
-          <p:cNvPr id="9" name="Text 5"/>
+          <p:cNvPr id="8" name="Text 5"/>
           <p:cNvSpPr/>
           <p:nvPr/>
         </p:nvSpPr>
@@ -23002,7 +23002,7 @@
       </p:sp>
       <p:sp>
         <p:nvSpPr>
-          <p:cNvPr id="10" name="Shape 6"/>
+          <p:cNvPr id="9" name="Shape 6"/>
           <p:cNvSpPr/>
           <p:nvPr/>
         </p:nvSpPr>
@@ -23029,7 +23029,7 @@
       </p:sp>
       <p:sp>
         <p:nvSpPr>
-          <p:cNvPr id="11" name="Text 7"/>
+          <p:cNvPr id="10" name="Text 7"/>
           <p:cNvSpPr/>
           <p:nvPr/>
         </p:nvSpPr>
@@ -23068,7 +23068,7 @@
       </p:sp>
       <p:sp>
         <p:nvSpPr>
-          <p:cNvPr id="12" name="Shape 8"/>
+          <p:cNvPr id="11" name="Shape 8"/>
           <p:cNvSpPr/>
           <p:nvPr/>
         </p:nvSpPr>
@@ -23091,7 +23091,7 @@
       </p:sp>
       <p:sp>
         <p:nvSpPr>
-          <p:cNvPr id="13" name="Shape 9"/>
+          <p:cNvPr id="12" name="Shape 9"/>
           <p:cNvSpPr/>
           <p:nvPr/>
         </p:nvSpPr>
@@ -23111,7 +23111,7 @@
       </p:sp>
       <p:sp>
         <p:nvSpPr>
-          <p:cNvPr id="14" name="Shape 10"/>
+          <p:cNvPr id="13" name="Shape 10"/>
           <p:cNvSpPr/>
           <p:nvPr/>
         </p:nvSpPr>
@@ -23133,7 +23133,7 @@
       </p:sp>
       <p:sp>
         <p:nvSpPr>
-          <p:cNvPr id="15" name="Text 11"/>
+          <p:cNvPr id="14" name="Text 11"/>
           <p:cNvSpPr/>
           <p:nvPr/>
         </p:nvSpPr>
@@ -23172,7 +23172,7 @@
       </p:sp>
       <p:sp>
         <p:nvSpPr>
-          <p:cNvPr id="16" name="Shape 12"/>
+          <p:cNvPr id="15" name="Shape 12"/>
           <p:cNvSpPr/>
           <p:nvPr/>
         </p:nvSpPr>
@@ -23195,7 +23195,7 @@
       </p:sp>
       <p:sp>
         <p:nvSpPr>
-          <p:cNvPr id="17" name="Shape 13"/>
+          <p:cNvPr id="16" name="Shape 13"/>
           <p:cNvSpPr/>
           <p:nvPr/>
         </p:nvSpPr>
@@ -23215,7 +23215,7 @@
       </p:sp>
       <p:sp>
         <p:nvSpPr>
-          <p:cNvPr id="18" name="Shape 14"/>
+          <p:cNvPr id="17" name="Shape 14"/>
           <p:cNvSpPr/>
           <p:nvPr/>
         </p:nvSpPr>
@@ -23237,7 +23237,7 @@
       </p:sp>
       <p:sp>
         <p:nvSpPr>
-          <p:cNvPr id="19" name="Text 15"/>
+          <p:cNvPr id="18" name="Text 15"/>
           <p:cNvSpPr/>
           <p:nvPr/>
         </p:nvSpPr>
@@ -23276,7 +23276,7 @@
       </p:sp>
       <p:sp>
         <p:nvSpPr>
-          <p:cNvPr id="20" name="Shape 16"/>
+          <p:cNvPr id="19" name="Shape 16"/>
           <p:cNvSpPr/>
           <p:nvPr/>
         </p:nvSpPr>
@@ -23298,7 +23298,7 @@
       </p:sp>
       <p:sp>
         <p:nvSpPr>
-          <p:cNvPr id="21" name="Text 17"/>
+          <p:cNvPr id="20" name="Text 17"/>
           <p:cNvSpPr/>
           <p:nvPr/>
         </p:nvSpPr>

--- a/docs/decks/L03.pptx
+++ b/docs/decks/L03.pptx
@@ -22167,11 +22167,11 @@
         <p:spPr>
           <a:xfrm>
             <a:off x="566928" y="1737360"/>
-            <a:ext cx="5349240" cy="1783080"/>
+            <a:ext cx="5349240" cy="1481328"/>
           </a:xfrm>
           <a:prstGeom prst="roundRect">
             <a:avLst>
-              <a:gd name="adj" fmla="val 6154"/>
+              <a:gd name="adj" fmla="val 7407"/>
             </a:avLst>
           </a:prstGeom>
           <a:solidFill>
@@ -22228,7 +22228,7 @@
         <p:spPr>
           <a:xfrm>
             <a:off x="768096" y="2423160"/>
-            <a:ext cx="4946904" cy="941832"/>
+            <a:ext cx="4946904" cy="640080"/>
           </a:xfrm>
           <a:prstGeom prst="rect">
             <a:avLst/>
@@ -22270,11 +22270,11 @@
         <p:spPr>
           <a:xfrm>
             <a:off x="6281928" y="1737360"/>
-            <a:ext cx="5349240" cy="1783080"/>
+            <a:ext cx="5349240" cy="1481328"/>
           </a:xfrm>
           <a:prstGeom prst="roundRect">
             <a:avLst>
-              <a:gd name="adj" fmla="val 6154"/>
+              <a:gd name="adj" fmla="val 7407"/>
             </a:avLst>
           </a:prstGeom>
           <a:solidFill>
@@ -22331,7 +22331,7 @@
         <p:spPr>
           <a:xfrm>
             <a:off x="6483096" y="2423160"/>
-            <a:ext cx="4946904" cy="941832"/>
+            <a:ext cx="4946904" cy="640080"/>
           </a:xfrm>
           <a:prstGeom prst="rect">
             <a:avLst/>
@@ -22372,12 +22372,350 @@
         </p:nvSpPr>
         <p:spPr>
           <a:xfrm>
-            <a:off x="566928" y="3749040"/>
-            <a:ext cx="11064240" cy="1325880"/>
+            <a:off x="749808" y="3931920"/>
+            <a:ext cx="10515600" cy="0"/>
+          </a:xfrm>
+          <a:prstGeom prst="line">
+            <a:avLst/>
+          </a:prstGeom>
+          <a:noFill/>
+          <a:ln w="12700">
+            <a:solidFill>
+              <a:srgbClr val="E6E7EC"/>
+            </a:solidFill>
+            <a:prstDash val="solid"/>
+          </a:ln>
+        </p:spPr>
+      </p:sp>
+      <p:sp>
+        <p:nvSpPr>
+          <p:cNvPr id="14" name="Shape 11"/>
+          <p:cNvSpPr/>
+          <p:nvPr/>
+        </p:nvSpPr>
+        <p:spPr>
+          <a:xfrm>
+            <a:off x="1024128" y="3767328"/>
+            <a:ext cx="2103120" cy="329184"/>
           </a:xfrm>
           <a:prstGeom prst="roundRect">
             <a:avLst>
-              <a:gd name="adj" fmla="val 8276"/>
+              <a:gd name="adj" fmla="val 19444"/>
+            </a:avLst>
+          </a:prstGeom>
+          <a:solidFill>
+            <a:srgbClr val="FFFFFF"/>
+          </a:solidFill>
+          <a:ln w="12700">
+            <a:solidFill>
+              <a:srgbClr val="E6E7EC"/>
+            </a:solidFill>
+            <a:prstDash val="solid"/>
+          </a:ln>
+        </p:spPr>
+      </p:sp>
+      <p:sp>
+        <p:nvSpPr>
+          <p:cNvPr id="15" name="Text 12"/>
+          <p:cNvSpPr/>
+          <p:nvPr/>
+        </p:nvSpPr>
+        <p:spPr>
+          <a:xfrm>
+            <a:off x="1024128" y="3767328"/>
+            <a:ext cx="2103120" cy="329184"/>
+          </a:xfrm>
+          <a:prstGeom prst="rect">
+            <a:avLst/>
+          </a:prstGeom>
+          <a:noFill/>
+          <a:ln/>
+        </p:spPr>
+        <p:txBody>
+          <a:bodyPr wrap="square" lIns="0" tIns="0" rIns="0" bIns="0" rtlCol="0" anchor="ctr"/>
+          <a:lstStyle/>
+          <a:p>
+            <a:pPr algn="ctr" indent="0" marL="0">
+              <a:buNone/>
+            </a:pPr>
+            <a:r>
+              <a:rPr lang="en-US" sz="1000" dirty="0">
+                <a:solidFill>
+                  <a:srgbClr val="111318"/>
+                </a:solidFill>
+                <a:latin typeface="Courier New" pitchFamily="34" charset="0"/>
+                <a:ea typeface="Courier New" pitchFamily="34" charset="-122"/>
+                <a:cs typeface="Courier New" pitchFamily="34" charset="-120"/>
+              </a:rPr>
+              <a:t>…-0301</a:t>
+            </a:r>
+            <a:endParaRPr lang="en-US" sz="1000" dirty="0"/>
+          </a:p>
+        </p:txBody>
+      </p:sp>
+      <p:sp>
+        <p:nvSpPr>
+          <p:cNvPr id="16" name="Shape 13"/>
+          <p:cNvSpPr/>
+          <p:nvPr/>
+        </p:nvSpPr>
+        <p:spPr>
+          <a:xfrm>
+            <a:off x="4590288" y="3767328"/>
+            <a:ext cx="2103120" cy="329184"/>
+          </a:xfrm>
+          <a:prstGeom prst="roundRect">
+            <a:avLst>
+              <a:gd name="adj" fmla="val 19444"/>
+            </a:avLst>
+          </a:prstGeom>
+          <a:solidFill>
+            <a:srgbClr val="FFFFFF"/>
+          </a:solidFill>
+          <a:ln w="12700">
+            <a:solidFill>
+              <a:srgbClr val="E6E7EC"/>
+            </a:solidFill>
+            <a:prstDash val="solid"/>
+          </a:ln>
+        </p:spPr>
+      </p:sp>
+      <p:sp>
+        <p:nvSpPr>
+          <p:cNvPr id="17" name="Text 14"/>
+          <p:cNvSpPr/>
+          <p:nvPr/>
+        </p:nvSpPr>
+        <p:spPr>
+          <a:xfrm>
+            <a:off x="4590288" y="3767328"/>
+            <a:ext cx="2103120" cy="329184"/>
+          </a:xfrm>
+          <a:prstGeom prst="rect">
+            <a:avLst/>
+          </a:prstGeom>
+          <a:noFill/>
+          <a:ln/>
+        </p:spPr>
+        <p:txBody>
+          <a:bodyPr wrap="square" lIns="0" tIns="0" rIns="0" bIns="0" rtlCol="0" anchor="ctr"/>
+          <a:lstStyle/>
+          <a:p>
+            <a:pPr algn="ctr" indent="0" marL="0">
+              <a:buNone/>
+            </a:pPr>
+            <a:r>
+              <a:rPr lang="en-US" sz="1000" dirty="0">
+                <a:solidFill>
+                  <a:srgbClr val="111318"/>
+                </a:solidFill>
+                <a:latin typeface="Courier New" pitchFamily="34" charset="0"/>
+                <a:ea typeface="Courier New" pitchFamily="34" charset="-122"/>
+                <a:cs typeface="Courier New" pitchFamily="34" charset="-120"/>
+              </a:rPr>
+              <a:t>…-0613</a:t>
+            </a:r>
+            <a:endParaRPr lang="en-US" sz="1000" dirty="0"/>
+          </a:p>
+        </p:txBody>
+      </p:sp>
+      <p:sp>
+        <p:nvSpPr>
+          <p:cNvPr id="18" name="Shape 15"/>
+          <p:cNvSpPr/>
+          <p:nvPr/>
+        </p:nvSpPr>
+        <p:spPr>
+          <a:xfrm>
+            <a:off x="8156448" y="3767328"/>
+            <a:ext cx="2103120" cy="329184"/>
+          </a:xfrm>
+          <a:prstGeom prst="roundRect">
+            <a:avLst>
+              <a:gd name="adj" fmla="val 19444"/>
+            </a:avLst>
+          </a:prstGeom>
+          <a:solidFill>
+            <a:srgbClr val="EFEAFE"/>
+          </a:solidFill>
+          <a:ln w="12700">
+            <a:solidFill>
+              <a:srgbClr val="E6E7EC"/>
+            </a:solidFill>
+            <a:prstDash val="solid"/>
+          </a:ln>
+        </p:spPr>
+      </p:sp>
+      <p:sp>
+        <p:nvSpPr>
+          <p:cNvPr id="19" name="Text 16"/>
+          <p:cNvSpPr/>
+          <p:nvPr/>
+        </p:nvSpPr>
+        <p:spPr>
+          <a:xfrm>
+            <a:off x="8156448" y="3767328"/>
+            <a:ext cx="2103120" cy="329184"/>
+          </a:xfrm>
+          <a:prstGeom prst="rect">
+            <a:avLst/>
+          </a:prstGeom>
+          <a:noFill/>
+          <a:ln/>
+        </p:spPr>
+        <p:txBody>
+          <a:bodyPr wrap="square" lIns="0" tIns="0" rIns="0" bIns="0" rtlCol="0" anchor="ctr"/>
+          <a:lstStyle/>
+          <a:p>
+            <a:pPr algn="ctr" indent="0" marL="0">
+              <a:buNone/>
+            </a:pPr>
+            <a:r>
+              <a:rPr lang="en-US" sz="1000" dirty="0">
+                <a:solidFill>
+                  <a:srgbClr val="111318"/>
+                </a:solidFill>
+                <a:latin typeface="Courier New" pitchFamily="34" charset="0"/>
+                <a:ea typeface="Courier New" pitchFamily="34" charset="-122"/>
+                <a:cs typeface="Courier New" pitchFamily="34" charset="-120"/>
+              </a:rPr>
+              <a:t>…-1106</a:t>
+            </a:r>
+            <a:endParaRPr lang="en-US" sz="1000" dirty="0"/>
+          </a:p>
+        </p:txBody>
+      </p:sp>
+      <p:sp>
+        <p:nvSpPr>
+          <p:cNvPr id="20" name="Text 17"/>
+          <p:cNvSpPr/>
+          <p:nvPr/>
+        </p:nvSpPr>
+        <p:spPr>
+          <a:xfrm>
+            <a:off x="1024128" y="4151376"/>
+            <a:ext cx="3291840" cy="219456"/>
+          </a:xfrm>
+          <a:prstGeom prst="rect">
+            <a:avLst/>
+          </a:prstGeom>
+          <a:noFill/>
+          <a:ln/>
+        </p:spPr>
+        <p:txBody>
+          <a:bodyPr wrap="square" lIns="0" tIns="0" rIns="0" bIns="0" rtlCol="0" anchor="ctr"/>
+          <a:lstStyle/>
+          <a:p>
+            <a:pPr indent="0" marL="0">
+              <a:buNone/>
+            </a:pPr>
+            <a:r>
+              <a:rPr lang="en-US" sz="900" b="1" dirty="0">
+                <a:solidFill>
+                  <a:srgbClr val="1B8A5A"/>
+                </a:solidFill>
+                <a:latin typeface="Courier New" pitchFamily="34" charset="0"/>
+                <a:ea typeface="Courier New" pitchFamily="34" charset="-122"/>
+                <a:cs typeface="Courier New" pitchFamily="34" charset="-120"/>
+              </a:rPr>
+              <a:t>snapshot — ви прибиті сюди</a:t>
+            </a:r>
+            <a:endParaRPr lang="en-US" sz="900" dirty="0"/>
+          </a:p>
+        </p:txBody>
+      </p:sp>
+      <p:sp>
+        <p:nvSpPr>
+          <p:cNvPr id="21" name="Text 18"/>
+          <p:cNvSpPr/>
+          <p:nvPr/>
+        </p:nvSpPr>
+        <p:spPr>
+          <a:xfrm>
+            <a:off x="8156448" y="4151376"/>
+            <a:ext cx="3840480" cy="219456"/>
+          </a:xfrm>
+          <a:prstGeom prst="rect">
+            <a:avLst/>
+          </a:prstGeom>
+          <a:noFill/>
+          <a:ln/>
+        </p:spPr>
+        <p:txBody>
+          <a:bodyPr wrap="square" lIns="0" tIns="0" rIns="0" bIns="0" rtlCol="0" anchor="ctr"/>
+          <a:lstStyle/>
+          <a:p>
+            <a:pPr algn="r" indent="0" marL="0">
+              <a:buNone/>
+            </a:pPr>
+            <a:r>
+              <a:rPr lang="en-US" sz="900" b="1" dirty="0">
+                <a:solidFill>
+                  <a:srgbClr val="9A5B12"/>
+                </a:solidFill>
+                <a:latin typeface="Courier New" pitchFamily="34" charset="0"/>
+                <a:ea typeface="Courier New" pitchFamily="34" charset="-122"/>
+                <a:cs typeface="Courier New" pitchFamily="34" charset="-120"/>
+              </a:rPr>
+              <a:t>alias — ви завжди тут, і воно рухається</a:t>
+            </a:r>
+            <a:endParaRPr lang="en-US" sz="900" dirty="0"/>
+          </a:p>
+        </p:txBody>
+      </p:sp>
+      <p:sp>
+        <p:nvSpPr>
+          <p:cNvPr id="22" name="Text 19"/>
+          <p:cNvSpPr/>
+          <p:nvPr/>
+        </p:nvSpPr>
+        <p:spPr>
+          <a:xfrm>
+            <a:off x="749808" y="3511296"/>
+            <a:ext cx="1828800" cy="201168"/>
+          </a:xfrm>
+          <a:prstGeom prst="rect">
+            <a:avLst/>
+          </a:prstGeom>
+          <a:noFill/>
+          <a:ln/>
+        </p:spPr>
+        <p:txBody>
+          <a:bodyPr wrap="square" lIns="0" tIns="0" rIns="0" bIns="0" rtlCol="0" anchor="ctr"/>
+          <a:lstStyle/>
+          <a:p>
+            <a:pPr indent="0" marL="0">
+              <a:buNone/>
+            </a:pPr>
+            <a:r>
+              <a:rPr lang="en-US" sz="850" spc="100" kern="0" dirty="0">
+                <a:solidFill>
+                  <a:srgbClr val="9AA1AD"/>
+                </a:solidFill>
+                <a:latin typeface="Courier New" pitchFamily="34" charset="0"/>
+                <a:ea typeface="Courier New" pitchFamily="34" charset="-122"/>
+                <a:cs typeface="Courier New" pitchFamily="34" charset="-120"/>
+              </a:rPr>
+              <a:t>час →</a:t>
+            </a:r>
+            <a:endParaRPr lang="en-US" sz="850" dirty="0"/>
+          </a:p>
+        </p:txBody>
+      </p:sp>
+      <p:sp>
+        <p:nvSpPr>
+          <p:cNvPr id="23" name="Shape 20"/>
+          <p:cNvSpPr/>
+          <p:nvPr/>
+        </p:nvSpPr>
+        <p:spPr>
+          <a:xfrm>
+            <a:off x="566928" y="4498848"/>
+            <a:ext cx="11064240" cy="1051560"/>
+          </a:xfrm>
+          <a:prstGeom prst="roundRect">
+            <a:avLst>
+              <a:gd name="adj" fmla="val 10435"/>
             </a:avLst>
           </a:prstGeom>
           <a:solidFill>
@@ -22388,13 +22726,13 @@
       </p:sp>
       <p:sp>
         <p:nvSpPr>
-          <p:cNvPr id="14" name="Text 11"/>
-          <p:cNvSpPr/>
-          <p:nvPr/>
-        </p:nvSpPr>
-        <p:spPr>
-          <a:xfrm>
-            <a:off x="786384" y="3877056"/>
+          <p:cNvPr id="24" name="Text 21"/>
+          <p:cNvSpPr/>
+          <p:nvPr/>
+        </p:nvSpPr>
+        <p:spPr>
+          <a:xfrm>
+            <a:off x="786384" y="4626864"/>
             <a:ext cx="10625328" cy="219456"/>
           </a:xfrm>
           <a:prstGeom prst="rect">
@@ -22427,14 +22765,14 @@
       </p:sp>
       <p:sp>
         <p:nvSpPr>
-          <p:cNvPr id="15" name="Text 12"/>
-          <p:cNvSpPr/>
-          <p:nvPr/>
-        </p:nvSpPr>
-        <p:spPr>
-          <a:xfrm>
-            <a:off x="786384" y="4133088"/>
-            <a:ext cx="10625328" cy="813816"/>
+          <p:cNvPr id="25" name="Text 22"/>
+          <p:cNvSpPr/>
+          <p:nvPr/>
+        </p:nvSpPr>
+        <p:spPr>
+          <a:xfrm>
+            <a:off x="786384" y="4882896"/>
+            <a:ext cx="10625328" cy="539496"/>
           </a:xfrm>
           <a:prstGeom prst="rect">
             <a:avLst/>
@@ -22469,18 +22807,18 @@
       </p:sp>
       <p:sp>
         <p:nvSpPr>
-          <p:cNvPr id="16" name="Shape 13"/>
-          <p:cNvSpPr/>
-          <p:nvPr/>
-        </p:nvSpPr>
-        <p:spPr>
-          <a:xfrm>
-            <a:off x="566928" y="5257800"/>
-            <a:ext cx="11064240" cy="621792"/>
+          <p:cNvPr id="26" name="Shape 23"/>
+          <p:cNvSpPr/>
+          <p:nvPr/>
+        </p:nvSpPr>
+        <p:spPr>
+          <a:xfrm>
+            <a:off x="566928" y="5669280"/>
+            <a:ext cx="11064240" cy="502920"/>
           </a:xfrm>
           <a:prstGeom prst="roundRect">
             <a:avLst>
-              <a:gd name="adj" fmla="val 17647"/>
+              <a:gd name="adj" fmla="val 21818"/>
             </a:avLst>
           </a:prstGeom>
           <a:solidFill>
@@ -22491,14 +22829,14 @@
       </p:sp>
       <p:sp>
         <p:nvSpPr>
-          <p:cNvPr id="17" name="Text 14"/>
-          <p:cNvSpPr/>
-          <p:nvPr/>
-        </p:nvSpPr>
-        <p:spPr>
-          <a:xfrm>
-            <a:off x="786384" y="5404104"/>
-            <a:ext cx="10625328" cy="329184"/>
+          <p:cNvPr id="27" name="Text 24"/>
+          <p:cNvSpPr/>
+          <p:nvPr/>
+        </p:nvSpPr>
+        <p:spPr>
+          <a:xfrm>
+            <a:off x="786384" y="5815584"/>
+            <a:ext cx="10625328" cy="210312"/>
           </a:xfrm>
           <a:prstGeom prst="rect">
             <a:avLst/>

--- a/docs/decks/L03.pptx
+++ b/docs/decks/L03.pptx
@@ -10148,11 +10148,11 @@
         <p:spPr>
           <a:xfrm>
             <a:off x="566928" y="1828800"/>
-            <a:ext cx="3520440" cy="1600200"/>
+            <a:ext cx="3520440" cy="1371600"/>
           </a:xfrm>
           <a:prstGeom prst="roundRect">
             <a:avLst>
-              <a:gd name="adj" fmla="val 6857"/>
+              <a:gd name="adj" fmla="val 8000"/>
             </a:avLst>
           </a:prstGeom>
           <a:solidFill>
@@ -10268,7 +10268,7 @@
         <p:spPr>
           <a:xfrm>
             <a:off x="768096" y="2514600"/>
-            <a:ext cx="3118104" cy="758952"/>
+            <a:ext cx="3118104" cy="530352"/>
           </a:xfrm>
           <a:prstGeom prst="rect">
             <a:avLst/>
@@ -10310,11 +10310,11 @@
         <p:spPr>
           <a:xfrm>
             <a:off x="4270248" y="1828800"/>
-            <a:ext cx="3520440" cy="1600200"/>
+            <a:ext cx="3520440" cy="1371600"/>
           </a:xfrm>
           <a:prstGeom prst="roundRect">
             <a:avLst>
-              <a:gd name="adj" fmla="val 6857"/>
+              <a:gd name="adj" fmla="val 8000"/>
             </a:avLst>
           </a:prstGeom>
           <a:solidFill>
@@ -10430,7 +10430,7 @@
         <p:spPr>
           <a:xfrm>
             <a:off x="4471416" y="2514600"/>
-            <a:ext cx="3118104" cy="758952"/>
+            <a:ext cx="3118104" cy="530352"/>
           </a:xfrm>
           <a:prstGeom prst="rect">
             <a:avLst/>
@@ -10472,11 +10472,11 @@
         <p:spPr>
           <a:xfrm>
             <a:off x="7973568" y="1828800"/>
-            <a:ext cx="3520440" cy="1600200"/>
+            <a:ext cx="3520440" cy="1371600"/>
           </a:xfrm>
           <a:prstGeom prst="roundRect">
             <a:avLst>
-              <a:gd name="adj" fmla="val 6857"/>
+              <a:gd name="adj" fmla="val 8000"/>
             </a:avLst>
           </a:prstGeom>
           <a:solidFill>
@@ -10592,7 +10592,7 @@
         <p:spPr>
           <a:xfrm>
             <a:off x="8174736" y="2514600"/>
-            <a:ext cx="3118104" cy="758952"/>
+            <a:ext cx="3118104" cy="530352"/>
           </a:xfrm>
           <a:prstGeom prst="rect">
             <a:avLst/>
@@ -10633,12 +10633,249 @@
         </p:nvSpPr>
         <p:spPr>
           <a:xfrm>
-            <a:off x="566928" y="3749040"/>
-            <a:ext cx="5349240" cy="1371600"/>
+            <a:off x="566928" y="3785616"/>
+            <a:ext cx="3520440" cy="237744"/>
           </a:xfrm>
           <a:prstGeom prst="roundRect">
             <a:avLst>
-              <a:gd name="adj" fmla="val 8000"/>
+              <a:gd name="adj" fmla="val 23077"/>
+            </a:avLst>
+          </a:prstGeom>
+          <a:solidFill>
+            <a:srgbClr val="E9F4EF"/>
+          </a:solidFill>
+          <a:ln w="12700">
+            <a:solidFill>
+              <a:srgbClr val="1B8A5A"/>
+            </a:solidFill>
+            <a:prstDash val="solid"/>
+          </a:ln>
+        </p:spPr>
+      </p:sp>
+      <p:sp>
+        <p:nvSpPr>
+          <p:cNvPr id="25" name="Text 22"/>
+          <p:cNvSpPr/>
+          <p:nvPr/>
+        </p:nvSpPr>
+        <p:spPr>
+          <a:xfrm>
+            <a:off x="566928" y="3785616"/>
+            <a:ext cx="3520440" cy="237744"/>
+          </a:xfrm>
+          <a:prstGeom prst="rect">
+            <a:avLst/>
+          </a:prstGeom>
+          <a:noFill/>
+          <a:ln/>
+        </p:spPr>
+        <p:txBody>
+          <a:bodyPr wrap="square" lIns="0" tIns="0" rIns="0" bIns="0" rtlCol="0" anchor="ctr"/>
+          <a:lstStyle/>
+          <a:p>
+            <a:pPr algn="ctr" indent="0" marL="0">
+              <a:buNone/>
+            </a:pPr>
+            <a:r>
+              <a:rPr lang="en-US" sz="950" b="1" dirty="0">
+                <a:solidFill>
+                  <a:srgbClr val="1B8A5A"/>
+                </a:solidFill>
+                <a:latin typeface="Courier New" pitchFamily="34" charset="0"/>
+                <a:ea typeface="Courier New" pitchFamily="34" charset="-122"/>
+                <a:cs typeface="Courier New" pitchFamily="34" charset="-120"/>
+              </a:rPr>
+              <a:t>найдешевша</a:t>
+            </a:r>
+            <a:endParaRPr lang="en-US" sz="950" dirty="0"/>
+          </a:p>
+        </p:txBody>
+      </p:sp>
+      <p:sp>
+        <p:nvSpPr>
+          <p:cNvPr id="26" name="Shape 23"/>
+          <p:cNvSpPr/>
+          <p:nvPr/>
+        </p:nvSpPr>
+        <p:spPr>
+          <a:xfrm>
+            <a:off x="4270248" y="3621024"/>
+            <a:ext cx="3520440" cy="402336"/>
+          </a:xfrm>
+          <a:prstGeom prst="roundRect">
+            <a:avLst>
+              <a:gd name="adj" fmla="val 13636"/>
+            </a:avLst>
+          </a:prstGeom>
+          <a:solidFill>
+            <a:srgbClr val="EFEAFE"/>
+          </a:solidFill>
+          <a:ln w="12700">
+            <a:solidFill>
+              <a:srgbClr val="5A05F4"/>
+            </a:solidFill>
+            <a:prstDash val="solid"/>
+          </a:ln>
+        </p:spPr>
+      </p:sp>
+      <p:sp>
+        <p:nvSpPr>
+          <p:cNvPr id="27" name="Text 24"/>
+          <p:cNvSpPr/>
+          <p:nvPr/>
+        </p:nvSpPr>
+        <p:spPr>
+          <a:xfrm>
+            <a:off x="4270248" y="3621024"/>
+            <a:ext cx="3520440" cy="402336"/>
+          </a:xfrm>
+          <a:prstGeom prst="rect">
+            <a:avLst/>
+          </a:prstGeom>
+          <a:noFill/>
+          <a:ln/>
+        </p:spPr>
+        <p:txBody>
+          <a:bodyPr wrap="square" lIns="0" tIns="0" rIns="0" bIns="0" rtlCol="0" anchor="ctr"/>
+          <a:lstStyle/>
+          <a:p>
+            <a:pPr algn="ctr" indent="0" marL="0">
+              <a:buNone/>
+            </a:pPr>
+            <a:r>
+              <a:rPr lang="en-US" sz="950" b="1" dirty="0">
+                <a:solidFill>
+                  <a:srgbClr val="5A05F4"/>
+                </a:solidFill>
+                <a:latin typeface="Courier New" pitchFamily="34" charset="0"/>
+                <a:ea typeface="Courier New" pitchFamily="34" charset="-122"/>
+                <a:cs typeface="Courier New" pitchFamily="34" charset="-120"/>
+              </a:rPr>
+              <a:t>робоча</a:t>
+            </a:r>
+            <a:endParaRPr lang="en-US" sz="950" dirty="0"/>
+          </a:p>
+        </p:txBody>
+      </p:sp>
+      <p:sp>
+        <p:nvSpPr>
+          <p:cNvPr id="28" name="Shape 25"/>
+          <p:cNvSpPr/>
+          <p:nvPr/>
+        </p:nvSpPr>
+        <p:spPr>
+          <a:xfrm>
+            <a:off x="7973568" y="3456432"/>
+            <a:ext cx="3520440" cy="566928"/>
+          </a:xfrm>
+          <a:prstGeom prst="roundRect">
+            <a:avLst>
+              <a:gd name="adj" fmla="val 9677"/>
+            </a:avLst>
+          </a:prstGeom>
+          <a:solidFill>
+            <a:srgbClr val="F8F0E2"/>
+          </a:solidFill>
+          <a:ln w="12700">
+            <a:solidFill>
+              <a:srgbClr val="9A5B12"/>
+            </a:solidFill>
+            <a:prstDash val="solid"/>
+          </a:ln>
+        </p:spPr>
+      </p:sp>
+      <p:sp>
+        <p:nvSpPr>
+          <p:cNvPr id="29" name="Text 26"/>
+          <p:cNvSpPr/>
+          <p:nvPr/>
+        </p:nvSpPr>
+        <p:spPr>
+          <a:xfrm>
+            <a:off x="7973568" y="3456432"/>
+            <a:ext cx="3520440" cy="566928"/>
+          </a:xfrm>
+          <a:prstGeom prst="rect">
+            <a:avLst/>
+          </a:prstGeom>
+          <a:noFill/>
+          <a:ln/>
+        </p:spPr>
+        <p:txBody>
+          <a:bodyPr wrap="square" lIns="0" tIns="0" rIns="0" bIns="0" rtlCol="0" anchor="ctr"/>
+          <a:lstStyle/>
+          <a:p>
+            <a:pPr algn="ctr" indent="0" marL="0">
+              <a:buNone/>
+            </a:pPr>
+            <a:r>
+              <a:rPr lang="en-US" sz="950" b="1" dirty="0">
+                <a:solidFill>
+                  <a:srgbClr val="9A5B12"/>
+                </a:solidFill>
+                <a:latin typeface="Courier New" pitchFamily="34" charset="0"/>
+                <a:ea typeface="Courier New" pitchFamily="34" charset="-122"/>
+                <a:cs typeface="Courier New" pitchFamily="34" charset="-120"/>
+              </a:rPr>
+              <a:t>найсильніша</a:t>
+            </a:r>
+            <a:endParaRPr lang="en-US" sz="950" dirty="0"/>
+          </a:p>
+        </p:txBody>
+      </p:sp>
+      <p:sp>
+        <p:nvSpPr>
+          <p:cNvPr id="30" name="Text 27"/>
+          <p:cNvSpPr/>
+          <p:nvPr/>
+        </p:nvSpPr>
+        <p:spPr>
+          <a:xfrm>
+            <a:off x="566928" y="4078224"/>
+            <a:ext cx="4572000" cy="201168"/>
+          </a:xfrm>
+          <a:prstGeom prst="rect">
+            <a:avLst/>
+          </a:prstGeom>
+          <a:noFill/>
+          <a:ln/>
+        </p:spPr>
+        <p:txBody>
+          <a:bodyPr wrap="square" lIns="0" tIns="0" rIns="0" bIns="0" rtlCol="0" anchor="ctr"/>
+          <a:lstStyle/>
+          <a:p>
+            <a:pPr indent="0" marL="0">
+              <a:buNone/>
+            </a:pPr>
+            <a:r>
+              <a:rPr lang="en-US" sz="850" spc="100" kern="0" dirty="0">
+                <a:solidFill>
+                  <a:srgbClr val="9AA1AD"/>
+                </a:solidFill>
+                <a:latin typeface="Courier New" pitchFamily="34" charset="0"/>
+                <a:ea typeface="Courier New" pitchFamily="34" charset="-122"/>
+                <a:cs typeface="Courier New" pitchFamily="34" charset="-120"/>
+              </a:rPr>
+              <a:t>вартість запиту →</a:t>
+            </a:r>
+            <a:endParaRPr lang="en-US" sz="850" dirty="0"/>
+          </a:p>
+        </p:txBody>
+      </p:sp>
+      <p:sp>
+        <p:nvSpPr>
+          <p:cNvPr id="31" name="Shape 28"/>
+          <p:cNvSpPr/>
+          <p:nvPr/>
+        </p:nvSpPr>
+        <p:spPr>
+          <a:xfrm>
+            <a:off x="566928" y="4434840"/>
+            <a:ext cx="5349240" cy="1234440"/>
+          </a:xfrm>
+          <a:prstGeom prst="roundRect">
+            <a:avLst>
+              <a:gd name="adj" fmla="val 8889"/>
             </a:avLst>
           </a:prstGeom>
           <a:solidFill>
@@ -10654,13 +10891,13 @@
       </p:sp>
       <p:sp>
         <p:nvSpPr>
-          <p:cNvPr id="25" name="Text 22"/>
-          <p:cNvSpPr/>
-          <p:nvPr/>
-        </p:nvSpPr>
-        <p:spPr>
-          <a:xfrm>
-            <a:off x="768096" y="3904488"/>
+          <p:cNvPr id="32" name="Text 29"/>
+          <p:cNvSpPr/>
+          <p:nvPr/>
+        </p:nvSpPr>
+        <p:spPr>
+          <a:xfrm>
+            <a:off x="768096" y="4590288"/>
             <a:ext cx="4946904" cy="438912"/>
           </a:xfrm>
           <a:prstGeom prst="rect">
@@ -10693,14 +10930,14 @@
       </p:sp>
       <p:sp>
         <p:nvSpPr>
-          <p:cNvPr id="26" name="Text 23"/>
-          <p:cNvSpPr/>
-          <p:nvPr/>
-        </p:nvSpPr>
-        <p:spPr>
-          <a:xfrm>
-            <a:off x="768096" y="4434840"/>
-            <a:ext cx="4946904" cy="530352"/>
+          <p:cNvPr id="33" name="Text 30"/>
+          <p:cNvSpPr/>
+          <p:nvPr/>
+        </p:nvSpPr>
+        <p:spPr>
+          <a:xfrm>
+            <a:off x="768096" y="5120640"/>
+            <a:ext cx="4946904" cy="393192"/>
           </a:xfrm>
           <a:prstGeom prst="rect">
             <a:avLst/>
@@ -10735,18 +10972,18 @@
       </p:sp>
       <p:sp>
         <p:nvSpPr>
-          <p:cNvPr id="27" name="Shape 24"/>
-          <p:cNvSpPr/>
-          <p:nvPr/>
-        </p:nvSpPr>
-        <p:spPr>
-          <a:xfrm>
-            <a:off x="6281928" y="3749040"/>
-            <a:ext cx="5349240" cy="1371600"/>
+          <p:cNvPr id="34" name="Shape 31"/>
+          <p:cNvSpPr/>
+          <p:nvPr/>
+        </p:nvSpPr>
+        <p:spPr>
+          <a:xfrm>
+            <a:off x="6281928" y="4434840"/>
+            <a:ext cx="5349240" cy="1234440"/>
           </a:xfrm>
           <a:prstGeom prst="roundRect">
             <a:avLst>
-              <a:gd name="adj" fmla="val 8000"/>
+              <a:gd name="adj" fmla="val 8889"/>
             </a:avLst>
           </a:prstGeom>
           <a:solidFill>
@@ -10757,13 +10994,13 @@
       </p:sp>
       <p:sp>
         <p:nvSpPr>
-          <p:cNvPr id="28" name="Text 25"/>
-          <p:cNvSpPr/>
-          <p:nvPr/>
-        </p:nvSpPr>
-        <p:spPr>
-          <a:xfrm>
-            <a:off x="6483096" y="3904488"/>
+          <p:cNvPr id="35" name="Text 32"/>
+          <p:cNvSpPr/>
+          <p:nvPr/>
+        </p:nvSpPr>
+        <p:spPr>
+          <a:xfrm>
+            <a:off x="6483096" y="4590288"/>
             <a:ext cx="4946904" cy="438912"/>
           </a:xfrm>
           <a:prstGeom prst="rect">
@@ -10796,14 +11033,14 @@
       </p:sp>
       <p:sp>
         <p:nvSpPr>
-          <p:cNvPr id="29" name="Text 26"/>
-          <p:cNvSpPr/>
-          <p:nvPr/>
-        </p:nvSpPr>
-        <p:spPr>
-          <a:xfrm>
-            <a:off x="6483096" y="4434840"/>
-            <a:ext cx="4946904" cy="530352"/>
+          <p:cNvPr id="36" name="Text 33"/>
+          <p:cNvSpPr/>
+          <p:nvPr/>
+        </p:nvSpPr>
+        <p:spPr>
+          <a:xfrm>
+            <a:off x="6483096" y="5120640"/>
+            <a:ext cx="4946904" cy="393192"/>
           </a:xfrm>
           <a:prstGeom prst="rect">
             <a:avLst/>

--- a/docs/decks/L03.pptx
+++ b/docs/decks/L03.pptx
@@ -2625,7 +2625,7 @@
         </p:nvSpPr>
         <p:spPr>
           <a:xfrm>
-            <a:off x="11368735" y="6437376"/>
+            <a:off x="11368735" y="6327648"/>
             <a:ext cx="365760" cy="274320"/>
           </a:xfrm>
           <a:prstGeom prst="rect">
@@ -2661,6 +2661,62 @@
           </a:p>
         </p:txBody>
       </p:sp>
+    </p:spTree>
+  </p:cSld>
+  <p:clrMapOvr>
+    <a:masterClrMapping/>
+  </p:clrMapOvr>
+</p:sldLayout>
+</file>
+
+<file path=ppt/slideLayouts/slideLayout2.xml><?xml version="1.0" encoding="utf-8"?>
+<p:sldLayout xmlns:a="http://schemas.openxmlformats.org/drawingml/2006/main" xmlns:r="http://schemas.openxmlformats.org/officeDocument/2006/relationships" xmlns:p="http://schemas.openxmlformats.org/presentationml/2006/main" preserve="1">
+  <p:cSld name="NEO">
+    <p:bg>
+      <p:bgPr>
+        <a:solidFill>
+          <a:srgbClr val="000000"/>
+        </a:solidFill>
+      </p:bgPr>
+    </p:bg>
+    <p:spTree>
+      <p:nvGrpSpPr>
+        <p:cNvPr id="1" name=""/>
+        <p:cNvGrpSpPr/>
+        <p:nvPr/>
+      </p:nvGrpSpPr>
+      <p:grpSpPr>
+        <a:xfrm>
+          <a:off x="0" y="0"/>
+          <a:ext cx="0" cy="0"/>
+          <a:chOff x="0" y="0"/>
+          <a:chExt cx="0" cy="0"/>
+        </a:xfrm>
+      </p:grpSpPr>
+      <p:pic>
+        <p:nvPicPr>
+          <p:cNvPr id="2" name="Image 0" descr="preencoded.png">    </p:cNvPr>
+          <p:cNvPicPr>
+            <a:picLocks noChangeAspect="1"/>
+          </p:cNvPicPr>
+          <p:nvPr/>
+        </p:nvPicPr>
+        <p:blipFill>
+          <a:blip r:embed="rId1"/>
+          <a:stretch>
+            <a:fillRect/>
+          </a:stretch>
+        </p:blipFill>
+        <p:spPr>
+          <a:xfrm>
+            <a:off x="0" y="0"/>
+            <a:ext cx="12191695" cy="6858000"/>
+          </a:xfrm>
+          <a:prstGeom prst="rect">
+            <a:avLst/>
+          </a:prstGeom>
+        </p:spPr>
+      </p:pic>
     </p:spTree>
   </p:cSld>
   <p:clrMapOvr>
@@ -2698,7 +2754,7 @@
         </p:nvSpPr>
         <p:spPr>
           <a:xfrm>
-            <a:off x="11368735" y="6437376"/>
+            <a:off x="11368735" y="6327648"/>
             <a:ext cx="365760" cy="274320"/>
           </a:xfrm>
           <a:prstGeom prst="rect">
@@ -2739,6 +2795,7 @@
   <p:clrMap bg1="lt1" tx1="dk1" bg2="lt2" tx2="dk2" accent1="accent1" accent2="accent2" accent3="accent3" accent4="accent4" accent5="accent5" accent6="accent6" hlink="hlink" folHlink="folHlink"/>
   <p:sldLayoutIdLst>
     <p:sldLayoutId id="2147483649" r:id="rId1"/>
+    <p:sldLayoutId id="2147483650" r:id="rId2"/>
   </p:sldLayoutIdLst>
   <p:hf sldNum="0" hdr="0" ftr="0" dt="0"/>
   <p:txStyles>
@@ -2997,13 +3054,6 @@
 <file path=ppt/slides/slide1.xml><?xml version="1.0" encoding="utf-8"?>
 <p:sld xmlns:a="http://schemas.openxmlformats.org/drawingml/2006/main" xmlns:r="http://schemas.openxmlformats.org/officeDocument/2006/relationships" xmlns:p="http://schemas.openxmlformats.org/presentationml/2006/main">
   <p:cSld name="Slide 1">
-    <p:bg>
-      <p:bgPr>
-        <a:solidFill>
-          <a:srgbClr val="1B0942"/>
-        </a:solidFill>
-      </p:bgPr>
-    </p:bg>
     <p:spTree>
       <p:nvGrpSpPr>
         <p:cNvPr id="1" name=""/>
@@ -3675,13 +3725,6 @@
 <file path=ppt/slides/slide10.xml><?xml version="1.0" encoding="utf-8"?>
 <p:sld xmlns:a="http://schemas.openxmlformats.org/drawingml/2006/main" xmlns:r="http://schemas.openxmlformats.org/officeDocument/2006/relationships" xmlns:p="http://schemas.openxmlformats.org/presentationml/2006/main">
   <p:cSld name="Slide 10">
-    <p:bg>
-      <p:bgPr>
-        <a:solidFill>
-          <a:srgbClr val="FFFFFF"/>
-        </a:solidFill>
-      </p:bgPr>
-    </p:bg>
     <p:spTree>
       <p:nvGrpSpPr>
         <p:cNvPr id="1" name=""/>
@@ -3698,7 +3741,29 @@
       </p:grpSpPr>
       <p:sp>
         <p:nvSpPr>
-          <p:cNvPr id="2" name="Text 0"/>
+          <p:cNvPr id="2" name="Shape 0"/>
+          <p:cNvSpPr/>
+          <p:nvPr/>
+        </p:nvSpPr>
+        <p:spPr>
+          <a:xfrm>
+            <a:off x="231343" y="194767"/>
+            <a:ext cx="11716207" cy="6473952"/>
+          </a:xfrm>
+          <a:prstGeom prst="roundRect">
+            <a:avLst>
+              <a:gd name="adj" fmla="val 3107"/>
+            </a:avLst>
+          </a:prstGeom>
+          <a:solidFill>
+            <a:srgbClr val="FFFFFF"/>
+          </a:solidFill>
+          <a:ln/>
+        </p:spPr>
+      </p:sp>
+      <p:sp>
+        <p:nvSpPr>
+          <p:cNvPr id="3" name="Text 1"/>
           <p:cNvSpPr/>
           <p:nvPr/>
         </p:nvSpPr>
@@ -3737,7 +3802,7 @@
       </p:sp>
       <p:sp>
         <p:nvSpPr>
-          <p:cNvPr id="3" name="Text 1"/>
+          <p:cNvPr id="4" name="Text 2"/>
           <p:cNvSpPr/>
           <p:nvPr/>
         </p:nvSpPr>
@@ -3776,7 +3841,7 @@
       </p:sp>
       <p:sp>
         <p:nvSpPr>
-          <p:cNvPr id="4" name="Shape 2"/>
+          <p:cNvPr id="5" name="Shape 3"/>
           <p:cNvSpPr/>
           <p:nvPr/>
         </p:nvSpPr>
@@ -3798,7 +3863,7 @@
       </p:sp>
       <p:sp>
         <p:nvSpPr>
-          <p:cNvPr id="5" name="Text 3"/>
+          <p:cNvPr id="6" name="Text 4"/>
           <p:cNvSpPr/>
           <p:nvPr/>
         </p:nvSpPr>
@@ -3837,7 +3902,7 @@
       </p:sp>
       <p:pic>
         <p:nvPicPr>
-          <p:cNvPr id="6" name="Image 0" descr="preencoded.png">    </p:cNvPr>
+          <p:cNvPr id="7" name="Image 0" descr="preencoded.png">    </p:cNvPr>
           <p:cNvPicPr>
             <a:picLocks noChangeAspect="1"/>
           </p:cNvPicPr>
@@ -3851,7 +3916,7 @@
         </p:blipFill>
         <p:spPr>
           <a:xfrm>
-            <a:off x="566928" y="6254496"/>
+            <a:off x="566928" y="6126480"/>
             <a:ext cx="1481328" cy="457200"/>
           </a:xfrm>
           <a:prstGeom prst="rect">
@@ -3861,7 +3926,7 @@
       </p:pic>
       <p:sp>
         <p:nvSpPr>
-          <p:cNvPr id="7" name="Shape 4"/>
+          <p:cNvPr id="8" name="Shape 5"/>
           <p:cNvSpPr/>
           <p:nvPr/>
         </p:nvSpPr>
@@ -3883,7 +3948,7 @@
       </p:sp>
       <p:sp>
         <p:nvSpPr>
-          <p:cNvPr id="8" name="Shape 5"/>
+          <p:cNvPr id="9" name="Shape 6"/>
           <p:cNvSpPr/>
           <p:nvPr/>
         </p:nvSpPr>
@@ -3903,7 +3968,7 @@
       </p:sp>
       <p:sp>
         <p:nvSpPr>
-          <p:cNvPr id="9" name="Text 6"/>
+          <p:cNvPr id="10" name="Text 7"/>
           <p:cNvSpPr/>
           <p:nvPr/>
         </p:nvSpPr>
@@ -3942,7 +4007,7 @@
       </p:sp>
       <p:sp>
         <p:nvSpPr>
-          <p:cNvPr id="10" name="Text 7"/>
+          <p:cNvPr id="11" name="Text 8"/>
           <p:cNvSpPr/>
           <p:nvPr/>
         </p:nvSpPr>
@@ -3981,7 +4046,7 @@
       </p:sp>
       <p:sp>
         <p:nvSpPr>
-          <p:cNvPr id="11" name="Text 8"/>
+          <p:cNvPr id="12" name="Text 9"/>
           <p:cNvSpPr/>
           <p:nvPr/>
         </p:nvSpPr>
@@ -4023,7 +4088,7 @@
       </p:sp>
       <p:sp>
         <p:nvSpPr>
-          <p:cNvPr id="12" name="Shape 9"/>
+          <p:cNvPr id="13" name="Shape 10"/>
           <p:cNvSpPr/>
           <p:nvPr/>
         </p:nvSpPr>
@@ -4050,7 +4115,7 @@
       </p:sp>
       <p:sp>
         <p:nvSpPr>
-          <p:cNvPr id="13" name="Shape 10"/>
+          <p:cNvPr id="14" name="Shape 11"/>
           <p:cNvSpPr/>
           <p:nvPr/>
         </p:nvSpPr>
@@ -4070,7 +4135,7 @@
       </p:sp>
       <p:sp>
         <p:nvSpPr>
-          <p:cNvPr id="14" name="Text 11"/>
+          <p:cNvPr id="15" name="Text 12"/>
           <p:cNvSpPr/>
           <p:nvPr/>
         </p:nvSpPr>
@@ -4109,7 +4174,7 @@
       </p:sp>
       <p:sp>
         <p:nvSpPr>
-          <p:cNvPr id="15" name="Text 12"/>
+          <p:cNvPr id="16" name="Text 13"/>
           <p:cNvSpPr/>
           <p:nvPr/>
         </p:nvSpPr>
@@ -4148,7 +4213,7 @@
       </p:sp>
       <p:sp>
         <p:nvSpPr>
-          <p:cNvPr id="16" name="Text 13"/>
+          <p:cNvPr id="17" name="Text 14"/>
           <p:cNvSpPr/>
           <p:nvPr/>
         </p:nvSpPr>
@@ -4190,7 +4255,7 @@
       </p:sp>
       <p:sp>
         <p:nvSpPr>
-          <p:cNvPr id="17" name="Shape 14"/>
+          <p:cNvPr id="18" name="Shape 15"/>
           <p:cNvSpPr/>
           <p:nvPr/>
         </p:nvSpPr>
@@ -4212,7 +4277,7 @@
       </p:sp>
       <p:sp>
         <p:nvSpPr>
-          <p:cNvPr id="18" name="Shape 15"/>
+          <p:cNvPr id="19" name="Shape 16"/>
           <p:cNvSpPr/>
           <p:nvPr/>
         </p:nvSpPr>
@@ -4232,7 +4297,7 @@
       </p:sp>
       <p:sp>
         <p:nvSpPr>
-          <p:cNvPr id="19" name="Text 16"/>
+          <p:cNvPr id="20" name="Text 17"/>
           <p:cNvSpPr/>
           <p:nvPr/>
         </p:nvSpPr>
@@ -4271,7 +4336,7 @@
       </p:sp>
       <p:sp>
         <p:nvSpPr>
-          <p:cNvPr id="20" name="Text 17"/>
+          <p:cNvPr id="21" name="Text 18"/>
           <p:cNvSpPr/>
           <p:nvPr/>
         </p:nvSpPr>
@@ -4310,7 +4375,7 @@
       </p:sp>
       <p:sp>
         <p:nvSpPr>
-          <p:cNvPr id="21" name="Text 18"/>
+          <p:cNvPr id="22" name="Text 19"/>
           <p:cNvSpPr/>
           <p:nvPr/>
         </p:nvSpPr>
@@ -4352,7 +4417,7 @@
       </p:sp>
       <p:sp>
         <p:nvSpPr>
-          <p:cNvPr id="22" name="Shape 19"/>
+          <p:cNvPr id="23" name="Shape 20"/>
           <p:cNvSpPr/>
           <p:nvPr/>
         </p:nvSpPr>
@@ -4374,7 +4439,7 @@
       </p:sp>
       <p:sp>
         <p:nvSpPr>
-          <p:cNvPr id="23" name="Text 20"/>
+          <p:cNvPr id="24" name="Text 21"/>
           <p:cNvSpPr/>
           <p:nvPr/>
         </p:nvSpPr>
@@ -4413,7 +4478,7 @@
       </p:sp>
       <p:sp>
         <p:nvSpPr>
-          <p:cNvPr id="24" name="Text 21"/>
+          <p:cNvPr id="25" name="Text 22"/>
           <p:cNvSpPr/>
           <p:nvPr/>
         </p:nvSpPr>
@@ -4465,7 +4530,7 @@
         </p:nvSpPr>
         <p:spPr>
           <a:xfrm>
-            <a:off x="11368735" y="6437376"/>
+            <a:off x="11368735" y="6327648"/>
             <a:ext cx="365760" cy="274320"/>
           </a:xfrm>
           <a:prstGeom prst="rect">
@@ -4512,13 +4577,6 @@
 <file path=ppt/slides/slide11.xml><?xml version="1.0" encoding="utf-8"?>
 <p:sld xmlns:a="http://schemas.openxmlformats.org/drawingml/2006/main" xmlns:r="http://schemas.openxmlformats.org/officeDocument/2006/relationships" xmlns:p="http://schemas.openxmlformats.org/presentationml/2006/main">
   <p:cSld name="Slide 11">
-    <p:bg>
-      <p:bgPr>
-        <a:solidFill>
-          <a:srgbClr val="FFFFFF"/>
-        </a:solidFill>
-      </p:bgPr>
-    </p:bg>
     <p:spTree>
       <p:nvGrpSpPr>
         <p:cNvPr id="1" name=""/>
@@ -4535,7 +4593,29 @@
       </p:grpSpPr>
       <p:sp>
         <p:nvSpPr>
-          <p:cNvPr id="2" name="Text 0"/>
+          <p:cNvPr id="2" name="Shape 0"/>
+          <p:cNvSpPr/>
+          <p:nvPr/>
+        </p:nvSpPr>
+        <p:spPr>
+          <a:xfrm>
+            <a:off x="231343" y="194767"/>
+            <a:ext cx="11716207" cy="6473952"/>
+          </a:xfrm>
+          <a:prstGeom prst="roundRect">
+            <a:avLst>
+              <a:gd name="adj" fmla="val 3107"/>
+            </a:avLst>
+          </a:prstGeom>
+          <a:solidFill>
+            <a:srgbClr val="FFFFFF"/>
+          </a:solidFill>
+          <a:ln/>
+        </p:spPr>
+      </p:sp>
+      <p:sp>
+        <p:nvSpPr>
+          <p:cNvPr id="3" name="Text 1"/>
           <p:cNvSpPr/>
           <p:nvPr/>
         </p:nvSpPr>
@@ -4574,7 +4654,7 @@
       </p:sp>
       <p:sp>
         <p:nvSpPr>
-          <p:cNvPr id="3" name="Text 1"/>
+          <p:cNvPr id="4" name="Text 2"/>
           <p:cNvSpPr/>
           <p:nvPr/>
         </p:nvSpPr>
@@ -4613,7 +4693,7 @@
       </p:sp>
       <p:sp>
         <p:nvSpPr>
-          <p:cNvPr id="4" name="Shape 2"/>
+          <p:cNvPr id="5" name="Shape 3"/>
           <p:cNvSpPr/>
           <p:nvPr/>
         </p:nvSpPr>
@@ -4635,7 +4715,7 @@
       </p:sp>
       <p:sp>
         <p:nvSpPr>
-          <p:cNvPr id="5" name="Text 3"/>
+          <p:cNvPr id="6" name="Text 4"/>
           <p:cNvSpPr/>
           <p:nvPr/>
         </p:nvSpPr>
@@ -4674,7 +4754,7 @@
       </p:sp>
       <p:pic>
         <p:nvPicPr>
-          <p:cNvPr id="6" name="Image 0" descr="preencoded.png">    </p:cNvPr>
+          <p:cNvPr id="7" name="Image 0" descr="preencoded.png">    </p:cNvPr>
           <p:cNvPicPr>
             <a:picLocks noChangeAspect="1"/>
           </p:cNvPicPr>
@@ -4688,7 +4768,7 @@
         </p:blipFill>
         <p:spPr>
           <a:xfrm>
-            <a:off x="566928" y="6254496"/>
+            <a:off x="566928" y="6126480"/>
             <a:ext cx="1481328" cy="457200"/>
           </a:xfrm>
           <a:prstGeom prst="rect">
@@ -4698,7 +4778,7 @@
       </p:pic>
       <p:sp>
         <p:nvSpPr>
-          <p:cNvPr id="7" name="Shape 4"/>
+          <p:cNvPr id="8" name="Shape 5"/>
           <p:cNvSpPr/>
           <p:nvPr/>
         </p:nvSpPr>
@@ -4725,7 +4805,7 @@
       </p:sp>
       <p:sp>
         <p:nvSpPr>
-          <p:cNvPr id="8" name="Text 5"/>
+          <p:cNvPr id="9" name="Text 6"/>
           <p:cNvSpPr/>
           <p:nvPr/>
         </p:nvSpPr>
@@ -4764,7 +4844,7 @@
       </p:sp>
       <p:sp>
         <p:nvSpPr>
-          <p:cNvPr id="9" name="Text 6"/>
+          <p:cNvPr id="10" name="Text 7"/>
           <p:cNvSpPr/>
           <p:nvPr/>
         </p:nvSpPr>
@@ -4803,7 +4883,7 @@
       </p:sp>
       <p:sp>
         <p:nvSpPr>
-          <p:cNvPr id="10" name="Shape 7"/>
+          <p:cNvPr id="11" name="Shape 8"/>
           <p:cNvSpPr/>
           <p:nvPr/>
         </p:nvSpPr>
@@ -4825,7 +4905,7 @@
       </p:sp>
       <p:sp>
         <p:nvSpPr>
-          <p:cNvPr id="11" name="Text 8"/>
+          <p:cNvPr id="12" name="Text 9"/>
           <p:cNvSpPr/>
           <p:nvPr/>
         </p:nvSpPr>
@@ -4864,7 +4944,7 @@
       </p:sp>
       <p:sp>
         <p:nvSpPr>
-          <p:cNvPr id="12" name="Text 9"/>
+          <p:cNvPr id="13" name="Text 10"/>
           <p:cNvSpPr/>
           <p:nvPr/>
         </p:nvSpPr>
@@ -4903,7 +4983,7 @@
       </p:sp>
       <p:sp>
         <p:nvSpPr>
-          <p:cNvPr id="13" name="Shape 10"/>
+          <p:cNvPr id="14" name="Shape 11"/>
           <p:cNvSpPr/>
           <p:nvPr/>
         </p:nvSpPr>
@@ -4925,7 +5005,7 @@
       </p:sp>
       <p:sp>
         <p:nvSpPr>
-          <p:cNvPr id="14" name="Text 11"/>
+          <p:cNvPr id="15" name="Text 12"/>
           <p:cNvSpPr/>
           <p:nvPr/>
         </p:nvSpPr>
@@ -4964,7 +5044,7 @@
       </p:sp>
       <p:sp>
         <p:nvSpPr>
-          <p:cNvPr id="15" name="Text 12"/>
+          <p:cNvPr id="16" name="Text 13"/>
           <p:cNvSpPr/>
           <p:nvPr/>
         </p:nvSpPr>
@@ -5003,7 +5083,7 @@
       </p:sp>
       <p:sp>
         <p:nvSpPr>
-          <p:cNvPr id="16" name="Shape 13"/>
+          <p:cNvPr id="17" name="Shape 14"/>
           <p:cNvSpPr/>
           <p:nvPr/>
         </p:nvSpPr>
@@ -5025,7 +5105,7 @@
       </p:sp>
       <p:sp>
         <p:nvSpPr>
-          <p:cNvPr id="17" name="Text 14"/>
+          <p:cNvPr id="18" name="Text 15"/>
           <p:cNvSpPr/>
           <p:nvPr/>
         </p:nvSpPr>
@@ -5064,7 +5144,7 @@
       </p:sp>
       <p:sp>
         <p:nvSpPr>
-          <p:cNvPr id="18" name="Text 15"/>
+          <p:cNvPr id="19" name="Text 16"/>
           <p:cNvSpPr/>
           <p:nvPr/>
         </p:nvSpPr>
@@ -5116,7 +5196,7 @@
         </p:nvSpPr>
         <p:spPr>
           <a:xfrm>
-            <a:off x="11368735" y="6437376"/>
+            <a:off x="11368735" y="6327648"/>
             <a:ext cx="365760" cy="274320"/>
           </a:xfrm>
           <a:prstGeom prst="rect">
@@ -5163,13 +5243,6 @@
 <file path=ppt/slides/slide12.xml><?xml version="1.0" encoding="utf-8"?>
 <p:sld xmlns:a="http://schemas.openxmlformats.org/drawingml/2006/main" xmlns:r="http://schemas.openxmlformats.org/officeDocument/2006/relationships" xmlns:p="http://schemas.openxmlformats.org/presentationml/2006/main">
   <p:cSld name="Slide 12">
-    <p:bg>
-      <p:bgPr>
-        <a:solidFill>
-          <a:srgbClr val="FFFFFF"/>
-        </a:solidFill>
-      </p:bgPr>
-    </p:bg>
     <p:spTree>
       <p:nvGrpSpPr>
         <p:cNvPr id="1" name=""/>
@@ -5186,7 +5259,29 @@
       </p:grpSpPr>
       <p:sp>
         <p:nvSpPr>
-          <p:cNvPr id="2" name="Text 0"/>
+          <p:cNvPr id="2" name="Shape 0"/>
+          <p:cNvSpPr/>
+          <p:nvPr/>
+        </p:nvSpPr>
+        <p:spPr>
+          <a:xfrm>
+            <a:off x="231343" y="194767"/>
+            <a:ext cx="11716207" cy="6473952"/>
+          </a:xfrm>
+          <a:prstGeom prst="roundRect">
+            <a:avLst>
+              <a:gd name="adj" fmla="val 3107"/>
+            </a:avLst>
+          </a:prstGeom>
+          <a:solidFill>
+            <a:srgbClr val="FFFFFF"/>
+          </a:solidFill>
+          <a:ln/>
+        </p:spPr>
+      </p:sp>
+      <p:sp>
+        <p:nvSpPr>
+          <p:cNvPr id="3" name="Text 1"/>
           <p:cNvSpPr/>
           <p:nvPr/>
         </p:nvSpPr>
@@ -5225,7 +5320,7 @@
       </p:sp>
       <p:sp>
         <p:nvSpPr>
-          <p:cNvPr id="3" name="Text 1"/>
+          <p:cNvPr id="4" name="Text 2"/>
           <p:cNvSpPr/>
           <p:nvPr/>
         </p:nvSpPr>
@@ -5264,7 +5359,7 @@
       </p:sp>
       <p:sp>
         <p:nvSpPr>
-          <p:cNvPr id="4" name="Shape 2"/>
+          <p:cNvPr id="5" name="Shape 3"/>
           <p:cNvSpPr/>
           <p:nvPr/>
         </p:nvSpPr>
@@ -5286,7 +5381,7 @@
       </p:sp>
       <p:sp>
         <p:nvSpPr>
-          <p:cNvPr id="5" name="Text 3"/>
+          <p:cNvPr id="6" name="Text 4"/>
           <p:cNvSpPr/>
           <p:nvPr/>
         </p:nvSpPr>
@@ -5325,7 +5420,7 @@
       </p:sp>
       <p:pic>
         <p:nvPicPr>
-          <p:cNvPr id="6" name="Image 0" descr="preencoded.png">    </p:cNvPr>
+          <p:cNvPr id="7" name="Image 0" descr="preencoded.png">    </p:cNvPr>
           <p:cNvPicPr>
             <a:picLocks noChangeAspect="1"/>
           </p:cNvPicPr>
@@ -5339,7 +5434,7 @@
         </p:blipFill>
         <p:spPr>
           <a:xfrm>
-            <a:off x="566928" y="6254496"/>
+            <a:off x="566928" y="6126480"/>
             <a:ext cx="1481328" cy="457200"/>
           </a:xfrm>
           <a:prstGeom prst="rect">
@@ -6204,7 +6299,7 @@
       </p:graphicFrame>
       <p:sp>
         <p:nvSpPr>
-          <p:cNvPr id="8" name="Shape 4"/>
+          <p:cNvPr id="9" name="Shape 5"/>
           <p:cNvSpPr/>
           <p:nvPr/>
         </p:nvSpPr>
@@ -6226,7 +6321,7 @@
       </p:sp>
       <p:sp>
         <p:nvSpPr>
-          <p:cNvPr id="9" name="Text 5"/>
+          <p:cNvPr id="10" name="Text 6"/>
           <p:cNvSpPr/>
           <p:nvPr/>
         </p:nvSpPr>
@@ -6278,7 +6373,7 @@
         </p:nvSpPr>
         <p:spPr>
           <a:xfrm>
-            <a:off x="11368735" y="6437376"/>
+            <a:off x="11368735" y="6327648"/>
             <a:ext cx="365760" cy="274320"/>
           </a:xfrm>
           <a:prstGeom prst="rect">
@@ -6325,13 +6420,6 @@
 <file path=ppt/slides/slide13.xml><?xml version="1.0" encoding="utf-8"?>
 <p:sld xmlns:a="http://schemas.openxmlformats.org/drawingml/2006/main" xmlns:r="http://schemas.openxmlformats.org/officeDocument/2006/relationships" xmlns:p="http://schemas.openxmlformats.org/presentationml/2006/main">
   <p:cSld name="Slide 13">
-    <p:bg>
-      <p:bgPr>
-        <a:solidFill>
-          <a:srgbClr val="FFFFFF"/>
-        </a:solidFill>
-      </p:bgPr>
-    </p:bg>
     <p:spTree>
       <p:nvGrpSpPr>
         <p:cNvPr id="1" name=""/>
@@ -6348,7 +6436,29 @@
       </p:grpSpPr>
       <p:sp>
         <p:nvSpPr>
-          <p:cNvPr id="2" name="Text 0"/>
+          <p:cNvPr id="2" name="Shape 0"/>
+          <p:cNvSpPr/>
+          <p:nvPr/>
+        </p:nvSpPr>
+        <p:spPr>
+          <a:xfrm>
+            <a:off x="231343" y="194767"/>
+            <a:ext cx="11716207" cy="6473952"/>
+          </a:xfrm>
+          <a:prstGeom prst="roundRect">
+            <a:avLst>
+              <a:gd name="adj" fmla="val 3107"/>
+            </a:avLst>
+          </a:prstGeom>
+          <a:solidFill>
+            <a:srgbClr val="FFFFFF"/>
+          </a:solidFill>
+          <a:ln/>
+        </p:spPr>
+      </p:sp>
+      <p:sp>
+        <p:nvSpPr>
+          <p:cNvPr id="3" name="Text 1"/>
           <p:cNvSpPr/>
           <p:nvPr/>
         </p:nvSpPr>
@@ -6387,7 +6497,7 @@
       </p:sp>
       <p:sp>
         <p:nvSpPr>
-          <p:cNvPr id="3" name="Text 1"/>
+          <p:cNvPr id="4" name="Text 2"/>
           <p:cNvSpPr/>
           <p:nvPr/>
         </p:nvSpPr>
@@ -6426,7 +6536,7 @@
       </p:sp>
       <p:sp>
         <p:nvSpPr>
-          <p:cNvPr id="4" name="Shape 2"/>
+          <p:cNvPr id="5" name="Shape 3"/>
           <p:cNvSpPr/>
           <p:nvPr/>
         </p:nvSpPr>
@@ -6448,7 +6558,7 @@
       </p:sp>
       <p:sp>
         <p:nvSpPr>
-          <p:cNvPr id="5" name="Text 3"/>
+          <p:cNvPr id="6" name="Text 4"/>
           <p:cNvSpPr/>
           <p:nvPr/>
         </p:nvSpPr>
@@ -6487,7 +6597,7 @@
       </p:sp>
       <p:pic>
         <p:nvPicPr>
-          <p:cNvPr id="6" name="Image 0" descr="preencoded.png">    </p:cNvPr>
+          <p:cNvPr id="7" name="Image 0" descr="preencoded.png">    </p:cNvPr>
           <p:cNvPicPr>
             <a:picLocks noChangeAspect="1"/>
           </p:cNvPicPr>
@@ -6501,7 +6611,7 @@
         </p:blipFill>
         <p:spPr>
           <a:xfrm>
-            <a:off x="566928" y="6254496"/>
+            <a:off x="566928" y="6126480"/>
             <a:ext cx="1481328" cy="457200"/>
           </a:xfrm>
           <a:prstGeom prst="rect">
@@ -6511,7 +6621,7 @@
       </p:pic>
       <p:sp>
         <p:nvSpPr>
-          <p:cNvPr id="7" name="Shape 4"/>
+          <p:cNvPr id="8" name="Shape 5"/>
           <p:cNvSpPr/>
           <p:nvPr/>
         </p:nvSpPr>
@@ -6533,7 +6643,7 @@
       </p:sp>
       <p:sp>
         <p:nvSpPr>
-          <p:cNvPr id="8" name="Text 5"/>
+          <p:cNvPr id="9" name="Text 6"/>
           <p:cNvSpPr/>
           <p:nvPr/>
         </p:nvSpPr>
@@ -6572,7 +6682,7 @@
       </p:sp>
       <p:sp>
         <p:nvSpPr>
-          <p:cNvPr id="9" name="Shape 6"/>
+          <p:cNvPr id="10" name="Shape 7"/>
           <p:cNvSpPr/>
           <p:nvPr/>
         </p:nvSpPr>
@@ -6595,7 +6705,7 @@
       </p:sp>
       <p:sp>
         <p:nvSpPr>
-          <p:cNvPr id="10" name="Shape 7"/>
+          <p:cNvPr id="11" name="Shape 8"/>
           <p:cNvSpPr/>
           <p:nvPr/>
         </p:nvSpPr>
@@ -6615,7 +6725,7 @@
       </p:sp>
       <p:sp>
         <p:nvSpPr>
-          <p:cNvPr id="11" name="Shape 8"/>
+          <p:cNvPr id="12" name="Shape 9"/>
           <p:cNvSpPr/>
           <p:nvPr/>
         </p:nvSpPr>
@@ -6637,7 +6747,7 @@
       </p:sp>
       <p:sp>
         <p:nvSpPr>
-          <p:cNvPr id="12" name="Text 9"/>
+          <p:cNvPr id="13" name="Text 10"/>
           <p:cNvSpPr/>
           <p:nvPr/>
         </p:nvSpPr>
@@ -6676,7 +6786,7 @@
       </p:sp>
       <p:sp>
         <p:nvSpPr>
-          <p:cNvPr id="13" name="Shape 10"/>
+          <p:cNvPr id="14" name="Shape 11"/>
           <p:cNvSpPr/>
           <p:nvPr/>
         </p:nvSpPr>
@@ -6699,7 +6809,7 @@
       </p:sp>
       <p:sp>
         <p:nvSpPr>
-          <p:cNvPr id="14" name="Shape 11"/>
+          <p:cNvPr id="15" name="Shape 12"/>
           <p:cNvSpPr/>
           <p:nvPr/>
         </p:nvSpPr>
@@ -6719,7 +6829,7 @@
       </p:sp>
       <p:sp>
         <p:nvSpPr>
-          <p:cNvPr id="15" name="Shape 12"/>
+          <p:cNvPr id="16" name="Shape 13"/>
           <p:cNvSpPr/>
           <p:nvPr/>
         </p:nvSpPr>
@@ -6741,7 +6851,7 @@
       </p:sp>
       <p:sp>
         <p:nvSpPr>
-          <p:cNvPr id="16" name="Text 13"/>
+          <p:cNvPr id="17" name="Text 14"/>
           <p:cNvSpPr/>
           <p:nvPr/>
         </p:nvSpPr>
@@ -6780,7 +6890,7 @@
       </p:sp>
       <p:sp>
         <p:nvSpPr>
-          <p:cNvPr id="17" name="Text 14"/>
+          <p:cNvPr id="18" name="Text 15"/>
           <p:cNvSpPr/>
           <p:nvPr/>
         </p:nvSpPr>
@@ -6819,7 +6929,7 @@
       </p:sp>
       <p:sp>
         <p:nvSpPr>
-          <p:cNvPr id="18" name="Shape 15"/>
+          <p:cNvPr id="19" name="Shape 16"/>
           <p:cNvSpPr/>
           <p:nvPr/>
         </p:nvSpPr>
@@ -6841,7 +6951,7 @@
       </p:sp>
       <p:sp>
         <p:nvSpPr>
-          <p:cNvPr id="19" name="Text 16"/>
+          <p:cNvPr id="20" name="Text 17"/>
           <p:cNvSpPr/>
           <p:nvPr/>
         </p:nvSpPr>
@@ -6880,7 +6990,7 @@
       </p:sp>
       <p:sp>
         <p:nvSpPr>
-          <p:cNvPr id="20" name="Text 17"/>
+          <p:cNvPr id="21" name="Text 18"/>
           <p:cNvSpPr/>
           <p:nvPr/>
         </p:nvSpPr>
@@ -6922,7 +7032,7 @@
       </p:sp>
       <p:sp>
         <p:nvSpPr>
-          <p:cNvPr id="21" name="Shape 18"/>
+          <p:cNvPr id="22" name="Shape 19"/>
           <p:cNvSpPr/>
           <p:nvPr/>
         </p:nvSpPr>
@@ -6944,7 +7054,7 @@
       </p:sp>
       <p:sp>
         <p:nvSpPr>
-          <p:cNvPr id="22" name="Text 19"/>
+          <p:cNvPr id="23" name="Text 20"/>
           <p:cNvSpPr/>
           <p:nvPr/>
         </p:nvSpPr>
@@ -6983,7 +7093,7 @@
       </p:sp>
       <p:sp>
         <p:nvSpPr>
-          <p:cNvPr id="23" name="Text 20"/>
+          <p:cNvPr id="24" name="Text 21"/>
           <p:cNvSpPr/>
           <p:nvPr/>
         </p:nvSpPr>
@@ -7035,7 +7145,7 @@
         </p:nvSpPr>
         <p:spPr>
           <a:xfrm>
-            <a:off x="11368735" y="6437376"/>
+            <a:off x="11368735" y="6327648"/>
             <a:ext cx="365760" cy="274320"/>
           </a:xfrm>
           <a:prstGeom prst="rect">
@@ -7082,13 +7192,6 @@
 <file path=ppt/slides/slide14.xml><?xml version="1.0" encoding="utf-8"?>
 <p:sld xmlns:a="http://schemas.openxmlformats.org/drawingml/2006/main" xmlns:r="http://schemas.openxmlformats.org/officeDocument/2006/relationships" xmlns:p="http://schemas.openxmlformats.org/presentationml/2006/main">
   <p:cSld name="Slide 14">
-    <p:bg>
-      <p:bgPr>
-        <a:solidFill>
-          <a:srgbClr val="FFFFFF"/>
-        </a:solidFill>
-      </p:bgPr>
-    </p:bg>
     <p:spTree>
       <p:nvGrpSpPr>
         <p:cNvPr id="1" name=""/>
@@ -7105,7 +7208,29 @@
       </p:grpSpPr>
       <p:sp>
         <p:nvSpPr>
-          <p:cNvPr id="2" name="Text 0"/>
+          <p:cNvPr id="2" name="Shape 0"/>
+          <p:cNvSpPr/>
+          <p:nvPr/>
+        </p:nvSpPr>
+        <p:spPr>
+          <a:xfrm>
+            <a:off x="231343" y="194767"/>
+            <a:ext cx="11716207" cy="6473952"/>
+          </a:xfrm>
+          <a:prstGeom prst="roundRect">
+            <a:avLst>
+              <a:gd name="adj" fmla="val 3107"/>
+            </a:avLst>
+          </a:prstGeom>
+          <a:solidFill>
+            <a:srgbClr val="FFFFFF"/>
+          </a:solidFill>
+          <a:ln/>
+        </p:spPr>
+      </p:sp>
+      <p:sp>
+        <p:nvSpPr>
+          <p:cNvPr id="3" name="Text 1"/>
           <p:cNvSpPr/>
           <p:nvPr/>
         </p:nvSpPr>
@@ -7144,7 +7269,7 @@
       </p:sp>
       <p:sp>
         <p:nvSpPr>
-          <p:cNvPr id="3" name="Text 1"/>
+          <p:cNvPr id="4" name="Text 2"/>
           <p:cNvSpPr/>
           <p:nvPr/>
         </p:nvSpPr>
@@ -7183,7 +7308,7 @@
       </p:sp>
       <p:sp>
         <p:nvSpPr>
-          <p:cNvPr id="4" name="Shape 2"/>
+          <p:cNvPr id="5" name="Shape 3"/>
           <p:cNvSpPr/>
           <p:nvPr/>
         </p:nvSpPr>
@@ -7205,7 +7330,7 @@
       </p:sp>
       <p:sp>
         <p:nvSpPr>
-          <p:cNvPr id="5" name="Text 3"/>
+          <p:cNvPr id="6" name="Text 4"/>
           <p:cNvSpPr/>
           <p:nvPr/>
         </p:nvSpPr>
@@ -7244,7 +7369,7 @@
       </p:sp>
       <p:pic>
         <p:nvPicPr>
-          <p:cNvPr id="6" name="Image 0" descr="preencoded.png">    </p:cNvPr>
+          <p:cNvPr id="7" name="Image 0" descr="preencoded.png">    </p:cNvPr>
           <p:cNvPicPr>
             <a:picLocks noChangeAspect="1"/>
           </p:cNvPicPr>
@@ -7258,7 +7383,7 @@
         </p:blipFill>
         <p:spPr>
           <a:xfrm>
-            <a:off x="566928" y="6254496"/>
+            <a:off x="566928" y="6126480"/>
             <a:ext cx="1481328" cy="457200"/>
           </a:xfrm>
           <a:prstGeom prst="rect">
@@ -8329,7 +8454,7 @@
       </p:graphicFrame>
       <p:sp>
         <p:nvSpPr>
-          <p:cNvPr id="8" name="Shape 4"/>
+          <p:cNvPr id="9" name="Shape 5"/>
           <p:cNvSpPr/>
           <p:nvPr/>
         </p:nvSpPr>
@@ -8356,7 +8481,7 @@
       </p:sp>
       <p:sp>
         <p:nvSpPr>
-          <p:cNvPr id="9" name="Text 5"/>
+          <p:cNvPr id="10" name="Text 6"/>
           <p:cNvSpPr/>
           <p:nvPr/>
         </p:nvSpPr>
@@ -8408,7 +8533,7 @@
         </p:nvSpPr>
         <p:spPr>
           <a:xfrm>
-            <a:off x="11368735" y="6437376"/>
+            <a:off x="11368735" y="6327648"/>
             <a:ext cx="365760" cy="274320"/>
           </a:xfrm>
           <a:prstGeom prst="rect">
@@ -8455,13 +8580,6 @@
 <file path=ppt/slides/slide15.xml><?xml version="1.0" encoding="utf-8"?>
 <p:sld xmlns:a="http://schemas.openxmlformats.org/drawingml/2006/main" xmlns:r="http://schemas.openxmlformats.org/officeDocument/2006/relationships" xmlns:p="http://schemas.openxmlformats.org/presentationml/2006/main">
   <p:cSld name="Slide 15">
-    <p:bg>
-      <p:bgPr>
-        <a:solidFill>
-          <a:srgbClr val="FFFFFF"/>
-        </a:solidFill>
-      </p:bgPr>
-    </p:bg>
     <p:spTree>
       <p:nvGrpSpPr>
         <p:cNvPr id="1" name=""/>
@@ -8478,7 +8596,29 @@
       </p:grpSpPr>
       <p:sp>
         <p:nvSpPr>
-          <p:cNvPr id="2" name="Text 0"/>
+          <p:cNvPr id="2" name="Shape 0"/>
+          <p:cNvSpPr/>
+          <p:nvPr/>
+        </p:nvSpPr>
+        <p:spPr>
+          <a:xfrm>
+            <a:off x="231343" y="194767"/>
+            <a:ext cx="11716207" cy="6473952"/>
+          </a:xfrm>
+          <a:prstGeom prst="roundRect">
+            <a:avLst>
+              <a:gd name="adj" fmla="val 3107"/>
+            </a:avLst>
+          </a:prstGeom>
+          <a:solidFill>
+            <a:srgbClr val="FFFFFF"/>
+          </a:solidFill>
+          <a:ln/>
+        </p:spPr>
+      </p:sp>
+      <p:sp>
+        <p:nvSpPr>
+          <p:cNvPr id="3" name="Text 1"/>
           <p:cNvSpPr/>
           <p:nvPr/>
         </p:nvSpPr>
@@ -8517,7 +8657,7 @@
       </p:sp>
       <p:sp>
         <p:nvSpPr>
-          <p:cNvPr id="3" name="Text 1"/>
+          <p:cNvPr id="4" name="Text 2"/>
           <p:cNvSpPr/>
           <p:nvPr/>
         </p:nvSpPr>
@@ -8556,7 +8696,7 @@
       </p:sp>
       <p:sp>
         <p:nvSpPr>
-          <p:cNvPr id="4" name="Shape 2"/>
+          <p:cNvPr id="5" name="Shape 3"/>
           <p:cNvSpPr/>
           <p:nvPr/>
         </p:nvSpPr>
@@ -8578,7 +8718,7 @@
       </p:sp>
       <p:sp>
         <p:nvSpPr>
-          <p:cNvPr id="5" name="Text 3"/>
+          <p:cNvPr id="6" name="Text 4"/>
           <p:cNvSpPr/>
           <p:nvPr/>
         </p:nvSpPr>
@@ -8617,7 +8757,7 @@
       </p:sp>
       <p:pic>
         <p:nvPicPr>
-          <p:cNvPr id="6" name="Image 0" descr="preencoded.png">    </p:cNvPr>
+          <p:cNvPr id="7" name="Image 0" descr="preencoded.png">    </p:cNvPr>
           <p:cNvPicPr>
             <a:picLocks noChangeAspect="1"/>
           </p:cNvPicPr>
@@ -8631,7 +8771,7 @@
         </p:blipFill>
         <p:spPr>
           <a:xfrm>
-            <a:off x="566928" y="6254496"/>
+            <a:off x="566928" y="6126480"/>
             <a:ext cx="1481328" cy="457200"/>
           </a:xfrm>
           <a:prstGeom prst="rect">
@@ -8641,7 +8781,7 @@
       </p:pic>
       <p:sp>
         <p:nvSpPr>
-          <p:cNvPr id="7" name="Shape 4"/>
+          <p:cNvPr id="8" name="Shape 5"/>
           <p:cNvSpPr/>
           <p:nvPr/>
         </p:nvSpPr>
@@ -8663,7 +8803,7 @@
       </p:sp>
       <p:sp>
         <p:nvSpPr>
-          <p:cNvPr id="8" name="Text 5"/>
+          <p:cNvPr id="9" name="Text 6"/>
           <p:cNvSpPr/>
           <p:nvPr/>
         </p:nvSpPr>
@@ -8702,7 +8842,7 @@
       </p:sp>
       <p:sp>
         <p:nvSpPr>
-          <p:cNvPr id="9" name="Shape 6"/>
+          <p:cNvPr id="10" name="Shape 7"/>
           <p:cNvSpPr/>
           <p:nvPr/>
         </p:nvSpPr>
@@ -8725,7 +8865,7 @@
       </p:sp>
       <p:sp>
         <p:nvSpPr>
-          <p:cNvPr id="10" name="Shape 7"/>
+          <p:cNvPr id="11" name="Shape 8"/>
           <p:cNvSpPr/>
           <p:nvPr/>
         </p:nvSpPr>
@@ -8745,7 +8885,7 @@
       </p:sp>
       <p:sp>
         <p:nvSpPr>
-          <p:cNvPr id="11" name="Shape 8"/>
+          <p:cNvPr id="12" name="Shape 9"/>
           <p:cNvSpPr/>
           <p:nvPr/>
         </p:nvSpPr>
@@ -8767,7 +8907,7 @@
       </p:sp>
       <p:sp>
         <p:nvSpPr>
-          <p:cNvPr id="12" name="Text 9"/>
+          <p:cNvPr id="13" name="Text 10"/>
           <p:cNvSpPr/>
           <p:nvPr/>
         </p:nvSpPr>
@@ -8806,7 +8946,7 @@
       </p:sp>
       <p:sp>
         <p:nvSpPr>
-          <p:cNvPr id="13" name="Text 10"/>
+          <p:cNvPr id="14" name="Text 11"/>
           <p:cNvSpPr/>
           <p:nvPr/>
         </p:nvSpPr>
@@ -8845,7 +8985,7 @@
       </p:sp>
       <p:sp>
         <p:nvSpPr>
-          <p:cNvPr id="14" name="Shape 11"/>
+          <p:cNvPr id="15" name="Shape 12"/>
           <p:cNvSpPr/>
           <p:nvPr/>
         </p:nvSpPr>
@@ -8867,7 +9007,7 @@
       </p:sp>
       <p:sp>
         <p:nvSpPr>
-          <p:cNvPr id="15" name="Text 12"/>
+          <p:cNvPr id="16" name="Text 13"/>
           <p:cNvSpPr/>
           <p:nvPr/>
         </p:nvSpPr>
@@ -8906,7 +9046,7 @@
       </p:sp>
       <p:sp>
         <p:nvSpPr>
-          <p:cNvPr id="16" name="Text 13"/>
+          <p:cNvPr id="17" name="Text 14"/>
           <p:cNvSpPr/>
           <p:nvPr/>
         </p:nvSpPr>
@@ -8948,7 +9088,7 @@
       </p:sp>
       <p:sp>
         <p:nvSpPr>
-          <p:cNvPr id="17" name="Shape 14"/>
+          <p:cNvPr id="18" name="Shape 15"/>
           <p:cNvSpPr/>
           <p:nvPr/>
         </p:nvSpPr>
@@ -8970,7 +9110,7 @@
       </p:sp>
       <p:sp>
         <p:nvSpPr>
-          <p:cNvPr id="18" name="Text 15"/>
+          <p:cNvPr id="19" name="Text 16"/>
           <p:cNvSpPr/>
           <p:nvPr/>
         </p:nvSpPr>
@@ -9009,7 +9149,7 @@
       </p:sp>
       <p:sp>
         <p:nvSpPr>
-          <p:cNvPr id="19" name="Text 16"/>
+          <p:cNvPr id="20" name="Text 17"/>
           <p:cNvSpPr/>
           <p:nvPr/>
         </p:nvSpPr>
@@ -9061,7 +9201,7 @@
         </p:nvSpPr>
         <p:spPr>
           <a:xfrm>
-            <a:off x="11368735" y="6437376"/>
+            <a:off x="11368735" y="6327648"/>
             <a:ext cx="365760" cy="274320"/>
           </a:xfrm>
           <a:prstGeom prst="rect">
@@ -9108,13 +9248,6 @@
 <file path=ppt/slides/slide16.xml><?xml version="1.0" encoding="utf-8"?>
 <p:sld xmlns:a="http://schemas.openxmlformats.org/drawingml/2006/main" xmlns:r="http://schemas.openxmlformats.org/officeDocument/2006/relationships" xmlns:p="http://schemas.openxmlformats.org/presentationml/2006/main">
   <p:cSld name="Slide 16">
-    <p:bg>
-      <p:bgPr>
-        <a:solidFill>
-          <a:srgbClr val="FFFFFF"/>
-        </a:solidFill>
-      </p:bgPr>
-    </p:bg>
     <p:spTree>
       <p:nvGrpSpPr>
         <p:cNvPr id="1" name=""/>
@@ -9131,7 +9264,29 @@
       </p:grpSpPr>
       <p:sp>
         <p:nvSpPr>
-          <p:cNvPr id="2" name="Text 0"/>
+          <p:cNvPr id="2" name="Shape 0"/>
+          <p:cNvSpPr/>
+          <p:nvPr/>
+        </p:nvSpPr>
+        <p:spPr>
+          <a:xfrm>
+            <a:off x="231343" y="194767"/>
+            <a:ext cx="11716207" cy="6473952"/>
+          </a:xfrm>
+          <a:prstGeom prst="roundRect">
+            <a:avLst>
+              <a:gd name="adj" fmla="val 3107"/>
+            </a:avLst>
+          </a:prstGeom>
+          <a:solidFill>
+            <a:srgbClr val="FFFFFF"/>
+          </a:solidFill>
+          <a:ln/>
+        </p:spPr>
+      </p:sp>
+      <p:sp>
+        <p:nvSpPr>
+          <p:cNvPr id="3" name="Text 1"/>
           <p:cNvSpPr/>
           <p:nvPr/>
         </p:nvSpPr>
@@ -9170,7 +9325,7 @@
       </p:sp>
       <p:sp>
         <p:nvSpPr>
-          <p:cNvPr id="3" name="Text 1"/>
+          <p:cNvPr id="4" name="Text 2"/>
           <p:cNvSpPr/>
           <p:nvPr/>
         </p:nvSpPr>
@@ -9209,7 +9364,7 @@
       </p:sp>
       <p:sp>
         <p:nvSpPr>
-          <p:cNvPr id="4" name="Shape 2"/>
+          <p:cNvPr id="5" name="Shape 3"/>
           <p:cNvSpPr/>
           <p:nvPr/>
         </p:nvSpPr>
@@ -9231,7 +9386,7 @@
       </p:sp>
       <p:sp>
         <p:nvSpPr>
-          <p:cNvPr id="5" name="Text 3"/>
+          <p:cNvPr id="6" name="Text 4"/>
           <p:cNvSpPr/>
           <p:nvPr/>
         </p:nvSpPr>
@@ -9270,7 +9425,7 @@
       </p:sp>
       <p:pic>
         <p:nvPicPr>
-          <p:cNvPr id="6" name="Image 0" descr="preencoded.png">    </p:cNvPr>
+          <p:cNvPr id="7" name="Image 0" descr="preencoded.png">    </p:cNvPr>
           <p:cNvPicPr>
             <a:picLocks noChangeAspect="1"/>
           </p:cNvPicPr>
@@ -9284,7 +9439,7 @@
         </p:blipFill>
         <p:spPr>
           <a:xfrm>
-            <a:off x="566928" y="6254496"/>
+            <a:off x="566928" y="6126480"/>
             <a:ext cx="1481328" cy="457200"/>
           </a:xfrm>
           <a:prstGeom prst="rect">
@@ -9294,7 +9449,7 @@
       </p:pic>
       <p:sp>
         <p:nvSpPr>
-          <p:cNvPr id="7" name="Shape 4"/>
+          <p:cNvPr id="8" name="Shape 5"/>
           <p:cNvSpPr/>
           <p:nvPr/>
         </p:nvSpPr>
@@ -9321,7 +9476,7 @@
       </p:sp>
       <p:sp>
         <p:nvSpPr>
-          <p:cNvPr id="8" name="Text 5"/>
+          <p:cNvPr id="9" name="Text 6"/>
           <p:cNvSpPr/>
           <p:nvPr/>
         </p:nvSpPr>
@@ -9460,7 +9615,7 @@
       </p:sp>
       <p:sp>
         <p:nvSpPr>
-          <p:cNvPr id="9" name="Shape 6"/>
+          <p:cNvPr id="10" name="Shape 7"/>
           <p:cNvSpPr/>
           <p:nvPr/>
         </p:nvSpPr>
@@ -9482,7 +9637,7 @@
       </p:sp>
       <p:sp>
         <p:nvSpPr>
-          <p:cNvPr id="10" name="Text 7"/>
+          <p:cNvPr id="11" name="Text 8"/>
           <p:cNvSpPr/>
           <p:nvPr/>
         </p:nvSpPr>
@@ -9521,7 +9676,7 @@
       </p:sp>
       <p:sp>
         <p:nvSpPr>
-          <p:cNvPr id="11" name="Shape 8"/>
+          <p:cNvPr id="12" name="Shape 9"/>
           <p:cNvSpPr/>
           <p:nvPr/>
         </p:nvSpPr>
@@ -9544,7 +9699,7 @@
       </p:sp>
       <p:sp>
         <p:nvSpPr>
-          <p:cNvPr id="12" name="Shape 9"/>
+          <p:cNvPr id="13" name="Shape 10"/>
           <p:cNvSpPr/>
           <p:nvPr/>
         </p:nvSpPr>
@@ -9564,7 +9719,7 @@
       </p:sp>
       <p:sp>
         <p:nvSpPr>
-          <p:cNvPr id="13" name="Shape 10"/>
+          <p:cNvPr id="14" name="Shape 11"/>
           <p:cNvSpPr/>
           <p:nvPr/>
         </p:nvSpPr>
@@ -9591,7 +9746,7 @@
       </p:sp>
       <p:sp>
         <p:nvSpPr>
-          <p:cNvPr id="14" name="Text 11"/>
+          <p:cNvPr id="15" name="Text 12"/>
           <p:cNvSpPr/>
           <p:nvPr/>
         </p:nvSpPr>
@@ -9630,7 +9785,7 @@
       </p:sp>
       <p:sp>
         <p:nvSpPr>
-          <p:cNvPr id="15" name="Shape 12"/>
+          <p:cNvPr id="16" name="Shape 13"/>
           <p:cNvSpPr/>
           <p:nvPr/>
         </p:nvSpPr>
@@ -9653,7 +9808,7 @@
       </p:sp>
       <p:sp>
         <p:nvSpPr>
-          <p:cNvPr id="16" name="Shape 13"/>
+          <p:cNvPr id="17" name="Shape 14"/>
           <p:cNvSpPr/>
           <p:nvPr/>
         </p:nvSpPr>
@@ -9673,7 +9828,7 @@
       </p:sp>
       <p:sp>
         <p:nvSpPr>
-          <p:cNvPr id="17" name="Shape 14"/>
+          <p:cNvPr id="18" name="Shape 15"/>
           <p:cNvSpPr/>
           <p:nvPr/>
         </p:nvSpPr>
@@ -9695,7 +9850,7 @@
       </p:sp>
       <p:sp>
         <p:nvSpPr>
-          <p:cNvPr id="18" name="Text 15"/>
+          <p:cNvPr id="19" name="Text 16"/>
           <p:cNvSpPr/>
           <p:nvPr/>
         </p:nvSpPr>
@@ -9734,7 +9889,7 @@
       </p:sp>
       <p:sp>
         <p:nvSpPr>
-          <p:cNvPr id="19" name="Shape 16"/>
+          <p:cNvPr id="20" name="Shape 17"/>
           <p:cNvSpPr/>
           <p:nvPr/>
         </p:nvSpPr>
@@ -9756,7 +9911,7 @@
       </p:sp>
       <p:sp>
         <p:nvSpPr>
-          <p:cNvPr id="20" name="Text 17"/>
+          <p:cNvPr id="21" name="Text 18"/>
           <p:cNvSpPr/>
           <p:nvPr/>
         </p:nvSpPr>
@@ -9795,7 +9950,7 @@
       </p:sp>
       <p:sp>
         <p:nvSpPr>
-          <p:cNvPr id="21" name="Text 18"/>
+          <p:cNvPr id="22" name="Text 19"/>
           <p:cNvSpPr/>
           <p:nvPr/>
         </p:nvSpPr>
@@ -9847,7 +10002,7 @@
         </p:nvSpPr>
         <p:spPr>
           <a:xfrm>
-            <a:off x="11368735" y="6437376"/>
+            <a:off x="11368735" y="6327648"/>
             <a:ext cx="365760" cy="274320"/>
           </a:xfrm>
           <a:prstGeom prst="rect">
@@ -9894,13 +10049,6 @@
 <file path=ppt/slides/slide17.xml><?xml version="1.0" encoding="utf-8"?>
 <p:sld xmlns:a="http://schemas.openxmlformats.org/drawingml/2006/main" xmlns:r="http://schemas.openxmlformats.org/officeDocument/2006/relationships" xmlns:p="http://schemas.openxmlformats.org/presentationml/2006/main">
   <p:cSld name="Slide 17">
-    <p:bg>
-      <p:bgPr>
-        <a:solidFill>
-          <a:srgbClr val="FFFFFF"/>
-        </a:solidFill>
-      </p:bgPr>
-    </p:bg>
     <p:spTree>
       <p:nvGrpSpPr>
         <p:cNvPr id="1" name=""/>
@@ -9917,7 +10065,29 @@
       </p:grpSpPr>
       <p:sp>
         <p:nvSpPr>
-          <p:cNvPr id="2" name="Text 0"/>
+          <p:cNvPr id="2" name="Shape 0"/>
+          <p:cNvSpPr/>
+          <p:nvPr/>
+        </p:nvSpPr>
+        <p:spPr>
+          <a:xfrm>
+            <a:off x="231343" y="194767"/>
+            <a:ext cx="11716207" cy="6473952"/>
+          </a:xfrm>
+          <a:prstGeom prst="roundRect">
+            <a:avLst>
+              <a:gd name="adj" fmla="val 3107"/>
+            </a:avLst>
+          </a:prstGeom>
+          <a:solidFill>
+            <a:srgbClr val="FFFFFF"/>
+          </a:solidFill>
+          <a:ln/>
+        </p:spPr>
+      </p:sp>
+      <p:sp>
+        <p:nvSpPr>
+          <p:cNvPr id="3" name="Text 1"/>
           <p:cNvSpPr/>
           <p:nvPr/>
         </p:nvSpPr>
@@ -9956,7 +10126,7 @@
       </p:sp>
       <p:sp>
         <p:nvSpPr>
-          <p:cNvPr id="3" name="Text 1"/>
+          <p:cNvPr id="4" name="Text 2"/>
           <p:cNvSpPr/>
           <p:nvPr/>
         </p:nvSpPr>
@@ -9995,7 +10165,7 @@
       </p:sp>
       <p:sp>
         <p:nvSpPr>
-          <p:cNvPr id="4" name="Shape 2"/>
+          <p:cNvPr id="5" name="Shape 3"/>
           <p:cNvSpPr/>
           <p:nvPr/>
         </p:nvSpPr>
@@ -10017,7 +10187,7 @@
       </p:sp>
       <p:sp>
         <p:nvSpPr>
-          <p:cNvPr id="5" name="Text 3"/>
+          <p:cNvPr id="6" name="Text 4"/>
           <p:cNvSpPr/>
           <p:nvPr/>
         </p:nvSpPr>
@@ -10056,7 +10226,7 @@
       </p:sp>
       <p:sp>
         <p:nvSpPr>
-          <p:cNvPr id="6" name="Shape 4"/>
+          <p:cNvPr id="7" name="Shape 5"/>
           <p:cNvSpPr/>
           <p:nvPr/>
         </p:nvSpPr>
@@ -10078,7 +10248,7 @@
       </p:sp>
       <p:sp>
         <p:nvSpPr>
-          <p:cNvPr id="7" name="Text 5"/>
+          <p:cNvPr id="8" name="Text 6"/>
           <p:cNvSpPr/>
           <p:nvPr/>
         </p:nvSpPr>
@@ -10117,7 +10287,7 @@
       </p:sp>
       <p:pic>
         <p:nvPicPr>
-          <p:cNvPr id="8" name="Image 0" descr="preencoded.png">    </p:cNvPr>
+          <p:cNvPr id="9" name="Image 0" descr="preencoded.png">    </p:cNvPr>
           <p:cNvPicPr>
             <a:picLocks noChangeAspect="1"/>
           </p:cNvPicPr>
@@ -10131,7 +10301,7 @@
         </p:blipFill>
         <p:spPr>
           <a:xfrm>
-            <a:off x="566928" y="6254496"/>
+            <a:off x="566928" y="6126480"/>
             <a:ext cx="1481328" cy="457200"/>
           </a:xfrm>
           <a:prstGeom prst="rect">
@@ -10141,7 +10311,7 @@
       </p:pic>
       <p:sp>
         <p:nvSpPr>
-          <p:cNvPr id="9" name="Shape 6"/>
+          <p:cNvPr id="10" name="Shape 7"/>
           <p:cNvSpPr/>
           <p:nvPr/>
         </p:nvSpPr>
@@ -10163,7 +10333,7 @@
       </p:sp>
       <p:sp>
         <p:nvSpPr>
-          <p:cNvPr id="10" name="Shape 7"/>
+          <p:cNvPr id="11" name="Shape 8"/>
           <p:cNvSpPr/>
           <p:nvPr/>
         </p:nvSpPr>
@@ -10183,7 +10353,7 @@
       </p:sp>
       <p:sp>
         <p:nvSpPr>
-          <p:cNvPr id="11" name="Text 8"/>
+          <p:cNvPr id="12" name="Text 9"/>
           <p:cNvSpPr/>
           <p:nvPr/>
         </p:nvSpPr>
@@ -10222,7 +10392,7 @@
       </p:sp>
       <p:sp>
         <p:nvSpPr>
-          <p:cNvPr id="12" name="Text 9"/>
+          <p:cNvPr id="13" name="Text 10"/>
           <p:cNvSpPr/>
           <p:nvPr/>
         </p:nvSpPr>
@@ -10261,7 +10431,7 @@
       </p:sp>
       <p:sp>
         <p:nvSpPr>
-          <p:cNvPr id="13" name="Text 10"/>
+          <p:cNvPr id="14" name="Text 11"/>
           <p:cNvSpPr/>
           <p:nvPr/>
         </p:nvSpPr>
@@ -10303,7 +10473,7 @@
       </p:sp>
       <p:sp>
         <p:nvSpPr>
-          <p:cNvPr id="14" name="Shape 11"/>
+          <p:cNvPr id="15" name="Shape 12"/>
           <p:cNvSpPr/>
           <p:nvPr/>
         </p:nvSpPr>
@@ -10325,7 +10495,7 @@
       </p:sp>
       <p:sp>
         <p:nvSpPr>
-          <p:cNvPr id="15" name="Shape 12"/>
+          <p:cNvPr id="16" name="Shape 13"/>
           <p:cNvSpPr/>
           <p:nvPr/>
         </p:nvSpPr>
@@ -10345,7 +10515,7 @@
       </p:sp>
       <p:sp>
         <p:nvSpPr>
-          <p:cNvPr id="16" name="Text 13"/>
+          <p:cNvPr id="17" name="Text 14"/>
           <p:cNvSpPr/>
           <p:nvPr/>
         </p:nvSpPr>
@@ -10384,7 +10554,7 @@
       </p:sp>
       <p:sp>
         <p:nvSpPr>
-          <p:cNvPr id="17" name="Text 14"/>
+          <p:cNvPr id="18" name="Text 15"/>
           <p:cNvSpPr/>
           <p:nvPr/>
         </p:nvSpPr>
@@ -10423,7 +10593,7 @@
       </p:sp>
       <p:sp>
         <p:nvSpPr>
-          <p:cNvPr id="18" name="Text 15"/>
+          <p:cNvPr id="19" name="Text 16"/>
           <p:cNvSpPr/>
           <p:nvPr/>
         </p:nvSpPr>
@@ -10465,7 +10635,7 @@
       </p:sp>
       <p:sp>
         <p:nvSpPr>
-          <p:cNvPr id="19" name="Shape 16"/>
+          <p:cNvPr id="20" name="Shape 17"/>
           <p:cNvSpPr/>
           <p:nvPr/>
         </p:nvSpPr>
@@ -10487,7 +10657,7 @@
       </p:sp>
       <p:sp>
         <p:nvSpPr>
-          <p:cNvPr id="20" name="Shape 17"/>
+          <p:cNvPr id="21" name="Shape 18"/>
           <p:cNvSpPr/>
           <p:nvPr/>
         </p:nvSpPr>
@@ -10507,7 +10677,7 @@
       </p:sp>
       <p:sp>
         <p:nvSpPr>
-          <p:cNvPr id="21" name="Text 18"/>
+          <p:cNvPr id="22" name="Text 19"/>
           <p:cNvSpPr/>
           <p:nvPr/>
         </p:nvSpPr>
@@ -10546,7 +10716,7 @@
       </p:sp>
       <p:sp>
         <p:nvSpPr>
-          <p:cNvPr id="22" name="Text 19"/>
+          <p:cNvPr id="23" name="Text 20"/>
           <p:cNvSpPr/>
           <p:nvPr/>
         </p:nvSpPr>
@@ -10585,7 +10755,7 @@
       </p:sp>
       <p:sp>
         <p:nvSpPr>
-          <p:cNvPr id="23" name="Text 20"/>
+          <p:cNvPr id="24" name="Text 21"/>
           <p:cNvSpPr/>
           <p:nvPr/>
         </p:nvSpPr>
@@ -10627,7 +10797,7 @@
       </p:sp>
       <p:sp>
         <p:nvSpPr>
-          <p:cNvPr id="24" name="Shape 21"/>
+          <p:cNvPr id="25" name="Shape 22"/>
           <p:cNvSpPr/>
           <p:nvPr/>
         </p:nvSpPr>
@@ -10654,7 +10824,7 @@
       </p:sp>
       <p:sp>
         <p:nvSpPr>
-          <p:cNvPr id="25" name="Text 22"/>
+          <p:cNvPr id="26" name="Text 23"/>
           <p:cNvSpPr/>
           <p:nvPr/>
         </p:nvSpPr>
@@ -10693,7 +10863,7 @@
       </p:sp>
       <p:sp>
         <p:nvSpPr>
-          <p:cNvPr id="26" name="Shape 23"/>
+          <p:cNvPr id="27" name="Shape 24"/>
           <p:cNvSpPr/>
           <p:nvPr/>
         </p:nvSpPr>
@@ -10720,7 +10890,7 @@
       </p:sp>
       <p:sp>
         <p:nvSpPr>
-          <p:cNvPr id="27" name="Text 24"/>
+          <p:cNvPr id="28" name="Text 25"/>
           <p:cNvSpPr/>
           <p:nvPr/>
         </p:nvSpPr>
@@ -10759,7 +10929,7 @@
       </p:sp>
       <p:sp>
         <p:nvSpPr>
-          <p:cNvPr id="28" name="Shape 25"/>
+          <p:cNvPr id="29" name="Shape 26"/>
           <p:cNvSpPr/>
           <p:nvPr/>
         </p:nvSpPr>
@@ -10786,7 +10956,7 @@
       </p:sp>
       <p:sp>
         <p:nvSpPr>
-          <p:cNvPr id="29" name="Text 26"/>
+          <p:cNvPr id="30" name="Text 27"/>
           <p:cNvSpPr/>
           <p:nvPr/>
         </p:nvSpPr>
@@ -10825,7 +10995,7 @@
       </p:sp>
       <p:sp>
         <p:nvSpPr>
-          <p:cNvPr id="30" name="Text 27"/>
+          <p:cNvPr id="31" name="Text 28"/>
           <p:cNvSpPr/>
           <p:nvPr/>
         </p:nvSpPr>
@@ -10864,7 +11034,7 @@
       </p:sp>
       <p:sp>
         <p:nvSpPr>
-          <p:cNvPr id="31" name="Shape 28"/>
+          <p:cNvPr id="32" name="Shape 29"/>
           <p:cNvSpPr/>
           <p:nvPr/>
         </p:nvSpPr>
@@ -10891,7 +11061,7 @@
       </p:sp>
       <p:sp>
         <p:nvSpPr>
-          <p:cNvPr id="32" name="Text 29"/>
+          <p:cNvPr id="33" name="Text 30"/>
           <p:cNvSpPr/>
           <p:nvPr/>
         </p:nvSpPr>
@@ -10930,7 +11100,7 @@
       </p:sp>
       <p:sp>
         <p:nvSpPr>
-          <p:cNvPr id="33" name="Text 30"/>
+          <p:cNvPr id="34" name="Text 31"/>
           <p:cNvSpPr/>
           <p:nvPr/>
         </p:nvSpPr>
@@ -10972,7 +11142,7 @@
       </p:sp>
       <p:sp>
         <p:nvSpPr>
-          <p:cNvPr id="34" name="Shape 31"/>
+          <p:cNvPr id="35" name="Shape 32"/>
           <p:cNvSpPr/>
           <p:nvPr/>
         </p:nvSpPr>
@@ -10994,7 +11164,7 @@
       </p:sp>
       <p:sp>
         <p:nvSpPr>
-          <p:cNvPr id="35" name="Text 32"/>
+          <p:cNvPr id="36" name="Text 33"/>
           <p:cNvSpPr/>
           <p:nvPr/>
         </p:nvSpPr>
@@ -11033,7 +11203,7 @@
       </p:sp>
       <p:sp>
         <p:nvSpPr>
-          <p:cNvPr id="36" name="Text 33"/>
+          <p:cNvPr id="37" name="Text 34"/>
           <p:cNvSpPr/>
           <p:nvPr/>
         </p:nvSpPr>
@@ -11085,7 +11255,7 @@
         </p:nvSpPr>
         <p:spPr>
           <a:xfrm>
-            <a:off x="11368735" y="6437376"/>
+            <a:off x="11368735" y="6327648"/>
             <a:ext cx="365760" cy="274320"/>
           </a:xfrm>
           <a:prstGeom prst="rect">
@@ -11132,13 +11302,6 @@
 <file path=ppt/slides/slide18.xml><?xml version="1.0" encoding="utf-8"?>
 <p:sld xmlns:a="http://schemas.openxmlformats.org/drawingml/2006/main" xmlns:r="http://schemas.openxmlformats.org/officeDocument/2006/relationships" xmlns:p="http://schemas.openxmlformats.org/presentationml/2006/main">
   <p:cSld name="Slide 18">
-    <p:bg>
-      <p:bgPr>
-        <a:solidFill>
-          <a:srgbClr val="FFFFFF"/>
-        </a:solidFill>
-      </p:bgPr>
-    </p:bg>
     <p:spTree>
       <p:nvGrpSpPr>
         <p:cNvPr id="1" name=""/>
@@ -11155,7 +11318,29 @@
       </p:grpSpPr>
       <p:sp>
         <p:nvSpPr>
-          <p:cNvPr id="2" name="Text 0"/>
+          <p:cNvPr id="2" name="Shape 0"/>
+          <p:cNvSpPr/>
+          <p:nvPr/>
+        </p:nvSpPr>
+        <p:spPr>
+          <a:xfrm>
+            <a:off x="231343" y="194767"/>
+            <a:ext cx="11716207" cy="6473952"/>
+          </a:xfrm>
+          <a:prstGeom prst="roundRect">
+            <a:avLst>
+              <a:gd name="adj" fmla="val 3107"/>
+            </a:avLst>
+          </a:prstGeom>
+          <a:solidFill>
+            <a:srgbClr val="FFFFFF"/>
+          </a:solidFill>
+          <a:ln/>
+        </p:spPr>
+      </p:sp>
+      <p:sp>
+        <p:nvSpPr>
+          <p:cNvPr id="3" name="Text 1"/>
           <p:cNvSpPr/>
           <p:nvPr/>
         </p:nvSpPr>
@@ -11194,7 +11379,7 @@
       </p:sp>
       <p:sp>
         <p:nvSpPr>
-          <p:cNvPr id="3" name="Shape 1"/>
+          <p:cNvPr id="4" name="Shape 2"/>
           <p:cNvSpPr/>
           <p:nvPr/>
         </p:nvSpPr>
@@ -11216,7 +11401,7 @@
       </p:sp>
       <p:sp>
         <p:nvSpPr>
-          <p:cNvPr id="4" name="Text 2"/>
+          <p:cNvPr id="5" name="Text 3"/>
           <p:cNvSpPr/>
           <p:nvPr/>
         </p:nvSpPr>
@@ -11255,7 +11440,7 @@
       </p:sp>
       <p:pic>
         <p:nvPicPr>
-          <p:cNvPr id="5" name="Image 0" descr="preencoded.png">    </p:cNvPr>
+          <p:cNvPr id="6" name="Image 0" descr="preencoded.png">    </p:cNvPr>
           <p:cNvPicPr>
             <a:picLocks noChangeAspect="1"/>
           </p:cNvPicPr>
@@ -11269,7 +11454,7 @@
         </p:blipFill>
         <p:spPr>
           <a:xfrm>
-            <a:off x="566928" y="6254496"/>
+            <a:off x="566928" y="6126480"/>
             <a:ext cx="1481328" cy="457200"/>
           </a:xfrm>
           <a:prstGeom prst="rect">
@@ -11279,7 +11464,7 @@
       </p:pic>
       <p:sp>
         <p:nvSpPr>
-          <p:cNvPr id="6" name="Shape 3"/>
+          <p:cNvPr id="7" name="Shape 4"/>
           <p:cNvSpPr/>
           <p:nvPr/>
         </p:nvSpPr>
@@ -11301,7 +11486,7 @@
       </p:sp>
       <p:sp>
         <p:nvSpPr>
-          <p:cNvPr id="7" name="Shape 4"/>
+          <p:cNvPr id="8" name="Shape 5"/>
           <p:cNvSpPr/>
           <p:nvPr/>
         </p:nvSpPr>
@@ -11321,7 +11506,7 @@
       </p:sp>
       <p:sp>
         <p:nvSpPr>
-          <p:cNvPr id="8" name="Text 5"/>
+          <p:cNvPr id="9" name="Text 6"/>
           <p:cNvSpPr/>
           <p:nvPr/>
         </p:nvSpPr>
@@ -11360,7 +11545,7 @@
       </p:sp>
       <p:sp>
         <p:nvSpPr>
-          <p:cNvPr id="9" name="Text 6"/>
+          <p:cNvPr id="10" name="Text 7"/>
           <p:cNvSpPr/>
           <p:nvPr/>
         </p:nvSpPr>
@@ -11399,7 +11584,7 @@
       </p:sp>
       <p:sp>
         <p:nvSpPr>
-          <p:cNvPr id="10" name="Text 7"/>
+          <p:cNvPr id="11" name="Text 8"/>
           <p:cNvSpPr/>
           <p:nvPr/>
         </p:nvSpPr>
@@ -11441,7 +11626,7 @@
       </p:sp>
       <p:sp>
         <p:nvSpPr>
-          <p:cNvPr id="11" name="Shape 8"/>
+          <p:cNvPr id="12" name="Shape 9"/>
           <p:cNvSpPr/>
           <p:nvPr/>
         </p:nvSpPr>
@@ -11463,7 +11648,7 @@
       </p:sp>
       <p:sp>
         <p:nvSpPr>
-          <p:cNvPr id="12" name="Shape 9"/>
+          <p:cNvPr id="13" name="Shape 10"/>
           <p:cNvSpPr/>
           <p:nvPr/>
         </p:nvSpPr>
@@ -11483,7 +11668,7 @@
       </p:sp>
       <p:sp>
         <p:nvSpPr>
-          <p:cNvPr id="13" name="Text 10"/>
+          <p:cNvPr id="14" name="Text 11"/>
           <p:cNvSpPr/>
           <p:nvPr/>
         </p:nvSpPr>
@@ -11522,7 +11707,7 @@
       </p:sp>
       <p:sp>
         <p:nvSpPr>
-          <p:cNvPr id="14" name="Text 11"/>
+          <p:cNvPr id="15" name="Text 12"/>
           <p:cNvSpPr/>
           <p:nvPr/>
         </p:nvSpPr>
@@ -11561,7 +11746,7 @@
       </p:sp>
       <p:sp>
         <p:nvSpPr>
-          <p:cNvPr id="15" name="Text 12"/>
+          <p:cNvPr id="16" name="Text 13"/>
           <p:cNvSpPr/>
           <p:nvPr/>
         </p:nvSpPr>
@@ -11603,7 +11788,7 @@
       </p:sp>
       <p:sp>
         <p:nvSpPr>
-          <p:cNvPr id="16" name="Shape 13"/>
+          <p:cNvPr id="17" name="Shape 14"/>
           <p:cNvSpPr/>
           <p:nvPr/>
         </p:nvSpPr>
@@ -11625,7 +11810,7 @@
       </p:sp>
       <p:sp>
         <p:nvSpPr>
-          <p:cNvPr id="17" name="Shape 14"/>
+          <p:cNvPr id="18" name="Shape 15"/>
           <p:cNvSpPr/>
           <p:nvPr/>
         </p:nvSpPr>
@@ -11645,7 +11830,7 @@
       </p:sp>
       <p:sp>
         <p:nvSpPr>
-          <p:cNvPr id="18" name="Text 15"/>
+          <p:cNvPr id="19" name="Text 16"/>
           <p:cNvSpPr/>
           <p:nvPr/>
         </p:nvSpPr>
@@ -11684,7 +11869,7 @@
       </p:sp>
       <p:sp>
         <p:nvSpPr>
-          <p:cNvPr id="19" name="Text 16"/>
+          <p:cNvPr id="20" name="Text 17"/>
           <p:cNvSpPr/>
           <p:nvPr/>
         </p:nvSpPr>
@@ -11723,7 +11908,7 @@
       </p:sp>
       <p:sp>
         <p:nvSpPr>
-          <p:cNvPr id="20" name="Text 17"/>
+          <p:cNvPr id="21" name="Text 18"/>
           <p:cNvSpPr/>
           <p:nvPr/>
         </p:nvSpPr>
@@ -11765,7 +11950,7 @@
       </p:sp>
       <p:sp>
         <p:nvSpPr>
-          <p:cNvPr id="21" name="Shape 18"/>
+          <p:cNvPr id="22" name="Shape 19"/>
           <p:cNvSpPr/>
           <p:nvPr/>
         </p:nvSpPr>
@@ -11787,7 +11972,7 @@
       </p:sp>
       <p:sp>
         <p:nvSpPr>
-          <p:cNvPr id="22" name="Shape 19"/>
+          <p:cNvPr id="23" name="Shape 20"/>
           <p:cNvSpPr/>
           <p:nvPr/>
         </p:nvSpPr>
@@ -11807,7 +11992,7 @@
       </p:sp>
       <p:sp>
         <p:nvSpPr>
-          <p:cNvPr id="23" name="Text 20"/>
+          <p:cNvPr id="24" name="Text 21"/>
           <p:cNvSpPr/>
           <p:nvPr/>
         </p:nvSpPr>
@@ -11846,7 +12031,7 @@
       </p:sp>
       <p:sp>
         <p:nvSpPr>
-          <p:cNvPr id="24" name="Text 21"/>
+          <p:cNvPr id="25" name="Text 22"/>
           <p:cNvSpPr/>
           <p:nvPr/>
         </p:nvSpPr>
@@ -11885,7 +12070,7 @@
       </p:sp>
       <p:sp>
         <p:nvSpPr>
-          <p:cNvPr id="25" name="Text 22"/>
+          <p:cNvPr id="26" name="Text 23"/>
           <p:cNvSpPr/>
           <p:nvPr/>
         </p:nvSpPr>
@@ -11927,7 +12112,7 @@
       </p:sp>
       <p:sp>
         <p:nvSpPr>
-          <p:cNvPr id="26" name="Shape 23"/>
+          <p:cNvPr id="27" name="Shape 24"/>
           <p:cNvSpPr/>
           <p:nvPr/>
         </p:nvSpPr>
@@ -11949,7 +12134,7 @@
       </p:sp>
       <p:sp>
         <p:nvSpPr>
-          <p:cNvPr id="27" name="Text 24"/>
+          <p:cNvPr id="28" name="Text 25"/>
           <p:cNvSpPr/>
           <p:nvPr/>
         </p:nvSpPr>
@@ -11988,7 +12173,7 @@
       </p:sp>
       <p:sp>
         <p:nvSpPr>
-          <p:cNvPr id="28" name="Text 25"/>
+          <p:cNvPr id="29" name="Text 26"/>
           <p:cNvSpPr/>
           <p:nvPr/>
         </p:nvSpPr>
@@ -12040,7 +12225,7 @@
         </p:nvSpPr>
         <p:spPr>
           <a:xfrm>
-            <a:off x="11368735" y="6437376"/>
+            <a:off x="11368735" y="6327648"/>
             <a:ext cx="365760" cy="274320"/>
           </a:xfrm>
           <a:prstGeom prst="rect">
@@ -12087,13 +12272,6 @@
 <file path=ppt/slides/slide19.xml><?xml version="1.0" encoding="utf-8"?>
 <p:sld xmlns:a="http://schemas.openxmlformats.org/drawingml/2006/main" xmlns:r="http://schemas.openxmlformats.org/officeDocument/2006/relationships" xmlns:p="http://schemas.openxmlformats.org/presentationml/2006/main">
   <p:cSld name="Slide 19">
-    <p:bg>
-      <p:bgPr>
-        <a:solidFill>
-          <a:srgbClr val="FFFFFF"/>
-        </a:solidFill>
-      </p:bgPr>
-    </p:bg>
     <p:spTree>
       <p:nvGrpSpPr>
         <p:cNvPr id="1" name=""/>
@@ -12110,7 +12288,29 @@
       </p:grpSpPr>
       <p:sp>
         <p:nvSpPr>
-          <p:cNvPr id="2" name="Text 0"/>
+          <p:cNvPr id="2" name="Shape 0"/>
+          <p:cNvSpPr/>
+          <p:nvPr/>
+        </p:nvSpPr>
+        <p:spPr>
+          <a:xfrm>
+            <a:off x="231343" y="194767"/>
+            <a:ext cx="11716207" cy="6473952"/>
+          </a:xfrm>
+          <a:prstGeom prst="roundRect">
+            <a:avLst>
+              <a:gd name="adj" fmla="val 3107"/>
+            </a:avLst>
+          </a:prstGeom>
+          <a:solidFill>
+            <a:srgbClr val="FFFFFF"/>
+          </a:solidFill>
+          <a:ln/>
+        </p:spPr>
+      </p:sp>
+      <p:sp>
+        <p:nvSpPr>
+          <p:cNvPr id="3" name="Text 1"/>
           <p:cNvSpPr/>
           <p:nvPr/>
         </p:nvSpPr>
@@ -12149,7 +12349,7 @@
       </p:sp>
       <p:sp>
         <p:nvSpPr>
-          <p:cNvPr id="3" name="Shape 1"/>
+          <p:cNvPr id="4" name="Shape 2"/>
           <p:cNvSpPr/>
           <p:nvPr/>
         </p:nvSpPr>
@@ -12171,7 +12371,7 @@
       </p:sp>
       <p:sp>
         <p:nvSpPr>
-          <p:cNvPr id="4" name="Text 2"/>
+          <p:cNvPr id="5" name="Text 3"/>
           <p:cNvSpPr/>
           <p:nvPr/>
         </p:nvSpPr>
@@ -12210,7 +12410,7 @@
       </p:sp>
       <p:pic>
         <p:nvPicPr>
-          <p:cNvPr id="5" name="Image 0" descr="preencoded.png">    </p:cNvPr>
+          <p:cNvPr id="6" name="Image 0" descr="preencoded.png">    </p:cNvPr>
           <p:cNvPicPr>
             <a:picLocks noChangeAspect="1"/>
           </p:cNvPicPr>
@@ -12224,7 +12424,7 @@
         </p:blipFill>
         <p:spPr>
           <a:xfrm>
-            <a:off x="566928" y="6254496"/>
+            <a:off x="566928" y="6126480"/>
             <a:ext cx="1481328" cy="457200"/>
           </a:xfrm>
           <a:prstGeom prst="rect">
@@ -12234,7 +12434,7 @@
       </p:pic>
       <p:sp>
         <p:nvSpPr>
-          <p:cNvPr id="6" name="Shape 3"/>
+          <p:cNvPr id="7" name="Shape 4"/>
           <p:cNvSpPr/>
           <p:nvPr/>
         </p:nvSpPr>
@@ -12254,7 +12454,7 @@
       </p:sp>
       <p:sp>
         <p:nvSpPr>
-          <p:cNvPr id="7" name="Text 4"/>
+          <p:cNvPr id="8" name="Text 5"/>
           <p:cNvSpPr/>
           <p:nvPr/>
         </p:nvSpPr>
@@ -12293,7 +12493,7 @@
       </p:sp>
       <p:sp>
         <p:nvSpPr>
-          <p:cNvPr id="8" name="Text 5"/>
+          <p:cNvPr id="9" name="Text 6"/>
           <p:cNvSpPr/>
           <p:nvPr/>
         </p:nvSpPr>
@@ -12346,7 +12546,7 @@
       </p:sp>
       <p:sp>
         <p:nvSpPr>
-          <p:cNvPr id="9" name="Shape 6"/>
+          <p:cNvPr id="10" name="Shape 7"/>
           <p:cNvSpPr/>
           <p:nvPr/>
         </p:nvSpPr>
@@ -12366,7 +12566,7 @@
       </p:sp>
       <p:sp>
         <p:nvSpPr>
-          <p:cNvPr id="10" name="Text 7"/>
+          <p:cNvPr id="11" name="Text 8"/>
           <p:cNvSpPr/>
           <p:nvPr/>
         </p:nvSpPr>
@@ -12405,7 +12605,7 @@
       </p:sp>
       <p:sp>
         <p:nvSpPr>
-          <p:cNvPr id="11" name="Text 8"/>
+          <p:cNvPr id="12" name="Text 9"/>
           <p:cNvSpPr/>
           <p:nvPr/>
         </p:nvSpPr>
@@ -12458,7 +12658,7 @@
       </p:sp>
       <p:sp>
         <p:nvSpPr>
-          <p:cNvPr id="12" name="Shape 9"/>
+          <p:cNvPr id="13" name="Shape 10"/>
           <p:cNvSpPr/>
           <p:nvPr/>
         </p:nvSpPr>
@@ -12478,7 +12678,7 @@
       </p:sp>
       <p:sp>
         <p:nvSpPr>
-          <p:cNvPr id="13" name="Text 10"/>
+          <p:cNvPr id="14" name="Text 11"/>
           <p:cNvSpPr/>
           <p:nvPr/>
         </p:nvSpPr>
@@ -12517,7 +12717,7 @@
       </p:sp>
       <p:sp>
         <p:nvSpPr>
-          <p:cNvPr id="14" name="Text 11"/>
+          <p:cNvPr id="15" name="Text 12"/>
           <p:cNvSpPr/>
           <p:nvPr/>
         </p:nvSpPr>
@@ -12570,7 +12770,7 @@
       </p:sp>
       <p:sp>
         <p:nvSpPr>
-          <p:cNvPr id="15" name="Shape 12"/>
+          <p:cNvPr id="16" name="Shape 13"/>
           <p:cNvSpPr/>
           <p:nvPr/>
         </p:nvSpPr>
@@ -12590,7 +12790,7 @@
       </p:sp>
       <p:sp>
         <p:nvSpPr>
-          <p:cNvPr id="16" name="Text 13"/>
+          <p:cNvPr id="17" name="Text 14"/>
           <p:cNvSpPr/>
           <p:nvPr/>
         </p:nvSpPr>
@@ -12629,7 +12829,7 @@
       </p:sp>
       <p:sp>
         <p:nvSpPr>
-          <p:cNvPr id="17" name="Text 14"/>
+          <p:cNvPr id="18" name="Text 15"/>
           <p:cNvSpPr/>
           <p:nvPr/>
         </p:nvSpPr>
@@ -12682,7 +12882,7 @@
       </p:sp>
       <p:sp>
         <p:nvSpPr>
-          <p:cNvPr id="18" name="Shape 15"/>
+          <p:cNvPr id="19" name="Shape 16"/>
           <p:cNvSpPr/>
           <p:nvPr/>
         </p:nvSpPr>
@@ -12702,7 +12902,7 @@
       </p:sp>
       <p:sp>
         <p:nvSpPr>
-          <p:cNvPr id="19" name="Text 16"/>
+          <p:cNvPr id="20" name="Text 17"/>
           <p:cNvSpPr/>
           <p:nvPr/>
         </p:nvSpPr>
@@ -12741,7 +12941,7 @@
       </p:sp>
       <p:sp>
         <p:nvSpPr>
-          <p:cNvPr id="20" name="Text 17"/>
+          <p:cNvPr id="21" name="Text 18"/>
           <p:cNvSpPr/>
           <p:nvPr/>
         </p:nvSpPr>
@@ -12804,7 +13004,7 @@
         </p:nvSpPr>
         <p:spPr>
           <a:xfrm>
-            <a:off x="11368735" y="6437376"/>
+            <a:off x="11368735" y="6327648"/>
             <a:ext cx="365760" cy="274320"/>
           </a:xfrm>
           <a:prstGeom prst="rect">
@@ -12851,13 +13051,6 @@
 <file path=ppt/slides/slide2.xml><?xml version="1.0" encoding="utf-8"?>
 <p:sld xmlns:a="http://schemas.openxmlformats.org/drawingml/2006/main" xmlns:r="http://schemas.openxmlformats.org/officeDocument/2006/relationships" xmlns:p="http://schemas.openxmlformats.org/presentationml/2006/main">
   <p:cSld name="Slide 2">
-    <p:bg>
-      <p:bgPr>
-        <a:solidFill>
-          <a:srgbClr val="FFFFFF"/>
-        </a:solidFill>
-      </p:bgPr>
-    </p:bg>
     <p:spTree>
       <p:nvGrpSpPr>
         <p:cNvPr id="1" name=""/>
@@ -12874,7 +13067,29 @@
       </p:grpSpPr>
       <p:sp>
         <p:nvSpPr>
-          <p:cNvPr id="2" name="Text 0"/>
+          <p:cNvPr id="2" name="Shape 0"/>
+          <p:cNvSpPr/>
+          <p:nvPr/>
+        </p:nvSpPr>
+        <p:spPr>
+          <a:xfrm>
+            <a:off x="231343" y="194767"/>
+            <a:ext cx="11716207" cy="6473952"/>
+          </a:xfrm>
+          <a:prstGeom prst="roundRect">
+            <a:avLst>
+              <a:gd name="adj" fmla="val 3107"/>
+            </a:avLst>
+          </a:prstGeom>
+          <a:solidFill>
+            <a:srgbClr val="FFFFFF"/>
+          </a:solidFill>
+          <a:ln/>
+        </p:spPr>
+      </p:sp>
+      <p:sp>
+        <p:nvSpPr>
+          <p:cNvPr id="3" name="Text 1"/>
           <p:cNvSpPr/>
           <p:nvPr/>
         </p:nvSpPr>
@@ -12913,7 +13128,7 @@
       </p:sp>
       <p:sp>
         <p:nvSpPr>
-          <p:cNvPr id="3" name="Text 1"/>
+          <p:cNvPr id="4" name="Text 2"/>
           <p:cNvSpPr/>
           <p:nvPr/>
         </p:nvSpPr>
@@ -12955,7 +13170,7 @@
       </p:sp>
       <p:sp>
         <p:nvSpPr>
-          <p:cNvPr id="4" name="Shape 2"/>
+          <p:cNvPr id="5" name="Shape 3"/>
           <p:cNvSpPr/>
           <p:nvPr/>
         </p:nvSpPr>
@@ -12977,7 +13192,7 @@
       </p:sp>
       <p:sp>
         <p:nvSpPr>
-          <p:cNvPr id="5" name="Text 3"/>
+          <p:cNvPr id="6" name="Text 4"/>
           <p:cNvSpPr/>
           <p:nvPr/>
         </p:nvSpPr>
@@ -13016,7 +13231,7 @@
       </p:sp>
       <p:pic>
         <p:nvPicPr>
-          <p:cNvPr id="6" name="Image 0" descr="preencoded.png">    </p:cNvPr>
+          <p:cNvPr id="7" name="Image 0" descr="preencoded.png">    </p:cNvPr>
           <p:cNvPicPr>
             <a:picLocks noChangeAspect="1"/>
           </p:cNvPicPr>
@@ -13030,7 +13245,7 @@
         </p:blipFill>
         <p:spPr>
           <a:xfrm>
-            <a:off x="566928" y="6254496"/>
+            <a:off x="566928" y="6126480"/>
             <a:ext cx="1481328" cy="457200"/>
           </a:xfrm>
           <a:prstGeom prst="rect">
@@ -13040,7 +13255,7 @@
       </p:pic>
       <p:sp>
         <p:nvSpPr>
-          <p:cNvPr id="7" name="Shape 4"/>
+          <p:cNvPr id="8" name="Shape 5"/>
           <p:cNvSpPr/>
           <p:nvPr/>
         </p:nvSpPr>
@@ -13067,7 +13282,7 @@
       </p:sp>
       <p:sp>
         <p:nvSpPr>
-          <p:cNvPr id="8" name="Shape 5"/>
+          <p:cNvPr id="9" name="Shape 6"/>
           <p:cNvSpPr/>
           <p:nvPr/>
         </p:nvSpPr>
@@ -13087,7 +13302,7 @@
       </p:sp>
       <p:sp>
         <p:nvSpPr>
-          <p:cNvPr id="9" name="Text 6"/>
+          <p:cNvPr id="10" name="Text 7"/>
           <p:cNvSpPr/>
           <p:nvPr/>
         </p:nvSpPr>
@@ -13126,7 +13341,7 @@
       </p:sp>
       <p:sp>
         <p:nvSpPr>
-          <p:cNvPr id="10" name="Text 7"/>
+          <p:cNvPr id="11" name="Text 8"/>
           <p:cNvSpPr/>
           <p:nvPr/>
         </p:nvSpPr>
@@ -13165,7 +13380,7 @@
       </p:sp>
       <p:sp>
         <p:nvSpPr>
-          <p:cNvPr id="11" name="Text 8"/>
+          <p:cNvPr id="12" name="Text 9"/>
           <p:cNvSpPr/>
           <p:nvPr/>
         </p:nvSpPr>
@@ -13207,7 +13422,7 @@
       </p:sp>
       <p:sp>
         <p:nvSpPr>
-          <p:cNvPr id="12" name="Shape 9"/>
+          <p:cNvPr id="13" name="Shape 10"/>
           <p:cNvSpPr/>
           <p:nvPr/>
         </p:nvSpPr>
@@ -13234,7 +13449,7 @@
       </p:sp>
       <p:sp>
         <p:nvSpPr>
-          <p:cNvPr id="13" name="Shape 10"/>
+          <p:cNvPr id="14" name="Shape 11"/>
           <p:cNvSpPr/>
           <p:nvPr/>
         </p:nvSpPr>
@@ -13254,7 +13469,7 @@
       </p:sp>
       <p:sp>
         <p:nvSpPr>
-          <p:cNvPr id="14" name="Text 11"/>
+          <p:cNvPr id="15" name="Text 12"/>
           <p:cNvSpPr/>
           <p:nvPr/>
         </p:nvSpPr>
@@ -13293,7 +13508,7 @@
       </p:sp>
       <p:sp>
         <p:nvSpPr>
-          <p:cNvPr id="15" name="Text 12"/>
+          <p:cNvPr id="16" name="Text 13"/>
           <p:cNvSpPr/>
           <p:nvPr/>
         </p:nvSpPr>
@@ -13332,7 +13547,7 @@
       </p:sp>
       <p:sp>
         <p:nvSpPr>
-          <p:cNvPr id="16" name="Text 13"/>
+          <p:cNvPr id="17" name="Text 14"/>
           <p:cNvSpPr/>
           <p:nvPr/>
         </p:nvSpPr>
@@ -13374,7 +13589,7 @@
       </p:sp>
       <p:sp>
         <p:nvSpPr>
-          <p:cNvPr id="17" name="Shape 14"/>
+          <p:cNvPr id="18" name="Shape 15"/>
           <p:cNvSpPr/>
           <p:nvPr/>
         </p:nvSpPr>
@@ -13401,7 +13616,7 @@
       </p:sp>
       <p:sp>
         <p:nvSpPr>
-          <p:cNvPr id="18" name="Shape 15"/>
+          <p:cNvPr id="19" name="Shape 16"/>
           <p:cNvSpPr/>
           <p:nvPr/>
         </p:nvSpPr>
@@ -13421,7 +13636,7 @@
       </p:sp>
       <p:sp>
         <p:nvSpPr>
-          <p:cNvPr id="19" name="Text 16"/>
+          <p:cNvPr id="20" name="Text 17"/>
           <p:cNvSpPr/>
           <p:nvPr/>
         </p:nvSpPr>
@@ -13460,7 +13675,7 @@
       </p:sp>
       <p:sp>
         <p:nvSpPr>
-          <p:cNvPr id="20" name="Text 17"/>
+          <p:cNvPr id="21" name="Text 18"/>
           <p:cNvSpPr/>
           <p:nvPr/>
         </p:nvSpPr>
@@ -13499,7 +13714,7 @@
       </p:sp>
       <p:sp>
         <p:nvSpPr>
-          <p:cNvPr id="21" name="Text 18"/>
+          <p:cNvPr id="22" name="Text 19"/>
           <p:cNvSpPr/>
           <p:nvPr/>
         </p:nvSpPr>
@@ -13541,7 +13756,7 @@
       </p:sp>
       <p:sp>
         <p:nvSpPr>
-          <p:cNvPr id="22" name="Shape 19"/>
+          <p:cNvPr id="23" name="Shape 20"/>
           <p:cNvSpPr/>
           <p:nvPr/>
         </p:nvSpPr>
@@ -13568,7 +13783,7 @@
       </p:sp>
       <p:sp>
         <p:nvSpPr>
-          <p:cNvPr id="23" name="Shape 20"/>
+          <p:cNvPr id="24" name="Shape 21"/>
           <p:cNvSpPr/>
           <p:nvPr/>
         </p:nvSpPr>
@@ -13588,7 +13803,7 @@
       </p:sp>
       <p:sp>
         <p:nvSpPr>
-          <p:cNvPr id="24" name="Text 21"/>
+          <p:cNvPr id="25" name="Text 22"/>
           <p:cNvSpPr/>
           <p:nvPr/>
         </p:nvSpPr>
@@ -13627,7 +13842,7 @@
       </p:sp>
       <p:sp>
         <p:nvSpPr>
-          <p:cNvPr id="25" name="Text 22"/>
+          <p:cNvPr id="26" name="Text 23"/>
           <p:cNvSpPr/>
           <p:nvPr/>
         </p:nvSpPr>
@@ -13666,7 +13881,7 @@
       </p:sp>
       <p:sp>
         <p:nvSpPr>
-          <p:cNvPr id="26" name="Text 23"/>
+          <p:cNvPr id="27" name="Text 24"/>
           <p:cNvSpPr/>
           <p:nvPr/>
         </p:nvSpPr>
@@ -13708,7 +13923,7 @@
       </p:sp>
       <p:sp>
         <p:nvSpPr>
-          <p:cNvPr id="27" name="Shape 24"/>
+          <p:cNvPr id="28" name="Shape 25"/>
           <p:cNvSpPr/>
           <p:nvPr/>
         </p:nvSpPr>
@@ -13735,7 +13950,7 @@
       </p:sp>
       <p:sp>
         <p:nvSpPr>
-          <p:cNvPr id="28" name="Shape 25"/>
+          <p:cNvPr id="29" name="Shape 26"/>
           <p:cNvSpPr/>
           <p:nvPr/>
         </p:nvSpPr>
@@ -13755,7 +13970,7 @@
       </p:sp>
       <p:sp>
         <p:nvSpPr>
-          <p:cNvPr id="29" name="Text 26"/>
+          <p:cNvPr id="30" name="Text 27"/>
           <p:cNvSpPr/>
           <p:nvPr/>
         </p:nvSpPr>
@@ -13794,7 +14009,7 @@
       </p:sp>
       <p:sp>
         <p:nvSpPr>
-          <p:cNvPr id="30" name="Text 27"/>
+          <p:cNvPr id="31" name="Text 28"/>
           <p:cNvSpPr/>
           <p:nvPr/>
         </p:nvSpPr>
@@ -13833,7 +14048,7 @@
       </p:sp>
       <p:sp>
         <p:nvSpPr>
-          <p:cNvPr id="31" name="Text 28"/>
+          <p:cNvPr id="32" name="Text 29"/>
           <p:cNvSpPr/>
           <p:nvPr/>
         </p:nvSpPr>
@@ -13885,7 +14100,7 @@
         </p:nvSpPr>
         <p:spPr>
           <a:xfrm>
-            <a:off x="11368735" y="6437376"/>
+            <a:off x="11368735" y="6327648"/>
             <a:ext cx="365760" cy="274320"/>
           </a:xfrm>
           <a:prstGeom prst="rect">
@@ -13932,13 +14147,6 @@
 <file path=ppt/slides/slide20.xml><?xml version="1.0" encoding="utf-8"?>
 <p:sld xmlns:a="http://schemas.openxmlformats.org/drawingml/2006/main" xmlns:r="http://schemas.openxmlformats.org/officeDocument/2006/relationships" xmlns:p="http://schemas.openxmlformats.org/presentationml/2006/main">
   <p:cSld name="Slide 20">
-    <p:bg>
-      <p:bgPr>
-        <a:solidFill>
-          <a:srgbClr val="FFFFFF"/>
-        </a:solidFill>
-      </p:bgPr>
-    </p:bg>
     <p:spTree>
       <p:nvGrpSpPr>
         <p:cNvPr id="1" name=""/>
@@ -13955,7 +14163,29 @@
       </p:grpSpPr>
       <p:sp>
         <p:nvSpPr>
-          <p:cNvPr id="2" name="Text 0"/>
+          <p:cNvPr id="2" name="Shape 0"/>
+          <p:cNvSpPr/>
+          <p:nvPr/>
+        </p:nvSpPr>
+        <p:spPr>
+          <a:xfrm>
+            <a:off x="231343" y="194767"/>
+            <a:ext cx="11716207" cy="6473952"/>
+          </a:xfrm>
+          <a:prstGeom prst="roundRect">
+            <a:avLst>
+              <a:gd name="adj" fmla="val 3107"/>
+            </a:avLst>
+          </a:prstGeom>
+          <a:solidFill>
+            <a:srgbClr val="FFFFFF"/>
+          </a:solidFill>
+          <a:ln/>
+        </p:spPr>
+      </p:sp>
+      <p:sp>
+        <p:nvSpPr>
+          <p:cNvPr id="3" name="Text 1"/>
           <p:cNvSpPr/>
           <p:nvPr/>
         </p:nvSpPr>
@@ -13994,7 +14224,7 @@
       </p:sp>
       <p:sp>
         <p:nvSpPr>
-          <p:cNvPr id="3" name="Shape 1"/>
+          <p:cNvPr id="4" name="Shape 2"/>
           <p:cNvSpPr/>
           <p:nvPr/>
         </p:nvSpPr>
@@ -14016,7 +14246,7 @@
       </p:sp>
       <p:sp>
         <p:nvSpPr>
-          <p:cNvPr id="4" name="Text 2"/>
+          <p:cNvPr id="5" name="Text 3"/>
           <p:cNvSpPr/>
           <p:nvPr/>
         </p:nvSpPr>
@@ -14055,7 +14285,7 @@
       </p:sp>
       <p:pic>
         <p:nvPicPr>
-          <p:cNvPr id="5" name="Image 0" descr="preencoded.png">    </p:cNvPr>
+          <p:cNvPr id="6" name="Image 0" descr="preencoded.png">    </p:cNvPr>
           <p:cNvPicPr>
             <a:picLocks noChangeAspect="1"/>
           </p:cNvPicPr>
@@ -14069,7 +14299,7 @@
         </p:blipFill>
         <p:spPr>
           <a:xfrm>
-            <a:off x="566928" y="6254496"/>
+            <a:off x="566928" y="6126480"/>
             <a:ext cx="1481328" cy="457200"/>
           </a:xfrm>
           <a:prstGeom prst="rect">
@@ -14079,7 +14309,7 @@
       </p:pic>
       <p:sp>
         <p:nvSpPr>
-          <p:cNvPr id="6" name="Shape 3"/>
+          <p:cNvPr id="7" name="Shape 4"/>
           <p:cNvSpPr/>
           <p:nvPr/>
         </p:nvSpPr>
@@ -14101,7 +14331,7 @@
       </p:sp>
       <p:sp>
         <p:nvSpPr>
-          <p:cNvPr id="7" name="Text 4"/>
+          <p:cNvPr id="8" name="Text 5"/>
           <p:cNvSpPr/>
           <p:nvPr/>
         </p:nvSpPr>
@@ -14140,7 +14370,7 @@
       </p:sp>
       <p:sp>
         <p:nvSpPr>
-          <p:cNvPr id="8" name="Text 5"/>
+          <p:cNvPr id="9" name="Text 6"/>
           <p:cNvSpPr/>
           <p:nvPr/>
         </p:nvSpPr>
@@ -14182,7 +14412,7 @@
       </p:sp>
       <p:sp>
         <p:nvSpPr>
-          <p:cNvPr id="9" name="Shape 6"/>
+          <p:cNvPr id="10" name="Shape 7"/>
           <p:cNvSpPr/>
           <p:nvPr/>
         </p:nvSpPr>
@@ -14204,7 +14434,7 @@
       </p:sp>
       <p:sp>
         <p:nvSpPr>
-          <p:cNvPr id="10" name="Text 7"/>
+          <p:cNvPr id="11" name="Text 8"/>
           <p:cNvSpPr/>
           <p:nvPr/>
         </p:nvSpPr>
@@ -14243,7 +14473,7 @@
       </p:sp>
       <p:sp>
         <p:nvSpPr>
-          <p:cNvPr id="11" name="Text 8"/>
+          <p:cNvPr id="12" name="Text 9"/>
           <p:cNvSpPr/>
           <p:nvPr/>
         </p:nvSpPr>
@@ -14285,7 +14515,7 @@
       </p:sp>
       <p:sp>
         <p:nvSpPr>
-          <p:cNvPr id="12" name="Shape 9"/>
+          <p:cNvPr id="13" name="Shape 10"/>
           <p:cNvSpPr/>
           <p:nvPr/>
         </p:nvSpPr>
@@ -14312,7 +14542,7 @@
       </p:sp>
       <p:sp>
         <p:nvSpPr>
-          <p:cNvPr id="13" name="Text 10"/>
+          <p:cNvPr id="14" name="Text 11"/>
           <p:cNvSpPr/>
           <p:nvPr/>
         </p:nvSpPr>
@@ -14351,7 +14581,7 @@
       </p:sp>
       <p:sp>
         <p:nvSpPr>
-          <p:cNvPr id="14" name="Text 11"/>
+          <p:cNvPr id="15" name="Text 12"/>
           <p:cNvSpPr/>
           <p:nvPr/>
         </p:nvSpPr>
@@ -14393,7 +14623,7 @@
       </p:sp>
       <p:sp>
         <p:nvSpPr>
-          <p:cNvPr id="15" name="Shape 12"/>
+          <p:cNvPr id="16" name="Shape 13"/>
           <p:cNvSpPr/>
           <p:nvPr/>
         </p:nvSpPr>
@@ -14420,7 +14650,7 @@
       </p:sp>
       <p:sp>
         <p:nvSpPr>
-          <p:cNvPr id="16" name="Text 13"/>
+          <p:cNvPr id="17" name="Text 14"/>
           <p:cNvSpPr/>
           <p:nvPr/>
         </p:nvSpPr>
@@ -14472,7 +14702,7 @@
         </p:nvSpPr>
         <p:spPr>
           <a:xfrm>
-            <a:off x="11368735" y="6437376"/>
+            <a:off x="11368735" y="6327648"/>
             <a:ext cx="365760" cy="274320"/>
           </a:xfrm>
           <a:prstGeom prst="rect">
@@ -14519,13 +14749,6 @@
 <file path=ppt/slides/slide21.xml><?xml version="1.0" encoding="utf-8"?>
 <p:sld xmlns:a="http://schemas.openxmlformats.org/drawingml/2006/main" xmlns:r="http://schemas.openxmlformats.org/officeDocument/2006/relationships" xmlns:p="http://schemas.openxmlformats.org/presentationml/2006/main">
   <p:cSld name="Slide 21">
-    <p:bg>
-      <p:bgPr>
-        <a:solidFill>
-          <a:srgbClr val="FFFFFF"/>
-        </a:solidFill>
-      </p:bgPr>
-    </p:bg>
     <p:spTree>
       <p:nvGrpSpPr>
         <p:cNvPr id="1" name=""/>
@@ -14542,7 +14765,29 @@
       </p:grpSpPr>
       <p:sp>
         <p:nvSpPr>
-          <p:cNvPr id="2" name="Text 0"/>
+          <p:cNvPr id="2" name="Shape 0"/>
+          <p:cNvSpPr/>
+          <p:nvPr/>
+        </p:nvSpPr>
+        <p:spPr>
+          <a:xfrm>
+            <a:off x="231343" y="194767"/>
+            <a:ext cx="11716207" cy="6473952"/>
+          </a:xfrm>
+          <a:prstGeom prst="roundRect">
+            <a:avLst>
+              <a:gd name="adj" fmla="val 3107"/>
+            </a:avLst>
+          </a:prstGeom>
+          <a:solidFill>
+            <a:srgbClr val="FFFFFF"/>
+          </a:solidFill>
+          <a:ln/>
+        </p:spPr>
+      </p:sp>
+      <p:sp>
+        <p:nvSpPr>
+          <p:cNvPr id="3" name="Text 1"/>
           <p:cNvSpPr/>
           <p:nvPr/>
         </p:nvSpPr>
@@ -14581,7 +14826,7 @@
       </p:sp>
       <p:sp>
         <p:nvSpPr>
-          <p:cNvPr id="3" name="Shape 1"/>
+          <p:cNvPr id="4" name="Shape 2"/>
           <p:cNvSpPr/>
           <p:nvPr/>
         </p:nvSpPr>
@@ -14603,7 +14848,7 @@
       </p:sp>
       <p:sp>
         <p:nvSpPr>
-          <p:cNvPr id="4" name="Text 2"/>
+          <p:cNvPr id="5" name="Text 3"/>
           <p:cNvSpPr/>
           <p:nvPr/>
         </p:nvSpPr>
@@ -14642,7 +14887,7 @@
       </p:sp>
       <p:pic>
         <p:nvPicPr>
-          <p:cNvPr id="5" name="Image 0" descr="preencoded.png">    </p:cNvPr>
+          <p:cNvPr id="6" name="Image 0" descr="preencoded.png">    </p:cNvPr>
           <p:cNvPicPr>
             <a:picLocks noChangeAspect="1"/>
           </p:cNvPicPr>
@@ -14656,7 +14901,7 @@
         </p:blipFill>
         <p:spPr>
           <a:xfrm>
-            <a:off x="566928" y="6254496"/>
+            <a:off x="566928" y="6126480"/>
             <a:ext cx="1481328" cy="457200"/>
           </a:xfrm>
           <a:prstGeom prst="rect">
@@ -14666,7 +14911,7 @@
       </p:pic>
       <p:sp>
         <p:nvSpPr>
-          <p:cNvPr id="6" name="Shape 3"/>
+          <p:cNvPr id="7" name="Shape 4"/>
           <p:cNvSpPr/>
           <p:nvPr/>
         </p:nvSpPr>
@@ -14693,7 +14938,7 @@
       </p:sp>
       <p:sp>
         <p:nvSpPr>
-          <p:cNvPr id="7" name="Shape 4"/>
+          <p:cNvPr id="8" name="Shape 5"/>
           <p:cNvSpPr/>
           <p:nvPr/>
         </p:nvSpPr>
@@ -14720,7 +14965,7 @@
       </p:sp>
       <p:sp>
         <p:nvSpPr>
-          <p:cNvPr id="8" name="Shape 5"/>
+          <p:cNvPr id="9" name="Shape 6"/>
           <p:cNvSpPr/>
           <p:nvPr/>
         </p:nvSpPr>
@@ -14740,7 +14985,7 @@
       </p:sp>
       <p:sp>
         <p:nvSpPr>
-          <p:cNvPr id="9" name="Shape 6"/>
+          <p:cNvPr id="10" name="Shape 7"/>
           <p:cNvSpPr/>
           <p:nvPr/>
         </p:nvSpPr>
@@ -14760,7 +15005,7 @@
       </p:sp>
       <p:sp>
         <p:nvSpPr>
-          <p:cNvPr id="10" name="Text 7"/>
+          <p:cNvPr id="11" name="Text 8"/>
           <p:cNvSpPr/>
           <p:nvPr/>
         </p:nvSpPr>
@@ -14799,7 +15044,7 @@
       </p:sp>
       <p:sp>
         <p:nvSpPr>
-          <p:cNvPr id="11" name="Shape 8"/>
+          <p:cNvPr id="12" name="Shape 9"/>
           <p:cNvSpPr/>
           <p:nvPr/>
         </p:nvSpPr>
@@ -14826,7 +15071,7 @@
       </p:sp>
       <p:sp>
         <p:nvSpPr>
-          <p:cNvPr id="12" name="Shape 9"/>
+          <p:cNvPr id="13" name="Shape 10"/>
           <p:cNvSpPr/>
           <p:nvPr/>
         </p:nvSpPr>
@@ -14846,7 +15091,7 @@
       </p:sp>
       <p:sp>
         <p:nvSpPr>
-          <p:cNvPr id="13" name="Shape 10"/>
+          <p:cNvPr id="14" name="Shape 11"/>
           <p:cNvSpPr/>
           <p:nvPr/>
         </p:nvSpPr>
@@ -14866,7 +15111,7 @@
       </p:sp>
       <p:sp>
         <p:nvSpPr>
-          <p:cNvPr id="14" name="Text 11"/>
+          <p:cNvPr id="15" name="Text 12"/>
           <p:cNvSpPr/>
           <p:nvPr/>
         </p:nvSpPr>
@@ -14905,7 +15150,7 @@
       </p:sp>
       <p:sp>
         <p:nvSpPr>
-          <p:cNvPr id="15" name="Shape 12"/>
+          <p:cNvPr id="16" name="Shape 13"/>
           <p:cNvSpPr/>
           <p:nvPr/>
         </p:nvSpPr>
@@ -14932,7 +15177,7 @@
       </p:sp>
       <p:sp>
         <p:nvSpPr>
-          <p:cNvPr id="16" name="Shape 13"/>
+          <p:cNvPr id="17" name="Shape 14"/>
           <p:cNvSpPr/>
           <p:nvPr/>
         </p:nvSpPr>
@@ -14952,7 +15197,7 @@
       </p:sp>
       <p:sp>
         <p:nvSpPr>
-          <p:cNvPr id="17" name="Shape 14"/>
+          <p:cNvPr id="18" name="Shape 15"/>
           <p:cNvSpPr/>
           <p:nvPr/>
         </p:nvSpPr>
@@ -14972,7 +15217,7 @@
       </p:sp>
       <p:sp>
         <p:nvSpPr>
-          <p:cNvPr id="18" name="Text 15"/>
+          <p:cNvPr id="19" name="Text 16"/>
           <p:cNvSpPr/>
           <p:nvPr/>
         </p:nvSpPr>
@@ -15011,7 +15256,7 @@
       </p:sp>
       <p:sp>
         <p:nvSpPr>
-          <p:cNvPr id="19" name="Shape 16"/>
+          <p:cNvPr id="20" name="Shape 17"/>
           <p:cNvSpPr/>
           <p:nvPr/>
         </p:nvSpPr>
@@ -15038,7 +15283,7 @@
       </p:sp>
       <p:sp>
         <p:nvSpPr>
-          <p:cNvPr id="20" name="Shape 17"/>
+          <p:cNvPr id="21" name="Shape 18"/>
           <p:cNvSpPr/>
           <p:nvPr/>
         </p:nvSpPr>
@@ -15058,7 +15303,7 @@
       </p:sp>
       <p:sp>
         <p:nvSpPr>
-          <p:cNvPr id="21" name="Shape 18"/>
+          <p:cNvPr id="22" name="Shape 19"/>
           <p:cNvSpPr/>
           <p:nvPr/>
         </p:nvSpPr>
@@ -15078,7 +15323,7 @@
       </p:sp>
       <p:sp>
         <p:nvSpPr>
-          <p:cNvPr id="22" name="Text 19"/>
+          <p:cNvPr id="23" name="Text 20"/>
           <p:cNvSpPr/>
           <p:nvPr/>
         </p:nvSpPr>
@@ -15117,7 +15362,7 @@
       </p:sp>
       <p:sp>
         <p:nvSpPr>
-          <p:cNvPr id="23" name="Text 20"/>
+          <p:cNvPr id="24" name="Text 21"/>
           <p:cNvSpPr/>
           <p:nvPr/>
         </p:nvSpPr>
@@ -15166,7 +15411,7 @@
         </p:nvSpPr>
         <p:spPr>
           <a:xfrm>
-            <a:off x="11368735" y="6437376"/>
+            <a:off x="11368735" y="6327648"/>
             <a:ext cx="365760" cy="274320"/>
           </a:xfrm>
           <a:prstGeom prst="rect">
@@ -15213,13 +15458,6 @@
 <file path=ppt/slides/slide22.xml><?xml version="1.0" encoding="utf-8"?>
 <p:sld xmlns:a="http://schemas.openxmlformats.org/drawingml/2006/main" xmlns:r="http://schemas.openxmlformats.org/officeDocument/2006/relationships" xmlns:p="http://schemas.openxmlformats.org/presentationml/2006/main">
   <p:cSld name="Slide 22">
-    <p:bg>
-      <p:bgPr>
-        <a:solidFill>
-          <a:srgbClr val="FFFFFF"/>
-        </a:solidFill>
-      </p:bgPr>
-    </p:bg>
     <p:spTree>
       <p:nvGrpSpPr>
         <p:cNvPr id="1" name=""/>
@@ -15236,7 +15474,29 @@
       </p:grpSpPr>
       <p:sp>
         <p:nvSpPr>
-          <p:cNvPr id="2" name="Text 0"/>
+          <p:cNvPr id="2" name="Shape 0"/>
+          <p:cNvSpPr/>
+          <p:nvPr/>
+        </p:nvSpPr>
+        <p:spPr>
+          <a:xfrm>
+            <a:off x="231343" y="194767"/>
+            <a:ext cx="11716207" cy="6473952"/>
+          </a:xfrm>
+          <a:prstGeom prst="roundRect">
+            <a:avLst>
+              <a:gd name="adj" fmla="val 3107"/>
+            </a:avLst>
+          </a:prstGeom>
+          <a:solidFill>
+            <a:srgbClr val="FFFFFF"/>
+          </a:solidFill>
+          <a:ln/>
+        </p:spPr>
+      </p:sp>
+      <p:sp>
+        <p:nvSpPr>
+          <p:cNvPr id="3" name="Text 1"/>
           <p:cNvSpPr/>
           <p:nvPr/>
         </p:nvSpPr>
@@ -15275,7 +15535,7 @@
       </p:sp>
       <p:sp>
         <p:nvSpPr>
-          <p:cNvPr id="3" name="Shape 1"/>
+          <p:cNvPr id="4" name="Shape 2"/>
           <p:cNvSpPr/>
           <p:nvPr/>
         </p:nvSpPr>
@@ -15297,7 +15557,7 @@
       </p:sp>
       <p:sp>
         <p:nvSpPr>
-          <p:cNvPr id="4" name="Text 2"/>
+          <p:cNvPr id="5" name="Text 3"/>
           <p:cNvSpPr/>
           <p:nvPr/>
         </p:nvSpPr>
@@ -15336,7 +15596,7 @@
       </p:sp>
       <p:pic>
         <p:nvPicPr>
-          <p:cNvPr id="5" name="Image 0" descr="preencoded.png">    </p:cNvPr>
+          <p:cNvPr id="6" name="Image 0" descr="preencoded.png">    </p:cNvPr>
           <p:cNvPicPr>
             <a:picLocks noChangeAspect="1"/>
           </p:cNvPicPr>
@@ -15350,7 +15610,7 @@
         </p:blipFill>
         <p:spPr>
           <a:xfrm>
-            <a:off x="566928" y="6254496"/>
+            <a:off x="566928" y="6126480"/>
             <a:ext cx="1481328" cy="457200"/>
           </a:xfrm>
           <a:prstGeom prst="rect">
@@ -15360,7 +15620,7 @@
       </p:pic>
       <p:sp>
         <p:nvSpPr>
-          <p:cNvPr id="6" name="Shape 3"/>
+          <p:cNvPr id="7" name="Shape 4"/>
           <p:cNvSpPr/>
           <p:nvPr/>
         </p:nvSpPr>
@@ -15387,7 +15647,7 @@
       </p:sp>
       <p:sp>
         <p:nvSpPr>
-          <p:cNvPr id="7" name="Shape 4"/>
+          <p:cNvPr id="8" name="Shape 5"/>
           <p:cNvSpPr/>
           <p:nvPr/>
         </p:nvSpPr>
@@ -15407,7 +15667,7 @@
       </p:sp>
       <p:sp>
         <p:nvSpPr>
-          <p:cNvPr id="8" name="Shape 5"/>
+          <p:cNvPr id="9" name="Shape 6"/>
           <p:cNvSpPr/>
           <p:nvPr/>
         </p:nvSpPr>
@@ -15427,7 +15687,7 @@
       </p:sp>
       <p:sp>
         <p:nvSpPr>
-          <p:cNvPr id="9" name="Shape 6"/>
+          <p:cNvPr id="10" name="Shape 7"/>
           <p:cNvSpPr/>
           <p:nvPr/>
         </p:nvSpPr>
@@ -15447,7 +15707,7 @@
       </p:sp>
       <p:sp>
         <p:nvSpPr>
-          <p:cNvPr id="10" name="Text 7"/>
+          <p:cNvPr id="11" name="Text 8"/>
           <p:cNvSpPr/>
           <p:nvPr/>
         </p:nvSpPr>
@@ -15500,7 +15760,7 @@
       </p:sp>
       <p:sp>
         <p:nvSpPr>
-          <p:cNvPr id="11" name="Shape 8"/>
+          <p:cNvPr id="12" name="Shape 9"/>
           <p:cNvSpPr/>
           <p:nvPr/>
         </p:nvSpPr>
@@ -15527,7 +15787,7 @@
       </p:sp>
       <p:sp>
         <p:nvSpPr>
-          <p:cNvPr id="12" name="Shape 9"/>
+          <p:cNvPr id="13" name="Shape 10"/>
           <p:cNvSpPr/>
           <p:nvPr/>
         </p:nvSpPr>
@@ -15547,7 +15807,7 @@
       </p:sp>
       <p:sp>
         <p:nvSpPr>
-          <p:cNvPr id="13" name="Shape 10"/>
+          <p:cNvPr id="14" name="Shape 11"/>
           <p:cNvSpPr/>
           <p:nvPr/>
         </p:nvSpPr>
@@ -15567,7 +15827,7 @@
       </p:sp>
       <p:sp>
         <p:nvSpPr>
-          <p:cNvPr id="14" name="Shape 11"/>
+          <p:cNvPr id="15" name="Shape 12"/>
           <p:cNvSpPr/>
           <p:nvPr/>
         </p:nvSpPr>
@@ -15587,7 +15847,7 @@
       </p:sp>
       <p:sp>
         <p:nvSpPr>
-          <p:cNvPr id="15" name="Text 12"/>
+          <p:cNvPr id="16" name="Text 13"/>
           <p:cNvSpPr/>
           <p:nvPr/>
         </p:nvSpPr>
@@ -15640,7 +15900,7 @@
       </p:sp>
       <p:sp>
         <p:nvSpPr>
-          <p:cNvPr id="16" name="Shape 13"/>
+          <p:cNvPr id="17" name="Shape 14"/>
           <p:cNvSpPr/>
           <p:nvPr/>
         </p:nvSpPr>
@@ -15667,7 +15927,7 @@
       </p:sp>
       <p:sp>
         <p:nvSpPr>
-          <p:cNvPr id="17" name="Shape 14"/>
+          <p:cNvPr id="18" name="Shape 15"/>
           <p:cNvSpPr/>
           <p:nvPr/>
         </p:nvSpPr>
@@ -15687,7 +15947,7 @@
       </p:sp>
       <p:sp>
         <p:nvSpPr>
-          <p:cNvPr id="18" name="Shape 15"/>
+          <p:cNvPr id="19" name="Shape 16"/>
           <p:cNvSpPr/>
           <p:nvPr/>
         </p:nvSpPr>
@@ -15707,7 +15967,7 @@
       </p:sp>
       <p:sp>
         <p:nvSpPr>
-          <p:cNvPr id="19" name="Shape 16"/>
+          <p:cNvPr id="20" name="Shape 17"/>
           <p:cNvSpPr/>
           <p:nvPr/>
         </p:nvSpPr>
@@ -15727,7 +15987,7 @@
       </p:sp>
       <p:sp>
         <p:nvSpPr>
-          <p:cNvPr id="20" name="Text 17"/>
+          <p:cNvPr id="21" name="Text 18"/>
           <p:cNvSpPr/>
           <p:nvPr/>
         </p:nvSpPr>
@@ -15780,7 +16040,7 @@
       </p:sp>
       <p:sp>
         <p:nvSpPr>
-          <p:cNvPr id="21" name="Shape 18"/>
+          <p:cNvPr id="22" name="Shape 19"/>
           <p:cNvSpPr/>
           <p:nvPr/>
         </p:nvSpPr>
@@ -15807,7 +16067,7 @@
       </p:sp>
       <p:sp>
         <p:nvSpPr>
-          <p:cNvPr id="22" name="Shape 19"/>
+          <p:cNvPr id="23" name="Shape 20"/>
           <p:cNvSpPr/>
           <p:nvPr/>
         </p:nvSpPr>
@@ -15827,7 +16087,7 @@
       </p:sp>
       <p:sp>
         <p:nvSpPr>
-          <p:cNvPr id="23" name="Shape 20"/>
+          <p:cNvPr id="24" name="Shape 21"/>
           <p:cNvSpPr/>
           <p:nvPr/>
         </p:nvSpPr>
@@ -15847,7 +16107,7 @@
       </p:sp>
       <p:sp>
         <p:nvSpPr>
-          <p:cNvPr id="24" name="Shape 21"/>
+          <p:cNvPr id="25" name="Shape 22"/>
           <p:cNvSpPr/>
           <p:nvPr/>
         </p:nvSpPr>
@@ -15867,7 +16127,7 @@
       </p:sp>
       <p:sp>
         <p:nvSpPr>
-          <p:cNvPr id="25" name="Text 22"/>
+          <p:cNvPr id="26" name="Text 23"/>
           <p:cNvSpPr/>
           <p:nvPr/>
         </p:nvSpPr>
@@ -15930,7 +16190,7 @@
         </p:nvSpPr>
         <p:spPr>
           <a:xfrm>
-            <a:off x="11368735" y="6437376"/>
+            <a:off x="11368735" y="6327648"/>
             <a:ext cx="365760" cy="274320"/>
           </a:xfrm>
           <a:prstGeom prst="rect">
@@ -15977,13 +16237,6 @@
 <file path=ppt/slides/slide23.xml><?xml version="1.0" encoding="utf-8"?>
 <p:sld xmlns:a="http://schemas.openxmlformats.org/drawingml/2006/main" xmlns:r="http://schemas.openxmlformats.org/officeDocument/2006/relationships" xmlns:p="http://schemas.openxmlformats.org/presentationml/2006/main">
   <p:cSld name="Slide 23">
-    <p:bg>
-      <p:bgPr>
-        <a:solidFill>
-          <a:srgbClr val="FFFFFF"/>
-        </a:solidFill>
-      </p:bgPr>
-    </p:bg>
     <p:spTree>
       <p:nvGrpSpPr>
         <p:cNvPr id="1" name=""/>
@@ -16000,7 +16253,29 @@
       </p:grpSpPr>
       <p:sp>
         <p:nvSpPr>
-          <p:cNvPr id="2" name="Text 0"/>
+          <p:cNvPr id="2" name="Shape 0"/>
+          <p:cNvSpPr/>
+          <p:nvPr/>
+        </p:nvSpPr>
+        <p:spPr>
+          <a:xfrm>
+            <a:off x="231343" y="194767"/>
+            <a:ext cx="11716207" cy="6473952"/>
+          </a:xfrm>
+          <a:prstGeom prst="roundRect">
+            <a:avLst>
+              <a:gd name="adj" fmla="val 3107"/>
+            </a:avLst>
+          </a:prstGeom>
+          <a:solidFill>
+            <a:srgbClr val="FFFFFF"/>
+          </a:solidFill>
+          <a:ln/>
+        </p:spPr>
+      </p:sp>
+      <p:sp>
+        <p:nvSpPr>
+          <p:cNvPr id="3" name="Text 1"/>
           <p:cNvSpPr/>
           <p:nvPr/>
         </p:nvSpPr>
@@ -16039,7 +16314,7 @@
       </p:sp>
       <p:sp>
         <p:nvSpPr>
-          <p:cNvPr id="3" name="Shape 1"/>
+          <p:cNvPr id="4" name="Shape 2"/>
           <p:cNvSpPr/>
           <p:nvPr/>
         </p:nvSpPr>
@@ -16061,7 +16336,7 @@
       </p:sp>
       <p:sp>
         <p:nvSpPr>
-          <p:cNvPr id="4" name="Text 2"/>
+          <p:cNvPr id="5" name="Text 3"/>
           <p:cNvSpPr/>
           <p:nvPr/>
         </p:nvSpPr>
@@ -16100,7 +16375,7 @@
       </p:sp>
       <p:pic>
         <p:nvPicPr>
-          <p:cNvPr id="5" name="Image 0" descr="preencoded.png">    </p:cNvPr>
+          <p:cNvPr id="6" name="Image 0" descr="preencoded.png">    </p:cNvPr>
           <p:cNvPicPr>
             <a:picLocks noChangeAspect="1"/>
           </p:cNvPicPr>
@@ -16114,7 +16389,7 @@
         </p:blipFill>
         <p:spPr>
           <a:xfrm>
-            <a:off x="566928" y="6254496"/>
+            <a:off x="566928" y="6126480"/>
             <a:ext cx="1481328" cy="457200"/>
           </a:xfrm>
           <a:prstGeom prst="rect">
@@ -16124,7 +16399,7 @@
       </p:pic>
       <p:sp>
         <p:nvSpPr>
-          <p:cNvPr id="6" name="Shape 3"/>
+          <p:cNvPr id="7" name="Shape 4"/>
           <p:cNvSpPr/>
           <p:nvPr/>
         </p:nvSpPr>
@@ -16151,7 +16426,7 @@
       </p:sp>
       <p:sp>
         <p:nvSpPr>
-          <p:cNvPr id="7" name="Text 4"/>
+          <p:cNvPr id="8" name="Text 5"/>
           <p:cNvSpPr/>
           <p:nvPr/>
         </p:nvSpPr>
@@ -16190,7 +16465,7 @@
       </p:sp>
       <p:sp>
         <p:nvSpPr>
-          <p:cNvPr id="8" name="Text 5"/>
+          <p:cNvPr id="9" name="Text 6"/>
           <p:cNvSpPr/>
           <p:nvPr/>
         </p:nvSpPr>
@@ -16290,7 +16565,7 @@
       </p:sp>
       <p:sp>
         <p:nvSpPr>
-          <p:cNvPr id="9" name="Shape 6"/>
+          <p:cNvPr id="10" name="Shape 7"/>
           <p:cNvSpPr/>
           <p:nvPr/>
         </p:nvSpPr>
@@ -16312,7 +16587,7 @@
       </p:sp>
       <p:sp>
         <p:nvSpPr>
-          <p:cNvPr id="10" name="Text 7"/>
+          <p:cNvPr id="11" name="Text 8"/>
           <p:cNvSpPr/>
           <p:nvPr/>
         </p:nvSpPr>
@@ -16351,7 +16626,7 @@
       </p:sp>
       <p:sp>
         <p:nvSpPr>
-          <p:cNvPr id="11" name="Text 8"/>
+          <p:cNvPr id="12" name="Text 9"/>
           <p:cNvSpPr/>
           <p:nvPr/>
         </p:nvSpPr>
@@ -16393,7 +16668,7 @@
       </p:sp>
       <p:sp>
         <p:nvSpPr>
-          <p:cNvPr id="12" name="Shape 9"/>
+          <p:cNvPr id="13" name="Shape 10"/>
           <p:cNvSpPr/>
           <p:nvPr/>
         </p:nvSpPr>
@@ -16420,7 +16695,7 @@
       </p:sp>
       <p:sp>
         <p:nvSpPr>
-          <p:cNvPr id="13" name="Text 10"/>
+          <p:cNvPr id="14" name="Text 11"/>
           <p:cNvSpPr/>
           <p:nvPr/>
         </p:nvSpPr>
@@ -16459,7 +16734,7 @@
       </p:sp>
       <p:sp>
         <p:nvSpPr>
-          <p:cNvPr id="14" name="Text 11"/>
+          <p:cNvPr id="15" name="Text 12"/>
           <p:cNvSpPr/>
           <p:nvPr/>
         </p:nvSpPr>
@@ -16508,7 +16783,7 @@
         </p:nvSpPr>
         <p:spPr>
           <a:xfrm>
-            <a:off x="11368735" y="6437376"/>
+            <a:off x="11368735" y="6327648"/>
             <a:ext cx="365760" cy="274320"/>
           </a:xfrm>
           <a:prstGeom prst="rect">
@@ -16555,13 +16830,6 @@
 <file path=ppt/slides/slide24.xml><?xml version="1.0" encoding="utf-8"?>
 <p:sld xmlns:a="http://schemas.openxmlformats.org/drawingml/2006/main" xmlns:r="http://schemas.openxmlformats.org/officeDocument/2006/relationships" xmlns:p="http://schemas.openxmlformats.org/presentationml/2006/main">
   <p:cSld name="Slide 24">
-    <p:bg>
-      <p:bgPr>
-        <a:solidFill>
-          <a:srgbClr val="1B0942"/>
-        </a:solidFill>
-      </p:bgPr>
-    </p:bg>
     <p:spTree>
       <p:nvGrpSpPr>
         <p:cNvPr id="1" name=""/>
@@ -17078,13 +17346,6 @@
 <file path=ppt/slides/slide3.xml><?xml version="1.0" encoding="utf-8"?>
 <p:sld xmlns:a="http://schemas.openxmlformats.org/drawingml/2006/main" xmlns:r="http://schemas.openxmlformats.org/officeDocument/2006/relationships" xmlns:p="http://schemas.openxmlformats.org/presentationml/2006/main">
   <p:cSld name="Slide 3">
-    <p:bg>
-      <p:bgPr>
-        <a:solidFill>
-          <a:srgbClr val="FFFFFF"/>
-        </a:solidFill>
-      </p:bgPr>
-    </p:bg>
     <p:spTree>
       <p:nvGrpSpPr>
         <p:cNvPr id="1" name=""/>
@@ -17101,7 +17362,29 @@
       </p:grpSpPr>
       <p:sp>
         <p:nvSpPr>
-          <p:cNvPr id="2" name="Text 0"/>
+          <p:cNvPr id="2" name="Shape 0"/>
+          <p:cNvSpPr/>
+          <p:nvPr/>
+        </p:nvSpPr>
+        <p:spPr>
+          <a:xfrm>
+            <a:off x="231343" y="194767"/>
+            <a:ext cx="11716207" cy="6473952"/>
+          </a:xfrm>
+          <a:prstGeom prst="roundRect">
+            <a:avLst>
+              <a:gd name="adj" fmla="val 3107"/>
+            </a:avLst>
+          </a:prstGeom>
+          <a:solidFill>
+            <a:srgbClr val="FFFFFF"/>
+          </a:solidFill>
+          <a:ln/>
+        </p:spPr>
+      </p:sp>
+      <p:sp>
+        <p:nvSpPr>
+          <p:cNvPr id="3" name="Text 1"/>
           <p:cNvSpPr/>
           <p:nvPr/>
         </p:nvSpPr>
@@ -17140,7 +17423,7 @@
       </p:sp>
       <p:sp>
         <p:nvSpPr>
-          <p:cNvPr id="3" name="Shape 1"/>
+          <p:cNvPr id="4" name="Shape 2"/>
           <p:cNvSpPr/>
           <p:nvPr/>
         </p:nvSpPr>
@@ -17162,7 +17445,7 @@
       </p:sp>
       <p:sp>
         <p:nvSpPr>
-          <p:cNvPr id="4" name="Text 2"/>
+          <p:cNvPr id="5" name="Text 3"/>
           <p:cNvSpPr/>
           <p:nvPr/>
         </p:nvSpPr>
@@ -17201,7 +17484,7 @@
       </p:sp>
       <p:pic>
         <p:nvPicPr>
-          <p:cNvPr id="5" name="Image 0" descr="preencoded.png">    </p:cNvPr>
+          <p:cNvPr id="6" name="Image 0" descr="preencoded.png">    </p:cNvPr>
           <p:cNvPicPr>
             <a:picLocks noChangeAspect="1"/>
           </p:cNvPicPr>
@@ -17215,7 +17498,7 @@
         </p:blipFill>
         <p:spPr>
           <a:xfrm>
-            <a:off x="566928" y="6254496"/>
+            <a:off x="566928" y="6126480"/>
             <a:ext cx="1481328" cy="457200"/>
           </a:xfrm>
           <a:prstGeom prst="rect">
@@ -17225,7 +17508,7 @@
       </p:pic>
       <p:sp>
         <p:nvSpPr>
-          <p:cNvPr id="6" name="Shape 3"/>
+          <p:cNvPr id="7" name="Shape 4"/>
           <p:cNvSpPr/>
           <p:nvPr/>
         </p:nvSpPr>
@@ -17252,7 +17535,7 @@
       </p:sp>
       <p:sp>
         <p:nvSpPr>
-          <p:cNvPr id="7" name="Shape 4"/>
+          <p:cNvPr id="8" name="Shape 5"/>
           <p:cNvSpPr/>
           <p:nvPr/>
         </p:nvSpPr>
@@ -17272,7 +17555,7 @@
       </p:sp>
       <p:sp>
         <p:nvSpPr>
-          <p:cNvPr id="8" name="Text 5"/>
+          <p:cNvPr id="9" name="Text 6"/>
           <p:cNvSpPr/>
           <p:nvPr/>
         </p:nvSpPr>
@@ -17311,7 +17594,7 @@
       </p:sp>
       <p:sp>
         <p:nvSpPr>
-          <p:cNvPr id="9" name="Text 6"/>
+          <p:cNvPr id="10" name="Text 7"/>
           <p:cNvSpPr/>
           <p:nvPr/>
         </p:nvSpPr>
@@ -17350,7 +17633,7 @@
       </p:sp>
       <p:sp>
         <p:nvSpPr>
-          <p:cNvPr id="10" name="Shape 7"/>
+          <p:cNvPr id="11" name="Shape 8"/>
           <p:cNvSpPr/>
           <p:nvPr/>
         </p:nvSpPr>
@@ -17377,7 +17660,7 @@
       </p:sp>
       <p:sp>
         <p:nvSpPr>
-          <p:cNvPr id="11" name="Shape 8"/>
+          <p:cNvPr id="12" name="Shape 9"/>
           <p:cNvSpPr/>
           <p:nvPr/>
         </p:nvSpPr>
@@ -17397,7 +17680,7 @@
       </p:sp>
       <p:sp>
         <p:nvSpPr>
-          <p:cNvPr id="12" name="Text 9"/>
+          <p:cNvPr id="13" name="Text 10"/>
           <p:cNvSpPr/>
           <p:nvPr/>
         </p:nvSpPr>
@@ -17436,7 +17719,7 @@
       </p:sp>
       <p:sp>
         <p:nvSpPr>
-          <p:cNvPr id="13" name="Text 10"/>
+          <p:cNvPr id="14" name="Text 11"/>
           <p:cNvSpPr/>
           <p:nvPr/>
         </p:nvSpPr>
@@ -17475,7 +17758,7 @@
       </p:sp>
       <p:sp>
         <p:nvSpPr>
-          <p:cNvPr id="14" name="Shape 11"/>
+          <p:cNvPr id="15" name="Shape 12"/>
           <p:cNvSpPr/>
           <p:nvPr/>
         </p:nvSpPr>
@@ -17502,7 +17785,7 @@
       </p:sp>
       <p:sp>
         <p:nvSpPr>
-          <p:cNvPr id="15" name="Shape 12"/>
+          <p:cNvPr id="16" name="Shape 13"/>
           <p:cNvSpPr/>
           <p:nvPr/>
         </p:nvSpPr>
@@ -17522,7 +17805,7 @@
       </p:sp>
       <p:sp>
         <p:nvSpPr>
-          <p:cNvPr id="16" name="Text 13"/>
+          <p:cNvPr id="17" name="Text 14"/>
           <p:cNvSpPr/>
           <p:nvPr/>
         </p:nvSpPr>
@@ -17561,7 +17844,7 @@
       </p:sp>
       <p:sp>
         <p:nvSpPr>
-          <p:cNvPr id="17" name="Text 14"/>
+          <p:cNvPr id="18" name="Text 15"/>
           <p:cNvSpPr/>
           <p:nvPr/>
         </p:nvSpPr>
@@ -17600,7 +17883,7 @@
       </p:sp>
       <p:sp>
         <p:nvSpPr>
-          <p:cNvPr id="18" name="Shape 15"/>
+          <p:cNvPr id="19" name="Shape 16"/>
           <p:cNvSpPr/>
           <p:nvPr/>
         </p:nvSpPr>
@@ -17627,7 +17910,7 @@
       </p:sp>
       <p:sp>
         <p:nvSpPr>
-          <p:cNvPr id="19" name="Shape 16"/>
+          <p:cNvPr id="20" name="Shape 17"/>
           <p:cNvSpPr/>
           <p:nvPr/>
         </p:nvSpPr>
@@ -17647,7 +17930,7 @@
       </p:sp>
       <p:sp>
         <p:nvSpPr>
-          <p:cNvPr id="20" name="Text 17"/>
+          <p:cNvPr id="21" name="Text 18"/>
           <p:cNvSpPr/>
           <p:nvPr/>
         </p:nvSpPr>
@@ -17686,7 +17969,7 @@
       </p:sp>
       <p:sp>
         <p:nvSpPr>
-          <p:cNvPr id="21" name="Text 18"/>
+          <p:cNvPr id="22" name="Text 19"/>
           <p:cNvSpPr/>
           <p:nvPr/>
         </p:nvSpPr>
@@ -17725,7 +18008,7 @@
       </p:sp>
       <p:sp>
         <p:nvSpPr>
-          <p:cNvPr id="22" name="Shape 19"/>
+          <p:cNvPr id="23" name="Shape 20"/>
           <p:cNvSpPr/>
           <p:nvPr/>
         </p:nvSpPr>
@@ -17752,7 +18035,7 @@
       </p:sp>
       <p:sp>
         <p:nvSpPr>
-          <p:cNvPr id="23" name="Shape 20"/>
+          <p:cNvPr id="24" name="Shape 21"/>
           <p:cNvSpPr/>
           <p:nvPr/>
         </p:nvSpPr>
@@ -17772,7 +18055,7 @@
       </p:sp>
       <p:sp>
         <p:nvSpPr>
-          <p:cNvPr id="24" name="Text 21"/>
+          <p:cNvPr id="25" name="Text 22"/>
           <p:cNvSpPr/>
           <p:nvPr/>
         </p:nvSpPr>
@@ -17811,7 +18094,7 @@
       </p:sp>
       <p:sp>
         <p:nvSpPr>
-          <p:cNvPr id="25" name="Text 22"/>
+          <p:cNvPr id="26" name="Text 23"/>
           <p:cNvSpPr/>
           <p:nvPr/>
         </p:nvSpPr>
@@ -17850,7 +18133,7 @@
       </p:sp>
       <p:sp>
         <p:nvSpPr>
-          <p:cNvPr id="26" name="Shape 23"/>
+          <p:cNvPr id="27" name="Shape 24"/>
           <p:cNvSpPr/>
           <p:nvPr/>
         </p:nvSpPr>
@@ -17877,7 +18160,7 @@
       </p:sp>
       <p:sp>
         <p:nvSpPr>
-          <p:cNvPr id="27" name="Shape 24"/>
+          <p:cNvPr id="28" name="Shape 25"/>
           <p:cNvSpPr/>
           <p:nvPr/>
         </p:nvSpPr>
@@ -17897,7 +18180,7 @@
       </p:sp>
       <p:sp>
         <p:nvSpPr>
-          <p:cNvPr id="28" name="Text 25"/>
+          <p:cNvPr id="29" name="Text 26"/>
           <p:cNvSpPr/>
           <p:nvPr/>
         </p:nvSpPr>
@@ -17936,7 +18219,7 @@
       </p:sp>
       <p:sp>
         <p:nvSpPr>
-          <p:cNvPr id="29" name="Text 26"/>
+          <p:cNvPr id="30" name="Text 27"/>
           <p:cNvSpPr/>
           <p:nvPr/>
         </p:nvSpPr>
@@ -17975,7 +18258,7 @@
       </p:sp>
       <p:sp>
         <p:nvSpPr>
-          <p:cNvPr id="30" name="Shape 27"/>
+          <p:cNvPr id="31" name="Shape 28"/>
           <p:cNvSpPr/>
           <p:nvPr/>
         </p:nvSpPr>
@@ -18002,7 +18285,7 @@
       </p:sp>
       <p:sp>
         <p:nvSpPr>
-          <p:cNvPr id="31" name="Shape 28"/>
+          <p:cNvPr id="32" name="Shape 29"/>
           <p:cNvSpPr/>
           <p:nvPr/>
         </p:nvSpPr>
@@ -18022,7 +18305,7 @@
       </p:sp>
       <p:sp>
         <p:nvSpPr>
-          <p:cNvPr id="32" name="Text 29"/>
+          <p:cNvPr id="33" name="Text 30"/>
           <p:cNvSpPr/>
           <p:nvPr/>
         </p:nvSpPr>
@@ -18061,7 +18344,7 @@
       </p:sp>
       <p:sp>
         <p:nvSpPr>
-          <p:cNvPr id="33" name="Text 30"/>
+          <p:cNvPr id="34" name="Text 31"/>
           <p:cNvSpPr/>
           <p:nvPr/>
         </p:nvSpPr>
@@ -18100,7 +18383,7 @@
       </p:sp>
       <p:sp>
         <p:nvSpPr>
-          <p:cNvPr id="34" name="Shape 31"/>
+          <p:cNvPr id="35" name="Shape 32"/>
           <p:cNvSpPr/>
           <p:nvPr/>
         </p:nvSpPr>
@@ -18127,7 +18410,7 @@
       </p:sp>
       <p:sp>
         <p:nvSpPr>
-          <p:cNvPr id="35" name="Shape 32"/>
+          <p:cNvPr id="36" name="Shape 33"/>
           <p:cNvSpPr/>
           <p:nvPr/>
         </p:nvSpPr>
@@ -18147,7 +18430,7 @@
       </p:sp>
       <p:sp>
         <p:nvSpPr>
-          <p:cNvPr id="36" name="Text 33"/>
+          <p:cNvPr id="37" name="Text 34"/>
           <p:cNvSpPr/>
           <p:nvPr/>
         </p:nvSpPr>
@@ -18186,7 +18469,7 @@
       </p:sp>
       <p:sp>
         <p:nvSpPr>
-          <p:cNvPr id="37" name="Text 34"/>
+          <p:cNvPr id="38" name="Text 35"/>
           <p:cNvSpPr/>
           <p:nvPr/>
         </p:nvSpPr>
@@ -18225,7 +18508,7 @@
       </p:sp>
       <p:sp>
         <p:nvSpPr>
-          <p:cNvPr id="38" name="Shape 35"/>
+          <p:cNvPr id="39" name="Shape 36"/>
           <p:cNvSpPr/>
           <p:nvPr/>
         </p:nvSpPr>
@@ -18247,7 +18530,7 @@
       </p:sp>
       <p:sp>
         <p:nvSpPr>
-          <p:cNvPr id="39" name="Shape 36"/>
+          <p:cNvPr id="40" name="Shape 37"/>
           <p:cNvSpPr/>
           <p:nvPr/>
         </p:nvSpPr>
@@ -18267,7 +18550,7 @@
       </p:sp>
       <p:sp>
         <p:nvSpPr>
-          <p:cNvPr id="40" name="Text 37"/>
+          <p:cNvPr id="41" name="Text 38"/>
           <p:cNvSpPr/>
           <p:nvPr/>
         </p:nvSpPr>
@@ -18306,7 +18589,7 @@
       </p:sp>
       <p:sp>
         <p:nvSpPr>
-          <p:cNvPr id="41" name="Text 38"/>
+          <p:cNvPr id="42" name="Text 39"/>
           <p:cNvSpPr/>
           <p:nvPr/>
         </p:nvSpPr>
@@ -18345,7 +18628,7 @@
       </p:sp>
       <p:sp>
         <p:nvSpPr>
-          <p:cNvPr id="42" name="Shape 39"/>
+          <p:cNvPr id="43" name="Shape 40"/>
           <p:cNvSpPr/>
           <p:nvPr/>
         </p:nvSpPr>
@@ -18372,7 +18655,7 @@
       </p:sp>
       <p:sp>
         <p:nvSpPr>
-          <p:cNvPr id="43" name="Shape 40"/>
+          <p:cNvPr id="44" name="Shape 41"/>
           <p:cNvSpPr/>
           <p:nvPr/>
         </p:nvSpPr>
@@ -18392,7 +18675,7 @@
       </p:sp>
       <p:sp>
         <p:nvSpPr>
-          <p:cNvPr id="44" name="Text 41"/>
+          <p:cNvPr id="45" name="Text 42"/>
           <p:cNvSpPr/>
           <p:nvPr/>
         </p:nvSpPr>
@@ -18431,7 +18714,7 @@
       </p:sp>
       <p:sp>
         <p:nvSpPr>
-          <p:cNvPr id="45" name="Text 42"/>
+          <p:cNvPr id="46" name="Text 43"/>
           <p:cNvSpPr/>
           <p:nvPr/>
         </p:nvSpPr>
@@ -18470,7 +18753,7 @@
       </p:sp>
       <p:sp>
         <p:nvSpPr>
-          <p:cNvPr id="46" name="Shape 43"/>
+          <p:cNvPr id="47" name="Shape 44"/>
           <p:cNvSpPr/>
           <p:nvPr/>
         </p:nvSpPr>
@@ -18497,7 +18780,7 @@
       </p:sp>
       <p:sp>
         <p:nvSpPr>
-          <p:cNvPr id="47" name="Shape 44"/>
+          <p:cNvPr id="48" name="Shape 45"/>
           <p:cNvSpPr/>
           <p:nvPr/>
         </p:nvSpPr>
@@ -18517,7 +18800,7 @@
       </p:sp>
       <p:sp>
         <p:nvSpPr>
-          <p:cNvPr id="48" name="Text 45"/>
+          <p:cNvPr id="49" name="Text 46"/>
           <p:cNvSpPr/>
           <p:nvPr/>
         </p:nvSpPr>
@@ -18556,7 +18839,7 @@
       </p:sp>
       <p:sp>
         <p:nvSpPr>
-          <p:cNvPr id="49" name="Text 46"/>
+          <p:cNvPr id="50" name="Text 47"/>
           <p:cNvSpPr/>
           <p:nvPr/>
         </p:nvSpPr>
@@ -18595,7 +18878,7 @@
       </p:sp>
       <p:sp>
         <p:nvSpPr>
-          <p:cNvPr id="50" name="Shape 47"/>
+          <p:cNvPr id="51" name="Shape 48"/>
           <p:cNvSpPr/>
           <p:nvPr/>
         </p:nvSpPr>
@@ -18622,7 +18905,7 @@
       </p:sp>
       <p:sp>
         <p:nvSpPr>
-          <p:cNvPr id="51" name="Text 48"/>
+          <p:cNvPr id="52" name="Text 49"/>
           <p:cNvSpPr/>
           <p:nvPr/>
         </p:nvSpPr>
@@ -18674,7 +18957,7 @@
         </p:nvSpPr>
         <p:spPr>
           <a:xfrm>
-            <a:off x="11368735" y="6437376"/>
+            <a:off x="11368735" y="6327648"/>
             <a:ext cx="365760" cy="274320"/>
           </a:xfrm>
           <a:prstGeom prst="rect">
@@ -18721,13 +19004,6 @@
 <file path=ppt/slides/slide4.xml><?xml version="1.0" encoding="utf-8"?>
 <p:sld xmlns:a="http://schemas.openxmlformats.org/drawingml/2006/main" xmlns:r="http://schemas.openxmlformats.org/officeDocument/2006/relationships" xmlns:p="http://schemas.openxmlformats.org/presentationml/2006/main">
   <p:cSld name="Slide 4">
-    <p:bg>
-      <p:bgPr>
-        <a:solidFill>
-          <a:srgbClr val="FFFFFF"/>
-        </a:solidFill>
-      </p:bgPr>
-    </p:bg>
     <p:spTree>
       <p:nvGrpSpPr>
         <p:cNvPr id="1" name=""/>
@@ -18744,7 +19020,29 @@
       </p:grpSpPr>
       <p:sp>
         <p:nvSpPr>
-          <p:cNvPr id="2" name="Text 0"/>
+          <p:cNvPr id="2" name="Shape 0"/>
+          <p:cNvSpPr/>
+          <p:nvPr/>
+        </p:nvSpPr>
+        <p:spPr>
+          <a:xfrm>
+            <a:off x="231343" y="194767"/>
+            <a:ext cx="11716207" cy="6473952"/>
+          </a:xfrm>
+          <a:prstGeom prst="roundRect">
+            <a:avLst>
+              <a:gd name="adj" fmla="val 3107"/>
+            </a:avLst>
+          </a:prstGeom>
+          <a:solidFill>
+            <a:srgbClr val="FFFFFF"/>
+          </a:solidFill>
+          <a:ln/>
+        </p:spPr>
+      </p:sp>
+      <p:sp>
+        <p:nvSpPr>
+          <p:cNvPr id="3" name="Text 1"/>
           <p:cNvSpPr/>
           <p:nvPr/>
         </p:nvSpPr>
@@ -18783,7 +19081,7 @@
       </p:sp>
       <p:sp>
         <p:nvSpPr>
-          <p:cNvPr id="3" name="Text 1"/>
+          <p:cNvPr id="4" name="Text 2"/>
           <p:cNvSpPr/>
           <p:nvPr/>
         </p:nvSpPr>
@@ -18825,7 +19123,7 @@
       </p:sp>
       <p:sp>
         <p:nvSpPr>
-          <p:cNvPr id="4" name="Shape 2"/>
+          <p:cNvPr id="5" name="Shape 3"/>
           <p:cNvSpPr/>
           <p:nvPr/>
         </p:nvSpPr>
@@ -18847,7 +19145,7 @@
       </p:sp>
       <p:sp>
         <p:nvSpPr>
-          <p:cNvPr id="5" name="Text 3"/>
+          <p:cNvPr id="6" name="Text 4"/>
           <p:cNvSpPr/>
           <p:nvPr/>
         </p:nvSpPr>
@@ -18886,7 +19184,7 @@
       </p:sp>
       <p:pic>
         <p:nvPicPr>
-          <p:cNvPr id="6" name="Image 0" descr="preencoded.png">    </p:cNvPr>
+          <p:cNvPr id="7" name="Image 0" descr="preencoded.png">    </p:cNvPr>
           <p:cNvPicPr>
             <a:picLocks noChangeAspect="1"/>
           </p:cNvPicPr>
@@ -18900,7 +19198,7 @@
         </p:blipFill>
         <p:spPr>
           <a:xfrm>
-            <a:off x="566928" y="6254496"/>
+            <a:off x="566928" y="6126480"/>
             <a:ext cx="1481328" cy="457200"/>
           </a:xfrm>
           <a:prstGeom prst="rect">
@@ -18910,7 +19208,7 @@
       </p:pic>
       <p:sp>
         <p:nvSpPr>
-          <p:cNvPr id="7" name="Shape 4"/>
+          <p:cNvPr id="8" name="Shape 5"/>
           <p:cNvSpPr/>
           <p:nvPr/>
         </p:nvSpPr>
@@ -18937,7 +19235,7 @@
       </p:sp>
       <p:sp>
         <p:nvSpPr>
-          <p:cNvPr id="8" name="Text 5"/>
+          <p:cNvPr id="9" name="Text 6"/>
           <p:cNvSpPr/>
           <p:nvPr/>
         </p:nvSpPr>
@@ -18976,7 +19274,7 @@
       </p:sp>
       <p:sp>
         <p:nvSpPr>
-          <p:cNvPr id="9" name="Text 6"/>
+          <p:cNvPr id="10" name="Text 7"/>
           <p:cNvSpPr/>
           <p:nvPr/>
         </p:nvSpPr>
@@ -19018,7 +19316,7 @@
       </p:sp>
       <p:sp>
         <p:nvSpPr>
-          <p:cNvPr id="10" name="Shape 7"/>
+          <p:cNvPr id="11" name="Shape 8"/>
           <p:cNvSpPr/>
           <p:nvPr/>
         </p:nvSpPr>
@@ -19045,7 +19343,7 @@
       </p:sp>
       <p:sp>
         <p:nvSpPr>
-          <p:cNvPr id="11" name="Text 8"/>
+          <p:cNvPr id="12" name="Text 9"/>
           <p:cNvSpPr/>
           <p:nvPr/>
         </p:nvSpPr>
@@ -19084,7 +19382,7 @@
       </p:sp>
       <p:sp>
         <p:nvSpPr>
-          <p:cNvPr id="12" name="Text 9"/>
+          <p:cNvPr id="13" name="Text 10"/>
           <p:cNvSpPr/>
           <p:nvPr/>
         </p:nvSpPr>
@@ -19126,7 +19424,7 @@
       </p:sp>
       <p:sp>
         <p:nvSpPr>
-          <p:cNvPr id="13" name="Shape 10"/>
+          <p:cNvPr id="14" name="Shape 11"/>
           <p:cNvSpPr/>
           <p:nvPr/>
         </p:nvSpPr>
@@ -19153,7 +19451,7 @@
       </p:sp>
       <p:sp>
         <p:nvSpPr>
-          <p:cNvPr id="14" name="Text 11"/>
+          <p:cNvPr id="15" name="Text 12"/>
           <p:cNvSpPr/>
           <p:nvPr/>
         </p:nvSpPr>
@@ -19192,7 +19490,7 @@
       </p:sp>
       <p:sp>
         <p:nvSpPr>
-          <p:cNvPr id="15" name="Text 12"/>
+          <p:cNvPr id="16" name="Text 13"/>
           <p:cNvSpPr/>
           <p:nvPr/>
         </p:nvSpPr>
@@ -19234,7 +19532,7 @@
       </p:sp>
       <p:sp>
         <p:nvSpPr>
-          <p:cNvPr id="16" name="Shape 13"/>
+          <p:cNvPr id="17" name="Shape 14"/>
           <p:cNvSpPr/>
           <p:nvPr/>
         </p:nvSpPr>
@@ -19261,7 +19559,7 @@
       </p:sp>
       <p:sp>
         <p:nvSpPr>
-          <p:cNvPr id="17" name="Text 14"/>
+          <p:cNvPr id="18" name="Text 15"/>
           <p:cNvSpPr/>
           <p:nvPr/>
         </p:nvSpPr>
@@ -19300,7 +19598,7 @@
       </p:sp>
       <p:sp>
         <p:nvSpPr>
-          <p:cNvPr id="18" name="Text 15"/>
+          <p:cNvPr id="19" name="Text 16"/>
           <p:cNvSpPr/>
           <p:nvPr/>
         </p:nvSpPr>
@@ -19342,7 +19640,7 @@
       </p:sp>
       <p:sp>
         <p:nvSpPr>
-          <p:cNvPr id="19" name="Shape 16"/>
+          <p:cNvPr id="20" name="Shape 17"/>
           <p:cNvSpPr/>
           <p:nvPr/>
         </p:nvSpPr>
@@ -19369,7 +19667,7 @@
       </p:sp>
       <p:sp>
         <p:nvSpPr>
-          <p:cNvPr id="20" name="Text 17"/>
+          <p:cNvPr id="21" name="Text 18"/>
           <p:cNvSpPr/>
           <p:nvPr/>
         </p:nvSpPr>
@@ -19408,7 +19706,7 @@
       </p:sp>
       <p:sp>
         <p:nvSpPr>
-          <p:cNvPr id="21" name="Text 18"/>
+          <p:cNvPr id="22" name="Text 19"/>
           <p:cNvSpPr/>
           <p:nvPr/>
         </p:nvSpPr>
@@ -19450,7 +19748,7 @@
       </p:sp>
       <p:sp>
         <p:nvSpPr>
-          <p:cNvPr id="22" name="Shape 19"/>
+          <p:cNvPr id="23" name="Shape 20"/>
           <p:cNvSpPr/>
           <p:nvPr/>
         </p:nvSpPr>
@@ -19477,7 +19775,7 @@
       </p:sp>
       <p:sp>
         <p:nvSpPr>
-          <p:cNvPr id="23" name="Text 20"/>
+          <p:cNvPr id="24" name="Text 21"/>
           <p:cNvSpPr/>
           <p:nvPr/>
         </p:nvSpPr>
@@ -19516,7 +19814,7 @@
       </p:sp>
       <p:sp>
         <p:nvSpPr>
-          <p:cNvPr id="24" name="Text 21"/>
+          <p:cNvPr id="25" name="Text 22"/>
           <p:cNvSpPr/>
           <p:nvPr/>
         </p:nvSpPr>
@@ -19558,7 +19856,7 @@
       </p:sp>
       <p:sp>
         <p:nvSpPr>
-          <p:cNvPr id="25" name="Shape 22"/>
+          <p:cNvPr id="26" name="Shape 23"/>
           <p:cNvSpPr/>
           <p:nvPr/>
         </p:nvSpPr>
@@ -19585,7 +19883,7 @@
       </p:sp>
       <p:sp>
         <p:nvSpPr>
-          <p:cNvPr id="26" name="Text 23"/>
+          <p:cNvPr id="27" name="Text 24"/>
           <p:cNvSpPr/>
           <p:nvPr/>
         </p:nvSpPr>
@@ -19637,7 +19935,7 @@
         </p:nvSpPr>
         <p:spPr>
           <a:xfrm>
-            <a:off x="11368735" y="6437376"/>
+            <a:off x="11368735" y="6327648"/>
             <a:ext cx="365760" cy="274320"/>
           </a:xfrm>
           <a:prstGeom prst="rect">
@@ -19684,13 +19982,6 @@
 <file path=ppt/slides/slide5.xml><?xml version="1.0" encoding="utf-8"?>
 <p:sld xmlns:a="http://schemas.openxmlformats.org/drawingml/2006/main" xmlns:r="http://schemas.openxmlformats.org/officeDocument/2006/relationships" xmlns:p="http://schemas.openxmlformats.org/presentationml/2006/main">
   <p:cSld name="Slide 5">
-    <p:bg>
-      <p:bgPr>
-        <a:solidFill>
-          <a:srgbClr val="FFFFFF"/>
-        </a:solidFill>
-      </p:bgPr>
-    </p:bg>
     <p:spTree>
       <p:nvGrpSpPr>
         <p:cNvPr id="1" name=""/>
@@ -19707,7 +19998,29 @@
       </p:grpSpPr>
       <p:sp>
         <p:nvSpPr>
-          <p:cNvPr id="2" name="Text 0"/>
+          <p:cNvPr id="2" name="Shape 0"/>
+          <p:cNvSpPr/>
+          <p:nvPr/>
+        </p:nvSpPr>
+        <p:spPr>
+          <a:xfrm>
+            <a:off x="231343" y="194767"/>
+            <a:ext cx="11716207" cy="6473952"/>
+          </a:xfrm>
+          <a:prstGeom prst="roundRect">
+            <a:avLst>
+              <a:gd name="adj" fmla="val 3107"/>
+            </a:avLst>
+          </a:prstGeom>
+          <a:solidFill>
+            <a:srgbClr val="FFFFFF"/>
+          </a:solidFill>
+          <a:ln/>
+        </p:spPr>
+      </p:sp>
+      <p:sp>
+        <p:nvSpPr>
+          <p:cNvPr id="3" name="Text 1"/>
           <p:cNvSpPr/>
           <p:nvPr/>
         </p:nvSpPr>
@@ -19746,7 +20059,7 @@
       </p:sp>
       <p:sp>
         <p:nvSpPr>
-          <p:cNvPr id="3" name="Text 1"/>
+          <p:cNvPr id="4" name="Text 2"/>
           <p:cNvSpPr/>
           <p:nvPr/>
         </p:nvSpPr>
@@ -19785,7 +20098,7 @@
       </p:sp>
       <p:sp>
         <p:nvSpPr>
-          <p:cNvPr id="4" name="Shape 2"/>
+          <p:cNvPr id="5" name="Shape 3"/>
           <p:cNvSpPr/>
           <p:nvPr/>
         </p:nvSpPr>
@@ -19807,7 +20120,7 @@
       </p:sp>
       <p:sp>
         <p:nvSpPr>
-          <p:cNvPr id="5" name="Text 3"/>
+          <p:cNvPr id="6" name="Text 4"/>
           <p:cNvSpPr/>
           <p:nvPr/>
         </p:nvSpPr>
@@ -19846,7 +20159,7 @@
       </p:sp>
       <p:pic>
         <p:nvPicPr>
-          <p:cNvPr id="6" name="Image 0" descr="preencoded.png">    </p:cNvPr>
+          <p:cNvPr id="7" name="Image 0" descr="preencoded.png">    </p:cNvPr>
           <p:cNvPicPr>
             <a:picLocks noChangeAspect="1"/>
           </p:cNvPicPr>
@@ -19860,7 +20173,7 @@
         </p:blipFill>
         <p:spPr>
           <a:xfrm>
-            <a:off x="566928" y="6254496"/>
+            <a:off x="566928" y="6126480"/>
             <a:ext cx="1481328" cy="457200"/>
           </a:xfrm>
           <a:prstGeom prst="rect">
@@ -19870,7 +20183,7 @@
       </p:pic>
       <p:sp>
         <p:nvSpPr>
-          <p:cNvPr id="7" name="Shape 4"/>
+          <p:cNvPr id="8" name="Shape 5"/>
           <p:cNvSpPr/>
           <p:nvPr/>
         </p:nvSpPr>
@@ -19892,7 +20205,7 @@
       </p:sp>
       <p:sp>
         <p:nvSpPr>
-          <p:cNvPr id="8" name="Shape 5"/>
+          <p:cNvPr id="9" name="Shape 6"/>
           <p:cNvSpPr/>
           <p:nvPr/>
         </p:nvSpPr>
@@ -19912,7 +20225,7 @@
       </p:sp>
       <p:sp>
         <p:nvSpPr>
-          <p:cNvPr id="9" name="Text 6"/>
+          <p:cNvPr id="10" name="Text 7"/>
           <p:cNvSpPr/>
           <p:nvPr/>
         </p:nvSpPr>
@@ -19951,7 +20264,7 @@
       </p:sp>
       <p:sp>
         <p:nvSpPr>
-          <p:cNvPr id="10" name="Text 7"/>
+          <p:cNvPr id="11" name="Text 8"/>
           <p:cNvSpPr/>
           <p:nvPr/>
         </p:nvSpPr>
@@ -19990,7 +20303,7 @@
       </p:sp>
       <p:sp>
         <p:nvSpPr>
-          <p:cNvPr id="11" name="Text 8"/>
+          <p:cNvPr id="12" name="Text 9"/>
           <p:cNvSpPr/>
           <p:nvPr/>
         </p:nvSpPr>
@@ -20032,7 +20345,7 @@
       </p:sp>
       <p:sp>
         <p:nvSpPr>
-          <p:cNvPr id="12" name="Shape 9"/>
+          <p:cNvPr id="13" name="Shape 10"/>
           <p:cNvSpPr/>
           <p:nvPr/>
         </p:nvSpPr>
@@ -20054,7 +20367,7 @@
       </p:sp>
       <p:sp>
         <p:nvSpPr>
-          <p:cNvPr id="13" name="Shape 10"/>
+          <p:cNvPr id="14" name="Shape 11"/>
           <p:cNvSpPr/>
           <p:nvPr/>
         </p:nvSpPr>
@@ -20074,7 +20387,7 @@
       </p:sp>
       <p:sp>
         <p:nvSpPr>
-          <p:cNvPr id="14" name="Text 11"/>
+          <p:cNvPr id="15" name="Text 12"/>
           <p:cNvSpPr/>
           <p:nvPr/>
         </p:nvSpPr>
@@ -20113,7 +20426,7 @@
       </p:sp>
       <p:sp>
         <p:nvSpPr>
-          <p:cNvPr id="15" name="Text 12"/>
+          <p:cNvPr id="16" name="Text 13"/>
           <p:cNvSpPr/>
           <p:nvPr/>
         </p:nvSpPr>
@@ -20152,7 +20465,7 @@
       </p:sp>
       <p:sp>
         <p:nvSpPr>
-          <p:cNvPr id="16" name="Text 13"/>
+          <p:cNvPr id="17" name="Text 14"/>
           <p:cNvSpPr/>
           <p:nvPr/>
         </p:nvSpPr>
@@ -20194,7 +20507,7 @@
       </p:sp>
       <p:sp>
         <p:nvSpPr>
-          <p:cNvPr id="17" name="Shape 14"/>
+          <p:cNvPr id="18" name="Shape 15"/>
           <p:cNvSpPr/>
           <p:nvPr/>
         </p:nvSpPr>
@@ -20216,7 +20529,7 @@
       </p:sp>
       <p:sp>
         <p:nvSpPr>
-          <p:cNvPr id="18" name="Shape 15"/>
+          <p:cNvPr id="19" name="Shape 16"/>
           <p:cNvSpPr/>
           <p:nvPr/>
         </p:nvSpPr>
@@ -20236,7 +20549,7 @@
       </p:sp>
       <p:sp>
         <p:nvSpPr>
-          <p:cNvPr id="19" name="Text 16"/>
+          <p:cNvPr id="20" name="Text 17"/>
           <p:cNvSpPr/>
           <p:nvPr/>
         </p:nvSpPr>
@@ -20275,7 +20588,7 @@
       </p:sp>
       <p:sp>
         <p:nvSpPr>
-          <p:cNvPr id="20" name="Text 17"/>
+          <p:cNvPr id="21" name="Text 18"/>
           <p:cNvSpPr/>
           <p:nvPr/>
         </p:nvSpPr>
@@ -20314,7 +20627,7 @@
       </p:sp>
       <p:sp>
         <p:nvSpPr>
-          <p:cNvPr id="21" name="Text 18"/>
+          <p:cNvPr id="22" name="Text 19"/>
           <p:cNvSpPr/>
           <p:nvPr/>
         </p:nvSpPr>
@@ -20356,7 +20669,7 @@
       </p:sp>
       <p:sp>
         <p:nvSpPr>
-          <p:cNvPr id="22" name="Shape 19"/>
+          <p:cNvPr id="23" name="Shape 20"/>
           <p:cNvSpPr/>
           <p:nvPr/>
         </p:nvSpPr>
@@ -20378,7 +20691,7 @@
       </p:sp>
       <p:sp>
         <p:nvSpPr>
-          <p:cNvPr id="23" name="Text 20"/>
+          <p:cNvPr id="24" name="Text 21"/>
           <p:cNvSpPr/>
           <p:nvPr/>
         </p:nvSpPr>
@@ -20417,7 +20730,7 @@
       </p:sp>
       <p:sp>
         <p:nvSpPr>
-          <p:cNvPr id="24" name="Text 21"/>
+          <p:cNvPr id="25" name="Text 22"/>
           <p:cNvSpPr/>
           <p:nvPr/>
         </p:nvSpPr>
@@ -20469,7 +20782,7 @@
         </p:nvSpPr>
         <p:spPr>
           <a:xfrm>
-            <a:off x="11368735" y="6437376"/>
+            <a:off x="11368735" y="6327648"/>
             <a:ext cx="365760" cy="274320"/>
           </a:xfrm>
           <a:prstGeom prst="rect">
@@ -20516,13 +20829,6 @@
 <file path=ppt/slides/slide6.xml><?xml version="1.0" encoding="utf-8"?>
 <p:sld xmlns:a="http://schemas.openxmlformats.org/drawingml/2006/main" xmlns:r="http://schemas.openxmlformats.org/officeDocument/2006/relationships" xmlns:p="http://schemas.openxmlformats.org/presentationml/2006/main">
   <p:cSld name="Slide 6">
-    <p:bg>
-      <p:bgPr>
-        <a:solidFill>
-          <a:srgbClr val="FFFFFF"/>
-        </a:solidFill>
-      </p:bgPr>
-    </p:bg>
     <p:spTree>
       <p:nvGrpSpPr>
         <p:cNvPr id="1" name=""/>
@@ -20539,7 +20845,29 @@
       </p:grpSpPr>
       <p:sp>
         <p:nvSpPr>
-          <p:cNvPr id="2" name="Text 0"/>
+          <p:cNvPr id="2" name="Shape 0"/>
+          <p:cNvSpPr/>
+          <p:nvPr/>
+        </p:nvSpPr>
+        <p:spPr>
+          <a:xfrm>
+            <a:off x="231343" y="194767"/>
+            <a:ext cx="11716207" cy="6473952"/>
+          </a:xfrm>
+          <a:prstGeom prst="roundRect">
+            <a:avLst>
+              <a:gd name="adj" fmla="val 3107"/>
+            </a:avLst>
+          </a:prstGeom>
+          <a:solidFill>
+            <a:srgbClr val="FFFFFF"/>
+          </a:solidFill>
+          <a:ln/>
+        </p:spPr>
+      </p:sp>
+      <p:sp>
+        <p:nvSpPr>
+          <p:cNvPr id="3" name="Text 1"/>
           <p:cNvSpPr/>
           <p:nvPr/>
         </p:nvSpPr>
@@ -20578,7 +20906,7 @@
       </p:sp>
       <p:sp>
         <p:nvSpPr>
-          <p:cNvPr id="3" name="Text 1"/>
+          <p:cNvPr id="4" name="Text 2"/>
           <p:cNvSpPr/>
           <p:nvPr/>
         </p:nvSpPr>
@@ -20617,7 +20945,7 @@
       </p:sp>
       <p:sp>
         <p:nvSpPr>
-          <p:cNvPr id="4" name="Shape 2"/>
+          <p:cNvPr id="5" name="Shape 3"/>
           <p:cNvSpPr/>
           <p:nvPr/>
         </p:nvSpPr>
@@ -20639,7 +20967,7 @@
       </p:sp>
       <p:sp>
         <p:nvSpPr>
-          <p:cNvPr id="5" name="Text 3"/>
+          <p:cNvPr id="6" name="Text 4"/>
           <p:cNvSpPr/>
           <p:nvPr/>
         </p:nvSpPr>
@@ -20678,7 +21006,7 @@
       </p:sp>
       <p:pic>
         <p:nvPicPr>
-          <p:cNvPr id="6" name="Image 0" descr="preencoded.png">    </p:cNvPr>
+          <p:cNvPr id="7" name="Image 0" descr="preencoded.png">    </p:cNvPr>
           <p:cNvPicPr>
             <a:picLocks noChangeAspect="1"/>
           </p:cNvPicPr>
@@ -20692,7 +21020,7 @@
         </p:blipFill>
         <p:spPr>
           <a:xfrm>
-            <a:off x="566928" y="6254496"/>
+            <a:off x="566928" y="6126480"/>
             <a:ext cx="1481328" cy="457200"/>
           </a:xfrm>
           <a:prstGeom prst="rect">
@@ -20702,7 +21030,7 @@
       </p:pic>
       <p:sp>
         <p:nvSpPr>
-          <p:cNvPr id="7" name="Shape 4"/>
+          <p:cNvPr id="8" name="Shape 5"/>
           <p:cNvSpPr/>
           <p:nvPr/>
         </p:nvSpPr>
@@ -20724,7 +21052,7 @@
       </p:sp>
       <p:sp>
         <p:nvSpPr>
-          <p:cNvPr id="8" name="Text 5"/>
+          <p:cNvPr id="9" name="Text 6"/>
           <p:cNvSpPr/>
           <p:nvPr/>
         </p:nvSpPr>
@@ -20763,7 +21091,7 @@
       </p:sp>
       <p:sp>
         <p:nvSpPr>
-          <p:cNvPr id="9" name="Text 6"/>
+          <p:cNvPr id="10" name="Text 7"/>
           <p:cNvSpPr/>
           <p:nvPr/>
         </p:nvSpPr>
@@ -20802,7 +21130,7 @@
       </p:sp>
       <p:sp>
         <p:nvSpPr>
-          <p:cNvPr id="10" name="Text 7"/>
+          <p:cNvPr id="11" name="Text 8"/>
           <p:cNvSpPr/>
           <p:nvPr/>
         </p:nvSpPr>
@@ -20841,7 +21169,7 @@
       </p:sp>
       <p:sp>
         <p:nvSpPr>
-          <p:cNvPr id="11" name="Shape 8"/>
+          <p:cNvPr id="12" name="Shape 9"/>
           <p:cNvSpPr/>
           <p:nvPr/>
         </p:nvSpPr>
@@ -20868,7 +21196,7 @@
       </p:sp>
       <p:sp>
         <p:nvSpPr>
-          <p:cNvPr id="12" name="Text 9"/>
+          <p:cNvPr id="13" name="Text 10"/>
           <p:cNvSpPr/>
           <p:nvPr/>
         </p:nvSpPr>
@@ -20907,7 +21235,7 @@
       </p:sp>
       <p:sp>
         <p:nvSpPr>
-          <p:cNvPr id="13" name="Text 10"/>
+          <p:cNvPr id="14" name="Text 11"/>
           <p:cNvSpPr/>
           <p:nvPr/>
         </p:nvSpPr>
@@ -20946,7 +21274,7 @@
       </p:sp>
       <p:sp>
         <p:nvSpPr>
-          <p:cNvPr id="14" name="Text 11"/>
+          <p:cNvPr id="15" name="Text 12"/>
           <p:cNvSpPr/>
           <p:nvPr/>
         </p:nvSpPr>
@@ -20985,7 +21313,7 @@
       </p:sp>
       <p:sp>
         <p:nvSpPr>
-          <p:cNvPr id="15" name="Shape 12"/>
+          <p:cNvPr id="16" name="Shape 13"/>
           <p:cNvSpPr/>
           <p:nvPr/>
         </p:nvSpPr>
@@ -21007,7 +21335,7 @@
       </p:sp>
       <p:sp>
         <p:nvSpPr>
-          <p:cNvPr id="16" name="Text 13"/>
+          <p:cNvPr id="17" name="Text 14"/>
           <p:cNvSpPr/>
           <p:nvPr/>
         </p:nvSpPr>
@@ -21046,7 +21374,7 @@
       </p:sp>
       <p:sp>
         <p:nvSpPr>
-          <p:cNvPr id="17" name="Text 14"/>
+          <p:cNvPr id="18" name="Text 15"/>
           <p:cNvSpPr/>
           <p:nvPr/>
         </p:nvSpPr>
@@ -21088,7 +21416,7 @@
       </p:sp>
       <p:sp>
         <p:nvSpPr>
-          <p:cNvPr id="18" name="Shape 15"/>
+          <p:cNvPr id="19" name="Shape 16"/>
           <p:cNvSpPr/>
           <p:nvPr/>
         </p:nvSpPr>
@@ -21110,7 +21438,7 @@
       </p:sp>
       <p:sp>
         <p:nvSpPr>
-          <p:cNvPr id="19" name="Text 16"/>
+          <p:cNvPr id="20" name="Text 17"/>
           <p:cNvSpPr/>
           <p:nvPr/>
         </p:nvSpPr>
@@ -21149,7 +21477,7 @@
       </p:sp>
       <p:sp>
         <p:nvSpPr>
-          <p:cNvPr id="20" name="Text 17"/>
+          <p:cNvPr id="21" name="Text 18"/>
           <p:cNvSpPr/>
           <p:nvPr/>
         </p:nvSpPr>
@@ -21201,7 +21529,7 @@
         </p:nvSpPr>
         <p:spPr>
           <a:xfrm>
-            <a:off x="11368735" y="6437376"/>
+            <a:off x="11368735" y="6327648"/>
             <a:ext cx="365760" cy="274320"/>
           </a:xfrm>
           <a:prstGeom prst="rect">
@@ -21248,13 +21576,6 @@
 <file path=ppt/slides/slide7.xml><?xml version="1.0" encoding="utf-8"?>
 <p:sld xmlns:a="http://schemas.openxmlformats.org/drawingml/2006/main" xmlns:r="http://schemas.openxmlformats.org/officeDocument/2006/relationships" xmlns:p="http://schemas.openxmlformats.org/presentationml/2006/main">
   <p:cSld name="Slide 7">
-    <p:bg>
-      <p:bgPr>
-        <a:solidFill>
-          <a:srgbClr val="FFFFFF"/>
-        </a:solidFill>
-      </p:bgPr>
-    </p:bg>
     <p:spTree>
       <p:nvGrpSpPr>
         <p:cNvPr id="1" name=""/>
@@ -21271,7 +21592,29 @@
       </p:grpSpPr>
       <p:sp>
         <p:nvSpPr>
-          <p:cNvPr id="2" name="Text 0"/>
+          <p:cNvPr id="2" name="Shape 0"/>
+          <p:cNvSpPr/>
+          <p:nvPr/>
+        </p:nvSpPr>
+        <p:spPr>
+          <a:xfrm>
+            <a:off x="231343" y="194767"/>
+            <a:ext cx="11716207" cy="6473952"/>
+          </a:xfrm>
+          <a:prstGeom prst="roundRect">
+            <a:avLst>
+              <a:gd name="adj" fmla="val 3107"/>
+            </a:avLst>
+          </a:prstGeom>
+          <a:solidFill>
+            <a:srgbClr val="FFFFFF"/>
+          </a:solidFill>
+          <a:ln/>
+        </p:spPr>
+      </p:sp>
+      <p:sp>
+        <p:nvSpPr>
+          <p:cNvPr id="3" name="Text 1"/>
           <p:cNvSpPr/>
           <p:nvPr/>
         </p:nvSpPr>
@@ -21310,7 +21653,7 @@
       </p:sp>
       <p:sp>
         <p:nvSpPr>
-          <p:cNvPr id="3" name="Text 1"/>
+          <p:cNvPr id="4" name="Text 2"/>
           <p:cNvSpPr/>
           <p:nvPr/>
         </p:nvSpPr>
@@ -21349,7 +21692,7 @@
       </p:sp>
       <p:sp>
         <p:nvSpPr>
-          <p:cNvPr id="4" name="Shape 2"/>
+          <p:cNvPr id="5" name="Shape 3"/>
           <p:cNvSpPr/>
           <p:nvPr/>
         </p:nvSpPr>
@@ -21371,7 +21714,7 @@
       </p:sp>
       <p:sp>
         <p:nvSpPr>
-          <p:cNvPr id="5" name="Text 3"/>
+          <p:cNvPr id="6" name="Text 4"/>
           <p:cNvSpPr/>
           <p:nvPr/>
         </p:nvSpPr>
@@ -21410,7 +21753,7 @@
       </p:sp>
       <p:pic>
         <p:nvPicPr>
-          <p:cNvPr id="6" name="Image 0" descr="preencoded.png">    </p:cNvPr>
+          <p:cNvPr id="7" name="Image 0" descr="preencoded.png">    </p:cNvPr>
           <p:cNvPicPr>
             <a:picLocks noChangeAspect="1"/>
           </p:cNvPicPr>
@@ -21424,7 +21767,7 @@
         </p:blipFill>
         <p:spPr>
           <a:xfrm>
-            <a:off x="566928" y="6254496"/>
+            <a:off x="566928" y="6126480"/>
             <a:ext cx="1481328" cy="457200"/>
           </a:xfrm>
           <a:prstGeom prst="rect">
@@ -21434,7 +21777,7 @@
       </p:pic>
       <p:sp>
         <p:nvSpPr>
-          <p:cNvPr id="7" name="Shape 4"/>
+          <p:cNvPr id="8" name="Shape 5"/>
           <p:cNvSpPr/>
           <p:nvPr/>
         </p:nvSpPr>
@@ -21461,7 +21804,7 @@
       </p:sp>
       <p:sp>
         <p:nvSpPr>
-          <p:cNvPr id="8" name="Text 5"/>
+          <p:cNvPr id="9" name="Text 6"/>
           <p:cNvSpPr/>
           <p:nvPr/>
         </p:nvSpPr>
@@ -21771,7 +22114,7 @@
       </p:sp>
       <p:sp>
         <p:nvSpPr>
-          <p:cNvPr id="9" name="Shape 6"/>
+          <p:cNvPr id="10" name="Shape 7"/>
           <p:cNvSpPr/>
           <p:nvPr/>
         </p:nvSpPr>
@@ -21798,7 +22141,7 @@
       </p:sp>
       <p:sp>
         <p:nvSpPr>
-          <p:cNvPr id="10" name="Text 7"/>
+          <p:cNvPr id="11" name="Text 8"/>
           <p:cNvSpPr/>
           <p:nvPr/>
         </p:nvSpPr>
@@ -21837,7 +22180,7 @@
       </p:sp>
       <p:sp>
         <p:nvSpPr>
-          <p:cNvPr id="11" name="Text 8"/>
+          <p:cNvPr id="12" name="Text 9"/>
           <p:cNvSpPr/>
           <p:nvPr/>
         </p:nvSpPr>
@@ -21879,7 +22222,7 @@
       </p:sp>
       <p:sp>
         <p:nvSpPr>
-          <p:cNvPr id="12" name="Shape 9"/>
+          <p:cNvPr id="13" name="Shape 10"/>
           <p:cNvSpPr/>
           <p:nvPr/>
         </p:nvSpPr>
@@ -21901,7 +22244,7 @@
       </p:sp>
       <p:sp>
         <p:nvSpPr>
-          <p:cNvPr id="13" name="Text 10"/>
+          <p:cNvPr id="14" name="Text 11"/>
           <p:cNvSpPr/>
           <p:nvPr/>
         </p:nvSpPr>
@@ -21940,7 +22283,7 @@
       </p:sp>
       <p:sp>
         <p:nvSpPr>
-          <p:cNvPr id="14" name="Text 11"/>
+          <p:cNvPr id="15" name="Text 12"/>
           <p:cNvSpPr/>
           <p:nvPr/>
         </p:nvSpPr>
@@ -21982,7 +22325,7 @@
       </p:sp>
       <p:sp>
         <p:nvSpPr>
-          <p:cNvPr id="15" name="Shape 12"/>
+          <p:cNvPr id="16" name="Shape 13"/>
           <p:cNvSpPr/>
           <p:nvPr/>
         </p:nvSpPr>
@@ -22004,7 +22347,7 @@
       </p:sp>
       <p:sp>
         <p:nvSpPr>
-          <p:cNvPr id="16" name="Text 13"/>
+          <p:cNvPr id="17" name="Text 14"/>
           <p:cNvSpPr/>
           <p:nvPr/>
         </p:nvSpPr>
@@ -22043,7 +22386,7 @@
       </p:sp>
       <p:sp>
         <p:nvSpPr>
-          <p:cNvPr id="17" name="Text 14"/>
+          <p:cNvPr id="18" name="Text 15"/>
           <p:cNvSpPr/>
           <p:nvPr/>
         </p:nvSpPr>
@@ -22085,7 +22428,7 @@
       </p:sp>
       <p:sp>
         <p:nvSpPr>
-          <p:cNvPr id="18" name="Shape 15"/>
+          <p:cNvPr id="19" name="Shape 16"/>
           <p:cNvSpPr/>
           <p:nvPr/>
         </p:nvSpPr>
@@ -22112,7 +22455,7 @@
       </p:sp>
       <p:sp>
         <p:nvSpPr>
-          <p:cNvPr id="19" name="Text 16"/>
+          <p:cNvPr id="20" name="Text 17"/>
           <p:cNvSpPr/>
           <p:nvPr/>
         </p:nvSpPr>
@@ -22164,7 +22507,7 @@
         </p:nvSpPr>
         <p:spPr>
           <a:xfrm>
-            <a:off x="11368735" y="6437376"/>
+            <a:off x="11368735" y="6327648"/>
             <a:ext cx="365760" cy="274320"/>
           </a:xfrm>
           <a:prstGeom prst="rect">
@@ -22211,13 +22554,6 @@
 <file path=ppt/slides/slide8.xml><?xml version="1.0" encoding="utf-8"?>
 <p:sld xmlns:a="http://schemas.openxmlformats.org/drawingml/2006/main" xmlns:r="http://schemas.openxmlformats.org/officeDocument/2006/relationships" xmlns:p="http://schemas.openxmlformats.org/presentationml/2006/main">
   <p:cSld name="Slide 8">
-    <p:bg>
-      <p:bgPr>
-        <a:solidFill>
-          <a:srgbClr val="FFFFFF"/>
-        </a:solidFill>
-      </p:bgPr>
-    </p:bg>
     <p:spTree>
       <p:nvGrpSpPr>
         <p:cNvPr id="1" name=""/>
@@ -22234,7 +22570,29 @@
       </p:grpSpPr>
       <p:sp>
         <p:nvSpPr>
-          <p:cNvPr id="2" name="Text 0"/>
+          <p:cNvPr id="2" name="Shape 0"/>
+          <p:cNvSpPr/>
+          <p:nvPr/>
+        </p:nvSpPr>
+        <p:spPr>
+          <a:xfrm>
+            <a:off x="231343" y="194767"/>
+            <a:ext cx="11716207" cy="6473952"/>
+          </a:xfrm>
+          <a:prstGeom prst="roundRect">
+            <a:avLst>
+              <a:gd name="adj" fmla="val 3107"/>
+            </a:avLst>
+          </a:prstGeom>
+          <a:solidFill>
+            <a:srgbClr val="FFFFFF"/>
+          </a:solidFill>
+          <a:ln/>
+        </p:spPr>
+      </p:sp>
+      <p:sp>
+        <p:nvSpPr>
+          <p:cNvPr id="3" name="Text 1"/>
           <p:cNvSpPr/>
           <p:nvPr/>
         </p:nvSpPr>
@@ -22273,7 +22631,7 @@
       </p:sp>
       <p:sp>
         <p:nvSpPr>
-          <p:cNvPr id="3" name="Text 1"/>
+          <p:cNvPr id="4" name="Text 2"/>
           <p:cNvSpPr/>
           <p:nvPr/>
         </p:nvSpPr>
@@ -22312,7 +22670,7 @@
       </p:sp>
       <p:sp>
         <p:nvSpPr>
-          <p:cNvPr id="4" name="Shape 2"/>
+          <p:cNvPr id="5" name="Shape 3"/>
           <p:cNvSpPr/>
           <p:nvPr/>
         </p:nvSpPr>
@@ -22334,7 +22692,7 @@
       </p:sp>
       <p:sp>
         <p:nvSpPr>
-          <p:cNvPr id="5" name="Text 3"/>
+          <p:cNvPr id="6" name="Text 4"/>
           <p:cNvSpPr/>
           <p:nvPr/>
         </p:nvSpPr>
@@ -22373,7 +22731,7 @@
       </p:sp>
       <p:pic>
         <p:nvPicPr>
-          <p:cNvPr id="6" name="Image 0" descr="preencoded.png">    </p:cNvPr>
+          <p:cNvPr id="7" name="Image 0" descr="preencoded.png">    </p:cNvPr>
           <p:cNvPicPr>
             <a:picLocks noChangeAspect="1"/>
           </p:cNvPicPr>
@@ -22387,7 +22745,7 @@
         </p:blipFill>
         <p:spPr>
           <a:xfrm>
-            <a:off x="566928" y="6254496"/>
+            <a:off x="566928" y="6126480"/>
             <a:ext cx="1481328" cy="457200"/>
           </a:xfrm>
           <a:prstGeom prst="rect">
@@ -22397,7 +22755,7 @@
       </p:pic>
       <p:sp>
         <p:nvSpPr>
-          <p:cNvPr id="7" name="Shape 4"/>
+          <p:cNvPr id="8" name="Shape 5"/>
           <p:cNvSpPr/>
           <p:nvPr/>
         </p:nvSpPr>
@@ -22419,7 +22777,7 @@
       </p:sp>
       <p:sp>
         <p:nvSpPr>
-          <p:cNvPr id="8" name="Text 5"/>
+          <p:cNvPr id="9" name="Text 6"/>
           <p:cNvSpPr/>
           <p:nvPr/>
         </p:nvSpPr>
@@ -22458,7 +22816,7 @@
       </p:sp>
       <p:sp>
         <p:nvSpPr>
-          <p:cNvPr id="9" name="Text 6"/>
+          <p:cNvPr id="10" name="Text 7"/>
           <p:cNvSpPr/>
           <p:nvPr/>
         </p:nvSpPr>
@@ -22500,7 +22858,7 @@
       </p:sp>
       <p:sp>
         <p:nvSpPr>
-          <p:cNvPr id="10" name="Shape 7"/>
+          <p:cNvPr id="11" name="Shape 8"/>
           <p:cNvSpPr/>
           <p:nvPr/>
         </p:nvSpPr>
@@ -22522,7 +22880,7 @@
       </p:sp>
       <p:sp>
         <p:nvSpPr>
-          <p:cNvPr id="11" name="Text 8"/>
+          <p:cNvPr id="12" name="Text 9"/>
           <p:cNvSpPr/>
           <p:nvPr/>
         </p:nvSpPr>
@@ -22561,7 +22919,7 @@
       </p:sp>
       <p:sp>
         <p:nvSpPr>
-          <p:cNvPr id="12" name="Text 9"/>
+          <p:cNvPr id="13" name="Text 10"/>
           <p:cNvSpPr/>
           <p:nvPr/>
         </p:nvSpPr>
@@ -22603,7 +22961,7 @@
       </p:sp>
       <p:sp>
         <p:nvSpPr>
-          <p:cNvPr id="13" name="Shape 10"/>
+          <p:cNvPr id="14" name="Shape 11"/>
           <p:cNvSpPr/>
           <p:nvPr/>
         </p:nvSpPr>
@@ -22626,7 +22984,7 @@
       </p:sp>
       <p:sp>
         <p:nvSpPr>
-          <p:cNvPr id="14" name="Shape 11"/>
+          <p:cNvPr id="15" name="Shape 12"/>
           <p:cNvSpPr/>
           <p:nvPr/>
         </p:nvSpPr>
@@ -22653,7 +23011,7 @@
       </p:sp>
       <p:sp>
         <p:nvSpPr>
-          <p:cNvPr id="15" name="Text 12"/>
+          <p:cNvPr id="16" name="Text 13"/>
           <p:cNvSpPr/>
           <p:nvPr/>
         </p:nvSpPr>
@@ -22692,7 +23050,7 @@
       </p:sp>
       <p:sp>
         <p:nvSpPr>
-          <p:cNvPr id="16" name="Shape 13"/>
+          <p:cNvPr id="17" name="Shape 14"/>
           <p:cNvSpPr/>
           <p:nvPr/>
         </p:nvSpPr>
@@ -22719,7 +23077,7 @@
       </p:sp>
       <p:sp>
         <p:nvSpPr>
-          <p:cNvPr id="17" name="Text 14"/>
+          <p:cNvPr id="18" name="Text 15"/>
           <p:cNvSpPr/>
           <p:nvPr/>
         </p:nvSpPr>
@@ -22758,7 +23116,7 @@
       </p:sp>
       <p:sp>
         <p:nvSpPr>
-          <p:cNvPr id="18" name="Shape 15"/>
+          <p:cNvPr id="19" name="Shape 16"/>
           <p:cNvSpPr/>
           <p:nvPr/>
         </p:nvSpPr>
@@ -22785,7 +23143,7 @@
       </p:sp>
       <p:sp>
         <p:nvSpPr>
-          <p:cNvPr id="19" name="Text 16"/>
+          <p:cNvPr id="20" name="Text 17"/>
           <p:cNvSpPr/>
           <p:nvPr/>
         </p:nvSpPr>
@@ -22824,7 +23182,7 @@
       </p:sp>
       <p:sp>
         <p:nvSpPr>
-          <p:cNvPr id="20" name="Text 17"/>
+          <p:cNvPr id="21" name="Text 18"/>
           <p:cNvSpPr/>
           <p:nvPr/>
         </p:nvSpPr>
@@ -22863,13 +23221,13 @@
       </p:sp>
       <p:sp>
         <p:nvSpPr>
-          <p:cNvPr id="21" name="Text 18"/>
-          <p:cNvSpPr/>
-          <p:nvPr/>
-        </p:nvSpPr>
-        <p:spPr>
-          <a:xfrm>
-            <a:off x="8156448" y="4151376"/>
+          <p:cNvPr id="22" name="Text 19"/>
+          <p:cNvSpPr/>
+          <p:nvPr/>
+        </p:nvSpPr>
+        <p:spPr>
+          <a:xfrm>
+            <a:off x="7790688" y="4151376"/>
             <a:ext cx="3840480" cy="219456"/>
           </a:xfrm>
           <a:prstGeom prst="rect">
@@ -22902,7 +23260,7 @@
       </p:sp>
       <p:sp>
         <p:nvSpPr>
-          <p:cNvPr id="22" name="Text 19"/>
+          <p:cNvPr id="23" name="Text 20"/>
           <p:cNvSpPr/>
           <p:nvPr/>
         </p:nvSpPr>
@@ -22941,7 +23299,7 @@
       </p:sp>
       <p:sp>
         <p:nvSpPr>
-          <p:cNvPr id="23" name="Shape 20"/>
+          <p:cNvPr id="24" name="Shape 21"/>
           <p:cNvSpPr/>
           <p:nvPr/>
         </p:nvSpPr>
@@ -22963,7 +23321,7 @@
       </p:sp>
       <p:sp>
         <p:nvSpPr>
-          <p:cNvPr id="24" name="Text 21"/>
+          <p:cNvPr id="25" name="Text 22"/>
           <p:cNvSpPr/>
           <p:nvPr/>
         </p:nvSpPr>
@@ -23002,7 +23360,7 @@
       </p:sp>
       <p:sp>
         <p:nvSpPr>
-          <p:cNvPr id="25" name="Text 22"/>
+          <p:cNvPr id="26" name="Text 23"/>
           <p:cNvSpPr/>
           <p:nvPr/>
         </p:nvSpPr>
@@ -23044,7 +23402,7 @@
       </p:sp>
       <p:sp>
         <p:nvSpPr>
-          <p:cNvPr id="26" name="Shape 23"/>
+          <p:cNvPr id="27" name="Shape 24"/>
           <p:cNvSpPr/>
           <p:nvPr/>
         </p:nvSpPr>
@@ -23066,7 +23424,7 @@
       </p:sp>
       <p:sp>
         <p:nvSpPr>
-          <p:cNvPr id="27" name="Text 24"/>
+          <p:cNvPr id="28" name="Text 25"/>
           <p:cNvSpPr/>
           <p:nvPr/>
         </p:nvSpPr>
@@ -23118,7 +23476,7 @@
         </p:nvSpPr>
         <p:spPr>
           <a:xfrm>
-            <a:off x="11368735" y="6437376"/>
+            <a:off x="11368735" y="6327648"/>
             <a:ext cx="365760" cy="274320"/>
           </a:xfrm>
           <a:prstGeom prst="rect">
@@ -23165,13 +23523,6 @@
 <file path=ppt/slides/slide9.xml><?xml version="1.0" encoding="utf-8"?>
 <p:sld xmlns:a="http://schemas.openxmlformats.org/drawingml/2006/main" xmlns:r="http://schemas.openxmlformats.org/officeDocument/2006/relationships" xmlns:p="http://schemas.openxmlformats.org/presentationml/2006/main">
   <p:cSld name="Slide 9">
-    <p:bg>
-      <p:bgPr>
-        <a:solidFill>
-          <a:srgbClr val="FFFFFF"/>
-        </a:solidFill>
-      </p:bgPr>
-    </p:bg>
     <p:spTree>
       <p:nvGrpSpPr>
         <p:cNvPr id="1" name=""/>
@@ -23188,7 +23539,29 @@
       </p:grpSpPr>
       <p:sp>
         <p:nvSpPr>
-          <p:cNvPr id="2" name="Text 0"/>
+          <p:cNvPr id="2" name="Shape 0"/>
+          <p:cNvSpPr/>
+          <p:nvPr/>
+        </p:nvSpPr>
+        <p:spPr>
+          <a:xfrm>
+            <a:off x="231343" y="194767"/>
+            <a:ext cx="11716207" cy="6473952"/>
+          </a:xfrm>
+          <a:prstGeom prst="roundRect">
+            <a:avLst>
+              <a:gd name="adj" fmla="val 3107"/>
+            </a:avLst>
+          </a:prstGeom>
+          <a:solidFill>
+            <a:srgbClr val="FFFFFF"/>
+          </a:solidFill>
+          <a:ln/>
+        </p:spPr>
+      </p:sp>
+      <p:sp>
+        <p:nvSpPr>
+          <p:cNvPr id="3" name="Text 1"/>
           <p:cNvSpPr/>
           <p:nvPr/>
         </p:nvSpPr>
@@ -23227,7 +23600,7 @@
       </p:sp>
       <p:sp>
         <p:nvSpPr>
-          <p:cNvPr id="3" name="Text 1"/>
+          <p:cNvPr id="4" name="Text 2"/>
           <p:cNvSpPr/>
           <p:nvPr/>
         </p:nvSpPr>
@@ -23266,7 +23639,7 @@
       </p:sp>
       <p:sp>
         <p:nvSpPr>
-          <p:cNvPr id="4" name="Shape 2"/>
+          <p:cNvPr id="5" name="Shape 3"/>
           <p:cNvSpPr/>
           <p:nvPr/>
         </p:nvSpPr>
@@ -23288,7 +23661,7 @@
       </p:sp>
       <p:sp>
         <p:nvSpPr>
-          <p:cNvPr id="5" name="Text 3"/>
+          <p:cNvPr id="6" name="Text 4"/>
           <p:cNvSpPr/>
           <p:nvPr/>
         </p:nvSpPr>
@@ -23327,7 +23700,7 @@
       </p:sp>
       <p:pic>
         <p:nvPicPr>
-          <p:cNvPr id="6" name="Image 0" descr="preencoded.png">    </p:cNvPr>
+          <p:cNvPr id="7" name="Image 0" descr="preencoded.png">    </p:cNvPr>
           <p:cNvPicPr>
             <a:picLocks noChangeAspect="1"/>
           </p:cNvPicPr>
@@ -23341,7 +23714,7 @@
         </p:blipFill>
         <p:spPr>
           <a:xfrm>
-            <a:off x="566928" y="6254496"/>
+            <a:off x="566928" y="6126480"/>
             <a:ext cx="1481328" cy="457200"/>
           </a:xfrm>
           <a:prstGeom prst="rect">
@@ -23351,7 +23724,7 @@
       </p:pic>
       <p:sp>
         <p:nvSpPr>
-          <p:cNvPr id="7" name="Shape 4"/>
+          <p:cNvPr id="8" name="Shape 5"/>
           <p:cNvSpPr/>
           <p:nvPr/>
         </p:nvSpPr>
@@ -23378,7 +23751,7 @@
       </p:sp>
       <p:sp>
         <p:nvSpPr>
-          <p:cNvPr id="8" name="Text 5"/>
+          <p:cNvPr id="9" name="Text 6"/>
           <p:cNvSpPr/>
           <p:nvPr/>
         </p:nvSpPr>
@@ -23577,7 +23950,7 @@
       </p:sp>
       <p:sp>
         <p:nvSpPr>
-          <p:cNvPr id="9" name="Shape 6"/>
+          <p:cNvPr id="10" name="Shape 7"/>
           <p:cNvSpPr/>
           <p:nvPr/>
         </p:nvSpPr>
@@ -23604,7 +23977,7 @@
       </p:sp>
       <p:sp>
         <p:nvSpPr>
-          <p:cNvPr id="10" name="Text 7"/>
+          <p:cNvPr id="11" name="Text 8"/>
           <p:cNvSpPr/>
           <p:nvPr/>
         </p:nvSpPr>
@@ -23643,7 +24016,7 @@
       </p:sp>
       <p:sp>
         <p:nvSpPr>
-          <p:cNvPr id="11" name="Shape 8"/>
+          <p:cNvPr id="12" name="Shape 9"/>
           <p:cNvSpPr/>
           <p:nvPr/>
         </p:nvSpPr>
@@ -23666,7 +24039,7 @@
       </p:sp>
       <p:sp>
         <p:nvSpPr>
-          <p:cNvPr id="12" name="Shape 9"/>
+          <p:cNvPr id="13" name="Shape 10"/>
           <p:cNvSpPr/>
           <p:nvPr/>
         </p:nvSpPr>
@@ -23686,7 +24059,7 @@
       </p:sp>
       <p:sp>
         <p:nvSpPr>
-          <p:cNvPr id="13" name="Shape 10"/>
+          <p:cNvPr id="14" name="Shape 11"/>
           <p:cNvSpPr/>
           <p:nvPr/>
         </p:nvSpPr>
@@ -23708,7 +24081,7 @@
       </p:sp>
       <p:sp>
         <p:nvSpPr>
-          <p:cNvPr id="14" name="Text 11"/>
+          <p:cNvPr id="15" name="Text 12"/>
           <p:cNvSpPr/>
           <p:nvPr/>
         </p:nvSpPr>
@@ -23747,7 +24120,7 @@
       </p:sp>
       <p:sp>
         <p:nvSpPr>
-          <p:cNvPr id="15" name="Shape 12"/>
+          <p:cNvPr id="16" name="Shape 13"/>
           <p:cNvSpPr/>
           <p:nvPr/>
         </p:nvSpPr>
@@ -23770,7 +24143,7 @@
       </p:sp>
       <p:sp>
         <p:nvSpPr>
-          <p:cNvPr id="16" name="Shape 13"/>
+          <p:cNvPr id="17" name="Shape 14"/>
           <p:cNvSpPr/>
           <p:nvPr/>
         </p:nvSpPr>
@@ -23790,7 +24163,7 @@
       </p:sp>
       <p:sp>
         <p:nvSpPr>
-          <p:cNvPr id="17" name="Shape 14"/>
+          <p:cNvPr id="18" name="Shape 15"/>
           <p:cNvSpPr/>
           <p:nvPr/>
         </p:nvSpPr>
@@ -23812,7 +24185,7 @@
       </p:sp>
       <p:sp>
         <p:nvSpPr>
-          <p:cNvPr id="18" name="Text 15"/>
+          <p:cNvPr id="19" name="Text 16"/>
           <p:cNvSpPr/>
           <p:nvPr/>
         </p:nvSpPr>
@@ -23851,7 +24224,7 @@
       </p:sp>
       <p:sp>
         <p:nvSpPr>
-          <p:cNvPr id="19" name="Shape 16"/>
+          <p:cNvPr id="20" name="Shape 17"/>
           <p:cNvSpPr/>
           <p:nvPr/>
         </p:nvSpPr>
@@ -23873,7 +24246,7 @@
       </p:sp>
       <p:sp>
         <p:nvSpPr>
-          <p:cNvPr id="20" name="Text 17"/>
+          <p:cNvPr id="21" name="Text 18"/>
           <p:cNvSpPr/>
           <p:nvPr/>
         </p:nvSpPr>
@@ -23925,7 +24298,7 @@
         </p:nvSpPr>
         <p:spPr>
           <a:xfrm>
-            <a:off x="11368735" y="6437376"/>
+            <a:off x="11368735" y="6327648"/>
             <a:ext cx="365760" cy="274320"/>
           </a:xfrm>
           <a:prstGeom prst="rect">

--- a/docs/decks/L03.pptx
+++ b/docs/decks/L03.pptx
@@ -2625,7 +2625,7 @@
         </p:nvSpPr>
         <p:spPr>
           <a:xfrm>
-            <a:off x="11368735" y="6327648"/>
+            <a:off x="11368735" y="6437376"/>
             <a:ext cx="365760" cy="274320"/>
           </a:xfrm>
           <a:prstGeom prst="rect">
@@ -2754,7 +2754,7 @@
         </p:nvSpPr>
         <p:spPr>
           <a:xfrm>
-            <a:off x="11368735" y="6327648"/>
+            <a:off x="11368735" y="6437376"/>
             <a:ext cx="365760" cy="274320"/>
           </a:xfrm>
           <a:prstGeom prst="rect">
@@ -3894,7 +3894,7 @@
         </p:blipFill>
         <p:spPr>
           <a:xfrm>
-            <a:off x="566928" y="6126480"/>
+            <a:off x="566928" y="6254496"/>
             <a:ext cx="1481328" cy="457200"/>
           </a:xfrm>
           <a:prstGeom prst="rect">
@@ -4508,7 +4508,7 @@
         </p:nvSpPr>
         <p:spPr>
           <a:xfrm>
-            <a:off x="11368735" y="6327648"/>
+            <a:off x="11368735" y="6437376"/>
             <a:ext cx="365760" cy="274320"/>
           </a:xfrm>
           <a:prstGeom prst="rect">
@@ -4724,7 +4724,7 @@
         </p:blipFill>
         <p:spPr>
           <a:xfrm>
-            <a:off x="566928" y="6126480"/>
+            <a:off x="566928" y="6254496"/>
             <a:ext cx="1481328" cy="457200"/>
           </a:xfrm>
           <a:prstGeom prst="rect">
@@ -5152,7 +5152,7 @@
         </p:nvSpPr>
         <p:spPr>
           <a:xfrm>
-            <a:off x="11368735" y="6327648"/>
+            <a:off x="11368735" y="6437376"/>
             <a:ext cx="365760" cy="274320"/>
           </a:xfrm>
           <a:prstGeom prst="rect">
@@ -5368,7 +5368,7 @@
         </p:blipFill>
         <p:spPr>
           <a:xfrm>
-            <a:off x="566928" y="6126480"/>
+            <a:off x="566928" y="6254496"/>
             <a:ext cx="1481328" cy="457200"/>
           </a:xfrm>
           <a:prstGeom prst="rect">
@@ -6307,7 +6307,7 @@
         </p:nvSpPr>
         <p:spPr>
           <a:xfrm>
-            <a:off x="11368735" y="6327648"/>
+            <a:off x="11368735" y="6437376"/>
             <a:ext cx="365760" cy="274320"/>
           </a:xfrm>
           <a:prstGeom prst="rect">
@@ -6523,7 +6523,7 @@
         </p:blipFill>
         <p:spPr>
           <a:xfrm>
-            <a:off x="566928" y="6126480"/>
+            <a:off x="566928" y="6254496"/>
             <a:ext cx="1481328" cy="457200"/>
           </a:xfrm>
           <a:prstGeom prst="rect">
@@ -7057,7 +7057,7 @@
         </p:nvSpPr>
         <p:spPr>
           <a:xfrm>
-            <a:off x="11368735" y="6327648"/>
+            <a:off x="11368735" y="6437376"/>
             <a:ext cx="365760" cy="274320"/>
           </a:xfrm>
           <a:prstGeom prst="rect">
@@ -7273,7 +7273,7 @@
         </p:blipFill>
         <p:spPr>
           <a:xfrm>
-            <a:off x="566928" y="6126480"/>
+            <a:off x="566928" y="6254496"/>
             <a:ext cx="1481328" cy="457200"/>
           </a:xfrm>
           <a:prstGeom prst="rect">
@@ -8423,7 +8423,7 @@
         </p:nvSpPr>
         <p:spPr>
           <a:xfrm>
-            <a:off x="11368735" y="6327648"/>
+            <a:off x="11368735" y="6437376"/>
             <a:ext cx="365760" cy="274320"/>
           </a:xfrm>
           <a:prstGeom prst="rect">
@@ -8639,7 +8639,7 @@
         </p:blipFill>
         <p:spPr>
           <a:xfrm>
-            <a:off x="566928" y="6126480"/>
+            <a:off x="566928" y="6254496"/>
             <a:ext cx="1481328" cy="457200"/>
           </a:xfrm>
           <a:prstGeom prst="rect">
@@ -9069,7 +9069,7 @@
         </p:nvSpPr>
         <p:spPr>
           <a:xfrm>
-            <a:off x="11368735" y="6327648"/>
+            <a:off x="11368735" y="6437376"/>
             <a:ext cx="365760" cy="274320"/>
           </a:xfrm>
           <a:prstGeom prst="rect">
@@ -9285,7 +9285,7 @@
         </p:blipFill>
         <p:spPr>
           <a:xfrm>
-            <a:off x="566928" y="6126480"/>
+            <a:off x="566928" y="6254496"/>
             <a:ext cx="1481328" cy="457200"/>
           </a:xfrm>
           <a:prstGeom prst="rect">
@@ -9848,7 +9848,7 @@
         </p:nvSpPr>
         <p:spPr>
           <a:xfrm>
-            <a:off x="11368735" y="6327648"/>
+            <a:off x="11368735" y="6437376"/>
             <a:ext cx="365760" cy="274320"/>
           </a:xfrm>
           <a:prstGeom prst="rect">
@@ -10125,7 +10125,7 @@
         </p:blipFill>
         <p:spPr>
           <a:xfrm>
-            <a:off x="566928" y="6126480"/>
+            <a:off x="566928" y="6254496"/>
             <a:ext cx="1481328" cy="457200"/>
           </a:xfrm>
           <a:prstGeom prst="rect">
@@ -11079,7 +11079,7 @@
         </p:nvSpPr>
         <p:spPr>
           <a:xfrm>
-            <a:off x="11368735" y="6327648"/>
+            <a:off x="11368735" y="6437376"/>
             <a:ext cx="365760" cy="274320"/>
           </a:xfrm>
           <a:prstGeom prst="rect">
@@ -11256,7 +11256,7 @@
         </p:blipFill>
         <p:spPr>
           <a:xfrm>
-            <a:off x="566928" y="6126480"/>
+            <a:off x="566928" y="6254496"/>
             <a:ext cx="1481328" cy="457200"/>
           </a:xfrm>
           <a:prstGeom prst="rect">
@@ -12027,7 +12027,7 @@
         </p:nvSpPr>
         <p:spPr>
           <a:xfrm>
-            <a:off x="11368735" y="6327648"/>
+            <a:off x="11368735" y="6437376"/>
             <a:ext cx="365760" cy="274320"/>
           </a:xfrm>
           <a:prstGeom prst="rect">
@@ -12204,7 +12204,7 @@
         </p:blipFill>
         <p:spPr>
           <a:xfrm>
-            <a:off x="566928" y="6126480"/>
+            <a:off x="566928" y="6254496"/>
             <a:ext cx="1481328" cy="457200"/>
           </a:xfrm>
           <a:prstGeom prst="rect">
@@ -12784,7 +12784,7 @@
         </p:nvSpPr>
         <p:spPr>
           <a:xfrm>
-            <a:off x="11368735" y="6327648"/>
+            <a:off x="11368735" y="6437376"/>
             <a:ext cx="365760" cy="274320"/>
           </a:xfrm>
           <a:prstGeom prst="rect">
@@ -13003,7 +13003,7 @@
         </p:blipFill>
         <p:spPr>
           <a:xfrm>
-            <a:off x="566928" y="6126480"/>
+            <a:off x="566928" y="6254496"/>
             <a:ext cx="1481328" cy="457200"/>
           </a:xfrm>
           <a:prstGeom prst="rect">
@@ -13858,7 +13858,7 @@
         </p:nvSpPr>
         <p:spPr>
           <a:xfrm>
-            <a:off x="11368735" y="6327648"/>
+            <a:off x="11368735" y="6437376"/>
             <a:ext cx="365760" cy="274320"/>
           </a:xfrm>
           <a:prstGeom prst="rect">
@@ -14035,7 +14035,7 @@
         </p:blipFill>
         <p:spPr>
           <a:xfrm>
-            <a:off x="566928" y="6126480"/>
+            <a:off x="566928" y="6254496"/>
             <a:ext cx="1481328" cy="457200"/>
           </a:xfrm>
           <a:prstGeom prst="rect">
@@ -14438,7 +14438,7 @@
         </p:nvSpPr>
         <p:spPr>
           <a:xfrm>
-            <a:off x="11368735" y="6327648"/>
+            <a:off x="11368735" y="6437376"/>
             <a:ext cx="365760" cy="274320"/>
           </a:xfrm>
           <a:prstGeom prst="rect">
@@ -14615,7 +14615,7 @@
         </p:blipFill>
         <p:spPr>
           <a:xfrm>
-            <a:off x="566928" y="6126480"/>
+            <a:off x="566928" y="6254496"/>
             <a:ext cx="1481328" cy="457200"/>
           </a:xfrm>
           <a:prstGeom prst="rect">
@@ -15125,7 +15125,7 @@
         </p:nvSpPr>
         <p:spPr>
           <a:xfrm>
-            <a:off x="11368735" y="6327648"/>
+            <a:off x="11368735" y="6437376"/>
             <a:ext cx="365760" cy="274320"/>
           </a:xfrm>
           <a:prstGeom prst="rect">
@@ -15302,7 +15302,7 @@
         </p:blipFill>
         <p:spPr>
           <a:xfrm>
-            <a:off x="566928" y="6126480"/>
+            <a:off x="566928" y="6254496"/>
             <a:ext cx="1481328" cy="457200"/>
           </a:xfrm>
           <a:prstGeom prst="rect">
@@ -15882,7 +15882,7 @@
         </p:nvSpPr>
         <p:spPr>
           <a:xfrm>
-            <a:off x="11368735" y="6327648"/>
+            <a:off x="11368735" y="6437376"/>
             <a:ext cx="365760" cy="274320"/>
           </a:xfrm>
           <a:prstGeom prst="rect">
@@ -16059,7 +16059,7 @@
         </p:blipFill>
         <p:spPr>
           <a:xfrm>
-            <a:off x="566928" y="6126480"/>
+            <a:off x="566928" y="6254496"/>
             <a:ext cx="1481328" cy="457200"/>
           </a:xfrm>
           <a:prstGeom prst="rect">
@@ -16453,7 +16453,7 @@
         </p:nvSpPr>
         <p:spPr>
           <a:xfrm>
-            <a:off x="11368735" y="6327648"/>
+            <a:off x="11368735" y="6437376"/>
             <a:ext cx="365760" cy="274320"/>
           </a:xfrm>
           <a:prstGeom prst="rect">
@@ -17151,7 +17151,7 @@
         </p:blipFill>
         <p:spPr>
           <a:xfrm>
-            <a:off x="566928" y="6126480"/>
+            <a:off x="566928" y="6254496"/>
             <a:ext cx="1481328" cy="457200"/>
           </a:xfrm>
           <a:prstGeom prst="rect">
@@ -18610,7 +18610,7 @@
         </p:nvSpPr>
         <p:spPr>
           <a:xfrm>
-            <a:off x="11368735" y="6327648"/>
+            <a:off x="11368735" y="6437376"/>
             <a:ext cx="365760" cy="274320"/>
           </a:xfrm>
           <a:prstGeom prst="rect">
@@ -18829,7 +18829,7 @@
         </p:blipFill>
         <p:spPr>
           <a:xfrm>
-            <a:off x="566928" y="6126480"/>
+            <a:off x="566928" y="6254496"/>
             <a:ext cx="1481328" cy="457200"/>
           </a:xfrm>
           <a:prstGeom prst="rect">
@@ -19566,7 +19566,7 @@
         </p:nvSpPr>
         <p:spPr>
           <a:xfrm>
-            <a:off x="11368735" y="6327648"/>
+            <a:off x="11368735" y="6437376"/>
             <a:ext cx="365760" cy="274320"/>
           </a:xfrm>
           <a:prstGeom prst="rect">
@@ -19782,7 +19782,7 @@
         </p:blipFill>
         <p:spPr>
           <a:xfrm>
-            <a:off x="566928" y="6126480"/>
+            <a:off x="566928" y="6254496"/>
             <a:ext cx="1481328" cy="457200"/>
           </a:xfrm>
           <a:prstGeom prst="rect">
@@ -20391,7 +20391,7 @@
         </p:nvSpPr>
         <p:spPr>
           <a:xfrm>
-            <a:off x="11368735" y="6327648"/>
+            <a:off x="11368735" y="6437376"/>
             <a:ext cx="365760" cy="274320"/>
           </a:xfrm>
           <a:prstGeom prst="rect">
@@ -20607,7 +20607,7 @@
         </p:blipFill>
         <p:spPr>
           <a:xfrm>
-            <a:off x="566928" y="6126480"/>
+            <a:off x="566928" y="6254496"/>
             <a:ext cx="1481328" cy="457200"/>
           </a:xfrm>
           <a:prstGeom prst="rect">
@@ -21116,7 +21116,7 @@
         </p:nvSpPr>
         <p:spPr>
           <a:xfrm>
-            <a:off x="11368735" y="6327648"/>
+            <a:off x="11368735" y="6437376"/>
             <a:ext cx="365760" cy="274320"/>
           </a:xfrm>
           <a:prstGeom prst="rect">
@@ -21332,7 +21332,7 @@
         </p:blipFill>
         <p:spPr>
           <a:xfrm>
-            <a:off x="566928" y="6126480"/>
+            <a:off x="566928" y="6254496"/>
             <a:ext cx="1481328" cy="457200"/>
           </a:xfrm>
           <a:prstGeom prst="rect">
@@ -22072,7 +22072,7 @@
         </p:nvSpPr>
         <p:spPr>
           <a:xfrm>
-            <a:off x="11368735" y="6327648"/>
+            <a:off x="11368735" y="6437376"/>
             <a:ext cx="365760" cy="274320"/>
           </a:xfrm>
           <a:prstGeom prst="rect">
@@ -22288,7 +22288,7 @@
         </p:blipFill>
         <p:spPr>
           <a:xfrm>
-            <a:off x="566928" y="6126480"/>
+            <a:off x="566928" y="6254496"/>
             <a:ext cx="1481328" cy="457200"/>
           </a:xfrm>
           <a:prstGeom prst="rect">
@@ -23019,7 +23019,7 @@
         </p:nvSpPr>
         <p:spPr>
           <a:xfrm>
-            <a:off x="11368735" y="6327648"/>
+            <a:off x="11368735" y="6437376"/>
             <a:ext cx="365760" cy="274320"/>
           </a:xfrm>
           <a:prstGeom prst="rect">
@@ -23235,7 +23235,7 @@
         </p:blipFill>
         <p:spPr>
           <a:xfrm>
-            <a:off x="566928" y="6126480"/>
+            <a:off x="566928" y="6254496"/>
             <a:ext cx="1481328" cy="457200"/>
           </a:xfrm>
           <a:prstGeom prst="rect">
@@ -23819,7 +23819,7 @@
         </p:nvSpPr>
         <p:spPr>
           <a:xfrm>
-            <a:off x="11368735" y="6327648"/>
+            <a:off x="11368735" y="6437376"/>
             <a:ext cx="365760" cy="274320"/>
           </a:xfrm>
           <a:prstGeom prst="rect">

--- a/docs/decks/L03.pptx
+++ b/docs/decks/L03.pptx
@@ -21882,7 +21882,7 @@
                 <a:ea typeface="Montserrat" pitchFamily="34" charset="-122"/>
                 <a:cs typeface="Montserrat" pitchFamily="34" charset="-120"/>
               </a:rPr>
-              <a:t>адаптер відкидає поля, яких провайдер не приймає</a:t>
+              <a:t>відкидає поля, яких провайдер не приймає</a:t>
             </a:r>
             <a:endParaRPr lang="en-US" sz="1200" dirty="0"/>
           </a:p>
@@ -21985,7 +21985,7 @@
                 <a:ea typeface="Montserrat" pitchFamily="34" charset="-122"/>
                 <a:cs typeface="Montserrat" pitchFamily="34" charset="-120"/>
               </a:rPr>
-              <a:t>збої долітають до сервісу — він вирішує, що робити</a:t>
+              <a:t>збої долітають до сервісу — він і вирішує</a:t>
             </a:r>
             <a:endParaRPr lang="en-US" sz="1200" dirty="0"/>
           </a:p>

--- a/docs/decks/L03.pptx
+++ b/docs/decks/L03.pptx
@@ -3252,17 +3252,17 @@
               <a:buNone/>
             </a:pPr>
             <a:r>
-              <a:rPr lang="en-US" sz="4000" b="1" dirty="0">
+              <a:rPr lang="en-US" sz="3600" dirty="0">
                 <a:solidFill>
                   <a:srgbClr val="FFFFFF"/>
                 </a:solidFill>
-                <a:latin typeface="Montserrat" pitchFamily="34" charset="0"/>
-                <a:ea typeface="Montserrat" pitchFamily="34" charset="-122"/>
-                <a:cs typeface="Montserrat" pitchFamily="34" charset="-120"/>
+                <a:latin typeface="Unbounded" pitchFamily="34" charset="0"/>
+                <a:ea typeface="Unbounded" pitchFamily="34" charset="-122"/>
+                <a:cs typeface="Unbounded" pitchFamily="34" charset="-120"/>
               </a:rPr>
               <a:t>Мультипровайдерний gateway</a:t>
             </a:r>
-            <a:endParaRPr lang="en-US" sz="4000" dirty="0"/>
+            <a:endParaRPr lang="en-US" sz="3600" dirty="0"/>
           </a:p>
           <a:p>
             <a:pPr indent="0" marL="0">
@@ -3272,17 +3272,17 @@
               <a:buNone/>
             </a:pPr>
             <a:r>
-              <a:rPr lang="en-US" sz="4000" b="1" dirty="0">
+              <a:rPr lang="en-US" sz="3600" dirty="0">
                 <a:solidFill>
                   <a:srgbClr val="FFFFFF"/>
                 </a:solidFill>
-                <a:latin typeface="Montserrat" pitchFamily="34" charset="0"/>
-                <a:ea typeface="Montserrat" pitchFamily="34" charset="-122"/>
-                <a:cs typeface="Montserrat" pitchFamily="34" charset="-120"/>
+                <a:latin typeface="Unbounded" pitchFamily="34" charset="0"/>
+                <a:ea typeface="Unbounded" pitchFamily="34" charset="-122"/>
+                <a:cs typeface="Unbounded" pitchFamily="34" charset="-120"/>
               </a:rPr>
               <a:t>і маршрутизація моделей</a:t>
             </a:r>
-            <a:endParaRPr lang="en-US" sz="4000" dirty="0"/>
+            <a:endParaRPr lang="en-US" sz="3600" dirty="0"/>
           </a:p>
         </p:txBody>
       </p:sp>
@@ -3803,13 +3803,13 @@
               <a:buNone/>
             </a:pPr>
             <a:r>
-              <a:rPr lang="en-US" sz="2400" b="1" dirty="0">
+              <a:rPr lang="en-US" sz="2400" dirty="0">
                 <a:solidFill>
                   <a:srgbClr val="FFFFFF"/>
                 </a:solidFill>
-                <a:latin typeface="Montserrat" pitchFamily="34" charset="0"/>
-                <a:ea typeface="Montserrat" pitchFamily="34" charset="-122"/>
-                <a:cs typeface="Montserrat" pitchFamily="34" charset="-120"/>
+                <a:latin typeface="Unbounded" pitchFamily="34" charset="0"/>
+                <a:ea typeface="Unbounded" pitchFamily="34" charset="-122"/>
+                <a:cs typeface="Unbounded" pitchFamily="34" charset="-120"/>
               </a:rPr>
               <a:t>Що ще каже цей код — до того, як вкусить</a:t>
             </a:r>
@@ -3825,7 +3825,7 @@
         </p:nvSpPr>
         <p:spPr>
           <a:xfrm>
-            <a:off x="1280160" y="1193140"/>
+            <a:off x="1280160" y="1218895"/>
             <a:ext cx="777240" cy="256032"/>
           </a:xfrm>
           <a:prstGeom prst="roundRect">
@@ -3847,7 +3847,7 @@
         </p:nvSpPr>
         <p:spPr>
           <a:xfrm>
-            <a:off x="1280160" y="1193140"/>
+            <a:off x="1280160" y="1218895"/>
             <a:ext cx="777240" cy="256032"/>
           </a:xfrm>
           <a:prstGeom prst="rect">
@@ -4633,13 +4633,13 @@
               <a:buNone/>
             </a:pPr>
             <a:r>
-              <a:rPr lang="en-US" sz="2400" b="1" dirty="0">
+              <a:rPr lang="en-US" sz="2400" dirty="0">
                 <a:solidFill>
                   <a:srgbClr val="FFFFFF"/>
                 </a:solidFill>
-                <a:latin typeface="Montserrat" pitchFamily="34" charset="0"/>
-                <a:ea typeface="Montserrat" pitchFamily="34" charset="-122"/>
-                <a:cs typeface="Montserrat" pitchFamily="34" charset="-120"/>
+                <a:latin typeface="Unbounded" pitchFamily="34" charset="0"/>
+                <a:ea typeface="Unbounded" pitchFamily="34" charset="-122"/>
+                <a:cs typeface="Unbounded" pitchFamily="34" charset="-120"/>
               </a:rPr>
               <a:t>Маршрут — за задачею, не за текстом-в-лоб</a:t>
             </a:r>
@@ -4655,7 +4655,7 @@
         </p:nvSpPr>
         <p:spPr>
           <a:xfrm>
-            <a:off x="1280160" y="1193140"/>
+            <a:off x="1280160" y="1218895"/>
             <a:ext cx="777240" cy="256032"/>
           </a:xfrm>
           <a:prstGeom prst="roundRect">
@@ -4677,7 +4677,7 @@
         </p:nvSpPr>
         <p:spPr>
           <a:xfrm>
-            <a:off x="1280160" y="1193140"/>
+            <a:off x="1280160" y="1218895"/>
             <a:ext cx="777240" cy="256032"/>
           </a:xfrm>
           <a:prstGeom prst="rect">
@@ -5277,13 +5277,13 @@
               <a:buNone/>
             </a:pPr>
             <a:r>
-              <a:rPr lang="en-US" sz="2400" b="1" dirty="0">
+              <a:rPr lang="en-US" sz="2400" dirty="0">
                 <a:solidFill>
                   <a:srgbClr val="FFFFFF"/>
                 </a:solidFill>
-                <a:latin typeface="Montserrat" pitchFamily="34" charset="0"/>
-                <a:ea typeface="Montserrat" pitchFamily="34" charset="-122"/>
-                <a:cs typeface="Montserrat" pitchFamily="34" charset="-120"/>
+                <a:latin typeface="Unbounded" pitchFamily="34" charset="0"/>
+                <a:ea typeface="Unbounded" pitchFamily="34" charset="-122"/>
+                <a:cs typeface="Unbounded" pitchFamily="34" charset="-120"/>
               </a:rPr>
               <a:t>Скільки коштує саме рішення</a:t>
             </a:r>
@@ -6432,13 +6432,13 @@
               <a:buNone/>
             </a:pPr>
             <a:r>
-              <a:rPr lang="en-US" sz="2400" b="1" dirty="0">
+              <a:rPr lang="en-US" sz="2400" dirty="0">
                 <a:solidFill>
                   <a:srgbClr val="FFFFFF"/>
                 </a:solidFill>
-                <a:latin typeface="Montserrat" pitchFamily="34" charset="0"/>
-                <a:ea typeface="Montserrat" pitchFamily="34" charset="-122"/>
-                <a:cs typeface="Montserrat" pitchFamily="34" charset="-120"/>
+                <a:latin typeface="Unbounded" pitchFamily="34" charset="0"/>
+                <a:ea typeface="Unbounded" pitchFamily="34" charset="-122"/>
+                <a:cs typeface="Unbounded" pitchFamily="34" charset="-120"/>
               </a:rPr>
               <a:t>Один користувач — один маршрут</a:t>
             </a:r>
@@ -6454,7 +6454,7 @@
         </p:nvSpPr>
         <p:spPr>
           <a:xfrm>
-            <a:off x="1280160" y="1024128"/>
+            <a:off x="1280160" y="1218895"/>
             <a:ext cx="777240" cy="256032"/>
           </a:xfrm>
           <a:prstGeom prst="roundRect">
@@ -6476,7 +6476,7 @@
         </p:nvSpPr>
         <p:spPr>
           <a:xfrm>
-            <a:off x="1280160" y="1024128"/>
+            <a:off x="1280160" y="1218895"/>
             <a:ext cx="777240" cy="256032"/>
           </a:xfrm>
           <a:prstGeom prst="rect">
@@ -7182,13 +7182,13 @@
               <a:buNone/>
             </a:pPr>
             <a:r>
-              <a:rPr lang="en-US" sz="2400" b="1" dirty="0">
+              <a:rPr lang="en-US" sz="2400" dirty="0">
                 <a:solidFill>
                   <a:srgbClr val="FFFFFF"/>
                 </a:solidFill>
-                <a:latin typeface="Montserrat" pitchFamily="34" charset="0"/>
-                <a:ea typeface="Montserrat" pitchFamily="34" charset="-122"/>
-                <a:cs typeface="Montserrat" pitchFamily="34" charset="-120"/>
+                <a:latin typeface="Unbounded" pitchFamily="34" charset="0"/>
+                <a:ea typeface="Unbounded" pitchFamily="34" charset="-122"/>
+                <a:cs typeface="Unbounded" pitchFamily="34" charset="-120"/>
               </a:rPr>
               <a:t>«У нас одна модель» — усе одно є що маршрутизувати</a:t>
             </a:r>
@@ -7204,7 +7204,7 @@
         </p:nvSpPr>
         <p:spPr>
           <a:xfrm>
-            <a:off x="1280160" y="1193140"/>
+            <a:off x="1280160" y="1218895"/>
             <a:ext cx="777240" cy="256032"/>
           </a:xfrm>
           <a:prstGeom prst="roundRect">
@@ -7226,7 +7226,7 @@
         </p:nvSpPr>
         <p:spPr>
           <a:xfrm>
-            <a:off x="1280160" y="1193140"/>
+            <a:off x="1280160" y="1218895"/>
             <a:ext cx="777240" cy="256032"/>
           </a:xfrm>
           <a:prstGeom prst="rect">
@@ -8548,13 +8548,13 @@
               <a:buNone/>
             </a:pPr>
             <a:r>
-              <a:rPr lang="en-US" sz="2400" b="1" dirty="0">
+              <a:rPr lang="en-US" sz="2400" dirty="0">
                 <a:solidFill>
                   <a:srgbClr val="FFFFFF"/>
                 </a:solidFill>
-                <a:latin typeface="Montserrat" pitchFamily="34" charset="0"/>
-                <a:ea typeface="Montserrat" pitchFamily="34" charset="-122"/>
-                <a:cs typeface="Montserrat" pitchFamily="34" charset="-120"/>
+                <a:latin typeface="Unbounded" pitchFamily="34" charset="0"/>
+                <a:ea typeface="Unbounded" pitchFamily="34" charset="-122"/>
+                <a:cs typeface="Unbounded" pitchFamily="34" charset="-120"/>
               </a:rPr>
               <a:t>Fallback-порядок: політика, яку сьогодні оголосимо</a:t>
             </a:r>
@@ -8570,7 +8570,7 @@
         </p:nvSpPr>
         <p:spPr>
           <a:xfrm>
-            <a:off x="1280160" y="1193140"/>
+            <a:off x="1280160" y="1218895"/>
             <a:ext cx="777240" cy="256032"/>
           </a:xfrm>
           <a:prstGeom prst="roundRect">
@@ -8592,7 +8592,7 @@
         </p:nvSpPr>
         <p:spPr>
           <a:xfrm>
-            <a:off x="1280160" y="1193140"/>
+            <a:off x="1280160" y="1218895"/>
             <a:ext cx="777240" cy="256032"/>
           </a:xfrm>
           <a:prstGeom prst="rect">
@@ -9194,13 +9194,13 @@
               <a:buNone/>
             </a:pPr>
             <a:r>
-              <a:rPr lang="en-US" sz="2400" b="1" dirty="0">
+              <a:rPr lang="en-US" sz="2400" dirty="0">
                 <a:solidFill>
                   <a:srgbClr val="FFFFFF"/>
                 </a:solidFill>
-                <a:latin typeface="Montserrat" pitchFamily="34" charset="0"/>
-                <a:ea typeface="Montserrat" pitchFamily="34" charset="-122"/>
-                <a:cs typeface="Montserrat" pitchFamily="34" charset="-120"/>
+                <a:latin typeface="Unbounded" pitchFamily="34" charset="0"/>
+                <a:ea typeface="Unbounded" pitchFamily="34" charset="-122"/>
+                <a:cs typeface="Unbounded" pitchFamily="34" charset="-120"/>
               </a:rPr>
               <a:t>Додати провайдера — без зміни коду</a:t>
             </a:r>
@@ -9216,7 +9216,7 @@
         </p:nvSpPr>
         <p:spPr>
           <a:xfrm>
-            <a:off x="1280160" y="1193140"/>
+            <a:off x="1280160" y="1218895"/>
             <a:ext cx="777240" cy="256032"/>
           </a:xfrm>
           <a:prstGeom prst="roundRect">
@@ -9238,7 +9238,7 @@
         </p:nvSpPr>
         <p:spPr>
           <a:xfrm>
-            <a:off x="1280160" y="1193140"/>
+            <a:off x="1280160" y="1218895"/>
             <a:ext cx="777240" cy="256032"/>
           </a:xfrm>
           <a:prstGeom prst="rect">
@@ -9973,13 +9973,13 @@
               <a:buNone/>
             </a:pPr>
             <a:r>
-              <a:rPr lang="en-US" sz="2400" b="1" dirty="0">
+              <a:rPr lang="en-US" sz="2400" dirty="0">
                 <a:solidFill>
                   <a:srgbClr val="FFFFFF"/>
                 </a:solidFill>
-                <a:latin typeface="Montserrat" pitchFamily="34" charset="0"/>
-                <a:ea typeface="Montserrat" pitchFamily="34" charset="-122"/>
-                <a:cs typeface="Montserrat" pitchFamily="34" charset="-120"/>
+                <a:latin typeface="Unbounded" pitchFamily="34" charset="0"/>
+                <a:ea typeface="Unbounded" pitchFamily="34" charset="-122"/>
+                <a:cs typeface="Unbounded" pitchFamily="34" charset="-120"/>
               </a:rPr>
               <a:t>Третій маршрут: tier-система</a:t>
             </a:r>
@@ -11165,13 +11165,13 @@
               <a:buNone/>
             </a:pPr>
             <a:r>
-              <a:rPr lang="en-US" sz="2400" b="1" dirty="0">
+              <a:rPr lang="en-US" sz="2400" dirty="0">
                 <a:solidFill>
                   <a:srgbClr val="FFFFFF"/>
                 </a:solidFill>
-                <a:latin typeface="Montserrat" pitchFamily="34" charset="0"/>
-                <a:ea typeface="Montserrat" pitchFamily="34" charset="-122"/>
-                <a:cs typeface="Montserrat" pitchFamily="34" charset="-120"/>
+                <a:latin typeface="Unbounded" pitchFamily="34" charset="0"/>
+                <a:ea typeface="Unbounded" pitchFamily="34" charset="-122"/>
+                <a:cs typeface="Unbounded" pitchFamily="34" charset="-120"/>
               </a:rPr>
               <a:t>Зараз ви побачите — і навіщо</a:t>
             </a:r>
@@ -12113,13 +12113,13 @@
               <a:buNone/>
             </a:pPr>
             <a:r>
-              <a:rPr lang="en-US" sz="2400" b="1" dirty="0">
+              <a:rPr lang="en-US" sz="2400" dirty="0">
                 <a:solidFill>
                   <a:srgbClr val="FFFFFF"/>
                 </a:solidFill>
-                <a:latin typeface="Montserrat" pitchFamily="34" charset="0"/>
-                <a:ea typeface="Montserrat" pitchFamily="34" charset="-122"/>
-                <a:cs typeface="Montserrat" pitchFamily="34" charset="-120"/>
+                <a:latin typeface="Unbounded" pitchFamily="34" charset="0"/>
+                <a:ea typeface="Unbounded" pitchFamily="34" charset="-122"/>
+                <a:cs typeface="Unbounded" pitchFamily="34" charset="-120"/>
               </a:rPr>
               <a:t>Лабораторна: чотири частини + опційна</a:t>
             </a:r>
@@ -12135,7 +12135,7 @@
         </p:nvSpPr>
         <p:spPr>
           <a:xfrm>
-            <a:off x="566928" y="1024128"/>
+            <a:off x="566928" y="1218895"/>
             <a:ext cx="950976" cy="256032"/>
           </a:xfrm>
           <a:prstGeom prst="roundRect">
@@ -12157,7 +12157,7 @@
         </p:nvSpPr>
         <p:spPr>
           <a:xfrm>
-            <a:off x="566928" y="1024128"/>
+            <a:off x="566928" y="1218895"/>
             <a:ext cx="950976" cy="256032"/>
           </a:xfrm>
           <a:prstGeom prst="rect">
@@ -12870,13 +12870,13 @@
               <a:buNone/>
             </a:pPr>
             <a:r>
-              <a:rPr lang="en-US" sz="2400" b="1" dirty="0">
+              <a:rPr lang="en-US" sz="2400" dirty="0">
                 <a:solidFill>
                   <a:srgbClr val="FFFFFF"/>
                 </a:solidFill>
-                <a:latin typeface="Montserrat" pitchFamily="34" charset="0"/>
-                <a:ea typeface="Montserrat" pitchFamily="34" charset="-122"/>
-                <a:cs typeface="Montserrat" pitchFamily="34" charset="-120"/>
+                <a:latin typeface="Unbounded" pitchFamily="34" charset="0"/>
+                <a:ea typeface="Unbounded" pitchFamily="34" charset="-122"/>
+                <a:cs typeface="Unbounded" pitchFamily="34" charset="-120"/>
               </a:rPr>
               <a:t>Що ви зможете після уроку</a:t>
             </a:r>
@@ -13944,13 +13944,13 @@
               <a:buNone/>
             </a:pPr>
             <a:r>
-              <a:rPr lang="en-US" sz="2400" b="1" dirty="0">
+              <a:rPr lang="en-US" sz="2400" dirty="0">
                 <a:solidFill>
                   <a:srgbClr val="FFFFFF"/>
                 </a:solidFill>
-                <a:latin typeface="Montserrat" pitchFamily="34" charset="0"/>
-                <a:ea typeface="Montserrat" pitchFamily="34" charset="-122"/>
-                <a:cs typeface="Montserrat" pitchFamily="34" charset="-120"/>
+                <a:latin typeface="Unbounded" pitchFamily="34" charset="0"/>
+                <a:ea typeface="Unbounded" pitchFamily="34" charset="-122"/>
+                <a:cs typeface="Unbounded" pitchFamily="34" charset="-120"/>
               </a:rPr>
               <a:t>Що це довело</a:t>
             </a:r>
@@ -14524,13 +14524,13 @@
               <a:buNone/>
             </a:pPr>
             <a:r>
-              <a:rPr lang="en-US" sz="2400" b="1" dirty="0">
+              <a:rPr lang="en-US" sz="2400" dirty="0">
                 <a:solidFill>
                   <a:srgbClr val="FFFFFF"/>
                 </a:solidFill>
-                <a:latin typeface="Montserrat" pitchFamily="34" charset="0"/>
-                <a:ea typeface="Montserrat" pitchFamily="34" charset="-122"/>
-                <a:cs typeface="Montserrat" pitchFamily="34" charset="-120"/>
+                <a:latin typeface="Unbounded" pitchFamily="34" charset="0"/>
+                <a:ea typeface="Unbounded" pitchFamily="34" charset="-122"/>
+                <a:cs typeface="Unbounded" pitchFamily="34" charset="-120"/>
               </a:rPr>
               <a:t>Перевір себе</a:t>
             </a:r>
@@ -15211,13 +15211,13 @@
               <a:buNone/>
             </a:pPr>
             <a:r>
-              <a:rPr lang="en-US" sz="2400" b="1" dirty="0">
+              <a:rPr lang="en-US" sz="2400" dirty="0">
                 <a:solidFill>
                   <a:srgbClr val="FFFFFF"/>
                 </a:solidFill>
-                <a:latin typeface="Montserrat" pitchFamily="34" charset="0"/>
-                <a:ea typeface="Montserrat" pitchFamily="34" charset="-122"/>
-                <a:cs typeface="Montserrat" pitchFamily="34" charset="-120"/>
+                <a:latin typeface="Unbounded" pitchFamily="34" charset="0"/>
+                <a:ea typeface="Unbounded" pitchFamily="34" charset="-122"/>
+                <a:cs typeface="Unbounded" pitchFamily="34" charset="-120"/>
               </a:rPr>
               <a:t>Антипатерни тижня</a:t>
             </a:r>
@@ -15968,13 +15968,13 @@
               <a:buNone/>
             </a:pPr>
             <a:r>
-              <a:rPr lang="en-US" sz="2400" b="1" dirty="0">
+              <a:rPr lang="en-US" sz="2400" dirty="0">
                 <a:solidFill>
                   <a:srgbClr val="FFFFFF"/>
                 </a:solidFill>
-                <a:latin typeface="Montserrat" pitchFamily="34" charset="0"/>
-                <a:ea typeface="Montserrat" pitchFamily="34" charset="-122"/>
-                <a:cs typeface="Montserrat" pitchFamily="34" charset="-120"/>
+                <a:latin typeface="Unbounded" pitchFamily="34" charset="0"/>
+                <a:ea typeface="Unbounded" pitchFamily="34" charset="-122"/>
+                <a:cs typeface="Unbounded" pitchFamily="34" charset="-120"/>
               </a:rPr>
               <a:t>Домашнє завдання</a:t>
             </a:r>
@@ -17060,13 +17060,13 @@
               <a:buNone/>
             </a:pPr>
             <a:r>
-              <a:rPr lang="en-US" sz="2400" b="1" dirty="0">
+              <a:rPr lang="en-US" sz="2400" dirty="0">
                 <a:solidFill>
                   <a:srgbClr val="FFFFFF"/>
                 </a:solidFill>
-                <a:latin typeface="Montserrat" pitchFamily="34" charset="0"/>
-                <a:ea typeface="Montserrat" pitchFamily="34" charset="-122"/>
-                <a:cs typeface="Montserrat" pitchFamily="34" charset="-120"/>
+                <a:latin typeface="Unbounded" pitchFamily="34" charset="0"/>
+                <a:ea typeface="Unbounded" pitchFamily="34" charset="-122"/>
+                <a:cs typeface="Unbounded" pitchFamily="34" charset="-120"/>
               </a:rPr>
               <a:t>Маршрут на сьогодні</a:t>
             </a:r>
@@ -18696,13 +18696,13 @@
               <a:buNone/>
             </a:pPr>
             <a:r>
-              <a:rPr lang="en-US" sz="2400" b="1" dirty="0">
+              <a:rPr lang="en-US" sz="2400" dirty="0">
                 <a:solidFill>
                   <a:srgbClr val="FFFFFF"/>
                 </a:solidFill>
-                <a:latin typeface="Montserrat" pitchFamily="34" charset="0"/>
-                <a:ea typeface="Montserrat" pitchFamily="34" charset="-122"/>
-                <a:cs typeface="Montserrat" pitchFamily="34" charset="-120"/>
+                <a:latin typeface="Unbounded" pitchFamily="34" charset="0"/>
+                <a:ea typeface="Unbounded" pitchFamily="34" charset="-122"/>
+                <a:cs typeface="Unbounded" pitchFamily="34" charset="-120"/>
               </a:rPr>
               <a:t>Терміни, якими користуватимемось</a:t>
             </a:r>
@@ -18718,7 +18718,7 @@
         </p:nvSpPr>
         <p:spPr>
           <a:xfrm>
-            <a:off x="566928" y="1005840"/>
+            <a:off x="566928" y="1200607"/>
             <a:ext cx="6839712" cy="256032"/>
           </a:xfrm>
           <a:prstGeom prst="rect">
@@ -18760,7 +18760,7 @@
         </p:nvSpPr>
         <p:spPr>
           <a:xfrm>
-            <a:off x="566928" y="1271016"/>
+            <a:off x="566928" y="1465783"/>
             <a:ext cx="777240" cy="256032"/>
           </a:xfrm>
           <a:prstGeom prst="roundRect">
@@ -18782,7 +18782,7 @@
         </p:nvSpPr>
         <p:spPr>
           <a:xfrm>
-            <a:off x="566928" y="1271016"/>
+            <a:off x="566928" y="1465783"/>
             <a:ext cx="777240" cy="256032"/>
           </a:xfrm>
           <a:prstGeom prst="rect">
@@ -19691,13 +19691,13 @@
               <a:buNone/>
             </a:pPr>
             <a:r>
-              <a:rPr lang="en-US" sz="2400" b="1" dirty="0">
+              <a:rPr lang="en-US" sz="2400" dirty="0">
                 <a:solidFill>
                   <a:srgbClr val="FFFFFF"/>
                 </a:solidFill>
-                <a:latin typeface="Montserrat" pitchFamily="34" charset="0"/>
-                <a:ea typeface="Montserrat" pitchFamily="34" charset="-122"/>
-                <a:cs typeface="Montserrat" pitchFamily="34" charset="-120"/>
+                <a:latin typeface="Unbounded" pitchFamily="34" charset="0"/>
+                <a:ea typeface="Unbounded" pitchFamily="34" charset="-122"/>
+                <a:cs typeface="Unbounded" pitchFamily="34" charset="-120"/>
               </a:rPr>
               <a:t>Три біди однієї моделі</a:t>
             </a:r>
@@ -20516,13 +20516,13 @@
               <a:buNone/>
             </a:pPr>
             <a:r>
-              <a:rPr lang="en-US" sz="2400" b="1" dirty="0">
+              <a:rPr lang="en-US" sz="2400" dirty="0">
                 <a:solidFill>
                   <a:srgbClr val="FFFFFF"/>
                 </a:solidFill>
-                <a:latin typeface="Montserrat" pitchFamily="34" charset="0"/>
-                <a:ea typeface="Montserrat" pitchFamily="34" charset="-122"/>
-                <a:cs typeface="Montserrat" pitchFamily="34" charset="-120"/>
+                <a:latin typeface="Unbounded" pitchFamily="34" charset="0"/>
+                <a:ea typeface="Unbounded" pitchFamily="34" charset="-122"/>
+                <a:cs typeface="Unbounded" pitchFamily="34" charset="-120"/>
               </a:rPr>
               <a:t>Сервіс вирішує. Адаптер виконує.</a:t>
             </a:r>
@@ -20538,7 +20538,7 @@
         </p:nvSpPr>
         <p:spPr>
           <a:xfrm>
-            <a:off x="1280160" y="1024128"/>
+            <a:off x="1280160" y="1218895"/>
             <a:ext cx="777240" cy="256032"/>
           </a:xfrm>
           <a:prstGeom prst="roundRect">
@@ -20560,7 +20560,7 @@
         </p:nvSpPr>
         <p:spPr>
           <a:xfrm>
-            <a:off x="1280160" y="1024128"/>
+            <a:off x="1280160" y="1218895"/>
             <a:ext cx="777240" cy="256032"/>
           </a:xfrm>
           <a:prstGeom prst="rect">
@@ -21241,13 +21241,13 @@
               <a:buNone/>
             </a:pPr>
             <a:r>
-              <a:rPr lang="en-US" sz="2400" b="1" dirty="0">
+              <a:rPr lang="en-US" sz="2400" dirty="0">
                 <a:solidFill>
                   <a:srgbClr val="FFFFFF"/>
                 </a:solidFill>
-                <a:latin typeface="Montserrat" pitchFamily="34" charset="0"/>
-                <a:ea typeface="Montserrat" pitchFamily="34" charset="-122"/>
-                <a:cs typeface="Montserrat" pitchFamily="34" charset="-120"/>
+                <a:latin typeface="Unbounded" pitchFamily="34" charset="0"/>
+                <a:ea typeface="Unbounded" pitchFamily="34" charset="-122"/>
+                <a:cs typeface="Unbounded" pitchFamily="34" charset="-120"/>
               </a:rPr>
               <a:t>Розтин конфіга: дві «моделі» на одному mock</a:t>
             </a:r>
@@ -21263,7 +21263,7 @@
         </p:nvSpPr>
         <p:spPr>
           <a:xfrm>
-            <a:off x="1280160" y="1193140"/>
+            <a:off x="1280160" y="1218895"/>
             <a:ext cx="777240" cy="256032"/>
           </a:xfrm>
           <a:prstGeom prst="roundRect">
@@ -21285,7 +21285,7 @@
         </p:nvSpPr>
         <p:spPr>
           <a:xfrm>
-            <a:off x="1280160" y="1193140"/>
+            <a:off x="1280160" y="1218895"/>
             <a:ext cx="777240" cy="256032"/>
           </a:xfrm>
           <a:prstGeom prst="rect">
@@ -22197,13 +22197,13 @@
               <a:buNone/>
             </a:pPr>
             <a:r>
-              <a:rPr lang="en-US" sz="2400" b="1" dirty="0">
+              <a:rPr lang="en-US" sz="2400" dirty="0">
                 <a:solidFill>
                   <a:srgbClr val="FFFFFF"/>
                 </a:solidFill>
-                <a:latin typeface="Montserrat" pitchFamily="34" charset="0"/>
-                <a:ea typeface="Montserrat" pitchFamily="34" charset="-122"/>
-                <a:cs typeface="Montserrat" pitchFamily="34" charset="-120"/>
+                <a:latin typeface="Unbounded" pitchFamily="34" charset="0"/>
+                <a:ea typeface="Unbounded" pitchFamily="34" charset="-122"/>
+                <a:cs typeface="Unbounded" pitchFamily="34" charset="-120"/>
               </a:rPr>
               <a:t>«Модель» за назвою — не та сама модель</a:t>
             </a:r>
@@ -22219,7 +22219,7 @@
         </p:nvSpPr>
         <p:spPr>
           <a:xfrm>
-            <a:off x="1280160" y="1193140"/>
+            <a:off x="1280160" y="1218895"/>
             <a:ext cx="777240" cy="256032"/>
           </a:xfrm>
           <a:prstGeom prst="roundRect">
@@ -22241,7 +22241,7 @@
         </p:nvSpPr>
         <p:spPr>
           <a:xfrm>
-            <a:off x="1280160" y="1193140"/>
+            <a:off x="1280160" y="1218895"/>
             <a:ext cx="777240" cy="256032"/>
           </a:xfrm>
           <a:prstGeom prst="rect">
@@ -23144,13 +23144,13 @@
               <a:buNone/>
             </a:pPr>
             <a:r>
-              <a:rPr lang="en-US" sz="2400" b="1" dirty="0">
+              <a:rPr lang="en-US" sz="2400" dirty="0">
                 <a:solidFill>
                   <a:srgbClr val="FFFFFF"/>
                 </a:solidFill>
-                <a:latin typeface="Montserrat" pitchFamily="34" charset="0"/>
-                <a:ea typeface="Montserrat" pitchFamily="34" charset="-122"/>
-                <a:cs typeface="Montserrat" pitchFamily="34" charset="-120"/>
+                <a:latin typeface="Unbounded" pitchFamily="34" charset="0"/>
+                <a:ea typeface="Unbounded" pitchFamily="34" charset="-122"/>
+                <a:cs typeface="Unbounded" pitchFamily="34" charset="-120"/>
               </a:rPr>
               <a:t>Route(): роутер на десять рядків</a:t>
             </a:r>

--- a/docs/decks/L03.pptx
+++ b/docs/decks/L03.pptx
@@ -2643,7 +2643,7 @@
             <a:lvl1pPr>
               <a:defRPr sz="850">
                 <a:solidFill>
-                  <a:srgbClr val="8A82A0"/>
+                  <a:srgbClr val="9A94AA"/>
                 </a:solidFill>
                 <a:latin typeface="Courier New"/>
                 <a:ea typeface="Courier New"/>
@@ -2725,6 +2725,62 @@
 </p:sldLayout>
 </file>
 
+<file path=ppt/slideLayouts/slideLayout3.xml><?xml version="1.0" encoding="utf-8"?>
+<p:sldLayout xmlns:a="http://schemas.openxmlformats.org/drawingml/2006/main" xmlns:r="http://schemas.openxmlformats.org/officeDocument/2006/relationships" xmlns:p="http://schemas.openxmlformats.org/presentationml/2006/main" preserve="1">
+  <p:cSld name="NEO_COVER">
+    <p:bg>
+      <p:bgPr>
+        <a:solidFill>
+          <a:srgbClr val="000000"/>
+        </a:solidFill>
+      </p:bgPr>
+    </p:bg>
+    <p:spTree>
+      <p:nvGrpSpPr>
+        <p:cNvPr id="1" name=""/>
+        <p:cNvGrpSpPr/>
+        <p:nvPr/>
+      </p:nvGrpSpPr>
+      <p:grpSpPr>
+        <a:xfrm>
+          <a:off x="0" y="0"/>
+          <a:ext cx="0" cy="0"/>
+          <a:chOff x="0" y="0"/>
+          <a:chExt cx="0" cy="0"/>
+        </a:xfrm>
+      </p:grpSpPr>
+      <p:pic>
+        <p:nvPicPr>
+          <p:cNvPr id="2" name="Image 0" descr="preencoded.png">    </p:cNvPr>
+          <p:cNvPicPr>
+            <a:picLocks noChangeAspect="1"/>
+          </p:cNvPicPr>
+          <p:nvPr/>
+        </p:nvPicPr>
+        <p:blipFill>
+          <a:blip r:embed="rId1"/>
+          <a:stretch>
+            <a:fillRect/>
+          </a:stretch>
+        </p:blipFill>
+        <p:spPr>
+          <a:xfrm>
+            <a:off x="0" y="0"/>
+            <a:ext cx="12191695" cy="6858000"/>
+          </a:xfrm>
+          <a:prstGeom prst="rect">
+            <a:avLst/>
+          </a:prstGeom>
+        </p:spPr>
+      </p:pic>
+    </p:spTree>
+  </p:cSld>
+  <p:clrMapOvr>
+    <a:masterClrMapping/>
+  </p:clrMapOvr>
+</p:sldLayout>
+</file>
+
 <file path=ppt/slideMasters/slideMaster1.xml><?xml version="1.0" encoding="utf-8"?>
 <p:sldMaster xmlns:a="http://schemas.openxmlformats.org/drawingml/2006/main" xmlns:r="http://schemas.openxmlformats.org/officeDocument/2006/relationships" xmlns:p="http://schemas.openxmlformats.org/presentationml/2006/main">
   <p:cSld>
@@ -2772,7 +2828,7 @@
             <a:lvl1pPr>
               <a:defRPr sz="850">
                 <a:solidFill>
-                  <a:srgbClr val="8A82A0"/>
+                  <a:srgbClr val="9A94AA"/>
                 </a:solidFill>
                 <a:latin typeface="Courier New"/>
                 <a:ea typeface="Courier New"/>
@@ -2796,6 +2852,7 @@
   <p:sldLayoutIdLst>
     <p:sldLayoutId id="2147483649" r:id="rId1"/>
     <p:sldLayoutId id="2147483650" r:id="rId2"/>
+    <p:sldLayoutId id="2147483651" r:id="rId3"/>
   </p:sldLayoutIdLst>
   <p:hf sldNum="0" hdr="0" ftr="0" dt="0"/>
   <p:txStyles>
@@ -3125,7 +3182,7 @@
           </a:prstGeom>
           <a:ln w="12700">
             <a:solidFill>
-              <a:srgbClr val="9B7BE8">
+              <a:srgbClr val="8F72E6">
                 <a:alpha val="24000"/>
               </a:srgbClr>
             </a:solidFill>
@@ -3151,7 +3208,7 @@
           </a:prstGeom>
           <a:ln w="12700">
             <a:solidFill>
-              <a:srgbClr val="9B7BE8">
+              <a:srgbClr val="8F72E6">
                 <a:alpha val="42000"/>
               </a:srgbClr>
             </a:solidFill>
@@ -3177,7 +3234,7 @@
           </a:prstGeom>
           <a:ln w="12700">
             <a:solidFill>
-              <a:srgbClr val="9B7BE8">
+              <a:srgbClr val="8F72E6">
                 <a:alpha val="66000"/>
               </a:srgbClr>
             </a:solidFill>
@@ -3212,7 +3269,7 @@
             <a:r>
               <a:rPr lang="en-US" sz="1200" b="1" spc="300" kern="0" dirty="0">
                 <a:solidFill>
-                  <a:srgbClr val="C9B8FB"/>
+                  <a:srgbClr val="C4B3F5"/>
                 </a:solidFill>
                 <a:latin typeface="Courier New" pitchFamily="34" charset="0"/>
                 <a:ea typeface="Courier New" pitchFamily="34" charset="-122"/>
@@ -3316,7 +3373,7 @@
             <a:r>
               <a:rPr lang="en-US" sz="1500" dirty="0">
                 <a:solidFill>
-                  <a:srgbClr val="C9B8FB"/>
+                  <a:srgbClr val="C4B3F5"/>
                 </a:solidFill>
                 <a:latin typeface="Montserrat" pitchFamily="34" charset="0"/>
                 <a:ea typeface="Montserrat" pitchFamily="34" charset="-122"/>
@@ -3346,7 +3403,7 @@
           </a:prstGeom>
           <a:ln w="12700">
             <a:solidFill>
-              <a:srgbClr val="9B7BE8">
+              <a:srgbClr val="8F72E6">
                 <a:alpha val="60000"/>
               </a:srgbClr>
             </a:solidFill>
@@ -3381,7 +3438,7 @@
             <a:r>
               <a:rPr lang="en-US" sz="900" dirty="0">
                 <a:solidFill>
-                  <a:srgbClr val="C9B8FB"/>
+                  <a:srgbClr val="C4B3F5"/>
                 </a:solidFill>
                 <a:latin typeface="Courier New" pitchFamily="34" charset="0"/>
                 <a:ea typeface="Courier New" pitchFamily="34" charset="-122"/>
@@ -3472,7 +3529,7 @@
           </a:prstGeom>
           <a:ln w="12700">
             <a:solidFill>
-              <a:srgbClr val="9B7BE8">
+              <a:srgbClr val="8F72E6">
                 <a:alpha val="60000"/>
               </a:srgbClr>
             </a:solidFill>
@@ -3507,7 +3564,7 @@
             <a:r>
               <a:rPr lang="en-US" sz="900" dirty="0">
                 <a:solidFill>
-                  <a:srgbClr val="C9B8FB"/>
+                  <a:srgbClr val="C4B3F5"/>
                 </a:solidFill>
                 <a:latin typeface="Courier New" pitchFamily="34" charset="0"/>
                 <a:ea typeface="Courier New" pitchFamily="34" charset="-122"/>
@@ -3537,7 +3594,7 @@
           </a:prstGeom>
           <a:ln w="12700">
             <a:solidFill>
-              <a:srgbClr val="9B7BE8">
+              <a:srgbClr val="8F72E6">
                 <a:alpha val="60000"/>
               </a:srgbClr>
             </a:solidFill>
@@ -3572,7 +3629,7 @@
             <a:r>
               <a:rPr lang="en-US" sz="900" dirty="0">
                 <a:solidFill>
-                  <a:srgbClr val="C9B8FB"/>
+                  <a:srgbClr val="C4B3F5"/>
                 </a:solidFill>
                 <a:latin typeface="Courier New" pitchFamily="34" charset="0"/>
                 <a:ea typeface="Courier New" pitchFamily="34" charset="-122"/>
@@ -3602,7 +3659,7 @@
           </a:prstGeom>
           <a:ln w="12700">
             <a:solidFill>
-              <a:srgbClr val="9B7BE8">
+              <a:srgbClr val="8F72E6">
                 <a:alpha val="60000"/>
               </a:srgbClr>
             </a:solidFill>
@@ -3637,7 +3694,7 @@
             <a:r>
               <a:rPr lang="en-US" sz="900" dirty="0">
                 <a:solidFill>
-                  <a:srgbClr val="C9B8FB"/>
+                  <a:srgbClr val="C4B3F5"/>
                 </a:solidFill>
                 <a:latin typeface="Courier New" pitchFamily="34" charset="0"/>
                 <a:ea typeface="Courier New" pitchFamily="34" charset="-122"/>
@@ -3667,7 +3724,7 @@
           </a:prstGeom>
           <a:ln w="12700">
             <a:solidFill>
-              <a:srgbClr val="9B7BE8">
+              <a:srgbClr val="8F72E6">
                 <a:alpha val="60000"/>
               </a:srgbClr>
             </a:solidFill>
@@ -3702,7 +3759,7 @@
             <a:r>
               <a:rPr lang="en-US" sz="900" dirty="0">
                 <a:solidFill>
-                  <a:srgbClr val="C9B8FB"/>
+                  <a:srgbClr val="C4B3F5"/>
                 </a:solidFill>
                 <a:latin typeface="Courier New" pitchFamily="34" charset="0"/>
                 <a:ea typeface="Courier New" pitchFamily="34" charset="-122"/>
@@ -3766,7 +3823,7 @@
             <a:r>
               <a:rPr lang="en-US" sz="2600" b="1" dirty="0">
                 <a:solidFill>
-                  <a:srgbClr val="C9A6FF"/>
+                  <a:srgbClr val="A98BFF"/>
                 </a:solidFill>
                 <a:latin typeface="Courier New" pitchFamily="34" charset="0"/>
                 <a:ea typeface="Courier New" pitchFamily="34" charset="-122"/>
@@ -3834,9 +3891,14 @@
             </a:avLst>
           </a:prstGeom>
           <a:solidFill>
-            <a:srgbClr val="C9A6FF"/>
+            <a:srgbClr val="1A0B3D"/>
           </a:solidFill>
-          <a:ln/>
+          <a:ln w="12700">
+            <a:solidFill>
+              <a:srgbClr val="5A05F4"/>
+            </a:solidFill>
+            <a:prstDash val="solid"/>
+          </a:ln>
         </p:spPr>
       </p:sp>
       <p:sp>
@@ -3866,7 +3928,7 @@
             <a:r>
               <a:rPr lang="en-US" sz="900" b="1" spc="100" kern="0" dirty="0">
                 <a:solidFill>
-                  <a:srgbClr val="1C1140"/>
+                  <a:srgbClr val="A98BFF"/>
                 </a:solidFill>
                 <a:latin typeface="Courier New" pitchFamily="34" charset="0"/>
                 <a:ea typeface="Courier New" pitchFamily="34" charset="-122"/>
@@ -3919,9 +3981,14 @@
             </a:avLst>
           </a:prstGeom>
           <a:solidFill>
-            <a:srgbClr val="102A20"/>
+            <a:srgbClr val="06180F"/>
           </a:solidFill>
-          <a:ln/>
+          <a:ln w="12700">
+            <a:solidFill>
+              <a:srgbClr val="3FCF8E"/>
+            </a:solidFill>
+            <a:prstDash val="solid"/>
+          </a:ln>
         </p:spPr>
       </p:sp>
       <p:sp>
@@ -3939,7 +4006,7 @@
             <a:avLst/>
           </a:prstGeom>
           <a:solidFill>
-            <a:srgbClr val="5FD6A0"/>
+            <a:srgbClr val="5A05F4"/>
           </a:solidFill>
           <a:ln/>
         </p:spPr>
@@ -3971,7 +4038,7 @@
             <a:r>
               <a:rPr lang="en-US" sz="1200" b="1" dirty="0">
                 <a:solidFill>
-                  <a:srgbClr val="102A20"/>
+                  <a:srgbClr val="FFFFFF"/>
                 </a:solidFill>
                 <a:latin typeface="Courier New" pitchFamily="34" charset="0"/>
                 <a:ea typeface="Courier New" pitchFamily="34" charset="-122"/>
@@ -4010,7 +4077,7 @@
             <a:r>
               <a:rPr lang="en-US" sz="1450" b="1" dirty="0">
                 <a:solidFill>
-                  <a:srgbClr val="5FD6A0"/>
+                  <a:srgbClr val="3FCF8E"/>
                 </a:solidFill>
                 <a:latin typeface="Montserrat" pitchFamily="34" charset="0"/>
                 <a:ea typeface="Montserrat" pitchFamily="34" charset="-122"/>
@@ -4052,7 +4119,7 @@
             <a:r>
               <a:rPr lang="en-US" sz="1200" dirty="0">
                 <a:solidFill>
-                  <a:srgbClr val="FFFFFF"/>
+                  <a:srgbClr val="C9C4D6"/>
                 </a:solidFill>
                 <a:latin typeface="Montserrat" pitchFamily="34" charset="0"/>
                 <a:ea typeface="Montserrat" pitchFamily="34" charset="-122"/>
@@ -4081,11 +4148,11 @@
             </a:avLst>
           </a:prstGeom>
           <a:solidFill>
-            <a:srgbClr val="17141F"/>
+            <a:srgbClr val="000000"/>
           </a:solidFill>
           <a:ln w="12700">
             <a:solidFill>
-              <a:srgbClr val="2E2A3A"/>
+              <a:srgbClr val="5E4F85"/>
             </a:solidFill>
             <a:prstDash val="solid"/>
           </a:ln>
@@ -4219,7 +4286,7 @@
             <a:r>
               <a:rPr lang="en-US" sz="1200" dirty="0">
                 <a:solidFill>
-                  <a:srgbClr val="AFA9BE"/>
+                  <a:srgbClr val="C9C4D6"/>
                 </a:solidFill>
                 <a:latin typeface="Montserrat" pitchFamily="34" charset="0"/>
                 <a:ea typeface="Montserrat" pitchFamily="34" charset="-122"/>
@@ -4248,9 +4315,14 @@
             </a:avLst>
           </a:prstGeom>
           <a:solidFill>
-            <a:srgbClr val="2A2010"/>
+            <a:srgbClr val="0B1A38"/>
           </a:solidFill>
-          <a:ln/>
+          <a:ln w="12700">
+            <a:solidFill>
+              <a:srgbClr val="6BA0F8"/>
+            </a:solidFill>
+            <a:prstDash val="solid"/>
+          </a:ln>
         </p:spPr>
       </p:sp>
       <p:sp>
@@ -4268,7 +4340,7 @@
             <a:avLst/>
           </a:prstGeom>
           <a:solidFill>
-            <a:srgbClr val="E8A857"/>
+            <a:srgbClr val="5A05F4"/>
           </a:solidFill>
           <a:ln/>
         </p:spPr>
@@ -4300,7 +4372,7 @@
             <a:r>
               <a:rPr lang="en-US" sz="1200" b="1" dirty="0">
                 <a:solidFill>
-                  <a:srgbClr val="2A2010"/>
+                  <a:srgbClr val="FFFFFF"/>
                 </a:solidFill>
                 <a:latin typeface="Courier New" pitchFamily="34" charset="0"/>
                 <a:ea typeface="Courier New" pitchFamily="34" charset="-122"/>
@@ -4339,7 +4411,7 @@
             <a:r>
               <a:rPr lang="en-US" sz="1450" b="1" dirty="0">
                 <a:solidFill>
-                  <a:srgbClr val="E8A857"/>
+                  <a:srgbClr val="6BA0F8"/>
                 </a:solidFill>
                 <a:latin typeface="Montserrat" pitchFamily="34" charset="0"/>
                 <a:ea typeface="Montserrat" pitchFamily="34" charset="-122"/>
@@ -4381,7 +4453,7 @@
             <a:r>
               <a:rPr lang="en-US" sz="1200" dirty="0">
                 <a:solidFill>
-                  <a:srgbClr val="FFFFFF"/>
+                  <a:srgbClr val="C9C4D6"/>
                 </a:solidFill>
                 <a:latin typeface="Montserrat" pitchFamily="34" charset="0"/>
                 <a:ea typeface="Montserrat" pitchFamily="34" charset="-122"/>
@@ -4526,7 +4598,7 @@
             <a:lvl1pPr>
               <a:defRPr sz="850">
                 <a:solidFill>
-                  <a:srgbClr val="8A82A0"/>
+                  <a:srgbClr val="9A94AA"/>
                 </a:solidFill>
                 <a:latin typeface="Courier New"/>
                 <a:ea typeface="Courier New"/>
@@ -4596,7 +4668,7 @@
             <a:r>
               <a:rPr lang="en-US" sz="2600" b="1" dirty="0">
                 <a:solidFill>
-                  <a:srgbClr val="C9A6FF"/>
+                  <a:srgbClr val="A98BFF"/>
                 </a:solidFill>
                 <a:latin typeface="Courier New" pitchFamily="34" charset="0"/>
                 <a:ea typeface="Courier New" pitchFamily="34" charset="-122"/>
@@ -4664,9 +4736,14 @@
             </a:avLst>
           </a:prstGeom>
           <a:solidFill>
-            <a:srgbClr val="C9A6FF"/>
+            <a:srgbClr val="1A0B3D"/>
           </a:solidFill>
-          <a:ln/>
+          <a:ln w="12700">
+            <a:solidFill>
+              <a:srgbClr val="5A05F4"/>
+            </a:solidFill>
+            <a:prstDash val="solid"/>
+          </a:ln>
         </p:spPr>
       </p:sp>
       <p:sp>
@@ -4696,7 +4773,7 @@
             <a:r>
               <a:rPr lang="en-US" sz="900" b="1" spc="100" kern="0" dirty="0">
                 <a:solidFill>
-                  <a:srgbClr val="1C1140"/>
+                  <a:srgbClr val="A98BFF"/>
                 </a:solidFill>
                 <a:latin typeface="Courier New" pitchFamily="34" charset="0"/>
                 <a:ea typeface="Courier New" pitchFamily="34" charset="-122"/>
@@ -4749,11 +4826,11 @@
             </a:avLst>
           </a:prstGeom>
           <a:solidFill>
-            <a:srgbClr val="17141F"/>
+            <a:srgbClr val="000000"/>
           </a:solidFill>
           <a:ln w="12700">
             <a:solidFill>
-              <a:srgbClr val="2E2A3A"/>
+              <a:srgbClr val="5E4F85"/>
             </a:solidFill>
             <a:prstDash val="solid"/>
           </a:ln>
@@ -4825,7 +4902,7 @@
             <a:r>
               <a:rPr lang="en-US" sz="1150" dirty="0">
                 <a:solidFill>
-                  <a:srgbClr val="AFA9BE"/>
+                  <a:srgbClr val="C9C4D6"/>
                 </a:solidFill>
                 <a:latin typeface="Montserrat" pitchFamily="34" charset="0"/>
                 <a:ea typeface="Montserrat" pitchFamily="34" charset="-122"/>
@@ -4854,9 +4931,14 @@
             </a:avLst>
           </a:prstGeom>
           <a:solidFill>
-            <a:srgbClr val="1C1140"/>
+            <a:srgbClr val="1A0B3D"/>
           </a:solidFill>
-          <a:ln/>
+          <a:ln w="12700">
+            <a:solidFill>
+              <a:srgbClr val="5A05F4"/>
+            </a:solidFill>
+            <a:prstDash val="solid"/>
+          </a:ln>
         </p:spPr>
       </p:sp>
       <p:sp>
@@ -4886,7 +4968,7 @@
             <a:r>
               <a:rPr lang="en-US" sz="1350" b="1" dirty="0">
                 <a:solidFill>
-                  <a:srgbClr val="C9A6FF"/>
+                  <a:srgbClr val="A98BFF"/>
                 </a:solidFill>
                 <a:latin typeface="Montserrat" pitchFamily="34" charset="0"/>
                 <a:ea typeface="Montserrat" pitchFamily="34" charset="-122"/>
@@ -4925,7 +5007,7 @@
             <a:r>
               <a:rPr lang="en-US" sz="1150" dirty="0">
                 <a:solidFill>
-                  <a:srgbClr val="FFFFFF"/>
+                  <a:srgbClr val="C9C4D6"/>
                 </a:solidFill>
                 <a:latin typeface="Montserrat" pitchFamily="34" charset="0"/>
                 <a:ea typeface="Montserrat" pitchFamily="34" charset="-122"/>
@@ -4954,9 +5036,14 @@
             </a:avLst>
           </a:prstGeom>
           <a:solidFill>
-            <a:srgbClr val="2A2010"/>
+            <a:srgbClr val="0B1A38"/>
           </a:solidFill>
-          <a:ln/>
+          <a:ln w="12700">
+            <a:solidFill>
+              <a:srgbClr val="6BA0F8"/>
+            </a:solidFill>
+            <a:prstDash val="solid"/>
+          </a:ln>
         </p:spPr>
       </p:sp>
       <p:sp>
@@ -4986,7 +5073,7 @@
             <a:r>
               <a:rPr lang="en-US" sz="1350" b="1" dirty="0">
                 <a:solidFill>
-                  <a:srgbClr val="E8A857"/>
+                  <a:srgbClr val="6BA0F8"/>
                 </a:solidFill>
                 <a:latin typeface="Montserrat" pitchFamily="34" charset="0"/>
                 <a:ea typeface="Montserrat" pitchFamily="34" charset="-122"/>
@@ -5025,7 +5112,7 @@
             <a:r>
               <a:rPr lang="en-US" sz="1150" dirty="0">
                 <a:solidFill>
-                  <a:srgbClr val="FFFFFF"/>
+                  <a:srgbClr val="C9C4D6"/>
                 </a:solidFill>
                 <a:latin typeface="Montserrat" pitchFamily="34" charset="0"/>
                 <a:ea typeface="Montserrat" pitchFamily="34" charset="-122"/>
@@ -5054,9 +5141,14 @@
             </a:avLst>
           </a:prstGeom>
           <a:solidFill>
-            <a:srgbClr val="102A20"/>
+            <a:srgbClr val="06180F"/>
           </a:solidFill>
-          <a:ln/>
+          <a:ln w="12700">
+            <a:solidFill>
+              <a:srgbClr val="3FCF8E"/>
+            </a:solidFill>
+            <a:prstDash val="solid"/>
+          </a:ln>
         </p:spPr>
       </p:sp>
       <p:sp>
@@ -5086,7 +5178,7 @@
             <a:r>
               <a:rPr lang="en-US" sz="950" b="1" spc="150" kern="0" dirty="0">
                 <a:solidFill>
-                  <a:srgbClr val="5FD6A0"/>
+                  <a:srgbClr val="3FCF8E"/>
                 </a:solidFill>
                 <a:latin typeface="Courier New" pitchFamily="34" charset="0"/>
                 <a:ea typeface="Courier New" pitchFamily="34" charset="-122"/>
@@ -5170,7 +5262,7 @@
             <a:lvl1pPr>
               <a:defRPr sz="850">
                 <a:solidFill>
-                  <a:srgbClr val="8A82A0"/>
+                  <a:srgbClr val="9A94AA"/>
                 </a:solidFill>
                 <a:latin typeface="Courier New"/>
                 <a:ea typeface="Courier New"/>
@@ -5240,7 +5332,7 @@
             <a:r>
               <a:rPr lang="en-US" sz="2600" b="1" dirty="0">
                 <a:solidFill>
-                  <a:srgbClr val="C9A6FF"/>
+                  <a:srgbClr val="A98BFF"/>
                 </a:solidFill>
                 <a:latin typeface="Courier New" pitchFamily="34" charset="0"/>
                 <a:ea typeface="Courier New" pitchFamily="34" charset="-122"/>
@@ -5308,9 +5400,14 @@
             </a:avLst>
           </a:prstGeom>
           <a:solidFill>
-            <a:srgbClr val="C9A6FF"/>
+            <a:srgbClr val="1A0B3D"/>
           </a:solidFill>
-          <a:ln/>
+          <a:ln w="12700">
+            <a:solidFill>
+              <a:srgbClr val="5A05F4"/>
+            </a:solidFill>
+            <a:prstDash val="solid"/>
+          </a:ln>
         </p:spPr>
       </p:sp>
       <p:sp>
@@ -5340,7 +5437,7 @@
             <a:r>
               <a:rPr lang="en-US" sz="900" b="1" spc="100" kern="0" dirty="0">
                 <a:solidFill>
-                  <a:srgbClr val="1C1140"/>
+                  <a:srgbClr val="A98BFF"/>
                 </a:solidFill>
                 <a:latin typeface="Courier New" pitchFamily="34" charset="0"/>
                 <a:ea typeface="Courier New" pitchFamily="34" charset="-122"/>
@@ -5415,7 +5512,7 @@
                       <a:r>
                         <a:rPr lang="en-US" sz="900" b="1" spc="100" kern="0" dirty="0">
                           <a:solidFill>
-                            <a:srgbClr val="AFA9BE"/>
+                            <a:srgbClr val="C9C4D6"/>
                           </a:solidFill>
                           <a:latin typeface="Courier New" pitchFamily="34" charset="0"/>
                           <a:ea typeface="Courier New" pitchFamily="34" charset="-122"/>
@@ -5433,7 +5530,7 @@
                   <a:tcPr marL="73152" marR="73152" marT="73152" marB="73152" anchor="ctr">
                     <a:lnL w="6350" cap="flat" cmpd="sng" algn="ctr">
                       <a:solidFill>
-                        <a:srgbClr val="2E2A3A"/>
+                        <a:srgbClr val="5E4F85"/>
                       </a:solidFill>
                       <a:prstDash val="solid"/>
                       <a:round/>
@@ -5442,7 +5539,7 @@
                     </a:lnL>
                     <a:lnR w="6350" cap="flat" cmpd="sng" algn="ctr">
                       <a:solidFill>
-                        <a:srgbClr val="2E2A3A"/>
+                        <a:srgbClr val="5E4F85"/>
                       </a:solidFill>
                       <a:prstDash val="solid"/>
                       <a:round/>
@@ -5451,7 +5548,7 @@
                     </a:lnR>
                     <a:lnT w="6350" cap="flat" cmpd="sng" algn="ctr">
                       <a:solidFill>
-                        <a:srgbClr val="2E2A3A"/>
+                        <a:srgbClr val="5E4F85"/>
                       </a:solidFill>
                       <a:prstDash val="solid"/>
                       <a:round/>
@@ -5460,7 +5557,7 @@
                     </a:lnT>
                     <a:lnB w="6350" cap="flat" cmpd="sng" algn="ctr">
                       <a:solidFill>
-                        <a:srgbClr val="2E2A3A"/>
+                        <a:srgbClr val="5E4F85"/>
                       </a:solidFill>
                       <a:prstDash val="solid"/>
                       <a:round/>
@@ -5468,7 +5565,7 @@
                       <a:tailEnd type="none" w="med" len="med"/>
                     </a:lnB>
                     <a:solidFill>
-                      <a:srgbClr val="1F1B2A"/>
+                      <a:srgbClr val="1A0B3D"/>
                     </a:solidFill>
                   </a:tcPr>
                 </a:tc>
@@ -5483,7 +5580,7 @@
                       <a:r>
                         <a:rPr lang="en-US" sz="900" b="1" spc="100" kern="0" dirty="0">
                           <a:solidFill>
-                            <a:srgbClr val="AFA9BE"/>
+                            <a:srgbClr val="C9C4D6"/>
                           </a:solidFill>
                           <a:latin typeface="Courier New" pitchFamily="34" charset="0"/>
                           <a:ea typeface="Courier New" pitchFamily="34" charset="-122"/>
@@ -5501,7 +5598,7 @@
                   <a:tcPr marL="73152" marR="73152" marT="73152" marB="73152" anchor="ctr">
                     <a:lnL w="6350" cap="flat" cmpd="sng" algn="ctr">
                       <a:solidFill>
-                        <a:srgbClr val="2E2A3A"/>
+                        <a:srgbClr val="5E4F85"/>
                       </a:solidFill>
                       <a:prstDash val="solid"/>
                       <a:round/>
@@ -5510,7 +5607,7 @@
                     </a:lnL>
                     <a:lnR w="6350" cap="flat" cmpd="sng" algn="ctr">
                       <a:solidFill>
-                        <a:srgbClr val="2E2A3A"/>
+                        <a:srgbClr val="5E4F85"/>
                       </a:solidFill>
                       <a:prstDash val="solid"/>
                       <a:round/>
@@ -5519,7 +5616,7 @@
                     </a:lnR>
                     <a:lnT w="6350" cap="flat" cmpd="sng" algn="ctr">
                       <a:solidFill>
-                        <a:srgbClr val="2E2A3A"/>
+                        <a:srgbClr val="5E4F85"/>
                       </a:solidFill>
                       <a:prstDash val="solid"/>
                       <a:round/>
@@ -5528,7 +5625,7 @@
                     </a:lnT>
                     <a:lnB w="6350" cap="flat" cmpd="sng" algn="ctr">
                       <a:solidFill>
-                        <a:srgbClr val="2E2A3A"/>
+                        <a:srgbClr val="5E4F85"/>
                       </a:solidFill>
                       <a:prstDash val="solid"/>
                       <a:round/>
@@ -5536,7 +5633,7 @@
                       <a:tailEnd type="none" w="med" len="med"/>
                     </a:lnB>
                     <a:solidFill>
-                      <a:srgbClr val="1F1B2A"/>
+                      <a:srgbClr val="1A0B3D"/>
                     </a:solidFill>
                   </a:tcPr>
                 </a:tc>
@@ -5551,7 +5648,7 @@
                       <a:r>
                         <a:rPr lang="en-US" sz="900" b="1" spc="100" kern="0" dirty="0">
                           <a:solidFill>
-                            <a:srgbClr val="AFA9BE"/>
+                            <a:srgbClr val="C9C4D6"/>
                           </a:solidFill>
                           <a:latin typeface="Courier New" pitchFamily="34" charset="0"/>
                           <a:ea typeface="Courier New" pitchFamily="34" charset="-122"/>
@@ -5569,7 +5666,7 @@
                   <a:tcPr marL="73152" marR="73152" marT="73152" marB="73152" anchor="ctr">
                     <a:lnL w="6350" cap="flat" cmpd="sng" algn="ctr">
                       <a:solidFill>
-                        <a:srgbClr val="2E2A3A"/>
+                        <a:srgbClr val="5E4F85"/>
                       </a:solidFill>
                       <a:prstDash val="solid"/>
                       <a:round/>
@@ -5578,7 +5675,7 @@
                     </a:lnL>
                     <a:lnR w="6350" cap="flat" cmpd="sng" algn="ctr">
                       <a:solidFill>
-                        <a:srgbClr val="2E2A3A"/>
+                        <a:srgbClr val="5E4F85"/>
                       </a:solidFill>
                       <a:prstDash val="solid"/>
                       <a:round/>
@@ -5587,7 +5684,7 @@
                     </a:lnR>
                     <a:lnT w="6350" cap="flat" cmpd="sng" algn="ctr">
                       <a:solidFill>
-                        <a:srgbClr val="2E2A3A"/>
+                        <a:srgbClr val="5E4F85"/>
                       </a:solidFill>
                       <a:prstDash val="solid"/>
                       <a:round/>
@@ -5596,7 +5693,7 @@
                     </a:lnT>
                     <a:lnB w="6350" cap="flat" cmpd="sng" algn="ctr">
                       <a:solidFill>
-                        <a:srgbClr val="2E2A3A"/>
+                        <a:srgbClr val="5E4F85"/>
                       </a:solidFill>
                       <a:prstDash val="solid"/>
                       <a:round/>
@@ -5604,7 +5701,7 @@
                       <a:tailEnd type="none" w="med" len="med"/>
                     </a:lnB>
                     <a:solidFill>
-                      <a:srgbClr val="1F1B2A"/>
+                      <a:srgbClr val="1A0B3D"/>
                     </a:solidFill>
                   </a:tcPr>
                 </a:tc>
@@ -5621,7 +5718,7 @@
                       <a:r>
                         <a:rPr lang="en-US" sz="1150" b="1" dirty="0">
                           <a:solidFill>
-                            <a:srgbClr val="5FD6A0"/>
+                            <a:srgbClr val="3FCF8E"/>
                           </a:solidFill>
                           <a:latin typeface="Montserrat" pitchFamily="34" charset="0"/>
                           <a:ea typeface="Montserrat" pitchFamily="34" charset="-122"/>
@@ -5639,7 +5736,7 @@
                   <a:tcPr marL="73152" marR="73152" marT="73152" marB="73152" anchor="ctr">
                     <a:lnL w="6350" cap="flat" cmpd="sng" algn="ctr">
                       <a:solidFill>
-                        <a:srgbClr val="2E2A3A"/>
+                        <a:srgbClr val="5E4F85"/>
                       </a:solidFill>
                       <a:prstDash val="solid"/>
                       <a:round/>
@@ -5648,7 +5745,7 @@
                     </a:lnL>
                     <a:lnR w="6350" cap="flat" cmpd="sng" algn="ctr">
                       <a:solidFill>
-                        <a:srgbClr val="2E2A3A"/>
+                        <a:srgbClr val="5E4F85"/>
                       </a:solidFill>
                       <a:prstDash val="solid"/>
                       <a:round/>
@@ -5657,7 +5754,7 @@
                     </a:lnR>
                     <a:lnT w="6350" cap="flat" cmpd="sng" algn="ctr">
                       <a:solidFill>
-                        <a:srgbClr val="2E2A3A"/>
+                        <a:srgbClr val="5E4F85"/>
                       </a:solidFill>
                       <a:prstDash val="solid"/>
                       <a:round/>
@@ -5666,7 +5763,7 @@
                     </a:lnT>
                     <a:lnB w="6350" cap="flat" cmpd="sng" algn="ctr">
                       <a:solidFill>
-                        <a:srgbClr val="2E2A3A"/>
+                        <a:srgbClr val="5E4F85"/>
                       </a:solidFill>
                       <a:prstDash val="solid"/>
                       <a:round/>
@@ -5674,7 +5771,7 @@
                       <a:tailEnd type="none" w="med" len="med"/>
                     </a:lnB>
                     <a:solidFill>
-                      <a:srgbClr val="102A20"/>
+                      <a:srgbClr val="06180F"/>
                     </a:solidFill>
                   </a:tcPr>
                 </a:tc>
@@ -5707,7 +5804,7 @@
                   <a:tcPr marL="73152" marR="73152" marT="73152" marB="73152" anchor="ctr">
                     <a:lnL w="6350" cap="flat" cmpd="sng" algn="ctr">
                       <a:solidFill>
-                        <a:srgbClr val="2E2A3A"/>
+                        <a:srgbClr val="5E4F85"/>
                       </a:solidFill>
                       <a:prstDash val="solid"/>
                       <a:round/>
@@ -5716,7 +5813,7 @@
                     </a:lnL>
                     <a:lnR w="6350" cap="flat" cmpd="sng" algn="ctr">
                       <a:solidFill>
-                        <a:srgbClr val="2E2A3A"/>
+                        <a:srgbClr val="5E4F85"/>
                       </a:solidFill>
                       <a:prstDash val="solid"/>
                       <a:round/>
@@ -5725,7 +5822,7 @@
                     </a:lnR>
                     <a:lnT w="6350" cap="flat" cmpd="sng" algn="ctr">
                       <a:solidFill>
-                        <a:srgbClr val="2E2A3A"/>
+                        <a:srgbClr val="5E4F85"/>
                       </a:solidFill>
                       <a:prstDash val="solid"/>
                       <a:round/>
@@ -5734,7 +5831,7 @@
                     </a:lnT>
                     <a:lnB w="6350" cap="flat" cmpd="sng" algn="ctr">
                       <a:solidFill>
-                        <a:srgbClr val="2E2A3A"/>
+                        <a:srgbClr val="5E4F85"/>
                       </a:solidFill>
                       <a:prstDash val="solid"/>
                       <a:round/>
@@ -5742,7 +5839,7 @@
                       <a:tailEnd type="none" w="med" len="med"/>
                     </a:lnB>
                     <a:solidFill>
-                      <a:srgbClr val="102A20"/>
+                      <a:srgbClr val="06180F"/>
                     </a:solidFill>
                   </a:tcPr>
                 </a:tc>
@@ -5775,7 +5872,7 @@
                   <a:tcPr marL="73152" marR="73152" marT="73152" marB="73152" anchor="ctr">
                     <a:lnL w="6350" cap="flat" cmpd="sng" algn="ctr">
                       <a:solidFill>
-                        <a:srgbClr val="2E2A3A"/>
+                        <a:srgbClr val="5E4F85"/>
                       </a:solidFill>
                       <a:prstDash val="solid"/>
                       <a:round/>
@@ -5784,7 +5881,7 @@
                     </a:lnL>
                     <a:lnR w="6350" cap="flat" cmpd="sng" algn="ctr">
                       <a:solidFill>
-                        <a:srgbClr val="2E2A3A"/>
+                        <a:srgbClr val="5E4F85"/>
                       </a:solidFill>
                       <a:prstDash val="solid"/>
                       <a:round/>
@@ -5793,7 +5890,7 @@
                     </a:lnR>
                     <a:lnT w="6350" cap="flat" cmpd="sng" algn="ctr">
                       <a:solidFill>
-                        <a:srgbClr val="2E2A3A"/>
+                        <a:srgbClr val="5E4F85"/>
                       </a:solidFill>
                       <a:prstDash val="solid"/>
                       <a:round/>
@@ -5802,7 +5899,7 @@
                     </a:lnT>
                     <a:lnB w="6350" cap="flat" cmpd="sng" algn="ctr">
                       <a:solidFill>
-                        <a:srgbClr val="2E2A3A"/>
+                        <a:srgbClr val="5E4F85"/>
                       </a:solidFill>
                       <a:prstDash val="solid"/>
                       <a:round/>
@@ -5810,7 +5907,7 @@
                       <a:tailEnd type="none" w="med" len="med"/>
                     </a:lnB>
                     <a:solidFill>
-                      <a:srgbClr val="102A20"/>
+                      <a:srgbClr val="06180F"/>
                     </a:solidFill>
                   </a:tcPr>
                 </a:tc>
@@ -5845,7 +5942,7 @@
                   <a:tcPr marL="73152" marR="73152" marT="73152" marB="73152" anchor="ctr">
                     <a:lnL w="6350" cap="flat" cmpd="sng" algn="ctr">
                       <a:solidFill>
-                        <a:srgbClr val="2E2A3A"/>
+                        <a:srgbClr val="5E4F85"/>
                       </a:solidFill>
                       <a:prstDash val="solid"/>
                       <a:round/>
@@ -5854,7 +5951,7 @@
                     </a:lnL>
                     <a:lnR w="6350" cap="flat" cmpd="sng" algn="ctr">
                       <a:solidFill>
-                        <a:srgbClr val="2E2A3A"/>
+                        <a:srgbClr val="5E4F85"/>
                       </a:solidFill>
                       <a:prstDash val="solid"/>
                       <a:round/>
@@ -5863,7 +5960,7 @@
                     </a:lnR>
                     <a:lnT w="6350" cap="flat" cmpd="sng" algn="ctr">
                       <a:solidFill>
-                        <a:srgbClr val="2E2A3A"/>
+                        <a:srgbClr val="5E4F85"/>
                       </a:solidFill>
                       <a:prstDash val="solid"/>
                       <a:round/>
@@ -5872,7 +5969,7 @@
                     </a:lnT>
                     <a:lnB w="6350" cap="flat" cmpd="sng" algn="ctr">
                       <a:solidFill>
-                        <a:srgbClr val="2E2A3A"/>
+                        <a:srgbClr val="5E4F85"/>
                       </a:solidFill>
                       <a:prstDash val="solid"/>
                       <a:round/>
@@ -5880,7 +5977,7 @@
                       <a:tailEnd type="none" w="med" len="med"/>
                     </a:lnB>
                     <a:solidFill>
-                      <a:srgbClr val="17141F"/>
+                      <a:srgbClr val="000000"/>
                     </a:solidFill>
                   </a:tcPr>
                 </a:tc>
@@ -5913,7 +6010,7 @@
                   <a:tcPr marL="73152" marR="73152" marT="73152" marB="73152" anchor="ctr">
                     <a:lnL w="6350" cap="flat" cmpd="sng" algn="ctr">
                       <a:solidFill>
-                        <a:srgbClr val="2E2A3A"/>
+                        <a:srgbClr val="5E4F85"/>
                       </a:solidFill>
                       <a:prstDash val="solid"/>
                       <a:round/>
@@ -5922,7 +6019,7 @@
                     </a:lnL>
                     <a:lnR w="6350" cap="flat" cmpd="sng" algn="ctr">
                       <a:solidFill>
-                        <a:srgbClr val="2E2A3A"/>
+                        <a:srgbClr val="5E4F85"/>
                       </a:solidFill>
                       <a:prstDash val="solid"/>
                       <a:round/>
@@ -5931,7 +6028,7 @@
                     </a:lnR>
                     <a:lnT w="6350" cap="flat" cmpd="sng" algn="ctr">
                       <a:solidFill>
-                        <a:srgbClr val="2E2A3A"/>
+                        <a:srgbClr val="5E4F85"/>
                       </a:solidFill>
                       <a:prstDash val="solid"/>
                       <a:round/>
@@ -5940,7 +6037,7 @@
                     </a:lnT>
                     <a:lnB w="6350" cap="flat" cmpd="sng" algn="ctr">
                       <a:solidFill>
-                        <a:srgbClr val="2E2A3A"/>
+                        <a:srgbClr val="5E4F85"/>
                       </a:solidFill>
                       <a:prstDash val="solid"/>
                       <a:round/>
@@ -5948,7 +6045,7 @@
                       <a:tailEnd type="none" w="med" len="med"/>
                     </a:lnB>
                     <a:solidFill>
-                      <a:srgbClr val="17141F"/>
+                      <a:srgbClr val="000000"/>
                     </a:solidFill>
                   </a:tcPr>
                 </a:tc>
@@ -5981,7 +6078,7 @@
                   <a:tcPr marL="73152" marR="73152" marT="73152" marB="73152" anchor="ctr">
                     <a:lnL w="6350" cap="flat" cmpd="sng" algn="ctr">
                       <a:solidFill>
-                        <a:srgbClr val="2E2A3A"/>
+                        <a:srgbClr val="5E4F85"/>
                       </a:solidFill>
                       <a:prstDash val="solid"/>
                       <a:round/>
@@ -5990,7 +6087,7 @@
                     </a:lnL>
                     <a:lnR w="6350" cap="flat" cmpd="sng" algn="ctr">
                       <a:solidFill>
-                        <a:srgbClr val="2E2A3A"/>
+                        <a:srgbClr val="5E4F85"/>
                       </a:solidFill>
                       <a:prstDash val="solid"/>
                       <a:round/>
@@ -5999,7 +6096,7 @@
                     </a:lnR>
                     <a:lnT w="6350" cap="flat" cmpd="sng" algn="ctr">
                       <a:solidFill>
-                        <a:srgbClr val="2E2A3A"/>
+                        <a:srgbClr val="5E4F85"/>
                       </a:solidFill>
                       <a:prstDash val="solid"/>
                       <a:round/>
@@ -6008,7 +6105,7 @@
                     </a:lnT>
                     <a:lnB w="6350" cap="flat" cmpd="sng" algn="ctr">
                       <a:solidFill>
-                        <a:srgbClr val="2E2A3A"/>
+                        <a:srgbClr val="5E4F85"/>
                       </a:solidFill>
                       <a:prstDash val="solid"/>
                       <a:round/>
@@ -6016,7 +6113,7 @@
                       <a:tailEnd type="none" w="med" len="med"/>
                     </a:lnB>
                     <a:solidFill>
-                      <a:srgbClr val="17141F"/>
+                      <a:srgbClr val="000000"/>
                     </a:solidFill>
                   </a:tcPr>
                 </a:tc>
@@ -6051,7 +6148,7 @@
                   <a:tcPr marL="73152" marR="73152" marT="73152" marB="73152" anchor="ctr">
                     <a:lnL w="6350" cap="flat" cmpd="sng" algn="ctr">
                       <a:solidFill>
-                        <a:srgbClr val="2E2A3A"/>
+                        <a:srgbClr val="5E4F85"/>
                       </a:solidFill>
                       <a:prstDash val="solid"/>
                       <a:round/>
@@ -6060,7 +6157,7 @@
                     </a:lnL>
                     <a:lnR w="6350" cap="flat" cmpd="sng" algn="ctr">
                       <a:solidFill>
-                        <a:srgbClr val="2E2A3A"/>
+                        <a:srgbClr val="5E4F85"/>
                       </a:solidFill>
                       <a:prstDash val="solid"/>
                       <a:round/>
@@ -6069,7 +6166,7 @@
                     </a:lnR>
                     <a:lnT w="6350" cap="flat" cmpd="sng" algn="ctr">
                       <a:solidFill>
-                        <a:srgbClr val="2E2A3A"/>
+                        <a:srgbClr val="5E4F85"/>
                       </a:solidFill>
                       <a:prstDash val="solid"/>
                       <a:round/>
@@ -6078,7 +6175,7 @@
                     </a:lnT>
                     <a:lnB w="6350" cap="flat" cmpd="sng" algn="ctr">
                       <a:solidFill>
-                        <a:srgbClr val="2E2A3A"/>
+                        <a:srgbClr val="5E4F85"/>
                       </a:solidFill>
                       <a:prstDash val="solid"/>
                       <a:round/>
@@ -6086,7 +6183,7 @@
                       <a:tailEnd type="none" w="med" len="med"/>
                     </a:lnB>
                     <a:solidFill>
-                      <a:srgbClr val="17141F"/>
+                      <a:srgbClr val="000000"/>
                     </a:solidFill>
                   </a:tcPr>
                 </a:tc>
@@ -6119,7 +6216,7 @@
                   <a:tcPr marL="73152" marR="73152" marT="73152" marB="73152" anchor="ctr">
                     <a:lnL w="6350" cap="flat" cmpd="sng" algn="ctr">
                       <a:solidFill>
-                        <a:srgbClr val="2E2A3A"/>
+                        <a:srgbClr val="5E4F85"/>
                       </a:solidFill>
                       <a:prstDash val="solid"/>
                       <a:round/>
@@ -6128,7 +6225,7 @@
                     </a:lnL>
                     <a:lnR w="6350" cap="flat" cmpd="sng" algn="ctr">
                       <a:solidFill>
-                        <a:srgbClr val="2E2A3A"/>
+                        <a:srgbClr val="5E4F85"/>
                       </a:solidFill>
                       <a:prstDash val="solid"/>
                       <a:round/>
@@ -6137,7 +6234,7 @@
                     </a:lnR>
                     <a:lnT w="6350" cap="flat" cmpd="sng" algn="ctr">
                       <a:solidFill>
-                        <a:srgbClr val="2E2A3A"/>
+                        <a:srgbClr val="5E4F85"/>
                       </a:solidFill>
                       <a:prstDash val="solid"/>
                       <a:round/>
@@ -6146,7 +6243,7 @@
                     </a:lnT>
                     <a:lnB w="6350" cap="flat" cmpd="sng" algn="ctr">
                       <a:solidFill>
-                        <a:srgbClr val="2E2A3A"/>
+                        <a:srgbClr val="5E4F85"/>
                       </a:solidFill>
                       <a:prstDash val="solid"/>
                       <a:round/>
@@ -6154,7 +6251,7 @@
                       <a:tailEnd type="none" w="med" len="med"/>
                     </a:lnB>
                     <a:solidFill>
-                      <a:srgbClr val="17141F"/>
+                      <a:srgbClr val="000000"/>
                     </a:solidFill>
                   </a:tcPr>
                 </a:tc>
@@ -6187,7 +6284,7 @@
                   <a:tcPr marL="73152" marR="73152" marT="73152" marB="73152" anchor="ctr">
                     <a:lnL w="6350" cap="flat" cmpd="sng" algn="ctr">
                       <a:solidFill>
-                        <a:srgbClr val="2E2A3A"/>
+                        <a:srgbClr val="5E4F85"/>
                       </a:solidFill>
                       <a:prstDash val="solid"/>
                       <a:round/>
@@ -6196,7 +6293,7 @@
                     </a:lnL>
                     <a:lnR w="6350" cap="flat" cmpd="sng" algn="ctr">
                       <a:solidFill>
-                        <a:srgbClr val="2E2A3A"/>
+                        <a:srgbClr val="5E4F85"/>
                       </a:solidFill>
                       <a:prstDash val="solid"/>
                       <a:round/>
@@ -6205,7 +6302,7 @@
                     </a:lnR>
                     <a:lnT w="6350" cap="flat" cmpd="sng" algn="ctr">
                       <a:solidFill>
-                        <a:srgbClr val="2E2A3A"/>
+                        <a:srgbClr val="5E4F85"/>
                       </a:solidFill>
                       <a:prstDash val="solid"/>
                       <a:round/>
@@ -6214,7 +6311,7 @@
                     </a:lnT>
                     <a:lnB w="6350" cap="flat" cmpd="sng" algn="ctr">
                       <a:solidFill>
-                        <a:srgbClr val="2E2A3A"/>
+                        <a:srgbClr val="5E4F85"/>
                       </a:solidFill>
                       <a:prstDash val="solid"/>
                       <a:round/>
@@ -6222,7 +6319,7 @@
                       <a:tailEnd type="none" w="med" len="med"/>
                     </a:lnB>
                     <a:solidFill>
-                      <a:srgbClr val="17141F"/>
+                      <a:srgbClr val="000000"/>
                     </a:solidFill>
                   </a:tcPr>
                 </a:tc>
@@ -6325,7 +6422,7 @@
             <a:lvl1pPr>
               <a:defRPr sz="850">
                 <a:solidFill>
-                  <a:srgbClr val="8A82A0"/>
+                  <a:srgbClr val="9A94AA"/>
                 </a:solidFill>
                 <a:latin typeface="Courier New"/>
                 <a:ea typeface="Courier New"/>
@@ -6395,7 +6492,7 @@
             <a:r>
               <a:rPr lang="en-US" sz="2600" b="1" dirty="0">
                 <a:solidFill>
-                  <a:srgbClr val="C9A6FF"/>
+                  <a:srgbClr val="A98BFF"/>
                 </a:solidFill>
                 <a:latin typeface="Courier New" pitchFamily="34" charset="0"/>
                 <a:ea typeface="Courier New" pitchFamily="34" charset="-122"/>
@@ -6463,9 +6560,14 @@
             </a:avLst>
           </a:prstGeom>
           <a:solidFill>
-            <a:srgbClr val="C9A6FF"/>
+            <a:srgbClr val="1A0B3D"/>
           </a:solidFill>
-          <a:ln/>
+          <a:ln w="12700">
+            <a:solidFill>
+              <a:srgbClr val="5A05F4"/>
+            </a:solidFill>
+            <a:prstDash val="solid"/>
+          </a:ln>
         </p:spPr>
       </p:sp>
       <p:sp>
@@ -6495,7 +6597,7 @@
             <a:r>
               <a:rPr lang="en-US" sz="900" b="1" spc="100" kern="0" dirty="0">
                 <a:solidFill>
-                  <a:srgbClr val="1C1140"/>
+                  <a:srgbClr val="A98BFF"/>
                 </a:solidFill>
                 <a:latin typeface="Courier New" pitchFamily="34" charset="0"/>
                 <a:ea typeface="Courier New" pitchFamily="34" charset="-122"/>
@@ -6548,9 +6650,14 @@
             </a:avLst>
           </a:prstGeom>
           <a:solidFill>
-            <a:srgbClr val="2E1418"/>
+            <a:srgbClr val="1A0808"/>
           </a:solidFill>
-          <a:ln/>
+          <a:ln w="12700">
+            <a:solidFill>
+              <a:srgbClr val="FF6B6B"/>
+            </a:solidFill>
+            <a:prstDash val="solid"/>
+          </a:ln>
         </p:spPr>
       </p:sp>
       <p:sp>
@@ -6580,7 +6687,7 @@
             <a:r>
               <a:rPr lang="en-US" sz="1100" b="1" dirty="0">
                 <a:solidFill>
-                  <a:srgbClr val="FF7B7B"/>
+                  <a:srgbClr val="FF6B6B"/>
                 </a:solidFill>
                 <a:latin typeface="Courier New" pitchFamily="34" charset="0"/>
                 <a:ea typeface="Courier New" pitchFamily="34" charset="-122"/>
@@ -6609,7 +6716,7 @@
           <a:noFill/>
           <a:ln w="15875">
             <a:solidFill>
-              <a:srgbClr val="9B7BE8"/>
+              <a:srgbClr val="8F72E6"/>
             </a:solidFill>
             <a:prstDash val="solid"/>
           </a:ln>
@@ -6630,7 +6737,7 @@
             <a:avLst/>
           </a:prstGeom>
           <a:solidFill>
-            <a:srgbClr val="9B7BE8"/>
+            <a:srgbClr val="8F72E6"/>
           </a:solidFill>
           <a:ln/>
         </p:spPr>
@@ -6652,9 +6759,14 @@
             </a:avLst>
           </a:prstGeom>
           <a:solidFill>
-            <a:srgbClr val="2A2010"/>
+            <a:srgbClr val="0B1A38"/>
           </a:solidFill>
-          <a:ln/>
+          <a:ln w="12700">
+            <a:solidFill>
+              <a:srgbClr val="6BA0F8"/>
+            </a:solidFill>
+            <a:prstDash val="solid"/>
+          </a:ln>
         </p:spPr>
       </p:sp>
       <p:sp>
@@ -6684,7 +6796,7 @@
             <a:r>
               <a:rPr lang="en-US" sz="1100" b="1" dirty="0">
                 <a:solidFill>
-                  <a:srgbClr val="E8A857"/>
+                  <a:srgbClr val="6BA0F8"/>
                 </a:solidFill>
                 <a:latin typeface="Courier New" pitchFamily="34" charset="0"/>
                 <a:ea typeface="Courier New" pitchFamily="34" charset="-122"/>
@@ -6713,7 +6825,7 @@
           <a:noFill/>
           <a:ln w="15875">
             <a:solidFill>
-              <a:srgbClr val="9B7BE8"/>
+              <a:srgbClr val="8F72E6"/>
             </a:solidFill>
             <a:prstDash val="solid"/>
           </a:ln>
@@ -6734,7 +6846,7 @@
             <a:avLst/>
           </a:prstGeom>
           <a:solidFill>
-            <a:srgbClr val="9B7BE8"/>
+            <a:srgbClr val="8F72E6"/>
           </a:solidFill>
           <a:ln/>
         </p:spPr>
@@ -6756,9 +6868,14 @@
             </a:avLst>
           </a:prstGeom>
           <a:solidFill>
-            <a:srgbClr val="2E1418"/>
+            <a:srgbClr val="1A0808"/>
           </a:solidFill>
-          <a:ln/>
+          <a:ln w="12700">
+            <a:solidFill>
+              <a:srgbClr val="FF6B6B"/>
+            </a:solidFill>
+            <a:prstDash val="solid"/>
+          </a:ln>
         </p:spPr>
       </p:sp>
       <p:sp>
@@ -6788,7 +6905,7 @@
             <a:r>
               <a:rPr lang="en-US" sz="1100" b="1" dirty="0">
                 <a:solidFill>
-                  <a:srgbClr val="FF7B7B"/>
+                  <a:srgbClr val="FF6B6B"/>
                 </a:solidFill>
                 <a:latin typeface="Courier New" pitchFamily="34" charset="0"/>
                 <a:ea typeface="Courier New" pitchFamily="34" charset="-122"/>
@@ -6827,7 +6944,7 @@
             <a:r>
               <a:rPr lang="en-US" sz="1200" i="1" dirty="0">
                 <a:solidFill>
-                  <a:srgbClr val="AFA9BE"/>
+                  <a:srgbClr val="C9C4D6"/>
                 </a:solidFill>
                 <a:latin typeface="Montserrat" pitchFamily="34" charset="0"/>
                 <a:ea typeface="Montserrat" pitchFamily="34" charset="-122"/>
@@ -6856,9 +6973,14 @@
             </a:avLst>
           </a:prstGeom>
           <a:solidFill>
-            <a:srgbClr val="102A20"/>
+            <a:srgbClr val="06180F"/>
           </a:solidFill>
-          <a:ln/>
+          <a:ln w="12700">
+            <a:solidFill>
+              <a:srgbClr val="3FCF8E"/>
+            </a:solidFill>
+            <a:prstDash val="solid"/>
+          </a:ln>
         </p:spPr>
       </p:sp>
       <p:sp>
@@ -6888,7 +7010,7 @@
             <a:r>
               <a:rPr lang="en-US" sz="950" b="1" spc="150" kern="0" dirty="0">
                 <a:solidFill>
-                  <a:srgbClr val="5FD6A0"/>
+                  <a:srgbClr val="3FCF8E"/>
                 </a:solidFill>
                 <a:latin typeface="Courier New" pitchFamily="34" charset="0"/>
                 <a:ea typeface="Courier New" pitchFamily="34" charset="-122"/>
@@ -6959,9 +7081,14 @@
             </a:avLst>
           </a:prstGeom>
           <a:solidFill>
-            <a:srgbClr val="2E1418"/>
+            <a:srgbClr val="1A0808"/>
           </a:solidFill>
-          <a:ln/>
+          <a:ln w="12700">
+            <a:solidFill>
+              <a:srgbClr val="FF6B6B"/>
+            </a:solidFill>
+            <a:prstDash val="solid"/>
+          </a:ln>
         </p:spPr>
       </p:sp>
       <p:sp>
@@ -6991,7 +7118,7 @@
             <a:r>
               <a:rPr lang="en-US" sz="950" b="1" spc="150" kern="0" dirty="0">
                 <a:solidFill>
-                  <a:srgbClr val="FF7B7B"/>
+                  <a:srgbClr val="FF6B6B"/>
                 </a:solidFill>
                 <a:latin typeface="Courier New" pitchFamily="34" charset="0"/>
                 <a:ea typeface="Courier New" pitchFamily="34" charset="-122"/>
@@ -7075,7 +7202,7 @@
             <a:lvl1pPr>
               <a:defRPr sz="850">
                 <a:solidFill>
-                  <a:srgbClr val="8A82A0"/>
+                  <a:srgbClr val="9A94AA"/>
                 </a:solidFill>
                 <a:latin typeface="Courier New"/>
                 <a:ea typeface="Courier New"/>
@@ -7145,7 +7272,7 @@
             <a:r>
               <a:rPr lang="en-US" sz="2600" b="1" dirty="0">
                 <a:solidFill>
-                  <a:srgbClr val="C9A6FF"/>
+                  <a:srgbClr val="A98BFF"/>
                 </a:solidFill>
                 <a:latin typeface="Courier New" pitchFamily="34" charset="0"/>
                 <a:ea typeface="Courier New" pitchFamily="34" charset="-122"/>
@@ -7213,9 +7340,14 @@
             </a:avLst>
           </a:prstGeom>
           <a:solidFill>
-            <a:srgbClr val="C9A6FF"/>
+            <a:srgbClr val="1A0B3D"/>
           </a:solidFill>
-          <a:ln/>
+          <a:ln w="12700">
+            <a:solidFill>
+              <a:srgbClr val="5A05F4"/>
+            </a:solidFill>
+            <a:prstDash val="solid"/>
+          </a:ln>
         </p:spPr>
       </p:sp>
       <p:sp>
@@ -7245,7 +7377,7 @@
             <a:r>
               <a:rPr lang="en-US" sz="900" b="1" spc="100" kern="0" dirty="0">
                 <a:solidFill>
-                  <a:srgbClr val="1C1140"/>
+                  <a:srgbClr val="A98BFF"/>
                 </a:solidFill>
                 <a:latin typeface="Courier New" pitchFamily="34" charset="0"/>
                 <a:ea typeface="Courier New" pitchFamily="34" charset="-122"/>
@@ -7320,7 +7452,7 @@
                       <a:r>
                         <a:rPr lang="en-US" sz="900" b="1" spc="100" kern="0" dirty="0">
                           <a:solidFill>
-                            <a:srgbClr val="AFA9BE"/>
+                            <a:srgbClr val="C9C4D6"/>
                           </a:solidFill>
                           <a:latin typeface="Courier New" pitchFamily="34" charset="0"/>
                           <a:ea typeface="Courier New" pitchFamily="34" charset="-122"/>
@@ -7338,7 +7470,7 @@
                   <a:tcPr marL="73152" marR="73152" marT="73152" marB="73152" anchor="ctr">
                     <a:lnL w="6350" cap="flat" cmpd="sng" algn="ctr">
                       <a:solidFill>
-                        <a:srgbClr val="2E2A3A"/>
+                        <a:srgbClr val="5E4F85"/>
                       </a:solidFill>
                       <a:prstDash val="solid"/>
                       <a:round/>
@@ -7347,7 +7479,7 @@
                     </a:lnL>
                     <a:lnR w="6350" cap="flat" cmpd="sng" algn="ctr">
                       <a:solidFill>
-                        <a:srgbClr val="2E2A3A"/>
+                        <a:srgbClr val="5E4F85"/>
                       </a:solidFill>
                       <a:prstDash val="solid"/>
                       <a:round/>
@@ -7356,7 +7488,7 @@
                     </a:lnR>
                     <a:lnT w="6350" cap="flat" cmpd="sng" algn="ctr">
                       <a:solidFill>
-                        <a:srgbClr val="2E2A3A"/>
+                        <a:srgbClr val="5E4F85"/>
                       </a:solidFill>
                       <a:prstDash val="solid"/>
                       <a:round/>
@@ -7365,7 +7497,7 @@
                     </a:lnT>
                     <a:lnB w="6350" cap="flat" cmpd="sng" algn="ctr">
                       <a:solidFill>
-                        <a:srgbClr val="2E2A3A"/>
+                        <a:srgbClr val="5E4F85"/>
                       </a:solidFill>
                       <a:prstDash val="solid"/>
                       <a:round/>
@@ -7373,7 +7505,7 @@
                       <a:tailEnd type="none" w="med" len="med"/>
                     </a:lnB>
                     <a:solidFill>
-                      <a:srgbClr val="1F1B2A"/>
+                      <a:srgbClr val="1A0B3D"/>
                     </a:solidFill>
                   </a:tcPr>
                 </a:tc>
@@ -7388,7 +7520,7 @@
                       <a:r>
                         <a:rPr lang="en-US" sz="900" b="1" spc="100" kern="0" dirty="0">
                           <a:solidFill>
-                            <a:srgbClr val="AFA9BE"/>
+                            <a:srgbClr val="C9C4D6"/>
                           </a:solidFill>
                           <a:latin typeface="Courier New" pitchFamily="34" charset="0"/>
                           <a:ea typeface="Courier New" pitchFamily="34" charset="-122"/>
@@ -7406,7 +7538,7 @@
                   <a:tcPr marL="73152" marR="73152" marT="73152" marB="73152" anchor="ctr">
                     <a:lnL w="6350" cap="flat" cmpd="sng" algn="ctr">
                       <a:solidFill>
-                        <a:srgbClr val="2E2A3A"/>
+                        <a:srgbClr val="5E4F85"/>
                       </a:solidFill>
                       <a:prstDash val="solid"/>
                       <a:round/>
@@ -7415,7 +7547,7 @@
                     </a:lnL>
                     <a:lnR w="6350" cap="flat" cmpd="sng" algn="ctr">
                       <a:solidFill>
-                        <a:srgbClr val="2E2A3A"/>
+                        <a:srgbClr val="5E4F85"/>
                       </a:solidFill>
                       <a:prstDash val="solid"/>
                       <a:round/>
@@ -7424,7 +7556,7 @@
                     </a:lnR>
                     <a:lnT w="6350" cap="flat" cmpd="sng" algn="ctr">
                       <a:solidFill>
-                        <a:srgbClr val="2E2A3A"/>
+                        <a:srgbClr val="5E4F85"/>
                       </a:solidFill>
                       <a:prstDash val="solid"/>
                       <a:round/>
@@ -7433,7 +7565,7 @@
                     </a:lnT>
                     <a:lnB w="6350" cap="flat" cmpd="sng" algn="ctr">
                       <a:solidFill>
-                        <a:srgbClr val="2E2A3A"/>
+                        <a:srgbClr val="5E4F85"/>
                       </a:solidFill>
                       <a:prstDash val="solid"/>
                       <a:round/>
@@ -7441,7 +7573,7 @@
                       <a:tailEnd type="none" w="med" len="med"/>
                     </a:lnB>
                     <a:solidFill>
-                      <a:srgbClr val="1F1B2A"/>
+                      <a:srgbClr val="1A0B3D"/>
                     </a:solidFill>
                   </a:tcPr>
                 </a:tc>
@@ -7456,7 +7588,7 @@
                       <a:r>
                         <a:rPr lang="en-US" sz="900" b="1" spc="100" kern="0" dirty="0">
                           <a:solidFill>
-                            <a:srgbClr val="AFA9BE"/>
+                            <a:srgbClr val="C9C4D6"/>
                           </a:solidFill>
                           <a:latin typeface="Courier New" pitchFamily="34" charset="0"/>
                           <a:ea typeface="Courier New" pitchFamily="34" charset="-122"/>
@@ -7474,7 +7606,7 @@
                   <a:tcPr marL="73152" marR="73152" marT="73152" marB="73152" anchor="ctr">
                     <a:lnL w="6350" cap="flat" cmpd="sng" algn="ctr">
                       <a:solidFill>
-                        <a:srgbClr val="2E2A3A"/>
+                        <a:srgbClr val="5E4F85"/>
                       </a:solidFill>
                       <a:prstDash val="solid"/>
                       <a:round/>
@@ -7483,7 +7615,7 @@
                     </a:lnL>
                     <a:lnR w="6350" cap="flat" cmpd="sng" algn="ctr">
                       <a:solidFill>
-                        <a:srgbClr val="2E2A3A"/>
+                        <a:srgbClr val="5E4F85"/>
                       </a:solidFill>
                       <a:prstDash val="solid"/>
                       <a:round/>
@@ -7492,7 +7624,7 @@
                     </a:lnR>
                     <a:lnT w="6350" cap="flat" cmpd="sng" algn="ctr">
                       <a:solidFill>
-                        <a:srgbClr val="2E2A3A"/>
+                        <a:srgbClr val="5E4F85"/>
                       </a:solidFill>
                       <a:prstDash val="solid"/>
                       <a:round/>
@@ -7501,7 +7633,7 @@
                     </a:lnT>
                     <a:lnB w="6350" cap="flat" cmpd="sng" algn="ctr">
                       <a:solidFill>
-                        <a:srgbClr val="2E2A3A"/>
+                        <a:srgbClr val="5E4F85"/>
                       </a:solidFill>
                       <a:prstDash val="solid"/>
                       <a:round/>
@@ -7509,7 +7641,7 @@
                       <a:tailEnd type="none" w="med" len="med"/>
                     </a:lnB>
                     <a:solidFill>
-                      <a:srgbClr val="1F1B2A"/>
+                      <a:srgbClr val="1A0B3D"/>
                     </a:solidFill>
                   </a:tcPr>
                 </a:tc>
@@ -7544,7 +7676,7 @@
                   <a:tcPr marL="73152" marR="73152" marT="73152" marB="73152" anchor="ctr">
                     <a:lnL w="6350" cap="flat" cmpd="sng" algn="ctr">
                       <a:solidFill>
-                        <a:srgbClr val="2E2A3A"/>
+                        <a:srgbClr val="5E4F85"/>
                       </a:solidFill>
                       <a:prstDash val="solid"/>
                       <a:round/>
@@ -7553,7 +7685,7 @@
                     </a:lnL>
                     <a:lnR w="6350" cap="flat" cmpd="sng" algn="ctr">
                       <a:solidFill>
-                        <a:srgbClr val="2E2A3A"/>
+                        <a:srgbClr val="5E4F85"/>
                       </a:solidFill>
                       <a:prstDash val="solid"/>
                       <a:round/>
@@ -7562,7 +7694,7 @@
                     </a:lnR>
                     <a:lnT w="6350" cap="flat" cmpd="sng" algn="ctr">
                       <a:solidFill>
-                        <a:srgbClr val="2E2A3A"/>
+                        <a:srgbClr val="5E4F85"/>
                       </a:solidFill>
                       <a:prstDash val="solid"/>
                       <a:round/>
@@ -7571,7 +7703,7 @@
                     </a:lnT>
                     <a:lnB w="6350" cap="flat" cmpd="sng" algn="ctr">
                       <a:solidFill>
-                        <a:srgbClr val="2E2A3A"/>
+                        <a:srgbClr val="5E4F85"/>
                       </a:solidFill>
                       <a:prstDash val="solid"/>
                       <a:round/>
@@ -7579,7 +7711,7 @@
                       <a:tailEnd type="none" w="med" len="med"/>
                     </a:lnB>
                     <a:solidFill>
-                      <a:srgbClr val="17141F"/>
+                      <a:srgbClr val="000000"/>
                     </a:solidFill>
                   </a:tcPr>
                 </a:tc>
@@ -7612,7 +7744,7 @@
                   <a:tcPr marL="73152" marR="73152" marT="73152" marB="73152" anchor="ctr">
                     <a:lnL w="6350" cap="flat" cmpd="sng" algn="ctr">
                       <a:solidFill>
-                        <a:srgbClr val="2E2A3A"/>
+                        <a:srgbClr val="5E4F85"/>
                       </a:solidFill>
                       <a:prstDash val="solid"/>
                       <a:round/>
@@ -7621,7 +7753,7 @@
                     </a:lnL>
                     <a:lnR w="6350" cap="flat" cmpd="sng" algn="ctr">
                       <a:solidFill>
-                        <a:srgbClr val="2E2A3A"/>
+                        <a:srgbClr val="5E4F85"/>
                       </a:solidFill>
                       <a:prstDash val="solid"/>
                       <a:round/>
@@ -7630,7 +7762,7 @@
                     </a:lnR>
                     <a:lnT w="6350" cap="flat" cmpd="sng" algn="ctr">
                       <a:solidFill>
-                        <a:srgbClr val="2E2A3A"/>
+                        <a:srgbClr val="5E4F85"/>
                       </a:solidFill>
                       <a:prstDash val="solid"/>
                       <a:round/>
@@ -7639,7 +7771,7 @@
                     </a:lnT>
                     <a:lnB w="6350" cap="flat" cmpd="sng" algn="ctr">
                       <a:solidFill>
-                        <a:srgbClr val="2E2A3A"/>
+                        <a:srgbClr val="5E4F85"/>
                       </a:solidFill>
                       <a:prstDash val="solid"/>
                       <a:round/>
@@ -7647,7 +7779,7 @@
                       <a:tailEnd type="none" w="med" len="med"/>
                     </a:lnB>
                     <a:solidFill>
-                      <a:srgbClr val="17141F"/>
+                      <a:srgbClr val="000000"/>
                     </a:solidFill>
                   </a:tcPr>
                 </a:tc>
@@ -7680,7 +7812,7 @@
                   <a:tcPr marL="73152" marR="73152" marT="73152" marB="73152" anchor="ctr">
                     <a:lnL w="6350" cap="flat" cmpd="sng" algn="ctr">
                       <a:solidFill>
-                        <a:srgbClr val="2E2A3A"/>
+                        <a:srgbClr val="5E4F85"/>
                       </a:solidFill>
                       <a:prstDash val="solid"/>
                       <a:round/>
@@ -7689,7 +7821,7 @@
                     </a:lnL>
                     <a:lnR w="6350" cap="flat" cmpd="sng" algn="ctr">
                       <a:solidFill>
-                        <a:srgbClr val="2E2A3A"/>
+                        <a:srgbClr val="5E4F85"/>
                       </a:solidFill>
                       <a:prstDash val="solid"/>
                       <a:round/>
@@ -7698,7 +7830,7 @@
                     </a:lnR>
                     <a:lnT w="6350" cap="flat" cmpd="sng" algn="ctr">
                       <a:solidFill>
-                        <a:srgbClr val="2E2A3A"/>
+                        <a:srgbClr val="5E4F85"/>
                       </a:solidFill>
                       <a:prstDash val="solid"/>
                       <a:round/>
@@ -7707,7 +7839,7 @@
                     </a:lnT>
                     <a:lnB w="6350" cap="flat" cmpd="sng" algn="ctr">
                       <a:solidFill>
-                        <a:srgbClr val="2E2A3A"/>
+                        <a:srgbClr val="5E4F85"/>
                       </a:solidFill>
                       <a:prstDash val="solid"/>
                       <a:round/>
@@ -7715,7 +7847,7 @@
                       <a:tailEnd type="none" w="med" len="med"/>
                     </a:lnB>
                     <a:solidFill>
-                      <a:srgbClr val="17141F"/>
+                      <a:srgbClr val="000000"/>
                     </a:solidFill>
                   </a:tcPr>
                 </a:tc>
@@ -7750,7 +7882,7 @@
                   <a:tcPr marL="73152" marR="73152" marT="73152" marB="73152" anchor="ctr">
                     <a:lnL w="6350" cap="flat" cmpd="sng" algn="ctr">
                       <a:solidFill>
-                        <a:srgbClr val="2E2A3A"/>
+                        <a:srgbClr val="5E4F85"/>
                       </a:solidFill>
                       <a:prstDash val="solid"/>
                       <a:round/>
@@ -7759,7 +7891,7 @@
                     </a:lnL>
                     <a:lnR w="6350" cap="flat" cmpd="sng" algn="ctr">
                       <a:solidFill>
-                        <a:srgbClr val="2E2A3A"/>
+                        <a:srgbClr val="5E4F85"/>
                       </a:solidFill>
                       <a:prstDash val="solid"/>
                       <a:round/>
@@ -7768,7 +7900,7 @@
                     </a:lnR>
                     <a:lnT w="6350" cap="flat" cmpd="sng" algn="ctr">
                       <a:solidFill>
-                        <a:srgbClr val="2E2A3A"/>
+                        <a:srgbClr val="5E4F85"/>
                       </a:solidFill>
                       <a:prstDash val="solid"/>
                       <a:round/>
@@ -7777,7 +7909,7 @@
                     </a:lnT>
                     <a:lnB w="6350" cap="flat" cmpd="sng" algn="ctr">
                       <a:solidFill>
-                        <a:srgbClr val="2E2A3A"/>
+                        <a:srgbClr val="5E4F85"/>
                       </a:solidFill>
                       <a:prstDash val="solid"/>
                       <a:round/>
@@ -7785,7 +7917,7 @@
                       <a:tailEnd type="none" w="med" len="med"/>
                     </a:lnB>
                     <a:solidFill>
-                      <a:srgbClr val="17141F"/>
+                      <a:srgbClr val="000000"/>
                     </a:solidFill>
                   </a:tcPr>
                 </a:tc>
@@ -7818,7 +7950,7 @@
                   <a:tcPr marL="73152" marR="73152" marT="73152" marB="73152" anchor="ctr">
                     <a:lnL w="6350" cap="flat" cmpd="sng" algn="ctr">
                       <a:solidFill>
-                        <a:srgbClr val="2E2A3A"/>
+                        <a:srgbClr val="5E4F85"/>
                       </a:solidFill>
                       <a:prstDash val="solid"/>
                       <a:round/>
@@ -7827,7 +7959,7 @@
                     </a:lnL>
                     <a:lnR w="6350" cap="flat" cmpd="sng" algn="ctr">
                       <a:solidFill>
-                        <a:srgbClr val="2E2A3A"/>
+                        <a:srgbClr val="5E4F85"/>
                       </a:solidFill>
                       <a:prstDash val="solid"/>
                       <a:round/>
@@ -7836,7 +7968,7 @@
                     </a:lnR>
                     <a:lnT w="6350" cap="flat" cmpd="sng" algn="ctr">
                       <a:solidFill>
-                        <a:srgbClr val="2E2A3A"/>
+                        <a:srgbClr val="5E4F85"/>
                       </a:solidFill>
                       <a:prstDash val="solid"/>
                       <a:round/>
@@ -7845,7 +7977,7 @@
                     </a:lnT>
                     <a:lnB w="6350" cap="flat" cmpd="sng" algn="ctr">
                       <a:solidFill>
-                        <a:srgbClr val="2E2A3A"/>
+                        <a:srgbClr val="5E4F85"/>
                       </a:solidFill>
                       <a:prstDash val="solid"/>
                       <a:round/>
@@ -7853,7 +7985,7 @@
                       <a:tailEnd type="none" w="med" len="med"/>
                     </a:lnB>
                     <a:solidFill>
-                      <a:srgbClr val="17141F"/>
+                      <a:srgbClr val="000000"/>
                     </a:solidFill>
                   </a:tcPr>
                 </a:tc>
@@ -7886,7 +8018,7 @@
                   <a:tcPr marL="73152" marR="73152" marT="73152" marB="73152" anchor="ctr">
                     <a:lnL w="6350" cap="flat" cmpd="sng" algn="ctr">
                       <a:solidFill>
-                        <a:srgbClr val="2E2A3A"/>
+                        <a:srgbClr val="5E4F85"/>
                       </a:solidFill>
                       <a:prstDash val="solid"/>
                       <a:round/>
@@ -7895,7 +8027,7 @@
                     </a:lnL>
                     <a:lnR w="6350" cap="flat" cmpd="sng" algn="ctr">
                       <a:solidFill>
-                        <a:srgbClr val="2E2A3A"/>
+                        <a:srgbClr val="5E4F85"/>
                       </a:solidFill>
                       <a:prstDash val="solid"/>
                       <a:round/>
@@ -7904,7 +8036,7 @@
                     </a:lnR>
                     <a:lnT w="6350" cap="flat" cmpd="sng" algn="ctr">
                       <a:solidFill>
-                        <a:srgbClr val="2E2A3A"/>
+                        <a:srgbClr val="5E4F85"/>
                       </a:solidFill>
                       <a:prstDash val="solid"/>
                       <a:round/>
@@ -7913,7 +8045,7 @@
                     </a:lnT>
                     <a:lnB w="6350" cap="flat" cmpd="sng" algn="ctr">
                       <a:solidFill>
-                        <a:srgbClr val="2E2A3A"/>
+                        <a:srgbClr val="5E4F85"/>
                       </a:solidFill>
                       <a:prstDash val="solid"/>
                       <a:round/>
@@ -7921,7 +8053,7 @@
                       <a:tailEnd type="none" w="med" len="med"/>
                     </a:lnB>
                     <a:solidFill>
-                      <a:srgbClr val="17141F"/>
+                      <a:srgbClr val="000000"/>
                     </a:solidFill>
                   </a:tcPr>
                 </a:tc>
@@ -7956,7 +8088,7 @@
                   <a:tcPr marL="73152" marR="73152" marT="73152" marB="73152" anchor="ctr">
                     <a:lnL w="6350" cap="flat" cmpd="sng" algn="ctr">
                       <a:solidFill>
-                        <a:srgbClr val="2E2A3A"/>
+                        <a:srgbClr val="5E4F85"/>
                       </a:solidFill>
                       <a:prstDash val="solid"/>
                       <a:round/>
@@ -7965,7 +8097,7 @@
                     </a:lnL>
                     <a:lnR w="6350" cap="flat" cmpd="sng" algn="ctr">
                       <a:solidFill>
-                        <a:srgbClr val="2E2A3A"/>
+                        <a:srgbClr val="5E4F85"/>
                       </a:solidFill>
                       <a:prstDash val="solid"/>
                       <a:round/>
@@ -7974,7 +8106,7 @@
                     </a:lnR>
                     <a:lnT w="6350" cap="flat" cmpd="sng" algn="ctr">
                       <a:solidFill>
-                        <a:srgbClr val="2E2A3A"/>
+                        <a:srgbClr val="5E4F85"/>
                       </a:solidFill>
                       <a:prstDash val="solid"/>
                       <a:round/>
@@ -7983,7 +8115,7 @@
                     </a:lnT>
                     <a:lnB w="6350" cap="flat" cmpd="sng" algn="ctr">
                       <a:solidFill>
-                        <a:srgbClr val="2E2A3A"/>
+                        <a:srgbClr val="5E4F85"/>
                       </a:solidFill>
                       <a:prstDash val="solid"/>
                       <a:round/>
@@ -7991,7 +8123,7 @@
                       <a:tailEnd type="none" w="med" len="med"/>
                     </a:lnB>
                     <a:solidFill>
-                      <a:srgbClr val="17141F"/>
+                      <a:srgbClr val="000000"/>
                     </a:solidFill>
                   </a:tcPr>
                 </a:tc>
@@ -8024,7 +8156,7 @@
                   <a:tcPr marL="73152" marR="73152" marT="73152" marB="73152" anchor="ctr">
                     <a:lnL w="6350" cap="flat" cmpd="sng" algn="ctr">
                       <a:solidFill>
-                        <a:srgbClr val="2E2A3A"/>
+                        <a:srgbClr val="5E4F85"/>
                       </a:solidFill>
                       <a:prstDash val="solid"/>
                       <a:round/>
@@ -8033,7 +8165,7 @@
                     </a:lnL>
                     <a:lnR w="6350" cap="flat" cmpd="sng" algn="ctr">
                       <a:solidFill>
-                        <a:srgbClr val="2E2A3A"/>
+                        <a:srgbClr val="5E4F85"/>
                       </a:solidFill>
                       <a:prstDash val="solid"/>
                       <a:round/>
@@ -8042,7 +8174,7 @@
                     </a:lnR>
                     <a:lnT w="6350" cap="flat" cmpd="sng" algn="ctr">
                       <a:solidFill>
-                        <a:srgbClr val="2E2A3A"/>
+                        <a:srgbClr val="5E4F85"/>
                       </a:solidFill>
                       <a:prstDash val="solid"/>
                       <a:round/>
@@ -8051,7 +8183,7 @@
                     </a:lnT>
                     <a:lnB w="6350" cap="flat" cmpd="sng" algn="ctr">
                       <a:solidFill>
-                        <a:srgbClr val="2E2A3A"/>
+                        <a:srgbClr val="5E4F85"/>
                       </a:solidFill>
                       <a:prstDash val="solid"/>
                       <a:round/>
@@ -8059,7 +8191,7 @@
                       <a:tailEnd type="none" w="med" len="med"/>
                     </a:lnB>
                     <a:solidFill>
-                      <a:srgbClr val="17141F"/>
+                      <a:srgbClr val="000000"/>
                     </a:solidFill>
                   </a:tcPr>
                 </a:tc>
@@ -8092,7 +8224,7 @@
                   <a:tcPr marL="73152" marR="73152" marT="73152" marB="73152" anchor="ctr">
                     <a:lnL w="6350" cap="flat" cmpd="sng" algn="ctr">
                       <a:solidFill>
-                        <a:srgbClr val="2E2A3A"/>
+                        <a:srgbClr val="5E4F85"/>
                       </a:solidFill>
                       <a:prstDash val="solid"/>
                       <a:round/>
@@ -8101,7 +8233,7 @@
                     </a:lnL>
                     <a:lnR w="6350" cap="flat" cmpd="sng" algn="ctr">
                       <a:solidFill>
-                        <a:srgbClr val="2E2A3A"/>
+                        <a:srgbClr val="5E4F85"/>
                       </a:solidFill>
                       <a:prstDash val="solid"/>
                       <a:round/>
@@ -8110,7 +8242,7 @@
                     </a:lnR>
                     <a:lnT w="6350" cap="flat" cmpd="sng" algn="ctr">
                       <a:solidFill>
-                        <a:srgbClr val="2E2A3A"/>
+                        <a:srgbClr val="5E4F85"/>
                       </a:solidFill>
                       <a:prstDash val="solid"/>
                       <a:round/>
@@ -8119,7 +8251,7 @@
                     </a:lnT>
                     <a:lnB w="6350" cap="flat" cmpd="sng" algn="ctr">
                       <a:solidFill>
-                        <a:srgbClr val="2E2A3A"/>
+                        <a:srgbClr val="5E4F85"/>
                       </a:solidFill>
                       <a:prstDash val="solid"/>
                       <a:round/>
@@ -8127,7 +8259,7 @@
                       <a:tailEnd type="none" w="med" len="med"/>
                     </a:lnB>
                     <a:solidFill>
-                      <a:srgbClr val="17141F"/>
+                      <a:srgbClr val="000000"/>
                     </a:solidFill>
                   </a:tcPr>
                 </a:tc>
@@ -8162,7 +8294,7 @@
                   <a:tcPr marL="73152" marR="73152" marT="73152" marB="73152" anchor="ctr">
                     <a:lnL w="6350" cap="flat" cmpd="sng" algn="ctr">
                       <a:solidFill>
-                        <a:srgbClr val="2E2A3A"/>
+                        <a:srgbClr val="5E4F85"/>
                       </a:solidFill>
                       <a:prstDash val="solid"/>
                       <a:round/>
@@ -8171,7 +8303,7 @@
                     </a:lnL>
                     <a:lnR w="6350" cap="flat" cmpd="sng" algn="ctr">
                       <a:solidFill>
-                        <a:srgbClr val="2E2A3A"/>
+                        <a:srgbClr val="5E4F85"/>
                       </a:solidFill>
                       <a:prstDash val="solid"/>
                       <a:round/>
@@ -8180,7 +8312,7 @@
                     </a:lnR>
                     <a:lnT w="6350" cap="flat" cmpd="sng" algn="ctr">
                       <a:solidFill>
-                        <a:srgbClr val="2E2A3A"/>
+                        <a:srgbClr val="5E4F85"/>
                       </a:solidFill>
                       <a:prstDash val="solid"/>
                       <a:round/>
@@ -8189,7 +8321,7 @@
                     </a:lnT>
                     <a:lnB w="6350" cap="flat" cmpd="sng" algn="ctr">
                       <a:solidFill>
-                        <a:srgbClr val="2E2A3A"/>
+                        <a:srgbClr val="5E4F85"/>
                       </a:solidFill>
                       <a:prstDash val="solid"/>
                       <a:round/>
@@ -8197,7 +8329,7 @@
                       <a:tailEnd type="none" w="med" len="med"/>
                     </a:lnB>
                     <a:solidFill>
-                      <a:srgbClr val="17141F"/>
+                      <a:srgbClr val="000000"/>
                     </a:solidFill>
                   </a:tcPr>
                 </a:tc>
@@ -8230,7 +8362,7 @@
                   <a:tcPr marL="73152" marR="73152" marT="73152" marB="73152" anchor="ctr">
                     <a:lnL w="6350" cap="flat" cmpd="sng" algn="ctr">
                       <a:solidFill>
-                        <a:srgbClr val="2E2A3A"/>
+                        <a:srgbClr val="5E4F85"/>
                       </a:solidFill>
                       <a:prstDash val="solid"/>
                       <a:round/>
@@ -8239,7 +8371,7 @@
                     </a:lnL>
                     <a:lnR w="6350" cap="flat" cmpd="sng" algn="ctr">
                       <a:solidFill>
-                        <a:srgbClr val="2E2A3A"/>
+                        <a:srgbClr val="5E4F85"/>
                       </a:solidFill>
                       <a:prstDash val="solid"/>
                       <a:round/>
@@ -8248,7 +8380,7 @@
                     </a:lnR>
                     <a:lnT w="6350" cap="flat" cmpd="sng" algn="ctr">
                       <a:solidFill>
-                        <a:srgbClr val="2E2A3A"/>
+                        <a:srgbClr val="5E4F85"/>
                       </a:solidFill>
                       <a:prstDash val="solid"/>
                       <a:round/>
@@ -8257,7 +8389,7 @@
                     </a:lnT>
                     <a:lnB w="6350" cap="flat" cmpd="sng" algn="ctr">
                       <a:solidFill>
-                        <a:srgbClr val="2E2A3A"/>
+                        <a:srgbClr val="5E4F85"/>
                       </a:solidFill>
                       <a:prstDash val="solid"/>
                       <a:round/>
@@ -8265,7 +8397,7 @@
                       <a:tailEnd type="none" w="med" len="med"/>
                     </a:lnB>
                     <a:solidFill>
-                      <a:srgbClr val="17141F"/>
+                      <a:srgbClr val="000000"/>
                     </a:solidFill>
                   </a:tcPr>
                 </a:tc>
@@ -8298,7 +8430,7 @@
                   <a:tcPr marL="73152" marR="73152" marT="73152" marB="73152" anchor="ctr">
                     <a:lnL w="6350" cap="flat" cmpd="sng" algn="ctr">
                       <a:solidFill>
-                        <a:srgbClr val="2E2A3A"/>
+                        <a:srgbClr val="5E4F85"/>
                       </a:solidFill>
                       <a:prstDash val="solid"/>
                       <a:round/>
@@ -8307,7 +8439,7 @@
                     </a:lnL>
                     <a:lnR w="6350" cap="flat" cmpd="sng" algn="ctr">
                       <a:solidFill>
-                        <a:srgbClr val="2E2A3A"/>
+                        <a:srgbClr val="5E4F85"/>
                       </a:solidFill>
                       <a:prstDash val="solid"/>
                       <a:round/>
@@ -8316,7 +8448,7 @@
                     </a:lnR>
                     <a:lnT w="6350" cap="flat" cmpd="sng" algn="ctr">
                       <a:solidFill>
-                        <a:srgbClr val="2E2A3A"/>
+                        <a:srgbClr val="5E4F85"/>
                       </a:solidFill>
                       <a:prstDash val="solid"/>
                       <a:round/>
@@ -8325,7 +8457,7 @@
                     </a:lnT>
                     <a:lnB w="6350" cap="flat" cmpd="sng" algn="ctr">
                       <a:solidFill>
-                        <a:srgbClr val="2E2A3A"/>
+                        <a:srgbClr val="5E4F85"/>
                       </a:solidFill>
                       <a:prstDash val="solid"/>
                       <a:round/>
@@ -8333,7 +8465,7 @@
                       <a:tailEnd type="none" w="med" len="med"/>
                     </a:lnB>
                     <a:solidFill>
-                      <a:srgbClr val="17141F"/>
+                      <a:srgbClr val="000000"/>
                     </a:solidFill>
                   </a:tcPr>
                 </a:tc>
@@ -8359,11 +8491,11 @@
             </a:avLst>
           </a:prstGeom>
           <a:solidFill>
-            <a:srgbClr val="17141F"/>
+            <a:srgbClr val="000000"/>
           </a:solidFill>
           <a:ln w="12700">
             <a:solidFill>
-              <a:srgbClr val="2E2A3A"/>
+              <a:srgbClr val="5E4F85"/>
             </a:solidFill>
             <a:prstDash val="solid"/>
           </a:ln>
@@ -8441,7 +8573,7 @@
             <a:lvl1pPr>
               <a:defRPr sz="850">
                 <a:solidFill>
-                  <a:srgbClr val="8A82A0"/>
+                  <a:srgbClr val="9A94AA"/>
                 </a:solidFill>
                 <a:latin typeface="Courier New"/>
                 <a:ea typeface="Courier New"/>
@@ -8511,7 +8643,7 @@
             <a:r>
               <a:rPr lang="en-US" sz="2600" b="1" dirty="0">
                 <a:solidFill>
-                  <a:srgbClr val="C9A6FF"/>
+                  <a:srgbClr val="A98BFF"/>
                 </a:solidFill>
                 <a:latin typeface="Courier New" pitchFamily="34" charset="0"/>
                 <a:ea typeface="Courier New" pitchFamily="34" charset="-122"/>
@@ -8579,9 +8711,14 @@
             </a:avLst>
           </a:prstGeom>
           <a:solidFill>
-            <a:srgbClr val="C9A6FF"/>
+            <a:srgbClr val="1A0B3D"/>
           </a:solidFill>
-          <a:ln/>
+          <a:ln w="12700">
+            <a:solidFill>
+              <a:srgbClr val="5A05F4"/>
+            </a:solidFill>
+            <a:prstDash val="solid"/>
+          </a:ln>
         </p:spPr>
       </p:sp>
       <p:sp>
@@ -8611,7 +8748,7 @@
             <a:r>
               <a:rPr lang="en-US" sz="900" b="1" spc="100" kern="0" dirty="0">
                 <a:solidFill>
-                  <a:srgbClr val="1C1140"/>
+                  <a:srgbClr val="A98BFF"/>
                 </a:solidFill>
                 <a:latin typeface="Courier New" pitchFamily="34" charset="0"/>
                 <a:ea typeface="Courier New" pitchFamily="34" charset="-122"/>
@@ -8664,9 +8801,14 @@
             </a:avLst>
           </a:prstGeom>
           <a:solidFill>
-            <a:srgbClr val="1C1140"/>
+            <a:srgbClr val="1A0B3D"/>
           </a:solidFill>
-          <a:ln/>
+          <a:ln w="12700">
+            <a:solidFill>
+              <a:srgbClr val="5A05F4"/>
+            </a:solidFill>
+            <a:prstDash val="solid"/>
+          </a:ln>
         </p:spPr>
       </p:sp>
       <p:sp>
@@ -8696,7 +8838,7 @@
             <a:r>
               <a:rPr lang="en-US" sz="1250" b="1" dirty="0">
                 <a:solidFill>
-                  <a:srgbClr val="C9A6FF"/>
+                  <a:srgbClr val="A98BFF"/>
                 </a:solidFill>
                 <a:latin typeface="Courier New" pitchFamily="34" charset="0"/>
                 <a:ea typeface="Courier New" pitchFamily="34" charset="-122"/>
@@ -8725,7 +8867,7 @@
           <a:noFill/>
           <a:ln w="15875">
             <a:solidFill>
-              <a:srgbClr val="9B7BE8"/>
+              <a:srgbClr val="8F72E6"/>
             </a:solidFill>
             <a:prstDash val="solid"/>
           </a:ln>
@@ -8746,7 +8888,7 @@
             <a:avLst/>
           </a:prstGeom>
           <a:solidFill>
-            <a:srgbClr val="9B7BE8"/>
+            <a:srgbClr val="8F72E6"/>
           </a:solidFill>
           <a:ln/>
         </p:spPr>
@@ -8768,9 +8910,14 @@
             </a:avLst>
           </a:prstGeom>
           <a:solidFill>
-            <a:srgbClr val="102A20"/>
+            <a:srgbClr val="06180F"/>
           </a:solidFill>
-          <a:ln/>
+          <a:ln w="12700">
+            <a:solidFill>
+              <a:srgbClr val="3FCF8E"/>
+            </a:solidFill>
+            <a:prstDash val="solid"/>
+          </a:ln>
         </p:spPr>
       </p:sp>
       <p:sp>
@@ -8800,7 +8947,7 @@
             <a:r>
               <a:rPr lang="en-US" sz="1250" b="1" dirty="0">
                 <a:solidFill>
-                  <a:srgbClr val="5FD6A0"/>
+                  <a:srgbClr val="3FCF8E"/>
                 </a:solidFill>
                 <a:latin typeface="Courier New" pitchFamily="34" charset="0"/>
                 <a:ea typeface="Courier New" pitchFamily="34" charset="-122"/>
@@ -8839,7 +8986,7 @@
             <a:r>
               <a:rPr lang="en-US" sz="1250" i="1" dirty="0">
                 <a:solidFill>
-                  <a:srgbClr val="AFA9BE"/>
+                  <a:srgbClr val="C9C4D6"/>
                 </a:solidFill>
                 <a:latin typeface="Montserrat" pitchFamily="34" charset="0"/>
                 <a:ea typeface="Montserrat" pitchFamily="34" charset="-122"/>
@@ -8868,9 +9015,14 @@
             </a:avLst>
           </a:prstGeom>
           <a:solidFill>
-            <a:srgbClr val="1C1140"/>
+            <a:srgbClr val="1A0B3D"/>
           </a:solidFill>
-          <a:ln/>
+          <a:ln w="12700">
+            <a:solidFill>
+              <a:srgbClr val="5A05F4"/>
+            </a:solidFill>
+            <a:prstDash val="solid"/>
+          </a:ln>
         </p:spPr>
       </p:sp>
       <p:sp>
@@ -8900,7 +9052,7 @@
             <a:r>
               <a:rPr lang="en-US" sz="1450" b="1" dirty="0">
                 <a:solidFill>
-                  <a:srgbClr val="C9A6FF"/>
+                  <a:srgbClr val="A98BFF"/>
                 </a:solidFill>
                 <a:latin typeface="Montserrat" pitchFamily="34" charset="0"/>
                 <a:ea typeface="Montserrat" pitchFamily="34" charset="-122"/>
@@ -8942,7 +9094,7 @@
             <a:r>
               <a:rPr lang="en-US" sz="1200" dirty="0">
                 <a:solidFill>
-                  <a:srgbClr val="FFFFFF"/>
+                  <a:srgbClr val="C9C4D6"/>
                 </a:solidFill>
                 <a:latin typeface="Montserrat" pitchFamily="34" charset="0"/>
                 <a:ea typeface="Montserrat" pitchFamily="34" charset="-122"/>
@@ -8971,9 +9123,14 @@
             </a:avLst>
           </a:prstGeom>
           <a:solidFill>
-            <a:srgbClr val="102A20"/>
+            <a:srgbClr val="06180F"/>
           </a:solidFill>
-          <a:ln/>
+          <a:ln w="12700">
+            <a:solidFill>
+              <a:srgbClr val="3FCF8E"/>
+            </a:solidFill>
+            <a:prstDash val="solid"/>
+          </a:ln>
         </p:spPr>
       </p:sp>
       <p:sp>
@@ -9003,7 +9160,7 @@
             <a:r>
               <a:rPr lang="en-US" sz="1450" b="1" dirty="0">
                 <a:solidFill>
-                  <a:srgbClr val="5FD6A0"/>
+                  <a:srgbClr val="3FCF8E"/>
                 </a:solidFill>
                 <a:latin typeface="Montserrat" pitchFamily="34" charset="0"/>
                 <a:ea typeface="Montserrat" pitchFamily="34" charset="-122"/>
@@ -9045,7 +9202,7 @@
             <a:r>
               <a:rPr lang="en-US" sz="1200" dirty="0">
                 <a:solidFill>
-                  <a:srgbClr val="FFFFFF"/>
+                  <a:srgbClr val="C9C4D6"/>
                 </a:solidFill>
                 <a:latin typeface="Montserrat" pitchFamily="34" charset="0"/>
                 <a:ea typeface="Montserrat" pitchFamily="34" charset="-122"/>
@@ -9087,7 +9244,7 @@
             <a:lvl1pPr>
               <a:defRPr sz="850">
                 <a:solidFill>
-                  <a:srgbClr val="8A82A0"/>
+                  <a:srgbClr val="9A94AA"/>
                 </a:solidFill>
                 <a:latin typeface="Courier New"/>
                 <a:ea typeface="Courier New"/>
@@ -9157,7 +9314,7 @@
             <a:r>
               <a:rPr lang="en-US" sz="2600" b="1" dirty="0">
                 <a:solidFill>
-                  <a:srgbClr val="C9A6FF"/>
+                  <a:srgbClr val="A98BFF"/>
                 </a:solidFill>
                 <a:latin typeface="Courier New" pitchFamily="34" charset="0"/>
                 <a:ea typeface="Courier New" pitchFamily="34" charset="-122"/>
@@ -9225,9 +9382,14 @@
             </a:avLst>
           </a:prstGeom>
           <a:solidFill>
-            <a:srgbClr val="C9A6FF"/>
+            <a:srgbClr val="1A0B3D"/>
           </a:solidFill>
-          <a:ln/>
+          <a:ln w="12700">
+            <a:solidFill>
+              <a:srgbClr val="5A05F4"/>
+            </a:solidFill>
+            <a:prstDash val="solid"/>
+          </a:ln>
         </p:spPr>
       </p:sp>
       <p:sp>
@@ -9257,7 +9419,7 @@
             <a:r>
               <a:rPr lang="en-US" sz="900" b="1" spc="100" kern="0" dirty="0">
                 <a:solidFill>
-                  <a:srgbClr val="1C1140"/>
+                  <a:srgbClr val="A98BFF"/>
                 </a:solidFill>
                 <a:latin typeface="Courier New" pitchFamily="34" charset="0"/>
                 <a:ea typeface="Courier New" pitchFamily="34" charset="-122"/>
@@ -9310,11 +9472,11 @@
             </a:avLst>
           </a:prstGeom>
           <a:solidFill>
-            <a:srgbClr val="12101A"/>
+            <a:srgbClr val="07060C"/>
           </a:solidFill>
           <a:ln w="12700">
             <a:solidFill>
-              <a:srgbClr val="2E2A3A"/>
+              <a:srgbClr val="5E4F85"/>
             </a:solidFill>
             <a:prstDash val="solid"/>
           </a:ln>
@@ -9367,7 +9529,7 @@
             <a:r>
               <a:rPr lang="en-US" sz="1200" dirty="0">
                 <a:solidFill>
-                  <a:srgbClr val="7FD9A6"/>
+                  <a:srgbClr val="6BA0F8"/>
                 </a:solidFill>
                 <a:latin typeface="Courier New" pitchFamily="34" charset="0"/>
                 <a:ea typeface="Courier New" pitchFamily="34" charset="-122"/>
@@ -9387,7 +9549,7 @@
             <a:r>
               <a:rPr lang="en-US" sz="1200" dirty="0">
                 <a:solidFill>
-                  <a:srgbClr val="C9A6FF"/>
+                  <a:srgbClr val="A98BFF"/>
                 </a:solidFill>
                 <a:latin typeface="Courier New" pitchFamily="34" charset="0"/>
                 <a:ea typeface="Courier New" pitchFamily="34" charset="-122"/>
@@ -9476,9 +9638,14 @@
             </a:avLst>
           </a:prstGeom>
           <a:solidFill>
-            <a:srgbClr val="102A20"/>
+            <a:srgbClr val="06180F"/>
           </a:solidFill>
-          <a:ln/>
+          <a:ln w="12700">
+            <a:solidFill>
+              <a:srgbClr val="3FCF8E"/>
+            </a:solidFill>
+            <a:prstDash val="solid"/>
+          </a:ln>
         </p:spPr>
       </p:sp>
       <p:sp>
@@ -9508,7 +9675,7 @@
             <a:r>
               <a:rPr lang="en-US" sz="1150" b="1" dirty="0">
                 <a:solidFill>
-                  <a:srgbClr val="5FD6A0"/>
+                  <a:srgbClr val="3FCF8E"/>
                 </a:solidFill>
                 <a:latin typeface="Courier New" pitchFamily="34" charset="0"/>
                 <a:ea typeface="Courier New" pitchFamily="34" charset="-122"/>
@@ -9537,7 +9704,7 @@
           <a:noFill/>
           <a:ln w="15875">
             <a:solidFill>
-              <a:srgbClr val="9B7BE8"/>
+              <a:srgbClr val="8F72E6"/>
             </a:solidFill>
             <a:prstDash val="solid"/>
           </a:ln>
@@ -9558,7 +9725,7 @@
             <a:avLst/>
           </a:prstGeom>
           <a:solidFill>
-            <a:srgbClr val="9B7BE8"/>
+            <a:srgbClr val="8F72E6"/>
           </a:solidFill>
           <a:ln/>
         </p:spPr>
@@ -9580,11 +9747,11 @@
             </a:avLst>
           </a:prstGeom>
           <a:solidFill>
-            <a:srgbClr val="17141F"/>
+            <a:srgbClr val="000000"/>
           </a:solidFill>
           <a:ln w="12700">
             <a:solidFill>
-              <a:srgbClr val="2E2A3A"/>
+              <a:srgbClr val="5E4F85"/>
             </a:solidFill>
             <a:prstDash val="solid"/>
           </a:ln>
@@ -9646,7 +9813,7 @@
           <a:noFill/>
           <a:ln w="15875">
             <a:solidFill>
-              <a:srgbClr val="9B7BE8"/>
+              <a:srgbClr val="8F72E6"/>
             </a:solidFill>
             <a:prstDash val="solid"/>
           </a:ln>
@@ -9667,7 +9834,7 @@
             <a:avLst/>
           </a:prstGeom>
           <a:solidFill>
-            <a:srgbClr val="9B7BE8"/>
+            <a:srgbClr val="8F72E6"/>
           </a:solidFill>
           <a:ln/>
         </p:spPr>
@@ -9689,9 +9856,14 @@
             </a:avLst>
           </a:prstGeom>
           <a:solidFill>
-            <a:srgbClr val="1C1140"/>
+            <a:srgbClr val="1A0B3D"/>
           </a:solidFill>
-          <a:ln/>
+          <a:ln w="12700">
+            <a:solidFill>
+              <a:srgbClr val="5A05F4"/>
+            </a:solidFill>
+            <a:prstDash val="solid"/>
+          </a:ln>
         </p:spPr>
       </p:sp>
       <p:sp>
@@ -9721,7 +9893,7 @@
             <a:r>
               <a:rPr lang="en-US" sz="1150" b="1" dirty="0">
                 <a:solidFill>
-                  <a:srgbClr val="C9A6FF"/>
+                  <a:srgbClr val="A98BFF"/>
                 </a:solidFill>
                 <a:latin typeface="Courier New" pitchFamily="34" charset="0"/>
                 <a:ea typeface="Courier New" pitchFamily="34" charset="-122"/>
@@ -9750,9 +9922,14 @@
             </a:avLst>
           </a:prstGeom>
           <a:solidFill>
-            <a:srgbClr val="2A2010"/>
+            <a:srgbClr val="0B1A38"/>
           </a:solidFill>
-          <a:ln/>
+          <a:ln w="12700">
+            <a:solidFill>
+              <a:srgbClr val="6BA0F8"/>
+            </a:solidFill>
+            <a:prstDash val="solid"/>
+          </a:ln>
         </p:spPr>
       </p:sp>
       <p:sp>
@@ -9782,7 +9959,7 @@
             <a:r>
               <a:rPr lang="en-US" sz="950" b="1" spc="150" kern="0" dirty="0">
                 <a:solidFill>
-                  <a:srgbClr val="E8A857"/>
+                  <a:srgbClr val="6BA0F8"/>
                 </a:solidFill>
                 <a:latin typeface="Courier New" pitchFamily="34" charset="0"/>
                 <a:ea typeface="Courier New" pitchFamily="34" charset="-122"/>
@@ -9866,7 +10043,7 @@
             <a:lvl1pPr>
               <a:defRPr sz="850">
                 <a:solidFill>
-                  <a:srgbClr val="8A82A0"/>
+                  <a:srgbClr val="9A94AA"/>
                 </a:solidFill>
                 <a:latin typeface="Courier New"/>
                 <a:ea typeface="Courier New"/>
@@ -9936,7 +10113,7 @@
             <a:r>
               <a:rPr lang="en-US" sz="2600" b="1" dirty="0">
                 <a:solidFill>
-                  <a:srgbClr val="C9A6FF"/>
+                  <a:srgbClr val="A98BFF"/>
                 </a:solidFill>
                 <a:latin typeface="Courier New" pitchFamily="34" charset="0"/>
                 <a:ea typeface="Courier New" pitchFamily="34" charset="-122"/>
@@ -10004,9 +10181,14 @@
             </a:avLst>
           </a:prstGeom>
           <a:solidFill>
-            <a:srgbClr val="C9A6FF"/>
+            <a:srgbClr val="1A0B3D"/>
           </a:solidFill>
-          <a:ln/>
+          <a:ln w="12700">
+            <a:solidFill>
+              <a:srgbClr val="5A05F4"/>
+            </a:solidFill>
+            <a:prstDash val="solid"/>
+          </a:ln>
         </p:spPr>
       </p:sp>
       <p:sp>
@@ -10036,7 +10218,7 @@
             <a:r>
               <a:rPr lang="en-US" sz="900" b="1" spc="100" kern="0" dirty="0">
                 <a:solidFill>
-                  <a:srgbClr val="1C1140"/>
+                  <a:srgbClr val="A98BFF"/>
                 </a:solidFill>
                 <a:latin typeface="Courier New" pitchFamily="34" charset="0"/>
                 <a:ea typeface="Courier New" pitchFamily="34" charset="-122"/>
@@ -10065,9 +10247,14 @@
             </a:avLst>
           </a:prstGeom>
           <a:solidFill>
-            <a:srgbClr val="2A2010"/>
+            <a:srgbClr val="000000"/>
           </a:solidFill>
-          <a:ln/>
+          <a:ln w="12700">
+            <a:solidFill>
+              <a:srgbClr val="5E4F85"/>
+            </a:solidFill>
+            <a:prstDash val="solid"/>
+          </a:ln>
         </p:spPr>
       </p:sp>
       <p:sp>
@@ -10097,7 +10284,7 @@
             <a:r>
               <a:rPr lang="en-US" sz="900" b="1" spc="100" kern="0" dirty="0">
                 <a:solidFill>
-                  <a:srgbClr val="E8A857"/>
+                  <a:srgbClr val="C9C4D6"/>
                 </a:solidFill>
                 <a:latin typeface="Courier New" pitchFamily="34" charset="0"/>
                 <a:ea typeface="Courier New" pitchFamily="34" charset="-122"/>
@@ -10150,9 +10337,14 @@
             </a:avLst>
           </a:prstGeom>
           <a:solidFill>
-            <a:srgbClr val="1C1140"/>
+            <a:srgbClr val="1A0B3D"/>
           </a:solidFill>
-          <a:ln/>
+          <a:ln w="12700">
+            <a:solidFill>
+              <a:srgbClr val="5A05F4"/>
+            </a:solidFill>
+            <a:prstDash val="solid"/>
+          </a:ln>
         </p:spPr>
       </p:sp>
       <p:sp>
@@ -10170,7 +10362,7 @@
             <a:avLst/>
           </a:prstGeom>
           <a:solidFill>
-            <a:srgbClr val="C9A6FF"/>
+            <a:srgbClr val="5A05F4"/>
           </a:solidFill>
           <a:ln/>
         </p:spPr>
@@ -10202,7 +10394,7 @@
             <a:r>
               <a:rPr lang="en-US" sz="1200" b="1" dirty="0">
                 <a:solidFill>
-                  <a:srgbClr val="1C1140"/>
+                  <a:srgbClr val="FFFFFF"/>
                 </a:solidFill>
                 <a:latin typeface="Courier New" pitchFamily="34" charset="0"/>
                 <a:ea typeface="Courier New" pitchFamily="34" charset="-122"/>
@@ -10241,7 +10433,7 @@
             <a:r>
               <a:rPr lang="en-US" sz="1450" b="1" dirty="0">
                 <a:solidFill>
-                  <a:srgbClr val="C9A6FF"/>
+                  <a:srgbClr val="A98BFF"/>
                 </a:solidFill>
                 <a:latin typeface="Montserrat" pitchFamily="34" charset="0"/>
                 <a:ea typeface="Montserrat" pitchFamily="34" charset="-122"/>
@@ -10283,7 +10475,7 @@
             <a:r>
               <a:rPr lang="en-US" sz="1200" dirty="0">
                 <a:solidFill>
-                  <a:srgbClr val="FFFFFF"/>
+                  <a:srgbClr val="C9C4D6"/>
                 </a:solidFill>
                 <a:latin typeface="Montserrat" pitchFamily="34" charset="0"/>
                 <a:ea typeface="Montserrat" pitchFamily="34" charset="-122"/>
@@ -10312,9 +10504,14 @@
             </a:avLst>
           </a:prstGeom>
           <a:solidFill>
-            <a:srgbClr val="1C1140"/>
+            <a:srgbClr val="1A0B3D"/>
           </a:solidFill>
-          <a:ln/>
+          <a:ln w="12700">
+            <a:solidFill>
+              <a:srgbClr val="5A05F4"/>
+            </a:solidFill>
+            <a:prstDash val="solid"/>
+          </a:ln>
         </p:spPr>
       </p:sp>
       <p:sp>
@@ -10332,7 +10529,7 @@
             <a:avLst/>
           </a:prstGeom>
           <a:solidFill>
-            <a:srgbClr val="C9A6FF"/>
+            <a:srgbClr val="5A05F4"/>
           </a:solidFill>
           <a:ln/>
         </p:spPr>
@@ -10364,7 +10561,7 @@
             <a:r>
               <a:rPr lang="en-US" sz="1200" b="1" dirty="0">
                 <a:solidFill>
-                  <a:srgbClr val="1C1140"/>
+                  <a:srgbClr val="FFFFFF"/>
                 </a:solidFill>
                 <a:latin typeface="Courier New" pitchFamily="34" charset="0"/>
                 <a:ea typeface="Courier New" pitchFamily="34" charset="-122"/>
@@ -10403,7 +10600,7 @@
             <a:r>
               <a:rPr lang="en-US" sz="1450" b="1" dirty="0">
                 <a:solidFill>
-                  <a:srgbClr val="C9A6FF"/>
+                  <a:srgbClr val="A98BFF"/>
                 </a:solidFill>
                 <a:latin typeface="Montserrat" pitchFamily="34" charset="0"/>
                 <a:ea typeface="Montserrat" pitchFamily="34" charset="-122"/>
@@ -10445,7 +10642,7 @@
             <a:r>
               <a:rPr lang="en-US" sz="1200" dirty="0">
                 <a:solidFill>
-                  <a:srgbClr val="FFFFFF"/>
+                  <a:srgbClr val="C9C4D6"/>
                 </a:solidFill>
                 <a:latin typeface="Montserrat" pitchFamily="34" charset="0"/>
                 <a:ea typeface="Montserrat" pitchFamily="34" charset="-122"/>
@@ -10474,9 +10671,14 @@
             </a:avLst>
           </a:prstGeom>
           <a:solidFill>
-            <a:srgbClr val="1C1140"/>
+            <a:srgbClr val="1A0B3D"/>
           </a:solidFill>
-          <a:ln/>
+          <a:ln w="12700">
+            <a:solidFill>
+              <a:srgbClr val="5A05F4"/>
+            </a:solidFill>
+            <a:prstDash val="solid"/>
+          </a:ln>
         </p:spPr>
       </p:sp>
       <p:sp>
@@ -10494,7 +10696,7 @@
             <a:avLst/>
           </a:prstGeom>
           <a:solidFill>
-            <a:srgbClr val="C9A6FF"/>
+            <a:srgbClr val="5A05F4"/>
           </a:solidFill>
           <a:ln/>
         </p:spPr>
@@ -10526,7 +10728,7 @@
             <a:r>
               <a:rPr lang="en-US" sz="1200" b="1" dirty="0">
                 <a:solidFill>
-                  <a:srgbClr val="1C1140"/>
+                  <a:srgbClr val="FFFFFF"/>
                 </a:solidFill>
                 <a:latin typeface="Courier New" pitchFamily="34" charset="0"/>
                 <a:ea typeface="Courier New" pitchFamily="34" charset="-122"/>
@@ -10565,7 +10767,7 @@
             <a:r>
               <a:rPr lang="en-US" sz="1450" b="1" dirty="0">
                 <a:solidFill>
-                  <a:srgbClr val="C9A6FF"/>
+                  <a:srgbClr val="A98BFF"/>
                 </a:solidFill>
                 <a:latin typeface="Montserrat" pitchFamily="34" charset="0"/>
                 <a:ea typeface="Montserrat" pitchFamily="34" charset="-122"/>
@@ -10607,7 +10809,7 @@
             <a:r>
               <a:rPr lang="en-US" sz="1200" dirty="0">
                 <a:solidFill>
-                  <a:srgbClr val="FFFFFF"/>
+                  <a:srgbClr val="C9C4D6"/>
                 </a:solidFill>
                 <a:latin typeface="Montserrat" pitchFamily="34" charset="0"/>
                 <a:ea typeface="Montserrat" pitchFamily="34" charset="-122"/>
@@ -10636,11 +10838,11 @@
             </a:avLst>
           </a:prstGeom>
           <a:solidFill>
-            <a:srgbClr val="102A20"/>
+            <a:srgbClr val="06180F"/>
           </a:solidFill>
           <a:ln w="12700">
             <a:solidFill>
-              <a:srgbClr val="5FD6A0"/>
+              <a:srgbClr val="3FCF8E"/>
             </a:solidFill>
             <a:prstDash val="solid"/>
           </a:ln>
@@ -10673,7 +10875,7 @@
             <a:r>
               <a:rPr lang="en-US" sz="950" b="1" dirty="0">
                 <a:solidFill>
-                  <a:srgbClr val="5FD6A0"/>
+                  <a:srgbClr val="3FCF8E"/>
                 </a:solidFill>
                 <a:latin typeface="Courier New" pitchFamily="34" charset="0"/>
                 <a:ea typeface="Courier New" pitchFamily="34" charset="-122"/>
@@ -10702,11 +10904,11 @@
             </a:avLst>
           </a:prstGeom>
           <a:solidFill>
-            <a:srgbClr val="1C1140"/>
+            <a:srgbClr val="1A0B3D"/>
           </a:solidFill>
           <a:ln w="12700">
             <a:solidFill>
-              <a:srgbClr val="C9A6FF"/>
+              <a:srgbClr val="A98BFF"/>
             </a:solidFill>
             <a:prstDash val="solid"/>
           </a:ln>
@@ -10739,7 +10941,7 @@
             <a:r>
               <a:rPr lang="en-US" sz="950" b="1" dirty="0">
                 <a:solidFill>
-                  <a:srgbClr val="C9A6FF"/>
+                  <a:srgbClr val="A98BFF"/>
                 </a:solidFill>
                 <a:latin typeface="Courier New" pitchFamily="34" charset="0"/>
                 <a:ea typeface="Courier New" pitchFamily="34" charset="-122"/>
@@ -10768,11 +10970,11 @@
             </a:avLst>
           </a:prstGeom>
           <a:solidFill>
-            <a:srgbClr val="2A2010"/>
+            <a:srgbClr val="0B1A38"/>
           </a:solidFill>
           <a:ln w="12700">
             <a:solidFill>
-              <a:srgbClr val="E8A857"/>
+              <a:srgbClr val="6BA0F8"/>
             </a:solidFill>
             <a:prstDash val="solid"/>
           </a:ln>
@@ -10805,7 +11007,7 @@
             <a:r>
               <a:rPr lang="en-US" sz="950" b="1" dirty="0">
                 <a:solidFill>
-                  <a:srgbClr val="E8A857"/>
+                  <a:srgbClr val="6BA0F8"/>
                 </a:solidFill>
                 <a:latin typeface="Courier New" pitchFamily="34" charset="0"/>
                 <a:ea typeface="Courier New" pitchFamily="34" charset="-122"/>
@@ -10844,7 +11046,7 @@
             <a:r>
               <a:rPr lang="en-US" sz="850" spc="100" kern="0" dirty="0">
                 <a:solidFill>
-                  <a:srgbClr val="8A82A0"/>
+                  <a:srgbClr val="9A94AA"/>
                 </a:solidFill>
                 <a:latin typeface="Courier New" pitchFamily="34" charset="0"/>
                 <a:ea typeface="Courier New" pitchFamily="34" charset="-122"/>
@@ -10873,11 +11075,11 @@
             </a:avLst>
           </a:prstGeom>
           <a:solidFill>
-            <a:srgbClr val="17141F"/>
+            <a:srgbClr val="000000"/>
           </a:solidFill>
           <a:ln w="12700">
             <a:solidFill>
-              <a:srgbClr val="2E2A3A"/>
+              <a:srgbClr val="5E4F85"/>
             </a:solidFill>
             <a:prstDash val="solid"/>
           </a:ln>
@@ -10952,7 +11154,7 @@
             <a:r>
               <a:rPr lang="en-US" sz="1200" dirty="0">
                 <a:solidFill>
-                  <a:srgbClr val="AFA9BE"/>
+                  <a:srgbClr val="C9C4D6"/>
                 </a:solidFill>
                 <a:latin typeface="Montserrat" pitchFamily="34" charset="0"/>
                 <a:ea typeface="Montserrat" pitchFamily="34" charset="-122"/>
@@ -10981,9 +11183,14 @@
             </a:avLst>
           </a:prstGeom>
           <a:solidFill>
-            <a:srgbClr val="2A2010"/>
+            <a:srgbClr val="0B1A38"/>
           </a:solidFill>
-          <a:ln/>
+          <a:ln w="12700">
+            <a:solidFill>
+              <a:srgbClr val="6BA0F8"/>
+            </a:solidFill>
+            <a:prstDash val="solid"/>
+          </a:ln>
         </p:spPr>
       </p:sp>
       <p:sp>
@@ -11013,7 +11220,7 @@
             <a:r>
               <a:rPr lang="en-US" sz="1450" b="1" dirty="0">
                 <a:solidFill>
-                  <a:srgbClr val="E8A857"/>
+                  <a:srgbClr val="6BA0F8"/>
                 </a:solidFill>
                 <a:latin typeface="Montserrat" pitchFamily="34" charset="0"/>
                 <a:ea typeface="Montserrat" pitchFamily="34" charset="-122"/>
@@ -11055,7 +11262,7 @@
             <a:r>
               <a:rPr lang="en-US" sz="1200" dirty="0">
                 <a:solidFill>
-                  <a:srgbClr val="FFFFFF"/>
+                  <a:srgbClr val="C9C4D6"/>
                 </a:solidFill>
                 <a:latin typeface="Montserrat" pitchFamily="34" charset="0"/>
                 <a:ea typeface="Montserrat" pitchFamily="34" charset="-122"/>
@@ -11097,7 +11304,7 @@
             <a:lvl1pPr>
               <a:defRPr sz="850">
                 <a:solidFill>
-                  <a:srgbClr val="8A82A0"/>
+                  <a:srgbClr val="9A94AA"/>
                 </a:solidFill>
                 <a:latin typeface="Courier New"/>
                 <a:ea typeface="Courier New"/>
@@ -11196,7 +11403,7 @@
             </a:avLst>
           </a:prstGeom>
           <a:solidFill>
-            <a:srgbClr val="5FD6A0"/>
+            <a:srgbClr val="5A05F4"/>
           </a:solidFill>
           <a:ln/>
         </p:spPr>
@@ -11228,7 +11435,7 @@
             <a:r>
               <a:rPr lang="en-US" sz="900" b="1" spc="100" kern="0" dirty="0">
                 <a:solidFill>
-                  <a:srgbClr val="102A20"/>
+                  <a:srgbClr val="FFFFFF"/>
                 </a:solidFill>
                 <a:latin typeface="Courier New" pitchFamily="34" charset="0"/>
                 <a:ea typeface="Courier New" pitchFamily="34" charset="-122"/>
@@ -11281,9 +11488,14 @@
             </a:avLst>
           </a:prstGeom>
           <a:solidFill>
-            <a:srgbClr val="102A20"/>
+            <a:srgbClr val="06180F"/>
           </a:solidFill>
-          <a:ln/>
+          <a:ln w="12700">
+            <a:solidFill>
+              <a:srgbClr val="3FCF8E"/>
+            </a:solidFill>
+            <a:prstDash val="solid"/>
+          </a:ln>
         </p:spPr>
       </p:sp>
       <p:sp>
@@ -11301,7 +11513,7 @@
             <a:avLst/>
           </a:prstGeom>
           <a:solidFill>
-            <a:srgbClr val="5FD6A0"/>
+            <a:srgbClr val="5A05F4"/>
           </a:solidFill>
           <a:ln/>
         </p:spPr>
@@ -11333,7 +11545,7 @@
             <a:r>
               <a:rPr lang="en-US" sz="1200" b="1" dirty="0">
                 <a:solidFill>
-                  <a:srgbClr val="102A20"/>
+                  <a:srgbClr val="FFFFFF"/>
                 </a:solidFill>
                 <a:latin typeface="Courier New" pitchFamily="34" charset="0"/>
                 <a:ea typeface="Courier New" pitchFamily="34" charset="-122"/>
@@ -11372,7 +11584,7 @@
             <a:r>
               <a:rPr lang="en-US" sz="1450" b="1" dirty="0">
                 <a:solidFill>
-                  <a:srgbClr val="5FD6A0"/>
+                  <a:srgbClr val="3FCF8E"/>
                 </a:solidFill>
                 <a:latin typeface="Montserrat" pitchFamily="34" charset="0"/>
                 <a:ea typeface="Montserrat" pitchFamily="34" charset="-122"/>
@@ -11414,7 +11626,7 @@
             <a:r>
               <a:rPr lang="en-US" sz="1200" dirty="0">
                 <a:solidFill>
-                  <a:srgbClr val="FFFFFF"/>
+                  <a:srgbClr val="C9C4D6"/>
                 </a:solidFill>
                 <a:latin typeface="Montserrat" pitchFamily="34" charset="0"/>
                 <a:ea typeface="Montserrat" pitchFamily="34" charset="-122"/>
@@ -11443,9 +11655,14 @@
             </a:avLst>
           </a:prstGeom>
           <a:solidFill>
-            <a:srgbClr val="102A20"/>
+            <a:srgbClr val="06180F"/>
           </a:solidFill>
-          <a:ln/>
+          <a:ln w="12700">
+            <a:solidFill>
+              <a:srgbClr val="3FCF8E"/>
+            </a:solidFill>
+            <a:prstDash val="solid"/>
+          </a:ln>
         </p:spPr>
       </p:sp>
       <p:sp>
@@ -11463,7 +11680,7 @@
             <a:avLst/>
           </a:prstGeom>
           <a:solidFill>
-            <a:srgbClr val="5FD6A0"/>
+            <a:srgbClr val="5A05F4"/>
           </a:solidFill>
           <a:ln/>
         </p:spPr>
@@ -11495,7 +11712,7 @@
             <a:r>
               <a:rPr lang="en-US" sz="1200" b="1" dirty="0">
                 <a:solidFill>
-                  <a:srgbClr val="102A20"/>
+                  <a:srgbClr val="FFFFFF"/>
                 </a:solidFill>
                 <a:latin typeface="Courier New" pitchFamily="34" charset="0"/>
                 <a:ea typeface="Courier New" pitchFamily="34" charset="-122"/>
@@ -11534,7 +11751,7 @@
             <a:r>
               <a:rPr lang="en-US" sz="1450" b="1" dirty="0">
                 <a:solidFill>
-                  <a:srgbClr val="5FD6A0"/>
+                  <a:srgbClr val="3FCF8E"/>
                 </a:solidFill>
                 <a:latin typeface="Montserrat" pitchFamily="34" charset="0"/>
                 <a:ea typeface="Montserrat" pitchFamily="34" charset="-122"/>
@@ -11576,7 +11793,7 @@
             <a:r>
               <a:rPr lang="en-US" sz="1200" dirty="0">
                 <a:solidFill>
-                  <a:srgbClr val="FFFFFF"/>
+                  <a:srgbClr val="C9C4D6"/>
                 </a:solidFill>
                 <a:latin typeface="Montserrat" pitchFamily="34" charset="0"/>
                 <a:ea typeface="Montserrat" pitchFamily="34" charset="-122"/>
@@ -11605,9 +11822,14 @@
             </a:avLst>
           </a:prstGeom>
           <a:solidFill>
-            <a:srgbClr val="102A20"/>
+            <a:srgbClr val="06180F"/>
           </a:solidFill>
-          <a:ln/>
+          <a:ln w="12700">
+            <a:solidFill>
+              <a:srgbClr val="3FCF8E"/>
+            </a:solidFill>
+            <a:prstDash val="solid"/>
+          </a:ln>
         </p:spPr>
       </p:sp>
       <p:sp>
@@ -11625,7 +11847,7 @@
             <a:avLst/>
           </a:prstGeom>
           <a:solidFill>
-            <a:srgbClr val="5FD6A0"/>
+            <a:srgbClr val="5A05F4"/>
           </a:solidFill>
           <a:ln/>
         </p:spPr>
@@ -11657,7 +11879,7 @@
             <a:r>
               <a:rPr lang="en-US" sz="1200" b="1" dirty="0">
                 <a:solidFill>
-                  <a:srgbClr val="102A20"/>
+                  <a:srgbClr val="FFFFFF"/>
                 </a:solidFill>
                 <a:latin typeface="Courier New" pitchFamily="34" charset="0"/>
                 <a:ea typeface="Courier New" pitchFamily="34" charset="-122"/>
@@ -11696,7 +11918,7 @@
             <a:r>
               <a:rPr lang="en-US" sz="1450" b="1" dirty="0">
                 <a:solidFill>
-                  <a:srgbClr val="5FD6A0"/>
+                  <a:srgbClr val="3FCF8E"/>
                 </a:solidFill>
                 <a:latin typeface="Montserrat" pitchFamily="34" charset="0"/>
                 <a:ea typeface="Montserrat" pitchFamily="34" charset="-122"/>
@@ -11738,7 +11960,7 @@
             <a:r>
               <a:rPr lang="en-US" sz="1200" dirty="0">
                 <a:solidFill>
-                  <a:srgbClr val="FFFFFF"/>
+                  <a:srgbClr val="C9C4D6"/>
                 </a:solidFill>
                 <a:latin typeface="Montserrat" pitchFamily="34" charset="0"/>
                 <a:ea typeface="Montserrat" pitchFamily="34" charset="-122"/>
@@ -11767,9 +11989,14 @@
             </a:avLst>
           </a:prstGeom>
           <a:solidFill>
-            <a:srgbClr val="102A20"/>
+            <a:srgbClr val="06180F"/>
           </a:solidFill>
-          <a:ln/>
+          <a:ln w="12700">
+            <a:solidFill>
+              <a:srgbClr val="3FCF8E"/>
+            </a:solidFill>
+            <a:prstDash val="solid"/>
+          </a:ln>
         </p:spPr>
       </p:sp>
       <p:sp>
@@ -11787,7 +12014,7 @@
             <a:avLst/>
           </a:prstGeom>
           <a:solidFill>
-            <a:srgbClr val="5FD6A0"/>
+            <a:srgbClr val="5A05F4"/>
           </a:solidFill>
           <a:ln/>
         </p:spPr>
@@ -11819,7 +12046,7 @@
             <a:r>
               <a:rPr lang="en-US" sz="1200" b="1" dirty="0">
                 <a:solidFill>
-                  <a:srgbClr val="102A20"/>
+                  <a:srgbClr val="FFFFFF"/>
                 </a:solidFill>
                 <a:latin typeface="Courier New" pitchFamily="34" charset="0"/>
                 <a:ea typeface="Courier New" pitchFamily="34" charset="-122"/>
@@ -11858,7 +12085,7 @@
             <a:r>
               <a:rPr lang="en-US" sz="1450" b="1" dirty="0">
                 <a:solidFill>
-                  <a:srgbClr val="5FD6A0"/>
+                  <a:srgbClr val="3FCF8E"/>
                 </a:solidFill>
                 <a:latin typeface="Montserrat" pitchFamily="34" charset="0"/>
                 <a:ea typeface="Montserrat" pitchFamily="34" charset="-122"/>
@@ -11900,7 +12127,7 @@
             <a:r>
               <a:rPr lang="en-US" sz="1200" dirty="0">
                 <a:solidFill>
-                  <a:srgbClr val="FFFFFF"/>
+                  <a:srgbClr val="C9C4D6"/>
                 </a:solidFill>
                 <a:latin typeface="Montserrat" pitchFamily="34" charset="0"/>
                 <a:ea typeface="Montserrat" pitchFamily="34" charset="-122"/>
@@ -12045,7 +12272,7 @@
             <a:lvl1pPr>
               <a:defRPr sz="850">
                 <a:solidFill>
-                  <a:srgbClr val="8A82A0"/>
+                  <a:srgbClr val="9A94AA"/>
                 </a:solidFill>
                 <a:latin typeface="Courier New"/>
                 <a:ea typeface="Courier New"/>
@@ -12144,7 +12371,7 @@
             </a:avLst>
           </a:prstGeom>
           <a:solidFill>
-            <a:srgbClr val="5FD6A0"/>
+            <a:srgbClr val="5A05F4"/>
           </a:solidFill>
           <a:ln/>
         </p:spPr>
@@ -12176,7 +12403,7 @@
             <a:r>
               <a:rPr lang="en-US" sz="900" b="1" spc="100" kern="0" dirty="0">
                 <a:solidFill>
-                  <a:srgbClr val="102A20"/>
+                  <a:srgbClr val="FFFFFF"/>
                 </a:solidFill>
                 <a:latin typeface="Courier New" pitchFamily="34" charset="0"/>
                 <a:ea typeface="Courier New" pitchFamily="34" charset="-122"/>
@@ -12227,7 +12454,7 @@
             <a:avLst/>
           </a:prstGeom>
           <a:solidFill>
-            <a:srgbClr val="C9A6FF"/>
+            <a:srgbClr val="A98BFF"/>
           </a:solidFill>
           <a:ln/>
         </p:spPr>
@@ -12259,7 +12486,7 @@
             <a:r>
               <a:rPr lang="en-US" sz="1300" b="1" dirty="0">
                 <a:solidFill>
-                  <a:srgbClr val="1C1140"/>
+                  <a:srgbClr val="1A0B3D"/>
                 </a:solidFill>
                 <a:latin typeface="Courier New" pitchFamily="34" charset="0"/>
                 <a:ea typeface="Courier New" pitchFamily="34" charset="-122"/>
@@ -12312,7 +12539,7 @@
             <a:r>
               <a:rPr lang="en-US" sz="1200" dirty="0">
                 <a:solidFill>
-                  <a:srgbClr val="AFA9BE"/>
+                  <a:srgbClr val="C9C4D6"/>
                 </a:solidFill>
                 <a:latin typeface="Montserrat" pitchFamily="34" charset="0"/>
                 <a:ea typeface="Montserrat" pitchFamily="34" charset="-122"/>
@@ -12339,7 +12566,7 @@
             <a:avLst/>
           </a:prstGeom>
           <a:solidFill>
-            <a:srgbClr val="C9A6FF"/>
+            <a:srgbClr val="A98BFF"/>
           </a:solidFill>
           <a:ln/>
         </p:spPr>
@@ -12371,7 +12598,7 @@
             <a:r>
               <a:rPr lang="en-US" sz="1300" b="1" dirty="0">
                 <a:solidFill>
-                  <a:srgbClr val="1C1140"/>
+                  <a:srgbClr val="1A0B3D"/>
                 </a:solidFill>
                 <a:latin typeface="Courier New" pitchFamily="34" charset="0"/>
                 <a:ea typeface="Courier New" pitchFamily="34" charset="-122"/>
@@ -12424,7 +12651,7 @@
             <a:r>
               <a:rPr lang="en-US" sz="1200" dirty="0">
                 <a:solidFill>
-                  <a:srgbClr val="AFA9BE"/>
+                  <a:srgbClr val="C9C4D6"/>
                 </a:solidFill>
                 <a:latin typeface="Montserrat" pitchFamily="34" charset="0"/>
                 <a:ea typeface="Montserrat" pitchFamily="34" charset="-122"/>
@@ -12451,7 +12678,7 @@
             <a:avLst/>
           </a:prstGeom>
           <a:solidFill>
-            <a:srgbClr val="C9A6FF"/>
+            <a:srgbClr val="A98BFF"/>
           </a:solidFill>
           <a:ln/>
         </p:spPr>
@@ -12483,7 +12710,7 @@
             <a:r>
               <a:rPr lang="en-US" sz="1300" b="1" dirty="0">
                 <a:solidFill>
-                  <a:srgbClr val="1C1140"/>
+                  <a:srgbClr val="1A0B3D"/>
                 </a:solidFill>
                 <a:latin typeface="Courier New" pitchFamily="34" charset="0"/>
                 <a:ea typeface="Courier New" pitchFamily="34" charset="-122"/>
@@ -12536,7 +12763,7 @@
             <a:r>
               <a:rPr lang="en-US" sz="1200" dirty="0">
                 <a:solidFill>
-                  <a:srgbClr val="AFA9BE"/>
+                  <a:srgbClr val="C9C4D6"/>
                 </a:solidFill>
                 <a:latin typeface="Montserrat" pitchFamily="34" charset="0"/>
                 <a:ea typeface="Montserrat" pitchFamily="34" charset="-122"/>
@@ -12563,7 +12790,7 @@
             <a:avLst/>
           </a:prstGeom>
           <a:solidFill>
-            <a:srgbClr val="C9A6FF"/>
+            <a:srgbClr val="A98BFF"/>
           </a:solidFill>
           <a:ln/>
         </p:spPr>
@@ -12595,7 +12822,7 @@
             <a:r>
               <a:rPr lang="en-US" sz="1300" b="1" dirty="0">
                 <a:solidFill>
-                  <a:srgbClr val="1C1140"/>
+                  <a:srgbClr val="1A0B3D"/>
                 </a:solidFill>
                 <a:latin typeface="Courier New" pitchFamily="34" charset="0"/>
                 <a:ea typeface="Courier New" pitchFamily="34" charset="-122"/>
@@ -12648,7 +12875,7 @@
             <a:r>
               <a:rPr lang="en-US" sz="1200" dirty="0">
                 <a:solidFill>
-                  <a:srgbClr val="AFA9BE"/>
+                  <a:srgbClr val="C9C4D6"/>
                 </a:solidFill>
                 <a:latin typeface="Montserrat" pitchFamily="34" charset="0"/>
                 <a:ea typeface="Montserrat" pitchFamily="34" charset="-122"/>
@@ -12675,7 +12902,7 @@
             <a:avLst/>
           </a:prstGeom>
           <a:solidFill>
-            <a:srgbClr val="E8A857"/>
+            <a:srgbClr val="6BA0F8"/>
           </a:solidFill>
           <a:ln/>
         </p:spPr>
@@ -12707,7 +12934,7 @@
             <a:r>
               <a:rPr lang="en-US" sz="1300" b="1" dirty="0">
                 <a:solidFill>
-                  <a:srgbClr val="2A2010"/>
+                  <a:srgbClr val="0B1A38"/>
                 </a:solidFill>
                 <a:latin typeface="Courier New" pitchFamily="34" charset="0"/>
                 <a:ea typeface="Courier New" pitchFamily="34" charset="-122"/>
@@ -12746,7 +12973,7 @@
             <a:r>
               <a:rPr lang="en-US" sz="1400" b="1" dirty="0">
                 <a:solidFill>
-                  <a:srgbClr val="E8A857"/>
+                  <a:srgbClr val="6BA0F8"/>
                 </a:solidFill>
                 <a:latin typeface="Montserrat" pitchFamily="34" charset="0"/>
                 <a:ea typeface="Montserrat" pitchFamily="34" charset="-122"/>
@@ -12760,7 +12987,7 @@
             <a:r>
               <a:rPr lang="en-US" sz="1200" dirty="0">
                 <a:solidFill>
-                  <a:srgbClr val="AFA9BE"/>
+                  <a:srgbClr val="C9C4D6"/>
                 </a:solidFill>
                 <a:latin typeface="Montserrat" pitchFamily="34" charset="0"/>
                 <a:ea typeface="Montserrat" pitchFamily="34" charset="-122"/>
@@ -12802,7 +13029,7 @@
             <a:lvl1pPr>
               <a:defRPr sz="850">
                 <a:solidFill>
-                  <a:srgbClr val="8A82A0"/>
+                  <a:srgbClr val="9A94AA"/>
                 </a:solidFill>
                 <a:latin typeface="Courier New"/>
                 <a:ea typeface="Courier New"/>
@@ -12914,7 +13141,7 @@
             <a:r>
               <a:rPr lang="en-US" sz="1300" dirty="0">
                 <a:solidFill>
-                  <a:srgbClr val="AFA9BE"/>
+                  <a:srgbClr val="C9C4D6"/>
                 </a:solidFill>
                 <a:latin typeface="Montserrat" pitchFamily="34" charset="0"/>
                 <a:ea typeface="Montserrat" pitchFamily="34" charset="-122"/>
@@ -12943,9 +13170,14 @@
             </a:avLst>
           </a:prstGeom>
           <a:solidFill>
-            <a:srgbClr val="C9A6FF"/>
+            <a:srgbClr val="1A0B3D"/>
           </a:solidFill>
-          <a:ln/>
+          <a:ln w="12700">
+            <a:solidFill>
+              <a:srgbClr val="5A05F4"/>
+            </a:solidFill>
+            <a:prstDash val="solid"/>
+          </a:ln>
         </p:spPr>
       </p:sp>
       <p:sp>
@@ -12975,7 +13207,7 @@
             <a:r>
               <a:rPr lang="en-US" sz="900" b="1" spc="100" kern="0" dirty="0">
                 <a:solidFill>
-                  <a:srgbClr val="1C1140"/>
+                  <a:srgbClr val="A98BFF"/>
                 </a:solidFill>
                 <a:latin typeface="Courier New" pitchFamily="34" charset="0"/>
                 <a:ea typeface="Courier New" pitchFamily="34" charset="-122"/>
@@ -13028,11 +13260,11 @@
             </a:avLst>
           </a:prstGeom>
           <a:solidFill>
-            <a:srgbClr val="17141F"/>
+            <a:srgbClr val="000000"/>
           </a:solidFill>
           <a:ln w="12700">
             <a:solidFill>
-              <a:srgbClr val="2E2A3A"/>
+              <a:srgbClr val="5E4F85"/>
             </a:solidFill>
             <a:prstDash val="solid"/>
           </a:ln>
@@ -13166,7 +13398,7 @@
             <a:r>
               <a:rPr lang="en-US" sz="1200" dirty="0">
                 <a:solidFill>
-                  <a:srgbClr val="AFA9BE"/>
+                  <a:srgbClr val="C9C4D6"/>
                 </a:solidFill>
                 <a:latin typeface="Montserrat" pitchFamily="34" charset="0"/>
                 <a:ea typeface="Montserrat" pitchFamily="34" charset="-122"/>
@@ -13195,11 +13427,11 @@
             </a:avLst>
           </a:prstGeom>
           <a:solidFill>
-            <a:srgbClr val="17141F"/>
+            <a:srgbClr val="000000"/>
           </a:solidFill>
           <a:ln w="12700">
             <a:solidFill>
-              <a:srgbClr val="2E2A3A"/>
+              <a:srgbClr val="5E4F85"/>
             </a:solidFill>
             <a:prstDash val="solid"/>
           </a:ln>
@@ -13333,7 +13565,7 @@
             <a:r>
               <a:rPr lang="en-US" sz="1200" dirty="0">
                 <a:solidFill>
-                  <a:srgbClr val="AFA9BE"/>
+                  <a:srgbClr val="C9C4D6"/>
                 </a:solidFill>
                 <a:latin typeface="Montserrat" pitchFamily="34" charset="0"/>
                 <a:ea typeface="Montserrat" pitchFamily="34" charset="-122"/>
@@ -13362,11 +13594,11 @@
             </a:avLst>
           </a:prstGeom>
           <a:solidFill>
-            <a:srgbClr val="17141F"/>
+            <a:srgbClr val="000000"/>
           </a:solidFill>
           <a:ln w="12700">
             <a:solidFill>
-              <a:srgbClr val="2E2A3A"/>
+              <a:srgbClr val="5E4F85"/>
             </a:solidFill>
             <a:prstDash val="solid"/>
           </a:ln>
@@ -13500,7 +13732,7 @@
             <a:r>
               <a:rPr lang="en-US" sz="1200" dirty="0">
                 <a:solidFill>
-                  <a:srgbClr val="AFA9BE"/>
+                  <a:srgbClr val="C9C4D6"/>
                 </a:solidFill>
                 <a:latin typeface="Montserrat" pitchFamily="34" charset="0"/>
                 <a:ea typeface="Montserrat" pitchFamily="34" charset="-122"/>
@@ -13529,11 +13761,11 @@
             </a:avLst>
           </a:prstGeom>
           <a:solidFill>
-            <a:srgbClr val="17141F"/>
+            <a:srgbClr val="000000"/>
           </a:solidFill>
           <a:ln w="12700">
             <a:solidFill>
-              <a:srgbClr val="2E2A3A"/>
+              <a:srgbClr val="5E4F85"/>
             </a:solidFill>
             <a:prstDash val="solid"/>
           </a:ln>
@@ -13667,7 +13899,7 @@
             <a:r>
               <a:rPr lang="en-US" sz="1200" dirty="0">
                 <a:solidFill>
-                  <a:srgbClr val="AFA9BE"/>
+                  <a:srgbClr val="C9C4D6"/>
                 </a:solidFill>
                 <a:latin typeface="Montserrat" pitchFamily="34" charset="0"/>
                 <a:ea typeface="Montserrat" pitchFamily="34" charset="-122"/>
@@ -13696,11 +13928,11 @@
             </a:avLst>
           </a:prstGeom>
           <a:solidFill>
-            <a:srgbClr val="17141F"/>
+            <a:srgbClr val="000000"/>
           </a:solidFill>
           <a:ln w="12700">
             <a:solidFill>
-              <a:srgbClr val="2E2A3A"/>
+              <a:srgbClr val="5E4F85"/>
             </a:solidFill>
             <a:prstDash val="solid"/>
           </a:ln>
@@ -13834,7 +14066,7 @@
             <a:r>
               <a:rPr lang="en-US" sz="1200" dirty="0">
                 <a:solidFill>
-                  <a:srgbClr val="AFA9BE"/>
+                  <a:srgbClr val="C9C4D6"/>
                 </a:solidFill>
                 <a:latin typeface="Montserrat" pitchFamily="34" charset="0"/>
                 <a:ea typeface="Montserrat" pitchFamily="34" charset="-122"/>
@@ -13876,7 +14108,7 @@
             <a:lvl1pPr>
               <a:defRPr sz="850">
                 <a:solidFill>
-                  <a:srgbClr val="8A82A0"/>
+                  <a:srgbClr val="9A94AA"/>
                 </a:solidFill>
                 <a:latin typeface="Courier New"/>
                 <a:ea typeface="Courier New"/>
@@ -13975,9 +14207,14 @@
             </a:avLst>
           </a:prstGeom>
           <a:solidFill>
-            <a:srgbClr val="E8A857"/>
+            <a:srgbClr val="0B1A38"/>
           </a:solidFill>
-          <a:ln/>
+          <a:ln w="12700">
+            <a:solidFill>
+              <a:srgbClr val="6BA0F8"/>
+            </a:solidFill>
+            <a:prstDash val="solid"/>
+          </a:ln>
         </p:spPr>
       </p:sp>
       <p:sp>
@@ -14007,7 +14244,7 @@
             <a:r>
               <a:rPr lang="en-US" sz="900" b="1" spc="100" kern="0" dirty="0">
                 <a:solidFill>
-                  <a:srgbClr val="2A2010"/>
+                  <a:srgbClr val="6BA0F8"/>
                 </a:solidFill>
                 <a:latin typeface="Courier New" pitchFamily="34" charset="0"/>
                 <a:ea typeface="Courier New" pitchFamily="34" charset="-122"/>
@@ -14060,9 +14297,14 @@
             </a:avLst>
           </a:prstGeom>
           <a:solidFill>
-            <a:srgbClr val="102A20"/>
+            <a:srgbClr val="06180F"/>
           </a:solidFill>
-          <a:ln/>
+          <a:ln w="12700">
+            <a:solidFill>
+              <a:srgbClr val="3FCF8E"/>
+            </a:solidFill>
+            <a:prstDash val="solid"/>
+          </a:ln>
         </p:spPr>
       </p:sp>
       <p:sp>
@@ -14092,7 +14334,7 @@
             <a:r>
               <a:rPr lang="en-US" sz="1450" b="1" dirty="0">
                 <a:solidFill>
-                  <a:srgbClr val="5FD6A0"/>
+                  <a:srgbClr val="3FCF8E"/>
                 </a:solidFill>
                 <a:latin typeface="Montserrat" pitchFamily="34" charset="0"/>
                 <a:ea typeface="Montserrat" pitchFamily="34" charset="-122"/>
@@ -14134,7 +14376,7 @@
             <a:r>
               <a:rPr lang="en-US" sz="1200" dirty="0">
                 <a:solidFill>
-                  <a:srgbClr val="FFFFFF"/>
+                  <a:srgbClr val="C9C4D6"/>
                 </a:solidFill>
                 <a:latin typeface="Montserrat" pitchFamily="34" charset="0"/>
                 <a:ea typeface="Montserrat" pitchFamily="34" charset="-122"/>
@@ -14163,9 +14405,14 @@
             </a:avLst>
           </a:prstGeom>
           <a:solidFill>
-            <a:srgbClr val="1C1140"/>
+            <a:srgbClr val="1A0B3D"/>
           </a:solidFill>
-          <a:ln/>
+          <a:ln w="12700">
+            <a:solidFill>
+              <a:srgbClr val="5A05F4"/>
+            </a:solidFill>
+            <a:prstDash val="solid"/>
+          </a:ln>
         </p:spPr>
       </p:sp>
       <p:sp>
@@ -14195,7 +14442,7 @@
             <a:r>
               <a:rPr lang="en-US" sz="1450" b="1" dirty="0">
                 <a:solidFill>
-                  <a:srgbClr val="C9A6FF"/>
+                  <a:srgbClr val="A98BFF"/>
                 </a:solidFill>
                 <a:latin typeface="Montserrat" pitchFamily="34" charset="0"/>
                 <a:ea typeface="Montserrat" pitchFamily="34" charset="-122"/>
@@ -14237,7 +14484,7 @@
             <a:r>
               <a:rPr lang="en-US" sz="1200" dirty="0">
                 <a:solidFill>
-                  <a:srgbClr val="FFFFFF"/>
+                  <a:srgbClr val="C9C4D6"/>
                 </a:solidFill>
                 <a:latin typeface="Montserrat" pitchFamily="34" charset="0"/>
                 <a:ea typeface="Montserrat" pitchFamily="34" charset="-122"/>
@@ -14266,11 +14513,11 @@
             </a:avLst>
           </a:prstGeom>
           <a:solidFill>
-            <a:srgbClr val="17141F"/>
+            <a:srgbClr val="000000"/>
           </a:solidFill>
           <a:ln w="12700">
             <a:solidFill>
-              <a:srgbClr val="2E2A3A"/>
+              <a:srgbClr val="5E4F85"/>
             </a:solidFill>
             <a:prstDash val="solid"/>
           </a:ln>
@@ -14345,7 +14592,7 @@
             <a:r>
               <a:rPr lang="en-US" sz="1200" dirty="0">
                 <a:solidFill>
-                  <a:srgbClr val="AFA9BE"/>
+                  <a:srgbClr val="C9C4D6"/>
                 </a:solidFill>
                 <a:latin typeface="Montserrat" pitchFamily="34" charset="0"/>
                 <a:ea typeface="Montserrat" pitchFamily="34" charset="-122"/>
@@ -14374,11 +14621,11 @@
             </a:avLst>
           </a:prstGeom>
           <a:solidFill>
-            <a:srgbClr val="17141F"/>
+            <a:srgbClr val="000000"/>
           </a:solidFill>
           <a:ln w="12700">
             <a:solidFill>
-              <a:srgbClr val="2E2A3A"/>
+              <a:srgbClr val="5E4F85"/>
             </a:solidFill>
             <a:prstDash val="solid"/>
           </a:ln>
@@ -14456,7 +14703,7 @@
             <a:lvl1pPr>
               <a:defRPr sz="850">
                 <a:solidFill>
-                  <a:srgbClr val="8A82A0"/>
+                  <a:srgbClr val="9A94AA"/>
                 </a:solidFill>
                 <a:latin typeface="Courier New"/>
                 <a:ea typeface="Courier New"/>
@@ -14555,9 +14802,14 @@
             </a:avLst>
           </a:prstGeom>
           <a:solidFill>
-            <a:srgbClr val="E8A857"/>
+            <a:srgbClr val="0B1A38"/>
           </a:solidFill>
-          <a:ln/>
+          <a:ln w="12700">
+            <a:solidFill>
+              <a:srgbClr val="6BA0F8"/>
+            </a:solidFill>
+            <a:prstDash val="solid"/>
+          </a:ln>
         </p:spPr>
       </p:sp>
       <p:sp>
@@ -14587,7 +14839,7 @@
             <a:r>
               <a:rPr lang="en-US" sz="900" b="1" spc="100" kern="0" dirty="0">
                 <a:solidFill>
-                  <a:srgbClr val="2A2010"/>
+                  <a:srgbClr val="6BA0F8"/>
                 </a:solidFill>
                 <a:latin typeface="Courier New" pitchFamily="34" charset="0"/>
                 <a:ea typeface="Courier New" pitchFamily="34" charset="-122"/>
@@ -14640,11 +14892,11 @@
             </a:avLst>
           </a:prstGeom>
           <a:solidFill>
-            <a:srgbClr val="17141F"/>
+            <a:srgbClr val="000000"/>
           </a:solidFill>
           <a:ln w="12700">
             <a:solidFill>
-              <a:srgbClr val="2E2A3A"/>
+              <a:srgbClr val="5E4F85"/>
             </a:solidFill>
             <a:prstDash val="solid"/>
           </a:ln>
@@ -14667,11 +14919,11 @@
             </a:avLst>
           </a:prstGeom>
           <a:solidFill>
-            <a:srgbClr val="1C1140"/>
+            <a:srgbClr val="1A0B3D"/>
           </a:solidFill>
           <a:ln w="12700">
             <a:solidFill>
-              <a:srgbClr val="C9A6FF"/>
+              <a:srgbClr val="A98BFF"/>
             </a:solidFill>
             <a:prstDash val="solid"/>
           </a:ln>
@@ -14692,7 +14944,7 @@
             <a:avLst/>
           </a:prstGeom>
           <a:solidFill>
-            <a:srgbClr val="C9A6FF"/>
+            <a:srgbClr val="A98BFF"/>
           </a:solidFill>
           <a:ln/>
         </p:spPr>
@@ -14712,7 +14964,7 @@
             <a:avLst/>
           </a:prstGeom>
           <a:solidFill>
-            <a:srgbClr val="C9A6FF"/>
+            <a:srgbClr val="A98BFF"/>
           </a:solidFill>
           <a:ln/>
         </p:spPr>
@@ -14773,11 +15025,11 @@
             </a:avLst>
           </a:prstGeom>
           <a:solidFill>
-            <a:srgbClr val="1C1140"/>
+            <a:srgbClr val="1A0B3D"/>
           </a:solidFill>
           <a:ln w="12700">
             <a:solidFill>
-              <a:srgbClr val="C9A6FF"/>
+              <a:srgbClr val="A98BFF"/>
             </a:solidFill>
             <a:prstDash val="solid"/>
           </a:ln>
@@ -14798,7 +15050,7 @@
             <a:avLst/>
           </a:prstGeom>
           <a:solidFill>
-            <a:srgbClr val="C9A6FF"/>
+            <a:srgbClr val="A98BFF"/>
           </a:solidFill>
           <a:ln/>
         </p:spPr>
@@ -14818,7 +15070,7 @@
             <a:avLst/>
           </a:prstGeom>
           <a:solidFill>
-            <a:srgbClr val="C9A6FF"/>
+            <a:srgbClr val="A98BFF"/>
           </a:solidFill>
           <a:ln/>
         </p:spPr>
@@ -14879,11 +15131,11 @@
             </a:avLst>
           </a:prstGeom>
           <a:solidFill>
-            <a:srgbClr val="1C1140"/>
+            <a:srgbClr val="1A0B3D"/>
           </a:solidFill>
           <a:ln w="12700">
             <a:solidFill>
-              <a:srgbClr val="C9A6FF"/>
+              <a:srgbClr val="A98BFF"/>
             </a:solidFill>
             <a:prstDash val="solid"/>
           </a:ln>
@@ -14904,7 +15156,7 @@
             <a:avLst/>
           </a:prstGeom>
           <a:solidFill>
-            <a:srgbClr val="C9A6FF"/>
+            <a:srgbClr val="A98BFF"/>
           </a:solidFill>
           <a:ln/>
         </p:spPr>
@@ -14924,7 +15176,7 @@
             <a:avLst/>
           </a:prstGeom>
           <a:solidFill>
-            <a:srgbClr val="C9A6FF"/>
+            <a:srgbClr val="A98BFF"/>
           </a:solidFill>
           <a:ln/>
         </p:spPr>
@@ -14985,11 +15237,11 @@
             </a:avLst>
           </a:prstGeom>
           <a:solidFill>
-            <a:srgbClr val="1C1140"/>
+            <a:srgbClr val="1A0B3D"/>
           </a:solidFill>
           <a:ln w="12700">
             <a:solidFill>
-              <a:srgbClr val="C9A6FF"/>
+              <a:srgbClr val="A98BFF"/>
             </a:solidFill>
             <a:prstDash val="solid"/>
           </a:ln>
@@ -15010,7 +15262,7 @@
             <a:avLst/>
           </a:prstGeom>
           <a:solidFill>
-            <a:srgbClr val="C9A6FF"/>
+            <a:srgbClr val="A98BFF"/>
           </a:solidFill>
           <a:ln/>
         </p:spPr>
@@ -15030,7 +15282,7 @@
             <a:avLst/>
           </a:prstGeom>
           <a:solidFill>
-            <a:srgbClr val="C9A6FF"/>
+            <a:srgbClr val="A98BFF"/>
           </a:solidFill>
           <a:ln/>
         </p:spPr>
@@ -15101,7 +15353,7 @@
             <a:r>
               <a:rPr lang="en-US" sz="1200" i="1" dirty="0">
                 <a:solidFill>
-                  <a:srgbClr val="8A82A0"/>
+                  <a:srgbClr val="9A94AA"/>
                 </a:solidFill>
                 <a:latin typeface="Montserrat" pitchFamily="34" charset="0"/>
                 <a:ea typeface="Montserrat" pitchFamily="34" charset="-122"/>
@@ -15143,7 +15395,7 @@
             <a:lvl1pPr>
               <a:defRPr sz="850">
                 <a:solidFill>
-                  <a:srgbClr val="8A82A0"/>
+                  <a:srgbClr val="9A94AA"/>
                 </a:solidFill>
                 <a:latin typeface="Courier New"/>
                 <a:ea typeface="Courier New"/>
@@ -15242,9 +15494,14 @@
             </a:avLst>
           </a:prstGeom>
           <a:solidFill>
-            <a:srgbClr val="E8A857"/>
+            <a:srgbClr val="0B1A38"/>
           </a:solidFill>
-          <a:ln/>
+          <a:ln w="12700">
+            <a:solidFill>
+              <a:srgbClr val="6BA0F8"/>
+            </a:solidFill>
+            <a:prstDash val="solid"/>
+          </a:ln>
         </p:spPr>
       </p:sp>
       <p:sp>
@@ -15274,7 +15531,7 @@
             <a:r>
               <a:rPr lang="en-US" sz="900" b="1" spc="100" kern="0" dirty="0">
                 <a:solidFill>
-                  <a:srgbClr val="2A2010"/>
+                  <a:srgbClr val="6BA0F8"/>
                 </a:solidFill>
                 <a:latin typeface="Courier New" pitchFamily="34" charset="0"/>
                 <a:ea typeface="Courier New" pitchFamily="34" charset="-122"/>
@@ -15327,11 +15584,11 @@
             </a:avLst>
           </a:prstGeom>
           <a:solidFill>
-            <a:srgbClr val="17141F"/>
+            <a:srgbClr val="000000"/>
           </a:solidFill>
           <a:ln w="12700">
             <a:solidFill>
-              <a:srgbClr val="2E2A3A"/>
+              <a:srgbClr val="5E4F85"/>
             </a:solidFill>
             <a:prstDash val="solid"/>
           </a:ln>
@@ -15352,7 +15609,7 @@
             <a:avLst/>
           </a:prstGeom>
           <a:solidFill>
-            <a:srgbClr val="2E1418"/>
+            <a:srgbClr val="1A0808"/>
           </a:solidFill>
           <a:ln/>
         </p:spPr>
@@ -15372,7 +15629,7 @@
             <a:avLst/>
           </a:prstGeom>
           <a:solidFill>
-            <a:srgbClr val="FF7B7B"/>
+            <a:srgbClr val="FF6B6B"/>
           </a:solidFill>
           <a:ln/>
         </p:spPr>
@@ -15392,7 +15649,7 @@
             <a:avLst/>
           </a:prstGeom>
           <a:solidFill>
-            <a:srgbClr val="FF7B7B"/>
+            <a:srgbClr val="FF6B6B"/>
           </a:solidFill>
           <a:ln/>
         </p:spPr>
@@ -15438,7 +15695,7 @@
             <a:r>
               <a:rPr lang="en-US" sz="1200" dirty="0">
                 <a:solidFill>
-                  <a:srgbClr val="AFA9BE"/>
+                  <a:srgbClr val="C9C4D6"/>
                 </a:solidFill>
                 <a:latin typeface="Montserrat" pitchFamily="34" charset="0"/>
                 <a:ea typeface="Montserrat" pitchFamily="34" charset="-122"/>
@@ -15467,11 +15724,11 @@
             </a:avLst>
           </a:prstGeom>
           <a:solidFill>
-            <a:srgbClr val="17141F"/>
+            <a:srgbClr val="000000"/>
           </a:solidFill>
           <a:ln w="12700">
             <a:solidFill>
-              <a:srgbClr val="2E2A3A"/>
+              <a:srgbClr val="5E4F85"/>
             </a:solidFill>
             <a:prstDash val="solid"/>
           </a:ln>
@@ -15492,7 +15749,7 @@
             <a:avLst/>
           </a:prstGeom>
           <a:solidFill>
-            <a:srgbClr val="2E1418"/>
+            <a:srgbClr val="1A0808"/>
           </a:solidFill>
           <a:ln/>
         </p:spPr>
@@ -15512,7 +15769,7 @@
             <a:avLst/>
           </a:prstGeom>
           <a:solidFill>
-            <a:srgbClr val="FF7B7B"/>
+            <a:srgbClr val="FF6B6B"/>
           </a:solidFill>
           <a:ln/>
         </p:spPr>
@@ -15532,7 +15789,7 @@
             <a:avLst/>
           </a:prstGeom>
           <a:solidFill>
-            <a:srgbClr val="FF7B7B"/>
+            <a:srgbClr val="FF6B6B"/>
           </a:solidFill>
           <a:ln/>
         </p:spPr>
@@ -15578,7 +15835,7 @@
             <a:r>
               <a:rPr lang="en-US" sz="1200" dirty="0">
                 <a:solidFill>
-                  <a:srgbClr val="AFA9BE"/>
+                  <a:srgbClr val="C9C4D6"/>
                 </a:solidFill>
                 <a:latin typeface="Montserrat" pitchFamily="34" charset="0"/>
                 <a:ea typeface="Montserrat" pitchFamily="34" charset="-122"/>
@@ -15607,11 +15864,11 @@
             </a:avLst>
           </a:prstGeom>
           <a:solidFill>
-            <a:srgbClr val="17141F"/>
+            <a:srgbClr val="000000"/>
           </a:solidFill>
           <a:ln w="12700">
             <a:solidFill>
-              <a:srgbClr val="2E2A3A"/>
+              <a:srgbClr val="5E4F85"/>
             </a:solidFill>
             <a:prstDash val="solid"/>
           </a:ln>
@@ -15632,7 +15889,7 @@
             <a:avLst/>
           </a:prstGeom>
           <a:solidFill>
-            <a:srgbClr val="2E1418"/>
+            <a:srgbClr val="1A0808"/>
           </a:solidFill>
           <a:ln/>
         </p:spPr>
@@ -15652,7 +15909,7 @@
             <a:avLst/>
           </a:prstGeom>
           <a:solidFill>
-            <a:srgbClr val="FF7B7B"/>
+            <a:srgbClr val="FF6B6B"/>
           </a:solidFill>
           <a:ln/>
         </p:spPr>
@@ -15672,7 +15929,7 @@
             <a:avLst/>
           </a:prstGeom>
           <a:solidFill>
-            <a:srgbClr val="FF7B7B"/>
+            <a:srgbClr val="FF6B6B"/>
           </a:solidFill>
           <a:ln/>
         </p:spPr>
@@ -15718,7 +15975,7 @@
             <a:r>
               <a:rPr lang="en-US" sz="1200" dirty="0">
                 <a:solidFill>
-                  <a:srgbClr val="AFA9BE"/>
+                  <a:srgbClr val="C9C4D6"/>
                 </a:solidFill>
                 <a:latin typeface="Montserrat" pitchFamily="34" charset="0"/>
                 <a:ea typeface="Montserrat" pitchFamily="34" charset="-122"/>
@@ -15747,11 +16004,11 @@
             </a:avLst>
           </a:prstGeom>
           <a:solidFill>
-            <a:srgbClr val="17141F"/>
+            <a:srgbClr val="000000"/>
           </a:solidFill>
           <a:ln w="12700">
             <a:solidFill>
-              <a:srgbClr val="2E2A3A"/>
+              <a:srgbClr val="5E4F85"/>
             </a:solidFill>
             <a:prstDash val="solid"/>
           </a:ln>
@@ -15772,7 +16029,7 @@
             <a:avLst/>
           </a:prstGeom>
           <a:solidFill>
-            <a:srgbClr val="2E1418"/>
+            <a:srgbClr val="1A0808"/>
           </a:solidFill>
           <a:ln/>
         </p:spPr>
@@ -15792,7 +16049,7 @@
             <a:avLst/>
           </a:prstGeom>
           <a:solidFill>
-            <a:srgbClr val="FF7B7B"/>
+            <a:srgbClr val="FF6B6B"/>
           </a:solidFill>
           <a:ln/>
         </p:spPr>
@@ -15812,7 +16069,7 @@
             <a:avLst/>
           </a:prstGeom>
           <a:solidFill>
-            <a:srgbClr val="FF7B7B"/>
+            <a:srgbClr val="FF6B6B"/>
           </a:solidFill>
           <a:ln/>
         </p:spPr>
@@ -15858,7 +16115,7 @@
             <a:r>
               <a:rPr lang="en-US" sz="1200" dirty="0">
                 <a:solidFill>
-                  <a:srgbClr val="AFA9BE"/>
+                  <a:srgbClr val="C9C4D6"/>
                 </a:solidFill>
                 <a:latin typeface="Montserrat" pitchFamily="34" charset="0"/>
                 <a:ea typeface="Montserrat" pitchFamily="34" charset="-122"/>
@@ -15900,7 +16157,7 @@
             <a:lvl1pPr>
               <a:defRPr sz="850">
                 <a:solidFill>
-                  <a:srgbClr val="8A82A0"/>
+                  <a:srgbClr val="9A94AA"/>
                 </a:solidFill>
                 <a:latin typeface="Courier New"/>
                 <a:ea typeface="Courier New"/>
@@ -15999,7 +16256,7 @@
             </a:avLst>
           </a:prstGeom>
           <a:solidFill>
-            <a:srgbClr val="5FD6A0"/>
+            <a:srgbClr val="5A05F4"/>
           </a:solidFill>
           <a:ln/>
         </p:spPr>
@@ -16031,7 +16288,7 @@
             <a:r>
               <a:rPr lang="en-US" sz="900" b="1" spc="100" kern="0" dirty="0">
                 <a:solidFill>
-                  <a:srgbClr val="102A20"/>
+                  <a:srgbClr val="FFFFFF"/>
                 </a:solidFill>
                 <a:latin typeface="Courier New" pitchFamily="34" charset="0"/>
                 <a:ea typeface="Courier New" pitchFamily="34" charset="-122"/>
@@ -16084,11 +16341,11 @@
             </a:avLst>
           </a:prstGeom>
           <a:solidFill>
-            <a:srgbClr val="17141F"/>
+            <a:srgbClr val="000000"/>
           </a:solidFill>
           <a:ln w="12700">
             <a:solidFill>
-              <a:srgbClr val="2E2A3A"/>
+              <a:srgbClr val="5E4F85"/>
             </a:solidFill>
             <a:prstDash val="solid"/>
           </a:ln>
@@ -16163,7 +16420,7 @@
             <a:r>
               <a:rPr lang="en-US" sz="1200" dirty="0">
                 <a:solidFill>
-                  <a:srgbClr val="AFA9BE"/>
+                  <a:srgbClr val="C9C4D6"/>
                 </a:solidFill>
                 <a:latin typeface="Montserrat" pitchFamily="34" charset="0"/>
                 <a:ea typeface="Montserrat" pitchFamily="34" charset="-122"/>
@@ -16192,7 +16449,7 @@
             <a:r>
               <a:rPr lang="en-US" sz="1200" dirty="0">
                 <a:solidFill>
-                  <a:srgbClr val="AFA9BE"/>
+                  <a:srgbClr val="C9C4D6"/>
                 </a:solidFill>
                 <a:latin typeface="Montserrat" pitchFamily="34" charset="0"/>
                 <a:ea typeface="Montserrat" pitchFamily="34" charset="-122"/>
@@ -16221,7 +16478,7 @@
             <a:r>
               <a:rPr lang="en-US" sz="1200" dirty="0">
                 <a:solidFill>
-                  <a:srgbClr val="AFA9BE"/>
+                  <a:srgbClr val="C9C4D6"/>
                 </a:solidFill>
                 <a:latin typeface="Montserrat" pitchFamily="34" charset="0"/>
                 <a:ea typeface="Montserrat" pitchFamily="34" charset="-122"/>
@@ -16250,9 +16507,14 @@
             </a:avLst>
           </a:prstGeom>
           <a:solidFill>
-            <a:srgbClr val="2A2010"/>
+            <a:srgbClr val="0B1A38"/>
           </a:solidFill>
-          <a:ln/>
+          <a:ln w="12700">
+            <a:solidFill>
+              <a:srgbClr val="6BA0F8"/>
+            </a:solidFill>
+            <a:prstDash val="solid"/>
+          </a:ln>
         </p:spPr>
       </p:sp>
       <p:sp>
@@ -16282,7 +16544,7 @@
             <a:r>
               <a:rPr lang="en-US" sz="1450" b="1" dirty="0">
                 <a:solidFill>
-                  <a:srgbClr val="E8A857"/>
+                  <a:srgbClr val="6BA0F8"/>
                 </a:solidFill>
                 <a:latin typeface="Montserrat" pitchFamily="34" charset="0"/>
                 <a:ea typeface="Montserrat" pitchFamily="34" charset="-122"/>
@@ -16324,7 +16586,7 @@
             <a:r>
               <a:rPr lang="en-US" sz="1200" dirty="0">
                 <a:solidFill>
-                  <a:srgbClr val="FFFFFF"/>
+                  <a:srgbClr val="C9C4D6"/>
                 </a:solidFill>
                 <a:latin typeface="Montserrat" pitchFamily="34" charset="0"/>
                 <a:ea typeface="Montserrat" pitchFamily="34" charset="-122"/>
@@ -16353,11 +16615,11 @@
             </a:avLst>
           </a:prstGeom>
           <a:solidFill>
-            <a:srgbClr val="17141F"/>
+            <a:srgbClr val="000000"/>
           </a:solidFill>
           <a:ln w="19050">
             <a:solidFill>
-              <a:srgbClr val="C9A6FF"/>
+              <a:srgbClr val="A98BFF"/>
             </a:solidFill>
             <a:prstDash val="solid"/>
           </a:ln>
@@ -16390,7 +16652,7 @@
             <a:r>
               <a:rPr lang="en-US" sz="1500" b="1" dirty="0">
                 <a:solidFill>
-                  <a:srgbClr val="C9A6FF"/>
+                  <a:srgbClr val="A98BFF"/>
                 </a:solidFill>
                 <a:latin typeface="Montserrat" pitchFamily="34" charset="0"/>
                 <a:ea typeface="Montserrat" pitchFamily="34" charset="-122"/>
@@ -16471,7 +16733,7 @@
             <a:lvl1pPr>
               <a:defRPr sz="850">
                 <a:solidFill>
-                  <a:srgbClr val="8A82A0"/>
+                  <a:srgbClr val="9A94AA"/>
                 </a:solidFill>
                 <a:latin typeface="Courier New"/>
                 <a:ea typeface="Courier New"/>
@@ -16580,7 +16842,7 @@
             <a:r>
               <a:rPr lang="en-US" sz="1100" b="1" spc="300" kern="0" dirty="0">
                 <a:solidFill>
-                  <a:srgbClr val="C9B8FB"/>
+                  <a:srgbClr val="C4B3F5"/>
                 </a:solidFill>
                 <a:latin typeface="Courier New" pitchFamily="34" charset="0"/>
                 <a:ea typeface="Courier New" pitchFamily="34" charset="-122"/>
@@ -16919,11 +17181,11 @@
             </a:avLst>
           </a:prstGeom>
           <a:solidFill>
-            <a:srgbClr val="17141F"/>
+            <a:srgbClr val="000000"/>
           </a:solidFill>
           <a:ln w="12700">
             <a:solidFill>
-              <a:srgbClr val="2E2A3A"/>
+              <a:srgbClr val="5E4F85"/>
             </a:solidFill>
             <a:prstDash val="solid"/>
           </a:ln>
@@ -16956,7 +17218,7 @@
             <a:r>
               <a:rPr lang="en-US" sz="1500" b="1" dirty="0">
                 <a:solidFill>
-                  <a:srgbClr val="C9A6FF"/>
+                  <a:srgbClr val="A98BFF"/>
                 </a:solidFill>
                 <a:latin typeface="Montserrat" pitchFamily="34" charset="0"/>
                 <a:ea typeface="Montserrat" pitchFamily="34" charset="-122"/>
@@ -17091,9 +17353,14 @@
             </a:avLst>
           </a:prstGeom>
           <a:solidFill>
-            <a:srgbClr val="C9A6FF"/>
+            <a:srgbClr val="1A0B3D"/>
           </a:solidFill>
-          <a:ln/>
+          <a:ln w="12700">
+            <a:solidFill>
+              <a:srgbClr val="5A05F4"/>
+            </a:solidFill>
+            <a:prstDash val="solid"/>
+          </a:ln>
         </p:spPr>
       </p:sp>
       <p:sp>
@@ -17123,7 +17390,7 @@
             <a:r>
               <a:rPr lang="en-US" sz="900" b="1" spc="100" kern="0" dirty="0">
                 <a:solidFill>
-                  <a:srgbClr val="1C1140"/>
+                  <a:srgbClr val="A98BFF"/>
                 </a:solidFill>
                 <a:latin typeface="Courier New" pitchFamily="34" charset="0"/>
                 <a:ea typeface="Courier New" pitchFamily="34" charset="-122"/>
@@ -17176,11 +17443,11 @@
             </a:avLst>
           </a:prstGeom>
           <a:solidFill>
-            <a:srgbClr val="17141F"/>
+            <a:srgbClr val="000000"/>
           </a:solidFill>
           <a:ln w="12700">
             <a:solidFill>
-              <a:srgbClr val="2E2A3A"/>
+              <a:srgbClr val="5E4F85"/>
             </a:solidFill>
             <a:prstDash val="solid"/>
           </a:ln>
@@ -17301,11 +17568,11 @@
             </a:avLst>
           </a:prstGeom>
           <a:solidFill>
-            <a:srgbClr val="17141F"/>
+            <a:srgbClr val="000000"/>
           </a:solidFill>
           <a:ln w="12700">
             <a:solidFill>
-              <a:srgbClr val="2E2A3A"/>
+              <a:srgbClr val="5E4F85"/>
             </a:solidFill>
             <a:prstDash val="solid"/>
           </a:ln>
@@ -17426,11 +17693,11 @@
             </a:avLst>
           </a:prstGeom>
           <a:solidFill>
-            <a:srgbClr val="17141F"/>
+            <a:srgbClr val="000000"/>
           </a:solidFill>
           <a:ln w="12700">
             <a:solidFill>
-              <a:srgbClr val="2E2A3A"/>
+              <a:srgbClr val="5E4F85"/>
             </a:solidFill>
             <a:prstDash val="solid"/>
           </a:ln>
@@ -17551,11 +17818,11 @@
             </a:avLst>
           </a:prstGeom>
           <a:solidFill>
-            <a:srgbClr val="17141F"/>
+            <a:srgbClr val="000000"/>
           </a:solidFill>
           <a:ln w="12700">
             <a:solidFill>
-              <a:srgbClr val="2E2A3A"/>
+              <a:srgbClr val="5E4F85"/>
             </a:solidFill>
             <a:prstDash val="solid"/>
           </a:ln>
@@ -17676,11 +17943,11 @@
             </a:avLst>
           </a:prstGeom>
           <a:solidFill>
-            <a:srgbClr val="17141F"/>
+            <a:srgbClr val="000000"/>
           </a:solidFill>
           <a:ln w="12700">
             <a:solidFill>
-              <a:srgbClr val="2E2A3A"/>
+              <a:srgbClr val="5E4F85"/>
             </a:solidFill>
             <a:prstDash val="solid"/>
           </a:ln>
@@ -17801,11 +18068,11 @@
             </a:avLst>
           </a:prstGeom>
           <a:solidFill>
-            <a:srgbClr val="17141F"/>
+            <a:srgbClr val="000000"/>
           </a:solidFill>
           <a:ln w="12700">
             <a:solidFill>
-              <a:srgbClr val="2E2A3A"/>
+              <a:srgbClr val="5E4F85"/>
             </a:solidFill>
             <a:prstDash val="solid"/>
           </a:ln>
@@ -17926,11 +18193,11 @@
             </a:avLst>
           </a:prstGeom>
           <a:solidFill>
-            <a:srgbClr val="17141F"/>
+            <a:srgbClr val="000000"/>
           </a:solidFill>
           <a:ln w="12700">
             <a:solidFill>
-              <a:srgbClr val="2E2A3A"/>
+              <a:srgbClr val="5E4F85"/>
             </a:solidFill>
             <a:prstDash val="solid"/>
           </a:ln>
@@ -18051,11 +18318,11 @@
             </a:avLst>
           </a:prstGeom>
           <a:solidFill>
-            <a:srgbClr val="17141F"/>
+            <a:srgbClr val="000000"/>
           </a:solidFill>
           <a:ln w="12700">
             <a:solidFill>
-              <a:srgbClr val="2E2A3A"/>
+              <a:srgbClr val="5E4F85"/>
             </a:solidFill>
             <a:prstDash val="solid"/>
           </a:ln>
@@ -18176,9 +18443,14 @@
             </a:avLst>
           </a:prstGeom>
           <a:solidFill>
-            <a:srgbClr val="2A2010"/>
+            <a:srgbClr val="0B1A38"/>
           </a:solidFill>
-          <a:ln/>
+          <a:ln w="12700">
+            <a:solidFill>
+              <a:srgbClr val="6BA0F8"/>
+            </a:solidFill>
+            <a:prstDash val="solid"/>
+          </a:ln>
         </p:spPr>
       </p:sp>
       <p:sp>
@@ -18196,7 +18468,7 @@
             <a:avLst/>
           </a:prstGeom>
           <a:solidFill>
-            <a:srgbClr val="E8A857"/>
+            <a:srgbClr val="5A05F4"/>
           </a:solidFill>
           <a:ln/>
         </p:spPr>
@@ -18228,7 +18500,7 @@
             <a:r>
               <a:rPr lang="en-US" sz="1200" b="1" dirty="0">
                 <a:solidFill>
-                  <a:srgbClr val="2A2010"/>
+                  <a:srgbClr val="FFFFFF"/>
                 </a:solidFill>
                 <a:latin typeface="Courier New" pitchFamily="34" charset="0"/>
                 <a:ea typeface="Courier New" pitchFamily="34" charset="-122"/>
@@ -18267,7 +18539,7 @@
             <a:r>
               <a:rPr lang="en-US" sz="1450" b="1" dirty="0">
                 <a:solidFill>
-                  <a:srgbClr val="E8A857"/>
+                  <a:srgbClr val="6BA0F8"/>
                 </a:solidFill>
                 <a:latin typeface="Montserrat" pitchFamily="34" charset="0"/>
                 <a:ea typeface="Montserrat" pitchFamily="34" charset="-122"/>
@@ -18296,11 +18568,11 @@
             </a:avLst>
           </a:prstGeom>
           <a:solidFill>
-            <a:srgbClr val="17141F"/>
+            <a:srgbClr val="000000"/>
           </a:solidFill>
           <a:ln w="12700">
             <a:solidFill>
-              <a:srgbClr val="2E2A3A"/>
+              <a:srgbClr val="5E4F85"/>
             </a:solidFill>
             <a:prstDash val="solid"/>
           </a:ln>
@@ -18421,11 +18693,11 @@
             </a:avLst>
           </a:prstGeom>
           <a:solidFill>
-            <a:srgbClr val="17141F"/>
+            <a:srgbClr val="000000"/>
           </a:solidFill>
           <a:ln w="12700">
             <a:solidFill>
-              <a:srgbClr val="2E2A3A"/>
+              <a:srgbClr val="5E4F85"/>
             </a:solidFill>
             <a:prstDash val="solid"/>
           </a:ln>
@@ -18546,11 +18818,11 @@
             </a:avLst>
           </a:prstGeom>
           <a:solidFill>
-            <a:srgbClr val="17141F"/>
+            <a:srgbClr val="000000"/>
           </a:solidFill>
           <a:ln w="12700">
             <a:solidFill>
-              <a:srgbClr val="2E2A3A"/>
+              <a:srgbClr val="5E4F85"/>
             </a:solidFill>
             <a:prstDash val="solid"/>
           </a:ln>
@@ -18628,7 +18900,7 @@
             <a:lvl1pPr>
               <a:defRPr sz="850">
                 <a:solidFill>
-                  <a:srgbClr val="8A82A0"/>
+                  <a:srgbClr val="9A94AA"/>
                 </a:solidFill>
                 <a:latin typeface="Courier New"/>
                 <a:ea typeface="Courier New"/>
@@ -18740,7 +19012,7 @@
             <a:r>
               <a:rPr lang="en-US" sz="1300" dirty="0">
                 <a:solidFill>
-                  <a:srgbClr val="AFA9BE"/>
+                  <a:srgbClr val="C9C4D6"/>
                 </a:solidFill>
                 <a:latin typeface="Montserrat" pitchFamily="34" charset="0"/>
                 <a:ea typeface="Montserrat" pitchFamily="34" charset="-122"/>
@@ -18769,9 +19041,14 @@
             </a:avLst>
           </a:prstGeom>
           <a:solidFill>
-            <a:srgbClr val="C9A6FF"/>
+            <a:srgbClr val="1A0B3D"/>
           </a:solidFill>
-          <a:ln/>
+          <a:ln w="12700">
+            <a:solidFill>
+              <a:srgbClr val="5A05F4"/>
+            </a:solidFill>
+            <a:prstDash val="solid"/>
+          </a:ln>
         </p:spPr>
       </p:sp>
       <p:sp>
@@ -18801,7 +19078,7 @@
             <a:r>
               <a:rPr lang="en-US" sz="900" b="1" spc="100" kern="0" dirty="0">
                 <a:solidFill>
-                  <a:srgbClr val="1C1140"/>
+                  <a:srgbClr val="A98BFF"/>
                 </a:solidFill>
                 <a:latin typeface="Courier New" pitchFamily="34" charset="0"/>
                 <a:ea typeface="Courier New" pitchFamily="34" charset="-122"/>
@@ -18854,11 +19131,11 @@
             </a:avLst>
           </a:prstGeom>
           <a:solidFill>
-            <a:srgbClr val="17141F"/>
+            <a:srgbClr val="000000"/>
           </a:solidFill>
           <a:ln w="12700">
             <a:solidFill>
-              <a:srgbClr val="2E2A3A"/>
+              <a:srgbClr val="5E4F85"/>
             </a:solidFill>
             <a:prstDash val="solid"/>
           </a:ln>
@@ -18891,7 +19168,7 @@
             <a:r>
               <a:rPr lang="en-US" sz="1250" b="1" dirty="0">
                 <a:solidFill>
-                  <a:srgbClr val="C9A6FF"/>
+                  <a:srgbClr val="A98BFF"/>
                 </a:solidFill>
                 <a:latin typeface="Courier New" pitchFamily="34" charset="0"/>
                 <a:ea typeface="Courier New" pitchFamily="34" charset="-122"/>
@@ -18933,7 +19210,7 @@
             <a:r>
               <a:rPr lang="en-US" sz="1150" dirty="0">
                 <a:solidFill>
-                  <a:srgbClr val="AFA9BE"/>
+                  <a:srgbClr val="C9C4D6"/>
                 </a:solidFill>
                 <a:latin typeface="Montserrat" pitchFamily="34" charset="0"/>
                 <a:ea typeface="Montserrat" pitchFamily="34" charset="-122"/>
@@ -18962,11 +19239,11 @@
             </a:avLst>
           </a:prstGeom>
           <a:solidFill>
-            <a:srgbClr val="17141F"/>
+            <a:srgbClr val="000000"/>
           </a:solidFill>
           <a:ln w="12700">
             <a:solidFill>
-              <a:srgbClr val="2E2A3A"/>
+              <a:srgbClr val="5E4F85"/>
             </a:solidFill>
             <a:prstDash val="solid"/>
           </a:ln>
@@ -18999,7 +19276,7 @@
             <a:r>
               <a:rPr lang="en-US" sz="1250" b="1" dirty="0">
                 <a:solidFill>
-                  <a:srgbClr val="C9A6FF"/>
+                  <a:srgbClr val="A98BFF"/>
                 </a:solidFill>
                 <a:latin typeface="Courier New" pitchFamily="34" charset="0"/>
                 <a:ea typeface="Courier New" pitchFamily="34" charset="-122"/>
@@ -19041,7 +19318,7 @@
             <a:r>
               <a:rPr lang="en-US" sz="1150" dirty="0">
                 <a:solidFill>
-                  <a:srgbClr val="AFA9BE"/>
+                  <a:srgbClr val="C9C4D6"/>
                 </a:solidFill>
                 <a:latin typeface="Montserrat" pitchFamily="34" charset="0"/>
                 <a:ea typeface="Montserrat" pitchFamily="34" charset="-122"/>
@@ -19070,11 +19347,11 @@
             </a:avLst>
           </a:prstGeom>
           <a:solidFill>
-            <a:srgbClr val="17141F"/>
+            <a:srgbClr val="000000"/>
           </a:solidFill>
           <a:ln w="12700">
             <a:solidFill>
-              <a:srgbClr val="2E2A3A"/>
+              <a:srgbClr val="5E4F85"/>
             </a:solidFill>
             <a:prstDash val="solid"/>
           </a:ln>
@@ -19107,7 +19384,7 @@
             <a:r>
               <a:rPr lang="en-US" sz="1250" b="1" dirty="0">
                 <a:solidFill>
-                  <a:srgbClr val="C9A6FF"/>
+                  <a:srgbClr val="A98BFF"/>
                 </a:solidFill>
                 <a:latin typeface="Courier New" pitchFamily="34" charset="0"/>
                 <a:ea typeface="Courier New" pitchFamily="34" charset="-122"/>
@@ -19149,7 +19426,7 @@
             <a:r>
               <a:rPr lang="en-US" sz="1150" dirty="0">
                 <a:solidFill>
-                  <a:srgbClr val="AFA9BE"/>
+                  <a:srgbClr val="C9C4D6"/>
                 </a:solidFill>
                 <a:latin typeface="Montserrat" pitchFamily="34" charset="0"/>
                 <a:ea typeface="Montserrat" pitchFamily="34" charset="-122"/>
@@ -19178,11 +19455,11 @@
             </a:avLst>
           </a:prstGeom>
           <a:solidFill>
-            <a:srgbClr val="17141F"/>
+            <a:srgbClr val="000000"/>
           </a:solidFill>
           <a:ln w="12700">
             <a:solidFill>
-              <a:srgbClr val="2E2A3A"/>
+              <a:srgbClr val="5E4F85"/>
             </a:solidFill>
             <a:prstDash val="solid"/>
           </a:ln>
@@ -19215,7 +19492,7 @@
             <a:r>
               <a:rPr lang="en-US" sz="1250" b="1" dirty="0">
                 <a:solidFill>
-                  <a:srgbClr val="C9A6FF"/>
+                  <a:srgbClr val="A98BFF"/>
                 </a:solidFill>
                 <a:latin typeface="Courier New" pitchFamily="34" charset="0"/>
                 <a:ea typeface="Courier New" pitchFamily="34" charset="-122"/>
@@ -19257,7 +19534,7 @@
             <a:r>
               <a:rPr lang="en-US" sz="1150" dirty="0">
                 <a:solidFill>
-                  <a:srgbClr val="AFA9BE"/>
+                  <a:srgbClr val="C9C4D6"/>
                 </a:solidFill>
                 <a:latin typeface="Montserrat" pitchFamily="34" charset="0"/>
                 <a:ea typeface="Montserrat" pitchFamily="34" charset="-122"/>
@@ -19286,11 +19563,11 @@
             </a:avLst>
           </a:prstGeom>
           <a:solidFill>
-            <a:srgbClr val="17141F"/>
+            <a:srgbClr val="000000"/>
           </a:solidFill>
           <a:ln w="12700">
             <a:solidFill>
-              <a:srgbClr val="2E2A3A"/>
+              <a:srgbClr val="5E4F85"/>
             </a:solidFill>
             <a:prstDash val="solid"/>
           </a:ln>
@@ -19323,7 +19600,7 @@
             <a:r>
               <a:rPr lang="en-US" sz="1250" b="1" dirty="0">
                 <a:solidFill>
-                  <a:srgbClr val="C9A6FF"/>
+                  <a:srgbClr val="A98BFF"/>
                 </a:solidFill>
                 <a:latin typeface="Courier New" pitchFamily="34" charset="0"/>
                 <a:ea typeface="Courier New" pitchFamily="34" charset="-122"/>
@@ -19365,7 +19642,7 @@
             <a:r>
               <a:rPr lang="en-US" sz="1150" dirty="0">
                 <a:solidFill>
-                  <a:srgbClr val="AFA9BE"/>
+                  <a:srgbClr val="C9C4D6"/>
                 </a:solidFill>
                 <a:latin typeface="Montserrat" pitchFamily="34" charset="0"/>
                 <a:ea typeface="Montserrat" pitchFamily="34" charset="-122"/>
@@ -19394,11 +19671,11 @@
             </a:avLst>
           </a:prstGeom>
           <a:solidFill>
-            <a:srgbClr val="17141F"/>
+            <a:srgbClr val="000000"/>
           </a:solidFill>
           <a:ln w="12700">
             <a:solidFill>
-              <a:srgbClr val="2E2A3A"/>
+              <a:srgbClr val="5E4F85"/>
             </a:solidFill>
             <a:prstDash val="solid"/>
           </a:ln>
@@ -19431,7 +19708,7 @@
             <a:r>
               <a:rPr lang="en-US" sz="1250" b="1" dirty="0">
                 <a:solidFill>
-                  <a:srgbClr val="C9A6FF"/>
+                  <a:srgbClr val="A98BFF"/>
                 </a:solidFill>
                 <a:latin typeface="Courier New" pitchFamily="34" charset="0"/>
                 <a:ea typeface="Courier New" pitchFamily="34" charset="-122"/>
@@ -19473,7 +19750,7 @@
             <a:r>
               <a:rPr lang="en-US" sz="1150" dirty="0">
                 <a:solidFill>
-                  <a:srgbClr val="AFA9BE"/>
+                  <a:srgbClr val="C9C4D6"/>
                 </a:solidFill>
                 <a:latin typeface="Montserrat" pitchFamily="34" charset="0"/>
                 <a:ea typeface="Montserrat" pitchFamily="34" charset="-122"/>
@@ -19502,11 +19779,11 @@
             </a:avLst>
           </a:prstGeom>
           <a:solidFill>
-            <a:srgbClr val="17141F"/>
+            <a:srgbClr val="000000"/>
           </a:solidFill>
           <a:ln w="12700">
             <a:solidFill>
-              <a:srgbClr val="2E2A3A"/>
+              <a:srgbClr val="5E4F85"/>
             </a:solidFill>
             <a:prstDash val="solid"/>
           </a:ln>
@@ -19584,7 +19861,7 @@
             <a:lvl1pPr>
               <a:defRPr sz="850">
                 <a:solidFill>
-                  <a:srgbClr val="8A82A0"/>
+                  <a:srgbClr val="9A94AA"/>
                 </a:solidFill>
                 <a:latin typeface="Courier New"/>
                 <a:ea typeface="Courier New"/>
@@ -19654,7 +19931,7 @@
             <a:r>
               <a:rPr lang="en-US" sz="2600" b="1" dirty="0">
                 <a:solidFill>
-                  <a:srgbClr val="C9A6FF"/>
+                  <a:srgbClr val="A98BFF"/>
                 </a:solidFill>
                 <a:latin typeface="Courier New" pitchFamily="34" charset="0"/>
                 <a:ea typeface="Courier New" pitchFamily="34" charset="-122"/>
@@ -19722,9 +19999,14 @@
             </a:avLst>
           </a:prstGeom>
           <a:solidFill>
-            <a:srgbClr val="C9A6FF"/>
+            <a:srgbClr val="1A0B3D"/>
           </a:solidFill>
-          <a:ln/>
+          <a:ln w="12700">
+            <a:solidFill>
+              <a:srgbClr val="5A05F4"/>
+            </a:solidFill>
+            <a:prstDash val="solid"/>
+          </a:ln>
         </p:spPr>
       </p:sp>
       <p:sp>
@@ -19754,7 +20036,7 @@
             <a:r>
               <a:rPr lang="en-US" sz="900" b="1" spc="100" kern="0" dirty="0">
                 <a:solidFill>
-                  <a:srgbClr val="1C1140"/>
+                  <a:srgbClr val="A98BFF"/>
                 </a:solidFill>
                 <a:latin typeface="Courier New" pitchFamily="34" charset="0"/>
                 <a:ea typeface="Courier New" pitchFamily="34" charset="-122"/>
@@ -19807,9 +20089,14 @@
             </a:avLst>
           </a:prstGeom>
           <a:solidFill>
-            <a:srgbClr val="2E1418"/>
+            <a:srgbClr val="1A0808"/>
           </a:solidFill>
-          <a:ln/>
+          <a:ln w="12700">
+            <a:solidFill>
+              <a:srgbClr val="FF6B6B"/>
+            </a:solidFill>
+            <a:prstDash val="solid"/>
+          </a:ln>
         </p:spPr>
       </p:sp>
       <p:sp>
@@ -19827,7 +20114,7 @@
             <a:avLst/>
           </a:prstGeom>
           <a:solidFill>
-            <a:srgbClr val="FF7B7B"/>
+            <a:srgbClr val="5A05F4"/>
           </a:solidFill>
           <a:ln/>
         </p:spPr>
@@ -19859,7 +20146,7 @@
             <a:r>
               <a:rPr lang="en-US" sz="1200" b="1" dirty="0">
                 <a:solidFill>
-                  <a:srgbClr val="2E1418"/>
+                  <a:srgbClr val="FFFFFF"/>
                 </a:solidFill>
                 <a:latin typeface="Courier New" pitchFamily="34" charset="0"/>
                 <a:ea typeface="Courier New" pitchFamily="34" charset="-122"/>
@@ -19898,7 +20185,7 @@
             <a:r>
               <a:rPr lang="en-US" sz="1450" b="1" dirty="0">
                 <a:solidFill>
-                  <a:srgbClr val="FF7B7B"/>
+                  <a:srgbClr val="FF6B6B"/>
                 </a:solidFill>
                 <a:latin typeface="Montserrat" pitchFamily="34" charset="0"/>
                 <a:ea typeface="Montserrat" pitchFamily="34" charset="-122"/>
@@ -19940,7 +20227,7 @@
             <a:r>
               <a:rPr lang="en-US" sz="1200" dirty="0">
                 <a:solidFill>
-                  <a:srgbClr val="FFFFFF"/>
+                  <a:srgbClr val="C9C4D6"/>
                 </a:solidFill>
                 <a:latin typeface="Montserrat" pitchFamily="34" charset="0"/>
                 <a:ea typeface="Montserrat" pitchFamily="34" charset="-122"/>
@@ -19969,9 +20256,14 @@
             </a:avLst>
           </a:prstGeom>
           <a:solidFill>
-            <a:srgbClr val="2E1418"/>
+            <a:srgbClr val="1A0808"/>
           </a:solidFill>
-          <a:ln/>
+          <a:ln w="12700">
+            <a:solidFill>
+              <a:srgbClr val="FF6B6B"/>
+            </a:solidFill>
+            <a:prstDash val="solid"/>
+          </a:ln>
         </p:spPr>
       </p:sp>
       <p:sp>
@@ -19989,7 +20281,7 @@
             <a:avLst/>
           </a:prstGeom>
           <a:solidFill>
-            <a:srgbClr val="FF7B7B"/>
+            <a:srgbClr val="5A05F4"/>
           </a:solidFill>
           <a:ln/>
         </p:spPr>
@@ -20021,7 +20313,7 @@
             <a:r>
               <a:rPr lang="en-US" sz="1200" b="1" dirty="0">
                 <a:solidFill>
-                  <a:srgbClr val="2E1418"/>
+                  <a:srgbClr val="FFFFFF"/>
                 </a:solidFill>
                 <a:latin typeface="Courier New" pitchFamily="34" charset="0"/>
                 <a:ea typeface="Courier New" pitchFamily="34" charset="-122"/>
@@ -20060,7 +20352,7 @@
             <a:r>
               <a:rPr lang="en-US" sz="1450" b="1" dirty="0">
                 <a:solidFill>
-                  <a:srgbClr val="FF7B7B"/>
+                  <a:srgbClr val="FF6B6B"/>
                 </a:solidFill>
                 <a:latin typeface="Montserrat" pitchFamily="34" charset="0"/>
                 <a:ea typeface="Montserrat" pitchFamily="34" charset="-122"/>
@@ -20102,7 +20394,7 @@
             <a:r>
               <a:rPr lang="en-US" sz="1200" dirty="0">
                 <a:solidFill>
-                  <a:srgbClr val="FFFFFF"/>
+                  <a:srgbClr val="C9C4D6"/>
                 </a:solidFill>
                 <a:latin typeface="Montserrat" pitchFamily="34" charset="0"/>
                 <a:ea typeface="Montserrat" pitchFamily="34" charset="-122"/>
@@ -20131,9 +20423,14 @@
             </a:avLst>
           </a:prstGeom>
           <a:solidFill>
-            <a:srgbClr val="2A2010"/>
+            <a:srgbClr val="0B1A38"/>
           </a:solidFill>
-          <a:ln/>
+          <a:ln w="12700">
+            <a:solidFill>
+              <a:srgbClr val="6BA0F8"/>
+            </a:solidFill>
+            <a:prstDash val="solid"/>
+          </a:ln>
         </p:spPr>
       </p:sp>
       <p:sp>
@@ -20151,7 +20448,7 @@
             <a:avLst/>
           </a:prstGeom>
           <a:solidFill>
-            <a:srgbClr val="E8A857"/>
+            <a:srgbClr val="5A05F4"/>
           </a:solidFill>
           <a:ln/>
         </p:spPr>
@@ -20183,7 +20480,7 @@
             <a:r>
               <a:rPr lang="en-US" sz="1200" b="1" dirty="0">
                 <a:solidFill>
-                  <a:srgbClr val="2A2010"/>
+                  <a:srgbClr val="FFFFFF"/>
                 </a:solidFill>
                 <a:latin typeface="Courier New" pitchFamily="34" charset="0"/>
                 <a:ea typeface="Courier New" pitchFamily="34" charset="-122"/>
@@ -20222,7 +20519,7 @@
             <a:r>
               <a:rPr lang="en-US" sz="1450" b="1" dirty="0">
                 <a:solidFill>
-                  <a:srgbClr val="E8A857"/>
+                  <a:srgbClr val="6BA0F8"/>
                 </a:solidFill>
                 <a:latin typeface="Montserrat" pitchFamily="34" charset="0"/>
                 <a:ea typeface="Montserrat" pitchFamily="34" charset="-122"/>
@@ -20264,7 +20561,7 @@
             <a:r>
               <a:rPr lang="en-US" sz="1200" dirty="0">
                 <a:solidFill>
-                  <a:srgbClr val="FFFFFF"/>
+                  <a:srgbClr val="C9C4D6"/>
                 </a:solidFill>
                 <a:latin typeface="Montserrat" pitchFamily="34" charset="0"/>
                 <a:ea typeface="Montserrat" pitchFamily="34" charset="-122"/>
@@ -20409,7 +20706,7 @@
             <a:lvl1pPr>
               <a:defRPr sz="850">
                 <a:solidFill>
-                  <a:srgbClr val="8A82A0"/>
+                  <a:srgbClr val="9A94AA"/>
                 </a:solidFill>
                 <a:latin typeface="Courier New"/>
                 <a:ea typeface="Courier New"/>
@@ -20479,7 +20776,7 @@
             <a:r>
               <a:rPr lang="en-US" sz="2600" b="1" dirty="0">
                 <a:solidFill>
-                  <a:srgbClr val="C9A6FF"/>
+                  <a:srgbClr val="A98BFF"/>
                 </a:solidFill>
                 <a:latin typeface="Courier New" pitchFamily="34" charset="0"/>
                 <a:ea typeface="Courier New" pitchFamily="34" charset="-122"/>
@@ -20547,9 +20844,14 @@
             </a:avLst>
           </a:prstGeom>
           <a:solidFill>
-            <a:srgbClr val="C9A6FF"/>
+            <a:srgbClr val="1A0B3D"/>
           </a:solidFill>
-          <a:ln/>
+          <a:ln w="12700">
+            <a:solidFill>
+              <a:srgbClr val="5A05F4"/>
+            </a:solidFill>
+            <a:prstDash val="solid"/>
+          </a:ln>
         </p:spPr>
       </p:sp>
       <p:sp>
@@ -20579,7 +20881,7 @@
             <a:r>
               <a:rPr lang="en-US" sz="900" b="1" spc="100" kern="0" dirty="0">
                 <a:solidFill>
-                  <a:srgbClr val="1C1140"/>
+                  <a:srgbClr val="A98BFF"/>
                 </a:solidFill>
                 <a:latin typeface="Courier New" pitchFamily="34" charset="0"/>
                 <a:ea typeface="Courier New" pitchFamily="34" charset="-122"/>
@@ -20771,11 +21073,11 @@
             </a:avLst>
           </a:prstGeom>
           <a:solidFill>
-            <a:srgbClr val="17141F"/>
+            <a:srgbClr val="000000"/>
           </a:solidFill>
           <a:ln w="12700">
             <a:solidFill>
-              <a:srgbClr val="2E2A3A"/>
+              <a:srgbClr val="5E4F85"/>
             </a:solidFill>
             <a:prstDash val="solid"/>
           </a:ln>
@@ -20808,7 +21110,7 @@
             <a:r>
               <a:rPr lang="en-US" sz="1050" b="1" spc="200" kern="0" dirty="0">
                 <a:solidFill>
-                  <a:srgbClr val="8A82A0"/>
+                  <a:srgbClr val="9A94AA"/>
                 </a:solidFill>
                 <a:latin typeface="Courier New" pitchFamily="34" charset="0"/>
                 <a:ea typeface="Courier New" pitchFamily="34" charset="-122"/>
@@ -20886,7 +21188,7 @@
             <a:r>
               <a:rPr lang="en-US" sz="1200" dirty="0">
                 <a:solidFill>
-                  <a:srgbClr val="AFA9BE"/>
+                  <a:srgbClr val="C9C4D6"/>
                 </a:solidFill>
                 <a:latin typeface="Montserrat" pitchFamily="34" charset="0"/>
                 <a:ea typeface="Montserrat" pitchFamily="34" charset="-122"/>
@@ -20915,9 +21217,14 @@
             </a:avLst>
           </a:prstGeom>
           <a:solidFill>
-            <a:srgbClr val="102A20"/>
+            <a:srgbClr val="06180F"/>
           </a:solidFill>
-          <a:ln/>
+          <a:ln w="12700">
+            <a:solidFill>
+              <a:srgbClr val="3FCF8E"/>
+            </a:solidFill>
+            <a:prstDash val="solid"/>
+          </a:ln>
         </p:spPr>
       </p:sp>
       <p:sp>
@@ -20947,7 +21254,7 @@
             <a:r>
               <a:rPr lang="en-US" sz="950" b="1" spc="150" kern="0" dirty="0">
                 <a:solidFill>
-                  <a:srgbClr val="5FD6A0"/>
+                  <a:srgbClr val="3FCF8E"/>
                 </a:solidFill>
                 <a:latin typeface="Courier New" pitchFamily="34" charset="0"/>
                 <a:ea typeface="Courier New" pitchFamily="34" charset="-122"/>
@@ -21018,9 +21325,14 @@
             </a:avLst>
           </a:prstGeom>
           <a:solidFill>
-            <a:srgbClr val="2E1418"/>
+            <a:srgbClr val="1A0808"/>
           </a:solidFill>
-          <a:ln/>
+          <a:ln w="12700">
+            <a:solidFill>
+              <a:srgbClr val="FF6B6B"/>
+            </a:solidFill>
+            <a:prstDash val="solid"/>
+          </a:ln>
         </p:spPr>
       </p:sp>
       <p:sp>
@@ -21050,7 +21362,7 @@
             <a:r>
               <a:rPr lang="en-US" sz="950" b="1" spc="150" kern="0" dirty="0">
                 <a:solidFill>
-                  <a:srgbClr val="FF7B7B"/>
+                  <a:srgbClr val="FF6B6B"/>
                 </a:solidFill>
                 <a:latin typeface="Courier New" pitchFamily="34" charset="0"/>
                 <a:ea typeface="Courier New" pitchFamily="34" charset="-122"/>
@@ -21134,7 +21446,7 @@
             <a:lvl1pPr>
               <a:defRPr sz="850">
                 <a:solidFill>
-                  <a:srgbClr val="8A82A0"/>
+                  <a:srgbClr val="9A94AA"/>
                 </a:solidFill>
                 <a:latin typeface="Courier New"/>
                 <a:ea typeface="Courier New"/>
@@ -21204,7 +21516,7 @@
             <a:r>
               <a:rPr lang="en-US" sz="2600" b="1" dirty="0">
                 <a:solidFill>
-                  <a:srgbClr val="C9A6FF"/>
+                  <a:srgbClr val="A98BFF"/>
                 </a:solidFill>
                 <a:latin typeface="Courier New" pitchFamily="34" charset="0"/>
                 <a:ea typeface="Courier New" pitchFamily="34" charset="-122"/>
@@ -21272,9 +21584,14 @@
             </a:avLst>
           </a:prstGeom>
           <a:solidFill>
-            <a:srgbClr val="C9A6FF"/>
+            <a:srgbClr val="1A0B3D"/>
           </a:solidFill>
-          <a:ln/>
+          <a:ln w="12700">
+            <a:solidFill>
+              <a:srgbClr val="5A05F4"/>
+            </a:solidFill>
+            <a:prstDash val="solid"/>
+          </a:ln>
         </p:spPr>
       </p:sp>
       <p:sp>
@@ -21304,7 +21621,7 @@
             <a:r>
               <a:rPr lang="en-US" sz="900" b="1" spc="100" kern="0" dirty="0">
                 <a:solidFill>
-                  <a:srgbClr val="1C1140"/>
+                  <a:srgbClr val="A98BFF"/>
                 </a:solidFill>
                 <a:latin typeface="Courier New" pitchFamily="34" charset="0"/>
                 <a:ea typeface="Courier New" pitchFamily="34" charset="-122"/>
@@ -21357,11 +21674,11 @@
             </a:avLst>
           </a:prstGeom>
           <a:solidFill>
-            <a:srgbClr val="12101A"/>
+            <a:srgbClr val="07060C"/>
           </a:solidFill>
           <a:ln w="12700">
             <a:solidFill>
-              <a:srgbClr val="2E2A3A"/>
+              <a:srgbClr val="5E4F85"/>
             </a:solidFill>
             <a:prstDash val="solid"/>
           </a:ln>
@@ -21397,7 +21714,7 @@
             <a:r>
               <a:rPr lang="en-US" sz="1100" dirty="0">
                 <a:solidFill>
-                  <a:srgbClr val="C9A6FF"/>
+                  <a:srgbClr val="A98BFF"/>
                 </a:solidFill>
                 <a:latin typeface="Courier New" pitchFamily="34" charset="0"/>
                 <a:ea typeface="Courier New" pitchFamily="34" charset="-122"/>
@@ -21434,7 +21751,7 @@
             <a:r>
               <a:rPr lang="en-US" sz="1100" dirty="0">
                 <a:solidFill>
-                  <a:srgbClr val="7FD9A6"/>
+                  <a:srgbClr val="6BA0F8"/>
                 </a:solidFill>
                 <a:latin typeface="Courier New" pitchFamily="34" charset="0"/>
                 <a:ea typeface="Courier New" pitchFamily="34" charset="-122"/>
@@ -21454,7 +21771,7 @@
             <a:r>
               <a:rPr lang="en-US" sz="1100" dirty="0">
                 <a:solidFill>
-                  <a:srgbClr val="C9A6FF"/>
+                  <a:srgbClr val="A98BFF"/>
                 </a:solidFill>
                 <a:latin typeface="Courier New" pitchFamily="34" charset="0"/>
                 <a:ea typeface="Courier New" pitchFamily="34" charset="-122"/>
@@ -21531,7 +21848,7 @@
             <a:r>
               <a:rPr lang="en-US" sz="1100" dirty="0">
                 <a:solidFill>
-                  <a:srgbClr val="7FD9A6"/>
+                  <a:srgbClr val="6BA0F8"/>
                 </a:solidFill>
                 <a:latin typeface="Courier New" pitchFamily="34" charset="0"/>
                 <a:ea typeface="Courier New" pitchFamily="34" charset="-122"/>
@@ -21551,7 +21868,7 @@
             <a:r>
               <a:rPr lang="en-US" sz="1100" dirty="0">
                 <a:solidFill>
-                  <a:srgbClr val="C9A6FF"/>
+                  <a:srgbClr val="A98BFF"/>
                 </a:solidFill>
                 <a:latin typeface="Courier New" pitchFamily="34" charset="0"/>
                 <a:ea typeface="Courier New" pitchFamily="34" charset="-122"/>
@@ -21568,7 +21885,7 @@
             <a:r>
               <a:rPr lang="en-US" sz="1100" dirty="0">
                 <a:solidFill>
-                  <a:srgbClr val="8A82A0"/>
+                  <a:srgbClr val="9A94AA"/>
                 </a:solidFill>
                 <a:latin typeface="Courier New" pitchFamily="34" charset="0"/>
                 <a:ea typeface="Courier New" pitchFamily="34" charset="-122"/>
@@ -21608,7 +21925,7 @@
             <a:r>
               <a:rPr lang="en-US" sz="1100" dirty="0">
                 <a:solidFill>
-                  <a:srgbClr val="C9A6FF"/>
+                  <a:srgbClr val="A98BFF"/>
                 </a:solidFill>
                 <a:latin typeface="Courier New" pitchFamily="34" charset="0"/>
                 <a:ea typeface="Courier New" pitchFamily="34" charset="-122"/>
@@ -21665,7 +21982,7 @@
             <a:r>
               <a:rPr lang="en-US" sz="1100" dirty="0">
                 <a:solidFill>
-                  <a:srgbClr val="8A82A0"/>
+                  <a:srgbClr val="9A94AA"/>
                 </a:solidFill>
                 <a:latin typeface="Courier New" pitchFamily="34" charset="0"/>
                 <a:ea typeface="Courier New" pitchFamily="34" charset="-122"/>
@@ -21694,11 +22011,11 @@
             </a:avLst>
           </a:prstGeom>
           <a:solidFill>
-            <a:srgbClr val="17141F"/>
+            <a:srgbClr val="000000"/>
           </a:solidFill>
           <a:ln w="12700">
             <a:solidFill>
-              <a:srgbClr val="2E2A3A"/>
+              <a:srgbClr val="5E4F85"/>
             </a:solidFill>
             <a:prstDash val="solid"/>
           </a:ln>
@@ -21773,7 +22090,7 @@
             <a:r>
               <a:rPr lang="en-US" sz="1200" dirty="0">
                 <a:solidFill>
-                  <a:srgbClr val="AFA9BE"/>
+                  <a:srgbClr val="C9C4D6"/>
                 </a:solidFill>
                 <a:latin typeface="Montserrat" pitchFamily="34" charset="0"/>
                 <a:ea typeface="Montserrat" pitchFamily="34" charset="-122"/>
@@ -21802,9 +22119,14 @@
             </a:avLst>
           </a:prstGeom>
           <a:solidFill>
-            <a:srgbClr val="102A20"/>
+            <a:srgbClr val="06180F"/>
           </a:solidFill>
-          <a:ln/>
+          <a:ln w="12700">
+            <a:solidFill>
+              <a:srgbClr val="3FCF8E"/>
+            </a:solidFill>
+            <a:prstDash val="solid"/>
+          </a:ln>
         </p:spPr>
       </p:sp>
       <p:sp>
@@ -21834,7 +22156,7 @@
             <a:r>
               <a:rPr lang="en-US" sz="1450" b="1" dirty="0">
                 <a:solidFill>
-                  <a:srgbClr val="5FD6A0"/>
+                  <a:srgbClr val="3FCF8E"/>
                 </a:solidFill>
                 <a:latin typeface="Montserrat" pitchFamily="34" charset="0"/>
                 <a:ea typeface="Montserrat" pitchFamily="34" charset="-122"/>
@@ -21876,7 +22198,7 @@
             <a:r>
               <a:rPr lang="en-US" sz="1200" dirty="0">
                 <a:solidFill>
-                  <a:srgbClr val="FFFFFF"/>
+                  <a:srgbClr val="C9C4D6"/>
                 </a:solidFill>
                 <a:latin typeface="Montserrat" pitchFamily="34" charset="0"/>
                 <a:ea typeface="Montserrat" pitchFamily="34" charset="-122"/>
@@ -21905,9 +22227,14 @@
             </a:avLst>
           </a:prstGeom>
           <a:solidFill>
-            <a:srgbClr val="2A2010"/>
+            <a:srgbClr val="0B1A38"/>
           </a:solidFill>
-          <a:ln/>
+          <a:ln w="12700">
+            <a:solidFill>
+              <a:srgbClr val="6BA0F8"/>
+            </a:solidFill>
+            <a:prstDash val="solid"/>
+          </a:ln>
         </p:spPr>
       </p:sp>
       <p:sp>
@@ -21937,7 +22264,7 @@
             <a:r>
               <a:rPr lang="en-US" sz="1450" b="1" dirty="0">
                 <a:solidFill>
-                  <a:srgbClr val="E8A857"/>
+                  <a:srgbClr val="6BA0F8"/>
                 </a:solidFill>
                 <a:latin typeface="Montserrat" pitchFamily="34" charset="0"/>
                 <a:ea typeface="Montserrat" pitchFamily="34" charset="-122"/>
@@ -21979,7 +22306,7 @@
             <a:r>
               <a:rPr lang="en-US" sz="1200" dirty="0">
                 <a:solidFill>
-                  <a:srgbClr val="FFFFFF"/>
+                  <a:srgbClr val="C9C4D6"/>
                 </a:solidFill>
                 <a:latin typeface="Montserrat" pitchFamily="34" charset="0"/>
                 <a:ea typeface="Montserrat" pitchFamily="34" charset="-122"/>
@@ -22008,11 +22335,11 @@
             </a:avLst>
           </a:prstGeom>
           <a:solidFill>
-            <a:srgbClr val="17141F"/>
+            <a:srgbClr val="000000"/>
           </a:solidFill>
           <a:ln w="12700">
             <a:solidFill>
-              <a:srgbClr val="2E2A3A"/>
+              <a:srgbClr val="5E4F85"/>
             </a:solidFill>
             <a:prstDash val="solid"/>
           </a:ln>
@@ -22090,7 +22417,7 @@
             <a:lvl1pPr>
               <a:defRPr sz="850">
                 <a:solidFill>
-                  <a:srgbClr val="8A82A0"/>
+                  <a:srgbClr val="9A94AA"/>
                 </a:solidFill>
                 <a:latin typeface="Courier New"/>
                 <a:ea typeface="Courier New"/>
@@ -22160,7 +22487,7 @@
             <a:r>
               <a:rPr lang="en-US" sz="2600" b="1" dirty="0">
                 <a:solidFill>
-                  <a:srgbClr val="C9A6FF"/>
+                  <a:srgbClr val="A98BFF"/>
                 </a:solidFill>
                 <a:latin typeface="Courier New" pitchFamily="34" charset="0"/>
                 <a:ea typeface="Courier New" pitchFamily="34" charset="-122"/>
@@ -22228,9 +22555,14 @@
             </a:avLst>
           </a:prstGeom>
           <a:solidFill>
-            <a:srgbClr val="C9A6FF"/>
+            <a:srgbClr val="1A0B3D"/>
           </a:solidFill>
-          <a:ln/>
+          <a:ln w="12700">
+            <a:solidFill>
+              <a:srgbClr val="5A05F4"/>
+            </a:solidFill>
+            <a:prstDash val="solid"/>
+          </a:ln>
         </p:spPr>
       </p:sp>
       <p:sp>
@@ -22260,7 +22592,7 @@
             <a:r>
               <a:rPr lang="en-US" sz="900" b="1" spc="100" kern="0" dirty="0">
                 <a:solidFill>
-                  <a:srgbClr val="1C1140"/>
+                  <a:srgbClr val="A98BFF"/>
                 </a:solidFill>
                 <a:latin typeface="Courier New" pitchFamily="34" charset="0"/>
                 <a:ea typeface="Courier New" pitchFamily="34" charset="-122"/>
@@ -22313,9 +22645,14 @@
             </a:avLst>
           </a:prstGeom>
           <a:solidFill>
-            <a:srgbClr val="2A2010"/>
+            <a:srgbClr val="0B1A38"/>
           </a:solidFill>
-          <a:ln/>
+          <a:ln w="12700">
+            <a:solidFill>
+              <a:srgbClr val="6BA0F8"/>
+            </a:solidFill>
+            <a:prstDash val="solid"/>
+          </a:ln>
         </p:spPr>
       </p:sp>
       <p:sp>
@@ -22345,7 +22682,7 @@
             <a:r>
               <a:rPr lang="en-US" sz="1450" b="1" dirty="0">
                 <a:solidFill>
-                  <a:srgbClr val="E8A857"/>
+                  <a:srgbClr val="6BA0F8"/>
                 </a:solidFill>
                 <a:latin typeface="Montserrat" pitchFamily="34" charset="0"/>
                 <a:ea typeface="Montserrat" pitchFamily="34" charset="-122"/>
@@ -22387,7 +22724,7 @@
             <a:r>
               <a:rPr lang="en-US" sz="1200" dirty="0">
                 <a:solidFill>
-                  <a:srgbClr val="FFFFFF"/>
+                  <a:srgbClr val="C9C4D6"/>
                 </a:solidFill>
                 <a:latin typeface="Montserrat" pitchFamily="34" charset="0"/>
                 <a:ea typeface="Montserrat" pitchFamily="34" charset="-122"/>
@@ -22416,9 +22753,14 @@
             </a:avLst>
           </a:prstGeom>
           <a:solidFill>
-            <a:srgbClr val="102A20"/>
+            <a:srgbClr val="06180F"/>
           </a:solidFill>
-          <a:ln/>
+          <a:ln w="12700">
+            <a:solidFill>
+              <a:srgbClr val="3FCF8E"/>
+            </a:solidFill>
+            <a:prstDash val="solid"/>
+          </a:ln>
         </p:spPr>
       </p:sp>
       <p:sp>
@@ -22448,7 +22790,7 @@
             <a:r>
               <a:rPr lang="en-US" sz="1450" b="1" dirty="0">
                 <a:solidFill>
-                  <a:srgbClr val="5FD6A0"/>
+                  <a:srgbClr val="3FCF8E"/>
                 </a:solidFill>
                 <a:latin typeface="Montserrat" pitchFamily="34" charset="0"/>
                 <a:ea typeface="Montserrat" pitchFamily="34" charset="-122"/>
@@ -22490,7 +22832,7 @@
             <a:r>
               <a:rPr lang="en-US" sz="1200" dirty="0">
                 <a:solidFill>
-                  <a:srgbClr val="FFFFFF"/>
+                  <a:srgbClr val="C9C4D6"/>
                 </a:solidFill>
                 <a:latin typeface="Montserrat" pitchFamily="34" charset="0"/>
                 <a:ea typeface="Montserrat" pitchFamily="34" charset="-122"/>
@@ -22519,7 +22861,7 @@
           <a:noFill/>
           <a:ln w="12700">
             <a:solidFill>
-              <a:srgbClr val="2E2A3A"/>
+              <a:srgbClr val="5E4F85"/>
             </a:solidFill>
             <a:prstDash val="solid"/>
           </a:ln>
@@ -22542,11 +22884,11 @@
             </a:avLst>
           </a:prstGeom>
           <a:solidFill>
-            <a:srgbClr val="17141F"/>
+            <a:srgbClr val="000000"/>
           </a:solidFill>
           <a:ln w="12700">
             <a:solidFill>
-              <a:srgbClr val="2E2A3A"/>
+              <a:srgbClr val="5E4F85"/>
             </a:solidFill>
             <a:prstDash val="solid"/>
           </a:ln>
@@ -22608,11 +22950,11 @@
             </a:avLst>
           </a:prstGeom>
           <a:solidFill>
-            <a:srgbClr val="17141F"/>
+            <a:srgbClr val="000000"/>
           </a:solidFill>
           <a:ln w="12700">
             <a:solidFill>
-              <a:srgbClr val="2E2A3A"/>
+              <a:srgbClr val="5E4F85"/>
             </a:solidFill>
             <a:prstDash val="solid"/>
           </a:ln>
@@ -22674,11 +23016,11 @@
             </a:avLst>
           </a:prstGeom>
           <a:solidFill>
-            <a:srgbClr val="1C1140"/>
+            <a:srgbClr val="1A0B3D"/>
           </a:solidFill>
           <a:ln w="12700">
             <a:solidFill>
-              <a:srgbClr val="2E2A3A"/>
+              <a:srgbClr val="5E4F85"/>
             </a:solidFill>
             <a:prstDash val="solid"/>
           </a:ln>
@@ -22750,7 +23092,7 @@
             <a:r>
               <a:rPr lang="en-US" sz="900" b="1" dirty="0">
                 <a:solidFill>
-                  <a:srgbClr val="5FD6A0"/>
+                  <a:srgbClr val="3FCF8E"/>
                 </a:solidFill>
                 <a:latin typeface="Courier New" pitchFamily="34" charset="0"/>
                 <a:ea typeface="Courier New" pitchFamily="34" charset="-122"/>
@@ -22789,7 +23131,7 @@
             <a:r>
               <a:rPr lang="en-US" sz="900" b="1" dirty="0">
                 <a:solidFill>
-                  <a:srgbClr val="E8A857"/>
+                  <a:srgbClr val="6BA0F8"/>
                 </a:solidFill>
                 <a:latin typeface="Courier New" pitchFamily="34" charset="0"/>
                 <a:ea typeface="Courier New" pitchFamily="34" charset="-122"/>
@@ -22828,7 +23170,7 @@
             <a:r>
               <a:rPr lang="en-US" sz="850" spc="100" kern="0" dirty="0">
                 <a:solidFill>
-                  <a:srgbClr val="8A82A0"/>
+                  <a:srgbClr val="9A94AA"/>
                 </a:solidFill>
                 <a:latin typeface="Courier New" pitchFamily="34" charset="0"/>
                 <a:ea typeface="Courier New" pitchFamily="34" charset="-122"/>
@@ -22857,9 +23199,14 @@
             </a:avLst>
           </a:prstGeom>
           <a:solidFill>
-            <a:srgbClr val="2A2010"/>
+            <a:srgbClr val="0B1A38"/>
           </a:solidFill>
-          <a:ln/>
+          <a:ln w="12700">
+            <a:solidFill>
+              <a:srgbClr val="6BA0F8"/>
+            </a:solidFill>
+            <a:prstDash val="solid"/>
+          </a:ln>
         </p:spPr>
       </p:sp>
       <p:sp>
@@ -22889,7 +23236,7 @@
             <a:r>
               <a:rPr lang="en-US" sz="950" b="1" spc="150" kern="0" dirty="0">
                 <a:solidFill>
-                  <a:srgbClr val="E8A857"/>
+                  <a:srgbClr val="6BA0F8"/>
                 </a:solidFill>
                 <a:latin typeface="Courier New" pitchFamily="34" charset="0"/>
                 <a:ea typeface="Courier New" pitchFamily="34" charset="-122"/>
@@ -23037,7 +23384,7 @@
             <a:lvl1pPr>
               <a:defRPr sz="850">
                 <a:solidFill>
-                  <a:srgbClr val="8A82A0"/>
+                  <a:srgbClr val="9A94AA"/>
                 </a:solidFill>
                 <a:latin typeface="Courier New"/>
                 <a:ea typeface="Courier New"/>
@@ -23107,7 +23454,7 @@
             <a:r>
               <a:rPr lang="en-US" sz="2600" b="1" dirty="0">
                 <a:solidFill>
-                  <a:srgbClr val="C9A6FF"/>
+                  <a:srgbClr val="A98BFF"/>
                 </a:solidFill>
                 <a:latin typeface="Courier New" pitchFamily="34" charset="0"/>
                 <a:ea typeface="Courier New" pitchFamily="34" charset="-122"/>
@@ -23175,9 +23522,14 @@
             </a:avLst>
           </a:prstGeom>
           <a:solidFill>
-            <a:srgbClr val="C9A6FF"/>
+            <a:srgbClr val="1A0B3D"/>
           </a:solidFill>
-          <a:ln/>
+          <a:ln w="12700">
+            <a:solidFill>
+              <a:srgbClr val="5A05F4"/>
+            </a:solidFill>
+            <a:prstDash val="solid"/>
+          </a:ln>
         </p:spPr>
       </p:sp>
       <p:sp>
@@ -23207,7 +23559,7 @@
             <a:r>
               <a:rPr lang="en-US" sz="900" b="1" spc="100" kern="0" dirty="0">
                 <a:solidFill>
-                  <a:srgbClr val="1C1140"/>
+                  <a:srgbClr val="A98BFF"/>
                 </a:solidFill>
                 <a:latin typeface="Courier New" pitchFamily="34" charset="0"/>
                 <a:ea typeface="Courier New" pitchFamily="34" charset="-122"/>
@@ -23260,11 +23612,11 @@
             </a:avLst>
           </a:prstGeom>
           <a:solidFill>
-            <a:srgbClr val="12101A"/>
+            <a:srgbClr val="07060C"/>
           </a:solidFill>
           <a:ln w="12700">
             <a:solidFill>
-              <a:srgbClr val="2E2A3A"/>
+              <a:srgbClr val="5E4F85"/>
             </a:solidFill>
             <a:prstDash val="solid"/>
           </a:ln>
@@ -23300,7 +23652,7 @@
             <a:r>
               <a:rPr lang="en-US" sz="1150" dirty="0">
                 <a:solidFill>
-                  <a:srgbClr val="8A82A0"/>
+                  <a:srgbClr val="9A94AA"/>
                 </a:solidFill>
                 <a:latin typeface="Courier New" pitchFamily="34" charset="0"/>
                 <a:ea typeface="Courier New" pitchFamily="34" charset="-122"/>
@@ -23320,7 +23672,7 @@
             <a:r>
               <a:rPr lang="en-US" sz="1150" dirty="0">
                 <a:solidFill>
-                  <a:srgbClr val="C9A6FF"/>
+                  <a:srgbClr val="A98BFF"/>
                 </a:solidFill>
                 <a:latin typeface="Courier New" pitchFamily="34" charset="0"/>
                 <a:ea typeface="Courier New" pitchFamily="34" charset="-122"/>
@@ -23357,7 +23709,7 @@
             <a:r>
               <a:rPr lang="en-US" sz="1150" dirty="0">
                 <a:solidFill>
-                  <a:srgbClr val="8A82A0"/>
+                  <a:srgbClr val="9A94AA"/>
                 </a:solidFill>
                 <a:latin typeface="Courier New" pitchFamily="34" charset="0"/>
                 <a:ea typeface="Courier New" pitchFamily="34" charset="-122"/>
@@ -23437,7 +23789,7 @@
             <a:r>
               <a:rPr lang="en-US" sz="1150" dirty="0">
                 <a:solidFill>
-                  <a:srgbClr val="7FD9A6"/>
+                  <a:srgbClr val="6BA0F8"/>
                 </a:solidFill>
                 <a:latin typeface="Courier New" pitchFamily="34" charset="0"/>
                 <a:ea typeface="Courier New" pitchFamily="34" charset="-122"/>
@@ -23457,7 +23809,7 @@
             <a:r>
               <a:rPr lang="en-US" sz="1150" dirty="0">
                 <a:solidFill>
-                  <a:srgbClr val="C9A6FF"/>
+                  <a:srgbClr val="A98BFF"/>
                 </a:solidFill>
                 <a:latin typeface="Courier New" pitchFamily="34" charset="0"/>
                 <a:ea typeface="Courier New" pitchFamily="34" charset="-122"/>
@@ -23486,11 +23838,11 @@
             </a:avLst>
           </a:prstGeom>
           <a:solidFill>
-            <a:srgbClr val="17141F"/>
+            <a:srgbClr val="000000"/>
           </a:solidFill>
           <a:ln w="12700">
             <a:solidFill>
-              <a:srgbClr val="2E2A3A"/>
+              <a:srgbClr val="5E4F85"/>
             </a:solidFill>
             <a:prstDash val="solid"/>
           </a:ln>
@@ -23552,7 +23904,7 @@
           <a:noFill/>
           <a:ln w="15875">
             <a:solidFill>
-              <a:srgbClr val="9B7BE8"/>
+              <a:srgbClr val="8F72E6"/>
             </a:solidFill>
             <a:prstDash val="solid"/>
           </a:ln>
@@ -23573,7 +23925,7 @@
             <a:avLst/>
           </a:prstGeom>
           <a:solidFill>
-            <a:srgbClr val="9B7BE8"/>
+            <a:srgbClr val="8F72E6"/>
           </a:solidFill>
           <a:ln/>
         </p:spPr>
@@ -23595,9 +23947,14 @@
             </a:avLst>
           </a:prstGeom>
           <a:solidFill>
-            <a:srgbClr val="1C1140"/>
+            <a:srgbClr val="1A0B3D"/>
           </a:solidFill>
-          <a:ln/>
+          <a:ln w="12700">
+            <a:solidFill>
+              <a:srgbClr val="5A05F4"/>
+            </a:solidFill>
+            <a:prstDash val="solid"/>
+          </a:ln>
         </p:spPr>
       </p:sp>
       <p:sp>
@@ -23627,7 +23984,7 @@
             <a:r>
               <a:rPr lang="en-US" sz="1150" b="1" dirty="0">
                 <a:solidFill>
-                  <a:srgbClr val="C9A6FF"/>
+                  <a:srgbClr val="A98BFF"/>
                 </a:solidFill>
                 <a:latin typeface="Courier New" pitchFamily="34" charset="0"/>
                 <a:ea typeface="Courier New" pitchFamily="34" charset="-122"/>
@@ -23656,7 +24013,7 @@
           <a:noFill/>
           <a:ln w="15875">
             <a:solidFill>
-              <a:srgbClr val="9B7BE8"/>
+              <a:srgbClr val="8F72E6"/>
             </a:solidFill>
             <a:prstDash val="solid"/>
           </a:ln>
@@ -23677,7 +24034,7 @@
             <a:avLst/>
           </a:prstGeom>
           <a:solidFill>
-            <a:srgbClr val="9B7BE8"/>
+            <a:srgbClr val="8F72E6"/>
           </a:solidFill>
           <a:ln/>
         </p:spPr>
@@ -23699,9 +24056,14 @@
             </a:avLst>
           </a:prstGeom>
           <a:solidFill>
-            <a:srgbClr val="2E1418"/>
+            <a:srgbClr val="1A0808"/>
           </a:solidFill>
-          <a:ln/>
+          <a:ln w="12700">
+            <a:solidFill>
+              <a:srgbClr val="FF6B6B"/>
+            </a:solidFill>
+            <a:prstDash val="solid"/>
+          </a:ln>
         </p:spPr>
       </p:sp>
       <p:sp>
@@ -23731,7 +24093,7 @@
             <a:r>
               <a:rPr lang="en-US" sz="1150" b="1" dirty="0">
                 <a:solidFill>
-                  <a:srgbClr val="FF7B7B"/>
+                  <a:srgbClr val="FF6B6B"/>
                 </a:solidFill>
                 <a:latin typeface="Courier New" pitchFamily="34" charset="0"/>
                 <a:ea typeface="Courier New" pitchFamily="34" charset="-122"/>
@@ -23760,9 +24122,14 @@
             </a:avLst>
           </a:prstGeom>
           <a:solidFill>
-            <a:srgbClr val="102A20"/>
+            <a:srgbClr val="06180F"/>
           </a:solidFill>
-          <a:ln/>
+          <a:ln w="12700">
+            <a:solidFill>
+              <a:srgbClr val="3FCF8E"/>
+            </a:solidFill>
+            <a:prstDash val="solid"/>
+          </a:ln>
         </p:spPr>
       </p:sp>
       <p:sp>
@@ -23837,7 +24204,7 @@
             <a:lvl1pPr>
               <a:defRPr sz="850">
                 <a:solidFill>
-                  <a:srgbClr val="8A82A0"/>
+                  <a:srgbClr val="9A94AA"/>
                 </a:solidFill>
                 <a:latin typeface="Courier New"/>
                 <a:ea typeface="Courier New"/>

--- a/docs/decks/L03.pptx
+++ b/docs/decks/L03.pptx
@@ -11992,14 +11992,9 @@
             </a:avLst>
           </a:prstGeom>
           <a:solidFill>
-            <a:srgbClr val="F5F3FA"/>
+            <a:srgbClr val="106B41"/>
           </a:solidFill>
-          <a:ln w="12700">
-            <a:solidFill>
-              <a:srgbClr val="106B41"/>
-            </a:solidFill>
-            <a:prstDash val="solid"/>
-          </a:ln>
+          <a:ln/>
         </p:spPr>
       </p:sp>
       <p:sp>
@@ -12029,7 +12024,7 @@
             <a:r>
               <a:rPr lang="en-US" sz="950" b="1" dirty="0">
                 <a:solidFill>
-                  <a:srgbClr val="106B41"/>
+                  <a:srgbClr val="FFFFFF"/>
                 </a:solidFill>
                 <a:latin typeface="Courier New" pitchFamily="34" charset="0"/>
                 <a:ea typeface="Courier New" pitchFamily="34" charset="-122"/>
@@ -12058,14 +12053,9 @@
             </a:avLst>
           </a:prstGeom>
           <a:solidFill>
-            <a:srgbClr val="EDE7FD"/>
+            <a:srgbClr val="5A05F4"/>
           </a:solidFill>
-          <a:ln w="12700">
-            <a:solidFill>
-              <a:srgbClr val="5A05F4"/>
-            </a:solidFill>
-            <a:prstDash val="solid"/>
-          </a:ln>
+          <a:ln/>
         </p:spPr>
       </p:sp>
       <p:sp>
@@ -12076,8 +12066,8 @@
         </p:nvSpPr>
         <p:spPr>
           <a:xfrm>
-            <a:off x="4270248" y="3621024"/>
-            <a:ext cx="3520440" cy="402336"/>
+            <a:off x="4270248" y="3785616"/>
+            <a:ext cx="3520440" cy="237744"/>
           </a:xfrm>
           <a:prstGeom prst="rect">
             <a:avLst/>
@@ -12095,7 +12085,7 @@
             <a:r>
               <a:rPr lang="en-US" sz="950" b="1" dirty="0">
                 <a:solidFill>
-                  <a:srgbClr val="5A05F4"/>
+                  <a:srgbClr val="FFFFFF"/>
                 </a:solidFill>
                 <a:latin typeface="Courier New" pitchFamily="34" charset="0"/>
                 <a:ea typeface="Courier New" pitchFamily="34" charset="-122"/>
@@ -12124,14 +12114,9 @@
             </a:avLst>
           </a:prstGeom>
           <a:solidFill>
-            <a:srgbClr val="F5F3FA"/>
+            <a:srgbClr val="1A4FBF"/>
           </a:solidFill>
-          <a:ln w="12700">
-            <a:solidFill>
-              <a:srgbClr val="1A4FBF"/>
-            </a:solidFill>
-            <a:prstDash val="solid"/>
-          </a:ln>
+          <a:ln/>
         </p:spPr>
       </p:sp>
       <p:sp>
@@ -12142,8 +12127,8 @@
         </p:nvSpPr>
         <p:spPr>
           <a:xfrm>
-            <a:off x="7973568" y="3456432"/>
-            <a:ext cx="3520440" cy="566928"/>
+            <a:off x="7973568" y="3785616"/>
+            <a:ext cx="3520440" cy="237744"/>
           </a:xfrm>
           <a:prstGeom prst="rect">
             <a:avLst/>
@@ -12161,7 +12146,7 @@
             <a:r>
               <a:rPr lang="en-US" sz="950" b="1" dirty="0">
                 <a:solidFill>
-                  <a:srgbClr val="1A4FBF"/>
+                  <a:srgbClr val="FFFFFF"/>
                 </a:solidFill>
                 <a:latin typeface="Courier New" pitchFamily="34" charset="0"/>
                 <a:ea typeface="Courier New" pitchFamily="34" charset="-122"/>

--- a/docs/decks/L03.pptx
+++ b/docs/decks/L03.pptx
@@ -12881,11 +12881,11 @@
         <p:spPr>
           <a:xfrm>
             <a:off x="566928" y="1783080"/>
-            <a:ext cx="3520440" cy="1463040"/>
+            <a:ext cx="3520440" cy="1874520"/>
           </a:xfrm>
           <a:prstGeom prst="roundRect">
             <a:avLst>
-              <a:gd name="adj" fmla="val 7500"/>
+              <a:gd name="adj" fmla="val 5854"/>
             </a:avLst>
           </a:prstGeom>
           <a:solidFill>
@@ -13001,7 +13001,7 @@
         <p:spPr>
           <a:xfrm>
             <a:off x="768096" y="2468880"/>
-            <a:ext cx="3118104" cy="621792"/>
+            <a:ext cx="3118104" cy="1033272"/>
           </a:xfrm>
           <a:prstGeom prst="rect">
             <a:avLst/>
@@ -13043,11 +13043,11 @@
         <p:spPr>
           <a:xfrm>
             <a:off x="4270248" y="1783080"/>
-            <a:ext cx="3520440" cy="1463040"/>
+            <a:ext cx="3520440" cy="1874520"/>
           </a:xfrm>
           <a:prstGeom prst="roundRect">
             <a:avLst>
-              <a:gd name="adj" fmla="val 7500"/>
+              <a:gd name="adj" fmla="val 5854"/>
             </a:avLst>
           </a:prstGeom>
           <a:solidFill>
@@ -13163,7 +13163,7 @@
         <p:spPr>
           <a:xfrm>
             <a:off x="4471416" y="2468880"/>
-            <a:ext cx="3118104" cy="621792"/>
+            <a:ext cx="3118104" cy="1033272"/>
           </a:xfrm>
           <a:prstGeom prst="rect">
             <a:avLst/>
@@ -13205,11 +13205,11 @@
         <p:spPr>
           <a:xfrm>
             <a:off x="7973568" y="1783080"/>
-            <a:ext cx="3520440" cy="1463040"/>
+            <a:ext cx="3520440" cy="1874520"/>
           </a:xfrm>
           <a:prstGeom prst="roundRect">
             <a:avLst>
-              <a:gd name="adj" fmla="val 7500"/>
+              <a:gd name="adj" fmla="val 5854"/>
             </a:avLst>
           </a:prstGeom>
           <a:solidFill>
@@ -13325,7 +13325,7 @@
         <p:spPr>
           <a:xfrm>
             <a:off x="8174736" y="2468880"/>
-            <a:ext cx="3118104" cy="621792"/>
+            <a:ext cx="3118104" cy="1033272"/>
           </a:xfrm>
           <a:prstGeom prst="rect">
             <a:avLst/>
@@ -13366,12 +13366,12 @@
         </p:nvSpPr>
         <p:spPr>
           <a:xfrm>
-            <a:off x="566928" y="3520440"/>
-            <a:ext cx="3520440" cy="1463040"/>
+            <a:off x="566928" y="3886200"/>
+            <a:ext cx="3520440" cy="1874520"/>
           </a:xfrm>
           <a:prstGeom prst="roundRect">
             <a:avLst>
-              <a:gd name="adj" fmla="val 7500"/>
+              <a:gd name="adj" fmla="val 5854"/>
             </a:avLst>
           </a:prstGeom>
           <a:solidFill>
@@ -13388,7 +13388,7 @@
         </p:nvSpPr>
         <p:spPr>
           <a:xfrm>
-            <a:off x="768096" y="3703320"/>
+            <a:off x="768096" y="4069080"/>
             <a:ext cx="384048" cy="384048"/>
           </a:xfrm>
           <a:prstGeom prst="ellipse">
@@ -13408,7 +13408,7 @@
         </p:nvSpPr>
         <p:spPr>
           <a:xfrm>
-            <a:off x="768096" y="3703320"/>
+            <a:off x="768096" y="4069080"/>
             <a:ext cx="384048" cy="384048"/>
           </a:xfrm>
           <a:prstGeom prst="rect">
@@ -13447,7 +13447,7 @@
         </p:nvSpPr>
         <p:spPr>
           <a:xfrm>
-            <a:off x="1280160" y="3675888"/>
+            <a:off x="1280160" y="4041648"/>
             <a:ext cx="2606040" cy="438912"/>
           </a:xfrm>
           <a:prstGeom prst="rect">
@@ -13486,8 +13486,8 @@
         </p:nvSpPr>
         <p:spPr>
           <a:xfrm>
-            <a:off x="768096" y="4206240"/>
-            <a:ext cx="3118104" cy="621792"/>
+            <a:off x="768096" y="4572000"/>
+            <a:ext cx="3118104" cy="1033272"/>
           </a:xfrm>
           <a:prstGeom prst="rect">
             <a:avLst/>
@@ -13528,12 +13528,12 @@
         </p:nvSpPr>
         <p:spPr>
           <a:xfrm>
-            <a:off x="4270248" y="3520440"/>
-            <a:ext cx="3520440" cy="1463040"/>
+            <a:off x="4270248" y="3886200"/>
+            <a:ext cx="3520440" cy="1874520"/>
           </a:xfrm>
           <a:prstGeom prst="roundRect">
             <a:avLst>
-              <a:gd name="adj" fmla="val 7500"/>
+              <a:gd name="adj" fmla="val 5854"/>
             </a:avLst>
           </a:prstGeom>
           <a:solidFill>
@@ -13550,7 +13550,7 @@
         </p:nvSpPr>
         <p:spPr>
           <a:xfrm>
-            <a:off x="4471416" y="3703320"/>
+            <a:off x="4471416" y="4069080"/>
             <a:ext cx="384048" cy="384048"/>
           </a:xfrm>
           <a:prstGeom prst="ellipse">
@@ -13570,7 +13570,7 @@
         </p:nvSpPr>
         <p:spPr>
           <a:xfrm>
-            <a:off x="4471416" y="3703320"/>
+            <a:off x="4471416" y="4069080"/>
             <a:ext cx="384048" cy="384048"/>
           </a:xfrm>
           <a:prstGeom prst="rect">
@@ -13609,7 +13609,7 @@
         </p:nvSpPr>
         <p:spPr>
           <a:xfrm>
-            <a:off x="4983480" y="3675888"/>
+            <a:off x="4983480" y="4041648"/>
             <a:ext cx="2606040" cy="438912"/>
           </a:xfrm>
           <a:prstGeom prst="rect">
@@ -13648,8 +13648,8 @@
         </p:nvSpPr>
         <p:spPr>
           <a:xfrm>
-            <a:off x="4471416" y="4206240"/>
-            <a:ext cx="3118104" cy="621792"/>
+            <a:off x="4471416" y="4572000"/>
+            <a:ext cx="3118104" cy="1033272"/>
           </a:xfrm>
           <a:prstGeom prst="rect">
             <a:avLst/>
@@ -15806,11 +15806,11 @@
         <p:spPr>
           <a:xfrm>
             <a:off x="566928" y="1737360"/>
-            <a:ext cx="3566160" cy="1828800"/>
+            <a:ext cx="3566160" cy="2148840"/>
           </a:xfrm>
           <a:prstGeom prst="roundRect">
             <a:avLst>
-              <a:gd name="adj" fmla="val 6000"/>
+              <a:gd name="adj" fmla="val 5106"/>
             </a:avLst>
           </a:prstGeom>
           <a:solidFill>
@@ -15867,7 +15867,7 @@
         <p:spPr>
           <a:xfrm>
             <a:off x="768096" y="2423160"/>
-            <a:ext cx="3163824" cy="987552"/>
+            <a:ext cx="3163824" cy="1307592"/>
           </a:xfrm>
           <a:prstGeom prst="rect">
             <a:avLst/>
@@ -15909,11 +15909,11 @@
         <p:spPr>
           <a:xfrm>
             <a:off x="4315968" y="1737360"/>
-            <a:ext cx="3566160" cy="1828800"/>
+            <a:ext cx="3566160" cy="2148840"/>
           </a:xfrm>
           <a:prstGeom prst="roundRect">
             <a:avLst>
-              <a:gd name="adj" fmla="val 6000"/>
+              <a:gd name="adj" fmla="val 5106"/>
             </a:avLst>
           </a:prstGeom>
           <a:solidFill>
@@ -15970,7 +15970,7 @@
         <p:spPr>
           <a:xfrm>
             <a:off x="4517136" y="2423160"/>
-            <a:ext cx="3163824" cy="987552"/>
+            <a:ext cx="3163824" cy="1307592"/>
           </a:xfrm>
           <a:prstGeom prst="rect">
             <a:avLst/>
@@ -16012,11 +16012,11 @@
         <p:spPr>
           <a:xfrm>
             <a:off x="8065008" y="1737360"/>
-            <a:ext cx="3566160" cy="1828800"/>
+            <a:ext cx="3566160" cy="2148840"/>
           </a:xfrm>
           <a:prstGeom prst="roundRect">
             <a:avLst>
-              <a:gd name="adj" fmla="val 6000"/>
+              <a:gd name="adj" fmla="val 5106"/>
             </a:avLst>
           </a:prstGeom>
           <a:solidFill>
@@ -16073,7 +16073,7 @@
         <p:spPr>
           <a:xfrm>
             <a:off x="8266176" y="2423160"/>
-            <a:ext cx="3163824" cy="987552"/>
+            <a:ext cx="3163824" cy="1307592"/>
           </a:xfrm>
           <a:prstGeom prst="rect">
             <a:avLst/>
@@ -16114,12 +16114,12 @@
         </p:nvSpPr>
         <p:spPr>
           <a:xfrm>
-            <a:off x="566928" y="3977640"/>
-            <a:ext cx="11064240" cy="1234440"/>
+            <a:off x="566928" y="4297680"/>
+            <a:ext cx="11064240" cy="1600200"/>
           </a:xfrm>
           <a:prstGeom prst="roundRect">
             <a:avLst>
-              <a:gd name="adj" fmla="val 8889"/>
+              <a:gd name="adj" fmla="val 6857"/>
             </a:avLst>
           </a:prstGeom>
           <a:solidFill>
@@ -16141,8 +16141,8 @@
         </p:nvSpPr>
         <p:spPr>
           <a:xfrm>
-            <a:off x="786384" y="4123944"/>
-            <a:ext cx="10625328" cy="941832"/>
+            <a:off x="786384" y="4443984"/>
+            <a:ext cx="10625328" cy="1307592"/>
           </a:xfrm>
           <a:prstGeom prst="rect">
             <a:avLst/>
@@ -16408,11 +16408,11 @@
         <p:spPr>
           <a:xfrm>
             <a:off x="566928" y="1783080"/>
-            <a:ext cx="11064240" cy="1874520"/>
+            <a:ext cx="11064240" cy="3657600"/>
           </a:xfrm>
           <a:prstGeom prst="roundRect">
             <a:avLst>
-              <a:gd name="adj" fmla="val 5854"/>
+              <a:gd name="adj" fmla="val 3000"/>
             </a:avLst>
           </a:prstGeom>
           <a:solidFill>
@@ -16434,7 +16434,7 @@
         </p:nvSpPr>
         <p:spPr>
           <a:xfrm>
-            <a:off x="978408" y="2157984"/>
+            <a:off x="978408" y="2706624"/>
             <a:ext cx="256032" cy="256032"/>
           </a:xfrm>
           <a:prstGeom prst="roundRect">
@@ -16461,7 +16461,7 @@
         </p:nvSpPr>
         <p:spPr>
           <a:xfrm rot="2700000">
-            <a:off x="1041227" y="2297430"/>
+            <a:off x="1041227" y="2846070"/>
             <a:ext cx="58156" cy="27432"/>
           </a:xfrm>
           <a:prstGeom prst="rect">
@@ -16481,7 +16481,7 @@
         </p:nvSpPr>
         <p:spPr>
           <a:xfrm rot="-3000000">
-            <a:off x="1069025" y="2271370"/>
+            <a:off x="1069025" y="2820010"/>
             <a:ext cx="121432" cy="27432"/>
           </a:xfrm>
           <a:prstGeom prst="rect">
@@ -16501,8 +16501,8 @@
         </p:nvSpPr>
         <p:spPr>
           <a:xfrm>
-            <a:off x="1362456" y="2103120"/>
-            <a:ext cx="4617720" cy="384048"/>
+            <a:off x="1362456" y="2505456"/>
+            <a:ext cx="4617720" cy="658368"/>
           </a:xfrm>
           <a:prstGeom prst="rect">
             <a:avLst/>
@@ -16518,7 +16518,7 @@
               <a:buNone/>
             </a:pPr>
             <a:r>
-              <a:rPr lang="en-US" sz="1250" dirty="0">
+              <a:rPr lang="en-US" sz="1400" dirty="0">
                 <a:solidFill>
                   <a:srgbClr val="000000"/>
                 </a:solidFill>
@@ -16528,7 +16528,7 @@
               </a:rPr>
               <a:t>звичайне питання і ескалація дають різні моделі</a:t>
             </a:r>
-            <a:endParaRPr lang="en-US" sz="1250" dirty="0"/>
+            <a:endParaRPr lang="en-US" sz="1400" dirty="0"/>
           </a:p>
         </p:txBody>
       </p:sp>
@@ -16540,7 +16540,7 @@
         </p:nvSpPr>
         <p:spPr>
           <a:xfrm>
-            <a:off x="978408" y="2724912"/>
+            <a:off x="978408" y="4169664"/>
             <a:ext cx="256032" cy="256032"/>
           </a:xfrm>
           <a:prstGeom prst="roundRect">
@@ -16567,7 +16567,7 @@
         </p:nvSpPr>
         <p:spPr>
           <a:xfrm rot="2700000">
-            <a:off x="1041227" y="2864358"/>
+            <a:off x="1041227" y="4309110"/>
             <a:ext cx="58156" cy="27432"/>
           </a:xfrm>
           <a:prstGeom prst="rect">
@@ -16587,7 +16587,7 @@
         </p:nvSpPr>
         <p:spPr>
           <a:xfrm rot="-3000000">
-            <a:off x="1069025" y="2838298"/>
+            <a:off x="1069025" y="4283050"/>
             <a:ext cx="121432" cy="27432"/>
           </a:xfrm>
           <a:prstGeom prst="rect">
@@ -16607,8 +16607,8 @@
         </p:nvSpPr>
         <p:spPr>
           <a:xfrm>
-            <a:off x="1362456" y="2670048"/>
-            <a:ext cx="4617720" cy="384048"/>
+            <a:off x="1362456" y="3968496"/>
+            <a:ext cx="4617720" cy="658368"/>
           </a:xfrm>
           <a:prstGeom prst="rect">
             <a:avLst/>
@@ -16624,7 +16624,7 @@
               <a:buNone/>
             </a:pPr>
             <a:r>
-              <a:rPr lang="en-US" sz="1250" dirty="0">
+              <a:rPr lang="en-US" sz="1400" dirty="0">
                 <a:solidFill>
                   <a:srgbClr val="000000"/>
                 </a:solidFill>
@@ -16634,7 +16634,7 @@
               </a:rPr>
               <a:t>поясню, чому рішення в сервісі, а не в адаптері</a:t>
             </a:r>
-            <a:endParaRPr lang="en-US" sz="1250" dirty="0"/>
+            <a:endParaRPr lang="en-US" sz="1400" dirty="0"/>
           </a:p>
         </p:txBody>
       </p:sp>
@@ -16646,7 +16646,7 @@
         </p:nvSpPr>
         <p:spPr>
           <a:xfrm>
-            <a:off x="6144768" y="2157984"/>
+            <a:off x="6144768" y="2706624"/>
             <a:ext cx="256032" cy="256032"/>
           </a:xfrm>
           <a:prstGeom prst="roundRect">
@@ -16673,7 +16673,7 @@
         </p:nvSpPr>
         <p:spPr>
           <a:xfrm rot="2700000">
-            <a:off x="6207587" y="2297430"/>
+            <a:off x="6207587" y="2846070"/>
             <a:ext cx="58156" cy="27432"/>
           </a:xfrm>
           <a:prstGeom prst="rect">
@@ -16693,7 +16693,7 @@
         </p:nvSpPr>
         <p:spPr>
           <a:xfrm rot="-3000000">
-            <a:off x="6235385" y="2271370"/>
+            <a:off x="6235385" y="2820010"/>
             <a:ext cx="121432" cy="27432"/>
           </a:xfrm>
           <a:prstGeom prst="rect">
@@ -16713,8 +16713,8 @@
         </p:nvSpPr>
         <p:spPr>
           <a:xfrm>
-            <a:off x="6528816" y="2103120"/>
-            <a:ext cx="4617720" cy="384048"/>
+            <a:off x="6528816" y="2505456"/>
+            <a:ext cx="4617720" cy="658368"/>
           </a:xfrm>
           <a:prstGeom prst="rect">
             <a:avLst/>
@@ -16730,7 +16730,7 @@
               <a:buNone/>
             </a:pPr>
             <a:r>
-              <a:rPr lang="en-US" sz="1250" dirty="0">
+              <a:rPr lang="en-US" sz="1400" dirty="0">
                 <a:solidFill>
                   <a:srgbClr val="000000"/>
                 </a:solidFill>
@@ -16740,7 +16740,7 @@
               </a:rPr>
               <a:t>додам провайдера, не чіпаючи код сервісу</a:t>
             </a:r>
-            <a:endParaRPr lang="en-US" sz="1250" dirty="0"/>
+            <a:endParaRPr lang="en-US" sz="1400" dirty="0"/>
           </a:p>
         </p:txBody>
       </p:sp>
@@ -16752,7 +16752,7 @@
         </p:nvSpPr>
         <p:spPr>
           <a:xfrm>
-            <a:off x="6144768" y="2724912"/>
+            <a:off x="6144768" y="4169664"/>
             <a:ext cx="256032" cy="256032"/>
           </a:xfrm>
           <a:prstGeom prst="roundRect">
@@ -16779,7 +16779,7 @@
         </p:nvSpPr>
         <p:spPr>
           <a:xfrm rot="2700000">
-            <a:off x="6207587" y="2864358"/>
+            <a:off x="6207587" y="4309110"/>
             <a:ext cx="58156" cy="27432"/>
           </a:xfrm>
           <a:prstGeom prst="rect">
@@ -16799,7 +16799,7 @@
         </p:nvSpPr>
         <p:spPr>
           <a:xfrm rot="-3000000">
-            <a:off x="6235385" y="2838298"/>
+            <a:off x="6235385" y="4283050"/>
             <a:ext cx="121432" cy="27432"/>
           </a:xfrm>
           <a:prstGeom prst="rect">
@@ -16819,8 +16819,8 @@
         </p:nvSpPr>
         <p:spPr>
           <a:xfrm>
-            <a:off x="6528816" y="2670048"/>
-            <a:ext cx="4617720" cy="384048"/>
+            <a:off x="6528816" y="3968496"/>
+            <a:ext cx="4617720" cy="658368"/>
           </a:xfrm>
           <a:prstGeom prst="rect">
             <a:avLst/>
@@ -16836,7 +16836,7 @@
               <a:buNone/>
             </a:pPr>
             <a:r>
-              <a:rPr lang="en-US" sz="1250" dirty="0">
+              <a:rPr lang="en-US" sz="1400" dirty="0">
                 <a:solidFill>
                   <a:srgbClr val="000000"/>
                 </a:solidFill>
@@ -16846,7 +16846,7 @@
               </a:rPr>
               <a:t>мій fallback-порядок записаний</a:t>
             </a:r>
-            <a:endParaRPr lang="en-US" sz="1250" dirty="0"/>
+            <a:endParaRPr lang="en-US" sz="1400" dirty="0"/>
           </a:p>
         </p:txBody>
       </p:sp>
@@ -16858,7 +16858,7 @@
         </p:nvSpPr>
         <p:spPr>
           <a:xfrm>
-            <a:off x="566928" y="3886200"/>
+            <a:off x="566928" y="5669280"/>
             <a:ext cx="10972800" cy="320040"/>
           </a:xfrm>
           <a:prstGeom prst="rect">
@@ -20690,11 +20690,11 @@
         <p:spPr>
           <a:xfrm>
             <a:off x="566928" y="1783080"/>
-            <a:ext cx="3553968" cy="1188720"/>
+            <a:ext cx="3553968" cy="1481328"/>
           </a:xfrm>
           <a:prstGeom prst="roundRect">
             <a:avLst>
-              <a:gd name="adj" fmla="val 7692"/>
+              <a:gd name="adj" fmla="val 6173"/>
             </a:avLst>
           </a:prstGeom>
           <a:solidFill>
@@ -20756,7 +20756,7 @@
         <p:spPr>
           <a:xfrm>
             <a:off x="749808" y="2203704"/>
-            <a:ext cx="3188208" cy="658368"/>
+            <a:ext cx="3188208" cy="950976"/>
           </a:xfrm>
           <a:prstGeom prst="rect">
             <a:avLst/>
@@ -20798,11 +20798,11 @@
         <p:spPr>
           <a:xfrm>
             <a:off x="4322064" y="1783080"/>
-            <a:ext cx="3553968" cy="1188720"/>
+            <a:ext cx="3553968" cy="1481328"/>
           </a:xfrm>
           <a:prstGeom prst="roundRect">
             <a:avLst>
-              <a:gd name="adj" fmla="val 7692"/>
+              <a:gd name="adj" fmla="val 6173"/>
             </a:avLst>
           </a:prstGeom>
           <a:solidFill>
@@ -20864,7 +20864,7 @@
         <p:spPr>
           <a:xfrm>
             <a:off x="4504944" y="2203704"/>
-            <a:ext cx="3188208" cy="658368"/>
+            <a:ext cx="3188208" cy="950976"/>
           </a:xfrm>
           <a:prstGeom prst="rect">
             <a:avLst/>
@@ -20906,11 +20906,11 @@
         <p:spPr>
           <a:xfrm>
             <a:off x="8077200" y="1783080"/>
-            <a:ext cx="3553968" cy="1188720"/>
+            <a:ext cx="3553968" cy="1481328"/>
           </a:xfrm>
           <a:prstGeom prst="roundRect">
             <a:avLst>
-              <a:gd name="adj" fmla="val 7692"/>
+              <a:gd name="adj" fmla="val 6173"/>
             </a:avLst>
           </a:prstGeom>
           <a:solidFill>
@@ -20972,7 +20972,7 @@
         <p:spPr>
           <a:xfrm>
             <a:off x="8260080" y="2203704"/>
-            <a:ext cx="3188208" cy="658368"/>
+            <a:ext cx="3188208" cy="950976"/>
           </a:xfrm>
           <a:prstGeom prst="rect">
             <a:avLst/>
@@ -21013,12 +21013,12 @@
         </p:nvSpPr>
         <p:spPr>
           <a:xfrm>
-            <a:off x="566928" y="3172968"/>
-            <a:ext cx="3553968" cy="1188720"/>
+            <a:off x="566928" y="3465576"/>
+            <a:ext cx="3553968" cy="1481328"/>
           </a:xfrm>
           <a:prstGeom prst="roundRect">
             <a:avLst>
-              <a:gd name="adj" fmla="val 7692"/>
+              <a:gd name="adj" fmla="val 6173"/>
             </a:avLst>
           </a:prstGeom>
           <a:solidFill>
@@ -21040,7 +21040,7 @@
         </p:nvSpPr>
         <p:spPr>
           <a:xfrm>
-            <a:off x="749808" y="3282696"/>
+            <a:off x="749808" y="3575304"/>
             <a:ext cx="3188208" cy="310896"/>
           </a:xfrm>
           <a:prstGeom prst="rect">
@@ -21079,8 +21079,8 @@
         </p:nvSpPr>
         <p:spPr>
           <a:xfrm>
-            <a:off x="749808" y="3593592"/>
-            <a:ext cx="3188208" cy="658368"/>
+            <a:off x="749808" y="3886200"/>
+            <a:ext cx="3188208" cy="950976"/>
           </a:xfrm>
           <a:prstGeom prst="rect">
             <a:avLst/>
@@ -21121,12 +21121,12 @@
         </p:nvSpPr>
         <p:spPr>
           <a:xfrm>
-            <a:off x="4322064" y="3172968"/>
-            <a:ext cx="3553968" cy="1188720"/>
+            <a:off x="4322064" y="3465576"/>
+            <a:ext cx="3553968" cy="1481328"/>
           </a:xfrm>
           <a:prstGeom prst="roundRect">
             <a:avLst>
-              <a:gd name="adj" fmla="val 7692"/>
+              <a:gd name="adj" fmla="val 6173"/>
             </a:avLst>
           </a:prstGeom>
           <a:solidFill>
@@ -21148,7 +21148,7 @@
         </p:nvSpPr>
         <p:spPr>
           <a:xfrm>
-            <a:off x="4504944" y="3282696"/>
+            <a:off x="4504944" y="3575304"/>
             <a:ext cx="3188208" cy="310896"/>
           </a:xfrm>
           <a:prstGeom prst="rect">
@@ -21187,8 +21187,8 @@
         </p:nvSpPr>
         <p:spPr>
           <a:xfrm>
-            <a:off x="4504944" y="3593592"/>
-            <a:ext cx="3188208" cy="658368"/>
+            <a:off x="4504944" y="3886200"/>
+            <a:ext cx="3188208" cy="950976"/>
           </a:xfrm>
           <a:prstGeom prst="rect">
             <a:avLst/>
@@ -21229,12 +21229,12 @@
         </p:nvSpPr>
         <p:spPr>
           <a:xfrm>
-            <a:off x="8077200" y="3172968"/>
-            <a:ext cx="3553968" cy="1188720"/>
+            <a:off x="8077200" y="3465576"/>
+            <a:ext cx="3553968" cy="1481328"/>
           </a:xfrm>
           <a:prstGeom prst="roundRect">
             <a:avLst>
-              <a:gd name="adj" fmla="val 7692"/>
+              <a:gd name="adj" fmla="val 6173"/>
             </a:avLst>
           </a:prstGeom>
           <a:solidFill>
@@ -21256,7 +21256,7 @@
         </p:nvSpPr>
         <p:spPr>
           <a:xfrm>
-            <a:off x="8260080" y="3282696"/>
+            <a:off x="8260080" y="3575304"/>
             <a:ext cx="3188208" cy="310896"/>
           </a:xfrm>
           <a:prstGeom prst="rect">
@@ -21295,8 +21295,8 @@
         </p:nvSpPr>
         <p:spPr>
           <a:xfrm>
-            <a:off x="8260080" y="3593592"/>
-            <a:ext cx="3188208" cy="658368"/>
+            <a:off x="8260080" y="3886200"/>
+            <a:ext cx="3188208" cy="950976"/>
           </a:xfrm>
           <a:prstGeom prst="rect">
             <a:avLst/>
@@ -21337,7 +21337,7 @@
         </p:nvSpPr>
         <p:spPr>
           <a:xfrm>
-            <a:off x="566928" y="4526280"/>
+            <a:off x="566928" y="5138928"/>
             <a:ext cx="11064240" cy="777240"/>
           </a:xfrm>
           <a:prstGeom prst="roundRect">
@@ -21364,7 +21364,7 @@
         </p:nvSpPr>
         <p:spPr>
           <a:xfrm>
-            <a:off x="786384" y="4672584"/>
+            <a:off x="786384" y="5285232"/>
             <a:ext cx="10625328" cy="484632"/>
           </a:xfrm>
           <a:prstGeom prst="rect">

--- a/docs/decks/L03.pptx
+++ b/docs/decks/L03.pptx
@@ -32,9 +32,10 @@
     <p:sldId id="280" r:id="rId26"/>
     <p:sldId id="281" r:id="rId27"/>
     <p:sldId id="282" r:id="rId28"/>
+    <p:sldId id="283" r:id="rId29"/>
   </p:sldIdLst>
   <p:notesMasterIdLst>
-    <p:notesMasterId r:id="rId29"/>
+    <p:notesMasterId r:id="rId30"/>
   </p:notesMasterIdLst>
   <p:sldSz cx="12192000" cy="6858000"/>
   <p:notesSz cx="6858000" cy="12192000"/>
@@ -2224,6 +2225,94 @@
             <a:fld id="{F7021451-1387-4CA6-816F-3879F97B5CBC}" type="slidenum">
               <a:rPr lang="en-US"/>
               <a:t>27</a:t>
+            </a:fld>
+            <a:endParaRPr lang="en-US"/>
+          </a:p>
+        </p:txBody>
+      </p:sp>
+    </p:spTree>
+    <p:extLst>
+      <p:ext uri="{BB962C8B-B14F-4D97-AF65-F5344CB8AC3E}">
+        <p14:creationId xmlns:p14="http://schemas.microsoft.com/office/powerpoint/2010/main" val="1024086991"/>
+      </p:ext>
+    </p:extLst>
+  </p:cSld>
+  <p:clrMapOvr>
+    <a:masterClrMapping/>
+  </p:clrMapOvr>
+</p:notes>
+</file>
+
+<file path=ppt/notesSlides/notesSlide28.xml><?xml version="1.0" encoding="utf-8"?>
+<p:notes xmlns:a="http://schemas.openxmlformats.org/drawingml/2006/main" xmlns:r="http://schemas.openxmlformats.org/officeDocument/2006/relationships" xmlns:p="http://schemas.openxmlformats.org/presentationml/2006/main">
+  <p:cSld>
+    <p:spTree>
+      <p:nvGrpSpPr>
+        <p:cNvPr id="1" name=""/>
+        <p:cNvGrpSpPr/>
+        <p:nvPr/>
+      </p:nvGrpSpPr>
+      <p:grpSpPr>
+        <a:xfrm>
+          <a:off x="0" y="0"/>
+          <a:ext cx="0" cy="0"/>
+          <a:chOff x="0" y="0"/>
+          <a:chExt cx="0" cy="0"/>
+        </a:xfrm>
+      </p:grpSpPr>
+      <p:sp>
+        <p:nvSpPr>
+          <p:cNvPr id="2" name="Slide Image Placeholder 1"/>
+          <p:cNvSpPr>
+            <a:spLocks noGrp="1" noRot="1" noChangeAspect="1"/>
+          </p:cNvSpPr>
+          <p:nvPr>
+            <p:ph type="sldImg"/>
+          </p:nvPr>
+        </p:nvSpPr>
+        <p:spPr/>
+      </p:sp>
+      <p:sp>
+        <p:nvSpPr>
+          <p:cNvPr id="3" name="Notes Placeholder 2"/>
+          <p:cNvSpPr>
+            <a:spLocks noGrp="1"/>
+          </p:cNvSpPr>
+          <p:nvPr>
+            <p:ph type="body" idx="1"/>
+          </p:nvPr>
+        </p:nvSpPr>
+        <p:spPr/>
+        <p:txBody>
+          <a:bodyPr/>
+          <a:lstStyle/>
+          <a:p>
+            <a:r>
+              <a:rPr lang="en-US" dirty="0"/>
+              <a:t/>
+            </a:r>
+            <a:endParaRPr lang="en-US" dirty="0"/>
+          </a:p>
+        </p:txBody>
+      </p:sp>
+      <p:sp>
+        <p:nvSpPr>
+          <p:cNvPr id="4" name="Slide Number Placeholder 3"/>
+          <p:cNvSpPr>
+            <a:spLocks noGrp="1"/>
+          </p:cNvSpPr>
+          <p:nvPr>
+            <p:ph type="sldNum" sz="quarter" idx="10"/>
+          </p:nvPr>
+        </p:nvSpPr>
+        <p:spPr/>
+        <p:txBody>
+          <a:bodyPr/>
+          <a:lstStyle/>
+          <a:p>
+            <a:fld id="{F7021451-1387-4CA6-816F-3879F97B5CBC}" type="slidenum">
+              <a:rPr lang="en-US"/>
+              <a:t>28</a:t>
             </a:fld>
             <a:endParaRPr lang="en-US"/>
           </a:p>
@@ -18858,6 +18947,109 @@
 </p:sld>
 </file>
 
+<file path=ppt/slides/slide28.xml><?xml version="1.0" encoding="utf-8"?>
+<p:sld xmlns:a="http://schemas.openxmlformats.org/drawingml/2006/main" xmlns:r="http://schemas.openxmlformats.org/officeDocument/2006/relationships" xmlns:p="http://schemas.openxmlformats.org/presentationml/2006/main">
+  <p:cSld name="Slide 28">
+    <p:spTree>
+      <p:nvGrpSpPr>
+        <p:cNvPr id="1" name=""/>
+        <p:cNvGrpSpPr/>
+        <p:nvPr/>
+      </p:nvGrpSpPr>
+      <p:grpSpPr>
+        <a:xfrm>
+          <a:off x="0" y="0"/>
+          <a:ext cx="0" cy="0"/>
+          <a:chOff x="0" y="0"/>
+          <a:chExt cx="0" cy="0"/>
+        </a:xfrm>
+      </p:grpSpPr>
+      <p:sp>
+        <p:nvSpPr>
+          <p:cNvPr id="2" name="Text 0"/>
+          <p:cNvSpPr/>
+          <p:nvPr/>
+        </p:nvSpPr>
+        <p:spPr>
+          <a:xfrm>
+            <a:off x="566928" y="384048"/>
+            <a:ext cx="5486400" cy="274320"/>
+          </a:xfrm>
+          <a:prstGeom prst="rect">
+            <a:avLst/>
+          </a:prstGeom>
+          <a:noFill/>
+          <a:ln/>
+        </p:spPr>
+        <p:txBody>
+          <a:bodyPr wrap="square" lIns="0" tIns="0" rIns="0" bIns="0" rtlCol="0" anchor="ctr"/>
+          <a:lstStyle/>
+          <a:p>
+            <a:pPr indent="0" marL="0">
+              <a:buNone/>
+            </a:pPr>
+            <a:r>
+              <a:rPr lang="en-US" sz="1200" b="1" spc="400" kern="0" dirty="0">
+                <a:solidFill>
+                  <a:srgbClr val="FFFFFF"/>
+                </a:solidFill>
+                <a:latin typeface="Montserrat" pitchFamily="34" charset="0"/>
+                <a:ea typeface="Montserrat" pitchFamily="34" charset="-122"/>
+                <a:cs typeface="Montserrat" pitchFamily="34" charset="-120"/>
+              </a:rPr>
+              <a:t>NEOVERSITY</a:t>
+            </a:r>
+            <a:endParaRPr lang="en-US" sz="1200" dirty="0"/>
+          </a:p>
+        </p:txBody>
+      </p:sp>
+      <p:sp>
+        <p:nvSpPr>
+          <p:cNvPr id="3" name="Text 1"/>
+          <p:cNvSpPr/>
+          <p:nvPr/>
+        </p:nvSpPr>
+        <p:spPr>
+          <a:xfrm>
+            <a:off x="566928" y="2834640"/>
+            <a:ext cx="11064240" cy="1463040"/>
+          </a:xfrm>
+          <a:prstGeom prst="rect">
+            <a:avLst/>
+          </a:prstGeom>
+          <a:noFill/>
+          <a:ln/>
+        </p:spPr>
+        <p:txBody>
+          <a:bodyPr wrap="square" lIns="0" tIns="0" rIns="0" bIns="0" rtlCol="0" anchor="ctr"/>
+          <a:lstStyle/>
+          <a:p>
+            <a:pPr indent="0" marL="0">
+              <a:buNone/>
+            </a:pPr>
+            <a:r>
+              <a:rPr lang="en-US" sz="7300" dirty="0">
+                <a:solidFill>
+                  <a:srgbClr val="FFFFFF"/>
+                </a:solidFill>
+                <a:latin typeface="Unbounded" pitchFamily="34" charset="0"/>
+                <a:ea typeface="Unbounded" pitchFamily="34" charset="-122"/>
+                <a:cs typeface="Unbounded" pitchFamily="34" charset="-120"/>
+              </a:rPr>
+              <a:t>ДЯКУЮ</a:t>
+            </a:r>
+            <a:endParaRPr lang="en-US" sz="7300" dirty="0"/>
+          </a:p>
+        </p:txBody>
+      </p:sp>
+    </p:spTree>
+  </p:cSld>
+  <p:clrMapOvr>
+    <a:masterClrMapping/>
+  </p:clrMapOvr>
+</p:sld>
+</file>
+
 <file path=ppt/slides/slide3.xml><?xml version="1.0" encoding="utf-8"?>
 <p:sld xmlns:a="http://schemas.openxmlformats.org/drawingml/2006/main" xmlns:r="http://schemas.openxmlformats.org/officeDocument/2006/relationships" xmlns:p="http://schemas.openxmlformats.org/presentationml/2006/main">
   <p:cSld name="Slide 3">

--- a/docs/decks/L03.pptx
+++ b/docs/decks/L03.pptx
@@ -6763,7 +6763,7 @@
                       <a:tailEnd type="none" w="med" len="med"/>
                     </a:lnB>
                     <a:solidFill>
-                      <a:srgbClr val="000000"/>
+                      <a:srgbClr val="5A05F4"/>
                     </a:solidFill>
                   </a:tcPr>
                 </a:tc>
@@ -6831,7 +6831,7 @@
                       <a:tailEnd type="none" w="med" len="med"/>
                     </a:lnB>
                     <a:solidFill>
-                      <a:srgbClr val="000000"/>
+                      <a:srgbClr val="5A05F4"/>
                     </a:solidFill>
                   </a:tcPr>
                 </a:tc>
@@ -6899,7 +6899,7 @@
                       <a:tailEnd type="none" w="med" len="med"/>
                     </a:lnB>
                     <a:solidFill>
-                      <a:srgbClr val="000000"/>
+                      <a:srgbClr val="5A05F4"/>
                     </a:solidFill>
                   </a:tcPr>
                 </a:tc>
@@ -6916,7 +6916,7 @@
                       <a:r>
                         <a:rPr lang="en-US" sz="1150" b="1" dirty="0">
                           <a:solidFill>
-                            <a:srgbClr val="3FCF8E"/>
+                            <a:srgbClr val="106B41"/>
                           </a:solidFill>
                           <a:latin typeface="Montserrat" pitchFamily="34" charset="0"/>
                           <a:ea typeface="Montserrat" pitchFamily="34" charset="-122"/>
@@ -6969,7 +6969,7 @@
                       <a:tailEnd type="none" w="med" len="med"/>
                     </a:lnB>
                     <a:solidFill>
-                      <a:srgbClr val="000000"/>
+                      <a:srgbClr val="F5F3FA"/>
                     </a:solidFill>
                   </a:tcPr>
                 </a:tc>
@@ -6984,7 +6984,7 @@
                       <a:r>
                         <a:rPr lang="en-US" sz="1150" dirty="0">
                           <a:solidFill>
-                            <a:srgbClr val="3FCF8E"/>
+                            <a:srgbClr val="106B41"/>
                           </a:solidFill>
                           <a:latin typeface="Montserrat" pitchFamily="34" charset="0"/>
                           <a:ea typeface="Montserrat" pitchFamily="34" charset="-122"/>
@@ -7037,7 +7037,7 @@
                       <a:tailEnd type="none" w="med" len="med"/>
                     </a:lnB>
                     <a:solidFill>
-                      <a:srgbClr val="000000"/>
+                      <a:srgbClr val="F5F3FA"/>
                     </a:solidFill>
                   </a:tcPr>
                 </a:tc>
@@ -7052,7 +7052,7 @@
                       <a:r>
                         <a:rPr lang="en-US" sz="1150" dirty="0">
                           <a:solidFill>
-                            <a:srgbClr val="3FCF8E"/>
+                            <a:srgbClr val="106B41"/>
                           </a:solidFill>
                           <a:latin typeface="Montserrat" pitchFamily="34" charset="0"/>
                           <a:ea typeface="Montserrat" pitchFamily="34" charset="-122"/>
@@ -7105,7 +7105,7 @@
                       <a:tailEnd type="none" w="med" len="med"/>
                     </a:lnB>
                     <a:solidFill>
-                      <a:srgbClr val="000000"/>
+                      <a:srgbClr val="F5F3FA"/>
                     </a:solidFill>
                   </a:tcPr>
                 </a:tc>
@@ -8732,7 +8732,7 @@
                       <a:tailEnd type="none" w="med" len="med"/>
                     </a:lnB>
                     <a:solidFill>
-                      <a:srgbClr val="000000"/>
+                      <a:srgbClr val="5A05F4"/>
                     </a:solidFill>
                   </a:tcPr>
                 </a:tc>
@@ -8800,7 +8800,7 @@
                       <a:tailEnd type="none" w="med" len="med"/>
                     </a:lnB>
                     <a:solidFill>
-                      <a:srgbClr val="000000"/>
+                      <a:srgbClr val="5A05F4"/>
                     </a:solidFill>
                   </a:tcPr>
                 </a:tc>
@@ -8868,7 +8868,7 @@
                       <a:tailEnd type="none" w="med" len="med"/>
                     </a:lnB>
                     <a:solidFill>
-                      <a:srgbClr val="000000"/>
+                      <a:srgbClr val="5A05F4"/>
                     </a:solidFill>
                   </a:tcPr>
                 </a:tc>

--- a/docs/decks/L03.pptx
+++ b/docs/decks/L03.pptx
@@ -6704,7 +6704,7 @@
                     <a:bodyPr/>
                     <a:lstStyle/>
                     <a:p>
-                      <a:pPr indent="0" marL="0">
+                      <a:pPr algn="ctr" indent="0" marL="0">
                         <a:buNone/>
                       </a:pPr>
                       <a:r>
@@ -6772,7 +6772,7 @@
                     <a:bodyPr/>
                     <a:lstStyle/>
                     <a:p>
-                      <a:pPr indent="0" marL="0">
+                      <a:pPr algn="ctr" indent="0" marL="0">
                         <a:buNone/>
                       </a:pPr>
                       <a:r>
@@ -6840,7 +6840,7 @@
                     <a:bodyPr/>
                     <a:lstStyle/>
                     <a:p>
-                      <a:pPr indent="0" marL="0">
+                      <a:pPr algn="ctr" indent="0" marL="0">
                         <a:buNone/>
                       </a:pPr>
                       <a:r>
@@ -8673,7 +8673,7 @@
                     <a:bodyPr/>
                     <a:lstStyle/>
                     <a:p>
-                      <a:pPr indent="0" marL="0">
+                      <a:pPr algn="ctr" indent="0" marL="0">
                         <a:buNone/>
                       </a:pPr>
                       <a:r>
@@ -8741,7 +8741,7 @@
                     <a:bodyPr/>
                     <a:lstStyle/>
                     <a:p>
-                      <a:pPr indent="0" marL="0">
+                      <a:pPr algn="ctr" indent="0" marL="0">
                         <a:buNone/>
                       </a:pPr>
                       <a:r>
@@ -8809,7 +8809,7 @@
                     <a:bodyPr/>
                     <a:lstStyle/>
                     <a:p>
-                      <a:pPr indent="0" marL="0">
+                      <a:pPr algn="ctr" indent="0" marL="0">
                         <a:buNone/>
                       </a:pPr>
                       <a:r>

--- a/docs/decks/L03.pptx
+++ b/docs/decks/L03.pptx
@@ -4,6 +4,9 @@
   <p:sldMasterIdLst>
     <p:sldMasterId id="2147483648" r:id="rId1"/>
   </p:sldMasterIdLst>
+  <p:notesMasterIdLst>
+    <p:notesMasterId r:id="rId30"/>
+  </p:notesMasterIdLst>
   <p:sldIdLst>
     <p:sldId id="256" r:id="rId2"/>
     <p:sldId id="257" r:id="rId3"/>
@@ -34,9 +37,6 @@
     <p:sldId id="282" r:id="rId28"/>
     <p:sldId id="283" r:id="rId29"/>
   </p:sldIdLst>
-  <p:notesMasterIdLst>
-    <p:notesMasterId r:id="rId30"/>
-  </p:notesMasterIdLst>
   <p:sldSz cx="12192000" cy="6858000"/>
   <p:notesSz cx="6858000" cy="12192000"/>
   <p:defaultTextStyle>
@@ -131,6 +131,11 @@
       </a:defRPr>
     </a:lvl9pPr>
   </p:defaultTextStyle>
+  <p:extLst>
+    <p:ext uri="{EFAFB233-063F-42B5-8137-9DF3F51BA10A}">
+      <p15:sldGuideLst xmlns:p15="http://schemas.microsoft.com/office/powerpoint/2012/main"/>
+    </p:ext>
+  </p:extLst>
 </p:presentation>
 </file>
 
@@ -156,234 +161,10 @@
           <a:chExt cx="0" cy="0"/>
         </a:xfrm>
       </p:grpSpPr>
-      <p:sp>
-        <p:nvSpPr>
-          <p:cNvPr id="2" name="Header Placeholder 1"/>
-          <p:cNvSpPr>
-            <a:spLocks noGrp="1"/>
-          </p:cNvSpPr>
-          <p:nvPr>
-            <p:ph type="hdr" sz="quarter"/>
-          </p:nvPr>
-        </p:nvSpPr>
-        <p:spPr>
-          <a:xfrm>
-            <a:off x="0" y="0"/>
-            <a:ext cx="2971800" cy="458788"/>
-          </a:xfrm>
-          <a:prstGeom prst="rect">
-            <a:avLst/>
-          </a:prstGeom>
-        </p:spPr>
-        <p:txBody>
-          <a:bodyPr vert="horz" lIns="91440" tIns="45720" rIns="91440" bIns="45720" rtlCol="0"/>
-          <a:lstStyle>
-            <a:lvl1pPr algn="l">
-              <a:defRPr sz="1200"/>
-            </a:lvl1pPr>
-          </a:lstStyle>
-          <a:p>
-            <a:endParaRPr lang="en-US"/>
-          </a:p>
-        </p:txBody>
-      </p:sp>
-      <p:sp>
-        <p:nvSpPr>
-          <p:cNvPr id="3" name="Date Placeholder 2"/>
-          <p:cNvSpPr>
-            <a:spLocks noGrp="1"/>
-          </p:cNvSpPr>
-          <p:nvPr>
-            <p:ph type="dt" idx="1"/>
-          </p:nvPr>
-        </p:nvSpPr>
-        <p:spPr>
-          <a:xfrm>
-            <a:off x="3884613" y="0"/>
-            <a:ext cx="2971800" cy="458788"/>
-          </a:xfrm>
-          <a:prstGeom prst="rect">
-            <a:avLst/>
-          </a:prstGeom>
-        </p:spPr>
-        <p:txBody>
-          <a:bodyPr vert="horz" lIns="91440" tIns="45720" rIns="91440" bIns="45720" rtlCol="0"/>
-          <a:lstStyle>
-            <a:lvl1pPr algn="r">
-              <a:defRPr sz="1200"/>
-            </a:lvl1pPr>
-          </a:lstStyle>
-          <a:p>
-            <a:fld id="{5282F153-3F37-0F45-9E97-73ACFA13230C}" type="datetimeFigureOut">
-              <a:rPr lang="en-US"/>
-              <a:t>7/23/19</a:t>
-            </a:fld>
-            <a:endParaRPr lang="en-US"/>
-          </a:p>
-        </p:txBody>
-      </p:sp>
-      <p:sp>
-        <p:nvSpPr>
-          <p:cNvPr id="4" name="Slide Image Placeholder 3"/>
-          <p:cNvSpPr>
-            <a:spLocks noGrp="1" noRot="1" noChangeAspect="1"/>
-          </p:cNvSpPr>
-          <p:nvPr>
-            <p:ph type="sldImg" idx="2"/>
-          </p:nvPr>
-        </p:nvSpPr>
-        <p:spPr>
-          <a:xfrm>
-            <a:off x="685800" y="1143000"/>
-            <a:ext cx="5486400" cy="3086100"/>
-          </a:xfrm>
-          <a:prstGeom prst="rect">
-            <a:avLst/>
-          </a:prstGeom>
-          <a:noFill/>
-          <a:ln w="12700">
-            <a:solidFill>
-              <a:prstClr val="black"/>
-            </a:solidFill>
-          </a:ln>
-        </p:spPr>
-        <p:txBody>
-          <a:bodyPr vert="horz" lIns="91440" tIns="45720" rIns="91440" bIns="45720" rtlCol="0" anchor="ctr"/>
-          <a:lstStyle/>
-          <a:p>
-            <a:endParaRPr lang="en-US"/>
-          </a:p>
-        </p:txBody>
-      </p:sp>
-      <p:sp>
-        <p:nvSpPr>
-          <p:cNvPr id="5" name="Notes Placeholder 4"/>
-          <p:cNvSpPr>
-            <a:spLocks noGrp="1"/>
-          </p:cNvSpPr>
-          <p:nvPr>
-            <p:ph type="body" sz="quarter" idx="3"/>
-          </p:nvPr>
-        </p:nvSpPr>
-        <p:spPr>
-          <a:xfrm>
-            <a:off x="685800" y="4400550"/>
-            <a:ext cx="5486400" cy="3600450"/>
-          </a:xfrm>
-          <a:prstGeom prst="rect">
-            <a:avLst/>
-          </a:prstGeom>
-        </p:spPr>
-        <p:txBody>
-          <a:bodyPr vert="horz" lIns="91440" tIns="45720" rIns="91440" bIns="45720" rtlCol="0"/>
-          <a:lstStyle/>
-          <a:p>
-            <a:pPr lvl="0"/>
-            <a:r>
-              <a:rPr lang="en-US"/>
-              <a:t>Click to edit Master text styles</a:t>
-            </a:r>
-          </a:p>
-          <a:p>
-            <a:pPr lvl="1"/>
-            <a:r>
-              <a:rPr lang="en-US"/>
-              <a:t>Second level</a:t>
-            </a:r>
-          </a:p>
-          <a:p>
-            <a:pPr lvl="2"/>
-            <a:r>
-              <a:rPr lang="en-US"/>
-              <a:t>Third level</a:t>
-            </a:r>
-          </a:p>
-          <a:p>
-            <a:pPr lvl="3"/>
-            <a:r>
-              <a:rPr lang="en-US"/>
-              <a:t>Fourth level</a:t>
-            </a:r>
-          </a:p>
-          <a:p>
-            <a:pPr lvl="4"/>
-            <a:r>
-              <a:rPr lang="en-US"/>
-              <a:t>Fifth level</a:t>
-            </a:r>
-          </a:p>
-        </p:txBody>
-      </p:sp>
-      <p:sp>
-        <p:nvSpPr>
-          <p:cNvPr id="6" name="Footer Placeholder 5"/>
-          <p:cNvSpPr>
-            <a:spLocks noGrp="1"/>
-          </p:cNvSpPr>
-          <p:nvPr>
-            <p:ph type="ftr" sz="quarter" idx="4"/>
-          </p:nvPr>
-        </p:nvSpPr>
-        <p:spPr>
-          <a:xfrm>
-            <a:off x="0" y="8685213"/>
-            <a:ext cx="2971800" cy="458787"/>
-          </a:xfrm>
-          <a:prstGeom prst="rect">
-            <a:avLst/>
-          </a:prstGeom>
-        </p:spPr>
-        <p:txBody>
-          <a:bodyPr vert="horz" lIns="91440" tIns="45720" rIns="91440" bIns="45720" rtlCol="0" anchor="b"/>
-          <a:lstStyle>
-            <a:lvl1pPr algn="l">
-              <a:defRPr sz="1200"/>
-            </a:lvl1pPr>
-          </a:lstStyle>
-          <a:p>
-            <a:endParaRPr lang="en-US"/>
-          </a:p>
-        </p:txBody>
-      </p:sp>
-      <p:sp>
-        <p:nvSpPr>
-          <p:cNvPr id="7" name="Slide Number Placeholder 6"/>
-          <p:cNvSpPr>
-            <a:spLocks noGrp="1"/>
-          </p:cNvSpPr>
-          <p:nvPr>
-            <p:ph type="sldNum" sz="quarter" idx="5"/>
-          </p:nvPr>
-        </p:nvSpPr>
-        <p:spPr>
-          <a:xfrm>
-            <a:off x="3884613" y="8685213"/>
-            <a:ext cx="2971800" cy="458787"/>
-          </a:xfrm>
-          <a:prstGeom prst="rect">
-            <a:avLst/>
-          </a:prstGeom>
-        </p:spPr>
-        <p:txBody>
-          <a:bodyPr vert="horz" lIns="91440" tIns="45720" rIns="91440" bIns="45720" rtlCol="0" anchor="b"/>
-          <a:lstStyle>
-            <a:lvl1pPr algn="r">
-              <a:defRPr sz="1200"/>
-            </a:lvl1pPr>
-          </a:lstStyle>
-          <a:p>
-            <a:fld id="{CE5E9CC1-C706-0F49-92D6-E571CC5EEA8F}" type="slidenum">
-              <a:rPr lang="en-US"/>
-              <a:t>‹#›</a:t>
-            </a:fld>
-            <a:endParaRPr lang="en-US"/>
-          </a:p>
-        </p:txBody>
-      </p:sp>
     </p:spTree>
     <p:extLst>
       <p:ext uri="{BB962C8B-B14F-4D97-AF65-F5344CB8AC3E}">
-        <p14:creationId xmlns:p14="http://schemas.microsoft.com/office/powerpoint/2010/main" val="1024086991"/>
+        <p14:creationId xmlns:p14="http://schemas.microsoft.com/office/powerpoint/2010/main" val="3646573509"/>
       </p:ext>
     </p:extLst>
   </p:cSld>
@@ -527,10 +308,6 @@
           <a:bodyPr/>
           <a:lstStyle/>
           <a:p>
-            <a:r>
-              <a:rPr lang="en-US" dirty="0"/>
-              <a:t/>
-            </a:r>
             <a:endParaRPr lang="en-US" dirty="0"/>
           </a:p>
         </p:txBody>
@@ -615,10 +392,6 @@
           <a:bodyPr/>
           <a:lstStyle/>
           <a:p>
-            <a:r>
-              <a:rPr lang="en-US" dirty="0"/>
-              <a:t/>
-            </a:r>
             <a:endParaRPr lang="en-US" dirty="0"/>
           </a:p>
         </p:txBody>
@@ -703,10 +476,6 @@
           <a:bodyPr/>
           <a:lstStyle/>
           <a:p>
-            <a:r>
-              <a:rPr lang="en-US" dirty="0"/>
-              <a:t/>
-            </a:r>
             <a:endParaRPr lang="en-US" dirty="0"/>
           </a:p>
         </p:txBody>
@@ -791,10 +560,6 @@
           <a:bodyPr/>
           <a:lstStyle/>
           <a:p>
-            <a:r>
-              <a:rPr lang="en-US" dirty="0"/>
-              <a:t/>
-            </a:r>
             <a:endParaRPr lang="en-US" dirty="0"/>
           </a:p>
         </p:txBody>
@@ -879,10 +644,6 @@
           <a:bodyPr/>
           <a:lstStyle/>
           <a:p>
-            <a:r>
-              <a:rPr lang="en-US" dirty="0"/>
-              <a:t/>
-            </a:r>
             <a:endParaRPr lang="en-US" dirty="0"/>
           </a:p>
         </p:txBody>
@@ -967,10 +728,6 @@
           <a:bodyPr/>
           <a:lstStyle/>
           <a:p>
-            <a:r>
-              <a:rPr lang="en-US" dirty="0"/>
-              <a:t/>
-            </a:r>
             <a:endParaRPr lang="en-US" dirty="0"/>
           </a:p>
         </p:txBody>
@@ -1055,10 +812,6 @@
           <a:bodyPr/>
           <a:lstStyle/>
           <a:p>
-            <a:r>
-              <a:rPr lang="en-US" dirty="0"/>
-              <a:t/>
-            </a:r>
             <a:endParaRPr lang="en-US" dirty="0"/>
           </a:p>
         </p:txBody>
@@ -1143,10 +896,6 @@
           <a:bodyPr/>
           <a:lstStyle/>
           <a:p>
-            <a:r>
-              <a:rPr lang="en-US" dirty="0"/>
-              <a:t/>
-            </a:r>
             <a:endParaRPr lang="en-US" dirty="0"/>
           </a:p>
         </p:txBody>
@@ -1231,10 +980,6 @@
           <a:bodyPr/>
           <a:lstStyle/>
           <a:p>
-            <a:r>
-              <a:rPr lang="en-US" dirty="0"/>
-              <a:t/>
-            </a:r>
             <a:endParaRPr lang="en-US" dirty="0"/>
           </a:p>
         </p:txBody>
@@ -1319,10 +1064,6 @@
           <a:bodyPr/>
           <a:lstStyle/>
           <a:p>
-            <a:r>
-              <a:rPr lang="en-US" dirty="0"/>
-              <a:t/>
-            </a:r>
             <a:endParaRPr lang="en-US" dirty="0"/>
           </a:p>
         </p:txBody>
@@ -1407,10 +1148,6 @@
           <a:bodyPr/>
           <a:lstStyle/>
           <a:p>
-            <a:r>
-              <a:rPr lang="en-US" dirty="0"/>
-              <a:t/>
-            </a:r>
             <a:endParaRPr lang="en-US" dirty="0"/>
           </a:p>
         </p:txBody>
@@ -1495,10 +1232,6 @@
           <a:bodyPr/>
           <a:lstStyle/>
           <a:p>
-            <a:r>
-              <a:rPr lang="en-US" dirty="0"/>
-              <a:t/>
-            </a:r>
             <a:endParaRPr lang="en-US" dirty="0"/>
           </a:p>
         </p:txBody>
@@ -1583,10 +1316,6 @@
           <a:bodyPr/>
           <a:lstStyle/>
           <a:p>
-            <a:r>
-              <a:rPr lang="en-US" dirty="0"/>
-              <a:t/>
-            </a:r>
             <a:endParaRPr lang="en-US" dirty="0"/>
           </a:p>
         </p:txBody>
@@ -1671,10 +1400,6 @@
           <a:bodyPr/>
           <a:lstStyle/>
           <a:p>
-            <a:r>
-              <a:rPr lang="en-US" dirty="0"/>
-              <a:t/>
-            </a:r>
             <a:endParaRPr lang="en-US" dirty="0"/>
           </a:p>
         </p:txBody>
@@ -1759,10 +1484,6 @@
           <a:bodyPr/>
           <a:lstStyle/>
           <a:p>
-            <a:r>
-              <a:rPr lang="en-US" dirty="0"/>
-              <a:t/>
-            </a:r>
             <a:endParaRPr lang="en-US" dirty="0"/>
           </a:p>
         </p:txBody>
@@ -1847,10 +1568,6 @@
           <a:bodyPr/>
           <a:lstStyle/>
           <a:p>
-            <a:r>
-              <a:rPr lang="en-US" dirty="0"/>
-              <a:t/>
-            </a:r>
             <a:endParaRPr lang="en-US" dirty="0"/>
           </a:p>
         </p:txBody>
@@ -1935,10 +1652,6 @@
           <a:bodyPr/>
           <a:lstStyle/>
           <a:p>
-            <a:r>
-              <a:rPr lang="en-US" dirty="0"/>
-              <a:t/>
-            </a:r>
             <a:endParaRPr lang="en-US" dirty="0"/>
           </a:p>
         </p:txBody>
@@ -2023,10 +1736,6 @@
           <a:bodyPr/>
           <a:lstStyle/>
           <a:p>
-            <a:r>
-              <a:rPr lang="en-US" dirty="0"/>
-              <a:t/>
-            </a:r>
             <a:endParaRPr lang="en-US" dirty="0"/>
           </a:p>
         </p:txBody>
@@ -2111,10 +1820,6 @@
           <a:bodyPr/>
           <a:lstStyle/>
           <a:p>
-            <a:r>
-              <a:rPr lang="en-US" dirty="0"/>
-              <a:t/>
-            </a:r>
             <a:endParaRPr lang="en-US" dirty="0"/>
           </a:p>
         </p:txBody>
@@ -2199,10 +1904,6 @@
           <a:bodyPr/>
           <a:lstStyle/>
           <a:p>
-            <a:r>
-              <a:rPr lang="en-US" dirty="0"/>
-              <a:t/>
-            </a:r>
             <a:endParaRPr lang="en-US" dirty="0"/>
           </a:p>
         </p:txBody>
@@ -2287,10 +1988,6 @@
           <a:bodyPr/>
           <a:lstStyle/>
           <a:p>
-            <a:r>
-              <a:rPr lang="en-US" dirty="0"/>
-              <a:t/>
-            </a:r>
             <a:endParaRPr lang="en-US" dirty="0"/>
           </a:p>
         </p:txBody>
@@ -2375,10 +2072,6 @@
           <a:bodyPr/>
           <a:lstStyle/>
           <a:p>
-            <a:r>
-              <a:rPr lang="en-US" dirty="0"/>
-              <a:t/>
-            </a:r>
             <a:endParaRPr lang="en-US" dirty="0"/>
           </a:p>
         </p:txBody>
@@ -2463,10 +2156,6 @@
           <a:bodyPr/>
           <a:lstStyle/>
           <a:p>
-            <a:r>
-              <a:rPr lang="en-US" dirty="0"/>
-              <a:t/>
-            </a:r>
             <a:endParaRPr lang="en-US" dirty="0"/>
           </a:p>
         </p:txBody>
@@ -2551,10 +2240,6 @@
           <a:bodyPr/>
           <a:lstStyle/>
           <a:p>
-            <a:r>
-              <a:rPr lang="en-US" dirty="0"/>
-              <a:t/>
-            </a:r>
             <a:endParaRPr lang="en-US" dirty="0"/>
           </a:p>
         </p:txBody>
@@ -2639,10 +2324,6 @@
           <a:bodyPr/>
           <a:lstStyle/>
           <a:p>
-            <a:r>
-              <a:rPr lang="en-US" dirty="0"/>
-              <a:t/>
-            </a:r>
             <a:endParaRPr lang="en-US" dirty="0"/>
           </a:p>
         </p:txBody>
@@ -2727,10 +2408,6 @@
           <a:bodyPr/>
           <a:lstStyle/>
           <a:p>
-            <a:r>
-              <a:rPr lang="en-US" dirty="0"/>
-              <a:t/>
-            </a:r>
             <a:endParaRPr lang="en-US" dirty="0"/>
           </a:p>
         </p:txBody>
@@ -2815,10 +2492,6 @@
           <a:bodyPr/>
           <a:lstStyle/>
           <a:p>
-            <a:r>
-              <a:rPr lang="en-US" dirty="0"/>
-              <a:t/>
-            </a:r>
             <a:endParaRPr lang="en-US" dirty="0"/>
           </a:p>
         </p:txBody>
@@ -2903,10 +2576,6 @@
           <a:bodyPr/>
           <a:lstStyle/>
           <a:p>
-            <a:r>
-              <a:rPr lang="en-US" dirty="0"/>
-              <a:t/>
-            </a:r>
             <a:endParaRPr lang="en-US" dirty="0"/>
           </a:p>
         </p:txBody>
@@ -2989,7 +2658,7 @@
           </a:prstGeom>
           <a:extLst>
             <a:ext uri="{C572A759-6A51-4108-AA02-DFA0A04FC94B}">
-              <ma14:wrappingTextBoxFlag xmlns:ma14="http://schemas.microsoft.com/office/mac/drawingml/2011/main" val="0"/>
+              <ma14:wrappingTextBoxFlag xmlns="" xmlns:ma14="http://schemas.microsoft.com/office/mac/drawingml/2011/main" val="0"/>
             </a:ext>
           </a:extLst>
         </p:spPr>
@@ -3010,8 +2679,8 @@
           <a:p>
             <a:pPr algn="l"/>
             <a:fld id="{F7021451-1387-4CA6-816F-3879F97B5CBC}" type="slidenum">
-              <a:rPr b="0" lang="en-US"/>
-              <a:t>1000</a:t>
+              <a:rPr lang="en-US" b="0"/>
+              <a:t>‹#›</a:t>
             </a:fld>
             <a:endParaRPr lang="en-US"/>
           </a:p>
@@ -3033,6 +2702,7 @@
         <a:solidFill>
           <a:srgbClr val="000000"/>
         </a:solidFill>
+        <a:effectLst/>
       </p:bgPr>
     </p:bg>
     <p:spTree>
@@ -3051,14 +2721,14 @@
       </p:grpSpPr>
       <p:pic>
         <p:nvPicPr>
-          <p:cNvPr id="2" name="Image 0" descr="preencoded.png">    </p:cNvPr>
+          <p:cNvPr id="2" name="Image 0" descr="preencoded.png"/>
           <p:cNvPicPr>
             <a:picLocks noChangeAspect="1"/>
           </p:cNvPicPr>
           <p:nvPr/>
         </p:nvPicPr>
         <p:blipFill>
-          <a:blip r:embed="rId1"/>
+          <a:blip r:embed="rId2"/>
           <a:stretch>
             <a:fillRect/>
           </a:stretch>
@@ -3089,6 +2759,7 @@
         <a:solidFill>
           <a:srgbClr val="000000"/>
         </a:solidFill>
+        <a:effectLst/>
       </p:bgPr>
     </p:bg>
     <p:spTree>
@@ -3107,14 +2778,14 @@
       </p:grpSpPr>
       <p:pic>
         <p:nvPicPr>
-          <p:cNvPr id="2" name="Image 0" descr="preencoded.png">    </p:cNvPr>
+          <p:cNvPr id="2" name="Image 0" descr="preencoded.png"/>
           <p:cNvPicPr>
             <a:picLocks noChangeAspect="1"/>
           </p:cNvPicPr>
           <p:nvPr/>
         </p:nvPicPr>
         <p:blipFill>
-          <a:blip r:embed="rId1"/>
+          <a:blip r:embed="rId2"/>
           <a:stretch>
             <a:fillRect/>
           </a:stretch>
@@ -3145,6 +2816,7 @@
         <a:solidFill>
           <a:srgbClr val="000000"/>
         </a:solidFill>
+        <a:effectLst/>
       </p:bgPr>
     </p:bg>
     <p:spTree>
@@ -3163,14 +2835,14 @@
       </p:grpSpPr>
       <p:pic>
         <p:nvPicPr>
-          <p:cNvPr id="2" name="Image 0" descr="preencoded.png">    </p:cNvPr>
+          <p:cNvPr id="2" name="Image 0" descr="preencoded.png"/>
           <p:cNvPicPr>
             <a:picLocks noChangeAspect="1"/>
           </p:cNvPicPr>
           <p:nvPr/>
         </p:nvPicPr>
         <p:blipFill>
-          <a:blip r:embed="rId1"/>
+          <a:blip r:embed="rId2"/>
           <a:stretch>
             <a:fillRect/>
           </a:stretch>
@@ -3196,6 +2868,11 @@
 <file path=ppt/slideMasters/slideMaster1.xml><?xml version="1.0" encoding="utf-8"?>
 <p:sldMaster xmlns:a="http://schemas.openxmlformats.org/drawingml/2006/main" xmlns:r="http://schemas.openxmlformats.org/officeDocument/2006/relationships" xmlns:p="http://schemas.openxmlformats.org/presentationml/2006/main">
   <p:cSld>
+    <p:bg>
+      <p:bgRef idx="1001">
+        <a:schemeClr val="bg1"/>
+      </p:bgRef>
+    </p:bg>
     <p:spTree>
       <p:nvGrpSpPr>
         <p:cNvPr id="1" name=""/>
@@ -3230,7 +2907,7 @@
           </a:prstGeom>
           <a:extLst>
             <a:ext uri="{C572A759-6A51-4108-AA02-DFA0A04FC94B}">
-              <ma14:wrappingTextBoxFlag xmlns:ma14="http://schemas.microsoft.com/office/mac/drawingml/2011/main" val="0"/>
+              <ma14:wrappingTextBoxFlag xmlns="" xmlns:ma14="http://schemas.microsoft.com/office/mac/drawingml/2011/main" val="0"/>
             </a:ext>
           </a:extLst>
         </p:spPr>
@@ -3251,8 +2928,8 @@
           <a:p>
             <a:pPr algn="l"/>
             <a:fld id="{F7021451-1387-4CA6-816F-3879F97B5CBC}" type="slidenum">
-              <a:rPr b="0" lang="en-US"/>
-              <a:t>null</a:t>
+              <a:rPr lang="en-US" b="0"/>
+              <a:t>‹#›</a:t>
             </a:fld>
             <a:endParaRPr lang="en-US"/>
           </a:p>
@@ -3559,11 +3236,11 @@
           <a:bodyPr wrap="square" lIns="0" tIns="0" rIns="0" bIns="0" rtlCol="0" anchor="ctr"/>
           <a:lstStyle/>
           <a:p>
-            <a:pPr indent="0" marL="0">
-              <a:buNone/>
-            </a:pPr>
-            <a:r>
-              <a:rPr lang="en-US" sz="1200" b="1" spc="400" kern="0" dirty="0">
+            <a:pPr marL="0" indent="0">
+              <a:buNone/>
+            </a:pPr>
+            <a:r>
+              <a:rPr lang="en-US" sz="1200" b="1" kern="0" spc="400" dirty="0">
                 <a:solidFill>
                   <a:srgbClr val="FFFFFF"/>
                 </a:solidFill>
@@ -3598,11 +3275,11 @@
           <a:bodyPr wrap="square" lIns="0" tIns="0" rIns="0" bIns="0" rtlCol="0" anchor="ctr"/>
           <a:lstStyle/>
           <a:p>
-            <a:pPr indent="0" marL="0">
-              <a:buNone/>
-            </a:pPr>
-            <a:r>
-              <a:rPr lang="en-US" sz="1200" b="1" spc="300" kern="0" dirty="0">
+            <a:pPr marL="0" indent="0">
+              <a:buNone/>
+            </a:pPr>
+            <a:r>
+              <a:rPr lang="en-US" sz="1200" b="1" kern="0" spc="300" dirty="0">
                 <a:solidFill>
                   <a:srgbClr val="C4B3F5"/>
                 </a:solidFill>
@@ -3637,7 +3314,7 @@
           <a:bodyPr wrap="square" lIns="0" tIns="0" rIns="0" bIns="0" rtlCol="0" anchor="t"/>
           <a:lstStyle/>
           <a:p>
-            <a:pPr indent="0" marL="0">
+            <a:pPr marL="0" indent="0">
               <a:lnSpc>
                 <a:spcPct val="102000"/>
               </a:lnSpc>
@@ -3657,7 +3334,7 @@
             <a:endParaRPr lang="en-US" sz="3600" dirty="0"/>
           </a:p>
           <a:p>
-            <a:pPr indent="0" marL="0">
+            <a:pPr marL="0" indent="0">
               <a:lnSpc>
                 <a:spcPct val="102000"/>
               </a:lnSpc>
@@ -3699,7 +3376,7 @@
           <a:bodyPr wrap="square" lIns="0" tIns="0" rIns="0" bIns="0" rtlCol="0" anchor="ctr"/>
           <a:lstStyle/>
           <a:p>
-            <a:pPr indent="0" marL="0">
+            <a:pPr marL="0" indent="0">
               <a:lnSpc>
                 <a:spcPct val="120000"/>
               </a:lnSpc>
@@ -3767,7 +3444,7 @@
           <a:bodyPr wrap="square" lIns="0" tIns="0" rIns="0" bIns="0" rtlCol="0" anchor="ctr"/>
           <a:lstStyle/>
           <a:p>
-            <a:pPr algn="ctr" indent="0" marL="0">
+            <a:pPr marL="0" indent="0" algn="ctr">
               <a:buNone/>
             </a:pPr>
             <a:r>
@@ -3828,7 +3505,7 @@
           <a:bodyPr wrap="square" lIns="0" tIns="0" rIns="0" bIns="0" rtlCol="0" anchor="ctr"/>
           <a:lstStyle/>
           <a:p>
-            <a:pPr algn="ctr" indent="0" marL="0">
+            <a:pPr marL="0" indent="0" algn="ctr">
               <a:buNone/>
             </a:pPr>
             <a:r>
@@ -3893,7 +3570,7 @@
           <a:bodyPr wrap="square" lIns="0" tIns="0" rIns="0" bIns="0" rtlCol="0" anchor="ctr"/>
           <a:lstStyle/>
           <a:p>
-            <a:pPr algn="ctr" indent="0" marL="0">
+            <a:pPr marL="0" indent="0" algn="ctr">
               <a:buNone/>
             </a:pPr>
             <a:r>
@@ -3958,7 +3635,7 @@
           <a:bodyPr wrap="square" lIns="0" tIns="0" rIns="0" bIns="0" rtlCol="0" anchor="ctr"/>
           <a:lstStyle/>
           <a:p>
-            <a:pPr algn="ctr" indent="0" marL="0">
+            <a:pPr marL="0" indent="0" algn="ctr">
               <a:buNone/>
             </a:pPr>
             <a:r>
@@ -4023,7 +3700,7 @@
           <a:bodyPr wrap="square" lIns="0" tIns="0" rIns="0" bIns="0" rtlCol="0" anchor="ctr"/>
           <a:lstStyle/>
           <a:p>
-            <a:pPr algn="ctr" indent="0" marL="0">
+            <a:pPr marL="0" indent="0" algn="ctr">
               <a:buNone/>
             </a:pPr>
             <a:r>
@@ -4088,7 +3765,7 @@
           <a:bodyPr wrap="square" lIns="0" tIns="0" rIns="0" bIns="0" rtlCol="0" anchor="ctr"/>
           <a:lstStyle/>
           <a:p>
-            <a:pPr algn="ctr" indent="0" marL="0">
+            <a:pPr marL="0" indent="0" algn="ctr">
               <a:buNone/>
             </a:pPr>
             <a:r>
@@ -4174,7 +3851,7 @@
           <a:bodyPr wrap="square" lIns="0" tIns="0" rIns="0" bIns="0" rtlCol="0" anchor="ctr"/>
           <a:lstStyle/>
           <a:p>
-            <a:pPr algn="l" indent="0" marL="0">
+            <a:pPr marL="0" indent="0" algn="l">
               <a:buNone/>
             </a:pPr>
             <a:r>
@@ -4213,7 +3890,7 @@
           <a:bodyPr wrap="square" lIns="0" tIns="0" rIns="0" bIns="0" rtlCol="0" anchor="ctr"/>
           <a:lstStyle/>
           <a:p>
-            <a:pPr indent="0" marL="0">
+            <a:pPr marL="0" indent="0">
               <a:buNone/>
             </a:pPr>
             <a:r>
@@ -4279,11 +3956,11 @@
           <a:bodyPr wrap="square" lIns="0" tIns="0" rIns="0" bIns="0" rtlCol="0" anchor="ctr"/>
           <a:lstStyle/>
           <a:p>
-            <a:pPr algn="ctr" indent="0" marL="0">
-              <a:buNone/>
-            </a:pPr>
-            <a:r>
-              <a:rPr lang="en-US" sz="900" b="1" spc="100" kern="0" dirty="0">
+            <a:pPr marL="0" indent="0" algn="ctr">
+              <a:buNone/>
+            </a:pPr>
+            <a:r>
+              <a:rPr lang="en-US" sz="900" b="1" kern="0" spc="100" dirty="0">
                 <a:solidFill>
                   <a:srgbClr val="5A05F4"/>
                 </a:solidFill>
@@ -4299,14 +3976,14 @@
       </p:sp>
       <p:pic>
         <p:nvPicPr>
-          <p:cNvPr id="7" name="Image 0" descr="preencoded.png">    </p:cNvPr>
+          <p:cNvPr id="7" name="Image 0" descr="preencoded.png"/>
           <p:cNvPicPr>
             <a:picLocks noChangeAspect="1"/>
           </p:cNvPicPr>
           <p:nvPr/>
         </p:nvPicPr>
         <p:blipFill>
-          <a:blip r:embed="rId1"/>
+          <a:blip r:embed="rId3"/>
           <a:stretch>
             <a:fillRect/>
           </a:stretch>
@@ -4369,7 +4046,7 @@
           <a:bodyPr wrap="square" lIns="0" tIns="0" rIns="0" bIns="0" rtlCol="0" anchor="t"/>
           <a:lstStyle/>
           <a:p>
-            <a:pPr indent="0" marL="0">
+            <a:pPr marL="0" indent="0">
               <a:lnSpc>
                 <a:spcPct val="130000"/>
               </a:lnSpc>
@@ -4389,7 +4066,7 @@
             <a:endParaRPr lang="en-US" sz="1150" dirty="0"/>
           </a:p>
           <a:p>
-            <a:pPr indent="0" marL="0">
+            <a:pPr marL="0" indent="0">
               <a:lnSpc>
                 <a:spcPct val="130000"/>
               </a:lnSpc>
@@ -4409,7 +4086,7 @@
             <a:endParaRPr lang="en-US" sz="1150" dirty="0"/>
           </a:p>
           <a:p>
-            <a:pPr indent="0" marL="0">
+            <a:pPr marL="0" indent="0">
               <a:lnSpc>
                 <a:spcPct val="130000"/>
               </a:lnSpc>
@@ -4426,7 +4103,21 @@
               </a:rPr>
               <a:t>  if (def != "mock") return def;   </a:t>
             </a:r>
-            <a:pPr indent="0" marL="0">
+            <a:r>
+              <a:rPr lang="en-US" sz="1150" dirty="0">
+                <a:solidFill>
+                  <a:srgbClr val="9A94AA"/>
+                </a:solidFill>
+                <a:latin typeface="Courier New" pitchFamily="34" charset="0"/>
+                <a:ea typeface="Courier New" pitchFamily="34" charset="-122"/>
+                <a:cs typeface="Courier New" pitchFamily="34" charset="-120"/>
+              </a:rPr>
+              <a:t>// реальний ключ</a:t>
+            </a:r>
+            <a:endParaRPr lang="en-US" sz="1150" dirty="0"/>
+          </a:p>
+          <a:p>
+            <a:pPr marL="0" indent="0">
               <a:lnSpc>
                 <a:spcPct val="130000"/>
               </a:lnSpc>
@@ -4435,18 +4126,18 @@
             <a:r>
               <a:rPr lang="en-US" sz="1150" dirty="0">
                 <a:solidFill>
-                  <a:srgbClr val="9A94AA"/>
+                  <a:srgbClr val="D8D4E4"/>
                 </a:solidFill>
                 <a:latin typeface="Courier New" pitchFamily="34" charset="0"/>
                 <a:ea typeface="Courier New" pitchFamily="34" charset="-122"/>
                 <a:cs typeface="Courier New" pitchFamily="34" charset="-120"/>
               </a:rPr>
-              <a:t>// реальний ключ</a:t>
+              <a:t>  var u = message.ToLowerInvariant();</a:t>
             </a:r>
             <a:endParaRPr lang="en-US" sz="1150" dirty="0"/>
           </a:p>
           <a:p>
-            <a:pPr indent="0" marL="0">
+            <a:pPr marL="0" indent="0">
               <a:lnSpc>
                 <a:spcPct val="130000"/>
               </a:lnSpc>
@@ -4461,12 +4152,12 @@
                 <a:ea typeface="Courier New" pitchFamily="34" charset="-122"/>
                 <a:cs typeface="Courier New" pitchFamily="34" charset="-120"/>
               </a:rPr>
-              <a:t>  var u = message.ToLowerInvariant();</a:t>
+              <a:t>  bool escalation = u.Contains("поверн") || u.Contains("терміново")</a:t>
             </a:r>
             <a:endParaRPr lang="en-US" sz="1150" dirty="0"/>
           </a:p>
           <a:p>
-            <a:pPr indent="0" marL="0">
+            <a:pPr marL="0" indent="0">
               <a:lnSpc>
                 <a:spcPct val="130000"/>
               </a:lnSpc>
@@ -4481,12 +4172,12 @@
                 <a:ea typeface="Courier New" pitchFamily="34" charset="-122"/>
                 <a:cs typeface="Courier New" pitchFamily="34" charset="-120"/>
               </a:rPr>
-              <a:t>  bool escalation = u.Contains("поверн") || u.Contains("терміново")</a:t>
+              <a:t>                 || u.Contains("refund")  || u.Contains("скарг");</a:t>
             </a:r>
             <a:endParaRPr lang="en-US" sz="1150" dirty="0"/>
           </a:p>
           <a:p>
-            <a:pPr indent="0" marL="0">
+            <a:pPr marL="0" indent="0">
               <a:lnSpc>
                 <a:spcPct val="130000"/>
               </a:lnSpc>
@@ -4495,38 +4186,18 @@
             <a:r>
               <a:rPr lang="en-US" sz="1150" dirty="0">
                 <a:solidFill>
-                  <a:srgbClr val="D8D4E4"/>
+                  <a:srgbClr val="6BA0F8"/>
                 </a:solidFill>
                 <a:latin typeface="Courier New" pitchFamily="34" charset="0"/>
                 <a:ea typeface="Courier New" pitchFamily="34" charset="-122"/>
                 <a:cs typeface="Courier New" pitchFamily="34" charset="-120"/>
               </a:rPr>
-              <a:t>                 || u.Contains("refund")  || u.Contains("скарг");</a:t>
+              <a:t>  return escalation ? "mock-strong" : "mock-mini";</a:t>
             </a:r>
             <a:endParaRPr lang="en-US" sz="1150" dirty="0"/>
           </a:p>
           <a:p>
-            <a:pPr indent="0" marL="0">
-              <a:lnSpc>
-                <a:spcPct val="130000"/>
-              </a:lnSpc>
-              <a:buNone/>
-            </a:pPr>
-            <a:r>
-              <a:rPr lang="en-US" sz="1150" dirty="0">
-                <a:solidFill>
-                  <a:srgbClr val="6BA0F8"/>
-                </a:solidFill>
-                <a:latin typeface="Courier New" pitchFamily="34" charset="0"/>
-                <a:ea typeface="Courier New" pitchFamily="34" charset="-122"/>
-                <a:cs typeface="Courier New" pitchFamily="34" charset="-120"/>
-              </a:rPr>
-              <a:t>  return escalation ? "mock-strong" : "mock-mini";</a:t>
-            </a:r>
-            <a:endParaRPr lang="en-US" sz="1150" dirty="0"/>
-          </a:p>
-          <a:p>
-            <a:pPr indent="0" marL="0">
+            <a:pPr marL="0" indent="0">
               <a:lnSpc>
                 <a:spcPct val="130000"/>
               </a:lnSpc>
@@ -4590,7 +4261,7 @@
           <a:bodyPr wrap="square" lIns="0" tIns="0" rIns="0" bIns="0" rtlCol="0" anchor="ctr"/>
           <a:lstStyle/>
           <a:p>
-            <a:pPr algn="ctr" indent="0" marL="0">
+            <a:pPr marL="0" indent="0" algn="ctr">
               <a:buNone/>
             </a:pPr>
             <a:r>
@@ -4694,7 +4365,7 @@
           <a:bodyPr wrap="square" lIns="0" tIns="0" rIns="0" bIns="0" rtlCol="0" anchor="ctr"/>
           <a:lstStyle/>
           <a:p>
-            <a:pPr algn="ctr" indent="0" marL="0">
+            <a:pPr marL="0" indent="0" algn="ctr">
               <a:buNone/>
             </a:pPr>
             <a:r>
@@ -4798,7 +4469,7 @@
           <a:bodyPr wrap="square" lIns="0" tIns="0" rIns="0" bIns="0" rtlCol="0" anchor="ctr"/>
           <a:lstStyle/>
           <a:p>
-            <a:pPr algn="ctr" indent="0" marL="0">
+            <a:pPr marL="0" indent="0" algn="ctr">
               <a:buNone/>
             </a:pPr>
             <a:r>
@@ -4864,7 +4535,7 @@
           <a:bodyPr wrap="square" lIns="0" tIns="0" rIns="0" bIns="0" rtlCol="0" anchor="ctr"/>
           <a:lstStyle/>
           <a:p>
-            <a:pPr indent="0" marL="0">
+            <a:pPr marL="0" indent="0">
               <a:lnSpc>
                 <a:spcPct val="112000"/>
               </a:lnSpc>
@@ -4905,7 +4576,7 @@
           </a:prstGeom>
           <a:extLst>
             <a:ext uri="{C572A759-6A51-4108-AA02-DFA0A04FC94B}">
-              <ma14:wrappingTextBoxFlag xmlns:ma14="http://schemas.microsoft.com/office/mac/drawingml/2011/main" val="0"/>
+              <ma14:wrappingTextBoxFlag xmlns="" xmlns:ma14="http://schemas.microsoft.com/office/mac/drawingml/2011/main" val="0"/>
             </a:ext>
           </a:extLst>
         </p:spPr>
@@ -4926,7 +4597,7 @@
           <a:p>
             <a:pPr algn="l"/>
             <a:fld id="{F7021451-1387-4CA6-816F-3879F97B5CBC}" type="slidenum">
-              <a:rPr b="0" lang="en-US"/>
+              <a:rPr lang="en-US" b="0"/>
               <a:t>10</a:t>
             </a:fld>
             <a:endParaRPr lang="en-US"/>
@@ -5001,7 +4672,7 @@
           <a:bodyPr wrap="square" lIns="0" tIns="0" rIns="0" bIns="0" rtlCol="0" anchor="ctr"/>
           <a:lstStyle/>
           <a:p>
-            <a:pPr algn="l" indent="0" marL="0">
+            <a:pPr marL="0" indent="0" algn="l">
               <a:buNone/>
             </a:pPr>
             <a:r>
@@ -5040,7 +4711,7 @@
           <a:bodyPr wrap="square" lIns="0" tIns="0" rIns="0" bIns="0" rtlCol="0" anchor="ctr"/>
           <a:lstStyle/>
           <a:p>
-            <a:pPr indent="0" marL="0">
+            <a:pPr marL="0" indent="0">
               <a:buNone/>
             </a:pPr>
             <a:r>
@@ -5106,11 +4777,11 @@
           <a:bodyPr wrap="square" lIns="0" tIns="0" rIns="0" bIns="0" rtlCol="0" anchor="ctr"/>
           <a:lstStyle/>
           <a:p>
-            <a:pPr algn="ctr" indent="0" marL="0">
-              <a:buNone/>
-            </a:pPr>
-            <a:r>
-              <a:rPr lang="en-US" sz="900" b="1" spc="100" kern="0" dirty="0">
+            <a:pPr marL="0" indent="0" algn="ctr">
+              <a:buNone/>
+            </a:pPr>
+            <a:r>
+              <a:rPr lang="en-US" sz="900" b="1" kern="0" spc="100" dirty="0">
                 <a:solidFill>
                   <a:srgbClr val="5A05F4"/>
                 </a:solidFill>
@@ -5126,14 +4797,14 @@
       </p:sp>
       <p:pic>
         <p:nvPicPr>
-          <p:cNvPr id="7" name="Image 0" descr="preencoded.png">    </p:cNvPr>
+          <p:cNvPr id="7" name="Image 0" descr="preencoded.png"/>
           <p:cNvPicPr>
             <a:picLocks noChangeAspect="1"/>
           </p:cNvPicPr>
           <p:nvPr/>
         </p:nvPicPr>
         <p:blipFill>
-          <a:blip r:embed="rId1"/>
+          <a:blip r:embed="rId3"/>
           <a:stretch>
             <a:fillRect/>
           </a:stretch>
@@ -5211,7 +4882,7 @@
           <a:bodyPr wrap="square" lIns="0" tIns="0" rIns="0" bIns="0" rtlCol="0" anchor="ctr"/>
           <a:lstStyle/>
           <a:p>
-            <a:pPr algn="ctr" indent="0" marL="0">
+            <a:pPr marL="0" indent="0" algn="ctr">
               <a:buNone/>
             </a:pPr>
             <a:r>
@@ -5250,7 +4921,7 @@
           <a:bodyPr wrap="square" lIns="0" tIns="0" rIns="0" bIns="0" rtlCol="0" anchor="ctr"/>
           <a:lstStyle/>
           <a:p>
-            <a:pPr indent="0" marL="0">
+            <a:pPr marL="0" indent="0">
               <a:buNone/>
             </a:pPr>
             <a:r>
@@ -5289,7 +4960,7 @@
           <a:bodyPr wrap="square" lIns="0" tIns="0" rIns="0" bIns="0" rtlCol="0" anchor="t"/>
           <a:lstStyle/>
           <a:p>
-            <a:pPr indent="0" marL="0">
+            <a:pPr marL="0" indent="0">
               <a:lnSpc>
                 <a:spcPct val="108000"/>
               </a:lnSpc>
@@ -5373,7 +5044,7 @@
           <a:bodyPr wrap="square" lIns="0" tIns="0" rIns="0" bIns="0" rtlCol="0" anchor="ctr"/>
           <a:lstStyle/>
           <a:p>
-            <a:pPr algn="ctr" indent="0" marL="0">
+            <a:pPr marL="0" indent="0" algn="ctr">
               <a:buNone/>
             </a:pPr>
             <a:r>
@@ -5412,7 +5083,7 @@
           <a:bodyPr wrap="square" lIns="0" tIns="0" rIns="0" bIns="0" rtlCol="0" anchor="ctr"/>
           <a:lstStyle/>
           <a:p>
-            <a:pPr indent="0" marL="0">
+            <a:pPr marL="0" indent="0">
               <a:buNone/>
             </a:pPr>
             <a:r>
@@ -5451,7 +5122,7 @@
           <a:bodyPr wrap="square" lIns="0" tIns="0" rIns="0" bIns="0" rtlCol="0" anchor="t"/>
           <a:lstStyle/>
           <a:p>
-            <a:pPr indent="0" marL="0">
+            <a:pPr marL="0" indent="0">
               <a:lnSpc>
                 <a:spcPct val="108000"/>
               </a:lnSpc>
@@ -5535,7 +5206,7 @@
           <a:bodyPr wrap="square" lIns="0" tIns="0" rIns="0" bIns="0" rtlCol="0" anchor="ctr"/>
           <a:lstStyle/>
           <a:p>
-            <a:pPr algn="ctr" indent="0" marL="0">
+            <a:pPr marL="0" indent="0" algn="ctr">
               <a:buNone/>
             </a:pPr>
             <a:r>
@@ -5574,7 +5245,7 @@
           <a:bodyPr wrap="square" lIns="0" tIns="0" rIns="0" bIns="0" rtlCol="0" anchor="ctr"/>
           <a:lstStyle/>
           <a:p>
-            <a:pPr indent="0" marL="0">
+            <a:pPr marL="0" indent="0">
               <a:buNone/>
             </a:pPr>
             <a:r>
@@ -5613,7 +5284,7 @@
           <a:bodyPr wrap="square" lIns="0" tIns="0" rIns="0" bIns="0" rtlCol="0" anchor="t"/>
           <a:lstStyle/>
           <a:p>
-            <a:pPr indent="0" marL="0">
+            <a:pPr marL="0" indent="0">
               <a:lnSpc>
                 <a:spcPct val="108000"/>
               </a:lnSpc>
@@ -5643,7 +5314,7 @@
         <p:spPr>
           <a:xfrm>
             <a:off x="566928" y="3977640"/>
-            <a:ext cx="11064240" cy="1371600"/>
+            <a:ext cx="10927080" cy="1371600"/>
           </a:xfrm>
           <a:prstGeom prst="roundRect">
             <a:avLst>
@@ -5677,11 +5348,11 @@
           <a:bodyPr wrap="square" lIns="0" tIns="0" rIns="0" bIns="0" rtlCol="0" anchor="ctr"/>
           <a:lstStyle/>
           <a:p>
-            <a:pPr indent="0" marL="0">
-              <a:buNone/>
-            </a:pPr>
-            <a:r>
-              <a:rPr lang="en-US" sz="950" b="1" spc="150" kern="0" dirty="0">
+            <a:pPr marL="0" indent="0">
+              <a:buNone/>
+            </a:pPr>
+            <a:r>
+              <a:rPr lang="en-US" sz="950" b="1" kern="0" spc="150" dirty="0">
                 <a:solidFill>
                   <a:srgbClr val="FFFFFF"/>
                 </a:solidFill>
@@ -5716,7 +5387,7 @@
           <a:bodyPr wrap="square" lIns="0" tIns="0" rIns="0" bIns="0" rtlCol="0" anchor="ctr"/>
           <a:lstStyle/>
           <a:p>
-            <a:pPr indent="0" marL="0">
+            <a:pPr marL="0" indent="0">
               <a:lnSpc>
                 <a:spcPct val="112000"/>
               </a:lnSpc>
@@ -5739,7 +5410,7 @@
       </p:sp>
       <p:sp>
         <p:nvSpPr>
-          <p:cNvPr id="25" name="Slide Number Placeholder 0"/>
+          <p:cNvPr id="26" name="Slide Number Placeholder 0"/>
           <p:cNvSpPr>
             <a:spLocks noGrp="1"/>
           </p:cNvSpPr>
@@ -5757,7 +5428,7 @@
           </a:prstGeom>
           <a:extLst>
             <a:ext uri="{C572A759-6A51-4108-AA02-DFA0A04FC94B}">
-              <ma14:wrappingTextBoxFlag xmlns:ma14="http://schemas.microsoft.com/office/mac/drawingml/2011/main" val="0"/>
+              <ma14:wrappingTextBoxFlag xmlns="" xmlns:ma14="http://schemas.microsoft.com/office/mac/drawingml/2011/main" val="0"/>
             </a:ext>
           </a:extLst>
         </p:spPr>
@@ -5778,7 +5449,7 @@
           <a:p>
             <a:pPr algn="l"/>
             <a:fld id="{F7021451-1387-4CA6-816F-3879F97B5CBC}" type="slidenum">
-              <a:rPr b="0" lang="en-US"/>
+              <a:rPr lang="en-US" b="0"/>
               <a:t>11</a:t>
             </a:fld>
             <a:endParaRPr lang="en-US"/>
@@ -5853,7 +5524,7 @@
           <a:bodyPr wrap="square" lIns="0" tIns="0" rIns="0" bIns="0" rtlCol="0" anchor="ctr"/>
           <a:lstStyle/>
           <a:p>
-            <a:pPr algn="l" indent="0" marL="0">
+            <a:pPr marL="0" indent="0" algn="l">
               <a:buNone/>
             </a:pPr>
             <a:r>
@@ -5892,7 +5563,7 @@
           <a:bodyPr wrap="square" lIns="0" tIns="0" rIns="0" bIns="0" rtlCol="0" anchor="ctr"/>
           <a:lstStyle/>
           <a:p>
-            <a:pPr indent="0" marL="0">
+            <a:pPr marL="0" indent="0">
               <a:buNone/>
             </a:pPr>
             <a:r>
@@ -5958,11 +5629,11 @@
           <a:bodyPr wrap="square" lIns="0" tIns="0" rIns="0" bIns="0" rtlCol="0" anchor="ctr"/>
           <a:lstStyle/>
           <a:p>
-            <a:pPr algn="ctr" indent="0" marL="0">
-              <a:buNone/>
-            </a:pPr>
-            <a:r>
-              <a:rPr lang="en-US" sz="900" b="1" spc="100" kern="0" dirty="0">
+            <a:pPr marL="0" indent="0" algn="ctr">
+              <a:buNone/>
+            </a:pPr>
+            <a:r>
+              <a:rPr lang="en-US" sz="900" b="1" kern="0" spc="100" dirty="0">
                 <a:solidFill>
                   <a:srgbClr val="5A05F4"/>
                 </a:solidFill>
@@ -5978,14 +5649,14 @@
       </p:sp>
       <p:pic>
         <p:nvPicPr>
-          <p:cNvPr id="7" name="Image 0" descr="preencoded.png">    </p:cNvPr>
+          <p:cNvPr id="7" name="Image 0" descr="preencoded.png"/>
           <p:cNvPicPr>
             <a:picLocks noChangeAspect="1"/>
           </p:cNvPicPr>
           <p:nvPr/>
         </p:nvPicPr>
         <p:blipFill>
-          <a:blip r:embed="rId1"/>
+          <a:blip r:embed="rId3"/>
           <a:stretch>
             <a:fillRect/>
           </a:stretch>
@@ -6043,7 +5714,7 @@
           <a:bodyPr wrap="square" lIns="0" tIns="0" rIns="0" bIns="0" rtlCol="0" anchor="ctr"/>
           <a:lstStyle/>
           <a:p>
-            <a:pPr indent="0" marL="0">
+            <a:pPr marL="0" indent="0">
               <a:buNone/>
             </a:pPr>
             <a:r>
@@ -6082,7 +5753,7 @@
           <a:bodyPr wrap="square" lIns="0" tIns="0" rIns="0" bIns="0" rtlCol="0" anchor="ctr"/>
           <a:lstStyle/>
           <a:p>
-            <a:pPr indent="0" marL="0">
+            <a:pPr marL="0" indent="0">
               <a:buNone/>
             </a:pPr>
             <a:r>
@@ -6143,7 +5814,7 @@
           <a:bodyPr wrap="square" lIns="0" tIns="0" rIns="0" bIns="0" rtlCol="0" anchor="ctr"/>
           <a:lstStyle/>
           <a:p>
-            <a:pPr indent="0" marL="0">
+            <a:pPr marL="0" indent="0">
               <a:buNone/>
             </a:pPr>
             <a:r>
@@ -6182,7 +5853,7 @@
           <a:bodyPr wrap="square" lIns="0" tIns="0" rIns="0" bIns="0" rtlCol="0" anchor="ctr"/>
           <a:lstStyle/>
           <a:p>
-            <a:pPr indent="0" marL="0">
+            <a:pPr marL="0" indent="0">
               <a:buNone/>
             </a:pPr>
             <a:r>
@@ -6243,7 +5914,7 @@
           <a:bodyPr wrap="square" lIns="0" tIns="0" rIns="0" bIns="0" rtlCol="0" anchor="ctr"/>
           <a:lstStyle/>
           <a:p>
-            <a:pPr indent="0" marL="0">
+            <a:pPr marL="0" indent="0">
               <a:buNone/>
             </a:pPr>
             <a:r>
@@ -6282,7 +5953,7 @@
           <a:bodyPr wrap="square" lIns="0" tIns="0" rIns="0" bIns="0" rtlCol="0" anchor="ctr"/>
           <a:lstStyle/>
           <a:p>
-            <a:pPr indent="0" marL="0">
+            <a:pPr marL="0" indent="0">
               <a:buNone/>
             </a:pPr>
             <a:r>
@@ -6348,11 +6019,11 @@
           <a:bodyPr wrap="square" lIns="0" tIns="0" rIns="0" bIns="0" rtlCol="0" anchor="ctr"/>
           <a:lstStyle/>
           <a:p>
-            <a:pPr indent="0" marL="0">
-              <a:buNone/>
-            </a:pPr>
-            <a:r>
-              <a:rPr lang="en-US" sz="950" b="1" spc="150" kern="0" dirty="0">
+            <a:pPr marL="0" indent="0">
+              <a:buNone/>
+            </a:pPr>
+            <a:r>
+              <a:rPr lang="en-US" sz="950" b="1" kern="0" spc="150" dirty="0">
                 <a:solidFill>
                   <a:srgbClr val="106B41"/>
                 </a:solidFill>
@@ -6387,7 +6058,7 @@
           <a:bodyPr wrap="square" lIns="0" tIns="0" rIns="0" bIns="0" rtlCol="0" anchor="ctr"/>
           <a:lstStyle/>
           <a:p>
-            <a:pPr indent="0" marL="0">
+            <a:pPr marL="0" indent="0">
               <a:lnSpc>
                 <a:spcPct val="112000"/>
               </a:lnSpc>
@@ -6428,7 +6099,7 @@
           </a:prstGeom>
           <a:extLst>
             <a:ext uri="{C572A759-6A51-4108-AA02-DFA0A04FC94B}">
-              <ma14:wrappingTextBoxFlag xmlns:ma14="http://schemas.microsoft.com/office/mac/drawingml/2011/main" val="0"/>
+              <ma14:wrappingTextBoxFlag xmlns="" xmlns:ma14="http://schemas.microsoft.com/office/mac/drawingml/2011/main" val="0"/>
             </a:ext>
           </a:extLst>
         </p:spPr>
@@ -6449,7 +6120,7 @@
           <a:p>
             <a:pPr algn="l"/>
             <a:fld id="{F7021451-1387-4CA6-816F-3879F97B5CBC}" type="slidenum">
-              <a:rPr b="0" lang="en-US"/>
+              <a:rPr lang="en-US" b="0"/>
               <a:t>12</a:t>
             </a:fld>
             <a:endParaRPr lang="en-US"/>
@@ -6524,7 +6195,7 @@
           <a:bodyPr wrap="square" lIns="0" tIns="0" rIns="0" bIns="0" rtlCol="0" anchor="ctr"/>
           <a:lstStyle/>
           <a:p>
-            <a:pPr algn="l" indent="0" marL="0">
+            <a:pPr marL="0" indent="0" algn="l">
               <a:buNone/>
             </a:pPr>
             <a:r>
@@ -6563,7 +6234,7 @@
           <a:bodyPr wrap="square" lIns="0" tIns="0" rIns="0" bIns="0" rtlCol="0" anchor="ctr"/>
           <a:lstStyle/>
           <a:p>
-            <a:pPr indent="0" marL="0">
+            <a:pPr marL="0" indent="0">
               <a:buNone/>
             </a:pPr>
             <a:r>
@@ -6629,11 +6300,11 @@
           <a:bodyPr wrap="square" lIns="0" tIns="0" rIns="0" bIns="0" rtlCol="0" anchor="ctr"/>
           <a:lstStyle/>
           <a:p>
-            <a:pPr algn="ctr" indent="0" marL="0">
-              <a:buNone/>
-            </a:pPr>
-            <a:r>
-              <a:rPr lang="en-US" sz="900" b="1" spc="100" kern="0" dirty="0">
+            <a:pPr marL="0" indent="0" algn="ctr">
+              <a:buNone/>
+            </a:pPr>
+            <a:r>
+              <a:rPr lang="en-US" sz="900" b="1" kern="0" spc="100" dirty="0">
                 <a:solidFill>
                   <a:srgbClr val="5A05F4"/>
                 </a:solidFill>
@@ -6649,14 +6320,14 @@
       </p:sp>
       <p:pic>
         <p:nvPicPr>
-          <p:cNvPr id="7" name="Image 0" descr="preencoded.png">    </p:cNvPr>
+          <p:cNvPr id="7" name="Image 0" descr="preencoded.png"/>
           <p:cNvPicPr>
             <a:picLocks noChangeAspect="1"/>
           </p:cNvPicPr>
           <p:nvPr/>
         </p:nvPicPr>
         <p:blipFill>
-          <a:blip r:embed="rId1"/>
+          <a:blip r:embed="rId3"/>
           <a:stretch>
             <a:fillRect/>
           </a:stretch>
@@ -6687,16 +6358,34 @@
         </p:nvGraphicFramePr>
         <p:xfrm>
           <a:off x="566928" y="1737360"/>
-          <a:ext cx="11064240" cy="914400"/>
+          <a:ext cx="11064240" cy="2194560"/>
         </p:xfrm>
         <a:graphic>
           <a:graphicData uri="http://schemas.openxmlformats.org/drawingml/2006/table">
             <a:tbl>
               <a:tblPr/>
               <a:tblGrid>
-                <a:gridCol w="3291840"/>
-                <a:gridCol w="3657600"/>
-                <a:gridCol w="4114800"/>
+                <a:gridCol w="3291840">
+                  <a:extLst>
+                    <a:ext uri="{9D8B030D-6E8A-4147-A177-3AD203B41FA5}">
+                      <a16:colId xmlns:a16="http://schemas.microsoft.com/office/drawing/2014/main" val="20000"/>
+                    </a:ext>
+                  </a:extLst>
+                </a:gridCol>
+                <a:gridCol w="3657600">
+                  <a:extLst>
+                    <a:ext uri="{9D8B030D-6E8A-4147-A177-3AD203B41FA5}">
+                      <a16:colId xmlns:a16="http://schemas.microsoft.com/office/drawing/2014/main" val="20001"/>
+                    </a:ext>
+                  </a:extLst>
+                </a:gridCol>
+                <a:gridCol w="4114800">
+                  <a:extLst>
+                    <a:ext uri="{9D8B030D-6E8A-4147-A177-3AD203B41FA5}">
+                      <a16:colId xmlns:a16="http://schemas.microsoft.com/office/drawing/2014/main" val="20002"/>
+                    </a:ext>
+                  </a:extLst>
+                </a:gridCol>
               </a:tblGrid>
               <a:tr h="548640">
                 <a:tc>
@@ -6704,11 +6393,11 @@
                     <a:bodyPr/>
                     <a:lstStyle/>
                     <a:p>
-                      <a:pPr algn="ctr" indent="0" marL="0">
+                      <a:pPr marL="0" indent="0" algn="ctr">
                         <a:buNone/>
                       </a:pPr>
                       <a:r>
-                        <a:rPr lang="en-US" sz="900" b="1" spc="100" kern="0" dirty="0">
+                        <a:rPr lang="en-US" sz="900" b="1" kern="0" spc="100" dirty="0">
                           <a:solidFill>
                             <a:srgbClr val="FFFFFF"/>
                           </a:solidFill>
@@ -6772,11 +6461,11 @@
                     <a:bodyPr/>
                     <a:lstStyle/>
                     <a:p>
-                      <a:pPr algn="ctr" indent="0" marL="0">
+                      <a:pPr marL="0" indent="0" algn="ctr">
                         <a:buNone/>
                       </a:pPr>
                       <a:r>
-                        <a:rPr lang="en-US" sz="900" b="1" spc="100" kern="0" dirty="0">
+                        <a:rPr lang="en-US" sz="900" b="1" kern="0" spc="100" dirty="0">
                           <a:solidFill>
                             <a:srgbClr val="FFFFFF"/>
                           </a:solidFill>
@@ -6840,11 +6529,11 @@
                     <a:bodyPr/>
                     <a:lstStyle/>
                     <a:p>
-                      <a:pPr algn="ctr" indent="0" marL="0">
+                      <a:pPr marL="0" indent="0" algn="ctr">
                         <a:buNone/>
                       </a:pPr>
                       <a:r>
-                        <a:rPr lang="en-US" sz="900" b="1" spc="100" kern="0" dirty="0">
+                        <a:rPr lang="en-US" sz="900" b="1" kern="0" spc="100" dirty="0">
                           <a:solidFill>
                             <a:srgbClr val="FFFFFF"/>
                           </a:solidFill>
@@ -6903,6 +6592,11 @@
                     </a:solidFill>
                   </a:tcPr>
                 </a:tc>
+                <a:extLst>
+                  <a:ext uri="{0D108BD9-81ED-4DB2-BD59-A6C34878D82A}">
+                    <a16:rowId xmlns:a16="http://schemas.microsoft.com/office/drawing/2014/main" val="10000"/>
+                  </a:ext>
+                </a:extLst>
               </a:tr>
               <a:tr h="548640">
                 <a:tc>
@@ -6910,7 +6604,7 @@
                     <a:bodyPr/>
                     <a:lstStyle/>
                     <a:p>
-                      <a:pPr indent="0" marL="0">
+                      <a:pPr marL="0" indent="0">
                         <a:buNone/>
                       </a:pPr>
                       <a:r>
@@ -6978,7 +6672,7 @@
                     <a:bodyPr/>
                     <a:lstStyle/>
                     <a:p>
-                      <a:pPr indent="0" marL="0">
+                      <a:pPr marL="0" indent="0">
                         <a:buNone/>
                       </a:pPr>
                       <a:r>
@@ -7046,7 +6740,7 @@
                     <a:bodyPr/>
                     <a:lstStyle/>
                     <a:p>
-                      <a:pPr indent="0" marL="0">
+                      <a:pPr marL="0" indent="0">
                         <a:buNone/>
                       </a:pPr>
                       <a:r>
@@ -7109,6 +6803,11 @@
                     </a:solidFill>
                   </a:tcPr>
                 </a:tc>
+                <a:extLst>
+                  <a:ext uri="{0D108BD9-81ED-4DB2-BD59-A6C34878D82A}">
+                    <a16:rowId xmlns:a16="http://schemas.microsoft.com/office/drawing/2014/main" val="10001"/>
+                  </a:ext>
+                </a:extLst>
               </a:tr>
               <a:tr h="548640">
                 <a:tc>
@@ -7116,7 +6815,7 @@
                     <a:bodyPr/>
                     <a:lstStyle/>
                     <a:p>
-                      <a:pPr indent="0" marL="0">
+                      <a:pPr marL="0" indent="0">
                         <a:buNone/>
                       </a:pPr>
                       <a:r>
@@ -7184,7 +6883,7 @@
                     <a:bodyPr/>
                     <a:lstStyle/>
                     <a:p>
-                      <a:pPr indent="0" marL="0">
+                      <a:pPr marL="0" indent="0">
                         <a:buNone/>
                       </a:pPr>
                       <a:r>
@@ -7252,7 +6951,7 @@
                     <a:bodyPr/>
                     <a:lstStyle/>
                     <a:p>
-                      <a:pPr indent="0" marL="0">
+                      <a:pPr marL="0" indent="0">
                         <a:buNone/>
                       </a:pPr>
                       <a:r>
@@ -7315,6 +7014,11 @@
                     </a:solidFill>
                   </a:tcPr>
                 </a:tc>
+                <a:extLst>
+                  <a:ext uri="{0D108BD9-81ED-4DB2-BD59-A6C34878D82A}">
+                    <a16:rowId xmlns:a16="http://schemas.microsoft.com/office/drawing/2014/main" val="10002"/>
+                  </a:ext>
+                </a:extLst>
               </a:tr>
               <a:tr h="548640">
                 <a:tc>
@@ -7322,7 +7026,7 @@
                     <a:bodyPr/>
                     <a:lstStyle/>
                     <a:p>
-                      <a:pPr indent="0" marL="0">
+                      <a:pPr marL="0" indent="0">
                         <a:buNone/>
                       </a:pPr>
                       <a:r>
@@ -7390,7 +7094,7 @@
                     <a:bodyPr/>
                     <a:lstStyle/>
                     <a:p>
-                      <a:pPr indent="0" marL="0">
+                      <a:pPr marL="0" indent="0">
                         <a:buNone/>
                       </a:pPr>
                       <a:r>
@@ -7458,7 +7162,7 @@
                     <a:bodyPr/>
                     <a:lstStyle/>
                     <a:p>
-                      <a:pPr indent="0" marL="0">
+                      <a:pPr marL="0" indent="0">
                         <a:buNone/>
                       </a:pPr>
                       <a:r>
@@ -7521,6 +7225,11 @@
                     </a:solidFill>
                   </a:tcPr>
                 </a:tc>
+                <a:extLst>
+                  <a:ext uri="{0D108BD9-81ED-4DB2-BD59-A6C34878D82A}">
+                    <a16:rowId xmlns:a16="http://schemas.microsoft.com/office/drawing/2014/main" val="10003"/>
+                  </a:ext>
+                </a:extLst>
               </a:tr>
             </a:tbl>
           </a:graphicData>
@@ -7569,7 +7278,7 @@
           <a:bodyPr wrap="square" lIns="0" tIns="0" rIns="0" bIns="0" rtlCol="0" anchor="ctr"/>
           <a:lstStyle/>
           <a:p>
-            <a:pPr indent="0" marL="0">
+            <a:pPr marL="0" indent="0">
               <a:lnSpc>
                 <a:spcPct val="112000"/>
               </a:lnSpc>
@@ -7610,7 +7319,7 @@
           </a:prstGeom>
           <a:extLst>
             <a:ext uri="{C572A759-6A51-4108-AA02-DFA0A04FC94B}">
-              <ma14:wrappingTextBoxFlag xmlns:ma14="http://schemas.microsoft.com/office/mac/drawingml/2011/main" val="0"/>
+              <ma14:wrappingTextBoxFlag xmlns="" xmlns:ma14="http://schemas.microsoft.com/office/mac/drawingml/2011/main" val="0"/>
             </a:ext>
           </a:extLst>
         </p:spPr>
@@ -7631,7 +7340,7 @@
           <a:p>
             <a:pPr algn="l"/>
             <a:fld id="{F7021451-1387-4CA6-816F-3879F97B5CBC}" type="slidenum">
-              <a:rPr b="0" lang="en-US"/>
+              <a:rPr lang="en-US" b="0"/>
               <a:t>13</a:t>
             </a:fld>
             <a:endParaRPr lang="en-US"/>
@@ -7706,7 +7415,7 @@
           <a:bodyPr wrap="square" lIns="0" tIns="0" rIns="0" bIns="0" rtlCol="0" anchor="ctr"/>
           <a:lstStyle/>
           <a:p>
-            <a:pPr algn="l" indent="0" marL="0">
+            <a:pPr marL="0" indent="0" algn="l">
               <a:buNone/>
             </a:pPr>
             <a:r>
@@ -7745,7 +7454,7 @@
           <a:bodyPr wrap="square" lIns="0" tIns="0" rIns="0" bIns="0" rtlCol="0" anchor="ctr"/>
           <a:lstStyle/>
           <a:p>
-            <a:pPr indent="0" marL="0">
+            <a:pPr marL="0" indent="0">
               <a:buNone/>
             </a:pPr>
             <a:r>
@@ -7811,11 +7520,11 @@
           <a:bodyPr wrap="square" lIns="0" tIns="0" rIns="0" bIns="0" rtlCol="0" anchor="ctr"/>
           <a:lstStyle/>
           <a:p>
-            <a:pPr algn="ctr" indent="0" marL="0">
-              <a:buNone/>
-            </a:pPr>
-            <a:r>
-              <a:rPr lang="en-US" sz="900" b="1" spc="100" kern="0" dirty="0">
+            <a:pPr marL="0" indent="0" algn="ctr">
+              <a:buNone/>
+            </a:pPr>
+            <a:r>
+              <a:rPr lang="en-US" sz="900" b="1" kern="0" spc="100" dirty="0">
                 <a:solidFill>
                   <a:srgbClr val="5A05F4"/>
                 </a:solidFill>
@@ -7831,14 +7540,14 @@
       </p:sp>
       <p:pic>
         <p:nvPicPr>
-          <p:cNvPr id="7" name="Image 0" descr="preencoded.png">    </p:cNvPr>
+          <p:cNvPr id="7" name="Image 0" descr="preencoded.png"/>
           <p:cNvPicPr>
             <a:picLocks noChangeAspect="1"/>
           </p:cNvPicPr>
           <p:nvPr/>
         </p:nvPicPr>
         <p:blipFill>
-          <a:blip r:embed="rId1"/>
+          <a:blip r:embed="rId3"/>
           <a:stretch>
             <a:fillRect/>
           </a:stretch>
@@ -7896,7 +7605,7 @@
           <a:bodyPr wrap="square" lIns="0" tIns="0" rIns="0" bIns="0" rtlCol="0" anchor="ctr"/>
           <a:lstStyle/>
           <a:p>
-            <a:pPr algn="ctr" indent="0" marL="0">
+            <a:pPr marL="0" indent="0" algn="ctr">
               <a:buNone/>
             </a:pPr>
             <a:r>
@@ -8000,7 +7709,7 @@
           <a:bodyPr wrap="square" lIns="0" tIns="0" rIns="0" bIns="0" rtlCol="0" anchor="ctr"/>
           <a:lstStyle/>
           <a:p>
-            <a:pPr algn="ctr" indent="0" marL="0">
+            <a:pPr marL="0" indent="0" algn="ctr">
               <a:buNone/>
             </a:pPr>
             <a:r>
@@ -8104,7 +7813,7 @@
           <a:bodyPr wrap="square" lIns="0" tIns="0" rIns="0" bIns="0" rtlCol="0" anchor="ctr"/>
           <a:lstStyle/>
           <a:p>
-            <a:pPr algn="ctr" indent="0" marL="0">
+            <a:pPr marL="0" indent="0" algn="ctr">
               <a:buNone/>
             </a:pPr>
             <a:r>
@@ -8143,7 +7852,7 @@
           <a:bodyPr wrap="square" lIns="0" tIns="0" rIns="0" bIns="0" rtlCol="0" anchor="ctr"/>
           <a:lstStyle/>
           <a:p>
-            <a:pPr indent="0" marL="0">
+            <a:pPr marL="0" indent="0">
               <a:buNone/>
             </a:pPr>
             <a:r>
@@ -8209,11 +7918,11 @@
           <a:bodyPr wrap="square" lIns="0" tIns="0" rIns="0" bIns="0" rtlCol="0" anchor="ctr"/>
           <a:lstStyle/>
           <a:p>
-            <a:pPr indent="0" marL="0">
-              <a:buNone/>
-            </a:pPr>
-            <a:r>
-              <a:rPr lang="en-US" sz="950" b="1" spc="150" kern="0" dirty="0">
+            <a:pPr marL="0" indent="0">
+              <a:buNone/>
+            </a:pPr>
+            <a:r>
+              <a:rPr lang="en-US" sz="950" b="1" kern="0" spc="150" dirty="0">
                 <a:solidFill>
                   <a:srgbClr val="106B41"/>
                 </a:solidFill>
@@ -8248,7 +7957,7 @@
           <a:bodyPr wrap="square" lIns="0" tIns="0" rIns="0" bIns="0" rtlCol="0" anchor="ctr"/>
           <a:lstStyle/>
           <a:p>
-            <a:pPr indent="0" marL="0">
+            <a:pPr marL="0" indent="0">
               <a:lnSpc>
                 <a:spcPct val="112000"/>
               </a:lnSpc>
@@ -8317,11 +8026,11 @@
           <a:bodyPr wrap="square" lIns="0" tIns="0" rIns="0" bIns="0" rtlCol="0" anchor="ctr"/>
           <a:lstStyle/>
           <a:p>
-            <a:pPr indent="0" marL="0">
-              <a:buNone/>
-            </a:pPr>
-            <a:r>
-              <a:rPr lang="en-US" sz="950" b="1" spc="150" kern="0" dirty="0">
+            <a:pPr marL="0" indent="0">
+              <a:buNone/>
+            </a:pPr>
+            <a:r>
+              <a:rPr lang="en-US" sz="950" b="1" kern="0" spc="150" dirty="0">
                 <a:solidFill>
                   <a:srgbClr val="B3261E"/>
                 </a:solidFill>
@@ -8356,7 +8065,7 @@
           <a:bodyPr wrap="square" lIns="0" tIns="0" rIns="0" bIns="0" rtlCol="0" anchor="ctr"/>
           <a:lstStyle/>
           <a:p>
-            <a:pPr indent="0" marL="0">
+            <a:pPr marL="0" indent="0">
               <a:lnSpc>
                 <a:spcPct val="112000"/>
               </a:lnSpc>
@@ -8397,7 +8106,7 @@
           </a:prstGeom>
           <a:extLst>
             <a:ext uri="{C572A759-6A51-4108-AA02-DFA0A04FC94B}">
-              <ma14:wrappingTextBoxFlag xmlns:ma14="http://schemas.microsoft.com/office/mac/drawingml/2011/main" val="0"/>
+              <ma14:wrappingTextBoxFlag xmlns="" xmlns:ma14="http://schemas.microsoft.com/office/mac/drawingml/2011/main" val="0"/>
             </a:ext>
           </a:extLst>
         </p:spPr>
@@ -8418,7 +8127,7 @@
           <a:p>
             <a:pPr algn="l"/>
             <a:fld id="{F7021451-1387-4CA6-816F-3879F97B5CBC}" type="slidenum">
-              <a:rPr b="0" lang="en-US"/>
+              <a:rPr lang="en-US" b="0"/>
               <a:t>14</a:t>
             </a:fld>
             <a:endParaRPr lang="en-US"/>
@@ -8493,7 +8202,7 @@
           <a:bodyPr wrap="square" lIns="0" tIns="0" rIns="0" bIns="0" rtlCol="0" anchor="ctr"/>
           <a:lstStyle/>
           <a:p>
-            <a:pPr algn="l" indent="0" marL="0">
+            <a:pPr marL="0" indent="0" algn="l">
               <a:buNone/>
             </a:pPr>
             <a:r>
@@ -8532,7 +8241,7 @@
           <a:bodyPr wrap="square" lIns="0" tIns="0" rIns="0" bIns="0" rtlCol="0" anchor="ctr"/>
           <a:lstStyle/>
           <a:p>
-            <a:pPr indent="0" marL="0">
+            <a:pPr marL="0" indent="0">
               <a:buNone/>
             </a:pPr>
             <a:r>
@@ -8598,11 +8307,11 @@
           <a:bodyPr wrap="square" lIns="0" tIns="0" rIns="0" bIns="0" rtlCol="0" anchor="ctr"/>
           <a:lstStyle/>
           <a:p>
-            <a:pPr algn="ctr" indent="0" marL="0">
-              <a:buNone/>
-            </a:pPr>
-            <a:r>
-              <a:rPr lang="en-US" sz="900" b="1" spc="100" kern="0" dirty="0">
+            <a:pPr marL="0" indent="0" algn="ctr">
+              <a:buNone/>
+            </a:pPr>
+            <a:r>
+              <a:rPr lang="en-US" sz="900" b="1" kern="0" spc="100" dirty="0">
                 <a:solidFill>
                   <a:srgbClr val="5A05F4"/>
                 </a:solidFill>
@@ -8618,14 +8327,14 @@
       </p:sp>
       <p:pic>
         <p:nvPicPr>
-          <p:cNvPr id="7" name="Image 0" descr="preencoded.png">    </p:cNvPr>
+          <p:cNvPr id="7" name="Image 0" descr="preencoded.png"/>
           <p:cNvPicPr>
             <a:picLocks noChangeAspect="1"/>
           </p:cNvPicPr>
           <p:nvPr/>
         </p:nvPicPr>
         <p:blipFill>
-          <a:blip r:embed="rId1"/>
+          <a:blip r:embed="rId3"/>
           <a:stretch>
             <a:fillRect/>
           </a:stretch>
@@ -8656,16 +8365,34 @@
         </p:nvGraphicFramePr>
         <p:xfrm>
           <a:off x="566928" y="1737360"/>
-          <a:ext cx="11064240" cy="914400"/>
+          <a:ext cx="11064240" cy="3017520"/>
         </p:xfrm>
         <a:graphic>
           <a:graphicData uri="http://schemas.openxmlformats.org/drawingml/2006/table">
             <a:tbl>
               <a:tblPr/>
               <a:tblGrid>
-                <a:gridCol w="2560320"/>
-                <a:gridCol w="4206240"/>
-                <a:gridCol w="4297680"/>
+                <a:gridCol w="2560320">
+                  <a:extLst>
+                    <a:ext uri="{9D8B030D-6E8A-4147-A177-3AD203B41FA5}">
+                      <a16:colId xmlns:a16="http://schemas.microsoft.com/office/drawing/2014/main" val="20000"/>
+                    </a:ext>
+                  </a:extLst>
+                </a:gridCol>
+                <a:gridCol w="4206240">
+                  <a:extLst>
+                    <a:ext uri="{9D8B030D-6E8A-4147-A177-3AD203B41FA5}">
+                      <a16:colId xmlns:a16="http://schemas.microsoft.com/office/drawing/2014/main" val="20001"/>
+                    </a:ext>
+                  </a:extLst>
+                </a:gridCol>
+                <a:gridCol w="4297680">
+                  <a:extLst>
+                    <a:ext uri="{9D8B030D-6E8A-4147-A177-3AD203B41FA5}">
+                      <a16:colId xmlns:a16="http://schemas.microsoft.com/office/drawing/2014/main" val="20002"/>
+                    </a:ext>
+                  </a:extLst>
+                </a:gridCol>
               </a:tblGrid>
               <a:tr h="603504">
                 <a:tc>
@@ -8673,11 +8400,11 @@
                     <a:bodyPr/>
                     <a:lstStyle/>
                     <a:p>
-                      <a:pPr algn="ctr" indent="0" marL="0">
+                      <a:pPr marL="0" indent="0" algn="ctr">
                         <a:buNone/>
                       </a:pPr>
                       <a:r>
-                        <a:rPr lang="en-US" sz="900" b="1" spc="100" kern="0" dirty="0">
+                        <a:rPr lang="en-US" sz="900" b="1" kern="0" spc="100" dirty="0">
                           <a:solidFill>
                             <a:srgbClr val="FFFFFF"/>
                           </a:solidFill>
@@ -8741,11 +8468,11 @@
                     <a:bodyPr/>
                     <a:lstStyle/>
                     <a:p>
-                      <a:pPr algn="ctr" indent="0" marL="0">
+                      <a:pPr marL="0" indent="0" algn="ctr">
                         <a:buNone/>
                       </a:pPr>
                       <a:r>
-                        <a:rPr lang="en-US" sz="900" b="1" spc="100" kern="0" dirty="0">
+                        <a:rPr lang="en-US" sz="900" b="1" kern="0" spc="100" dirty="0">
                           <a:solidFill>
                             <a:srgbClr val="FFFFFF"/>
                           </a:solidFill>
@@ -8809,11 +8536,11 @@
                     <a:bodyPr/>
                     <a:lstStyle/>
                     <a:p>
-                      <a:pPr algn="ctr" indent="0" marL="0">
+                      <a:pPr marL="0" indent="0" algn="ctr">
                         <a:buNone/>
                       </a:pPr>
                       <a:r>
-                        <a:rPr lang="en-US" sz="900" b="1" spc="100" kern="0" dirty="0">
+                        <a:rPr lang="en-US" sz="900" b="1" kern="0" spc="100" dirty="0">
                           <a:solidFill>
                             <a:srgbClr val="FFFFFF"/>
                           </a:solidFill>
@@ -8872,6 +8599,11 @@
                     </a:solidFill>
                   </a:tcPr>
                 </a:tc>
+                <a:extLst>
+                  <a:ext uri="{0D108BD9-81ED-4DB2-BD59-A6C34878D82A}">
+                    <a16:rowId xmlns:a16="http://schemas.microsoft.com/office/drawing/2014/main" val="10000"/>
+                  </a:ext>
+                </a:extLst>
               </a:tr>
               <a:tr h="603504">
                 <a:tc>
@@ -8879,7 +8611,7 @@
                     <a:bodyPr/>
                     <a:lstStyle/>
                     <a:p>
-                      <a:pPr indent="0" marL="0">
+                      <a:pPr marL="0" indent="0">
                         <a:buNone/>
                       </a:pPr>
                       <a:r>
@@ -8947,7 +8679,7 @@
                     <a:bodyPr/>
                     <a:lstStyle/>
                     <a:p>
-                      <a:pPr indent="0" marL="0">
+                      <a:pPr marL="0" indent="0">
                         <a:buNone/>
                       </a:pPr>
                       <a:r>
@@ -9015,7 +8747,7 @@
                     <a:bodyPr/>
                     <a:lstStyle/>
                     <a:p>
-                      <a:pPr indent="0" marL="0">
+                      <a:pPr marL="0" indent="0">
                         <a:buNone/>
                       </a:pPr>
                       <a:r>
@@ -9078,6 +8810,11 @@
                     </a:solidFill>
                   </a:tcPr>
                 </a:tc>
+                <a:extLst>
+                  <a:ext uri="{0D108BD9-81ED-4DB2-BD59-A6C34878D82A}">
+                    <a16:rowId xmlns:a16="http://schemas.microsoft.com/office/drawing/2014/main" val="10001"/>
+                  </a:ext>
+                </a:extLst>
               </a:tr>
               <a:tr h="603504">
                 <a:tc>
@@ -9085,7 +8822,7 @@
                     <a:bodyPr/>
                     <a:lstStyle/>
                     <a:p>
-                      <a:pPr indent="0" marL="0">
+                      <a:pPr marL="0" indent="0">
                         <a:buNone/>
                       </a:pPr>
                       <a:r>
@@ -9153,7 +8890,7 @@
                     <a:bodyPr/>
                     <a:lstStyle/>
                     <a:p>
-                      <a:pPr indent="0" marL="0">
+                      <a:pPr marL="0" indent="0">
                         <a:buNone/>
                       </a:pPr>
                       <a:r>
@@ -9221,7 +8958,7 @@
                     <a:bodyPr/>
                     <a:lstStyle/>
                     <a:p>
-                      <a:pPr indent="0" marL="0">
+                      <a:pPr marL="0" indent="0">
                         <a:buNone/>
                       </a:pPr>
                       <a:r>
@@ -9284,6 +9021,11 @@
                     </a:solidFill>
                   </a:tcPr>
                 </a:tc>
+                <a:extLst>
+                  <a:ext uri="{0D108BD9-81ED-4DB2-BD59-A6C34878D82A}">
+                    <a16:rowId xmlns:a16="http://schemas.microsoft.com/office/drawing/2014/main" val="10002"/>
+                  </a:ext>
+                </a:extLst>
               </a:tr>
               <a:tr h="603504">
                 <a:tc>
@@ -9291,7 +9033,7 @@
                     <a:bodyPr/>
                     <a:lstStyle/>
                     <a:p>
-                      <a:pPr indent="0" marL="0">
+                      <a:pPr marL="0" indent="0">
                         <a:buNone/>
                       </a:pPr>
                       <a:r>
@@ -9359,7 +9101,7 @@
                     <a:bodyPr/>
                     <a:lstStyle/>
                     <a:p>
-                      <a:pPr indent="0" marL="0">
+                      <a:pPr marL="0" indent="0">
                         <a:buNone/>
                       </a:pPr>
                       <a:r>
@@ -9427,7 +9169,7 @@
                     <a:bodyPr/>
                     <a:lstStyle/>
                     <a:p>
-                      <a:pPr indent="0" marL="0">
+                      <a:pPr marL="0" indent="0">
                         <a:buNone/>
                       </a:pPr>
                       <a:r>
@@ -9490,6 +9232,11 @@
                     </a:solidFill>
                   </a:tcPr>
                 </a:tc>
+                <a:extLst>
+                  <a:ext uri="{0D108BD9-81ED-4DB2-BD59-A6C34878D82A}">
+                    <a16:rowId xmlns:a16="http://schemas.microsoft.com/office/drawing/2014/main" val="10003"/>
+                  </a:ext>
+                </a:extLst>
               </a:tr>
               <a:tr h="603504">
                 <a:tc>
@@ -9497,7 +9244,7 @@
                     <a:bodyPr/>
                     <a:lstStyle/>
                     <a:p>
-                      <a:pPr indent="0" marL="0">
+                      <a:pPr marL="0" indent="0">
                         <a:buNone/>
                       </a:pPr>
                       <a:r>
@@ -9565,7 +9312,7 @@
                     <a:bodyPr/>
                     <a:lstStyle/>
                     <a:p>
-                      <a:pPr indent="0" marL="0">
+                      <a:pPr marL="0" indent="0">
                         <a:buNone/>
                       </a:pPr>
                       <a:r>
@@ -9633,7 +9380,7 @@
                     <a:bodyPr/>
                     <a:lstStyle/>
                     <a:p>
-                      <a:pPr indent="0" marL="0">
+                      <a:pPr marL="0" indent="0">
                         <a:buNone/>
                       </a:pPr>
                       <a:r>
@@ -9696,6 +9443,11 @@
                     </a:solidFill>
                   </a:tcPr>
                 </a:tc>
+                <a:extLst>
+                  <a:ext uri="{0D108BD9-81ED-4DB2-BD59-A6C34878D82A}">
+                    <a16:rowId xmlns:a16="http://schemas.microsoft.com/office/drawing/2014/main" val="10004"/>
+                  </a:ext>
+                </a:extLst>
               </a:tr>
             </a:tbl>
           </a:graphicData>
@@ -9749,7 +9501,7 @@
           <a:bodyPr wrap="square" lIns="0" tIns="0" rIns="0" bIns="0" rtlCol="0" anchor="ctr"/>
           <a:lstStyle/>
           <a:p>
-            <a:pPr indent="0" marL="0">
+            <a:pPr marL="0" indent="0">
               <a:lnSpc>
                 <a:spcPct val="112000"/>
               </a:lnSpc>
@@ -9790,7 +9542,7 @@
           </a:prstGeom>
           <a:extLst>
             <a:ext uri="{C572A759-6A51-4108-AA02-DFA0A04FC94B}">
-              <ma14:wrappingTextBoxFlag xmlns:ma14="http://schemas.microsoft.com/office/mac/drawingml/2011/main" val="0"/>
+              <ma14:wrappingTextBoxFlag xmlns="" xmlns:ma14="http://schemas.microsoft.com/office/mac/drawingml/2011/main" val="0"/>
             </a:ext>
           </a:extLst>
         </p:spPr>
@@ -9811,7 +9563,7 @@
           <a:p>
             <a:pPr algn="l"/>
             <a:fld id="{F7021451-1387-4CA6-816F-3879F97B5CBC}" type="slidenum">
-              <a:rPr b="0" lang="en-US"/>
+              <a:rPr lang="en-US" b="0"/>
               <a:t>15</a:t>
             </a:fld>
             <a:endParaRPr lang="en-US"/>
@@ -9886,7 +9638,7 @@
           <a:bodyPr wrap="square" lIns="0" tIns="0" rIns="0" bIns="0" rtlCol="0" anchor="ctr"/>
           <a:lstStyle/>
           <a:p>
-            <a:pPr algn="l" indent="0" marL="0">
+            <a:pPr marL="0" indent="0" algn="l">
               <a:buNone/>
             </a:pPr>
             <a:r>
@@ -9925,7 +9677,7 @@
           <a:bodyPr wrap="square" lIns="0" tIns="0" rIns="0" bIns="0" rtlCol="0" anchor="ctr"/>
           <a:lstStyle/>
           <a:p>
-            <a:pPr indent="0" marL="0">
+            <a:pPr marL="0" indent="0">
               <a:buNone/>
             </a:pPr>
             <a:r>
@@ -9991,11 +9743,11 @@
           <a:bodyPr wrap="square" lIns="0" tIns="0" rIns="0" bIns="0" rtlCol="0" anchor="ctr"/>
           <a:lstStyle/>
           <a:p>
-            <a:pPr algn="ctr" indent="0" marL="0">
-              <a:buNone/>
-            </a:pPr>
-            <a:r>
-              <a:rPr lang="en-US" sz="900" b="1" spc="100" kern="0" dirty="0">
+            <a:pPr marL="0" indent="0" algn="ctr">
+              <a:buNone/>
+            </a:pPr>
+            <a:r>
+              <a:rPr lang="en-US" sz="900" b="1" kern="0" spc="100" dirty="0">
                 <a:solidFill>
                   <a:srgbClr val="5A05F4"/>
                 </a:solidFill>
@@ -10011,14 +9763,14 @@
       </p:sp>
       <p:pic>
         <p:nvPicPr>
-          <p:cNvPr id="7" name="Image 0" descr="preencoded.png">    </p:cNvPr>
+          <p:cNvPr id="7" name="Image 0" descr="preencoded.png"/>
           <p:cNvPicPr>
             <a:picLocks noChangeAspect="1"/>
           </p:cNvPicPr>
           <p:nvPr/>
         </p:nvPicPr>
         <p:blipFill>
-          <a:blip r:embed="rId1"/>
+          <a:blip r:embed="rId3"/>
           <a:stretch>
             <a:fillRect/>
           </a:stretch>
@@ -10076,7 +9828,7 @@
           <a:bodyPr wrap="square" lIns="0" tIns="0" rIns="0" bIns="0" rtlCol="0" anchor="ctr"/>
           <a:lstStyle/>
           <a:p>
-            <a:pPr algn="ctr" indent="0" marL="0">
+            <a:pPr marL="0" indent="0" algn="ctr">
               <a:buNone/>
             </a:pPr>
             <a:r>
@@ -10180,7 +9932,7 @@
           <a:bodyPr wrap="square" lIns="0" tIns="0" rIns="0" bIns="0" rtlCol="0" anchor="ctr"/>
           <a:lstStyle/>
           <a:p>
-            <a:pPr algn="ctr" indent="0" marL="0">
+            <a:pPr marL="0" indent="0" algn="ctr">
               <a:buNone/>
             </a:pPr>
             <a:r>
@@ -10219,7 +9971,7 @@
           <a:bodyPr wrap="square" lIns="0" tIns="0" rIns="0" bIns="0" rtlCol="0" anchor="ctr"/>
           <a:lstStyle/>
           <a:p>
-            <a:pPr algn="ctr" indent="0" marL="0">
+            <a:pPr marL="0" indent="0" algn="ctr">
               <a:buNone/>
             </a:pPr>
             <a:r>
@@ -10280,7 +10032,7 @@
           <a:bodyPr wrap="square" lIns="0" tIns="0" rIns="0" bIns="0" rtlCol="0" anchor="ctr"/>
           <a:lstStyle/>
           <a:p>
-            <a:pPr indent="0" marL="0">
+            <a:pPr marL="0" indent="0">
               <a:buNone/>
             </a:pPr>
             <a:r>
@@ -10319,7 +10071,7 @@
           <a:bodyPr wrap="square" lIns="0" tIns="0" rIns="0" bIns="0" rtlCol="0" anchor="t"/>
           <a:lstStyle/>
           <a:p>
-            <a:pPr indent="0" marL="0">
+            <a:pPr marL="0" indent="0">
               <a:lnSpc>
                 <a:spcPct val="108000"/>
               </a:lnSpc>
@@ -10383,7 +10135,7 @@
           <a:bodyPr wrap="square" lIns="0" tIns="0" rIns="0" bIns="0" rtlCol="0" anchor="ctr"/>
           <a:lstStyle/>
           <a:p>
-            <a:pPr indent="0" marL="0">
+            <a:pPr marL="0" indent="0">
               <a:buNone/>
             </a:pPr>
             <a:r>
@@ -10422,7 +10174,7 @@
           <a:bodyPr wrap="square" lIns="0" tIns="0" rIns="0" bIns="0" rtlCol="0" anchor="t"/>
           <a:lstStyle/>
           <a:p>
-            <a:pPr indent="0" marL="0">
+            <a:pPr marL="0" indent="0">
               <a:lnSpc>
                 <a:spcPct val="108000"/>
               </a:lnSpc>
@@ -10463,7 +10215,7 @@
           </a:prstGeom>
           <a:extLst>
             <a:ext uri="{C572A759-6A51-4108-AA02-DFA0A04FC94B}">
-              <ma14:wrappingTextBoxFlag xmlns:ma14="http://schemas.microsoft.com/office/mac/drawingml/2011/main" val="0"/>
+              <ma14:wrappingTextBoxFlag xmlns="" xmlns:ma14="http://schemas.microsoft.com/office/mac/drawingml/2011/main" val="0"/>
             </a:ext>
           </a:extLst>
         </p:spPr>
@@ -10484,7 +10236,7 @@
           <a:p>
             <a:pPr algn="l"/>
             <a:fld id="{F7021451-1387-4CA6-816F-3879F97B5CBC}" type="slidenum">
-              <a:rPr b="0" lang="en-US"/>
+              <a:rPr lang="en-US" b="0"/>
               <a:t>16</a:t>
             </a:fld>
             <a:endParaRPr lang="en-US"/>
@@ -10559,7 +10311,7 @@
           <a:bodyPr wrap="square" lIns="0" tIns="0" rIns="0" bIns="0" rtlCol="0" anchor="ctr"/>
           <a:lstStyle/>
           <a:p>
-            <a:pPr algn="l" indent="0" marL="0">
+            <a:pPr marL="0" indent="0" algn="l">
               <a:buNone/>
             </a:pPr>
             <a:r>
@@ -10598,7 +10350,7 @@
           <a:bodyPr wrap="square" lIns="0" tIns="0" rIns="0" bIns="0" rtlCol="0" anchor="ctr"/>
           <a:lstStyle/>
           <a:p>
-            <a:pPr indent="0" marL="0">
+            <a:pPr marL="0" indent="0">
               <a:buNone/>
             </a:pPr>
             <a:r>
@@ -10664,11 +10416,11 @@
           <a:bodyPr wrap="square" lIns="0" tIns="0" rIns="0" bIns="0" rtlCol="0" anchor="ctr"/>
           <a:lstStyle/>
           <a:p>
-            <a:pPr algn="ctr" indent="0" marL="0">
-              <a:buNone/>
-            </a:pPr>
-            <a:r>
-              <a:rPr lang="en-US" sz="900" b="1" spc="100" kern="0" dirty="0">
+            <a:pPr marL="0" indent="0" algn="ctr">
+              <a:buNone/>
+            </a:pPr>
+            <a:r>
+              <a:rPr lang="en-US" sz="900" b="1" kern="0" spc="100" dirty="0">
                 <a:solidFill>
                   <a:srgbClr val="5A05F4"/>
                 </a:solidFill>
@@ -10684,14 +10436,14 @@
       </p:sp>
       <p:pic>
         <p:nvPicPr>
-          <p:cNvPr id="7" name="Image 0" descr="preencoded.png">    </p:cNvPr>
+          <p:cNvPr id="7" name="Image 0" descr="preencoded.png"/>
           <p:cNvPicPr>
             <a:picLocks noChangeAspect="1"/>
           </p:cNvPicPr>
           <p:nvPr/>
         </p:nvPicPr>
         <p:blipFill>
-          <a:blip r:embed="rId1"/>
+          <a:blip r:embed="rId3"/>
           <a:stretch>
             <a:fillRect/>
           </a:stretch>
@@ -10754,7 +10506,7 @@
           <a:bodyPr wrap="square" lIns="0" tIns="0" rIns="0" bIns="0" rtlCol="0" anchor="t"/>
           <a:lstStyle/>
           <a:p>
-            <a:pPr indent="0" marL="0">
+            <a:pPr marL="0" indent="0">
               <a:lnSpc>
                 <a:spcPct val="130000"/>
               </a:lnSpc>
@@ -10771,7 +10523,21 @@
               </a:rPr>
               <a:t>  - model_name: </a:t>
             </a:r>
-            <a:pPr indent="0" marL="0">
+            <a:r>
+              <a:rPr lang="en-US" sz="1200" dirty="0">
+                <a:solidFill>
+                  <a:srgbClr val="6BA0F8"/>
+                </a:solidFill>
+                <a:latin typeface="Courier New" pitchFamily="34" charset="0"/>
+                <a:ea typeface="Courier New" pitchFamily="34" charset="-122"/>
+                <a:cs typeface="Courier New" pitchFamily="34" charset="-120"/>
+              </a:rPr>
+              <a:t>azure-gpt-4o</a:t>
+            </a:r>
+            <a:endParaRPr lang="en-US" sz="1200" dirty="0"/>
+          </a:p>
+          <a:p>
+            <a:pPr marL="0" indent="0">
               <a:lnSpc>
                 <a:spcPct val="130000"/>
               </a:lnSpc>
@@ -10780,18 +10546,18 @@
             <a:r>
               <a:rPr lang="en-US" sz="1200" dirty="0">
                 <a:solidFill>
-                  <a:srgbClr val="6BA0F8"/>
+                  <a:srgbClr val="A98BFF"/>
                 </a:solidFill>
                 <a:latin typeface="Courier New" pitchFamily="34" charset="0"/>
                 <a:ea typeface="Courier New" pitchFamily="34" charset="-122"/>
                 <a:cs typeface="Courier New" pitchFamily="34" charset="-120"/>
               </a:rPr>
-              <a:t>azure-gpt-4o</a:t>
+              <a:t>    litellm_params:</a:t>
             </a:r>
             <a:endParaRPr lang="en-US" sz="1200" dirty="0"/>
           </a:p>
           <a:p>
-            <a:pPr indent="0" marL="0">
+            <a:pPr marL="0" indent="0">
               <a:lnSpc>
                 <a:spcPct val="130000"/>
               </a:lnSpc>
@@ -10800,18 +10566,18 @@
             <a:r>
               <a:rPr lang="en-US" sz="1200" dirty="0">
                 <a:solidFill>
-                  <a:srgbClr val="A98BFF"/>
+                  <a:srgbClr val="D8D4E4"/>
                 </a:solidFill>
                 <a:latin typeface="Courier New" pitchFamily="34" charset="0"/>
                 <a:ea typeface="Courier New" pitchFamily="34" charset="-122"/>
                 <a:cs typeface="Courier New" pitchFamily="34" charset="-120"/>
               </a:rPr>
-              <a:t>    litellm_params:</a:t>
+              <a:t>      model: azure/gpt-4o</a:t>
             </a:r>
             <a:endParaRPr lang="en-US" sz="1200" dirty="0"/>
           </a:p>
           <a:p>
-            <a:pPr indent="0" marL="0">
+            <a:pPr marL="0" indent="0">
               <a:lnSpc>
                 <a:spcPct val="130000"/>
               </a:lnSpc>
@@ -10826,32 +10592,12 @@
                 <a:ea typeface="Courier New" pitchFamily="34" charset="-122"/>
                 <a:cs typeface="Courier New" pitchFamily="34" charset="-120"/>
               </a:rPr>
-              <a:t>      model: azure/gpt-4o</a:t>
+              <a:t>      api_base: os.environ/AZURE_API_BASE</a:t>
             </a:r>
             <a:endParaRPr lang="en-US" sz="1200" dirty="0"/>
           </a:p>
           <a:p>
-            <a:pPr indent="0" marL="0">
-              <a:lnSpc>
-                <a:spcPct val="130000"/>
-              </a:lnSpc>
-              <a:buNone/>
-            </a:pPr>
-            <a:r>
-              <a:rPr lang="en-US" sz="1200" dirty="0">
-                <a:solidFill>
-                  <a:srgbClr val="D8D4E4"/>
-                </a:solidFill>
-                <a:latin typeface="Courier New" pitchFamily="34" charset="0"/>
-                <a:ea typeface="Courier New" pitchFamily="34" charset="-122"/>
-                <a:cs typeface="Courier New" pitchFamily="34" charset="-120"/>
-              </a:rPr>
-              <a:t>      api_base: os.environ/AZURE_API_BASE</a:t>
-            </a:r>
-            <a:endParaRPr lang="en-US" sz="1200" dirty="0"/>
-          </a:p>
-          <a:p>
-            <a:pPr indent="0" marL="0">
+            <a:pPr marL="0" indent="0">
               <a:lnSpc>
                 <a:spcPct val="130000"/>
               </a:lnSpc>
@@ -10915,7 +10661,7 @@
           <a:bodyPr wrap="square" lIns="0" tIns="0" rIns="0" bIns="0" rtlCol="0" anchor="ctr"/>
           <a:lstStyle/>
           <a:p>
-            <a:pPr algn="ctr" indent="0" marL="0">
+            <a:pPr marL="0" indent="0" algn="ctr">
               <a:buNone/>
             </a:pPr>
             <a:r>
@@ -11019,7 +10765,7 @@
           <a:bodyPr wrap="square" lIns="0" tIns="0" rIns="0" bIns="0" rtlCol="0" anchor="ctr"/>
           <a:lstStyle/>
           <a:p>
-            <a:pPr algn="ctr" indent="0" marL="0">
+            <a:pPr marL="0" indent="0" algn="ctr">
               <a:buNone/>
             </a:pPr>
             <a:r>
@@ -11123,7 +10869,7 @@
           <a:bodyPr wrap="square" lIns="0" tIns="0" rIns="0" bIns="0" rtlCol="0" anchor="ctr"/>
           <a:lstStyle/>
           <a:p>
-            <a:pPr algn="ctr" indent="0" marL="0">
+            <a:pPr marL="0" indent="0" algn="ctr">
               <a:buNone/>
             </a:pPr>
             <a:r>
@@ -11189,11 +10935,11 @@
           <a:bodyPr wrap="square" lIns="0" tIns="0" rIns="0" bIns="0" rtlCol="0" anchor="ctr"/>
           <a:lstStyle/>
           <a:p>
-            <a:pPr indent="0" marL="0">
-              <a:buNone/>
-            </a:pPr>
-            <a:r>
-              <a:rPr lang="en-US" sz="950" b="1" spc="150" kern="0" dirty="0">
+            <a:pPr marL="0" indent="0">
+              <a:buNone/>
+            </a:pPr>
+            <a:r>
+              <a:rPr lang="en-US" sz="950" b="1" kern="0" spc="150" dirty="0">
                 <a:solidFill>
                   <a:srgbClr val="1A4FBF"/>
                 </a:solidFill>
@@ -11228,7 +10974,7 @@
           <a:bodyPr wrap="square" lIns="0" tIns="0" rIns="0" bIns="0" rtlCol="0" anchor="ctr"/>
           <a:lstStyle/>
           <a:p>
-            <a:pPr indent="0" marL="0">
+            <a:pPr marL="0" indent="0">
               <a:lnSpc>
                 <a:spcPct val="112000"/>
               </a:lnSpc>
@@ -11269,7 +11015,7 @@
           </a:prstGeom>
           <a:extLst>
             <a:ext uri="{C572A759-6A51-4108-AA02-DFA0A04FC94B}">
-              <ma14:wrappingTextBoxFlag xmlns:ma14="http://schemas.microsoft.com/office/mac/drawingml/2011/main" val="0"/>
+              <ma14:wrappingTextBoxFlag xmlns="" xmlns:ma14="http://schemas.microsoft.com/office/mac/drawingml/2011/main" val="0"/>
             </a:ext>
           </a:extLst>
         </p:spPr>
@@ -11290,7 +11036,7 @@
           <a:p>
             <a:pPr algn="l"/>
             <a:fld id="{F7021451-1387-4CA6-816F-3879F97B5CBC}" type="slidenum">
-              <a:rPr b="0" lang="en-US"/>
+              <a:rPr lang="en-US" b="0"/>
               <a:t>17</a:t>
             </a:fld>
             <a:endParaRPr lang="en-US"/>
@@ -11365,7 +11111,7 @@
           <a:bodyPr wrap="square" lIns="0" tIns="0" rIns="0" bIns="0" rtlCol="0" anchor="ctr"/>
           <a:lstStyle/>
           <a:p>
-            <a:pPr algn="l" indent="0" marL="0">
+            <a:pPr marL="0" indent="0" algn="l">
               <a:buNone/>
             </a:pPr>
             <a:r>
@@ -11404,7 +11150,7 @@
           <a:bodyPr wrap="square" lIns="0" tIns="0" rIns="0" bIns="0" rtlCol="0" anchor="ctr"/>
           <a:lstStyle/>
           <a:p>
-            <a:pPr indent="0" marL="0">
+            <a:pPr marL="0" indent="0">
               <a:buNone/>
             </a:pPr>
             <a:r>
@@ -11470,11 +11216,11 @@
           <a:bodyPr wrap="square" lIns="0" tIns="0" rIns="0" bIns="0" rtlCol="0" anchor="ctr"/>
           <a:lstStyle/>
           <a:p>
-            <a:pPr algn="ctr" indent="0" marL="0">
-              <a:buNone/>
-            </a:pPr>
-            <a:r>
-              <a:rPr lang="en-US" sz="900" b="1" spc="100" kern="0" dirty="0">
+            <a:pPr marL="0" indent="0" algn="ctr">
+              <a:buNone/>
+            </a:pPr>
+            <a:r>
+              <a:rPr lang="en-US" sz="900" b="1" kern="0" spc="100" dirty="0">
                 <a:solidFill>
                   <a:srgbClr val="5A05F4"/>
                 </a:solidFill>
@@ -11536,11 +11282,11 @@
           <a:bodyPr wrap="square" lIns="0" tIns="0" rIns="0" bIns="0" rtlCol="0" anchor="ctr"/>
           <a:lstStyle/>
           <a:p>
-            <a:pPr algn="ctr" indent="0" marL="0">
-              <a:buNone/>
-            </a:pPr>
-            <a:r>
-              <a:rPr lang="en-US" sz="900" b="1" spc="100" kern="0" dirty="0">
+            <a:pPr marL="0" indent="0" algn="ctr">
+              <a:buNone/>
+            </a:pPr>
+            <a:r>
+              <a:rPr lang="en-US" sz="900" b="1" kern="0" spc="100" dirty="0">
                 <a:solidFill>
                   <a:srgbClr val="434343"/>
                 </a:solidFill>
@@ -11556,14 +11302,14 @@
       </p:sp>
       <p:pic>
         <p:nvPicPr>
-          <p:cNvPr id="9" name="Image 0" descr="preencoded.png">    </p:cNvPr>
+          <p:cNvPr id="9" name="Image 0" descr="preencoded.png"/>
           <p:cNvPicPr>
             <a:picLocks noChangeAspect="1"/>
           </p:cNvPicPr>
           <p:nvPr/>
         </p:nvPicPr>
         <p:blipFill>
-          <a:blip r:embed="rId1"/>
+          <a:blip r:embed="rId3"/>
           <a:stretch>
             <a:fillRect/>
           </a:stretch>
@@ -11641,7 +11387,7 @@
           <a:bodyPr wrap="square" lIns="0" tIns="0" rIns="0" bIns="0" rtlCol="0" anchor="ctr"/>
           <a:lstStyle/>
           <a:p>
-            <a:pPr algn="ctr" indent="0" marL="0">
+            <a:pPr marL="0" indent="0" algn="ctr">
               <a:buNone/>
             </a:pPr>
             <a:r>
@@ -11680,7 +11426,7 @@
           <a:bodyPr wrap="square" lIns="0" tIns="0" rIns="0" bIns="0" rtlCol="0" anchor="ctr"/>
           <a:lstStyle/>
           <a:p>
-            <a:pPr indent="0" marL="0">
+            <a:pPr marL="0" indent="0">
               <a:buNone/>
             </a:pPr>
             <a:r>
@@ -11719,7 +11465,7 @@
           <a:bodyPr wrap="square" lIns="0" tIns="0" rIns="0" bIns="0" rtlCol="0" anchor="t"/>
           <a:lstStyle/>
           <a:p>
-            <a:pPr indent="0" marL="0">
+            <a:pPr marL="0" indent="0">
               <a:lnSpc>
                 <a:spcPct val="108000"/>
               </a:lnSpc>
@@ -11803,7 +11549,7 @@
           <a:bodyPr wrap="square" lIns="0" tIns="0" rIns="0" bIns="0" rtlCol="0" anchor="ctr"/>
           <a:lstStyle/>
           <a:p>
-            <a:pPr algn="ctr" indent="0" marL="0">
+            <a:pPr marL="0" indent="0" algn="ctr">
               <a:buNone/>
             </a:pPr>
             <a:r>
@@ -11842,7 +11588,7 @@
           <a:bodyPr wrap="square" lIns="0" tIns="0" rIns="0" bIns="0" rtlCol="0" anchor="ctr"/>
           <a:lstStyle/>
           <a:p>
-            <a:pPr indent="0" marL="0">
+            <a:pPr marL="0" indent="0">
               <a:buNone/>
             </a:pPr>
             <a:r>
@@ -11881,7 +11627,7 @@
           <a:bodyPr wrap="square" lIns="0" tIns="0" rIns="0" bIns="0" rtlCol="0" anchor="t"/>
           <a:lstStyle/>
           <a:p>
-            <a:pPr indent="0" marL="0">
+            <a:pPr marL="0" indent="0">
               <a:lnSpc>
                 <a:spcPct val="108000"/>
               </a:lnSpc>
@@ -11965,7 +11711,7 @@
           <a:bodyPr wrap="square" lIns="0" tIns="0" rIns="0" bIns="0" rtlCol="0" anchor="ctr"/>
           <a:lstStyle/>
           <a:p>
-            <a:pPr algn="ctr" indent="0" marL="0">
+            <a:pPr marL="0" indent="0" algn="ctr">
               <a:buNone/>
             </a:pPr>
             <a:r>
@@ -12004,7 +11750,7 @@
           <a:bodyPr wrap="square" lIns="0" tIns="0" rIns="0" bIns="0" rtlCol="0" anchor="ctr"/>
           <a:lstStyle/>
           <a:p>
-            <a:pPr indent="0" marL="0">
+            <a:pPr marL="0" indent="0">
               <a:buNone/>
             </a:pPr>
             <a:r>
@@ -12043,7 +11789,7 @@
           <a:bodyPr wrap="square" lIns="0" tIns="0" rIns="0" bIns="0" rtlCol="0" anchor="t"/>
           <a:lstStyle/>
           <a:p>
-            <a:pPr indent="0" marL="0">
+            <a:pPr marL="0" indent="0">
               <a:lnSpc>
                 <a:spcPct val="108000"/>
               </a:lnSpc>
@@ -12107,7 +11853,7 @@
           <a:bodyPr wrap="square" lIns="0" tIns="0" rIns="0" bIns="0" rtlCol="0" anchor="ctr"/>
           <a:lstStyle/>
           <a:p>
-            <a:pPr algn="ctr" indent="0" marL="0">
+            <a:pPr marL="0" indent="0" algn="ctr">
               <a:buNone/>
             </a:pPr>
             <a:r>
@@ -12168,7 +11914,7 @@
           <a:bodyPr wrap="square" lIns="0" tIns="0" rIns="0" bIns="0" rtlCol="0" anchor="ctr"/>
           <a:lstStyle/>
           <a:p>
-            <a:pPr algn="ctr" indent="0" marL="0">
+            <a:pPr marL="0" indent="0" algn="ctr">
               <a:buNone/>
             </a:pPr>
             <a:r>
@@ -12229,7 +11975,7 @@
           <a:bodyPr wrap="square" lIns="0" tIns="0" rIns="0" bIns="0" rtlCol="0" anchor="ctr"/>
           <a:lstStyle/>
           <a:p>
-            <a:pPr algn="ctr" indent="0" marL="0">
+            <a:pPr marL="0" indent="0" algn="ctr">
               <a:buNone/>
             </a:pPr>
             <a:r>
@@ -12268,11 +12014,11 @@
           <a:bodyPr wrap="square" lIns="0" tIns="0" rIns="0" bIns="0" rtlCol="0" anchor="ctr"/>
           <a:lstStyle/>
           <a:p>
-            <a:pPr indent="0" marL="0">
-              <a:buNone/>
-            </a:pPr>
-            <a:r>
-              <a:rPr lang="en-US" sz="850" spc="100" kern="0" dirty="0">
+            <a:pPr marL="0" indent="0">
+              <a:buNone/>
+            </a:pPr>
+            <a:r>
+              <a:rPr lang="en-US" sz="850" kern="0" spc="100" dirty="0">
                 <a:solidFill>
                   <a:srgbClr val="6B6B6B"/>
                 </a:solidFill>
@@ -12329,7 +12075,7 @@
           <a:bodyPr wrap="square" lIns="0" tIns="0" rIns="0" bIns="0" rtlCol="0" anchor="ctr"/>
           <a:lstStyle/>
           <a:p>
-            <a:pPr indent="0" marL="0">
+            <a:pPr marL="0" indent="0">
               <a:buNone/>
             </a:pPr>
             <a:r>
@@ -12368,7 +12114,7 @@
           <a:bodyPr wrap="square" lIns="0" tIns="0" rIns="0" bIns="0" rtlCol="0" anchor="t"/>
           <a:lstStyle/>
           <a:p>
-            <a:pPr indent="0" marL="0">
+            <a:pPr marL="0" indent="0">
               <a:lnSpc>
                 <a:spcPct val="108000"/>
               </a:lnSpc>
@@ -12432,7 +12178,7 @@
           <a:bodyPr wrap="square" lIns="0" tIns="0" rIns="0" bIns="0" rtlCol="0" anchor="ctr"/>
           <a:lstStyle/>
           <a:p>
-            <a:pPr indent="0" marL="0">
+            <a:pPr marL="0" indent="0">
               <a:buNone/>
             </a:pPr>
             <a:r>
@@ -12471,7 +12217,7 @@
           <a:bodyPr wrap="square" lIns="0" tIns="0" rIns="0" bIns="0" rtlCol="0" anchor="t"/>
           <a:lstStyle/>
           <a:p>
-            <a:pPr indent="0" marL="0">
+            <a:pPr marL="0" indent="0">
               <a:lnSpc>
                 <a:spcPct val="108000"/>
               </a:lnSpc>
@@ -12494,7 +12240,7 @@
       </p:sp>
       <p:sp>
         <p:nvSpPr>
-          <p:cNvPr id="25" name="Slide Number Placeholder 0"/>
+          <p:cNvPr id="38" name="Slide Number Placeholder 0"/>
           <p:cNvSpPr>
             <a:spLocks noGrp="1"/>
           </p:cNvSpPr>
@@ -12512,7 +12258,7 @@
           </a:prstGeom>
           <a:extLst>
             <a:ext uri="{C572A759-6A51-4108-AA02-DFA0A04FC94B}">
-              <ma14:wrappingTextBoxFlag xmlns:ma14="http://schemas.microsoft.com/office/mac/drawingml/2011/main" val="0"/>
+              <ma14:wrappingTextBoxFlag xmlns="" xmlns:ma14="http://schemas.microsoft.com/office/mac/drawingml/2011/main" val="0"/>
             </a:ext>
           </a:extLst>
         </p:spPr>
@@ -12533,7 +12279,7 @@
           <a:p>
             <a:pPr algn="l"/>
             <a:fld id="{F7021451-1387-4CA6-816F-3879F97B5CBC}" type="slidenum">
-              <a:rPr b="0" lang="en-US"/>
+              <a:rPr lang="en-US" b="0"/>
               <a:t>18</a:t>
             </a:fld>
             <a:endParaRPr lang="en-US"/>
@@ -12586,11 +12332,11 @@
           <a:bodyPr wrap="square" lIns="0" tIns="0" rIns="0" bIns="0" rtlCol="0" anchor="ctr"/>
           <a:lstStyle/>
           <a:p>
-            <a:pPr indent="0" marL="0">
-              <a:buNone/>
-            </a:pPr>
-            <a:r>
-              <a:rPr lang="en-US" sz="1200" b="1" spc="400" kern="0" dirty="0">
+            <a:pPr marL="0" indent="0">
+              <a:buNone/>
+            </a:pPr>
+            <a:r>
+              <a:rPr lang="en-US" sz="1200" b="1" kern="0" spc="400" dirty="0">
                 <a:solidFill>
                   <a:srgbClr val="FFFFFF"/>
                 </a:solidFill>
@@ -12625,7 +12371,7 @@
           <a:bodyPr wrap="square" lIns="0" tIns="0" rIns="0" bIns="0" rtlCol="0" anchor="ctr"/>
           <a:lstStyle/>
           <a:p>
-            <a:pPr indent="0" marL="0">
+            <a:pPr marL="0" indent="0">
               <a:buNone/>
             </a:pPr>
             <a:r>
@@ -12664,7 +12410,7 @@
           <a:bodyPr wrap="square" lIns="0" tIns="0" rIns="0" bIns="0" rtlCol="0" anchor="t"/>
           <a:lstStyle/>
           <a:p>
-            <a:pPr indent="0" marL="0">
+            <a:pPr marL="0" indent="0">
               <a:buNone/>
             </a:pPr>
             <a:r>
@@ -12725,7 +12471,7 @@
           <a:bodyPr wrap="square" lIns="0" tIns="0" rIns="0" bIns="0" rtlCol="0" anchor="ctr"/>
           <a:lstStyle/>
           <a:p>
-            <a:pPr algn="ctr" indent="0" marL="0">
+            <a:pPr marL="0" indent="0" algn="ctr">
               <a:buNone/>
             </a:pPr>
             <a:r>
@@ -12811,7 +12557,7 @@
           <a:bodyPr wrap="square" lIns="0" tIns="0" rIns="0" bIns="0" rtlCol="0" anchor="ctr"/>
           <a:lstStyle/>
           <a:p>
-            <a:pPr indent="0" marL="0">
+            <a:pPr marL="0" indent="0">
               <a:buNone/>
             </a:pPr>
             <a:r>
@@ -12850,7 +12596,7 @@
           <a:bodyPr wrap="square" lIns="0" tIns="0" rIns="0" bIns="0" rtlCol="0" anchor="t"/>
           <a:lstStyle/>
           <a:p>
-            <a:pPr indent="0" marL="0">
+            <a:pPr marL="0" indent="0">
               <a:lnSpc>
                 <a:spcPct val="100000"/>
               </a:lnSpc>
@@ -12919,11 +12665,11 @@
           <a:bodyPr wrap="square" lIns="0" tIns="0" rIns="0" bIns="0" rtlCol="0" anchor="ctr"/>
           <a:lstStyle/>
           <a:p>
-            <a:pPr algn="ctr" indent="0" marL="0">
-              <a:buNone/>
-            </a:pPr>
-            <a:r>
-              <a:rPr lang="en-US" sz="900" b="1" spc="100" kern="0" dirty="0">
+            <a:pPr marL="0" indent="0" algn="ctr">
+              <a:buNone/>
+            </a:pPr>
+            <a:r>
+              <a:rPr lang="en-US" sz="900" b="1" kern="0" spc="100" dirty="0">
                 <a:solidFill>
                   <a:srgbClr val="5A05F4"/>
                 </a:solidFill>
@@ -12939,14 +12685,14 @@
       </p:sp>
       <p:pic>
         <p:nvPicPr>
-          <p:cNvPr id="7" name="Image 0" descr="preencoded.png">    </p:cNvPr>
+          <p:cNvPr id="7" name="Image 0" descr="preencoded.png"/>
           <p:cNvPicPr>
             <a:picLocks noChangeAspect="1"/>
           </p:cNvPicPr>
           <p:nvPr/>
         </p:nvPicPr>
         <p:blipFill>
-          <a:blip r:embed="rId1"/>
+          <a:blip r:embed="rId3"/>
           <a:stretch>
             <a:fillRect/>
           </a:stretch>
@@ -13024,7 +12770,7 @@
           <a:bodyPr wrap="square" lIns="0" tIns="0" rIns="0" bIns="0" rtlCol="0" anchor="ctr"/>
           <a:lstStyle/>
           <a:p>
-            <a:pPr algn="ctr" indent="0" marL="0">
+            <a:pPr marL="0" indent="0" algn="ctr">
               <a:buNone/>
             </a:pPr>
             <a:r>
@@ -13063,7 +12809,7 @@
           <a:bodyPr wrap="square" lIns="0" tIns="0" rIns="0" bIns="0" rtlCol="0" anchor="ctr"/>
           <a:lstStyle/>
           <a:p>
-            <a:pPr indent="0" marL="0">
+            <a:pPr marL="0" indent="0">
               <a:buNone/>
             </a:pPr>
             <a:r>
@@ -13102,7 +12848,7 @@
           <a:bodyPr wrap="square" lIns="0" tIns="0" rIns="0" bIns="0" rtlCol="0" anchor="t"/>
           <a:lstStyle/>
           <a:p>
-            <a:pPr indent="0" marL="0">
+            <a:pPr marL="0" indent="0">
               <a:lnSpc>
                 <a:spcPct val="108000"/>
               </a:lnSpc>
@@ -13186,7 +12932,7 @@
           <a:bodyPr wrap="square" lIns="0" tIns="0" rIns="0" bIns="0" rtlCol="0" anchor="ctr"/>
           <a:lstStyle/>
           <a:p>
-            <a:pPr algn="ctr" indent="0" marL="0">
+            <a:pPr marL="0" indent="0" algn="ctr">
               <a:buNone/>
             </a:pPr>
             <a:r>
@@ -13225,7 +12971,7 @@
           <a:bodyPr wrap="square" lIns="0" tIns="0" rIns="0" bIns="0" rtlCol="0" anchor="ctr"/>
           <a:lstStyle/>
           <a:p>
-            <a:pPr indent="0" marL="0">
+            <a:pPr marL="0" indent="0">
               <a:buNone/>
             </a:pPr>
             <a:r>
@@ -13264,7 +13010,7 @@
           <a:bodyPr wrap="square" lIns="0" tIns="0" rIns="0" bIns="0" rtlCol="0" anchor="t"/>
           <a:lstStyle/>
           <a:p>
-            <a:pPr indent="0" marL="0">
+            <a:pPr marL="0" indent="0">
               <a:lnSpc>
                 <a:spcPct val="108000"/>
               </a:lnSpc>
@@ -13348,7 +13094,7 @@
           <a:bodyPr wrap="square" lIns="0" tIns="0" rIns="0" bIns="0" rtlCol="0" anchor="ctr"/>
           <a:lstStyle/>
           <a:p>
-            <a:pPr algn="ctr" indent="0" marL="0">
+            <a:pPr marL="0" indent="0" algn="ctr">
               <a:buNone/>
             </a:pPr>
             <a:r>
@@ -13387,7 +13133,7 @@
           <a:bodyPr wrap="square" lIns="0" tIns="0" rIns="0" bIns="0" rtlCol="0" anchor="ctr"/>
           <a:lstStyle/>
           <a:p>
-            <a:pPr indent="0" marL="0">
+            <a:pPr marL="0" indent="0">
               <a:buNone/>
             </a:pPr>
             <a:r>
@@ -13426,7 +13172,7 @@
           <a:bodyPr wrap="square" lIns="0" tIns="0" rIns="0" bIns="0" rtlCol="0" anchor="t"/>
           <a:lstStyle/>
           <a:p>
-            <a:pPr indent="0" marL="0">
+            <a:pPr marL="0" indent="0">
               <a:lnSpc>
                 <a:spcPct val="108000"/>
               </a:lnSpc>
@@ -13510,7 +13256,7 @@
           <a:bodyPr wrap="square" lIns="0" tIns="0" rIns="0" bIns="0" rtlCol="0" anchor="ctr"/>
           <a:lstStyle/>
           <a:p>
-            <a:pPr algn="ctr" indent="0" marL="0">
+            <a:pPr marL="0" indent="0" algn="ctr">
               <a:buNone/>
             </a:pPr>
             <a:r>
@@ -13549,7 +13295,7 @@
           <a:bodyPr wrap="square" lIns="0" tIns="0" rIns="0" bIns="0" rtlCol="0" anchor="ctr"/>
           <a:lstStyle/>
           <a:p>
-            <a:pPr indent="0" marL="0">
+            <a:pPr marL="0" indent="0">
               <a:buNone/>
             </a:pPr>
             <a:r>
@@ -13588,7 +13334,7 @@
           <a:bodyPr wrap="square" lIns="0" tIns="0" rIns="0" bIns="0" rtlCol="0" anchor="t"/>
           <a:lstStyle/>
           <a:p>
-            <a:pPr indent="0" marL="0">
+            <a:pPr marL="0" indent="0">
               <a:lnSpc>
                 <a:spcPct val="108000"/>
               </a:lnSpc>
@@ -13672,7 +13418,7 @@
           <a:bodyPr wrap="square" lIns="0" tIns="0" rIns="0" bIns="0" rtlCol="0" anchor="ctr"/>
           <a:lstStyle/>
           <a:p>
-            <a:pPr algn="ctr" indent="0" marL="0">
+            <a:pPr marL="0" indent="0" algn="ctr">
               <a:buNone/>
             </a:pPr>
             <a:r>
@@ -13711,7 +13457,7 @@
           <a:bodyPr wrap="square" lIns="0" tIns="0" rIns="0" bIns="0" rtlCol="0" anchor="ctr"/>
           <a:lstStyle/>
           <a:p>
-            <a:pPr indent="0" marL="0">
+            <a:pPr marL="0" indent="0">
               <a:buNone/>
             </a:pPr>
             <a:r>
@@ -13750,7 +13496,7 @@
           <a:bodyPr wrap="square" lIns="0" tIns="0" rIns="0" bIns="0" rtlCol="0" anchor="t"/>
           <a:lstStyle/>
           <a:p>
-            <a:pPr indent="0" marL="0">
+            <a:pPr marL="0" indent="0">
               <a:lnSpc>
                 <a:spcPct val="108000"/>
               </a:lnSpc>
@@ -13773,7 +13519,7 @@
       </p:sp>
       <p:sp>
         <p:nvSpPr>
-          <p:cNvPr id="25" name="Slide Number Placeholder 0"/>
+          <p:cNvPr id="33" name="Slide Number Placeholder 0"/>
           <p:cNvSpPr>
             <a:spLocks noGrp="1"/>
           </p:cNvSpPr>
@@ -13791,7 +13537,7 @@
           </a:prstGeom>
           <a:extLst>
             <a:ext uri="{C572A759-6A51-4108-AA02-DFA0A04FC94B}">
-              <ma14:wrappingTextBoxFlag xmlns:ma14="http://schemas.microsoft.com/office/mac/drawingml/2011/main" val="0"/>
+              <ma14:wrappingTextBoxFlag xmlns="" xmlns:ma14="http://schemas.microsoft.com/office/mac/drawingml/2011/main" val="0"/>
             </a:ext>
           </a:extLst>
         </p:spPr>
@@ -13812,7 +13558,7 @@
           <a:p>
             <a:pPr algn="l"/>
             <a:fld id="{F7021451-1387-4CA6-816F-3879F97B5CBC}" type="slidenum">
-              <a:rPr b="0" lang="en-US"/>
+              <a:rPr lang="en-US" b="0"/>
               <a:t>2</a:t>
             </a:fld>
             <a:endParaRPr lang="en-US"/>
@@ -13887,7 +13633,7 @@
           <a:bodyPr wrap="square" lIns="0" tIns="0" rIns="0" bIns="0" rtlCol="0" anchor="ctr"/>
           <a:lstStyle/>
           <a:p>
-            <a:pPr indent="0" marL="0">
+            <a:pPr marL="0" indent="0">
               <a:buNone/>
             </a:pPr>
             <a:r>
@@ -13948,11 +13694,11 @@
           <a:bodyPr wrap="square" lIns="0" tIns="0" rIns="0" bIns="0" rtlCol="0" anchor="ctr"/>
           <a:lstStyle/>
           <a:p>
-            <a:pPr algn="ctr" indent="0" marL="0">
-              <a:buNone/>
-            </a:pPr>
-            <a:r>
-              <a:rPr lang="en-US" sz="900" b="1" spc="100" kern="0" dirty="0">
+            <a:pPr marL="0" indent="0" algn="ctr">
+              <a:buNone/>
+            </a:pPr>
+            <a:r>
+              <a:rPr lang="en-US" sz="900" b="1" kern="0" spc="100" dirty="0">
                 <a:solidFill>
                   <a:srgbClr val="FFFFFF"/>
                 </a:solidFill>
@@ -13968,14 +13714,14 @@
       </p:sp>
       <p:pic>
         <p:nvPicPr>
-          <p:cNvPr id="6" name="Image 0" descr="preencoded.png">    </p:cNvPr>
+          <p:cNvPr id="6" name="Image 0" descr="preencoded.png"/>
           <p:cNvPicPr>
             <a:picLocks noChangeAspect="1"/>
           </p:cNvPicPr>
           <p:nvPr/>
         </p:nvPicPr>
         <p:blipFill>
-          <a:blip r:embed="rId1"/>
+          <a:blip r:embed="rId3"/>
           <a:stretch>
             <a:fillRect/>
           </a:stretch>
@@ -14053,7 +13799,7 @@
           <a:bodyPr wrap="square" lIns="0" tIns="0" rIns="0" bIns="0" rtlCol="0" anchor="ctr"/>
           <a:lstStyle/>
           <a:p>
-            <a:pPr algn="ctr" indent="0" marL="0">
+            <a:pPr marL="0" indent="0" algn="ctr">
               <a:buNone/>
             </a:pPr>
             <a:r>
@@ -14092,7 +13838,7 @@
           <a:bodyPr wrap="square" lIns="0" tIns="0" rIns="0" bIns="0" rtlCol="0" anchor="ctr"/>
           <a:lstStyle/>
           <a:p>
-            <a:pPr indent="0" marL="0">
+            <a:pPr marL="0" indent="0">
               <a:buNone/>
             </a:pPr>
             <a:r>
@@ -14131,7 +13877,7 @@
           <a:bodyPr wrap="square" lIns="0" tIns="0" rIns="0" bIns="0" rtlCol="0" anchor="t"/>
           <a:lstStyle/>
           <a:p>
-            <a:pPr indent="0" marL="0">
+            <a:pPr marL="0" indent="0">
               <a:lnSpc>
                 <a:spcPct val="108000"/>
               </a:lnSpc>
@@ -14215,7 +13961,7 @@
           <a:bodyPr wrap="square" lIns="0" tIns="0" rIns="0" bIns="0" rtlCol="0" anchor="ctr"/>
           <a:lstStyle/>
           <a:p>
-            <a:pPr algn="ctr" indent="0" marL="0">
+            <a:pPr marL="0" indent="0" algn="ctr">
               <a:buNone/>
             </a:pPr>
             <a:r>
@@ -14254,7 +14000,7 @@
           <a:bodyPr wrap="square" lIns="0" tIns="0" rIns="0" bIns="0" rtlCol="0" anchor="ctr"/>
           <a:lstStyle/>
           <a:p>
-            <a:pPr indent="0" marL="0">
+            <a:pPr marL="0" indent="0">
               <a:buNone/>
             </a:pPr>
             <a:r>
@@ -14293,7 +14039,7 @@
           <a:bodyPr wrap="square" lIns="0" tIns="0" rIns="0" bIns="0" rtlCol="0" anchor="t"/>
           <a:lstStyle/>
           <a:p>
-            <a:pPr indent="0" marL="0">
+            <a:pPr marL="0" indent="0">
               <a:lnSpc>
                 <a:spcPct val="108000"/>
               </a:lnSpc>
@@ -14377,7 +14123,7 @@
           <a:bodyPr wrap="square" lIns="0" tIns="0" rIns="0" bIns="0" rtlCol="0" anchor="ctr"/>
           <a:lstStyle/>
           <a:p>
-            <a:pPr algn="ctr" indent="0" marL="0">
+            <a:pPr marL="0" indent="0" algn="ctr">
               <a:buNone/>
             </a:pPr>
             <a:r>
@@ -14416,7 +14162,7 @@
           <a:bodyPr wrap="square" lIns="0" tIns="0" rIns="0" bIns="0" rtlCol="0" anchor="ctr"/>
           <a:lstStyle/>
           <a:p>
-            <a:pPr indent="0" marL="0">
+            <a:pPr marL="0" indent="0">
               <a:buNone/>
             </a:pPr>
             <a:r>
@@ -14455,7 +14201,7 @@
           <a:bodyPr wrap="square" lIns="0" tIns="0" rIns="0" bIns="0" rtlCol="0" anchor="t"/>
           <a:lstStyle/>
           <a:p>
-            <a:pPr indent="0" marL="0">
+            <a:pPr marL="0" indent="0">
               <a:lnSpc>
                 <a:spcPct val="108000"/>
               </a:lnSpc>
@@ -14539,7 +14285,7 @@
           <a:bodyPr wrap="square" lIns="0" tIns="0" rIns="0" bIns="0" rtlCol="0" anchor="ctr"/>
           <a:lstStyle/>
           <a:p>
-            <a:pPr algn="ctr" indent="0" marL="0">
+            <a:pPr marL="0" indent="0" algn="ctr">
               <a:buNone/>
             </a:pPr>
             <a:r>
@@ -14578,7 +14324,7 @@
           <a:bodyPr wrap="square" lIns="0" tIns="0" rIns="0" bIns="0" rtlCol="0" anchor="ctr"/>
           <a:lstStyle/>
           <a:p>
-            <a:pPr indent="0" marL="0">
+            <a:pPr marL="0" indent="0">
               <a:buNone/>
             </a:pPr>
             <a:r>
@@ -14617,7 +14363,7 @@
           <a:bodyPr wrap="square" lIns="0" tIns="0" rIns="0" bIns="0" rtlCol="0" anchor="t"/>
           <a:lstStyle/>
           <a:p>
-            <a:pPr indent="0" marL="0">
+            <a:pPr marL="0" indent="0">
               <a:lnSpc>
                 <a:spcPct val="108000"/>
               </a:lnSpc>
@@ -14647,7 +14393,7 @@
         <p:spPr>
           <a:xfrm>
             <a:off x="566928" y="5074920"/>
-            <a:ext cx="11064240" cy="1051560"/>
+            <a:ext cx="11247120" cy="1051560"/>
           </a:xfrm>
           <a:prstGeom prst="roundRect">
             <a:avLst>
@@ -14681,11 +14427,11 @@
           <a:bodyPr wrap="square" lIns="0" tIns="0" rIns="0" bIns="0" rtlCol="0" anchor="ctr"/>
           <a:lstStyle/>
           <a:p>
-            <a:pPr indent="0" marL="0">
-              <a:buNone/>
-            </a:pPr>
-            <a:r>
-              <a:rPr lang="en-US" sz="950" b="1" spc="150" kern="0" dirty="0">
+            <a:pPr marL="0" indent="0">
+              <a:buNone/>
+            </a:pPr>
+            <a:r>
+              <a:rPr lang="en-US" sz="950" b="1" kern="0" spc="150" dirty="0">
                 <a:solidFill>
                   <a:srgbClr val="FFFFFF"/>
                 </a:solidFill>
@@ -14720,7 +14466,7 @@
           <a:bodyPr wrap="square" lIns="0" tIns="0" rIns="0" bIns="0" rtlCol="0" anchor="ctr"/>
           <a:lstStyle/>
           <a:p>
-            <a:pPr indent="0" marL="0">
+            <a:pPr marL="0" indent="0">
               <a:lnSpc>
                 <a:spcPct val="112000"/>
               </a:lnSpc>
@@ -14743,7 +14489,7 @@
       </p:sp>
       <p:sp>
         <p:nvSpPr>
-          <p:cNvPr id="25" name="Slide Number Placeholder 0"/>
+          <p:cNvPr id="30" name="Slide Number Placeholder 0"/>
           <p:cNvSpPr>
             <a:spLocks noGrp="1"/>
           </p:cNvSpPr>
@@ -14761,7 +14507,7 @@
           </a:prstGeom>
           <a:extLst>
             <a:ext uri="{C572A759-6A51-4108-AA02-DFA0A04FC94B}">
-              <ma14:wrappingTextBoxFlag xmlns:ma14="http://schemas.microsoft.com/office/mac/drawingml/2011/main" val="0"/>
+              <ma14:wrappingTextBoxFlag xmlns="" xmlns:ma14="http://schemas.microsoft.com/office/mac/drawingml/2011/main" val="0"/>
             </a:ext>
           </a:extLst>
         </p:spPr>
@@ -14782,7 +14528,7 @@
           <a:p>
             <a:pPr algn="l"/>
             <a:fld id="{F7021451-1387-4CA6-816F-3879F97B5CBC}" type="slidenum">
-              <a:rPr b="0" lang="en-US"/>
+              <a:rPr lang="en-US" b="0"/>
               <a:t>20</a:t>
             </a:fld>
             <a:endParaRPr lang="en-US"/>
@@ -14857,7 +14603,7 @@
           <a:bodyPr wrap="square" lIns="0" tIns="0" rIns="0" bIns="0" rtlCol="0" anchor="ctr"/>
           <a:lstStyle/>
           <a:p>
-            <a:pPr indent="0" marL="0">
+            <a:pPr marL="0" indent="0">
               <a:buNone/>
             </a:pPr>
             <a:r>
@@ -14918,11 +14664,11 @@
           <a:bodyPr wrap="square" lIns="0" tIns="0" rIns="0" bIns="0" rtlCol="0" anchor="ctr"/>
           <a:lstStyle/>
           <a:p>
-            <a:pPr algn="ctr" indent="0" marL="0">
-              <a:buNone/>
-            </a:pPr>
-            <a:r>
-              <a:rPr lang="en-US" sz="900" b="1" spc="100" kern="0" dirty="0">
+            <a:pPr marL="0" indent="0" algn="ctr">
+              <a:buNone/>
+            </a:pPr>
+            <a:r>
+              <a:rPr lang="en-US" sz="900" b="1" kern="0" spc="100" dirty="0">
                 <a:solidFill>
                   <a:srgbClr val="FFFFFF"/>
                 </a:solidFill>
@@ -14938,14 +14684,14 @@
       </p:sp>
       <p:pic>
         <p:nvPicPr>
-          <p:cNvPr id="6" name="Image 0" descr="preencoded.png">    </p:cNvPr>
+          <p:cNvPr id="6" name="Image 0" descr="preencoded.png"/>
           <p:cNvPicPr>
             <a:picLocks noChangeAspect="1"/>
           </p:cNvPicPr>
           <p:nvPr/>
         </p:nvPicPr>
         <p:blipFill>
-          <a:blip r:embed="rId1"/>
+          <a:blip r:embed="rId3"/>
           <a:stretch>
             <a:fillRect/>
           </a:stretch>
@@ -15001,7 +14747,7 @@
           <a:bodyPr wrap="square" lIns="0" tIns="0" rIns="0" bIns="0" rtlCol="0" anchor="ctr"/>
           <a:lstStyle/>
           <a:p>
-            <a:pPr algn="ctr" indent="0" marL="0">
+            <a:pPr marL="0" indent="0" algn="ctr">
               <a:buNone/>
             </a:pPr>
             <a:r>
@@ -15040,7 +14786,7 @@
           <a:bodyPr wrap="square" lIns="0" tIns="0" rIns="0" bIns="0" rtlCol="0" anchor="ctr"/>
           <a:lstStyle/>
           <a:p>
-            <a:pPr indent="0" marL="0">
+            <a:pPr marL="0" indent="0">
               <a:buNone/>
             </a:pPr>
             <a:r>
@@ -15054,9 +14800,6 @@
               </a:rPr>
               <a:t>Прочитати конфіг  </a:t>
             </a:r>
-            <a:pPr indent="0" marL="0">
-              <a:buNone/>
-            </a:pPr>
             <a:r>
               <a:rPr lang="en-US" sz="1200" dirty="0">
                 <a:solidFill>
@@ -15113,7 +14856,7 @@
           <a:bodyPr wrap="square" lIns="0" tIns="0" rIns="0" bIns="0" rtlCol="0" anchor="ctr"/>
           <a:lstStyle/>
           <a:p>
-            <a:pPr algn="ctr" indent="0" marL="0">
+            <a:pPr marL="0" indent="0" algn="ctr">
               <a:buNone/>
             </a:pPr>
             <a:r>
@@ -15152,7 +14895,7 @@
           <a:bodyPr wrap="square" lIns="0" tIns="0" rIns="0" bIns="0" rtlCol="0" anchor="ctr"/>
           <a:lstStyle/>
           <a:p>
-            <a:pPr indent="0" marL="0">
+            <a:pPr marL="0" indent="0">
               <a:buNone/>
             </a:pPr>
             <a:r>
@@ -15166,9 +14909,6 @@
               </a:rPr>
               <a:t>Написати роутер  </a:t>
             </a:r>
-            <a:pPr indent="0" marL="0">
-              <a:buNone/>
-            </a:pPr>
             <a:r>
               <a:rPr lang="en-US" sz="1200" dirty="0">
                 <a:solidFill>
@@ -15225,7 +14965,7 @@
           <a:bodyPr wrap="square" lIns="0" tIns="0" rIns="0" bIns="0" rtlCol="0" anchor="ctr"/>
           <a:lstStyle/>
           <a:p>
-            <a:pPr algn="ctr" indent="0" marL="0">
+            <a:pPr marL="0" indent="0" algn="ctr">
               <a:buNone/>
             </a:pPr>
             <a:r>
@@ -15264,7 +15004,7 @@
           <a:bodyPr wrap="square" lIns="0" tIns="0" rIns="0" bIns="0" rtlCol="0" anchor="ctr"/>
           <a:lstStyle/>
           <a:p>
-            <a:pPr indent="0" marL="0">
+            <a:pPr marL="0" indent="0">
               <a:buNone/>
             </a:pPr>
             <a:r>
@@ -15278,9 +15018,6 @@
               </a:rPr>
               <a:t>Побачити розподіл  </a:t>
             </a:r>
-            <a:pPr indent="0" marL="0">
-              <a:buNone/>
-            </a:pPr>
             <a:r>
               <a:rPr lang="en-US" sz="1200" dirty="0">
                 <a:solidFill>
@@ -15337,7 +15074,7 @@
           <a:bodyPr wrap="square" lIns="0" tIns="0" rIns="0" bIns="0" rtlCol="0" anchor="ctr"/>
           <a:lstStyle/>
           <a:p>
-            <a:pPr algn="ctr" indent="0" marL="0">
+            <a:pPr marL="0" indent="0" algn="ctr">
               <a:buNone/>
             </a:pPr>
             <a:r>
@@ -15376,7 +15113,7 @@
           <a:bodyPr wrap="square" lIns="0" tIns="0" rIns="0" bIns="0" rtlCol="0" anchor="ctr"/>
           <a:lstStyle/>
           <a:p>
-            <a:pPr indent="0" marL="0">
+            <a:pPr marL="0" indent="0">
               <a:buNone/>
             </a:pPr>
             <a:r>
@@ -15390,9 +15127,6 @@
               </a:rPr>
               <a:t>Додати «третього» на папері  </a:t>
             </a:r>
-            <a:pPr indent="0" marL="0">
-              <a:buNone/>
-            </a:pPr>
             <a:r>
               <a:rPr lang="en-US" sz="1200" dirty="0">
                 <a:solidFill>
@@ -15449,7 +15183,7 @@
           <a:bodyPr wrap="square" lIns="0" tIns="0" rIns="0" bIns="0" rtlCol="0" anchor="ctr"/>
           <a:lstStyle/>
           <a:p>
-            <a:pPr algn="ctr" indent="0" marL="0">
+            <a:pPr marL="0" indent="0" algn="ctr">
               <a:buNone/>
             </a:pPr>
             <a:r>
@@ -15488,7 +15222,7 @@
           <a:bodyPr wrap="square" lIns="0" tIns="0" rIns="0" bIns="0" rtlCol="0" anchor="ctr"/>
           <a:lstStyle/>
           <a:p>
-            <a:pPr indent="0" marL="0">
+            <a:pPr marL="0" indent="0">
               <a:buNone/>
             </a:pPr>
             <a:r>
@@ -15502,9 +15236,6 @@
               </a:rPr>
               <a:t>Tier-політика · опційно  </a:t>
             </a:r>
-            <a:pPr indent="0" marL="0">
-              <a:buNone/>
-            </a:pPr>
             <a:r>
               <a:rPr lang="en-US" sz="1200" dirty="0">
                 <a:solidFill>
@@ -15540,7 +15271,7 @@
           </a:prstGeom>
           <a:extLst>
             <a:ext uri="{C572A759-6A51-4108-AA02-DFA0A04FC94B}">
-              <ma14:wrappingTextBoxFlag xmlns:ma14="http://schemas.microsoft.com/office/mac/drawingml/2011/main" val="0"/>
+              <ma14:wrappingTextBoxFlag xmlns="" xmlns:ma14="http://schemas.microsoft.com/office/mac/drawingml/2011/main" val="0"/>
             </a:ext>
           </a:extLst>
         </p:spPr>
@@ -15561,7 +15292,7 @@
           <a:p>
             <a:pPr algn="l"/>
             <a:fld id="{F7021451-1387-4CA6-816F-3879F97B5CBC}" type="slidenum">
-              <a:rPr b="0" lang="en-US"/>
+              <a:rPr lang="en-US" b="0"/>
               <a:t>21</a:t>
             </a:fld>
             <a:endParaRPr lang="en-US"/>
@@ -15614,11 +15345,11 @@
           <a:bodyPr wrap="square" lIns="0" tIns="0" rIns="0" bIns="0" rtlCol="0" anchor="ctr"/>
           <a:lstStyle/>
           <a:p>
-            <a:pPr indent="0" marL="0">
-              <a:buNone/>
-            </a:pPr>
-            <a:r>
-              <a:rPr lang="en-US" sz="1200" b="1" spc="400" kern="0" dirty="0">
+            <a:pPr marL="0" indent="0">
+              <a:buNone/>
+            </a:pPr>
+            <a:r>
+              <a:rPr lang="en-US" sz="1200" b="1" kern="0" spc="400" dirty="0">
                 <a:solidFill>
                   <a:srgbClr val="FFFFFF"/>
                 </a:solidFill>
@@ -15653,7 +15384,7 @@
           <a:bodyPr wrap="square" lIns="0" tIns="0" rIns="0" bIns="0" rtlCol="0" anchor="ctr"/>
           <a:lstStyle/>
           <a:p>
-            <a:pPr indent="0" marL="0">
+            <a:pPr marL="0" indent="0">
               <a:buNone/>
             </a:pPr>
             <a:r>
@@ -15692,7 +15423,7 @@
           <a:bodyPr wrap="square" lIns="0" tIns="0" rIns="0" bIns="0" rtlCol="0" anchor="t"/>
           <a:lstStyle/>
           <a:p>
-            <a:pPr indent="0" marL="0">
+            <a:pPr marL="0" indent="0">
               <a:buNone/>
             </a:pPr>
             <a:r>
@@ -15778,7 +15509,7 @@
           <a:bodyPr wrap="square" lIns="0" tIns="0" rIns="0" bIns="0" rtlCol="0" anchor="ctr"/>
           <a:lstStyle/>
           <a:p>
-            <a:pPr indent="0" marL="0">
+            <a:pPr marL="0" indent="0">
               <a:buNone/>
             </a:pPr>
             <a:r>
@@ -15844,11 +15575,11 @@
           <a:bodyPr wrap="square" lIns="0" tIns="0" rIns="0" bIns="0" rtlCol="0" anchor="ctr"/>
           <a:lstStyle/>
           <a:p>
-            <a:pPr algn="ctr" indent="0" marL="0">
-              <a:buNone/>
-            </a:pPr>
-            <a:r>
-              <a:rPr lang="en-US" sz="900" b="1" spc="100" kern="0" dirty="0">
+            <a:pPr marL="0" indent="0" algn="ctr">
+              <a:buNone/>
+            </a:pPr>
+            <a:r>
+              <a:rPr lang="en-US" sz="900" b="1" kern="0" spc="100" dirty="0">
                 <a:solidFill>
                   <a:srgbClr val="1A4FBF"/>
                 </a:solidFill>
@@ -15864,14 +15595,14 @@
       </p:sp>
       <p:pic>
         <p:nvPicPr>
-          <p:cNvPr id="6" name="Image 0" descr="preencoded.png">    </p:cNvPr>
+          <p:cNvPr id="6" name="Image 0" descr="preencoded.png"/>
           <p:cNvPicPr>
             <a:picLocks noChangeAspect="1"/>
           </p:cNvPicPr>
           <p:nvPr/>
         </p:nvPicPr>
         <p:blipFill>
-          <a:blip r:embed="rId1"/>
+          <a:blip r:embed="rId3"/>
           <a:stretch>
             <a:fillRect/>
           </a:stretch>
@@ -15929,7 +15660,7 @@
           <a:bodyPr wrap="square" lIns="0" tIns="0" rIns="0" bIns="0" rtlCol="0" anchor="ctr"/>
           <a:lstStyle/>
           <a:p>
-            <a:pPr indent="0" marL="0">
+            <a:pPr marL="0" indent="0">
               <a:buNone/>
             </a:pPr>
             <a:r>
@@ -15968,7 +15699,7 @@
           <a:bodyPr wrap="square" lIns="0" tIns="0" rIns="0" bIns="0" rtlCol="0" anchor="t"/>
           <a:lstStyle/>
           <a:p>
-            <a:pPr indent="0" marL="0">
+            <a:pPr marL="0" indent="0">
               <a:lnSpc>
                 <a:spcPct val="108000"/>
               </a:lnSpc>
@@ -16032,7 +15763,7 @@
           <a:bodyPr wrap="square" lIns="0" tIns="0" rIns="0" bIns="0" rtlCol="0" anchor="ctr"/>
           <a:lstStyle/>
           <a:p>
-            <a:pPr indent="0" marL="0">
+            <a:pPr marL="0" indent="0">
               <a:buNone/>
             </a:pPr>
             <a:r>
@@ -16071,7 +15802,7 @@
           <a:bodyPr wrap="square" lIns="0" tIns="0" rIns="0" bIns="0" rtlCol="0" anchor="t"/>
           <a:lstStyle/>
           <a:p>
-            <a:pPr indent="0" marL="0">
+            <a:pPr marL="0" indent="0">
               <a:lnSpc>
                 <a:spcPct val="108000"/>
               </a:lnSpc>
@@ -16135,7 +15866,7 @@
           <a:bodyPr wrap="square" lIns="0" tIns="0" rIns="0" bIns="0" rtlCol="0" anchor="ctr"/>
           <a:lstStyle/>
           <a:p>
-            <a:pPr indent="0" marL="0">
+            <a:pPr marL="0" indent="0">
               <a:buNone/>
             </a:pPr>
             <a:r>
@@ -16174,7 +15905,7 @@
           <a:bodyPr wrap="square" lIns="0" tIns="0" rIns="0" bIns="0" rtlCol="0" anchor="t"/>
           <a:lstStyle/>
           <a:p>
-            <a:pPr indent="0" marL="0">
+            <a:pPr marL="0" indent="0">
               <a:lnSpc>
                 <a:spcPct val="108000"/>
               </a:lnSpc>
@@ -16243,7 +15974,7 @@
           <a:bodyPr wrap="square" lIns="0" tIns="0" rIns="0" bIns="0" rtlCol="0" anchor="ctr"/>
           <a:lstStyle/>
           <a:p>
-            <a:pPr indent="0" marL="0">
+            <a:pPr marL="0" indent="0">
               <a:lnSpc>
                 <a:spcPct val="112000"/>
               </a:lnSpc>
@@ -16284,7 +16015,7 @@
           </a:prstGeom>
           <a:extLst>
             <a:ext uri="{C572A759-6A51-4108-AA02-DFA0A04FC94B}">
-              <ma14:wrappingTextBoxFlag xmlns:ma14="http://schemas.microsoft.com/office/mac/drawingml/2011/main" val="0"/>
+              <ma14:wrappingTextBoxFlag xmlns="" xmlns:ma14="http://schemas.microsoft.com/office/mac/drawingml/2011/main" val="0"/>
             </a:ext>
           </a:extLst>
         </p:spPr>
@@ -16305,7 +16036,7 @@
           <a:p>
             <a:pPr algn="l"/>
             <a:fld id="{F7021451-1387-4CA6-816F-3879F97B5CBC}" type="slidenum">
-              <a:rPr b="0" lang="en-US"/>
+              <a:rPr lang="en-US" b="0"/>
               <a:t>23</a:t>
             </a:fld>
             <a:endParaRPr lang="en-US"/>
@@ -16380,7 +16111,7 @@
           <a:bodyPr wrap="square" lIns="0" tIns="0" rIns="0" bIns="0" rtlCol="0" anchor="ctr"/>
           <a:lstStyle/>
           <a:p>
-            <a:pPr indent="0" marL="0">
+            <a:pPr marL="0" indent="0">
               <a:buNone/>
             </a:pPr>
             <a:r>
@@ -16446,11 +16177,11 @@
           <a:bodyPr wrap="square" lIns="0" tIns="0" rIns="0" bIns="0" rtlCol="0" anchor="ctr"/>
           <a:lstStyle/>
           <a:p>
-            <a:pPr algn="ctr" indent="0" marL="0">
-              <a:buNone/>
-            </a:pPr>
-            <a:r>
-              <a:rPr lang="en-US" sz="900" b="1" spc="100" kern="0" dirty="0">
+            <a:pPr marL="0" indent="0" algn="ctr">
+              <a:buNone/>
+            </a:pPr>
+            <a:r>
+              <a:rPr lang="en-US" sz="900" b="1" kern="0" spc="100" dirty="0">
                 <a:solidFill>
                   <a:srgbClr val="1A4FBF"/>
                 </a:solidFill>
@@ -16466,14 +16197,14 @@
       </p:sp>
       <p:pic>
         <p:nvPicPr>
-          <p:cNvPr id="6" name="Image 0" descr="preencoded.png">    </p:cNvPr>
+          <p:cNvPr id="6" name="Image 0" descr="preencoded.png"/>
           <p:cNvPicPr>
             <a:picLocks noChangeAspect="1"/>
           </p:cNvPicPr>
           <p:nvPr/>
         </p:nvPicPr>
         <p:blipFill>
-          <a:blip r:embed="rId1"/>
+          <a:blip r:embed="rId3"/>
           <a:stretch>
             <a:fillRect/>
           </a:stretch>
@@ -16603,7 +16334,7 @@
           <a:bodyPr wrap="square" lIns="0" tIns="0" rIns="0" bIns="0" rtlCol="0" anchor="ctr"/>
           <a:lstStyle/>
           <a:p>
-            <a:pPr indent="0" marL="0">
+            <a:pPr marL="0" indent="0">
               <a:buNone/>
             </a:pPr>
             <a:r>
@@ -16709,7 +16440,7 @@
           <a:bodyPr wrap="square" lIns="0" tIns="0" rIns="0" bIns="0" rtlCol="0" anchor="ctr"/>
           <a:lstStyle/>
           <a:p>
-            <a:pPr indent="0" marL="0">
+            <a:pPr marL="0" indent="0">
               <a:buNone/>
             </a:pPr>
             <a:r>
@@ -16815,7 +16546,7 @@
           <a:bodyPr wrap="square" lIns="0" tIns="0" rIns="0" bIns="0" rtlCol="0" anchor="ctr"/>
           <a:lstStyle/>
           <a:p>
-            <a:pPr indent="0" marL="0">
+            <a:pPr marL="0" indent="0">
               <a:buNone/>
             </a:pPr>
             <a:r>
@@ -16921,7 +16652,7 @@
           <a:bodyPr wrap="square" lIns="0" tIns="0" rIns="0" bIns="0" rtlCol="0" anchor="ctr"/>
           <a:lstStyle/>
           <a:p>
-            <a:pPr indent="0" marL="0">
+            <a:pPr marL="0" indent="0">
               <a:buNone/>
             </a:pPr>
             <a:r>
@@ -16960,7 +16691,7 @@
           <a:bodyPr wrap="square" lIns="0" tIns="0" rIns="0" bIns="0" rtlCol="0" anchor="ctr"/>
           <a:lstStyle/>
           <a:p>
-            <a:pPr indent="0" marL="0">
+            <a:pPr marL="0" indent="0">
               <a:buNone/>
             </a:pPr>
             <a:r>
@@ -16998,7 +16729,7 @@
           </a:prstGeom>
           <a:extLst>
             <a:ext uri="{C572A759-6A51-4108-AA02-DFA0A04FC94B}">
-              <ma14:wrappingTextBoxFlag xmlns:ma14="http://schemas.microsoft.com/office/mac/drawingml/2011/main" val="0"/>
+              <ma14:wrappingTextBoxFlag xmlns="" xmlns:ma14="http://schemas.microsoft.com/office/mac/drawingml/2011/main" val="0"/>
             </a:ext>
           </a:extLst>
         </p:spPr>
@@ -17019,7 +16750,7 @@
           <a:p>
             <a:pPr algn="l"/>
             <a:fld id="{F7021451-1387-4CA6-816F-3879F97B5CBC}" type="slidenum">
-              <a:rPr b="0" lang="en-US"/>
+              <a:rPr lang="en-US" b="0"/>
               <a:t>24</a:t>
             </a:fld>
             <a:endParaRPr lang="en-US"/>
@@ -17094,7 +16825,7 @@
           <a:bodyPr wrap="square" lIns="0" tIns="0" rIns="0" bIns="0" rtlCol="0" anchor="ctr"/>
           <a:lstStyle/>
           <a:p>
-            <a:pPr indent="0" marL="0">
+            <a:pPr marL="0" indent="0">
               <a:buNone/>
             </a:pPr>
             <a:r>
@@ -17160,11 +16891,11 @@
           <a:bodyPr wrap="square" lIns="0" tIns="0" rIns="0" bIns="0" rtlCol="0" anchor="ctr"/>
           <a:lstStyle/>
           <a:p>
-            <a:pPr algn="ctr" indent="0" marL="0">
-              <a:buNone/>
-            </a:pPr>
-            <a:r>
-              <a:rPr lang="en-US" sz="900" b="1" spc="100" kern="0" dirty="0">
+            <a:pPr marL="0" indent="0" algn="ctr">
+              <a:buNone/>
+            </a:pPr>
+            <a:r>
+              <a:rPr lang="en-US" sz="900" b="1" kern="0" spc="100" dirty="0">
                 <a:solidFill>
                   <a:srgbClr val="1A4FBF"/>
                 </a:solidFill>
@@ -17180,14 +16911,14 @@
       </p:sp>
       <p:pic>
         <p:nvPicPr>
-          <p:cNvPr id="6" name="Image 0" descr="preencoded.png">    </p:cNvPr>
+          <p:cNvPr id="6" name="Image 0" descr="preencoded.png"/>
           <p:cNvPicPr>
             <a:picLocks noChangeAspect="1"/>
           </p:cNvPicPr>
           <p:nvPr/>
         </p:nvPicPr>
         <p:blipFill>
-          <a:blip r:embed="rId1"/>
+          <a:blip r:embed="rId3"/>
           <a:stretch>
             <a:fillRect/>
           </a:stretch>
@@ -17315,7 +17046,7 @@
           <a:bodyPr wrap="square" lIns="0" tIns="0" rIns="0" bIns="0" rtlCol="0" anchor="ctr"/>
           <a:lstStyle/>
           <a:p>
-            <a:pPr indent="0" marL="0">
+            <a:pPr marL="0" indent="0">
               <a:buNone/>
             </a:pPr>
             <a:r>
@@ -17329,9 +17060,6 @@
               </a:rPr>
               <a:t>Рішення про модель — у конфізі адаптера   </a:t>
             </a:r>
-            <a:pPr indent="0" marL="0">
-              <a:buNone/>
-            </a:pPr>
             <a:r>
               <a:rPr lang="en-US" sz="1200" dirty="0">
                 <a:solidFill>
@@ -17460,7 +17188,7 @@
           <a:bodyPr wrap="square" lIns="0" tIns="0" rIns="0" bIns="0" rtlCol="0" anchor="ctr"/>
           <a:lstStyle/>
           <a:p>
-            <a:pPr indent="0" marL="0">
+            <a:pPr marL="0" indent="0">
               <a:buNone/>
             </a:pPr>
             <a:r>
@@ -17474,9 +17202,6 @@
               </a:rPr>
               <a:t>Жорстке ім'я моделі по всьому коду   </a:t>
             </a:r>
-            <a:pPr indent="0" marL="0">
-              <a:buNone/>
-            </a:pPr>
             <a:r>
               <a:rPr lang="en-US" sz="1200" dirty="0">
                 <a:solidFill>
@@ -17605,7 +17330,7 @@
           <a:bodyPr wrap="square" lIns="0" tIns="0" rIns="0" bIns="0" rtlCol="0" anchor="ctr"/>
           <a:lstStyle/>
           <a:p>
-            <a:pPr indent="0" marL="0">
+            <a:pPr marL="0" indent="0">
               <a:buNone/>
             </a:pPr>
             <a:r>
@@ -17619,9 +17344,6 @@
               </a:rPr>
               <a:t>Роутинг за випадковим числом   </a:t>
             </a:r>
-            <a:pPr indent="0" marL="0">
-              <a:buNone/>
-            </a:pPr>
             <a:r>
               <a:rPr lang="en-US" sz="1200" dirty="0">
                 <a:solidFill>
@@ -17750,7 +17472,7 @@
           <a:bodyPr wrap="square" lIns="0" tIns="0" rIns="0" bIns="0" rtlCol="0" anchor="ctr"/>
           <a:lstStyle/>
           <a:p>
-            <a:pPr indent="0" marL="0">
+            <a:pPr marL="0" indent="0">
               <a:buNone/>
             </a:pPr>
             <a:r>
@@ -17764,9 +17486,6 @@
               </a:rPr>
               <a:t>Alias у проді   </a:t>
             </a:r>
-            <a:pPr indent="0" marL="0">
-              <a:buNone/>
-            </a:pPr>
             <a:r>
               <a:rPr lang="en-US" sz="1200" dirty="0">
                 <a:solidFill>
@@ -17784,7 +17503,7 @@
       </p:sp>
       <p:sp>
         <p:nvSpPr>
-          <p:cNvPr id="25" name="Slide Number Placeholder 0"/>
+          <p:cNvPr id="27" name="Slide Number Placeholder 0"/>
           <p:cNvSpPr>
             <a:spLocks noGrp="1"/>
           </p:cNvSpPr>
@@ -17802,7 +17521,7 @@
           </a:prstGeom>
           <a:extLst>
             <a:ext uri="{C572A759-6A51-4108-AA02-DFA0A04FC94B}">
-              <ma14:wrappingTextBoxFlag xmlns:ma14="http://schemas.microsoft.com/office/mac/drawingml/2011/main" val="0"/>
+              <ma14:wrappingTextBoxFlag xmlns="" xmlns:ma14="http://schemas.microsoft.com/office/mac/drawingml/2011/main" val="0"/>
             </a:ext>
           </a:extLst>
         </p:spPr>
@@ -17823,7 +17542,7 @@
           <a:p>
             <a:pPr algn="l"/>
             <a:fld id="{F7021451-1387-4CA6-816F-3879F97B5CBC}" type="slidenum">
-              <a:rPr b="0" lang="en-US"/>
+              <a:rPr lang="en-US" b="0"/>
               <a:t>25</a:t>
             </a:fld>
             <a:endParaRPr lang="en-US"/>
@@ -17898,7 +17617,7 @@
           <a:bodyPr wrap="square" lIns="0" tIns="0" rIns="0" bIns="0" rtlCol="0" anchor="ctr"/>
           <a:lstStyle/>
           <a:p>
-            <a:pPr indent="0" marL="0">
+            <a:pPr marL="0" indent="0">
               <a:buNone/>
             </a:pPr>
             <a:r>
@@ -17959,11 +17678,11 @@
           <a:bodyPr wrap="square" lIns="0" tIns="0" rIns="0" bIns="0" rtlCol="0" anchor="ctr"/>
           <a:lstStyle/>
           <a:p>
-            <a:pPr algn="ctr" indent="0" marL="0">
-              <a:buNone/>
-            </a:pPr>
-            <a:r>
-              <a:rPr lang="en-US" sz="900" b="1" spc="100" kern="0" dirty="0">
+            <a:pPr marL="0" indent="0" algn="ctr">
+              <a:buNone/>
+            </a:pPr>
+            <a:r>
+              <a:rPr lang="en-US" sz="900" b="1" kern="0" spc="100" dirty="0">
                 <a:solidFill>
                   <a:srgbClr val="FFFFFF"/>
                 </a:solidFill>
@@ -17979,14 +17698,14 @@
       </p:sp>
       <p:pic>
         <p:nvPicPr>
-          <p:cNvPr id="6" name="Image 0" descr="preencoded.png">    </p:cNvPr>
+          <p:cNvPr id="6" name="Image 0" descr="preencoded.png"/>
           <p:cNvPicPr>
             <a:picLocks noChangeAspect="1"/>
           </p:cNvPicPr>
           <p:nvPr/>
         </p:nvPicPr>
         <p:blipFill>
-          <a:blip r:embed="rId1"/>
+          <a:blip r:embed="rId3"/>
           <a:stretch>
             <a:fillRect/>
           </a:stretch>
@@ -18044,7 +17763,7 @@
           <a:bodyPr wrap="square" lIns="0" tIns="0" rIns="0" bIns="0" rtlCol="0" anchor="ctr"/>
           <a:lstStyle/>
           <a:p>
-            <a:pPr indent="0" marL="0">
+            <a:pPr marL="0" indent="0">
               <a:buNone/>
             </a:pPr>
             <a:r>
@@ -18083,7 +17802,7 @@
           <a:bodyPr wrap="square" lIns="0" tIns="0" rIns="0" bIns="0" rtlCol="0" anchor="t"/>
           <a:lstStyle/>
           <a:p>
-            <a:pPr indent="0" marL="0">
+            <a:pPr marL="0" indent="0">
               <a:lnSpc>
                 <a:spcPct val="108000"/>
               </a:lnSpc>
@@ -18103,7 +17822,7 @@
             <a:endParaRPr lang="en-US" sz="1200" dirty="0"/>
           </a:p>
           <a:p>
-            <a:pPr indent="0" marL="0">
+            <a:pPr marL="0" indent="0">
               <a:lnSpc>
                 <a:spcPct val="108000"/>
               </a:lnSpc>
@@ -18112,7 +17831,7 @@
             <a:endParaRPr lang="en-US" sz="1200" dirty="0"/>
           </a:p>
           <a:p>
-            <a:pPr indent="0" marL="0">
+            <a:pPr marL="0" indent="0">
               <a:lnSpc>
                 <a:spcPct val="108000"/>
               </a:lnSpc>
@@ -18132,7 +17851,7 @@
             <a:endParaRPr lang="en-US" sz="1200" dirty="0"/>
           </a:p>
           <a:p>
-            <a:pPr indent="0" marL="0">
+            <a:pPr marL="0" indent="0">
               <a:lnSpc>
                 <a:spcPct val="108000"/>
               </a:lnSpc>
@@ -18141,7 +17860,7 @@
             <a:endParaRPr lang="en-US" sz="1200" dirty="0"/>
           </a:p>
           <a:p>
-            <a:pPr indent="0" marL="0">
+            <a:pPr marL="0" indent="0">
               <a:lnSpc>
                 <a:spcPct val="108000"/>
               </a:lnSpc>
@@ -18205,7 +17924,7 @@
           <a:bodyPr wrap="square" lIns="0" tIns="0" rIns="0" bIns="0" rtlCol="0" anchor="ctr"/>
           <a:lstStyle/>
           <a:p>
-            <a:pPr indent="0" marL="0">
+            <a:pPr marL="0" indent="0">
               <a:buNone/>
             </a:pPr>
             <a:r>
@@ -18244,7 +17963,7 @@
           <a:bodyPr wrap="square" lIns="0" tIns="0" rIns="0" bIns="0" rtlCol="0" anchor="t"/>
           <a:lstStyle/>
           <a:p>
-            <a:pPr indent="0" marL="0">
+            <a:pPr marL="0" indent="0">
               <a:lnSpc>
                 <a:spcPct val="108000"/>
               </a:lnSpc>
@@ -18313,7 +18032,7 @@
           <a:bodyPr wrap="square" lIns="0" tIns="0" rIns="0" bIns="0" rtlCol="0" anchor="ctr"/>
           <a:lstStyle/>
           <a:p>
-            <a:pPr indent="0" marL="0">
+            <a:pPr marL="0" indent="0">
               <a:buNone/>
             </a:pPr>
             <a:r>
@@ -18352,7 +18071,7 @@
           <a:bodyPr wrap="square" lIns="0" tIns="0" rIns="0" bIns="0" rtlCol="0" anchor="t"/>
           <a:lstStyle/>
           <a:p>
-            <a:pPr indent="0" marL="0">
+            <a:pPr marL="0" indent="0">
               <a:buNone/>
             </a:pPr>
             <a:r>
@@ -18390,7 +18109,7 @@
           </a:prstGeom>
           <a:extLst>
             <a:ext uri="{C572A759-6A51-4108-AA02-DFA0A04FC94B}">
-              <ma14:wrappingTextBoxFlag xmlns:ma14="http://schemas.microsoft.com/office/mac/drawingml/2011/main" val="0"/>
+              <ma14:wrappingTextBoxFlag xmlns="" xmlns:ma14="http://schemas.microsoft.com/office/mac/drawingml/2011/main" val="0"/>
             </a:ext>
           </a:extLst>
         </p:spPr>
@@ -18411,7 +18130,7 @@
           <a:p>
             <a:pPr algn="l"/>
             <a:fld id="{F7021451-1387-4CA6-816F-3879F97B5CBC}" type="slidenum">
-              <a:rPr b="0" lang="en-US"/>
+              <a:rPr lang="en-US" b="0"/>
               <a:t>26</a:t>
             </a:fld>
             <a:endParaRPr lang="en-US"/>
@@ -18464,11 +18183,11 @@
           <a:bodyPr wrap="square" lIns="0" tIns="0" rIns="0" bIns="0" rtlCol="0" anchor="ctr"/>
           <a:lstStyle/>
           <a:p>
-            <a:pPr indent="0" marL="0">
-              <a:buNone/>
-            </a:pPr>
-            <a:r>
-              <a:rPr lang="en-US" sz="1200" b="1" spc="400" kern="0" dirty="0">
+            <a:pPr marL="0" indent="0">
+              <a:buNone/>
+            </a:pPr>
+            <a:r>
+              <a:rPr lang="en-US" sz="1200" b="1" kern="0" spc="400" dirty="0">
                 <a:solidFill>
                   <a:srgbClr val="FFFFFF"/>
                 </a:solidFill>
@@ -18503,11 +18222,11 @@
           <a:bodyPr wrap="square" lIns="0" tIns="0" rIns="0" bIns="0" rtlCol="0" anchor="ctr"/>
           <a:lstStyle/>
           <a:p>
-            <a:pPr indent="0" marL="0">
-              <a:buNone/>
-            </a:pPr>
-            <a:r>
-              <a:rPr lang="en-US" sz="1100" b="1" spc="300" kern="0" dirty="0">
+            <a:pPr marL="0" indent="0">
+              <a:buNone/>
+            </a:pPr>
+            <a:r>
+              <a:rPr lang="en-US" sz="1100" b="1" kern="0" spc="300" dirty="0">
                 <a:solidFill>
                   <a:srgbClr val="C4B3F5"/>
                 </a:solidFill>
@@ -18562,7 +18281,7 @@
           <a:bodyPr wrap="square" lIns="0" tIns="0" rIns="0" bIns="0" rtlCol="0" anchor="t"/>
           <a:lstStyle/>
           <a:p>
-            <a:pPr indent="0" marL="0">
+            <a:pPr marL="0" indent="0">
               <a:lnSpc>
                 <a:spcPct val="110000"/>
               </a:lnSpc>
@@ -18624,7 +18343,7 @@
           <a:bodyPr wrap="square" lIns="0" tIns="0" rIns="0" bIns="0" rtlCol="0" anchor="t"/>
           <a:lstStyle/>
           <a:p>
-            <a:pPr indent="0" marL="0">
+            <a:pPr marL="0" indent="0">
               <a:lnSpc>
                 <a:spcPct val="110000"/>
               </a:lnSpc>
@@ -18686,7 +18405,7 @@
           <a:bodyPr wrap="square" lIns="0" tIns="0" rIns="0" bIns="0" rtlCol="0" anchor="t"/>
           <a:lstStyle/>
           <a:p>
-            <a:pPr indent="0" marL="0">
+            <a:pPr marL="0" indent="0">
               <a:lnSpc>
                 <a:spcPct val="110000"/>
               </a:lnSpc>
@@ -18748,7 +18467,7 @@
           <a:bodyPr wrap="square" lIns="0" tIns="0" rIns="0" bIns="0" rtlCol="0" anchor="t"/>
           <a:lstStyle/>
           <a:p>
-            <a:pPr indent="0" marL="0">
+            <a:pPr marL="0" indent="0">
               <a:lnSpc>
                 <a:spcPct val="110000"/>
               </a:lnSpc>
@@ -18810,7 +18529,7 @@
           <a:bodyPr wrap="square" lIns="0" tIns="0" rIns="0" bIns="0" rtlCol="0" anchor="t"/>
           <a:lstStyle/>
           <a:p>
-            <a:pPr indent="0" marL="0">
+            <a:pPr marL="0" indent="0">
               <a:lnSpc>
                 <a:spcPct val="110000"/>
               </a:lnSpc>
@@ -18879,7 +18598,7 @@
           <a:bodyPr wrap="square" lIns="0" tIns="0" rIns="0" bIns="0" rtlCol="0" anchor="ctr"/>
           <a:lstStyle/>
           <a:p>
-            <a:pPr indent="0" marL="0">
+            <a:pPr marL="0" indent="0">
               <a:buNone/>
             </a:pPr>
             <a:r>
@@ -18918,7 +18637,7 @@
           <a:bodyPr wrap="square" lIns="0" tIns="0" rIns="0" bIns="0" rtlCol="0" anchor="t"/>
           <a:lstStyle/>
           <a:p>
-            <a:pPr indent="0" marL="0">
+            <a:pPr marL="0" indent="0">
               <a:lnSpc>
                 <a:spcPct val="115000"/>
               </a:lnSpc>
@@ -18985,11 +18704,11 @@
           <a:bodyPr wrap="square" lIns="0" tIns="0" rIns="0" bIns="0" rtlCol="0" anchor="ctr"/>
           <a:lstStyle/>
           <a:p>
-            <a:pPr indent="0" marL="0">
-              <a:buNone/>
-            </a:pPr>
-            <a:r>
-              <a:rPr lang="en-US" sz="1200" b="1" spc="400" kern="0" dirty="0">
+            <a:pPr marL="0" indent="0">
+              <a:buNone/>
+            </a:pPr>
+            <a:r>
+              <a:rPr lang="en-US" sz="1200" b="1" kern="0" spc="400" dirty="0">
                 <a:solidFill>
                   <a:srgbClr val="FFFFFF"/>
                 </a:solidFill>
@@ -19024,7 +18743,7 @@
           <a:bodyPr wrap="square" lIns="0" tIns="0" rIns="0" bIns="0" rtlCol="0" anchor="ctr"/>
           <a:lstStyle/>
           <a:p>
-            <a:pPr indent="0" marL="0">
+            <a:pPr marL="0" indent="0">
               <a:buNone/>
             </a:pPr>
             <a:r>
@@ -19110,7 +18829,7 @@
           <a:bodyPr wrap="square" lIns="0" tIns="0" rIns="0" bIns="0" rtlCol="0" anchor="ctr"/>
           <a:lstStyle/>
           <a:p>
-            <a:pPr indent="0" marL="0">
+            <a:pPr marL="0" indent="0">
               <a:buNone/>
             </a:pPr>
             <a:r>
@@ -19176,11 +18895,11 @@
           <a:bodyPr wrap="square" lIns="0" tIns="0" rIns="0" bIns="0" rtlCol="0" anchor="ctr"/>
           <a:lstStyle/>
           <a:p>
-            <a:pPr algn="ctr" indent="0" marL="0">
-              <a:buNone/>
-            </a:pPr>
-            <a:r>
-              <a:rPr lang="en-US" sz="900" b="1" spc="100" kern="0" dirty="0">
+            <a:pPr marL="0" indent="0" algn="ctr">
+              <a:buNone/>
+            </a:pPr>
+            <a:r>
+              <a:rPr lang="en-US" sz="900" b="1" kern="0" spc="100" dirty="0">
                 <a:solidFill>
                   <a:srgbClr val="5A05F4"/>
                 </a:solidFill>
@@ -19196,14 +18915,14 @@
       </p:sp>
       <p:pic>
         <p:nvPicPr>
-          <p:cNvPr id="6" name="Image 0" descr="preencoded.png">    </p:cNvPr>
+          <p:cNvPr id="6" name="Image 0" descr="preencoded.png"/>
           <p:cNvPicPr>
             <a:picLocks noChangeAspect="1"/>
           </p:cNvPicPr>
           <p:nvPr/>
         </p:nvPicPr>
         <p:blipFill>
-          <a:blip r:embed="rId1"/>
+          <a:blip r:embed="rId3"/>
           <a:stretch>
             <a:fillRect/>
           </a:stretch>
@@ -19281,7 +19000,7 @@
           <a:bodyPr wrap="square" lIns="0" tIns="0" rIns="0" bIns="0" rtlCol="0" anchor="ctr"/>
           <a:lstStyle/>
           <a:p>
-            <a:pPr algn="ctr" indent="0" marL="0">
+            <a:pPr marL="0" indent="0" algn="ctr">
               <a:buNone/>
             </a:pPr>
             <a:r>
@@ -19320,7 +19039,7 @@
           <a:bodyPr wrap="square" lIns="0" tIns="0" rIns="0" bIns="0" rtlCol="0" anchor="ctr"/>
           <a:lstStyle/>
           <a:p>
-            <a:pPr indent="0" marL="0">
+            <a:pPr marL="0" indent="0">
               <a:buNone/>
             </a:pPr>
             <a:r>
@@ -19401,7 +19120,7 @@
           <a:bodyPr wrap="square" lIns="0" tIns="0" rIns="0" bIns="0" rtlCol="0" anchor="ctr"/>
           <a:lstStyle/>
           <a:p>
-            <a:pPr algn="ctr" indent="0" marL="0">
+            <a:pPr marL="0" indent="0" algn="ctr">
               <a:buNone/>
             </a:pPr>
             <a:r>
@@ -19440,7 +19159,7 @@
           <a:bodyPr wrap="square" lIns="0" tIns="0" rIns="0" bIns="0" rtlCol="0" anchor="ctr"/>
           <a:lstStyle/>
           <a:p>
-            <a:pPr indent="0" marL="0">
+            <a:pPr marL="0" indent="0">
               <a:buNone/>
             </a:pPr>
             <a:r>
@@ -19521,7 +19240,7 @@
           <a:bodyPr wrap="square" lIns="0" tIns="0" rIns="0" bIns="0" rtlCol="0" anchor="ctr"/>
           <a:lstStyle/>
           <a:p>
-            <a:pPr algn="ctr" indent="0" marL="0">
+            <a:pPr marL="0" indent="0" algn="ctr">
               <a:buNone/>
             </a:pPr>
             <a:r>
@@ -19560,7 +19279,7 @@
           <a:bodyPr wrap="square" lIns="0" tIns="0" rIns="0" bIns="0" rtlCol="0" anchor="ctr"/>
           <a:lstStyle/>
           <a:p>
-            <a:pPr indent="0" marL="0">
+            <a:pPr marL="0" indent="0">
               <a:buNone/>
             </a:pPr>
             <a:r>
@@ -19641,7 +19360,7 @@
           <a:bodyPr wrap="square" lIns="0" tIns="0" rIns="0" bIns="0" rtlCol="0" anchor="ctr"/>
           <a:lstStyle/>
           <a:p>
-            <a:pPr algn="ctr" indent="0" marL="0">
+            <a:pPr marL="0" indent="0" algn="ctr">
               <a:buNone/>
             </a:pPr>
             <a:r>
@@ -19680,7 +19399,7 @@
           <a:bodyPr wrap="square" lIns="0" tIns="0" rIns="0" bIns="0" rtlCol="0" anchor="ctr"/>
           <a:lstStyle/>
           <a:p>
-            <a:pPr indent="0" marL="0">
+            <a:pPr marL="0" indent="0">
               <a:buNone/>
             </a:pPr>
             <a:r>
@@ -19761,7 +19480,7 @@
           <a:bodyPr wrap="square" lIns="0" tIns="0" rIns="0" bIns="0" rtlCol="0" anchor="ctr"/>
           <a:lstStyle/>
           <a:p>
-            <a:pPr algn="ctr" indent="0" marL="0">
+            <a:pPr marL="0" indent="0" algn="ctr">
               <a:buNone/>
             </a:pPr>
             <a:r>
@@ -19800,7 +19519,7 @@
           <a:bodyPr wrap="square" lIns="0" tIns="0" rIns="0" bIns="0" rtlCol="0" anchor="ctr"/>
           <a:lstStyle/>
           <a:p>
-            <a:pPr indent="0" marL="0">
+            <a:pPr marL="0" indent="0">
               <a:buNone/>
             </a:pPr>
             <a:r>
@@ -19881,7 +19600,7 @@
           <a:bodyPr wrap="square" lIns="0" tIns="0" rIns="0" bIns="0" rtlCol="0" anchor="ctr"/>
           <a:lstStyle/>
           <a:p>
-            <a:pPr algn="ctr" indent="0" marL="0">
+            <a:pPr marL="0" indent="0" algn="ctr">
               <a:buNone/>
             </a:pPr>
             <a:r>
@@ -19920,7 +19639,7 @@
           <a:bodyPr wrap="square" lIns="0" tIns="0" rIns="0" bIns="0" rtlCol="0" anchor="ctr"/>
           <a:lstStyle/>
           <a:p>
-            <a:pPr indent="0" marL="0">
+            <a:pPr marL="0" indent="0">
               <a:buNone/>
             </a:pPr>
             <a:r>
@@ -20001,7 +19720,7 @@
           <a:bodyPr wrap="square" lIns="0" tIns="0" rIns="0" bIns="0" rtlCol="0" anchor="ctr"/>
           <a:lstStyle/>
           <a:p>
-            <a:pPr algn="ctr" indent="0" marL="0">
+            <a:pPr marL="0" indent="0" algn="ctr">
               <a:buNone/>
             </a:pPr>
             <a:r>
@@ -20040,7 +19759,7 @@
           <a:bodyPr wrap="square" lIns="0" tIns="0" rIns="0" bIns="0" rtlCol="0" anchor="ctr"/>
           <a:lstStyle/>
           <a:p>
-            <a:pPr indent="0" marL="0">
+            <a:pPr marL="0" indent="0">
               <a:buNone/>
             </a:pPr>
             <a:r>
@@ -20121,7 +19840,7 @@
           <a:bodyPr wrap="square" lIns="0" tIns="0" rIns="0" bIns="0" rtlCol="0" anchor="ctr"/>
           <a:lstStyle/>
           <a:p>
-            <a:pPr algn="ctr" indent="0" marL="0">
+            <a:pPr marL="0" indent="0" algn="ctr">
               <a:buNone/>
             </a:pPr>
             <a:r>
@@ -20160,7 +19879,7 @@
           <a:bodyPr wrap="square" lIns="0" tIns="0" rIns="0" bIns="0" rtlCol="0" anchor="ctr"/>
           <a:lstStyle/>
           <a:p>
-            <a:pPr indent="0" marL="0">
+            <a:pPr marL="0" indent="0">
               <a:buNone/>
             </a:pPr>
             <a:r>
@@ -20241,7 +19960,7 @@
           <a:bodyPr wrap="square" lIns="0" tIns="0" rIns="0" bIns="0" rtlCol="0" anchor="ctr"/>
           <a:lstStyle/>
           <a:p>
-            <a:pPr algn="ctr" indent="0" marL="0">
+            <a:pPr marL="0" indent="0" algn="ctr">
               <a:buNone/>
             </a:pPr>
             <a:r>
@@ -20280,7 +19999,7 @@
           <a:bodyPr wrap="square" lIns="0" tIns="0" rIns="0" bIns="0" rtlCol="0" anchor="ctr"/>
           <a:lstStyle/>
           <a:p>
-            <a:pPr indent="0" marL="0">
+            <a:pPr marL="0" indent="0">
               <a:buNone/>
             </a:pPr>
             <a:r>
@@ -20361,7 +20080,7 @@
           <a:bodyPr wrap="square" lIns="0" tIns="0" rIns="0" bIns="0" rtlCol="0" anchor="ctr"/>
           <a:lstStyle/>
           <a:p>
-            <a:pPr algn="ctr" indent="0" marL="0">
+            <a:pPr marL="0" indent="0" algn="ctr">
               <a:buNone/>
             </a:pPr>
             <a:r>
@@ -20400,7 +20119,7 @@
           <a:bodyPr wrap="square" lIns="0" tIns="0" rIns="0" bIns="0" rtlCol="0" anchor="ctr"/>
           <a:lstStyle/>
           <a:p>
-            <a:pPr indent="0" marL="0">
+            <a:pPr marL="0" indent="0">
               <a:buNone/>
             </a:pPr>
             <a:r>
@@ -20481,7 +20200,7 @@
           <a:bodyPr wrap="square" lIns="0" tIns="0" rIns="0" bIns="0" rtlCol="0" anchor="ctr"/>
           <a:lstStyle/>
           <a:p>
-            <a:pPr algn="ctr" indent="0" marL="0">
+            <a:pPr marL="0" indent="0" algn="ctr">
               <a:buNone/>
             </a:pPr>
             <a:r>
@@ -20520,7 +20239,7 @@
           <a:bodyPr wrap="square" lIns="0" tIns="0" rIns="0" bIns="0" rtlCol="0" anchor="ctr"/>
           <a:lstStyle/>
           <a:p>
-            <a:pPr indent="0" marL="0">
+            <a:pPr marL="0" indent="0">
               <a:buNone/>
             </a:pPr>
             <a:r>
@@ -20547,7 +20266,7 @@
         <p:spPr>
           <a:xfrm>
             <a:off x="566928" y="5779008"/>
-            <a:ext cx="11064240" cy="402336"/>
+            <a:ext cx="10927080" cy="402336"/>
           </a:xfrm>
           <a:prstGeom prst="roundRect">
             <a:avLst>
@@ -20586,7 +20305,7 @@
           <a:bodyPr wrap="square" lIns="0" tIns="0" rIns="0" bIns="0" rtlCol="0" anchor="ctr"/>
           <a:lstStyle/>
           <a:p>
-            <a:pPr indent="0" marL="0">
+            <a:pPr marL="0" indent="0">
               <a:lnSpc>
                 <a:spcPct val="112000"/>
               </a:lnSpc>
@@ -20609,7 +20328,7 @@
       </p:sp>
       <p:sp>
         <p:nvSpPr>
-          <p:cNvPr id="25" name="Slide Number Placeholder 0"/>
+          <p:cNvPr id="53" name="Slide Number Placeholder 0"/>
           <p:cNvSpPr>
             <a:spLocks noGrp="1"/>
           </p:cNvSpPr>
@@ -20627,7 +20346,7 @@
           </a:prstGeom>
           <a:extLst>
             <a:ext uri="{C572A759-6A51-4108-AA02-DFA0A04FC94B}">
-              <ma14:wrappingTextBoxFlag xmlns:ma14="http://schemas.microsoft.com/office/mac/drawingml/2011/main" val="0"/>
+              <ma14:wrappingTextBoxFlag xmlns="" xmlns:ma14="http://schemas.microsoft.com/office/mac/drawingml/2011/main" val="0"/>
             </a:ext>
           </a:extLst>
         </p:spPr>
@@ -20648,7 +20367,7 @@
           <a:p>
             <a:pPr algn="l"/>
             <a:fld id="{F7021451-1387-4CA6-816F-3879F97B5CBC}" type="slidenum">
-              <a:rPr b="0" lang="en-US"/>
+              <a:rPr lang="en-US" b="0"/>
               <a:t>3</a:t>
             </a:fld>
             <a:endParaRPr lang="en-US"/>
@@ -20723,7 +20442,7 @@
           <a:bodyPr wrap="square" lIns="0" tIns="0" rIns="0" bIns="0" rtlCol="0" anchor="ctr"/>
           <a:lstStyle/>
           <a:p>
-            <a:pPr indent="0" marL="0">
+            <a:pPr marL="0" indent="0">
               <a:buNone/>
             </a:pPr>
             <a:r>
@@ -20762,7 +20481,7 @@
           <a:bodyPr wrap="square" lIns="0" tIns="0" rIns="0" bIns="0" rtlCol="0" anchor="t"/>
           <a:lstStyle/>
           <a:p>
-            <a:pPr indent="0" marL="0">
+            <a:pPr marL="0" indent="0">
               <a:lnSpc>
                 <a:spcPct val="100000"/>
               </a:lnSpc>
@@ -20831,11 +20550,11 @@
           <a:bodyPr wrap="square" lIns="0" tIns="0" rIns="0" bIns="0" rtlCol="0" anchor="ctr"/>
           <a:lstStyle/>
           <a:p>
-            <a:pPr algn="ctr" indent="0" marL="0">
-              <a:buNone/>
-            </a:pPr>
-            <a:r>
-              <a:rPr lang="en-US" sz="900" b="1" spc="100" kern="0" dirty="0">
+            <a:pPr marL="0" indent="0" algn="ctr">
+              <a:buNone/>
+            </a:pPr>
+            <a:r>
+              <a:rPr lang="en-US" sz="900" b="1" kern="0" spc="100" dirty="0">
                 <a:solidFill>
                   <a:srgbClr val="5A05F4"/>
                 </a:solidFill>
@@ -20851,14 +20570,14 @@
       </p:sp>
       <p:pic>
         <p:nvPicPr>
-          <p:cNvPr id="7" name="Image 0" descr="preencoded.png">    </p:cNvPr>
+          <p:cNvPr id="7" name="Image 0" descr="preencoded.png"/>
           <p:cNvPicPr>
             <a:picLocks noChangeAspect="1"/>
           </p:cNvPicPr>
           <p:nvPr/>
         </p:nvPicPr>
         <p:blipFill>
-          <a:blip r:embed="rId1"/>
+          <a:blip r:embed="rId3"/>
           <a:stretch>
             <a:fillRect/>
           </a:stretch>
@@ -20921,7 +20640,7 @@
           <a:bodyPr wrap="square" lIns="0" tIns="0" rIns="0" bIns="0" rtlCol="0" anchor="ctr"/>
           <a:lstStyle/>
           <a:p>
-            <a:pPr indent="0" marL="0">
+            <a:pPr marL="0" indent="0">
               <a:buNone/>
             </a:pPr>
             <a:r>
@@ -20960,7 +20679,7 @@
           <a:bodyPr wrap="square" lIns="0" tIns="0" rIns="0" bIns="0" rtlCol="0" anchor="t"/>
           <a:lstStyle/>
           <a:p>
-            <a:pPr indent="0" marL="0">
+            <a:pPr marL="0" indent="0">
               <a:lnSpc>
                 <a:spcPct val="105000"/>
               </a:lnSpc>
@@ -21029,7 +20748,7 @@
           <a:bodyPr wrap="square" lIns="0" tIns="0" rIns="0" bIns="0" rtlCol="0" anchor="ctr"/>
           <a:lstStyle/>
           <a:p>
-            <a:pPr indent="0" marL="0">
+            <a:pPr marL="0" indent="0">
               <a:buNone/>
             </a:pPr>
             <a:r>
@@ -21068,7 +20787,7 @@
           <a:bodyPr wrap="square" lIns="0" tIns="0" rIns="0" bIns="0" rtlCol="0" anchor="t"/>
           <a:lstStyle/>
           <a:p>
-            <a:pPr indent="0" marL="0">
+            <a:pPr marL="0" indent="0">
               <a:lnSpc>
                 <a:spcPct val="105000"/>
               </a:lnSpc>
@@ -21137,7 +20856,7 @@
           <a:bodyPr wrap="square" lIns="0" tIns="0" rIns="0" bIns="0" rtlCol="0" anchor="ctr"/>
           <a:lstStyle/>
           <a:p>
-            <a:pPr indent="0" marL="0">
+            <a:pPr marL="0" indent="0">
               <a:buNone/>
             </a:pPr>
             <a:r>
@@ -21176,7 +20895,7 @@
           <a:bodyPr wrap="square" lIns="0" tIns="0" rIns="0" bIns="0" rtlCol="0" anchor="t"/>
           <a:lstStyle/>
           <a:p>
-            <a:pPr indent="0" marL="0">
+            <a:pPr marL="0" indent="0">
               <a:lnSpc>
                 <a:spcPct val="105000"/>
               </a:lnSpc>
@@ -21245,7 +20964,7 @@
           <a:bodyPr wrap="square" lIns="0" tIns="0" rIns="0" bIns="0" rtlCol="0" anchor="ctr"/>
           <a:lstStyle/>
           <a:p>
-            <a:pPr indent="0" marL="0">
+            <a:pPr marL="0" indent="0">
               <a:buNone/>
             </a:pPr>
             <a:r>
@@ -21284,7 +21003,7 @@
           <a:bodyPr wrap="square" lIns="0" tIns="0" rIns="0" bIns="0" rtlCol="0" anchor="t"/>
           <a:lstStyle/>
           <a:p>
-            <a:pPr indent="0" marL="0">
+            <a:pPr marL="0" indent="0">
               <a:lnSpc>
                 <a:spcPct val="105000"/>
               </a:lnSpc>
@@ -21353,7 +21072,7 @@
           <a:bodyPr wrap="square" lIns="0" tIns="0" rIns="0" bIns="0" rtlCol="0" anchor="ctr"/>
           <a:lstStyle/>
           <a:p>
-            <a:pPr indent="0" marL="0">
+            <a:pPr marL="0" indent="0">
               <a:buNone/>
             </a:pPr>
             <a:r>
@@ -21392,7 +21111,7 @@
           <a:bodyPr wrap="square" lIns="0" tIns="0" rIns="0" bIns="0" rtlCol="0" anchor="t"/>
           <a:lstStyle/>
           <a:p>
-            <a:pPr indent="0" marL="0">
+            <a:pPr marL="0" indent="0">
               <a:lnSpc>
                 <a:spcPct val="105000"/>
               </a:lnSpc>
@@ -21461,7 +21180,7 @@
           <a:bodyPr wrap="square" lIns="0" tIns="0" rIns="0" bIns="0" rtlCol="0" anchor="ctr"/>
           <a:lstStyle/>
           <a:p>
-            <a:pPr indent="0" marL="0">
+            <a:pPr marL="0" indent="0">
               <a:buNone/>
             </a:pPr>
             <a:r>
@@ -21500,7 +21219,7 @@
           <a:bodyPr wrap="square" lIns="0" tIns="0" rIns="0" bIns="0" rtlCol="0" anchor="t"/>
           <a:lstStyle/>
           <a:p>
-            <a:pPr indent="0" marL="0">
+            <a:pPr marL="0" indent="0">
               <a:lnSpc>
                 <a:spcPct val="105000"/>
               </a:lnSpc>
@@ -21569,7 +21288,7 @@
           <a:bodyPr wrap="square" lIns="0" tIns="0" rIns="0" bIns="0" rtlCol="0" anchor="ctr"/>
           <a:lstStyle/>
           <a:p>
-            <a:pPr indent="0" marL="0">
+            <a:pPr marL="0" indent="0">
               <a:lnSpc>
                 <a:spcPct val="112000"/>
               </a:lnSpc>
@@ -21592,7 +21311,7 @@
       </p:sp>
       <p:sp>
         <p:nvSpPr>
-          <p:cNvPr id="25" name="Slide Number Placeholder 0"/>
+          <p:cNvPr id="28" name="Slide Number Placeholder 0"/>
           <p:cNvSpPr>
             <a:spLocks noGrp="1"/>
           </p:cNvSpPr>
@@ -21610,7 +21329,7 @@
           </a:prstGeom>
           <a:extLst>
             <a:ext uri="{C572A759-6A51-4108-AA02-DFA0A04FC94B}">
-              <ma14:wrappingTextBoxFlag xmlns:ma14="http://schemas.microsoft.com/office/mac/drawingml/2011/main" val="0"/>
+              <ma14:wrappingTextBoxFlag xmlns="" xmlns:ma14="http://schemas.microsoft.com/office/mac/drawingml/2011/main" val="0"/>
             </a:ext>
           </a:extLst>
         </p:spPr>
@@ -21631,7 +21350,7 @@
           <a:p>
             <a:pPr algn="l"/>
             <a:fld id="{F7021451-1387-4CA6-816F-3879F97B5CBC}" type="slidenum">
-              <a:rPr b="0" lang="en-US"/>
+              <a:rPr lang="en-US" b="0"/>
               <a:t>4</a:t>
             </a:fld>
             <a:endParaRPr lang="en-US"/>
@@ -21684,11 +21403,11 @@
           <a:bodyPr wrap="square" lIns="0" tIns="0" rIns="0" bIns="0" rtlCol="0" anchor="ctr"/>
           <a:lstStyle/>
           <a:p>
-            <a:pPr indent="0" marL="0">
-              <a:buNone/>
-            </a:pPr>
-            <a:r>
-              <a:rPr lang="en-US" sz="1200" b="1" spc="400" kern="0" dirty="0">
+            <a:pPr marL="0" indent="0">
+              <a:buNone/>
+            </a:pPr>
+            <a:r>
+              <a:rPr lang="en-US" sz="1200" b="1" kern="0" spc="400" dirty="0">
                 <a:solidFill>
                   <a:srgbClr val="FFFFFF"/>
                 </a:solidFill>
@@ -21723,7 +21442,7 @@
           <a:bodyPr wrap="square" lIns="0" tIns="0" rIns="0" bIns="0" rtlCol="0" anchor="ctr"/>
           <a:lstStyle/>
           <a:p>
-            <a:pPr indent="0" marL="0">
+            <a:pPr marL="0" indent="0">
               <a:buNone/>
             </a:pPr>
             <a:r>
@@ -21762,7 +21481,7 @@
           <a:bodyPr wrap="square" lIns="0" tIns="0" rIns="0" bIns="0" rtlCol="0" anchor="t"/>
           <a:lstStyle/>
           <a:p>
-            <a:pPr indent="0" marL="0">
+            <a:pPr marL="0" indent="0">
               <a:buNone/>
             </a:pPr>
             <a:r>
@@ -21848,7 +21567,7 @@
           <a:bodyPr wrap="square" lIns="0" tIns="0" rIns="0" bIns="0" rtlCol="0" anchor="ctr"/>
           <a:lstStyle/>
           <a:p>
-            <a:pPr algn="l" indent="0" marL="0">
+            <a:pPr marL="0" indent="0" algn="l">
               <a:buNone/>
             </a:pPr>
             <a:r>
@@ -21887,7 +21606,7 @@
           <a:bodyPr wrap="square" lIns="0" tIns="0" rIns="0" bIns="0" rtlCol="0" anchor="ctr"/>
           <a:lstStyle/>
           <a:p>
-            <a:pPr indent="0" marL="0">
+            <a:pPr marL="0" indent="0">
               <a:buNone/>
             </a:pPr>
             <a:r>
@@ -21953,11 +21672,11 @@
           <a:bodyPr wrap="square" lIns="0" tIns="0" rIns="0" bIns="0" rtlCol="0" anchor="ctr"/>
           <a:lstStyle/>
           <a:p>
-            <a:pPr algn="ctr" indent="0" marL="0">
-              <a:buNone/>
-            </a:pPr>
-            <a:r>
-              <a:rPr lang="en-US" sz="900" b="1" spc="100" kern="0" dirty="0">
+            <a:pPr marL="0" indent="0" algn="ctr">
+              <a:buNone/>
+            </a:pPr>
+            <a:r>
+              <a:rPr lang="en-US" sz="900" b="1" kern="0" spc="100" dirty="0">
                 <a:solidFill>
                   <a:srgbClr val="5A05F4"/>
                 </a:solidFill>
@@ -21973,14 +21692,14 @@
       </p:sp>
       <p:pic>
         <p:nvPicPr>
-          <p:cNvPr id="7" name="Image 0" descr="preencoded.png">    </p:cNvPr>
+          <p:cNvPr id="7" name="Image 0" descr="preencoded.png"/>
           <p:cNvPicPr>
             <a:picLocks noChangeAspect="1"/>
           </p:cNvPicPr>
           <p:nvPr/>
         </p:nvPicPr>
         <p:blipFill>
-          <a:blip r:embed="rId1"/>
+          <a:blip r:embed="rId3"/>
           <a:stretch>
             <a:fillRect/>
           </a:stretch>
@@ -22058,7 +21777,7 @@
           <a:bodyPr wrap="square" lIns="0" tIns="0" rIns="0" bIns="0" rtlCol="0" anchor="ctr"/>
           <a:lstStyle/>
           <a:p>
-            <a:pPr algn="ctr" indent="0" marL="0">
+            <a:pPr marL="0" indent="0" algn="ctr">
               <a:buNone/>
             </a:pPr>
             <a:r>
@@ -22097,7 +21816,7 @@
           <a:bodyPr wrap="square" lIns="0" tIns="0" rIns="0" bIns="0" rtlCol="0" anchor="ctr"/>
           <a:lstStyle/>
           <a:p>
-            <a:pPr indent="0" marL="0">
+            <a:pPr marL="0" indent="0">
               <a:buNone/>
             </a:pPr>
             <a:r>
@@ -22136,7 +21855,7 @@
           <a:bodyPr wrap="square" lIns="0" tIns="0" rIns="0" bIns="0" rtlCol="0" anchor="t"/>
           <a:lstStyle/>
           <a:p>
-            <a:pPr indent="0" marL="0">
+            <a:pPr marL="0" indent="0">
               <a:lnSpc>
                 <a:spcPct val="108000"/>
               </a:lnSpc>
@@ -22220,7 +21939,7 @@
           <a:bodyPr wrap="square" lIns="0" tIns="0" rIns="0" bIns="0" rtlCol="0" anchor="ctr"/>
           <a:lstStyle/>
           <a:p>
-            <a:pPr algn="ctr" indent="0" marL="0">
+            <a:pPr marL="0" indent="0" algn="ctr">
               <a:buNone/>
             </a:pPr>
             <a:r>
@@ -22259,7 +21978,7 @@
           <a:bodyPr wrap="square" lIns="0" tIns="0" rIns="0" bIns="0" rtlCol="0" anchor="ctr"/>
           <a:lstStyle/>
           <a:p>
-            <a:pPr indent="0" marL="0">
+            <a:pPr marL="0" indent="0">
               <a:buNone/>
             </a:pPr>
             <a:r>
@@ -22298,7 +22017,7 @@
           <a:bodyPr wrap="square" lIns="0" tIns="0" rIns="0" bIns="0" rtlCol="0" anchor="t"/>
           <a:lstStyle/>
           <a:p>
-            <a:pPr indent="0" marL="0">
+            <a:pPr marL="0" indent="0">
               <a:lnSpc>
                 <a:spcPct val="108000"/>
               </a:lnSpc>
@@ -22382,7 +22101,7 @@
           <a:bodyPr wrap="square" lIns="0" tIns="0" rIns="0" bIns="0" rtlCol="0" anchor="ctr"/>
           <a:lstStyle/>
           <a:p>
-            <a:pPr algn="ctr" indent="0" marL="0">
+            <a:pPr marL="0" indent="0" algn="ctr">
               <a:buNone/>
             </a:pPr>
             <a:r>
@@ -22421,7 +22140,7 @@
           <a:bodyPr wrap="square" lIns="0" tIns="0" rIns="0" bIns="0" rtlCol="0" anchor="ctr"/>
           <a:lstStyle/>
           <a:p>
-            <a:pPr indent="0" marL="0">
+            <a:pPr marL="0" indent="0">
               <a:buNone/>
             </a:pPr>
             <a:r>
@@ -22460,7 +22179,7 @@
           <a:bodyPr wrap="square" lIns="0" tIns="0" rIns="0" bIns="0" rtlCol="0" anchor="t"/>
           <a:lstStyle/>
           <a:p>
-            <a:pPr indent="0" marL="0">
+            <a:pPr marL="0" indent="0">
               <a:lnSpc>
                 <a:spcPct val="108000"/>
               </a:lnSpc>
@@ -22490,7 +22209,7 @@
         <p:spPr>
           <a:xfrm>
             <a:off x="566928" y="3977640"/>
-            <a:ext cx="11064240" cy="1371600"/>
+            <a:ext cx="10927080" cy="1371600"/>
           </a:xfrm>
           <a:prstGeom prst="roundRect">
             <a:avLst>
@@ -22524,11 +22243,11 @@
           <a:bodyPr wrap="square" lIns="0" tIns="0" rIns="0" bIns="0" rtlCol="0" anchor="ctr"/>
           <a:lstStyle/>
           <a:p>
-            <a:pPr indent="0" marL="0">
-              <a:buNone/>
-            </a:pPr>
-            <a:r>
-              <a:rPr lang="en-US" sz="950" b="1" spc="150" kern="0" dirty="0">
+            <a:pPr marL="0" indent="0">
+              <a:buNone/>
+            </a:pPr>
+            <a:r>
+              <a:rPr lang="en-US" sz="950" b="1" kern="0" spc="150" dirty="0">
                 <a:solidFill>
                   <a:srgbClr val="FFFFFF"/>
                 </a:solidFill>
@@ -22563,7 +22282,7 @@
           <a:bodyPr wrap="square" lIns="0" tIns="0" rIns="0" bIns="0" rtlCol="0" anchor="ctr"/>
           <a:lstStyle/>
           <a:p>
-            <a:pPr indent="0" marL="0">
+            <a:pPr marL="0" indent="0">
               <a:lnSpc>
                 <a:spcPct val="112000"/>
               </a:lnSpc>
@@ -22586,7 +22305,7 @@
       </p:sp>
       <p:sp>
         <p:nvSpPr>
-          <p:cNvPr id="25" name="Slide Number Placeholder 0"/>
+          <p:cNvPr id="26" name="Slide Number Placeholder 0"/>
           <p:cNvSpPr>
             <a:spLocks noGrp="1"/>
           </p:cNvSpPr>
@@ -22604,7 +22323,7 @@
           </a:prstGeom>
           <a:extLst>
             <a:ext uri="{C572A759-6A51-4108-AA02-DFA0A04FC94B}">
-              <ma14:wrappingTextBoxFlag xmlns:ma14="http://schemas.microsoft.com/office/mac/drawingml/2011/main" val="0"/>
+              <ma14:wrappingTextBoxFlag xmlns="" xmlns:ma14="http://schemas.microsoft.com/office/mac/drawingml/2011/main" val="0"/>
             </a:ext>
           </a:extLst>
         </p:spPr>
@@ -22625,7 +22344,7 @@
           <a:p>
             <a:pPr algn="l"/>
             <a:fld id="{F7021451-1387-4CA6-816F-3879F97B5CBC}" type="slidenum">
-              <a:rPr b="0" lang="en-US"/>
+              <a:rPr lang="en-US" b="0"/>
               <a:t>6</a:t>
             </a:fld>
             <a:endParaRPr lang="en-US"/>
@@ -22700,7 +22419,7 @@
           <a:bodyPr wrap="square" lIns="0" tIns="0" rIns="0" bIns="0" rtlCol="0" anchor="ctr"/>
           <a:lstStyle/>
           <a:p>
-            <a:pPr algn="l" indent="0" marL="0">
+            <a:pPr marL="0" indent="0" algn="l">
               <a:buNone/>
             </a:pPr>
             <a:r>
@@ -22739,7 +22458,7 @@
           <a:bodyPr wrap="square" lIns="0" tIns="0" rIns="0" bIns="0" rtlCol="0" anchor="ctr"/>
           <a:lstStyle/>
           <a:p>
-            <a:pPr indent="0" marL="0">
+            <a:pPr marL="0" indent="0">
               <a:buNone/>
             </a:pPr>
             <a:r>
@@ -22805,11 +22524,11 @@
           <a:bodyPr wrap="square" lIns="0" tIns="0" rIns="0" bIns="0" rtlCol="0" anchor="ctr"/>
           <a:lstStyle/>
           <a:p>
-            <a:pPr algn="ctr" indent="0" marL="0">
-              <a:buNone/>
-            </a:pPr>
-            <a:r>
-              <a:rPr lang="en-US" sz="900" b="1" spc="100" kern="0" dirty="0">
+            <a:pPr marL="0" indent="0" algn="ctr">
+              <a:buNone/>
+            </a:pPr>
+            <a:r>
+              <a:rPr lang="en-US" sz="900" b="1" kern="0" spc="100" dirty="0">
                 <a:solidFill>
                   <a:srgbClr val="5A05F4"/>
                 </a:solidFill>
@@ -22825,14 +22544,14 @@
       </p:sp>
       <p:pic>
         <p:nvPicPr>
-          <p:cNvPr id="7" name="Image 0" descr="preencoded.png">    </p:cNvPr>
+          <p:cNvPr id="7" name="Image 0" descr="preencoded.png"/>
           <p:cNvPicPr>
             <a:picLocks noChangeAspect="1"/>
           </p:cNvPicPr>
           <p:nvPr/>
         </p:nvPicPr>
         <p:blipFill>
-          <a:blip r:embed="rId1"/>
+          <a:blip r:embed="rId3"/>
           <a:stretch>
             <a:fillRect/>
           </a:stretch>
@@ -22890,11 +22609,11 @@
           <a:bodyPr wrap="square" lIns="0" tIns="0" rIns="0" bIns="0" rtlCol="0" anchor="ctr"/>
           <a:lstStyle/>
           <a:p>
-            <a:pPr indent="0" marL="0">
-              <a:buNone/>
-            </a:pPr>
-            <a:r>
-              <a:rPr lang="en-US" sz="1050" b="1" spc="200" kern="0" dirty="0">
+            <a:pPr marL="0" indent="0">
+              <a:buNone/>
+            </a:pPr>
+            <a:r>
+              <a:rPr lang="en-US" sz="1050" b="1" kern="0" spc="200" dirty="0">
                 <a:solidFill>
                   <a:srgbClr val="C9C5F2"/>
                 </a:solidFill>
@@ -22929,7 +22648,7 @@
           <a:bodyPr wrap="square" lIns="0" tIns="0" rIns="0" bIns="0" rtlCol="0" anchor="ctr"/>
           <a:lstStyle/>
           <a:p>
-            <a:pPr indent="0" marL="0">
+            <a:pPr marL="0" indent="0">
               <a:buNone/>
             </a:pPr>
             <a:r>
@@ -22968,7 +22687,7 @@
           <a:bodyPr wrap="square" lIns="0" tIns="0" rIns="0" bIns="0" rtlCol="0" anchor="t"/>
           <a:lstStyle/>
           <a:p>
-            <a:pPr indent="0" marL="0">
+            <a:pPr marL="0" indent="0">
               <a:buNone/>
             </a:pPr>
             <a:r>
@@ -23034,11 +22753,11 @@
           <a:bodyPr wrap="square" lIns="0" tIns="0" rIns="0" bIns="0" rtlCol="0" anchor="ctr"/>
           <a:lstStyle/>
           <a:p>
-            <a:pPr indent="0" marL="0">
-              <a:buNone/>
-            </a:pPr>
-            <a:r>
-              <a:rPr lang="en-US" sz="1050" b="1" spc="200" kern="0" dirty="0">
+            <a:pPr marL="0" indent="0">
+              <a:buNone/>
+            </a:pPr>
+            <a:r>
+              <a:rPr lang="en-US" sz="1050" b="1" kern="0" spc="200" dirty="0">
                 <a:solidFill>
                   <a:srgbClr val="6B6B6B"/>
                 </a:solidFill>
@@ -23073,7 +22792,7 @@
           <a:bodyPr wrap="square" lIns="0" tIns="0" rIns="0" bIns="0" rtlCol="0" anchor="ctr"/>
           <a:lstStyle/>
           <a:p>
-            <a:pPr indent="0" marL="0">
+            <a:pPr marL="0" indent="0">
               <a:buNone/>
             </a:pPr>
             <a:r>
@@ -23112,7 +22831,7 @@
           <a:bodyPr wrap="square" lIns="0" tIns="0" rIns="0" bIns="0" rtlCol="0" anchor="t"/>
           <a:lstStyle/>
           <a:p>
-            <a:pPr indent="0" marL="0">
+            <a:pPr marL="0" indent="0">
               <a:buNone/>
             </a:pPr>
             <a:r>
@@ -23178,11 +22897,11 @@
           <a:bodyPr wrap="square" lIns="0" tIns="0" rIns="0" bIns="0" rtlCol="0" anchor="ctr"/>
           <a:lstStyle/>
           <a:p>
-            <a:pPr indent="0" marL="0">
-              <a:buNone/>
-            </a:pPr>
-            <a:r>
-              <a:rPr lang="en-US" sz="950" b="1" spc="150" kern="0" dirty="0">
+            <a:pPr marL="0" indent="0">
+              <a:buNone/>
+            </a:pPr>
+            <a:r>
+              <a:rPr lang="en-US" sz="950" b="1" kern="0" spc="150" dirty="0">
                 <a:solidFill>
                   <a:srgbClr val="106B41"/>
                 </a:solidFill>
@@ -23217,7 +22936,7 @@
           <a:bodyPr wrap="square" lIns="0" tIns="0" rIns="0" bIns="0" rtlCol="0" anchor="ctr"/>
           <a:lstStyle/>
           <a:p>
-            <a:pPr indent="0" marL="0">
+            <a:pPr marL="0" indent="0">
               <a:lnSpc>
                 <a:spcPct val="112000"/>
               </a:lnSpc>
@@ -23286,11 +23005,11 @@
           <a:bodyPr wrap="square" lIns="0" tIns="0" rIns="0" bIns="0" rtlCol="0" anchor="ctr"/>
           <a:lstStyle/>
           <a:p>
-            <a:pPr indent="0" marL="0">
-              <a:buNone/>
-            </a:pPr>
-            <a:r>
-              <a:rPr lang="en-US" sz="950" b="1" spc="150" kern="0" dirty="0">
+            <a:pPr marL="0" indent="0">
+              <a:buNone/>
+            </a:pPr>
+            <a:r>
+              <a:rPr lang="en-US" sz="950" b="1" kern="0" spc="150" dirty="0">
                 <a:solidFill>
                   <a:srgbClr val="B3261E"/>
                 </a:solidFill>
@@ -23325,7 +23044,7 @@
           <a:bodyPr wrap="square" lIns="0" tIns="0" rIns="0" bIns="0" rtlCol="0" anchor="ctr"/>
           <a:lstStyle/>
           <a:p>
-            <a:pPr indent="0" marL="0">
+            <a:pPr marL="0" indent="0">
               <a:lnSpc>
                 <a:spcPct val="112000"/>
               </a:lnSpc>
@@ -23366,7 +23085,7 @@
           </a:prstGeom>
           <a:extLst>
             <a:ext uri="{C572A759-6A51-4108-AA02-DFA0A04FC94B}">
-              <ma14:wrappingTextBoxFlag xmlns:ma14="http://schemas.microsoft.com/office/mac/drawingml/2011/main" val="0"/>
+              <ma14:wrappingTextBoxFlag xmlns="" xmlns:ma14="http://schemas.microsoft.com/office/mac/drawingml/2011/main" val="0"/>
             </a:ext>
           </a:extLst>
         </p:spPr>
@@ -23387,7 +23106,7 @@
           <a:p>
             <a:pPr algn="l"/>
             <a:fld id="{F7021451-1387-4CA6-816F-3879F97B5CBC}" type="slidenum">
-              <a:rPr b="0" lang="en-US"/>
+              <a:rPr lang="en-US" b="0"/>
               <a:t>7</a:t>
             </a:fld>
             <a:endParaRPr lang="en-US"/>
@@ -23462,7 +23181,7 @@
           <a:bodyPr wrap="square" lIns="0" tIns="0" rIns="0" bIns="0" rtlCol="0" anchor="ctr"/>
           <a:lstStyle/>
           <a:p>
-            <a:pPr algn="l" indent="0" marL="0">
+            <a:pPr marL="0" indent="0" algn="l">
               <a:buNone/>
             </a:pPr>
             <a:r>
@@ -23501,7 +23220,7 @@
           <a:bodyPr wrap="square" lIns="0" tIns="0" rIns="0" bIns="0" rtlCol="0" anchor="ctr"/>
           <a:lstStyle/>
           <a:p>
-            <a:pPr indent="0" marL="0">
+            <a:pPr marL="0" indent="0">
               <a:buNone/>
             </a:pPr>
             <a:r>
@@ -23567,11 +23286,11 @@
           <a:bodyPr wrap="square" lIns="0" tIns="0" rIns="0" bIns="0" rtlCol="0" anchor="ctr"/>
           <a:lstStyle/>
           <a:p>
-            <a:pPr algn="ctr" indent="0" marL="0">
-              <a:buNone/>
-            </a:pPr>
-            <a:r>
-              <a:rPr lang="en-US" sz="900" b="1" spc="100" kern="0" dirty="0">
+            <a:pPr marL="0" indent="0" algn="ctr">
+              <a:buNone/>
+            </a:pPr>
+            <a:r>
+              <a:rPr lang="en-US" sz="900" b="1" kern="0" spc="100" dirty="0">
                 <a:solidFill>
                   <a:srgbClr val="5A05F4"/>
                 </a:solidFill>
@@ -23587,14 +23306,14 @@
       </p:sp>
       <p:pic>
         <p:nvPicPr>
-          <p:cNvPr id="7" name="Image 0" descr="preencoded.png">    </p:cNvPr>
+          <p:cNvPr id="7" name="Image 0" descr="preencoded.png"/>
           <p:cNvPicPr>
             <a:picLocks noChangeAspect="1"/>
           </p:cNvPicPr>
           <p:nvPr/>
         </p:nvPicPr>
         <p:blipFill>
-          <a:blip r:embed="rId1"/>
+          <a:blip r:embed="rId3"/>
           <a:stretch>
             <a:fillRect/>
           </a:stretch>
@@ -23657,7 +23376,7 @@
           <a:bodyPr wrap="square" lIns="0" tIns="0" rIns="0" bIns="0" rtlCol="0" anchor="t"/>
           <a:lstStyle/>
           <a:p>
-            <a:pPr indent="0" marL="0">
+            <a:pPr marL="0" indent="0">
               <a:lnSpc>
                 <a:spcPct val="130000"/>
               </a:lnSpc>
@@ -23677,7 +23396,7 @@
             <a:endParaRPr lang="en-US" sz="1100" dirty="0"/>
           </a:p>
           <a:p>
-            <a:pPr indent="0" marL="0">
+            <a:pPr marL="0" indent="0">
               <a:lnSpc>
                 <a:spcPct val="130000"/>
               </a:lnSpc>
@@ -23694,7 +23413,21 @@
               </a:rPr>
               <a:t>  - model_name: </a:t>
             </a:r>
-            <a:pPr indent="0" marL="0">
+            <a:r>
+              <a:rPr lang="en-US" sz="1100" dirty="0">
+                <a:solidFill>
+                  <a:srgbClr val="6BA0F8"/>
+                </a:solidFill>
+                <a:latin typeface="Courier New" pitchFamily="34" charset="0"/>
+                <a:ea typeface="Courier New" pitchFamily="34" charset="-122"/>
+                <a:cs typeface="Courier New" pitchFamily="34" charset="-120"/>
+              </a:rPr>
+              <a:t>mock-mini</a:t>
+            </a:r>
+            <a:endParaRPr lang="en-US" sz="1100" dirty="0"/>
+          </a:p>
+          <a:p>
+            <a:pPr marL="0" indent="0">
               <a:lnSpc>
                 <a:spcPct val="130000"/>
               </a:lnSpc>
@@ -23703,18 +23436,18 @@
             <a:r>
               <a:rPr lang="en-US" sz="1100" dirty="0">
                 <a:solidFill>
-                  <a:srgbClr val="6BA0F8"/>
+                  <a:srgbClr val="A98BFF"/>
                 </a:solidFill>
                 <a:latin typeface="Courier New" pitchFamily="34" charset="0"/>
                 <a:ea typeface="Courier New" pitchFamily="34" charset="-122"/>
                 <a:cs typeface="Courier New" pitchFamily="34" charset="-120"/>
               </a:rPr>
-              <a:t>mock-mini</a:t>
+              <a:t>    litellm_params:</a:t>
             </a:r>
             <a:endParaRPr lang="en-US" sz="1100" dirty="0"/>
           </a:p>
           <a:p>
-            <a:pPr indent="0" marL="0">
+            <a:pPr marL="0" indent="0">
               <a:lnSpc>
                 <a:spcPct val="130000"/>
               </a:lnSpc>
@@ -23723,18 +23456,18 @@
             <a:r>
               <a:rPr lang="en-US" sz="1100" dirty="0">
                 <a:solidFill>
-                  <a:srgbClr val="A98BFF"/>
+                  <a:srgbClr val="D8D4E4"/>
                 </a:solidFill>
                 <a:latin typeface="Courier New" pitchFamily="34" charset="0"/>
                 <a:ea typeface="Courier New" pitchFamily="34" charset="-122"/>
                 <a:cs typeface="Courier New" pitchFamily="34" charset="-120"/>
               </a:rPr>
-              <a:t>    litellm_params:</a:t>
+              <a:t>      model: openai/mock</a:t>
             </a:r>
             <a:endParaRPr lang="en-US" sz="1100" dirty="0"/>
           </a:p>
           <a:p>
-            <a:pPr indent="0" marL="0">
+            <a:pPr marL="0" indent="0">
               <a:lnSpc>
                 <a:spcPct val="130000"/>
               </a:lnSpc>
@@ -23749,12 +23482,12 @@
                 <a:ea typeface="Courier New" pitchFamily="34" charset="-122"/>
                 <a:cs typeface="Courier New" pitchFamily="34" charset="-120"/>
               </a:rPr>
-              <a:t>      model: openai/mock</a:t>
+              <a:t>      api_base: http://mock-provider:9000/v1</a:t>
             </a:r>
             <a:endParaRPr lang="en-US" sz="1100" dirty="0"/>
           </a:p>
           <a:p>
-            <a:pPr indent="0" marL="0">
+            <a:pPr marL="0" indent="0">
               <a:lnSpc>
                 <a:spcPct val="130000"/>
               </a:lnSpc>
@@ -23769,12 +23502,23 @@
                 <a:ea typeface="Courier New" pitchFamily="34" charset="-122"/>
                 <a:cs typeface="Courier New" pitchFamily="34" charset="-120"/>
               </a:rPr>
-              <a:t>      api_base: http://mock-provider:9000/v1</a:t>
+              <a:t>  - model_name: </a:t>
+            </a:r>
+            <a:r>
+              <a:rPr lang="en-US" sz="1100" dirty="0">
+                <a:solidFill>
+                  <a:srgbClr val="6BA0F8"/>
+                </a:solidFill>
+                <a:latin typeface="Courier New" pitchFamily="34" charset="0"/>
+                <a:ea typeface="Courier New" pitchFamily="34" charset="-122"/>
+                <a:cs typeface="Courier New" pitchFamily="34" charset="-120"/>
+              </a:rPr>
+              <a:t>mock-strong</a:t>
             </a:r>
             <a:endParaRPr lang="en-US" sz="1100" dirty="0"/>
           </a:p>
           <a:p>
-            <a:pPr indent="0" marL="0">
+            <a:pPr marL="0" indent="0">
               <a:lnSpc>
                 <a:spcPct val="130000"/>
               </a:lnSpc>
@@ -23783,15 +23527,29 @@
             <a:r>
               <a:rPr lang="en-US" sz="1100" dirty="0">
                 <a:solidFill>
-                  <a:srgbClr val="D8D4E4"/>
+                  <a:srgbClr val="A98BFF"/>
                 </a:solidFill>
                 <a:latin typeface="Courier New" pitchFamily="34" charset="0"/>
                 <a:ea typeface="Courier New" pitchFamily="34" charset="-122"/>
                 <a:cs typeface="Courier New" pitchFamily="34" charset="-120"/>
               </a:rPr>
-              <a:t>  - model_name: </a:t>
-            </a:r>
-            <a:pPr indent="0" marL="0">
+              <a:t>    litellm_params:   </a:t>
+            </a:r>
+            <a:r>
+              <a:rPr lang="en-US" sz="1100" dirty="0">
+                <a:solidFill>
+                  <a:srgbClr val="9A94AA"/>
+                </a:solidFill>
+                <a:latin typeface="Courier New" pitchFamily="34" charset="0"/>
+                <a:ea typeface="Courier New" pitchFamily="34" charset="-122"/>
+                <a:cs typeface="Courier New" pitchFamily="34" charset="-120"/>
+              </a:rPr>
+              <a:t># той самий mock</a:t>
+            </a:r>
+            <a:endParaRPr lang="en-US" sz="1100" dirty="0"/>
+          </a:p>
+          <a:p>
+            <a:pPr marL="0" indent="0">
               <a:lnSpc>
                 <a:spcPct val="130000"/>
               </a:lnSpc>
@@ -23800,18 +23558,18 @@
             <a:r>
               <a:rPr lang="en-US" sz="1100" dirty="0">
                 <a:solidFill>
-                  <a:srgbClr val="6BA0F8"/>
+                  <a:srgbClr val="D8D4E4"/>
                 </a:solidFill>
                 <a:latin typeface="Courier New" pitchFamily="34" charset="0"/>
                 <a:ea typeface="Courier New" pitchFamily="34" charset="-122"/>
                 <a:cs typeface="Courier New" pitchFamily="34" charset="-120"/>
               </a:rPr>
-              <a:t>mock-strong</a:t>
+              <a:t>      model: openai/mock</a:t>
             </a:r>
             <a:endParaRPr lang="en-US" sz="1100" dirty="0"/>
           </a:p>
           <a:p>
-            <a:pPr indent="0" marL="0">
+            <a:pPr marL="0" indent="0">
               <a:lnSpc>
                 <a:spcPct val="130000"/>
               </a:lnSpc>
@@ -23826,9 +23584,12 @@
                 <a:ea typeface="Courier New" pitchFamily="34" charset="-122"/>
                 <a:cs typeface="Courier New" pitchFamily="34" charset="-120"/>
               </a:rPr>
-              <a:t>    litellm_params:   </a:t>
-            </a:r>
-            <a:pPr indent="0" marL="0">
+              <a:t>litellm_settings:</a:t>
+            </a:r>
+            <a:endParaRPr lang="en-US" sz="1100" dirty="0"/>
+          </a:p>
+          <a:p>
+            <a:pPr marL="0" indent="0">
               <a:lnSpc>
                 <a:spcPct val="130000"/>
               </a:lnSpc>
@@ -23837,18 +23598,18 @@
             <a:r>
               <a:rPr lang="en-US" sz="1100" dirty="0">
                 <a:solidFill>
-                  <a:srgbClr val="9A94AA"/>
+                  <a:srgbClr val="D8D4E4"/>
                 </a:solidFill>
                 <a:latin typeface="Courier New" pitchFamily="34" charset="0"/>
                 <a:ea typeface="Courier New" pitchFamily="34" charset="-122"/>
                 <a:cs typeface="Courier New" pitchFamily="34" charset="-120"/>
               </a:rPr>
-              <a:t># той самий mock</a:t>
+              <a:t>  drop_params: true</a:t>
             </a:r>
             <a:endParaRPr lang="en-US" sz="1100" dirty="0"/>
           </a:p>
           <a:p>
-            <a:pPr indent="0" marL="0">
+            <a:pPr marL="0" indent="0">
               <a:lnSpc>
                 <a:spcPct val="130000"/>
               </a:lnSpc>
@@ -23863,74 +23624,8 @@
                 <a:ea typeface="Courier New" pitchFamily="34" charset="-122"/>
                 <a:cs typeface="Courier New" pitchFamily="34" charset="-120"/>
               </a:rPr>
-              <a:t>      model: openai/mock</a:t>
-            </a:r>
-            <a:endParaRPr lang="en-US" sz="1100" dirty="0"/>
-          </a:p>
-          <a:p>
-            <a:pPr indent="0" marL="0">
-              <a:lnSpc>
-                <a:spcPct val="130000"/>
-              </a:lnSpc>
-              <a:buNone/>
-            </a:pPr>
-            <a:r>
-              <a:rPr lang="en-US" sz="1100" dirty="0">
-                <a:solidFill>
-                  <a:srgbClr val="A98BFF"/>
-                </a:solidFill>
-                <a:latin typeface="Courier New" pitchFamily="34" charset="0"/>
-                <a:ea typeface="Courier New" pitchFamily="34" charset="-122"/>
-                <a:cs typeface="Courier New" pitchFamily="34" charset="-120"/>
-              </a:rPr>
-              <a:t>litellm_settings:</a:t>
-            </a:r>
-            <a:endParaRPr lang="en-US" sz="1100" dirty="0"/>
-          </a:p>
-          <a:p>
-            <a:pPr indent="0" marL="0">
-              <a:lnSpc>
-                <a:spcPct val="130000"/>
-              </a:lnSpc>
-              <a:buNone/>
-            </a:pPr>
-            <a:r>
-              <a:rPr lang="en-US" sz="1100" dirty="0">
-                <a:solidFill>
-                  <a:srgbClr val="D8D4E4"/>
-                </a:solidFill>
-                <a:latin typeface="Courier New" pitchFamily="34" charset="0"/>
-                <a:ea typeface="Courier New" pitchFamily="34" charset="-122"/>
-                <a:cs typeface="Courier New" pitchFamily="34" charset="-120"/>
-              </a:rPr>
-              <a:t>  drop_params: true</a:t>
-            </a:r>
-            <a:endParaRPr lang="en-US" sz="1100" dirty="0"/>
-          </a:p>
-          <a:p>
-            <a:pPr indent="0" marL="0">
-              <a:lnSpc>
-                <a:spcPct val="130000"/>
-              </a:lnSpc>
-              <a:buNone/>
-            </a:pPr>
-            <a:r>
-              <a:rPr lang="en-US" sz="1100" dirty="0">
-                <a:solidFill>
-                  <a:srgbClr val="D8D4E4"/>
-                </a:solidFill>
-                <a:latin typeface="Courier New" pitchFamily="34" charset="0"/>
-                <a:ea typeface="Courier New" pitchFamily="34" charset="-122"/>
-                <a:cs typeface="Courier New" pitchFamily="34" charset="-120"/>
-              </a:rPr>
               <a:t>  num_retries: 0    </a:t>
             </a:r>
-            <a:pPr indent="0" marL="0">
-              <a:lnSpc>
-                <a:spcPct val="130000"/>
-              </a:lnSpc>
-              <a:buNone/>
-            </a:pPr>
             <a:r>
               <a:rPr lang="en-US" sz="1100" dirty="0">
                 <a:solidFill>
@@ -23989,7 +23684,7 @@
           <a:bodyPr wrap="square" lIns="0" tIns="0" rIns="0" bIns="0" rtlCol="0" anchor="ctr"/>
           <a:lstStyle/>
           <a:p>
-            <a:pPr indent="0" marL="0">
+            <a:pPr marL="0" indent="0">
               <a:buNone/>
             </a:pPr>
             <a:r>
@@ -24028,7 +23723,7 @@
           <a:bodyPr wrap="square" lIns="0" tIns="0" rIns="0" bIns="0" rtlCol="0" anchor="t"/>
           <a:lstStyle/>
           <a:p>
-            <a:pPr indent="0" marL="0">
+            <a:pPr marL="0" indent="0">
               <a:lnSpc>
                 <a:spcPct val="108000"/>
               </a:lnSpc>
@@ -24092,7 +23787,7 @@
           <a:bodyPr wrap="square" lIns="0" tIns="0" rIns="0" bIns="0" rtlCol="0" anchor="ctr"/>
           <a:lstStyle/>
           <a:p>
-            <a:pPr indent="0" marL="0">
+            <a:pPr marL="0" indent="0">
               <a:buNone/>
             </a:pPr>
             <a:r>
@@ -24131,7 +23826,7 @@
           <a:bodyPr wrap="square" lIns="0" tIns="0" rIns="0" bIns="0" rtlCol="0" anchor="t"/>
           <a:lstStyle/>
           <a:p>
-            <a:pPr indent="0" marL="0">
+            <a:pPr marL="0" indent="0">
               <a:lnSpc>
                 <a:spcPct val="108000"/>
               </a:lnSpc>
@@ -24195,7 +23890,7 @@
           <a:bodyPr wrap="square" lIns="0" tIns="0" rIns="0" bIns="0" rtlCol="0" anchor="ctr"/>
           <a:lstStyle/>
           <a:p>
-            <a:pPr indent="0" marL="0">
+            <a:pPr marL="0" indent="0">
               <a:buNone/>
             </a:pPr>
             <a:r>
@@ -24234,7 +23929,7 @@
           <a:bodyPr wrap="square" lIns="0" tIns="0" rIns="0" bIns="0" rtlCol="0" anchor="t"/>
           <a:lstStyle/>
           <a:p>
-            <a:pPr indent="0" marL="0">
+            <a:pPr marL="0" indent="0">
               <a:lnSpc>
                 <a:spcPct val="108000"/>
               </a:lnSpc>
@@ -24303,7 +23998,7 @@
           <a:bodyPr wrap="square" lIns="0" tIns="0" rIns="0" bIns="0" rtlCol="0" anchor="ctr"/>
           <a:lstStyle/>
           <a:p>
-            <a:pPr indent="0" marL="0">
+            <a:pPr marL="0" indent="0">
               <a:lnSpc>
                 <a:spcPct val="112000"/>
               </a:lnSpc>
@@ -24344,7 +24039,7 @@
           </a:prstGeom>
           <a:extLst>
             <a:ext uri="{C572A759-6A51-4108-AA02-DFA0A04FC94B}">
-              <ma14:wrappingTextBoxFlag xmlns:ma14="http://schemas.microsoft.com/office/mac/drawingml/2011/main" val="0"/>
+              <ma14:wrappingTextBoxFlag xmlns="" xmlns:ma14="http://schemas.microsoft.com/office/mac/drawingml/2011/main" val="0"/>
             </a:ext>
           </a:extLst>
         </p:spPr>
@@ -24365,7 +24060,7 @@
           <a:p>
             <a:pPr algn="l"/>
             <a:fld id="{F7021451-1387-4CA6-816F-3879F97B5CBC}" type="slidenum">
-              <a:rPr b="0" lang="en-US"/>
+              <a:rPr lang="en-US" b="0"/>
               <a:t>8</a:t>
             </a:fld>
             <a:endParaRPr lang="en-US"/>
@@ -24440,7 +24135,7 @@
           <a:bodyPr wrap="square" lIns="0" tIns="0" rIns="0" bIns="0" rtlCol="0" anchor="ctr"/>
           <a:lstStyle/>
           <a:p>
-            <a:pPr algn="l" indent="0" marL="0">
+            <a:pPr marL="0" indent="0" algn="l">
               <a:buNone/>
             </a:pPr>
             <a:r>
@@ -24479,7 +24174,7 @@
           <a:bodyPr wrap="square" lIns="0" tIns="0" rIns="0" bIns="0" rtlCol="0" anchor="ctr"/>
           <a:lstStyle/>
           <a:p>
-            <a:pPr indent="0" marL="0">
+            <a:pPr marL="0" indent="0">
               <a:buNone/>
             </a:pPr>
             <a:r>
@@ -24545,11 +24240,11 @@
           <a:bodyPr wrap="square" lIns="0" tIns="0" rIns="0" bIns="0" rtlCol="0" anchor="ctr"/>
           <a:lstStyle/>
           <a:p>
-            <a:pPr algn="ctr" indent="0" marL="0">
-              <a:buNone/>
-            </a:pPr>
-            <a:r>
-              <a:rPr lang="en-US" sz="900" b="1" spc="100" kern="0" dirty="0">
+            <a:pPr marL="0" indent="0" algn="ctr">
+              <a:buNone/>
+            </a:pPr>
+            <a:r>
+              <a:rPr lang="en-US" sz="900" b="1" kern="0" spc="100" dirty="0">
                 <a:solidFill>
                   <a:srgbClr val="5A05F4"/>
                 </a:solidFill>
@@ -24565,14 +24260,14 @@
       </p:sp>
       <p:pic>
         <p:nvPicPr>
-          <p:cNvPr id="7" name="Image 0" descr="preencoded.png">    </p:cNvPr>
+          <p:cNvPr id="7" name="Image 0" descr="preencoded.png"/>
           <p:cNvPicPr>
             <a:picLocks noChangeAspect="1"/>
           </p:cNvPicPr>
           <p:nvPr/>
         </p:nvPicPr>
         <p:blipFill>
-          <a:blip r:embed="rId1"/>
+          <a:blip r:embed="rId3"/>
           <a:stretch>
             <a:fillRect/>
           </a:stretch>
@@ -24630,7 +24325,7 @@
           <a:bodyPr wrap="square" lIns="0" tIns="0" rIns="0" bIns="0" rtlCol="0" anchor="ctr"/>
           <a:lstStyle/>
           <a:p>
-            <a:pPr indent="0" marL="0">
+            <a:pPr marL="0" indent="0">
               <a:buNone/>
             </a:pPr>
             <a:r>
@@ -24669,7 +24364,7 @@
           <a:bodyPr wrap="square" lIns="0" tIns="0" rIns="0" bIns="0" rtlCol="0" anchor="t"/>
           <a:lstStyle/>
           <a:p>
-            <a:pPr indent="0" marL="0">
+            <a:pPr marL="0" indent="0">
               <a:lnSpc>
                 <a:spcPct val="108000"/>
               </a:lnSpc>
@@ -24733,7 +24428,7 @@
           <a:bodyPr wrap="square" lIns="0" tIns="0" rIns="0" bIns="0" rtlCol="0" anchor="ctr"/>
           <a:lstStyle/>
           <a:p>
-            <a:pPr indent="0" marL="0">
+            <a:pPr marL="0" indent="0">
               <a:buNone/>
             </a:pPr>
             <a:r>
@@ -24772,7 +24467,7 @@
           <a:bodyPr wrap="square" lIns="0" tIns="0" rIns="0" bIns="0" rtlCol="0" anchor="t"/>
           <a:lstStyle/>
           <a:p>
-            <a:pPr indent="0" marL="0">
+            <a:pPr marL="0" indent="0">
               <a:lnSpc>
                 <a:spcPct val="108000"/>
               </a:lnSpc>
@@ -24864,7 +24559,7 @@
           <a:bodyPr wrap="square" lIns="0" tIns="0" rIns="0" bIns="0" rtlCol="0" anchor="ctr"/>
           <a:lstStyle/>
           <a:p>
-            <a:pPr algn="ctr" indent="0" marL="0">
+            <a:pPr marL="0" indent="0" algn="ctr">
               <a:buNone/>
             </a:pPr>
             <a:r>
@@ -24930,7 +24625,7 @@
           <a:bodyPr wrap="square" lIns="0" tIns="0" rIns="0" bIns="0" rtlCol="0" anchor="ctr"/>
           <a:lstStyle/>
           <a:p>
-            <a:pPr algn="ctr" indent="0" marL="0">
+            <a:pPr marL="0" indent="0" algn="ctr">
               <a:buNone/>
             </a:pPr>
             <a:r>
@@ -24996,7 +24691,7 @@
           <a:bodyPr wrap="square" lIns="0" tIns="0" rIns="0" bIns="0" rtlCol="0" anchor="ctr"/>
           <a:lstStyle/>
           <a:p>
-            <a:pPr algn="ctr" indent="0" marL="0">
+            <a:pPr marL="0" indent="0" algn="ctr">
               <a:buNone/>
             </a:pPr>
             <a:r>
@@ -25035,7 +24730,7 @@
           <a:bodyPr wrap="square" lIns="0" tIns="0" rIns="0" bIns="0" rtlCol="0" anchor="ctr"/>
           <a:lstStyle/>
           <a:p>
-            <a:pPr indent="0" marL="0">
+            <a:pPr marL="0" indent="0">
               <a:buNone/>
             </a:pPr>
             <a:r>
@@ -25074,7 +24769,7 @@
           <a:bodyPr wrap="square" lIns="0" tIns="0" rIns="0" bIns="0" rtlCol="0" anchor="ctr"/>
           <a:lstStyle/>
           <a:p>
-            <a:pPr algn="r" indent="0" marL="0">
+            <a:pPr marL="0" indent="0" algn="r">
               <a:buNone/>
             </a:pPr>
             <a:r>
@@ -25113,11 +24808,11 @@
           <a:bodyPr wrap="square" lIns="0" tIns="0" rIns="0" bIns="0" rtlCol="0" anchor="ctr"/>
           <a:lstStyle/>
           <a:p>
-            <a:pPr indent="0" marL="0">
-              <a:buNone/>
-            </a:pPr>
-            <a:r>
-              <a:rPr lang="en-US" sz="850" spc="100" kern="0" dirty="0">
+            <a:pPr marL="0" indent="0">
+              <a:buNone/>
+            </a:pPr>
+            <a:r>
+              <a:rPr lang="en-US" sz="850" kern="0" spc="100" dirty="0">
                 <a:solidFill>
                   <a:srgbClr val="6B6B6B"/>
                 </a:solidFill>
@@ -25179,11 +24874,11 @@
           <a:bodyPr wrap="square" lIns="0" tIns="0" rIns="0" bIns="0" rtlCol="0" anchor="ctr"/>
           <a:lstStyle/>
           <a:p>
-            <a:pPr indent="0" marL="0">
-              <a:buNone/>
-            </a:pPr>
-            <a:r>
-              <a:rPr lang="en-US" sz="950" b="1" spc="150" kern="0" dirty="0">
+            <a:pPr marL="0" indent="0">
+              <a:buNone/>
+            </a:pPr>
+            <a:r>
+              <a:rPr lang="en-US" sz="950" b="1" kern="0" spc="150" dirty="0">
                 <a:solidFill>
                   <a:srgbClr val="1A4FBF"/>
                 </a:solidFill>
@@ -25218,7 +24913,7 @@
           <a:bodyPr wrap="square" lIns="0" tIns="0" rIns="0" bIns="0" rtlCol="0" anchor="ctr"/>
           <a:lstStyle/>
           <a:p>
-            <a:pPr indent="0" marL="0">
+            <a:pPr marL="0" indent="0">
               <a:lnSpc>
                 <a:spcPct val="112000"/>
               </a:lnSpc>
@@ -25282,7 +24977,7 @@
           <a:bodyPr wrap="square" lIns="0" tIns="0" rIns="0" bIns="0" rtlCol="0" anchor="ctr"/>
           <a:lstStyle/>
           <a:p>
-            <a:pPr indent="0" marL="0">
+            <a:pPr marL="0" indent="0">
               <a:lnSpc>
                 <a:spcPct val="112000"/>
               </a:lnSpc>
@@ -25305,7 +25000,7 @@
       </p:sp>
       <p:sp>
         <p:nvSpPr>
-          <p:cNvPr id="25" name="Slide Number Placeholder 0"/>
+          <p:cNvPr id="29" name="Slide Number Placeholder 0"/>
           <p:cNvSpPr>
             <a:spLocks noGrp="1"/>
           </p:cNvSpPr>
@@ -25323,7 +25018,7 @@
           </a:prstGeom>
           <a:extLst>
             <a:ext uri="{C572A759-6A51-4108-AA02-DFA0A04FC94B}">
-              <ma14:wrappingTextBoxFlag xmlns:ma14="http://schemas.microsoft.com/office/mac/drawingml/2011/main" val="0"/>
+              <ma14:wrappingTextBoxFlag xmlns="" xmlns:ma14="http://schemas.microsoft.com/office/mac/drawingml/2011/main" val="0"/>
             </a:ext>
           </a:extLst>
         </p:spPr>
@@ -25344,7 +25039,7 @@
           <a:p>
             <a:pPr algn="l"/>
             <a:fld id="{F7021451-1387-4CA6-816F-3879F97B5CBC}" type="slidenum">
-              <a:rPr b="0" lang="en-US"/>
+              <a:rPr lang="en-US" b="0"/>
               <a:t>9</a:t>
             </a:fld>
             <a:endParaRPr lang="en-US"/>
@@ -25652,4 +25347,299 @@
     </a:ext>
   </a:extLst>
 </a:theme>
+</file>
+
+<file path=ppt/theme/theme2.xml><?xml version="1.0" encoding="utf-8"?>
+<a:theme xmlns:a="http://schemas.openxmlformats.org/drawingml/2006/main" name="Office Theme">
+  <a:themeElements>
+    <a:clrScheme name="Office">
+      <a:dk1>
+        <a:sysClr val="windowText" lastClr="000000"/>
+      </a:dk1>
+      <a:lt1>
+        <a:sysClr val="window" lastClr="FFFFFF"/>
+      </a:lt1>
+      <a:dk2>
+        <a:srgbClr val="44546A"/>
+      </a:dk2>
+      <a:lt2>
+        <a:srgbClr val="E7E6E6"/>
+      </a:lt2>
+      <a:accent1>
+        <a:srgbClr val="4472C4"/>
+      </a:accent1>
+      <a:accent2>
+        <a:srgbClr val="ED7D31"/>
+      </a:accent2>
+      <a:accent3>
+        <a:srgbClr val="A5A5A5"/>
+      </a:accent3>
+      <a:accent4>
+        <a:srgbClr val="FFC000"/>
+      </a:accent4>
+      <a:accent5>
+        <a:srgbClr val="5B9BD5"/>
+      </a:accent5>
+      <a:accent6>
+        <a:srgbClr val="70AD47"/>
+      </a:accent6>
+      <a:hlink>
+        <a:srgbClr val="0563C1"/>
+      </a:hlink>
+      <a:folHlink>
+        <a:srgbClr val="954F72"/>
+      </a:folHlink>
+    </a:clrScheme>
+    <a:fontScheme name="Office">
+      <a:majorFont>
+        <a:latin typeface="Calibri Light" panose="020F0302020204030204"/>
+        <a:ea typeface=""/>
+        <a:cs typeface=""/>
+        <a:font script="Jpan" typeface="游ゴシック Light"/>
+        <a:font script="Hang" typeface="맑은 고딕"/>
+        <a:font script="Hans" typeface="等线 Light"/>
+        <a:font script="Hant" typeface="新細明體"/>
+        <a:font script="Arab" typeface="Times New Roman"/>
+        <a:font script="Hebr" typeface="Times New Roman"/>
+        <a:font script="Thai" typeface="Angsana New"/>
+        <a:font script="Ethi" typeface="Nyala"/>
+        <a:font script="Beng" typeface="Vrinda"/>
+        <a:font script="Gujr" typeface="Shruti"/>
+        <a:font script="Khmr" typeface="MoolBoran"/>
+        <a:font script="Knda" typeface="Tunga"/>
+        <a:font script="Guru" typeface="Raavi"/>
+        <a:font script="Cans" typeface="Euphemia"/>
+        <a:font script="Cher" typeface="Plantagenet Cherokee"/>
+        <a:font script="Yiii" typeface="Microsoft Yi Baiti"/>
+        <a:font script="Tibt" typeface="Microsoft Himalaya"/>
+        <a:font script="Thaa" typeface="MV Boli"/>
+        <a:font script="Deva" typeface="Mangal"/>
+        <a:font script="Telu" typeface="Gautami"/>
+        <a:font script="Taml" typeface="Latha"/>
+        <a:font script="Syrc" typeface="Estrangelo Edessa"/>
+        <a:font script="Orya" typeface="Kalinga"/>
+        <a:font script="Mlym" typeface="Kartika"/>
+        <a:font script="Laoo" typeface="DokChampa"/>
+        <a:font script="Sinh" typeface="Iskoola Pota"/>
+        <a:font script="Mong" typeface="Mongolian Baiti"/>
+        <a:font script="Viet" typeface="Times New Roman"/>
+        <a:font script="Uigh" typeface="Microsoft Uighur"/>
+        <a:font script="Geor" typeface="Sylfaen"/>
+        <a:font script="Armn" typeface="Arial"/>
+        <a:font script="Bugi" typeface="Leelawadee UI"/>
+        <a:font script="Bopo" typeface="Microsoft JhengHei"/>
+        <a:font script="Java" typeface="Javanese Text"/>
+        <a:font script="Lisu" typeface="Segoe UI"/>
+        <a:font script="Mymr" typeface="Myanmar Text"/>
+        <a:font script="Nkoo" typeface="Ebrima"/>
+        <a:font script="Olck" typeface="Nirmala UI"/>
+        <a:font script="Osma" typeface="Ebrima"/>
+        <a:font script="Phag" typeface="Phagspa"/>
+        <a:font script="Syrn" typeface="Estrangelo Edessa"/>
+        <a:font script="Syrj" typeface="Estrangelo Edessa"/>
+        <a:font script="Syre" typeface="Estrangelo Edessa"/>
+        <a:font script="Sora" typeface="Nirmala UI"/>
+        <a:font script="Tale" typeface="Microsoft Tai Le"/>
+        <a:font script="Talu" typeface="Microsoft New Tai Lue"/>
+        <a:font script="Tfng" typeface="Ebrima"/>
+      </a:majorFont>
+      <a:minorFont>
+        <a:latin typeface="Calibri" panose="020F0502020204030204"/>
+        <a:ea typeface=""/>
+        <a:cs typeface=""/>
+        <a:font script="Jpan" typeface="游ゴシック"/>
+        <a:font script="Hang" typeface="맑은 고딕"/>
+        <a:font script="Hans" typeface="等线"/>
+        <a:font script="Hant" typeface="新細明體"/>
+        <a:font script="Arab" typeface="Arial"/>
+        <a:font script="Hebr" typeface="Arial"/>
+        <a:font script="Thai" typeface="Cordia New"/>
+        <a:font script="Ethi" typeface="Nyala"/>
+        <a:font script="Beng" typeface="Vrinda"/>
+        <a:font script="Gujr" typeface="Shruti"/>
+        <a:font script="Khmr" typeface="DaunPenh"/>
+        <a:font script="Knda" typeface="Tunga"/>
+        <a:font script="Guru" typeface="Raavi"/>
+        <a:font script="Cans" typeface="Euphemia"/>
+        <a:font script="Cher" typeface="Plantagenet Cherokee"/>
+        <a:font script="Yiii" typeface="Microsoft Yi Baiti"/>
+        <a:font script="Tibt" typeface="Microsoft Himalaya"/>
+        <a:font script="Thaa" typeface="MV Boli"/>
+        <a:font script="Deva" typeface="Mangal"/>
+        <a:font script="Telu" typeface="Gautami"/>
+        <a:font script="Taml" typeface="Latha"/>
+        <a:font script="Syrc" typeface="Estrangelo Edessa"/>
+        <a:font script="Orya" typeface="Kalinga"/>
+        <a:font script="Mlym" typeface="Kartika"/>
+        <a:font script="Laoo" typeface="DokChampa"/>
+        <a:font script="Sinh" typeface="Iskoola Pota"/>
+        <a:font script="Mong" typeface="Mongolian Baiti"/>
+        <a:font script="Viet" typeface="Arial"/>
+        <a:font script="Uigh" typeface="Microsoft Uighur"/>
+        <a:font script="Geor" typeface="Sylfaen"/>
+        <a:font script="Armn" typeface="Arial"/>
+        <a:font script="Bugi" typeface="Leelawadee UI"/>
+        <a:font script="Bopo" typeface="Microsoft JhengHei"/>
+        <a:font script="Java" typeface="Javanese Text"/>
+        <a:font script="Lisu" typeface="Segoe UI"/>
+        <a:font script="Mymr" typeface="Myanmar Text"/>
+        <a:font script="Nkoo" typeface="Ebrima"/>
+        <a:font script="Olck" typeface="Nirmala UI"/>
+        <a:font script="Osma" typeface="Ebrima"/>
+        <a:font script="Phag" typeface="Phagspa"/>
+        <a:font script="Syrn" typeface="Estrangelo Edessa"/>
+        <a:font script="Syrj" typeface="Estrangelo Edessa"/>
+        <a:font script="Syre" typeface="Estrangelo Edessa"/>
+        <a:font script="Sora" typeface="Nirmala UI"/>
+        <a:font script="Tale" typeface="Microsoft Tai Le"/>
+        <a:font script="Talu" typeface="Microsoft New Tai Lue"/>
+        <a:font script="Tfng" typeface="Ebrima"/>
+      </a:minorFont>
+    </a:fontScheme>
+    <a:fmtScheme name="Office">
+      <a:fillStyleLst>
+        <a:solidFill>
+          <a:schemeClr val="phClr"/>
+        </a:solidFill>
+        <a:gradFill rotWithShape="1">
+          <a:gsLst>
+            <a:gs pos="0">
+              <a:schemeClr val="phClr">
+                <a:lumMod val="110000"/>
+                <a:satMod val="105000"/>
+                <a:tint val="67000"/>
+              </a:schemeClr>
+            </a:gs>
+            <a:gs pos="50000">
+              <a:schemeClr val="phClr">
+                <a:lumMod val="105000"/>
+                <a:satMod val="103000"/>
+                <a:tint val="73000"/>
+              </a:schemeClr>
+            </a:gs>
+            <a:gs pos="100000">
+              <a:schemeClr val="phClr">
+                <a:lumMod val="105000"/>
+                <a:satMod val="109000"/>
+                <a:tint val="81000"/>
+              </a:schemeClr>
+            </a:gs>
+          </a:gsLst>
+          <a:lin ang="5400000" scaled="0"/>
+        </a:gradFill>
+        <a:gradFill rotWithShape="1">
+          <a:gsLst>
+            <a:gs pos="0">
+              <a:schemeClr val="phClr">
+                <a:satMod val="103000"/>
+                <a:lumMod val="102000"/>
+                <a:tint val="94000"/>
+              </a:schemeClr>
+            </a:gs>
+            <a:gs pos="50000">
+              <a:schemeClr val="phClr">
+                <a:satMod val="110000"/>
+                <a:lumMod val="100000"/>
+                <a:shade val="100000"/>
+              </a:schemeClr>
+            </a:gs>
+            <a:gs pos="100000">
+              <a:schemeClr val="phClr">
+                <a:lumMod val="99000"/>
+                <a:satMod val="120000"/>
+                <a:shade val="78000"/>
+              </a:schemeClr>
+            </a:gs>
+          </a:gsLst>
+          <a:lin ang="5400000" scaled="0"/>
+        </a:gradFill>
+      </a:fillStyleLst>
+      <a:lnStyleLst>
+        <a:ln w="6350" cap="flat" cmpd="sng" algn="ctr">
+          <a:solidFill>
+            <a:schemeClr val="phClr"/>
+          </a:solidFill>
+          <a:prstDash val="solid"/>
+          <a:miter lim="800000"/>
+        </a:ln>
+        <a:ln w="12700" cap="flat" cmpd="sng" algn="ctr">
+          <a:solidFill>
+            <a:schemeClr val="phClr"/>
+          </a:solidFill>
+          <a:prstDash val="solid"/>
+          <a:miter lim="800000"/>
+        </a:ln>
+        <a:ln w="19050" cap="flat" cmpd="sng" algn="ctr">
+          <a:solidFill>
+            <a:schemeClr val="phClr"/>
+          </a:solidFill>
+          <a:prstDash val="solid"/>
+          <a:miter lim="800000"/>
+        </a:ln>
+      </a:lnStyleLst>
+      <a:effectStyleLst>
+        <a:effectStyle>
+          <a:effectLst/>
+        </a:effectStyle>
+        <a:effectStyle>
+          <a:effectLst/>
+        </a:effectStyle>
+        <a:effectStyle>
+          <a:effectLst>
+            <a:outerShdw blurRad="57150" dist="19050" dir="5400000" algn="ctr" rotWithShape="0">
+              <a:srgbClr val="000000">
+                <a:alpha val="63000"/>
+              </a:srgbClr>
+            </a:outerShdw>
+          </a:effectLst>
+        </a:effectStyle>
+      </a:effectStyleLst>
+      <a:bgFillStyleLst>
+        <a:solidFill>
+          <a:schemeClr val="phClr"/>
+        </a:solidFill>
+        <a:solidFill>
+          <a:schemeClr val="phClr">
+            <a:tint val="95000"/>
+            <a:satMod val="170000"/>
+          </a:schemeClr>
+        </a:solidFill>
+        <a:gradFill rotWithShape="1">
+          <a:gsLst>
+            <a:gs pos="0">
+              <a:schemeClr val="phClr">
+                <a:tint val="93000"/>
+                <a:satMod val="150000"/>
+                <a:shade val="98000"/>
+                <a:lumMod val="102000"/>
+              </a:schemeClr>
+            </a:gs>
+            <a:gs pos="50000">
+              <a:schemeClr val="phClr">
+                <a:tint val="98000"/>
+                <a:satMod val="130000"/>
+                <a:shade val="90000"/>
+                <a:lumMod val="103000"/>
+              </a:schemeClr>
+            </a:gs>
+            <a:gs pos="100000">
+              <a:schemeClr val="phClr">
+                <a:shade val="63000"/>
+                <a:satMod val="120000"/>
+              </a:schemeClr>
+            </a:gs>
+          </a:gsLst>
+          <a:lin ang="5400000" scaled="0"/>
+        </a:gradFill>
+      </a:bgFillStyleLst>
+    </a:fmtScheme>
+  </a:themeElements>
+  <a:objectDefaults/>
+  <a:extraClrSchemeLst/>
+  <a:extLst>
+    <a:ext uri="{05A4C25C-085E-4340-85A3-A5531E510DB2}">
+      <thm15:themeFamily xmlns:thm15="http://schemas.microsoft.com/office/thememl/2012/main" name="Office Theme" id="{62F939B6-93AF-4DB8-9C6B-D6C7DFDC589F}" vid="{4A3C46E8-61CC-4603-A589-7422A47A8E4A}"/>
+    </a:ext>
+  </a:extLst>
+</a:theme>
 </file>
--- a/docs/decks/L03.pptx
+++ b/docs/decks/L03.pptx
@@ -10532,7 +10532,7 @@
                 <a:ea typeface="Courier New" pitchFamily="34" charset="-122"/>
                 <a:cs typeface="Courier New" pitchFamily="34" charset="-120"/>
               </a:rPr>
-              <a:t>azure-gpt-4o</a:t>
+              <a:t>azure-gpt-5</a:t>
             </a:r>
             <a:endParaRPr lang="en-US" sz="1200" dirty="0"/>
           </a:p>
@@ -10572,7 +10572,7 @@
                 <a:ea typeface="Courier New" pitchFamily="34" charset="-122"/>
                 <a:cs typeface="Courier New" pitchFamily="34" charset="-120"/>
               </a:rPr>
-              <a:t>      model: azure/gpt-4o</a:t>
+              <a:t>      model: azure/gpt-5</a:t>
             </a:r>
             <a:endParaRPr lang="en-US" sz="1200" dirty="0"/>
           </a:p>

--- a/docs/decks/L03.pptx
+++ b/docs/decks/L03.pptx
@@ -4,9 +4,6 @@
   <p:sldMasterIdLst>
     <p:sldMasterId id="2147483648" r:id="rId1"/>
   </p:sldMasterIdLst>
-  <p:notesMasterIdLst>
-    <p:notesMasterId r:id="rId30"/>
-  </p:notesMasterIdLst>
   <p:sldIdLst>
     <p:sldId id="256" r:id="rId2"/>
     <p:sldId id="257" r:id="rId3"/>
@@ -37,6 +34,9 @@
     <p:sldId id="282" r:id="rId28"/>
     <p:sldId id="283" r:id="rId29"/>
   </p:sldIdLst>
+  <p:notesMasterIdLst>
+    <p:notesMasterId r:id="rId30"/>
+  </p:notesMasterIdLst>
   <p:sldSz cx="12192000" cy="6858000"/>
   <p:notesSz cx="6858000" cy="12192000"/>
   <p:defaultTextStyle>
@@ -131,11 +131,6 @@
       </a:defRPr>
     </a:lvl9pPr>
   </p:defaultTextStyle>
-  <p:extLst>
-    <p:ext uri="{EFAFB233-063F-42B5-8137-9DF3F51BA10A}">
-      <p15:sldGuideLst xmlns:p15="http://schemas.microsoft.com/office/powerpoint/2012/main"/>
-    </p:ext>
-  </p:extLst>
 </p:presentation>
 </file>
 
@@ -161,10 +156,234 @@
           <a:chExt cx="0" cy="0"/>
         </a:xfrm>
       </p:grpSpPr>
+      <p:sp>
+        <p:nvSpPr>
+          <p:cNvPr id="2" name="Header Placeholder 1"/>
+          <p:cNvSpPr>
+            <a:spLocks noGrp="1"/>
+          </p:cNvSpPr>
+          <p:nvPr>
+            <p:ph type="hdr" sz="quarter"/>
+          </p:nvPr>
+        </p:nvSpPr>
+        <p:spPr>
+          <a:xfrm>
+            <a:off x="0" y="0"/>
+            <a:ext cx="2971800" cy="458788"/>
+          </a:xfrm>
+          <a:prstGeom prst="rect">
+            <a:avLst/>
+          </a:prstGeom>
+        </p:spPr>
+        <p:txBody>
+          <a:bodyPr vert="horz" lIns="91440" tIns="45720" rIns="91440" bIns="45720" rtlCol="0"/>
+          <a:lstStyle>
+            <a:lvl1pPr algn="l">
+              <a:defRPr sz="1200"/>
+            </a:lvl1pPr>
+          </a:lstStyle>
+          <a:p>
+            <a:endParaRPr lang="en-US"/>
+          </a:p>
+        </p:txBody>
+      </p:sp>
+      <p:sp>
+        <p:nvSpPr>
+          <p:cNvPr id="3" name="Date Placeholder 2"/>
+          <p:cNvSpPr>
+            <a:spLocks noGrp="1"/>
+          </p:cNvSpPr>
+          <p:nvPr>
+            <p:ph type="dt" idx="1"/>
+          </p:nvPr>
+        </p:nvSpPr>
+        <p:spPr>
+          <a:xfrm>
+            <a:off x="3884613" y="0"/>
+            <a:ext cx="2971800" cy="458788"/>
+          </a:xfrm>
+          <a:prstGeom prst="rect">
+            <a:avLst/>
+          </a:prstGeom>
+        </p:spPr>
+        <p:txBody>
+          <a:bodyPr vert="horz" lIns="91440" tIns="45720" rIns="91440" bIns="45720" rtlCol="0"/>
+          <a:lstStyle>
+            <a:lvl1pPr algn="r">
+              <a:defRPr sz="1200"/>
+            </a:lvl1pPr>
+          </a:lstStyle>
+          <a:p>
+            <a:fld id="{5282F153-3F37-0F45-9E97-73ACFA13230C}" type="datetimeFigureOut">
+              <a:rPr lang="en-US"/>
+              <a:t>7/23/19</a:t>
+            </a:fld>
+            <a:endParaRPr lang="en-US"/>
+          </a:p>
+        </p:txBody>
+      </p:sp>
+      <p:sp>
+        <p:nvSpPr>
+          <p:cNvPr id="4" name="Slide Image Placeholder 3"/>
+          <p:cNvSpPr>
+            <a:spLocks noGrp="1" noRot="1" noChangeAspect="1"/>
+          </p:cNvSpPr>
+          <p:nvPr>
+            <p:ph type="sldImg" idx="2"/>
+          </p:nvPr>
+        </p:nvSpPr>
+        <p:spPr>
+          <a:xfrm>
+            <a:off x="685800" y="1143000"/>
+            <a:ext cx="5486400" cy="3086100"/>
+          </a:xfrm>
+          <a:prstGeom prst="rect">
+            <a:avLst/>
+          </a:prstGeom>
+          <a:noFill/>
+          <a:ln w="12700">
+            <a:solidFill>
+              <a:prstClr val="black"/>
+            </a:solidFill>
+          </a:ln>
+        </p:spPr>
+        <p:txBody>
+          <a:bodyPr vert="horz" lIns="91440" tIns="45720" rIns="91440" bIns="45720" rtlCol="0" anchor="ctr"/>
+          <a:lstStyle/>
+          <a:p>
+            <a:endParaRPr lang="en-US"/>
+          </a:p>
+        </p:txBody>
+      </p:sp>
+      <p:sp>
+        <p:nvSpPr>
+          <p:cNvPr id="5" name="Notes Placeholder 4"/>
+          <p:cNvSpPr>
+            <a:spLocks noGrp="1"/>
+          </p:cNvSpPr>
+          <p:nvPr>
+            <p:ph type="body" sz="quarter" idx="3"/>
+          </p:nvPr>
+        </p:nvSpPr>
+        <p:spPr>
+          <a:xfrm>
+            <a:off x="685800" y="4400550"/>
+            <a:ext cx="5486400" cy="3600450"/>
+          </a:xfrm>
+          <a:prstGeom prst="rect">
+            <a:avLst/>
+          </a:prstGeom>
+        </p:spPr>
+        <p:txBody>
+          <a:bodyPr vert="horz" lIns="91440" tIns="45720" rIns="91440" bIns="45720" rtlCol="0"/>
+          <a:lstStyle/>
+          <a:p>
+            <a:pPr lvl="0"/>
+            <a:r>
+              <a:rPr lang="en-US"/>
+              <a:t>Click to edit Master text styles</a:t>
+            </a:r>
+          </a:p>
+          <a:p>
+            <a:pPr lvl="1"/>
+            <a:r>
+              <a:rPr lang="en-US"/>
+              <a:t>Second level</a:t>
+            </a:r>
+          </a:p>
+          <a:p>
+            <a:pPr lvl="2"/>
+            <a:r>
+              <a:rPr lang="en-US"/>
+              <a:t>Third level</a:t>
+            </a:r>
+          </a:p>
+          <a:p>
+            <a:pPr lvl="3"/>
+            <a:r>
+              <a:rPr lang="en-US"/>
+              <a:t>Fourth level</a:t>
+            </a:r>
+          </a:p>
+          <a:p>
+            <a:pPr lvl="4"/>
+            <a:r>
+              <a:rPr lang="en-US"/>
+              <a:t>Fifth level</a:t>
+            </a:r>
+          </a:p>
+        </p:txBody>
+      </p:sp>
+      <p:sp>
+        <p:nvSpPr>
+          <p:cNvPr id="6" name="Footer Placeholder 5"/>
+          <p:cNvSpPr>
+            <a:spLocks noGrp="1"/>
+          </p:cNvSpPr>
+          <p:nvPr>
+            <p:ph type="ftr" sz="quarter" idx="4"/>
+          </p:nvPr>
+        </p:nvSpPr>
+        <p:spPr>
+          <a:xfrm>
+            <a:off x="0" y="8685213"/>
+            <a:ext cx="2971800" cy="458787"/>
+          </a:xfrm>
+          <a:prstGeom prst="rect">
+            <a:avLst/>
+          </a:prstGeom>
+        </p:spPr>
+        <p:txBody>
+          <a:bodyPr vert="horz" lIns="91440" tIns="45720" rIns="91440" bIns="45720" rtlCol="0" anchor="b"/>
+          <a:lstStyle>
+            <a:lvl1pPr algn="l">
+              <a:defRPr sz="1200"/>
+            </a:lvl1pPr>
+          </a:lstStyle>
+          <a:p>
+            <a:endParaRPr lang="en-US"/>
+          </a:p>
+        </p:txBody>
+      </p:sp>
+      <p:sp>
+        <p:nvSpPr>
+          <p:cNvPr id="7" name="Slide Number Placeholder 6"/>
+          <p:cNvSpPr>
+            <a:spLocks noGrp="1"/>
+          </p:cNvSpPr>
+          <p:nvPr>
+            <p:ph type="sldNum" sz="quarter" idx="5"/>
+          </p:nvPr>
+        </p:nvSpPr>
+        <p:spPr>
+          <a:xfrm>
+            <a:off x="3884613" y="8685213"/>
+            <a:ext cx="2971800" cy="458787"/>
+          </a:xfrm>
+          <a:prstGeom prst="rect">
+            <a:avLst/>
+          </a:prstGeom>
+        </p:spPr>
+        <p:txBody>
+          <a:bodyPr vert="horz" lIns="91440" tIns="45720" rIns="91440" bIns="45720" rtlCol="0" anchor="b"/>
+          <a:lstStyle>
+            <a:lvl1pPr algn="r">
+              <a:defRPr sz="1200"/>
+            </a:lvl1pPr>
+          </a:lstStyle>
+          <a:p>
+            <a:fld id="{CE5E9CC1-C706-0F49-92D6-E571CC5EEA8F}" type="slidenum">
+              <a:rPr lang="en-US"/>
+              <a:t>‹#›</a:t>
+            </a:fld>
+            <a:endParaRPr lang="en-US"/>
+          </a:p>
+        </p:txBody>
+      </p:sp>
     </p:spTree>
     <p:extLst>
       <p:ext uri="{BB962C8B-B14F-4D97-AF65-F5344CB8AC3E}">
-        <p14:creationId xmlns:p14="http://schemas.microsoft.com/office/powerpoint/2010/main" val="3646573509"/>
+        <p14:creationId xmlns:p14="http://schemas.microsoft.com/office/powerpoint/2010/main" val="1024086991"/>
       </p:ext>
     </p:extLst>
   </p:cSld>
@@ -308,6 +527,10 @@
           <a:bodyPr/>
           <a:lstStyle/>
           <a:p>
+            <a:r>
+              <a:rPr lang="en-US" dirty="0"/>
+              <a:t/>
+            </a:r>
             <a:endParaRPr lang="en-US" dirty="0"/>
           </a:p>
         </p:txBody>
@@ -392,6 +615,10 @@
           <a:bodyPr/>
           <a:lstStyle/>
           <a:p>
+            <a:r>
+              <a:rPr lang="en-US" dirty="0"/>
+              <a:t/>
+            </a:r>
             <a:endParaRPr lang="en-US" dirty="0"/>
           </a:p>
         </p:txBody>
@@ -476,6 +703,10 @@
           <a:bodyPr/>
           <a:lstStyle/>
           <a:p>
+            <a:r>
+              <a:rPr lang="en-US" dirty="0"/>
+              <a:t/>
+            </a:r>
             <a:endParaRPr lang="en-US" dirty="0"/>
           </a:p>
         </p:txBody>
@@ -560,6 +791,10 @@
           <a:bodyPr/>
           <a:lstStyle/>
           <a:p>
+            <a:r>
+              <a:rPr lang="en-US" dirty="0"/>
+              <a:t/>
+            </a:r>
             <a:endParaRPr lang="en-US" dirty="0"/>
           </a:p>
         </p:txBody>
@@ -644,6 +879,10 @@
           <a:bodyPr/>
           <a:lstStyle/>
           <a:p>
+            <a:r>
+              <a:rPr lang="en-US" dirty="0"/>
+              <a:t/>
+            </a:r>
             <a:endParaRPr lang="en-US" dirty="0"/>
           </a:p>
         </p:txBody>
@@ -728,6 +967,10 @@
           <a:bodyPr/>
           <a:lstStyle/>
           <a:p>
+            <a:r>
+              <a:rPr lang="en-US" dirty="0"/>
+              <a:t/>
+            </a:r>
             <a:endParaRPr lang="en-US" dirty="0"/>
           </a:p>
         </p:txBody>
@@ -812,6 +1055,10 @@
           <a:bodyPr/>
           <a:lstStyle/>
           <a:p>
+            <a:r>
+              <a:rPr lang="en-US" dirty="0"/>
+              <a:t/>
+            </a:r>
             <a:endParaRPr lang="en-US" dirty="0"/>
           </a:p>
         </p:txBody>
@@ -896,6 +1143,10 @@
           <a:bodyPr/>
           <a:lstStyle/>
           <a:p>
+            <a:r>
+              <a:rPr lang="en-US" dirty="0"/>
+              <a:t/>
+            </a:r>
             <a:endParaRPr lang="en-US" dirty="0"/>
           </a:p>
         </p:txBody>
@@ -980,6 +1231,10 @@
           <a:bodyPr/>
           <a:lstStyle/>
           <a:p>
+            <a:r>
+              <a:rPr lang="en-US" dirty="0"/>
+              <a:t/>
+            </a:r>
             <a:endParaRPr lang="en-US" dirty="0"/>
           </a:p>
         </p:txBody>
@@ -1064,6 +1319,10 @@
           <a:bodyPr/>
           <a:lstStyle/>
           <a:p>
+            <a:r>
+              <a:rPr lang="en-US" dirty="0"/>
+              <a:t/>
+            </a:r>
             <a:endParaRPr lang="en-US" dirty="0"/>
           </a:p>
         </p:txBody>
@@ -1148,6 +1407,10 @@
           <a:bodyPr/>
           <a:lstStyle/>
           <a:p>
+            <a:r>
+              <a:rPr lang="en-US" dirty="0"/>
+              <a:t/>
+            </a:r>
             <a:endParaRPr lang="en-US" dirty="0"/>
           </a:p>
         </p:txBody>
@@ -1232,6 +1495,10 @@
           <a:bodyPr/>
           <a:lstStyle/>
           <a:p>
+            <a:r>
+              <a:rPr lang="en-US" dirty="0"/>
+              <a:t/>
+            </a:r>
             <a:endParaRPr lang="en-US" dirty="0"/>
           </a:p>
         </p:txBody>
@@ -1316,6 +1583,10 @@
           <a:bodyPr/>
           <a:lstStyle/>
           <a:p>
+            <a:r>
+              <a:rPr lang="en-US" dirty="0"/>
+              <a:t/>
+            </a:r>
             <a:endParaRPr lang="en-US" dirty="0"/>
           </a:p>
         </p:txBody>
@@ -1400,6 +1671,10 @@
           <a:bodyPr/>
           <a:lstStyle/>
           <a:p>
+            <a:r>
+              <a:rPr lang="en-US" dirty="0"/>
+              <a:t/>
+            </a:r>
             <a:endParaRPr lang="en-US" dirty="0"/>
           </a:p>
         </p:txBody>
@@ -1484,6 +1759,10 @@
           <a:bodyPr/>
           <a:lstStyle/>
           <a:p>
+            <a:r>
+              <a:rPr lang="en-US" dirty="0"/>
+              <a:t/>
+            </a:r>
             <a:endParaRPr lang="en-US" dirty="0"/>
           </a:p>
         </p:txBody>
@@ -1568,6 +1847,10 @@
           <a:bodyPr/>
           <a:lstStyle/>
           <a:p>
+            <a:r>
+              <a:rPr lang="en-US" dirty="0"/>
+              <a:t/>
+            </a:r>
             <a:endParaRPr lang="en-US" dirty="0"/>
           </a:p>
         </p:txBody>
@@ -1652,6 +1935,10 @@
           <a:bodyPr/>
           <a:lstStyle/>
           <a:p>
+            <a:r>
+              <a:rPr lang="en-US" dirty="0"/>
+              <a:t/>
+            </a:r>
             <a:endParaRPr lang="en-US" dirty="0"/>
           </a:p>
         </p:txBody>
@@ -1736,6 +2023,10 @@
           <a:bodyPr/>
           <a:lstStyle/>
           <a:p>
+            <a:r>
+              <a:rPr lang="en-US" dirty="0"/>
+              <a:t/>
+            </a:r>
             <a:endParaRPr lang="en-US" dirty="0"/>
           </a:p>
         </p:txBody>
@@ -1820,6 +2111,10 @@
           <a:bodyPr/>
           <a:lstStyle/>
           <a:p>
+            <a:r>
+              <a:rPr lang="en-US" dirty="0"/>
+              <a:t/>
+            </a:r>
             <a:endParaRPr lang="en-US" dirty="0"/>
           </a:p>
         </p:txBody>
@@ -1904,6 +2199,10 @@
           <a:bodyPr/>
           <a:lstStyle/>
           <a:p>
+            <a:r>
+              <a:rPr lang="en-US" dirty="0"/>
+              <a:t/>
+            </a:r>
             <a:endParaRPr lang="en-US" dirty="0"/>
           </a:p>
         </p:txBody>
@@ -1988,6 +2287,10 @@
           <a:bodyPr/>
           <a:lstStyle/>
           <a:p>
+            <a:r>
+              <a:rPr lang="en-US" dirty="0"/>
+              <a:t/>
+            </a:r>
             <a:endParaRPr lang="en-US" dirty="0"/>
           </a:p>
         </p:txBody>
@@ -2072,6 +2375,10 @@
           <a:bodyPr/>
           <a:lstStyle/>
           <a:p>
+            <a:r>
+              <a:rPr lang="en-US" dirty="0"/>
+              <a:t/>
+            </a:r>
             <a:endParaRPr lang="en-US" dirty="0"/>
           </a:p>
         </p:txBody>
@@ -2156,6 +2463,10 @@
           <a:bodyPr/>
           <a:lstStyle/>
           <a:p>
+            <a:r>
+              <a:rPr lang="en-US" dirty="0"/>
+              <a:t/>
+            </a:r>
             <a:endParaRPr lang="en-US" dirty="0"/>
           </a:p>
         </p:txBody>
@@ -2240,6 +2551,10 @@
           <a:bodyPr/>
           <a:lstStyle/>
           <a:p>
+            <a:r>
+              <a:rPr lang="en-US" dirty="0"/>
+              <a:t/>
+            </a:r>
             <a:endParaRPr lang="en-US" dirty="0"/>
           </a:p>
         </p:txBody>
@@ -2324,6 +2639,10 @@
           <a:bodyPr/>
           <a:lstStyle/>
           <a:p>
+            <a:r>
+              <a:rPr lang="en-US" dirty="0"/>
+              <a:t/>
+            </a:r>
             <a:endParaRPr lang="en-US" dirty="0"/>
           </a:p>
         </p:txBody>
@@ -2408,6 +2727,10 @@
           <a:bodyPr/>
           <a:lstStyle/>
           <a:p>
+            <a:r>
+              <a:rPr lang="en-US" dirty="0"/>
+              <a:t/>
+            </a:r>
             <a:endParaRPr lang="en-US" dirty="0"/>
           </a:p>
         </p:txBody>
@@ -2492,6 +2815,10 @@
           <a:bodyPr/>
           <a:lstStyle/>
           <a:p>
+            <a:r>
+              <a:rPr lang="en-US" dirty="0"/>
+              <a:t/>
+            </a:r>
             <a:endParaRPr lang="en-US" dirty="0"/>
           </a:p>
         </p:txBody>
@@ -2576,6 +2903,10 @@
           <a:bodyPr/>
           <a:lstStyle/>
           <a:p>
+            <a:r>
+              <a:rPr lang="en-US" dirty="0"/>
+              <a:t/>
+            </a:r>
             <a:endParaRPr lang="en-US" dirty="0"/>
           </a:p>
         </p:txBody>
@@ -2658,7 +2989,7 @@
           </a:prstGeom>
           <a:extLst>
             <a:ext uri="{C572A759-6A51-4108-AA02-DFA0A04FC94B}">
-              <ma14:wrappingTextBoxFlag xmlns="" xmlns:ma14="http://schemas.microsoft.com/office/mac/drawingml/2011/main" val="0"/>
+              <ma14:wrappingTextBoxFlag xmlns:ma14="http://schemas.microsoft.com/office/mac/drawingml/2011/main" val="0"/>
             </a:ext>
           </a:extLst>
         </p:spPr>
@@ -2679,8 +3010,8 @@
           <a:p>
             <a:pPr algn="l"/>
             <a:fld id="{F7021451-1387-4CA6-816F-3879F97B5CBC}" type="slidenum">
-              <a:rPr lang="en-US" b="0"/>
-              <a:t>‹#›</a:t>
+              <a:rPr b="0" lang="en-US"/>
+              <a:t>1000</a:t>
             </a:fld>
             <a:endParaRPr lang="en-US"/>
           </a:p>
@@ -2702,7 +3033,6 @@
         <a:solidFill>
           <a:srgbClr val="000000"/>
         </a:solidFill>
-        <a:effectLst/>
       </p:bgPr>
     </p:bg>
     <p:spTree>
@@ -2721,14 +3051,14 @@
       </p:grpSpPr>
       <p:pic>
         <p:nvPicPr>
-          <p:cNvPr id="2" name="Image 0" descr="preencoded.png"/>
+          <p:cNvPr id="2" name="Image 0" descr="preencoded.png">    </p:cNvPr>
           <p:cNvPicPr>
             <a:picLocks noChangeAspect="1"/>
           </p:cNvPicPr>
           <p:nvPr/>
         </p:nvPicPr>
         <p:blipFill>
-          <a:blip r:embed="rId2"/>
+          <a:blip r:embed="rId1"/>
           <a:stretch>
             <a:fillRect/>
           </a:stretch>
@@ -2759,7 +3089,6 @@
         <a:solidFill>
           <a:srgbClr val="000000"/>
         </a:solidFill>
-        <a:effectLst/>
       </p:bgPr>
     </p:bg>
     <p:spTree>
@@ -2778,14 +3107,14 @@
       </p:grpSpPr>
       <p:pic>
         <p:nvPicPr>
-          <p:cNvPr id="2" name="Image 0" descr="preencoded.png"/>
+          <p:cNvPr id="2" name="Image 0" descr="preencoded.png">    </p:cNvPr>
           <p:cNvPicPr>
             <a:picLocks noChangeAspect="1"/>
           </p:cNvPicPr>
           <p:nvPr/>
         </p:nvPicPr>
         <p:blipFill>
-          <a:blip r:embed="rId2"/>
+          <a:blip r:embed="rId1"/>
           <a:stretch>
             <a:fillRect/>
           </a:stretch>
@@ -2816,7 +3145,6 @@
         <a:solidFill>
           <a:srgbClr val="000000"/>
         </a:solidFill>
-        <a:effectLst/>
       </p:bgPr>
     </p:bg>
     <p:spTree>
@@ -2835,14 +3163,14 @@
       </p:grpSpPr>
       <p:pic>
         <p:nvPicPr>
-          <p:cNvPr id="2" name="Image 0" descr="preencoded.png"/>
+          <p:cNvPr id="2" name="Image 0" descr="preencoded.png">    </p:cNvPr>
           <p:cNvPicPr>
             <a:picLocks noChangeAspect="1"/>
           </p:cNvPicPr>
           <p:nvPr/>
         </p:nvPicPr>
         <p:blipFill>
-          <a:blip r:embed="rId2"/>
+          <a:blip r:embed="rId1"/>
           <a:stretch>
             <a:fillRect/>
           </a:stretch>
@@ -2868,11 +3196,6 @@
 <file path=ppt/slideMasters/slideMaster1.xml><?xml version="1.0" encoding="utf-8"?>
 <p:sldMaster xmlns:a="http://schemas.openxmlformats.org/drawingml/2006/main" xmlns:r="http://schemas.openxmlformats.org/officeDocument/2006/relationships" xmlns:p="http://schemas.openxmlformats.org/presentationml/2006/main">
   <p:cSld>
-    <p:bg>
-      <p:bgRef idx="1001">
-        <a:schemeClr val="bg1"/>
-      </p:bgRef>
-    </p:bg>
     <p:spTree>
       <p:nvGrpSpPr>
         <p:cNvPr id="1" name=""/>
@@ -2907,7 +3230,7 @@
           </a:prstGeom>
           <a:extLst>
             <a:ext uri="{C572A759-6A51-4108-AA02-DFA0A04FC94B}">
-              <ma14:wrappingTextBoxFlag xmlns="" xmlns:ma14="http://schemas.microsoft.com/office/mac/drawingml/2011/main" val="0"/>
+              <ma14:wrappingTextBoxFlag xmlns:ma14="http://schemas.microsoft.com/office/mac/drawingml/2011/main" val="0"/>
             </a:ext>
           </a:extLst>
         </p:spPr>
@@ -2928,8 +3251,8 @@
           <a:p>
             <a:pPr algn="l"/>
             <a:fld id="{F7021451-1387-4CA6-816F-3879F97B5CBC}" type="slidenum">
-              <a:rPr lang="en-US" b="0"/>
-              <a:t>‹#›</a:t>
+              <a:rPr b="0" lang="en-US"/>
+              <a:t>null</a:t>
             </a:fld>
             <a:endParaRPr lang="en-US"/>
           </a:p>
@@ -3236,11 +3559,11 @@
           <a:bodyPr wrap="square" lIns="0" tIns="0" rIns="0" bIns="0" rtlCol="0" anchor="ctr"/>
           <a:lstStyle/>
           <a:p>
-            <a:pPr marL="0" indent="0">
-              <a:buNone/>
-            </a:pPr>
-            <a:r>
-              <a:rPr lang="en-US" sz="1200" b="1" kern="0" spc="400" dirty="0">
+            <a:pPr indent="0" marL="0">
+              <a:buNone/>
+            </a:pPr>
+            <a:r>
+              <a:rPr lang="en-US" sz="1200" b="1" spc="400" kern="0" dirty="0">
                 <a:solidFill>
                   <a:srgbClr val="FFFFFF"/>
                 </a:solidFill>
@@ -3275,11 +3598,11 @@
           <a:bodyPr wrap="square" lIns="0" tIns="0" rIns="0" bIns="0" rtlCol="0" anchor="ctr"/>
           <a:lstStyle/>
           <a:p>
-            <a:pPr marL="0" indent="0">
-              <a:buNone/>
-            </a:pPr>
-            <a:r>
-              <a:rPr lang="en-US" sz="1200" b="1" kern="0" spc="300" dirty="0">
+            <a:pPr indent="0" marL="0">
+              <a:buNone/>
+            </a:pPr>
+            <a:r>
+              <a:rPr lang="en-US" sz="1200" b="1" spc="300" kern="0" dirty="0">
                 <a:solidFill>
                   <a:srgbClr val="C4B3F5"/>
                 </a:solidFill>
@@ -3314,7 +3637,7 @@
           <a:bodyPr wrap="square" lIns="0" tIns="0" rIns="0" bIns="0" rtlCol="0" anchor="t"/>
           <a:lstStyle/>
           <a:p>
-            <a:pPr marL="0" indent="0">
+            <a:pPr indent="0" marL="0">
               <a:lnSpc>
                 <a:spcPct val="102000"/>
               </a:lnSpc>
@@ -3334,7 +3657,7 @@
             <a:endParaRPr lang="en-US" sz="3600" dirty="0"/>
           </a:p>
           <a:p>
-            <a:pPr marL="0" indent="0">
+            <a:pPr indent="0" marL="0">
               <a:lnSpc>
                 <a:spcPct val="102000"/>
               </a:lnSpc>
@@ -3376,7 +3699,7 @@
           <a:bodyPr wrap="square" lIns="0" tIns="0" rIns="0" bIns="0" rtlCol="0" anchor="ctr"/>
           <a:lstStyle/>
           <a:p>
-            <a:pPr marL="0" indent="0">
+            <a:pPr indent="0" marL="0">
               <a:lnSpc>
                 <a:spcPct val="120000"/>
               </a:lnSpc>
@@ -3444,7 +3767,7 @@
           <a:bodyPr wrap="square" lIns="0" tIns="0" rIns="0" bIns="0" rtlCol="0" anchor="ctr"/>
           <a:lstStyle/>
           <a:p>
-            <a:pPr marL="0" indent="0" algn="ctr">
+            <a:pPr algn="ctr" indent="0" marL="0">
               <a:buNone/>
             </a:pPr>
             <a:r>
@@ -3505,7 +3828,7 @@
           <a:bodyPr wrap="square" lIns="0" tIns="0" rIns="0" bIns="0" rtlCol="0" anchor="ctr"/>
           <a:lstStyle/>
           <a:p>
-            <a:pPr marL="0" indent="0" algn="ctr">
+            <a:pPr algn="ctr" indent="0" marL="0">
               <a:buNone/>
             </a:pPr>
             <a:r>
@@ -3570,7 +3893,7 @@
           <a:bodyPr wrap="square" lIns="0" tIns="0" rIns="0" bIns="0" rtlCol="0" anchor="ctr"/>
           <a:lstStyle/>
           <a:p>
-            <a:pPr marL="0" indent="0" algn="ctr">
+            <a:pPr algn="ctr" indent="0" marL="0">
               <a:buNone/>
             </a:pPr>
             <a:r>
@@ -3635,7 +3958,7 @@
           <a:bodyPr wrap="square" lIns="0" tIns="0" rIns="0" bIns="0" rtlCol="0" anchor="ctr"/>
           <a:lstStyle/>
           <a:p>
-            <a:pPr marL="0" indent="0" algn="ctr">
+            <a:pPr algn="ctr" indent="0" marL="0">
               <a:buNone/>
             </a:pPr>
             <a:r>
@@ -3700,7 +4023,7 @@
           <a:bodyPr wrap="square" lIns="0" tIns="0" rIns="0" bIns="0" rtlCol="0" anchor="ctr"/>
           <a:lstStyle/>
           <a:p>
-            <a:pPr marL="0" indent="0" algn="ctr">
+            <a:pPr algn="ctr" indent="0" marL="0">
               <a:buNone/>
             </a:pPr>
             <a:r>
@@ -3765,7 +4088,7 @@
           <a:bodyPr wrap="square" lIns="0" tIns="0" rIns="0" bIns="0" rtlCol="0" anchor="ctr"/>
           <a:lstStyle/>
           <a:p>
-            <a:pPr marL="0" indent="0" algn="ctr">
+            <a:pPr algn="ctr" indent="0" marL="0">
               <a:buNone/>
             </a:pPr>
             <a:r>
@@ -3851,7 +4174,7 @@
           <a:bodyPr wrap="square" lIns="0" tIns="0" rIns="0" bIns="0" rtlCol="0" anchor="ctr"/>
           <a:lstStyle/>
           <a:p>
-            <a:pPr marL="0" indent="0" algn="l">
+            <a:pPr algn="l" indent="0" marL="0">
               <a:buNone/>
             </a:pPr>
             <a:r>
@@ -3890,7 +4213,7 @@
           <a:bodyPr wrap="square" lIns="0" tIns="0" rIns="0" bIns="0" rtlCol="0" anchor="ctr"/>
           <a:lstStyle/>
           <a:p>
-            <a:pPr marL="0" indent="0">
+            <a:pPr indent="0" marL="0">
               <a:buNone/>
             </a:pPr>
             <a:r>
@@ -3956,11 +4279,11 @@
           <a:bodyPr wrap="square" lIns="0" tIns="0" rIns="0" bIns="0" rtlCol="0" anchor="ctr"/>
           <a:lstStyle/>
           <a:p>
-            <a:pPr marL="0" indent="0" algn="ctr">
-              <a:buNone/>
-            </a:pPr>
-            <a:r>
-              <a:rPr lang="en-US" sz="900" b="1" kern="0" spc="100" dirty="0">
+            <a:pPr algn="ctr" indent="0" marL="0">
+              <a:buNone/>
+            </a:pPr>
+            <a:r>
+              <a:rPr lang="en-US" sz="900" b="1" spc="100" kern="0" dirty="0">
                 <a:solidFill>
                   <a:srgbClr val="5A05F4"/>
                 </a:solidFill>
@@ -3976,14 +4299,14 @@
       </p:sp>
       <p:pic>
         <p:nvPicPr>
-          <p:cNvPr id="7" name="Image 0" descr="preencoded.png"/>
+          <p:cNvPr id="7" name="Image 0" descr="preencoded.png">    </p:cNvPr>
           <p:cNvPicPr>
             <a:picLocks noChangeAspect="1"/>
           </p:cNvPicPr>
           <p:nvPr/>
         </p:nvPicPr>
         <p:blipFill>
-          <a:blip r:embed="rId3"/>
+          <a:blip r:embed="rId1"/>
           <a:stretch>
             <a:fillRect/>
           </a:stretch>
@@ -4046,7 +4369,7 @@
           <a:bodyPr wrap="square" lIns="0" tIns="0" rIns="0" bIns="0" rtlCol="0" anchor="t"/>
           <a:lstStyle/>
           <a:p>
-            <a:pPr marL="0" indent="0">
+            <a:pPr indent="0" marL="0">
               <a:lnSpc>
                 <a:spcPct val="130000"/>
               </a:lnSpc>
@@ -4066,7 +4389,7 @@
             <a:endParaRPr lang="en-US" sz="1150" dirty="0"/>
           </a:p>
           <a:p>
-            <a:pPr marL="0" indent="0">
+            <a:pPr indent="0" marL="0">
               <a:lnSpc>
                 <a:spcPct val="130000"/>
               </a:lnSpc>
@@ -4086,7 +4409,7 @@
             <a:endParaRPr lang="en-US" sz="1150" dirty="0"/>
           </a:p>
           <a:p>
-            <a:pPr marL="0" indent="0">
+            <a:pPr indent="0" marL="0">
               <a:lnSpc>
                 <a:spcPct val="130000"/>
               </a:lnSpc>
@@ -4103,6 +4426,12 @@
               </a:rPr>
               <a:t>  if (def != "mock") return def;   </a:t>
             </a:r>
+            <a:pPr indent="0" marL="0">
+              <a:lnSpc>
+                <a:spcPct val="130000"/>
+              </a:lnSpc>
+              <a:buNone/>
+            </a:pPr>
             <a:r>
               <a:rPr lang="en-US" sz="1150" dirty="0">
                 <a:solidFill>
@@ -4117,7 +4446,7 @@
             <a:endParaRPr lang="en-US" sz="1150" dirty="0"/>
           </a:p>
           <a:p>
-            <a:pPr marL="0" indent="0">
+            <a:pPr indent="0" marL="0">
               <a:lnSpc>
                 <a:spcPct val="130000"/>
               </a:lnSpc>
@@ -4137,7 +4466,7 @@
             <a:endParaRPr lang="en-US" sz="1150" dirty="0"/>
           </a:p>
           <a:p>
-            <a:pPr marL="0" indent="0">
+            <a:pPr indent="0" marL="0">
               <a:lnSpc>
                 <a:spcPct val="130000"/>
               </a:lnSpc>
@@ -4157,7 +4486,7 @@
             <a:endParaRPr lang="en-US" sz="1150" dirty="0"/>
           </a:p>
           <a:p>
-            <a:pPr marL="0" indent="0">
+            <a:pPr indent="0" marL="0">
               <a:lnSpc>
                 <a:spcPct val="130000"/>
               </a:lnSpc>
@@ -4177,7 +4506,7 @@
             <a:endParaRPr lang="en-US" sz="1150" dirty="0"/>
           </a:p>
           <a:p>
-            <a:pPr marL="0" indent="0">
+            <a:pPr indent="0" marL="0">
               <a:lnSpc>
                 <a:spcPct val="130000"/>
               </a:lnSpc>
@@ -4197,7 +4526,7 @@
             <a:endParaRPr lang="en-US" sz="1150" dirty="0"/>
           </a:p>
           <a:p>
-            <a:pPr marL="0" indent="0">
+            <a:pPr indent="0" marL="0">
               <a:lnSpc>
                 <a:spcPct val="130000"/>
               </a:lnSpc>
@@ -4261,7 +4590,7 @@
           <a:bodyPr wrap="square" lIns="0" tIns="0" rIns="0" bIns="0" rtlCol="0" anchor="ctr"/>
           <a:lstStyle/>
           <a:p>
-            <a:pPr marL="0" indent="0" algn="ctr">
+            <a:pPr algn="ctr" indent="0" marL="0">
               <a:buNone/>
             </a:pPr>
             <a:r>
@@ -4365,7 +4694,7 @@
           <a:bodyPr wrap="square" lIns="0" tIns="0" rIns="0" bIns="0" rtlCol="0" anchor="ctr"/>
           <a:lstStyle/>
           <a:p>
-            <a:pPr marL="0" indent="0" algn="ctr">
+            <a:pPr algn="ctr" indent="0" marL="0">
               <a:buNone/>
             </a:pPr>
             <a:r>
@@ -4469,7 +4798,7 @@
           <a:bodyPr wrap="square" lIns="0" tIns="0" rIns="0" bIns="0" rtlCol="0" anchor="ctr"/>
           <a:lstStyle/>
           <a:p>
-            <a:pPr marL="0" indent="0" algn="ctr">
+            <a:pPr algn="ctr" indent="0" marL="0">
               <a:buNone/>
             </a:pPr>
             <a:r>
@@ -4535,7 +4864,7 @@
           <a:bodyPr wrap="square" lIns="0" tIns="0" rIns="0" bIns="0" rtlCol="0" anchor="ctr"/>
           <a:lstStyle/>
           <a:p>
-            <a:pPr marL="0" indent="0">
+            <a:pPr indent="0" marL="0">
               <a:lnSpc>
                 <a:spcPct val="112000"/>
               </a:lnSpc>
@@ -4576,7 +4905,7 @@
           </a:prstGeom>
           <a:extLst>
             <a:ext uri="{C572A759-6A51-4108-AA02-DFA0A04FC94B}">
-              <ma14:wrappingTextBoxFlag xmlns="" xmlns:ma14="http://schemas.microsoft.com/office/mac/drawingml/2011/main" val="0"/>
+              <ma14:wrappingTextBoxFlag xmlns:ma14="http://schemas.microsoft.com/office/mac/drawingml/2011/main" val="0"/>
             </a:ext>
           </a:extLst>
         </p:spPr>
@@ -4597,7 +4926,7 @@
           <a:p>
             <a:pPr algn="l"/>
             <a:fld id="{F7021451-1387-4CA6-816F-3879F97B5CBC}" type="slidenum">
-              <a:rPr lang="en-US" b="0"/>
+              <a:rPr b="0" lang="en-US"/>
               <a:t>10</a:t>
             </a:fld>
             <a:endParaRPr lang="en-US"/>
@@ -4672,7 +5001,7 @@
           <a:bodyPr wrap="square" lIns="0" tIns="0" rIns="0" bIns="0" rtlCol="0" anchor="ctr"/>
           <a:lstStyle/>
           <a:p>
-            <a:pPr marL="0" indent="0" algn="l">
+            <a:pPr algn="l" indent="0" marL="0">
               <a:buNone/>
             </a:pPr>
             <a:r>
@@ -4711,7 +5040,7 @@
           <a:bodyPr wrap="square" lIns="0" tIns="0" rIns="0" bIns="0" rtlCol="0" anchor="ctr"/>
           <a:lstStyle/>
           <a:p>
-            <a:pPr marL="0" indent="0">
+            <a:pPr indent="0" marL="0">
               <a:buNone/>
             </a:pPr>
             <a:r>
@@ -4723,7 +5052,7 @@
                 <a:ea typeface="Unbounded" pitchFamily="34" charset="-122"/>
                 <a:cs typeface="Unbounded" pitchFamily="34" charset="-120"/>
               </a:rPr>
-              <a:t>Що ще каже цей код — до того, як вкусить</a:t>
+              <a:t>Що ще каже цей код — властивості, які варто знати</a:t>
             </a:r>
             <a:endParaRPr lang="en-US" sz="2400" dirty="0"/>
           </a:p>
@@ -4777,11 +5106,11 @@
           <a:bodyPr wrap="square" lIns="0" tIns="0" rIns="0" bIns="0" rtlCol="0" anchor="ctr"/>
           <a:lstStyle/>
           <a:p>
-            <a:pPr marL="0" indent="0" algn="ctr">
-              <a:buNone/>
-            </a:pPr>
-            <a:r>
-              <a:rPr lang="en-US" sz="900" b="1" kern="0" spc="100" dirty="0">
+            <a:pPr algn="ctr" indent="0" marL="0">
+              <a:buNone/>
+            </a:pPr>
+            <a:r>
+              <a:rPr lang="en-US" sz="900" b="1" spc="100" kern="0" dirty="0">
                 <a:solidFill>
                   <a:srgbClr val="5A05F4"/>
                 </a:solidFill>
@@ -4797,14 +5126,14 @@
       </p:sp>
       <p:pic>
         <p:nvPicPr>
-          <p:cNvPr id="7" name="Image 0" descr="preencoded.png"/>
+          <p:cNvPr id="7" name="Image 0" descr="preencoded.png">    </p:cNvPr>
           <p:cNvPicPr>
             <a:picLocks noChangeAspect="1"/>
           </p:cNvPicPr>
           <p:nvPr/>
         </p:nvPicPr>
         <p:blipFill>
-          <a:blip r:embed="rId3"/>
+          <a:blip r:embed="rId1"/>
           <a:stretch>
             <a:fillRect/>
           </a:stretch>
@@ -4882,7 +5211,7 @@
           <a:bodyPr wrap="square" lIns="0" tIns="0" rIns="0" bIns="0" rtlCol="0" anchor="ctr"/>
           <a:lstStyle/>
           <a:p>
-            <a:pPr marL="0" indent="0" algn="ctr">
+            <a:pPr algn="ctr" indent="0" marL="0">
               <a:buNone/>
             </a:pPr>
             <a:r>
@@ -4921,7 +5250,7 @@
           <a:bodyPr wrap="square" lIns="0" tIns="0" rIns="0" bIns="0" rtlCol="0" anchor="ctr"/>
           <a:lstStyle/>
           <a:p>
-            <a:pPr marL="0" indent="0">
+            <a:pPr indent="0" marL="0">
               <a:buNone/>
             </a:pPr>
             <a:r>
@@ -4960,7 +5289,7 @@
           <a:bodyPr wrap="square" lIns="0" tIns="0" rIns="0" bIns="0" rtlCol="0" anchor="t"/>
           <a:lstStyle/>
           <a:p>
-            <a:pPr marL="0" indent="0">
+            <a:pPr indent="0" marL="0">
               <a:lnSpc>
                 <a:spcPct val="108000"/>
               </a:lnSpc>
@@ -5044,7 +5373,7 @@
           <a:bodyPr wrap="square" lIns="0" tIns="0" rIns="0" bIns="0" rtlCol="0" anchor="ctr"/>
           <a:lstStyle/>
           <a:p>
-            <a:pPr marL="0" indent="0" algn="ctr">
+            <a:pPr algn="ctr" indent="0" marL="0">
               <a:buNone/>
             </a:pPr>
             <a:r>
@@ -5083,7 +5412,7 @@
           <a:bodyPr wrap="square" lIns="0" tIns="0" rIns="0" bIns="0" rtlCol="0" anchor="ctr"/>
           <a:lstStyle/>
           <a:p>
-            <a:pPr marL="0" indent="0">
+            <a:pPr indent="0" marL="0">
               <a:buNone/>
             </a:pPr>
             <a:r>
@@ -5122,7 +5451,7 @@
           <a:bodyPr wrap="square" lIns="0" tIns="0" rIns="0" bIns="0" rtlCol="0" anchor="t"/>
           <a:lstStyle/>
           <a:p>
-            <a:pPr marL="0" indent="0">
+            <a:pPr indent="0" marL="0">
               <a:lnSpc>
                 <a:spcPct val="108000"/>
               </a:lnSpc>
@@ -5206,7 +5535,7 @@
           <a:bodyPr wrap="square" lIns="0" tIns="0" rIns="0" bIns="0" rtlCol="0" anchor="ctr"/>
           <a:lstStyle/>
           <a:p>
-            <a:pPr marL="0" indent="0" algn="ctr">
+            <a:pPr algn="ctr" indent="0" marL="0">
               <a:buNone/>
             </a:pPr>
             <a:r>
@@ -5245,7 +5574,7 @@
           <a:bodyPr wrap="square" lIns="0" tIns="0" rIns="0" bIns="0" rtlCol="0" anchor="ctr"/>
           <a:lstStyle/>
           <a:p>
-            <a:pPr marL="0" indent="0">
+            <a:pPr indent="0" marL="0">
               <a:buNone/>
             </a:pPr>
             <a:r>
@@ -5284,7 +5613,7 @@
           <a:bodyPr wrap="square" lIns="0" tIns="0" rIns="0" bIns="0" rtlCol="0" anchor="t"/>
           <a:lstStyle/>
           <a:p>
-            <a:pPr marL="0" indent="0">
+            <a:pPr indent="0" marL="0">
               <a:lnSpc>
                 <a:spcPct val="108000"/>
               </a:lnSpc>
@@ -5314,7 +5643,7 @@
         <p:spPr>
           <a:xfrm>
             <a:off x="566928" y="3977640"/>
-            <a:ext cx="10927080" cy="1371600"/>
+            <a:ext cx="11064240" cy="1371600"/>
           </a:xfrm>
           <a:prstGeom prst="roundRect">
             <a:avLst>
@@ -5348,11 +5677,11 @@
           <a:bodyPr wrap="square" lIns="0" tIns="0" rIns="0" bIns="0" rtlCol="0" anchor="ctr"/>
           <a:lstStyle/>
           <a:p>
-            <a:pPr marL="0" indent="0">
-              <a:buNone/>
-            </a:pPr>
-            <a:r>
-              <a:rPr lang="en-US" sz="950" b="1" kern="0" spc="150" dirty="0">
+            <a:pPr indent="0" marL="0">
+              <a:buNone/>
+            </a:pPr>
+            <a:r>
+              <a:rPr lang="en-US" sz="950" b="1" spc="150" kern="0" dirty="0">
                 <a:solidFill>
                   <a:srgbClr val="FFFFFF"/>
                 </a:solidFill>
@@ -5387,7 +5716,7 @@
           <a:bodyPr wrap="square" lIns="0" tIns="0" rIns="0" bIns="0" rtlCol="0" anchor="ctr"/>
           <a:lstStyle/>
           <a:p>
-            <a:pPr marL="0" indent="0">
+            <a:pPr indent="0" marL="0">
               <a:lnSpc>
                 <a:spcPct val="112000"/>
               </a:lnSpc>
@@ -5410,7 +5739,7 @@
       </p:sp>
       <p:sp>
         <p:nvSpPr>
-          <p:cNvPr id="26" name="Slide Number Placeholder 0"/>
+          <p:cNvPr id="25" name="Slide Number Placeholder 0"/>
           <p:cNvSpPr>
             <a:spLocks noGrp="1"/>
           </p:cNvSpPr>
@@ -5428,7 +5757,7 @@
           </a:prstGeom>
           <a:extLst>
             <a:ext uri="{C572A759-6A51-4108-AA02-DFA0A04FC94B}">
-              <ma14:wrappingTextBoxFlag xmlns="" xmlns:ma14="http://schemas.microsoft.com/office/mac/drawingml/2011/main" val="0"/>
+              <ma14:wrappingTextBoxFlag xmlns:ma14="http://schemas.microsoft.com/office/mac/drawingml/2011/main" val="0"/>
             </a:ext>
           </a:extLst>
         </p:spPr>
@@ -5449,7 +5778,7 @@
           <a:p>
             <a:pPr algn="l"/>
             <a:fld id="{F7021451-1387-4CA6-816F-3879F97B5CBC}" type="slidenum">
-              <a:rPr lang="en-US" b="0"/>
+              <a:rPr b="0" lang="en-US"/>
               <a:t>11</a:t>
             </a:fld>
             <a:endParaRPr lang="en-US"/>
@@ -5524,7 +5853,7 @@
           <a:bodyPr wrap="square" lIns="0" tIns="0" rIns="0" bIns="0" rtlCol="0" anchor="ctr"/>
           <a:lstStyle/>
           <a:p>
-            <a:pPr marL="0" indent="0" algn="l">
+            <a:pPr algn="l" indent="0" marL="0">
               <a:buNone/>
             </a:pPr>
             <a:r>
@@ -5563,7 +5892,7 @@
           <a:bodyPr wrap="square" lIns="0" tIns="0" rIns="0" bIns="0" rtlCol="0" anchor="ctr"/>
           <a:lstStyle/>
           <a:p>
-            <a:pPr marL="0" indent="0">
+            <a:pPr indent="0" marL="0">
               <a:buNone/>
             </a:pPr>
             <a:r>
@@ -5629,11 +5958,11 @@
           <a:bodyPr wrap="square" lIns="0" tIns="0" rIns="0" bIns="0" rtlCol="0" anchor="ctr"/>
           <a:lstStyle/>
           <a:p>
-            <a:pPr marL="0" indent="0" algn="ctr">
-              <a:buNone/>
-            </a:pPr>
-            <a:r>
-              <a:rPr lang="en-US" sz="900" b="1" kern="0" spc="100" dirty="0">
+            <a:pPr algn="ctr" indent="0" marL="0">
+              <a:buNone/>
+            </a:pPr>
+            <a:r>
+              <a:rPr lang="en-US" sz="900" b="1" spc="100" kern="0" dirty="0">
                 <a:solidFill>
                   <a:srgbClr val="5A05F4"/>
                 </a:solidFill>
@@ -5649,14 +5978,14 @@
       </p:sp>
       <p:pic>
         <p:nvPicPr>
-          <p:cNvPr id="7" name="Image 0" descr="preencoded.png"/>
+          <p:cNvPr id="7" name="Image 0" descr="preencoded.png">    </p:cNvPr>
           <p:cNvPicPr>
             <a:picLocks noChangeAspect="1"/>
           </p:cNvPicPr>
           <p:nvPr/>
         </p:nvPicPr>
         <p:blipFill>
-          <a:blip r:embed="rId3"/>
+          <a:blip r:embed="rId1"/>
           <a:stretch>
             <a:fillRect/>
           </a:stretch>
@@ -5714,7 +6043,7 @@
           <a:bodyPr wrap="square" lIns="0" tIns="0" rIns="0" bIns="0" rtlCol="0" anchor="ctr"/>
           <a:lstStyle/>
           <a:p>
-            <a:pPr marL="0" indent="0">
+            <a:pPr indent="0" marL="0">
               <a:buNone/>
             </a:pPr>
             <a:r>
@@ -5753,7 +6082,7 @@
           <a:bodyPr wrap="square" lIns="0" tIns="0" rIns="0" bIns="0" rtlCol="0" anchor="ctr"/>
           <a:lstStyle/>
           <a:p>
-            <a:pPr marL="0" indent="0">
+            <a:pPr indent="0" marL="0">
               <a:buNone/>
             </a:pPr>
             <a:r>
@@ -5814,7 +6143,7 @@
           <a:bodyPr wrap="square" lIns="0" tIns="0" rIns="0" bIns="0" rtlCol="0" anchor="ctr"/>
           <a:lstStyle/>
           <a:p>
-            <a:pPr marL="0" indent="0">
+            <a:pPr indent="0" marL="0">
               <a:buNone/>
             </a:pPr>
             <a:r>
@@ -5853,7 +6182,7 @@
           <a:bodyPr wrap="square" lIns="0" tIns="0" rIns="0" bIns="0" rtlCol="0" anchor="ctr"/>
           <a:lstStyle/>
           <a:p>
-            <a:pPr marL="0" indent="0">
+            <a:pPr indent="0" marL="0">
               <a:buNone/>
             </a:pPr>
             <a:r>
@@ -5914,7 +6243,7 @@
           <a:bodyPr wrap="square" lIns="0" tIns="0" rIns="0" bIns="0" rtlCol="0" anchor="ctr"/>
           <a:lstStyle/>
           <a:p>
-            <a:pPr marL="0" indent="0">
+            <a:pPr indent="0" marL="0">
               <a:buNone/>
             </a:pPr>
             <a:r>
@@ -5953,7 +6282,7 @@
           <a:bodyPr wrap="square" lIns="0" tIns="0" rIns="0" bIns="0" rtlCol="0" anchor="ctr"/>
           <a:lstStyle/>
           <a:p>
-            <a:pPr marL="0" indent="0">
+            <a:pPr indent="0" marL="0">
               <a:buNone/>
             </a:pPr>
             <a:r>
@@ -6000,14 +6329,34 @@
       </p:sp>
       <p:sp>
         <p:nvSpPr>
-          <p:cNvPr id="18" name="Text 15"/>
-          <p:cNvSpPr/>
-          <p:nvPr/>
-        </p:nvSpPr>
-        <p:spPr>
-          <a:xfrm>
-            <a:off x="786384" y="4882896"/>
-            <a:ext cx="10625328" cy="219456"/>
+          <p:cNvPr id="18" name="Shape 15"/>
+          <p:cNvSpPr/>
+          <p:nvPr/>
+        </p:nvSpPr>
+        <p:spPr>
+          <a:xfrm>
+            <a:off x="749808" y="5148072"/>
+            <a:ext cx="310896" cy="310896"/>
+          </a:xfrm>
+          <a:prstGeom prst="ellipse">
+            <a:avLst/>
+          </a:prstGeom>
+          <a:solidFill>
+            <a:srgbClr val="106B41"/>
+          </a:solidFill>
+          <a:ln/>
+        </p:spPr>
+      </p:sp>
+      <p:sp>
+        <p:nvSpPr>
+          <p:cNvPr id="19" name="Text 16"/>
+          <p:cNvSpPr/>
+          <p:nvPr/>
+        </p:nvSpPr>
+        <p:spPr>
+          <a:xfrm>
+            <a:off x="749808" y="5148072"/>
+            <a:ext cx="310896" cy="310896"/>
           </a:xfrm>
           <a:prstGeom prst="rect">
             <a:avLst/>
@@ -6019,11 +6368,50 @@
           <a:bodyPr wrap="square" lIns="0" tIns="0" rIns="0" bIns="0" rtlCol="0" anchor="ctr"/>
           <a:lstStyle/>
           <a:p>
-            <a:pPr marL="0" indent="0">
-              <a:buNone/>
-            </a:pPr>
-            <a:r>
-              <a:rPr lang="en-US" sz="950" b="1" kern="0" spc="150" dirty="0">
+            <a:pPr algn="ctr" indent="0" marL="0">
+              <a:buNone/>
+            </a:pPr>
+            <a:r>
+              <a:rPr lang="en-US" sz="1200" b="1" dirty="0">
+                <a:solidFill>
+                  <a:srgbClr val="FFFFFF"/>
+                </a:solidFill>
+                <a:latin typeface="Arial" pitchFamily="34" charset="0"/>
+                <a:ea typeface="Arial" pitchFamily="34" charset="-122"/>
+                <a:cs typeface="Arial" pitchFamily="34" charset="-120"/>
+              </a:rPr>
+              <a:t>◆</a:t>
+            </a:r>
+            <a:endParaRPr lang="en-US" sz="1200" dirty="0"/>
+          </a:p>
+        </p:txBody>
+      </p:sp>
+      <p:sp>
+        <p:nvSpPr>
+          <p:cNvPr id="20" name="Text 17"/>
+          <p:cNvSpPr/>
+          <p:nvPr/>
+        </p:nvSpPr>
+        <p:spPr>
+          <a:xfrm>
+            <a:off x="1243584" y="4882896"/>
+            <a:ext cx="10168128" cy="219456"/>
+          </a:xfrm>
+          <a:prstGeom prst="rect">
+            <a:avLst/>
+          </a:prstGeom>
+          <a:noFill/>
+          <a:ln/>
+        </p:spPr>
+        <p:txBody>
+          <a:bodyPr wrap="square" lIns="0" tIns="0" rIns="0" bIns="0" rtlCol="0" anchor="ctr"/>
+          <a:lstStyle/>
+          <a:p>
+            <a:pPr indent="0" marL="0">
+              <a:buNone/>
+            </a:pPr>
+            <a:r>
+              <a:rPr lang="en-US" sz="950" b="1" spc="150" kern="0" dirty="0">
                 <a:solidFill>
                   <a:srgbClr val="106B41"/>
                 </a:solidFill>
@@ -6039,14 +6427,14 @@
       </p:sp>
       <p:sp>
         <p:nvSpPr>
-          <p:cNvPr id="19" name="Text 16"/>
-          <p:cNvSpPr/>
-          <p:nvPr/>
-        </p:nvSpPr>
-        <p:spPr>
-          <a:xfrm>
-            <a:off x="786384" y="5138928"/>
-            <a:ext cx="10625328" cy="585216"/>
+          <p:cNvPr id="21" name="Text 18"/>
+          <p:cNvSpPr/>
+          <p:nvPr/>
+        </p:nvSpPr>
+        <p:spPr>
+          <a:xfrm>
+            <a:off x="1243584" y="5138928"/>
+            <a:ext cx="10168128" cy="585216"/>
           </a:xfrm>
           <a:prstGeom prst="rect">
             <a:avLst/>
@@ -6058,7 +6446,7 @@
           <a:bodyPr wrap="square" lIns="0" tIns="0" rIns="0" bIns="0" rtlCol="0" anchor="ctr"/>
           <a:lstStyle/>
           <a:p>
-            <a:pPr marL="0" indent="0">
+            <a:pPr indent="0" marL="0">
               <a:lnSpc>
                 <a:spcPct val="112000"/>
               </a:lnSpc>
@@ -6099,7 +6487,7 @@
           </a:prstGeom>
           <a:extLst>
             <a:ext uri="{C572A759-6A51-4108-AA02-DFA0A04FC94B}">
-              <ma14:wrappingTextBoxFlag xmlns="" xmlns:ma14="http://schemas.microsoft.com/office/mac/drawingml/2011/main" val="0"/>
+              <ma14:wrappingTextBoxFlag xmlns:ma14="http://schemas.microsoft.com/office/mac/drawingml/2011/main" val="0"/>
             </a:ext>
           </a:extLst>
         </p:spPr>
@@ -6120,7 +6508,7 @@
           <a:p>
             <a:pPr algn="l"/>
             <a:fld id="{F7021451-1387-4CA6-816F-3879F97B5CBC}" type="slidenum">
-              <a:rPr lang="en-US" b="0"/>
+              <a:rPr b="0" lang="en-US"/>
               <a:t>12</a:t>
             </a:fld>
             <a:endParaRPr lang="en-US"/>
@@ -6195,7 +6583,7 @@
           <a:bodyPr wrap="square" lIns="0" tIns="0" rIns="0" bIns="0" rtlCol="0" anchor="ctr"/>
           <a:lstStyle/>
           <a:p>
-            <a:pPr marL="0" indent="0" algn="l">
+            <a:pPr algn="l" indent="0" marL="0">
               <a:buNone/>
             </a:pPr>
             <a:r>
@@ -6234,7 +6622,7 @@
           <a:bodyPr wrap="square" lIns="0" tIns="0" rIns="0" bIns="0" rtlCol="0" anchor="ctr"/>
           <a:lstStyle/>
           <a:p>
-            <a:pPr marL="0" indent="0">
+            <a:pPr indent="0" marL="0">
               <a:buNone/>
             </a:pPr>
             <a:r>
@@ -6300,11 +6688,11 @@
           <a:bodyPr wrap="square" lIns="0" tIns="0" rIns="0" bIns="0" rtlCol="0" anchor="ctr"/>
           <a:lstStyle/>
           <a:p>
-            <a:pPr marL="0" indent="0" algn="ctr">
-              <a:buNone/>
-            </a:pPr>
-            <a:r>
-              <a:rPr lang="en-US" sz="900" b="1" kern="0" spc="100" dirty="0">
+            <a:pPr algn="ctr" indent="0" marL="0">
+              <a:buNone/>
+            </a:pPr>
+            <a:r>
+              <a:rPr lang="en-US" sz="900" b="1" spc="100" kern="0" dirty="0">
                 <a:solidFill>
                   <a:srgbClr val="5A05F4"/>
                 </a:solidFill>
@@ -6320,14 +6708,14 @@
       </p:sp>
       <p:pic>
         <p:nvPicPr>
-          <p:cNvPr id="7" name="Image 0" descr="preencoded.png"/>
+          <p:cNvPr id="7" name="Image 0" descr="preencoded.png">    </p:cNvPr>
           <p:cNvPicPr>
             <a:picLocks noChangeAspect="1"/>
           </p:cNvPicPr>
           <p:nvPr/>
         </p:nvPicPr>
         <p:blipFill>
-          <a:blip r:embed="rId3"/>
+          <a:blip r:embed="rId1"/>
           <a:stretch>
             <a:fillRect/>
           </a:stretch>
@@ -6358,34 +6746,16 @@
         </p:nvGraphicFramePr>
         <p:xfrm>
           <a:off x="566928" y="1737360"/>
-          <a:ext cx="11064240" cy="2194560"/>
+          <a:ext cx="11064240" cy="914400"/>
         </p:xfrm>
         <a:graphic>
           <a:graphicData uri="http://schemas.openxmlformats.org/drawingml/2006/table">
             <a:tbl>
               <a:tblPr/>
               <a:tblGrid>
-                <a:gridCol w="3291840">
-                  <a:extLst>
-                    <a:ext uri="{9D8B030D-6E8A-4147-A177-3AD203B41FA5}">
-                      <a16:colId xmlns:a16="http://schemas.microsoft.com/office/drawing/2014/main" val="20000"/>
-                    </a:ext>
-                  </a:extLst>
-                </a:gridCol>
-                <a:gridCol w="3657600">
-                  <a:extLst>
-                    <a:ext uri="{9D8B030D-6E8A-4147-A177-3AD203B41FA5}">
-                      <a16:colId xmlns:a16="http://schemas.microsoft.com/office/drawing/2014/main" val="20001"/>
-                    </a:ext>
-                  </a:extLst>
-                </a:gridCol>
-                <a:gridCol w="4114800">
-                  <a:extLst>
-                    <a:ext uri="{9D8B030D-6E8A-4147-A177-3AD203B41FA5}">
-                      <a16:colId xmlns:a16="http://schemas.microsoft.com/office/drawing/2014/main" val="20002"/>
-                    </a:ext>
-                  </a:extLst>
-                </a:gridCol>
+                <a:gridCol w="3291840"/>
+                <a:gridCol w="3657600"/>
+                <a:gridCol w="4114800"/>
               </a:tblGrid>
               <a:tr h="548640">
                 <a:tc>
@@ -6393,11 +6763,11 @@
                     <a:bodyPr/>
                     <a:lstStyle/>
                     <a:p>
-                      <a:pPr marL="0" indent="0" algn="ctr">
+                      <a:pPr algn="ctr" indent="0" marL="0">
                         <a:buNone/>
                       </a:pPr>
                       <a:r>
-                        <a:rPr lang="en-US" sz="900" b="1" kern="0" spc="100" dirty="0">
+                        <a:rPr lang="en-US" sz="900" b="1" spc="100" kern="0" dirty="0">
                           <a:solidFill>
                             <a:srgbClr val="FFFFFF"/>
                           </a:solidFill>
@@ -6461,11 +6831,11 @@
                     <a:bodyPr/>
                     <a:lstStyle/>
                     <a:p>
-                      <a:pPr marL="0" indent="0" algn="ctr">
+                      <a:pPr algn="ctr" indent="0" marL="0">
                         <a:buNone/>
                       </a:pPr>
                       <a:r>
-                        <a:rPr lang="en-US" sz="900" b="1" kern="0" spc="100" dirty="0">
+                        <a:rPr lang="en-US" sz="900" b="1" spc="100" kern="0" dirty="0">
                           <a:solidFill>
                             <a:srgbClr val="FFFFFF"/>
                           </a:solidFill>
@@ -6529,11 +6899,11 @@
                     <a:bodyPr/>
                     <a:lstStyle/>
                     <a:p>
-                      <a:pPr marL="0" indent="0" algn="ctr">
+                      <a:pPr algn="ctr" indent="0" marL="0">
                         <a:buNone/>
                       </a:pPr>
                       <a:r>
-                        <a:rPr lang="en-US" sz="900" b="1" kern="0" spc="100" dirty="0">
+                        <a:rPr lang="en-US" sz="900" b="1" spc="100" kern="0" dirty="0">
                           <a:solidFill>
                             <a:srgbClr val="FFFFFF"/>
                           </a:solidFill>
@@ -6592,11 +6962,6 @@
                     </a:solidFill>
                   </a:tcPr>
                 </a:tc>
-                <a:extLst>
-                  <a:ext uri="{0D108BD9-81ED-4DB2-BD59-A6C34878D82A}">
-                    <a16:rowId xmlns:a16="http://schemas.microsoft.com/office/drawing/2014/main" val="10000"/>
-                  </a:ext>
-                </a:extLst>
               </a:tr>
               <a:tr h="548640">
                 <a:tc>
@@ -6604,7 +6969,7 @@
                     <a:bodyPr/>
                     <a:lstStyle/>
                     <a:p>
-                      <a:pPr marL="0" indent="0">
+                      <a:pPr indent="0" marL="0">
                         <a:buNone/>
                       </a:pPr>
                       <a:r>
@@ -6672,7 +7037,7 @@
                     <a:bodyPr/>
                     <a:lstStyle/>
                     <a:p>
-                      <a:pPr marL="0" indent="0">
+                      <a:pPr indent="0" marL="0">
                         <a:buNone/>
                       </a:pPr>
                       <a:r>
@@ -6740,7 +7105,7 @@
                     <a:bodyPr/>
                     <a:lstStyle/>
                     <a:p>
-                      <a:pPr marL="0" indent="0">
+                      <a:pPr indent="0" marL="0">
                         <a:buNone/>
                       </a:pPr>
                       <a:r>
@@ -6803,11 +7168,6 @@
                     </a:solidFill>
                   </a:tcPr>
                 </a:tc>
-                <a:extLst>
-                  <a:ext uri="{0D108BD9-81ED-4DB2-BD59-A6C34878D82A}">
-                    <a16:rowId xmlns:a16="http://schemas.microsoft.com/office/drawing/2014/main" val="10001"/>
-                  </a:ext>
-                </a:extLst>
               </a:tr>
               <a:tr h="548640">
                 <a:tc>
@@ -6815,7 +7175,7 @@
                     <a:bodyPr/>
                     <a:lstStyle/>
                     <a:p>
-                      <a:pPr marL="0" indent="0">
+                      <a:pPr indent="0" marL="0">
                         <a:buNone/>
                       </a:pPr>
                       <a:r>
@@ -6883,7 +7243,7 @@
                     <a:bodyPr/>
                     <a:lstStyle/>
                     <a:p>
-                      <a:pPr marL="0" indent="0">
+                      <a:pPr indent="0" marL="0">
                         <a:buNone/>
                       </a:pPr>
                       <a:r>
@@ -6951,7 +7311,7 @@
                     <a:bodyPr/>
                     <a:lstStyle/>
                     <a:p>
-                      <a:pPr marL="0" indent="0">
+                      <a:pPr indent="0" marL="0">
                         <a:buNone/>
                       </a:pPr>
                       <a:r>
@@ -7014,11 +7374,6 @@
                     </a:solidFill>
                   </a:tcPr>
                 </a:tc>
-                <a:extLst>
-                  <a:ext uri="{0D108BD9-81ED-4DB2-BD59-A6C34878D82A}">
-                    <a16:rowId xmlns:a16="http://schemas.microsoft.com/office/drawing/2014/main" val="10002"/>
-                  </a:ext>
-                </a:extLst>
               </a:tr>
               <a:tr h="548640">
                 <a:tc>
@@ -7026,7 +7381,7 @@
                     <a:bodyPr/>
                     <a:lstStyle/>
                     <a:p>
-                      <a:pPr marL="0" indent="0">
+                      <a:pPr indent="0" marL="0">
                         <a:buNone/>
                       </a:pPr>
                       <a:r>
@@ -7094,7 +7449,7 @@
                     <a:bodyPr/>
                     <a:lstStyle/>
                     <a:p>
-                      <a:pPr marL="0" indent="0">
+                      <a:pPr indent="0" marL="0">
                         <a:buNone/>
                       </a:pPr>
                       <a:r>
@@ -7162,7 +7517,7 @@
                     <a:bodyPr/>
                     <a:lstStyle/>
                     <a:p>
-                      <a:pPr marL="0" indent="0">
+                      <a:pPr indent="0" marL="0">
                         <a:buNone/>
                       </a:pPr>
                       <a:r>
@@ -7225,11 +7580,6 @@
                     </a:solidFill>
                   </a:tcPr>
                 </a:tc>
-                <a:extLst>
-                  <a:ext uri="{0D108BD9-81ED-4DB2-BD59-A6C34878D82A}">
-                    <a16:rowId xmlns:a16="http://schemas.microsoft.com/office/drawing/2014/main" val="10003"/>
-                  </a:ext>
-                </a:extLst>
               </a:tr>
             </a:tbl>
           </a:graphicData>
@@ -7278,7 +7628,7 @@
           <a:bodyPr wrap="square" lIns="0" tIns="0" rIns="0" bIns="0" rtlCol="0" anchor="ctr"/>
           <a:lstStyle/>
           <a:p>
-            <a:pPr marL="0" indent="0">
+            <a:pPr indent="0" marL="0">
               <a:lnSpc>
                 <a:spcPct val="112000"/>
               </a:lnSpc>
@@ -7319,7 +7669,7 @@
           </a:prstGeom>
           <a:extLst>
             <a:ext uri="{C572A759-6A51-4108-AA02-DFA0A04FC94B}">
-              <ma14:wrappingTextBoxFlag xmlns="" xmlns:ma14="http://schemas.microsoft.com/office/mac/drawingml/2011/main" val="0"/>
+              <ma14:wrappingTextBoxFlag xmlns:ma14="http://schemas.microsoft.com/office/mac/drawingml/2011/main" val="0"/>
             </a:ext>
           </a:extLst>
         </p:spPr>
@@ -7340,7 +7690,7 @@
           <a:p>
             <a:pPr algn="l"/>
             <a:fld id="{F7021451-1387-4CA6-816F-3879F97B5CBC}" type="slidenum">
-              <a:rPr lang="en-US" b="0"/>
+              <a:rPr b="0" lang="en-US"/>
               <a:t>13</a:t>
             </a:fld>
             <a:endParaRPr lang="en-US"/>
@@ -7415,7 +7765,7 @@
           <a:bodyPr wrap="square" lIns="0" tIns="0" rIns="0" bIns="0" rtlCol="0" anchor="ctr"/>
           <a:lstStyle/>
           <a:p>
-            <a:pPr marL="0" indent="0" algn="l">
+            <a:pPr algn="l" indent="0" marL="0">
               <a:buNone/>
             </a:pPr>
             <a:r>
@@ -7454,7 +7804,7 @@
           <a:bodyPr wrap="square" lIns="0" tIns="0" rIns="0" bIns="0" rtlCol="0" anchor="ctr"/>
           <a:lstStyle/>
           <a:p>
-            <a:pPr marL="0" indent="0">
+            <a:pPr indent="0" marL="0">
               <a:buNone/>
             </a:pPr>
             <a:r>
@@ -7520,11 +7870,11 @@
           <a:bodyPr wrap="square" lIns="0" tIns="0" rIns="0" bIns="0" rtlCol="0" anchor="ctr"/>
           <a:lstStyle/>
           <a:p>
-            <a:pPr marL="0" indent="0" algn="ctr">
-              <a:buNone/>
-            </a:pPr>
-            <a:r>
-              <a:rPr lang="en-US" sz="900" b="1" kern="0" spc="100" dirty="0">
+            <a:pPr algn="ctr" indent="0" marL="0">
+              <a:buNone/>
+            </a:pPr>
+            <a:r>
+              <a:rPr lang="en-US" sz="900" b="1" spc="100" kern="0" dirty="0">
                 <a:solidFill>
                   <a:srgbClr val="5A05F4"/>
                 </a:solidFill>
@@ -7540,14 +7890,14 @@
       </p:sp>
       <p:pic>
         <p:nvPicPr>
-          <p:cNvPr id="7" name="Image 0" descr="preencoded.png"/>
+          <p:cNvPr id="7" name="Image 0" descr="preencoded.png">    </p:cNvPr>
           <p:cNvPicPr>
             <a:picLocks noChangeAspect="1"/>
           </p:cNvPicPr>
           <p:nvPr/>
         </p:nvPicPr>
         <p:blipFill>
-          <a:blip r:embed="rId3"/>
+          <a:blip r:embed="rId1"/>
           <a:stretch>
             <a:fillRect/>
           </a:stretch>
@@ -7605,7 +7955,7 @@
           <a:bodyPr wrap="square" lIns="0" tIns="0" rIns="0" bIns="0" rtlCol="0" anchor="ctr"/>
           <a:lstStyle/>
           <a:p>
-            <a:pPr marL="0" indent="0" algn="ctr">
+            <a:pPr algn="ctr" indent="0" marL="0">
               <a:buNone/>
             </a:pPr>
             <a:r>
@@ -7709,7 +8059,7 @@
           <a:bodyPr wrap="square" lIns="0" tIns="0" rIns="0" bIns="0" rtlCol="0" anchor="ctr"/>
           <a:lstStyle/>
           <a:p>
-            <a:pPr marL="0" indent="0" algn="ctr">
+            <a:pPr algn="ctr" indent="0" marL="0">
               <a:buNone/>
             </a:pPr>
             <a:r>
@@ -7813,7 +8163,7 @@
           <a:bodyPr wrap="square" lIns="0" tIns="0" rIns="0" bIns="0" rtlCol="0" anchor="ctr"/>
           <a:lstStyle/>
           <a:p>
-            <a:pPr marL="0" indent="0" algn="ctr">
+            <a:pPr algn="ctr" indent="0" marL="0">
               <a:buNone/>
             </a:pPr>
             <a:r>
@@ -7852,7 +8202,7 @@
           <a:bodyPr wrap="square" lIns="0" tIns="0" rIns="0" bIns="0" rtlCol="0" anchor="ctr"/>
           <a:lstStyle/>
           <a:p>
-            <a:pPr marL="0" indent="0">
+            <a:pPr indent="0" marL="0">
               <a:buNone/>
             </a:pPr>
             <a:r>
@@ -7918,11 +8268,11 @@
           <a:bodyPr wrap="square" lIns="0" tIns="0" rIns="0" bIns="0" rtlCol="0" anchor="ctr"/>
           <a:lstStyle/>
           <a:p>
-            <a:pPr marL="0" indent="0">
-              <a:buNone/>
-            </a:pPr>
-            <a:r>
-              <a:rPr lang="en-US" sz="950" b="1" kern="0" spc="150" dirty="0">
+            <a:pPr indent="0" marL="0">
+              <a:buNone/>
+            </a:pPr>
+            <a:r>
+              <a:rPr lang="en-US" sz="950" b="1" spc="150" kern="0" dirty="0">
                 <a:solidFill>
                   <a:srgbClr val="106B41"/>
                 </a:solidFill>
@@ -7957,7 +8307,7 @@
           <a:bodyPr wrap="square" lIns="0" tIns="0" rIns="0" bIns="0" rtlCol="0" anchor="ctr"/>
           <a:lstStyle/>
           <a:p>
-            <a:pPr marL="0" indent="0">
+            <a:pPr indent="0" marL="0">
               <a:lnSpc>
                 <a:spcPct val="112000"/>
               </a:lnSpc>
@@ -8007,14 +8357,34 @@
       </p:sp>
       <p:sp>
         <p:nvSpPr>
-          <p:cNvPr id="23" name="Text 20"/>
-          <p:cNvSpPr/>
-          <p:nvPr/>
-        </p:nvSpPr>
-        <p:spPr>
-          <a:xfrm>
-            <a:off x="786384" y="4837176"/>
-            <a:ext cx="10625328" cy="219456"/>
+          <p:cNvPr id="23" name="Shape 20"/>
+          <p:cNvSpPr/>
+          <p:nvPr/>
+        </p:nvSpPr>
+        <p:spPr>
+          <a:xfrm>
+            <a:off x="749808" y="5125212"/>
+            <a:ext cx="310896" cy="310896"/>
+          </a:xfrm>
+          <a:prstGeom prst="ellipse">
+            <a:avLst/>
+          </a:prstGeom>
+          <a:solidFill>
+            <a:srgbClr val="B3261E"/>
+          </a:solidFill>
+          <a:ln/>
+        </p:spPr>
+      </p:sp>
+      <p:sp>
+        <p:nvSpPr>
+          <p:cNvPr id="24" name="Text 21"/>
+          <p:cNvSpPr/>
+          <p:nvPr/>
+        </p:nvSpPr>
+        <p:spPr>
+          <a:xfrm>
+            <a:off x="749808" y="5125212"/>
+            <a:ext cx="310896" cy="310896"/>
           </a:xfrm>
           <a:prstGeom prst="rect">
             <a:avLst/>
@@ -8026,11 +8396,50 @@
           <a:bodyPr wrap="square" lIns="0" tIns="0" rIns="0" bIns="0" rtlCol="0" anchor="ctr"/>
           <a:lstStyle/>
           <a:p>
-            <a:pPr marL="0" indent="0">
-              <a:buNone/>
-            </a:pPr>
-            <a:r>
-              <a:rPr lang="en-US" sz="950" b="1" kern="0" spc="150" dirty="0">
+            <a:pPr algn="ctr" indent="0" marL="0">
+              <a:buNone/>
+            </a:pPr>
+            <a:r>
+              <a:rPr lang="en-US" sz="1200" b="1" dirty="0">
+                <a:solidFill>
+                  <a:srgbClr val="FFFFFF"/>
+                </a:solidFill>
+                <a:latin typeface="Arial" pitchFamily="34" charset="0"/>
+                <a:ea typeface="Arial" pitchFamily="34" charset="-122"/>
+                <a:cs typeface="Arial" pitchFamily="34" charset="-120"/>
+              </a:rPr>
+              <a:t>✕</a:t>
+            </a:r>
+            <a:endParaRPr lang="en-US" sz="1200" dirty="0"/>
+          </a:p>
+        </p:txBody>
+      </p:sp>
+      <p:sp>
+        <p:nvSpPr>
+          <p:cNvPr id="25" name="Text 22"/>
+          <p:cNvSpPr/>
+          <p:nvPr/>
+        </p:nvSpPr>
+        <p:spPr>
+          <a:xfrm>
+            <a:off x="1243584" y="4837176"/>
+            <a:ext cx="10168128" cy="219456"/>
+          </a:xfrm>
+          <a:prstGeom prst="rect">
+            <a:avLst/>
+          </a:prstGeom>
+          <a:noFill/>
+          <a:ln/>
+        </p:spPr>
+        <p:txBody>
+          <a:bodyPr wrap="square" lIns="0" tIns="0" rIns="0" bIns="0" rtlCol="0" anchor="ctr"/>
+          <a:lstStyle/>
+          <a:p>
+            <a:pPr indent="0" marL="0">
+              <a:buNone/>
+            </a:pPr>
+            <a:r>
+              <a:rPr lang="en-US" sz="950" b="1" spc="150" kern="0" dirty="0">
                 <a:solidFill>
                   <a:srgbClr val="B3261E"/>
                 </a:solidFill>
@@ -8046,14 +8455,14 @@
       </p:sp>
       <p:sp>
         <p:nvSpPr>
-          <p:cNvPr id="24" name="Text 21"/>
-          <p:cNvSpPr/>
-          <p:nvPr/>
-        </p:nvSpPr>
-        <p:spPr>
-          <a:xfrm>
-            <a:off x="786384" y="5093208"/>
-            <a:ext cx="10625328" cy="630936"/>
+          <p:cNvPr id="26" name="Text 23"/>
+          <p:cNvSpPr/>
+          <p:nvPr/>
+        </p:nvSpPr>
+        <p:spPr>
+          <a:xfrm>
+            <a:off x="1243584" y="5093208"/>
+            <a:ext cx="10168128" cy="630936"/>
           </a:xfrm>
           <a:prstGeom prst="rect">
             <a:avLst/>
@@ -8065,7 +8474,7 @@
           <a:bodyPr wrap="square" lIns="0" tIns="0" rIns="0" bIns="0" rtlCol="0" anchor="ctr"/>
           <a:lstStyle/>
           <a:p>
-            <a:pPr marL="0" indent="0">
+            <a:pPr indent="0" marL="0">
               <a:lnSpc>
                 <a:spcPct val="112000"/>
               </a:lnSpc>
@@ -8106,7 +8515,7 @@
           </a:prstGeom>
           <a:extLst>
             <a:ext uri="{C572A759-6A51-4108-AA02-DFA0A04FC94B}">
-              <ma14:wrappingTextBoxFlag xmlns="" xmlns:ma14="http://schemas.microsoft.com/office/mac/drawingml/2011/main" val="0"/>
+              <ma14:wrappingTextBoxFlag xmlns:ma14="http://schemas.microsoft.com/office/mac/drawingml/2011/main" val="0"/>
             </a:ext>
           </a:extLst>
         </p:spPr>
@@ -8127,7 +8536,7 @@
           <a:p>
             <a:pPr algn="l"/>
             <a:fld id="{F7021451-1387-4CA6-816F-3879F97B5CBC}" type="slidenum">
-              <a:rPr lang="en-US" b="0"/>
+              <a:rPr b="0" lang="en-US"/>
               <a:t>14</a:t>
             </a:fld>
             <a:endParaRPr lang="en-US"/>
@@ -8202,7 +8611,7 @@
           <a:bodyPr wrap="square" lIns="0" tIns="0" rIns="0" bIns="0" rtlCol="0" anchor="ctr"/>
           <a:lstStyle/>
           <a:p>
-            <a:pPr marL="0" indent="0" algn="l">
+            <a:pPr algn="l" indent="0" marL="0">
               <a:buNone/>
             </a:pPr>
             <a:r>
@@ -8241,7 +8650,7 @@
           <a:bodyPr wrap="square" lIns="0" tIns="0" rIns="0" bIns="0" rtlCol="0" anchor="ctr"/>
           <a:lstStyle/>
           <a:p>
-            <a:pPr marL="0" indent="0">
+            <a:pPr indent="0" marL="0">
               <a:buNone/>
             </a:pPr>
             <a:r>
@@ -8307,11 +8716,11 @@
           <a:bodyPr wrap="square" lIns="0" tIns="0" rIns="0" bIns="0" rtlCol="0" anchor="ctr"/>
           <a:lstStyle/>
           <a:p>
-            <a:pPr marL="0" indent="0" algn="ctr">
-              <a:buNone/>
-            </a:pPr>
-            <a:r>
-              <a:rPr lang="en-US" sz="900" b="1" kern="0" spc="100" dirty="0">
+            <a:pPr algn="ctr" indent="0" marL="0">
+              <a:buNone/>
+            </a:pPr>
+            <a:r>
+              <a:rPr lang="en-US" sz="900" b="1" spc="100" kern="0" dirty="0">
                 <a:solidFill>
                   <a:srgbClr val="5A05F4"/>
                 </a:solidFill>
@@ -8327,14 +8736,14 @@
       </p:sp>
       <p:pic>
         <p:nvPicPr>
-          <p:cNvPr id="7" name="Image 0" descr="preencoded.png"/>
+          <p:cNvPr id="7" name="Image 0" descr="preencoded.png">    </p:cNvPr>
           <p:cNvPicPr>
             <a:picLocks noChangeAspect="1"/>
           </p:cNvPicPr>
           <p:nvPr/>
         </p:nvPicPr>
         <p:blipFill>
-          <a:blip r:embed="rId3"/>
+          <a:blip r:embed="rId1"/>
           <a:stretch>
             <a:fillRect/>
           </a:stretch>
@@ -8365,34 +8774,16 @@
         </p:nvGraphicFramePr>
         <p:xfrm>
           <a:off x="566928" y="1737360"/>
-          <a:ext cx="11064240" cy="3017520"/>
+          <a:ext cx="11064240" cy="914400"/>
         </p:xfrm>
         <a:graphic>
           <a:graphicData uri="http://schemas.openxmlformats.org/drawingml/2006/table">
             <a:tbl>
               <a:tblPr/>
               <a:tblGrid>
-                <a:gridCol w="2560320">
-                  <a:extLst>
-                    <a:ext uri="{9D8B030D-6E8A-4147-A177-3AD203B41FA5}">
-                      <a16:colId xmlns:a16="http://schemas.microsoft.com/office/drawing/2014/main" val="20000"/>
-                    </a:ext>
-                  </a:extLst>
-                </a:gridCol>
-                <a:gridCol w="4206240">
-                  <a:extLst>
-                    <a:ext uri="{9D8B030D-6E8A-4147-A177-3AD203B41FA5}">
-                      <a16:colId xmlns:a16="http://schemas.microsoft.com/office/drawing/2014/main" val="20001"/>
-                    </a:ext>
-                  </a:extLst>
-                </a:gridCol>
-                <a:gridCol w="4297680">
-                  <a:extLst>
-                    <a:ext uri="{9D8B030D-6E8A-4147-A177-3AD203B41FA5}">
-                      <a16:colId xmlns:a16="http://schemas.microsoft.com/office/drawing/2014/main" val="20002"/>
-                    </a:ext>
-                  </a:extLst>
-                </a:gridCol>
+                <a:gridCol w="2560320"/>
+                <a:gridCol w="4206240"/>
+                <a:gridCol w="4297680"/>
               </a:tblGrid>
               <a:tr h="603504">
                 <a:tc>
@@ -8400,11 +8791,11 @@
                     <a:bodyPr/>
                     <a:lstStyle/>
                     <a:p>
-                      <a:pPr marL="0" indent="0" algn="ctr">
+                      <a:pPr algn="ctr" indent="0" marL="0">
                         <a:buNone/>
                       </a:pPr>
                       <a:r>
-                        <a:rPr lang="en-US" sz="900" b="1" kern="0" spc="100" dirty="0">
+                        <a:rPr lang="en-US" sz="900" b="1" spc="100" kern="0" dirty="0">
                           <a:solidFill>
                             <a:srgbClr val="FFFFFF"/>
                           </a:solidFill>
@@ -8468,11 +8859,11 @@
                     <a:bodyPr/>
                     <a:lstStyle/>
                     <a:p>
-                      <a:pPr marL="0" indent="0" algn="ctr">
+                      <a:pPr algn="ctr" indent="0" marL="0">
                         <a:buNone/>
                       </a:pPr>
                       <a:r>
-                        <a:rPr lang="en-US" sz="900" b="1" kern="0" spc="100" dirty="0">
+                        <a:rPr lang="en-US" sz="900" b="1" spc="100" kern="0" dirty="0">
                           <a:solidFill>
                             <a:srgbClr val="FFFFFF"/>
                           </a:solidFill>
@@ -8536,11 +8927,11 @@
                     <a:bodyPr/>
                     <a:lstStyle/>
                     <a:p>
-                      <a:pPr marL="0" indent="0" algn="ctr">
+                      <a:pPr algn="ctr" indent="0" marL="0">
                         <a:buNone/>
                       </a:pPr>
                       <a:r>
-                        <a:rPr lang="en-US" sz="900" b="1" kern="0" spc="100" dirty="0">
+                        <a:rPr lang="en-US" sz="900" b="1" spc="100" kern="0" dirty="0">
                           <a:solidFill>
                             <a:srgbClr val="FFFFFF"/>
                           </a:solidFill>
@@ -8599,11 +8990,6 @@
                     </a:solidFill>
                   </a:tcPr>
                 </a:tc>
-                <a:extLst>
-                  <a:ext uri="{0D108BD9-81ED-4DB2-BD59-A6C34878D82A}">
-                    <a16:rowId xmlns:a16="http://schemas.microsoft.com/office/drawing/2014/main" val="10000"/>
-                  </a:ext>
-                </a:extLst>
               </a:tr>
               <a:tr h="603504">
                 <a:tc>
@@ -8611,7 +8997,7 @@
                     <a:bodyPr/>
                     <a:lstStyle/>
                     <a:p>
-                      <a:pPr marL="0" indent="0">
+                      <a:pPr indent="0" marL="0">
                         <a:buNone/>
                       </a:pPr>
                       <a:r>
@@ -8679,7 +9065,7 @@
                     <a:bodyPr/>
                     <a:lstStyle/>
                     <a:p>
-                      <a:pPr marL="0" indent="0">
+                      <a:pPr indent="0" marL="0">
                         <a:buNone/>
                       </a:pPr>
                       <a:r>
@@ -8747,7 +9133,7 @@
                     <a:bodyPr/>
                     <a:lstStyle/>
                     <a:p>
-                      <a:pPr marL="0" indent="0">
+                      <a:pPr indent="0" marL="0">
                         <a:buNone/>
                       </a:pPr>
                       <a:r>
@@ -8810,11 +9196,6 @@
                     </a:solidFill>
                   </a:tcPr>
                 </a:tc>
-                <a:extLst>
-                  <a:ext uri="{0D108BD9-81ED-4DB2-BD59-A6C34878D82A}">
-                    <a16:rowId xmlns:a16="http://schemas.microsoft.com/office/drawing/2014/main" val="10001"/>
-                  </a:ext>
-                </a:extLst>
               </a:tr>
               <a:tr h="603504">
                 <a:tc>
@@ -8822,7 +9203,7 @@
                     <a:bodyPr/>
                     <a:lstStyle/>
                     <a:p>
-                      <a:pPr marL="0" indent="0">
+                      <a:pPr indent="0" marL="0">
                         <a:buNone/>
                       </a:pPr>
                       <a:r>
@@ -8890,7 +9271,7 @@
                     <a:bodyPr/>
                     <a:lstStyle/>
                     <a:p>
-                      <a:pPr marL="0" indent="0">
+                      <a:pPr indent="0" marL="0">
                         <a:buNone/>
                       </a:pPr>
                       <a:r>
@@ -8958,7 +9339,7 @@
                     <a:bodyPr/>
                     <a:lstStyle/>
                     <a:p>
-                      <a:pPr marL="0" indent="0">
+                      <a:pPr indent="0" marL="0">
                         <a:buNone/>
                       </a:pPr>
                       <a:r>
@@ -9021,11 +9402,6 @@
                     </a:solidFill>
                   </a:tcPr>
                 </a:tc>
-                <a:extLst>
-                  <a:ext uri="{0D108BD9-81ED-4DB2-BD59-A6C34878D82A}">
-                    <a16:rowId xmlns:a16="http://schemas.microsoft.com/office/drawing/2014/main" val="10002"/>
-                  </a:ext>
-                </a:extLst>
               </a:tr>
               <a:tr h="603504">
                 <a:tc>
@@ -9033,7 +9409,7 @@
                     <a:bodyPr/>
                     <a:lstStyle/>
                     <a:p>
-                      <a:pPr marL="0" indent="0">
+                      <a:pPr indent="0" marL="0">
                         <a:buNone/>
                       </a:pPr>
                       <a:r>
@@ -9101,7 +9477,7 @@
                     <a:bodyPr/>
                     <a:lstStyle/>
                     <a:p>
-                      <a:pPr marL="0" indent="0">
+                      <a:pPr indent="0" marL="0">
                         <a:buNone/>
                       </a:pPr>
                       <a:r>
@@ -9169,7 +9545,7 @@
                     <a:bodyPr/>
                     <a:lstStyle/>
                     <a:p>
-                      <a:pPr marL="0" indent="0">
+                      <a:pPr indent="0" marL="0">
                         <a:buNone/>
                       </a:pPr>
                       <a:r>
@@ -9232,11 +9608,6 @@
                     </a:solidFill>
                   </a:tcPr>
                 </a:tc>
-                <a:extLst>
-                  <a:ext uri="{0D108BD9-81ED-4DB2-BD59-A6C34878D82A}">
-                    <a16:rowId xmlns:a16="http://schemas.microsoft.com/office/drawing/2014/main" val="10003"/>
-                  </a:ext>
-                </a:extLst>
               </a:tr>
               <a:tr h="603504">
                 <a:tc>
@@ -9244,7 +9615,7 @@
                     <a:bodyPr/>
                     <a:lstStyle/>
                     <a:p>
-                      <a:pPr marL="0" indent="0">
+                      <a:pPr indent="0" marL="0">
                         <a:buNone/>
                       </a:pPr>
                       <a:r>
@@ -9312,7 +9683,7 @@
                     <a:bodyPr/>
                     <a:lstStyle/>
                     <a:p>
-                      <a:pPr marL="0" indent="0">
+                      <a:pPr indent="0" marL="0">
                         <a:buNone/>
                       </a:pPr>
                       <a:r>
@@ -9380,7 +9751,7 @@
                     <a:bodyPr/>
                     <a:lstStyle/>
                     <a:p>
-                      <a:pPr marL="0" indent="0">
+                      <a:pPr indent="0" marL="0">
                         <a:buNone/>
                       </a:pPr>
                       <a:r>
@@ -9443,11 +9814,6 @@
                     </a:solidFill>
                   </a:tcPr>
                 </a:tc>
-                <a:extLst>
-                  <a:ext uri="{0D108BD9-81ED-4DB2-BD59-A6C34878D82A}">
-                    <a16:rowId xmlns:a16="http://schemas.microsoft.com/office/drawing/2014/main" val="10004"/>
-                  </a:ext>
-                </a:extLst>
               </a:tr>
             </a:tbl>
           </a:graphicData>
@@ -9501,7 +9867,7 @@
           <a:bodyPr wrap="square" lIns="0" tIns="0" rIns="0" bIns="0" rtlCol="0" anchor="ctr"/>
           <a:lstStyle/>
           <a:p>
-            <a:pPr marL="0" indent="0">
+            <a:pPr indent="0" marL="0">
               <a:lnSpc>
                 <a:spcPct val="112000"/>
               </a:lnSpc>
@@ -9542,7 +9908,7 @@
           </a:prstGeom>
           <a:extLst>
             <a:ext uri="{C572A759-6A51-4108-AA02-DFA0A04FC94B}">
-              <ma14:wrappingTextBoxFlag xmlns="" xmlns:ma14="http://schemas.microsoft.com/office/mac/drawingml/2011/main" val="0"/>
+              <ma14:wrappingTextBoxFlag xmlns:ma14="http://schemas.microsoft.com/office/mac/drawingml/2011/main" val="0"/>
             </a:ext>
           </a:extLst>
         </p:spPr>
@@ -9563,7 +9929,7 @@
           <a:p>
             <a:pPr algn="l"/>
             <a:fld id="{F7021451-1387-4CA6-816F-3879F97B5CBC}" type="slidenum">
-              <a:rPr lang="en-US" b="0"/>
+              <a:rPr b="0" lang="en-US"/>
               <a:t>15</a:t>
             </a:fld>
             <a:endParaRPr lang="en-US"/>
@@ -9638,7 +10004,7 @@
           <a:bodyPr wrap="square" lIns="0" tIns="0" rIns="0" bIns="0" rtlCol="0" anchor="ctr"/>
           <a:lstStyle/>
           <a:p>
-            <a:pPr marL="0" indent="0" algn="l">
+            <a:pPr algn="l" indent="0" marL="0">
               <a:buNone/>
             </a:pPr>
             <a:r>
@@ -9677,7 +10043,7 @@
           <a:bodyPr wrap="square" lIns="0" tIns="0" rIns="0" bIns="0" rtlCol="0" anchor="ctr"/>
           <a:lstStyle/>
           <a:p>
-            <a:pPr marL="0" indent="0">
+            <a:pPr indent="0" marL="0">
               <a:buNone/>
             </a:pPr>
             <a:r>
@@ -9743,11 +10109,11 @@
           <a:bodyPr wrap="square" lIns="0" tIns="0" rIns="0" bIns="0" rtlCol="0" anchor="ctr"/>
           <a:lstStyle/>
           <a:p>
-            <a:pPr marL="0" indent="0" algn="ctr">
-              <a:buNone/>
-            </a:pPr>
-            <a:r>
-              <a:rPr lang="en-US" sz="900" b="1" kern="0" spc="100" dirty="0">
+            <a:pPr algn="ctr" indent="0" marL="0">
+              <a:buNone/>
+            </a:pPr>
+            <a:r>
+              <a:rPr lang="en-US" sz="900" b="1" spc="100" kern="0" dirty="0">
                 <a:solidFill>
                   <a:srgbClr val="5A05F4"/>
                 </a:solidFill>
@@ -9763,14 +10129,14 @@
       </p:sp>
       <p:pic>
         <p:nvPicPr>
-          <p:cNvPr id="7" name="Image 0" descr="preencoded.png"/>
+          <p:cNvPr id="7" name="Image 0" descr="preencoded.png">    </p:cNvPr>
           <p:cNvPicPr>
             <a:picLocks noChangeAspect="1"/>
           </p:cNvPicPr>
           <p:nvPr/>
         </p:nvPicPr>
         <p:blipFill>
-          <a:blip r:embed="rId3"/>
+          <a:blip r:embed="rId1"/>
           <a:stretch>
             <a:fillRect/>
           </a:stretch>
@@ -9828,7 +10194,7 @@
           <a:bodyPr wrap="square" lIns="0" tIns="0" rIns="0" bIns="0" rtlCol="0" anchor="ctr"/>
           <a:lstStyle/>
           <a:p>
-            <a:pPr marL="0" indent="0" algn="ctr">
+            <a:pPr algn="ctr" indent="0" marL="0">
               <a:buNone/>
             </a:pPr>
             <a:r>
@@ -9932,7 +10298,7 @@
           <a:bodyPr wrap="square" lIns="0" tIns="0" rIns="0" bIns="0" rtlCol="0" anchor="ctr"/>
           <a:lstStyle/>
           <a:p>
-            <a:pPr marL="0" indent="0" algn="ctr">
+            <a:pPr algn="ctr" indent="0" marL="0">
               <a:buNone/>
             </a:pPr>
             <a:r>
@@ -9971,7 +10337,7 @@
           <a:bodyPr wrap="square" lIns="0" tIns="0" rIns="0" bIns="0" rtlCol="0" anchor="ctr"/>
           <a:lstStyle/>
           <a:p>
-            <a:pPr marL="0" indent="0" algn="ctr">
+            <a:pPr algn="ctr" indent="0" marL="0">
               <a:buNone/>
             </a:pPr>
             <a:r>
@@ -10032,7 +10398,7 @@
           <a:bodyPr wrap="square" lIns="0" tIns="0" rIns="0" bIns="0" rtlCol="0" anchor="ctr"/>
           <a:lstStyle/>
           <a:p>
-            <a:pPr marL="0" indent="0">
+            <a:pPr indent="0" marL="0">
               <a:buNone/>
             </a:pPr>
             <a:r>
@@ -10071,7 +10437,7 @@
           <a:bodyPr wrap="square" lIns="0" tIns="0" rIns="0" bIns="0" rtlCol="0" anchor="t"/>
           <a:lstStyle/>
           <a:p>
-            <a:pPr marL="0" indent="0">
+            <a:pPr indent="0" marL="0">
               <a:lnSpc>
                 <a:spcPct val="108000"/>
               </a:lnSpc>
@@ -10135,7 +10501,7 @@
           <a:bodyPr wrap="square" lIns="0" tIns="0" rIns="0" bIns="0" rtlCol="0" anchor="ctr"/>
           <a:lstStyle/>
           <a:p>
-            <a:pPr marL="0" indent="0">
+            <a:pPr indent="0" marL="0">
               <a:buNone/>
             </a:pPr>
             <a:r>
@@ -10174,7 +10540,7 @@
           <a:bodyPr wrap="square" lIns="0" tIns="0" rIns="0" bIns="0" rtlCol="0" anchor="t"/>
           <a:lstStyle/>
           <a:p>
-            <a:pPr marL="0" indent="0">
+            <a:pPr indent="0" marL="0">
               <a:lnSpc>
                 <a:spcPct val="108000"/>
               </a:lnSpc>
@@ -10215,7 +10581,7 @@
           </a:prstGeom>
           <a:extLst>
             <a:ext uri="{C572A759-6A51-4108-AA02-DFA0A04FC94B}">
-              <ma14:wrappingTextBoxFlag xmlns="" xmlns:ma14="http://schemas.microsoft.com/office/mac/drawingml/2011/main" val="0"/>
+              <ma14:wrappingTextBoxFlag xmlns:ma14="http://schemas.microsoft.com/office/mac/drawingml/2011/main" val="0"/>
             </a:ext>
           </a:extLst>
         </p:spPr>
@@ -10236,7 +10602,7 @@
           <a:p>
             <a:pPr algn="l"/>
             <a:fld id="{F7021451-1387-4CA6-816F-3879F97B5CBC}" type="slidenum">
-              <a:rPr lang="en-US" b="0"/>
+              <a:rPr b="0" lang="en-US"/>
               <a:t>16</a:t>
             </a:fld>
             <a:endParaRPr lang="en-US"/>
@@ -10311,7 +10677,7 @@
           <a:bodyPr wrap="square" lIns="0" tIns="0" rIns="0" bIns="0" rtlCol="0" anchor="ctr"/>
           <a:lstStyle/>
           <a:p>
-            <a:pPr marL="0" indent="0" algn="l">
+            <a:pPr algn="l" indent="0" marL="0">
               <a:buNone/>
             </a:pPr>
             <a:r>
@@ -10350,7 +10716,7 @@
           <a:bodyPr wrap="square" lIns="0" tIns="0" rIns="0" bIns="0" rtlCol="0" anchor="ctr"/>
           <a:lstStyle/>
           <a:p>
-            <a:pPr marL="0" indent="0">
+            <a:pPr indent="0" marL="0">
               <a:buNone/>
             </a:pPr>
             <a:r>
@@ -10416,11 +10782,11 @@
           <a:bodyPr wrap="square" lIns="0" tIns="0" rIns="0" bIns="0" rtlCol="0" anchor="ctr"/>
           <a:lstStyle/>
           <a:p>
-            <a:pPr marL="0" indent="0" algn="ctr">
-              <a:buNone/>
-            </a:pPr>
-            <a:r>
-              <a:rPr lang="en-US" sz="900" b="1" kern="0" spc="100" dirty="0">
+            <a:pPr algn="ctr" indent="0" marL="0">
+              <a:buNone/>
+            </a:pPr>
+            <a:r>
+              <a:rPr lang="en-US" sz="900" b="1" spc="100" kern="0" dirty="0">
                 <a:solidFill>
                   <a:srgbClr val="5A05F4"/>
                 </a:solidFill>
@@ -10436,14 +10802,14 @@
       </p:sp>
       <p:pic>
         <p:nvPicPr>
-          <p:cNvPr id="7" name="Image 0" descr="preencoded.png"/>
+          <p:cNvPr id="7" name="Image 0" descr="preencoded.png">    </p:cNvPr>
           <p:cNvPicPr>
             <a:picLocks noChangeAspect="1"/>
           </p:cNvPicPr>
           <p:nvPr/>
         </p:nvPicPr>
         <p:blipFill>
-          <a:blip r:embed="rId3"/>
+          <a:blip r:embed="rId1"/>
           <a:stretch>
             <a:fillRect/>
           </a:stretch>
@@ -10506,7 +10872,7 @@
           <a:bodyPr wrap="square" lIns="0" tIns="0" rIns="0" bIns="0" rtlCol="0" anchor="t"/>
           <a:lstStyle/>
           <a:p>
-            <a:pPr marL="0" indent="0">
+            <a:pPr indent="0" marL="0">
               <a:lnSpc>
                 <a:spcPct val="130000"/>
               </a:lnSpc>
@@ -10523,6 +10889,12 @@
               </a:rPr>
               <a:t>  - model_name: </a:t>
             </a:r>
+            <a:pPr indent="0" marL="0">
+              <a:lnSpc>
+                <a:spcPct val="130000"/>
+              </a:lnSpc>
+              <a:buNone/>
+            </a:pPr>
             <a:r>
               <a:rPr lang="en-US" sz="1200" dirty="0">
                 <a:solidFill>
@@ -10537,7 +10909,7 @@
             <a:endParaRPr lang="en-US" sz="1200" dirty="0"/>
           </a:p>
           <a:p>
-            <a:pPr marL="0" indent="0">
+            <a:pPr indent="0" marL="0">
               <a:lnSpc>
                 <a:spcPct val="130000"/>
               </a:lnSpc>
@@ -10557,7 +10929,7 @@
             <a:endParaRPr lang="en-US" sz="1200" dirty="0"/>
           </a:p>
           <a:p>
-            <a:pPr marL="0" indent="0">
+            <a:pPr indent="0" marL="0">
               <a:lnSpc>
                 <a:spcPct val="130000"/>
               </a:lnSpc>
@@ -10577,7 +10949,7 @@
             <a:endParaRPr lang="en-US" sz="1200" dirty="0"/>
           </a:p>
           <a:p>
-            <a:pPr marL="0" indent="0">
+            <a:pPr indent="0" marL="0">
               <a:lnSpc>
                 <a:spcPct val="130000"/>
               </a:lnSpc>
@@ -10597,7 +10969,7 @@
             <a:endParaRPr lang="en-US" sz="1200" dirty="0"/>
           </a:p>
           <a:p>
-            <a:pPr marL="0" indent="0">
+            <a:pPr indent="0" marL="0">
               <a:lnSpc>
                 <a:spcPct val="130000"/>
               </a:lnSpc>
@@ -10661,7 +11033,7 @@
           <a:bodyPr wrap="square" lIns="0" tIns="0" rIns="0" bIns="0" rtlCol="0" anchor="ctr"/>
           <a:lstStyle/>
           <a:p>
-            <a:pPr marL="0" indent="0" algn="ctr">
+            <a:pPr algn="ctr" indent="0" marL="0">
               <a:buNone/>
             </a:pPr>
             <a:r>
@@ -10765,7 +11137,7 @@
           <a:bodyPr wrap="square" lIns="0" tIns="0" rIns="0" bIns="0" rtlCol="0" anchor="ctr"/>
           <a:lstStyle/>
           <a:p>
-            <a:pPr marL="0" indent="0" algn="ctr">
+            <a:pPr algn="ctr" indent="0" marL="0">
               <a:buNone/>
             </a:pPr>
             <a:r>
@@ -10869,7 +11241,7 @@
           <a:bodyPr wrap="square" lIns="0" tIns="0" rIns="0" bIns="0" rtlCol="0" anchor="ctr"/>
           <a:lstStyle/>
           <a:p>
-            <a:pPr marL="0" indent="0" algn="ctr">
+            <a:pPr algn="ctr" indent="0" marL="0">
               <a:buNone/>
             </a:pPr>
             <a:r>
@@ -10916,14 +11288,34 @@
       </p:sp>
       <p:sp>
         <p:nvSpPr>
-          <p:cNvPr id="21" name="Text 18"/>
-          <p:cNvSpPr/>
-          <p:nvPr/>
-        </p:nvSpPr>
-        <p:spPr>
-          <a:xfrm>
-            <a:off x="786384" y="4882896"/>
-            <a:ext cx="10625328" cy="219456"/>
+          <p:cNvPr id="21" name="Shape 18"/>
+          <p:cNvSpPr/>
+          <p:nvPr/>
+        </p:nvSpPr>
+        <p:spPr>
+          <a:xfrm>
+            <a:off x="749808" y="5148072"/>
+            <a:ext cx="310896" cy="310896"/>
+          </a:xfrm>
+          <a:prstGeom prst="ellipse">
+            <a:avLst/>
+          </a:prstGeom>
+          <a:solidFill>
+            <a:srgbClr val="1A4FBF"/>
+          </a:solidFill>
+          <a:ln/>
+        </p:spPr>
+      </p:sp>
+      <p:sp>
+        <p:nvSpPr>
+          <p:cNvPr id="22" name="Text 19"/>
+          <p:cNvSpPr/>
+          <p:nvPr/>
+        </p:nvSpPr>
+        <p:spPr>
+          <a:xfrm>
+            <a:off x="749808" y="5148072"/>
+            <a:ext cx="310896" cy="310896"/>
           </a:xfrm>
           <a:prstGeom prst="rect">
             <a:avLst/>
@@ -10935,11 +11327,50 @@
           <a:bodyPr wrap="square" lIns="0" tIns="0" rIns="0" bIns="0" rtlCol="0" anchor="ctr"/>
           <a:lstStyle/>
           <a:p>
-            <a:pPr marL="0" indent="0">
-              <a:buNone/>
-            </a:pPr>
-            <a:r>
-              <a:rPr lang="en-US" sz="950" b="1" kern="0" spc="150" dirty="0">
+            <a:pPr algn="ctr" indent="0" marL="0">
+              <a:buNone/>
+            </a:pPr>
+            <a:r>
+              <a:rPr lang="en-US" sz="1200" b="1" dirty="0">
+                <a:solidFill>
+                  <a:srgbClr val="FFFFFF"/>
+                </a:solidFill>
+                <a:latin typeface="Arial" pitchFamily="34" charset="0"/>
+                <a:ea typeface="Arial" pitchFamily="34" charset="-122"/>
+                <a:cs typeface="Arial" pitchFamily="34" charset="-120"/>
+              </a:rPr>
+              <a:t>★</a:t>
+            </a:r>
+            <a:endParaRPr lang="en-US" sz="1200" dirty="0"/>
+          </a:p>
+        </p:txBody>
+      </p:sp>
+      <p:sp>
+        <p:nvSpPr>
+          <p:cNvPr id="23" name="Text 20"/>
+          <p:cNvSpPr/>
+          <p:nvPr/>
+        </p:nvSpPr>
+        <p:spPr>
+          <a:xfrm>
+            <a:off x="1243584" y="4882896"/>
+            <a:ext cx="10168128" cy="219456"/>
+          </a:xfrm>
+          <a:prstGeom prst="rect">
+            <a:avLst/>
+          </a:prstGeom>
+          <a:noFill/>
+          <a:ln/>
+        </p:spPr>
+        <p:txBody>
+          <a:bodyPr wrap="square" lIns="0" tIns="0" rIns="0" bIns="0" rtlCol="0" anchor="ctr"/>
+          <a:lstStyle/>
+          <a:p>
+            <a:pPr indent="0" marL="0">
+              <a:buNone/>
+            </a:pPr>
+            <a:r>
+              <a:rPr lang="en-US" sz="950" b="1" spc="150" kern="0" dirty="0">
                 <a:solidFill>
                   <a:srgbClr val="1A4FBF"/>
                 </a:solidFill>
@@ -10947,7 +11378,7 @@
                 <a:ea typeface="Courier New" pitchFamily="34" charset="-122"/>
                 <a:cs typeface="Courier New" pitchFamily="34" charset="-120"/>
               </a:rPr>
-              <a:t>ЛАЙФХАК</a:t>
+              <a:t>ПОРАДА</a:t>
             </a:r>
             <a:endParaRPr lang="en-US" sz="950" dirty="0"/>
           </a:p>
@@ -10955,14 +11386,14 @@
       </p:sp>
       <p:sp>
         <p:nvSpPr>
-          <p:cNvPr id="22" name="Text 19"/>
-          <p:cNvSpPr/>
-          <p:nvPr/>
-        </p:nvSpPr>
-        <p:spPr>
-          <a:xfrm>
-            <a:off x="786384" y="5138928"/>
-            <a:ext cx="10625328" cy="585216"/>
+          <p:cNvPr id="24" name="Text 21"/>
+          <p:cNvSpPr/>
+          <p:nvPr/>
+        </p:nvSpPr>
+        <p:spPr>
+          <a:xfrm>
+            <a:off x="1243584" y="5138928"/>
+            <a:ext cx="10168128" cy="585216"/>
           </a:xfrm>
           <a:prstGeom prst="rect">
             <a:avLst/>
@@ -10974,7 +11405,7 @@
           <a:bodyPr wrap="square" lIns="0" tIns="0" rIns="0" bIns="0" rtlCol="0" anchor="ctr"/>
           <a:lstStyle/>
           <a:p>
-            <a:pPr marL="0" indent="0">
+            <a:pPr indent="0" marL="0">
               <a:lnSpc>
                 <a:spcPct val="112000"/>
               </a:lnSpc>
@@ -11015,7 +11446,7 @@
           </a:prstGeom>
           <a:extLst>
             <a:ext uri="{C572A759-6A51-4108-AA02-DFA0A04FC94B}">
-              <ma14:wrappingTextBoxFlag xmlns="" xmlns:ma14="http://schemas.microsoft.com/office/mac/drawingml/2011/main" val="0"/>
+              <ma14:wrappingTextBoxFlag xmlns:ma14="http://schemas.microsoft.com/office/mac/drawingml/2011/main" val="0"/>
             </a:ext>
           </a:extLst>
         </p:spPr>
@@ -11036,7 +11467,7 @@
           <a:p>
             <a:pPr algn="l"/>
             <a:fld id="{F7021451-1387-4CA6-816F-3879F97B5CBC}" type="slidenum">
-              <a:rPr lang="en-US" b="0"/>
+              <a:rPr b="0" lang="en-US"/>
               <a:t>17</a:t>
             </a:fld>
             <a:endParaRPr lang="en-US"/>
@@ -11111,7 +11542,7 @@
           <a:bodyPr wrap="square" lIns="0" tIns="0" rIns="0" bIns="0" rtlCol="0" anchor="ctr"/>
           <a:lstStyle/>
           <a:p>
-            <a:pPr marL="0" indent="0" algn="l">
+            <a:pPr algn="l" indent="0" marL="0">
               <a:buNone/>
             </a:pPr>
             <a:r>
@@ -11150,7 +11581,7 @@
           <a:bodyPr wrap="square" lIns="0" tIns="0" rIns="0" bIns="0" rtlCol="0" anchor="ctr"/>
           <a:lstStyle/>
           <a:p>
-            <a:pPr marL="0" indent="0">
+            <a:pPr indent="0" marL="0">
               <a:buNone/>
             </a:pPr>
             <a:r>
@@ -11216,11 +11647,11 @@
           <a:bodyPr wrap="square" lIns="0" tIns="0" rIns="0" bIns="0" rtlCol="0" anchor="ctr"/>
           <a:lstStyle/>
           <a:p>
-            <a:pPr marL="0" indent="0" algn="ctr">
-              <a:buNone/>
-            </a:pPr>
-            <a:r>
-              <a:rPr lang="en-US" sz="900" b="1" kern="0" spc="100" dirty="0">
+            <a:pPr algn="ctr" indent="0" marL="0">
+              <a:buNone/>
+            </a:pPr>
+            <a:r>
+              <a:rPr lang="en-US" sz="900" b="1" spc="100" kern="0" dirty="0">
                 <a:solidFill>
                   <a:srgbClr val="5A05F4"/>
                 </a:solidFill>
@@ -11282,11 +11713,11 @@
           <a:bodyPr wrap="square" lIns="0" tIns="0" rIns="0" bIns="0" rtlCol="0" anchor="ctr"/>
           <a:lstStyle/>
           <a:p>
-            <a:pPr marL="0" indent="0" algn="ctr">
-              <a:buNone/>
-            </a:pPr>
-            <a:r>
-              <a:rPr lang="en-US" sz="900" b="1" kern="0" spc="100" dirty="0">
+            <a:pPr algn="ctr" indent="0" marL="0">
+              <a:buNone/>
+            </a:pPr>
+            <a:r>
+              <a:rPr lang="en-US" sz="900" b="1" spc="100" kern="0" dirty="0">
                 <a:solidFill>
                   <a:srgbClr val="434343"/>
                 </a:solidFill>
@@ -11302,14 +11733,14 @@
       </p:sp>
       <p:pic>
         <p:nvPicPr>
-          <p:cNvPr id="9" name="Image 0" descr="preencoded.png"/>
+          <p:cNvPr id="9" name="Image 0" descr="preencoded.png">    </p:cNvPr>
           <p:cNvPicPr>
             <a:picLocks noChangeAspect="1"/>
           </p:cNvPicPr>
           <p:nvPr/>
         </p:nvPicPr>
         <p:blipFill>
-          <a:blip r:embed="rId3"/>
+          <a:blip r:embed="rId1"/>
           <a:stretch>
             <a:fillRect/>
           </a:stretch>
@@ -11387,7 +11818,7 @@
           <a:bodyPr wrap="square" lIns="0" tIns="0" rIns="0" bIns="0" rtlCol="0" anchor="ctr"/>
           <a:lstStyle/>
           <a:p>
-            <a:pPr marL="0" indent="0" algn="ctr">
+            <a:pPr algn="ctr" indent="0" marL="0">
               <a:buNone/>
             </a:pPr>
             <a:r>
@@ -11426,7 +11857,7 @@
           <a:bodyPr wrap="square" lIns="0" tIns="0" rIns="0" bIns="0" rtlCol="0" anchor="ctr"/>
           <a:lstStyle/>
           <a:p>
-            <a:pPr marL="0" indent="0">
+            <a:pPr indent="0" marL="0">
               <a:buNone/>
             </a:pPr>
             <a:r>
@@ -11465,7 +11896,7 @@
           <a:bodyPr wrap="square" lIns="0" tIns="0" rIns="0" bIns="0" rtlCol="0" anchor="t"/>
           <a:lstStyle/>
           <a:p>
-            <a:pPr marL="0" indent="0">
+            <a:pPr indent="0" marL="0">
               <a:lnSpc>
                 <a:spcPct val="108000"/>
               </a:lnSpc>
@@ -11549,7 +11980,7 @@
           <a:bodyPr wrap="square" lIns="0" tIns="0" rIns="0" bIns="0" rtlCol="0" anchor="ctr"/>
           <a:lstStyle/>
           <a:p>
-            <a:pPr marL="0" indent="0" algn="ctr">
+            <a:pPr algn="ctr" indent="0" marL="0">
               <a:buNone/>
             </a:pPr>
             <a:r>
@@ -11588,7 +12019,7 @@
           <a:bodyPr wrap="square" lIns="0" tIns="0" rIns="0" bIns="0" rtlCol="0" anchor="ctr"/>
           <a:lstStyle/>
           <a:p>
-            <a:pPr marL="0" indent="0">
+            <a:pPr indent="0" marL="0">
               <a:buNone/>
             </a:pPr>
             <a:r>
@@ -11627,7 +12058,7 @@
           <a:bodyPr wrap="square" lIns="0" tIns="0" rIns="0" bIns="0" rtlCol="0" anchor="t"/>
           <a:lstStyle/>
           <a:p>
-            <a:pPr marL="0" indent="0">
+            <a:pPr indent="0" marL="0">
               <a:lnSpc>
                 <a:spcPct val="108000"/>
               </a:lnSpc>
@@ -11711,7 +12142,7 @@
           <a:bodyPr wrap="square" lIns="0" tIns="0" rIns="0" bIns="0" rtlCol="0" anchor="ctr"/>
           <a:lstStyle/>
           <a:p>
-            <a:pPr marL="0" indent="0" algn="ctr">
+            <a:pPr algn="ctr" indent="0" marL="0">
               <a:buNone/>
             </a:pPr>
             <a:r>
@@ -11750,7 +12181,7 @@
           <a:bodyPr wrap="square" lIns="0" tIns="0" rIns="0" bIns="0" rtlCol="0" anchor="ctr"/>
           <a:lstStyle/>
           <a:p>
-            <a:pPr marL="0" indent="0">
+            <a:pPr indent="0" marL="0">
               <a:buNone/>
             </a:pPr>
             <a:r>
@@ -11789,7 +12220,7 @@
           <a:bodyPr wrap="square" lIns="0" tIns="0" rIns="0" bIns="0" rtlCol="0" anchor="t"/>
           <a:lstStyle/>
           <a:p>
-            <a:pPr marL="0" indent="0">
+            <a:pPr indent="0" marL="0">
               <a:lnSpc>
                 <a:spcPct val="108000"/>
               </a:lnSpc>
@@ -11853,7 +12284,7 @@
           <a:bodyPr wrap="square" lIns="0" tIns="0" rIns="0" bIns="0" rtlCol="0" anchor="ctr"/>
           <a:lstStyle/>
           <a:p>
-            <a:pPr marL="0" indent="0" algn="ctr">
+            <a:pPr algn="ctr" indent="0" marL="0">
               <a:buNone/>
             </a:pPr>
             <a:r>
@@ -11914,7 +12345,7 @@
           <a:bodyPr wrap="square" lIns="0" tIns="0" rIns="0" bIns="0" rtlCol="0" anchor="ctr"/>
           <a:lstStyle/>
           <a:p>
-            <a:pPr marL="0" indent="0" algn="ctr">
+            <a:pPr algn="ctr" indent="0" marL="0">
               <a:buNone/>
             </a:pPr>
             <a:r>
@@ -11975,7 +12406,7 @@
           <a:bodyPr wrap="square" lIns="0" tIns="0" rIns="0" bIns="0" rtlCol="0" anchor="ctr"/>
           <a:lstStyle/>
           <a:p>
-            <a:pPr marL="0" indent="0" algn="ctr">
+            <a:pPr algn="ctr" indent="0" marL="0">
               <a:buNone/>
             </a:pPr>
             <a:r>
@@ -12014,11 +12445,11 @@
           <a:bodyPr wrap="square" lIns="0" tIns="0" rIns="0" bIns="0" rtlCol="0" anchor="ctr"/>
           <a:lstStyle/>
           <a:p>
-            <a:pPr marL="0" indent="0">
-              <a:buNone/>
-            </a:pPr>
-            <a:r>
-              <a:rPr lang="en-US" sz="850" kern="0" spc="100" dirty="0">
+            <a:pPr indent="0" marL="0">
+              <a:buNone/>
+            </a:pPr>
+            <a:r>
+              <a:rPr lang="en-US" sz="850" spc="100" kern="0" dirty="0">
                 <a:solidFill>
                   <a:srgbClr val="6B6B6B"/>
                 </a:solidFill>
@@ -12075,7 +12506,7 @@
           <a:bodyPr wrap="square" lIns="0" tIns="0" rIns="0" bIns="0" rtlCol="0" anchor="ctr"/>
           <a:lstStyle/>
           <a:p>
-            <a:pPr marL="0" indent="0">
+            <a:pPr indent="0" marL="0">
               <a:buNone/>
             </a:pPr>
             <a:r>
@@ -12114,7 +12545,7 @@
           <a:bodyPr wrap="square" lIns="0" tIns="0" rIns="0" bIns="0" rtlCol="0" anchor="t"/>
           <a:lstStyle/>
           <a:p>
-            <a:pPr marL="0" indent="0">
+            <a:pPr indent="0" marL="0">
               <a:lnSpc>
                 <a:spcPct val="108000"/>
               </a:lnSpc>
@@ -12178,7 +12609,7 @@
           <a:bodyPr wrap="square" lIns="0" tIns="0" rIns="0" bIns="0" rtlCol="0" anchor="ctr"/>
           <a:lstStyle/>
           <a:p>
-            <a:pPr marL="0" indent="0">
+            <a:pPr indent="0" marL="0">
               <a:buNone/>
             </a:pPr>
             <a:r>
@@ -12217,7 +12648,7 @@
           <a:bodyPr wrap="square" lIns="0" tIns="0" rIns="0" bIns="0" rtlCol="0" anchor="t"/>
           <a:lstStyle/>
           <a:p>
-            <a:pPr marL="0" indent="0">
+            <a:pPr indent="0" marL="0">
               <a:lnSpc>
                 <a:spcPct val="108000"/>
               </a:lnSpc>
@@ -12240,7 +12671,7 @@
       </p:sp>
       <p:sp>
         <p:nvSpPr>
-          <p:cNvPr id="38" name="Slide Number Placeholder 0"/>
+          <p:cNvPr id="25" name="Slide Number Placeholder 0"/>
           <p:cNvSpPr>
             <a:spLocks noGrp="1"/>
           </p:cNvSpPr>
@@ -12258,7 +12689,7 @@
           </a:prstGeom>
           <a:extLst>
             <a:ext uri="{C572A759-6A51-4108-AA02-DFA0A04FC94B}">
-              <ma14:wrappingTextBoxFlag xmlns="" xmlns:ma14="http://schemas.microsoft.com/office/mac/drawingml/2011/main" val="0"/>
+              <ma14:wrappingTextBoxFlag xmlns:ma14="http://schemas.microsoft.com/office/mac/drawingml/2011/main" val="0"/>
             </a:ext>
           </a:extLst>
         </p:spPr>
@@ -12279,7 +12710,7 @@
           <a:p>
             <a:pPr algn="l"/>
             <a:fld id="{F7021451-1387-4CA6-816F-3879F97B5CBC}" type="slidenum">
-              <a:rPr lang="en-US" b="0"/>
+              <a:rPr b="0" lang="en-US"/>
               <a:t>18</a:t>
             </a:fld>
             <a:endParaRPr lang="en-US"/>
@@ -12332,11 +12763,11 @@
           <a:bodyPr wrap="square" lIns="0" tIns="0" rIns="0" bIns="0" rtlCol="0" anchor="ctr"/>
           <a:lstStyle/>
           <a:p>
-            <a:pPr marL="0" indent="0">
-              <a:buNone/>
-            </a:pPr>
-            <a:r>
-              <a:rPr lang="en-US" sz="1200" b="1" kern="0" spc="400" dirty="0">
+            <a:pPr indent="0" marL="0">
+              <a:buNone/>
+            </a:pPr>
+            <a:r>
+              <a:rPr lang="en-US" sz="1200" b="1" spc="400" kern="0" dirty="0">
                 <a:solidFill>
                   <a:srgbClr val="FFFFFF"/>
                 </a:solidFill>
@@ -12371,7 +12802,7 @@
           <a:bodyPr wrap="square" lIns="0" tIns="0" rIns="0" bIns="0" rtlCol="0" anchor="ctr"/>
           <a:lstStyle/>
           <a:p>
-            <a:pPr marL="0" indent="0">
+            <a:pPr indent="0" marL="0">
               <a:buNone/>
             </a:pPr>
             <a:r>
@@ -12410,7 +12841,7 @@
           <a:bodyPr wrap="square" lIns="0" tIns="0" rIns="0" bIns="0" rtlCol="0" anchor="t"/>
           <a:lstStyle/>
           <a:p>
-            <a:pPr marL="0" indent="0">
+            <a:pPr indent="0" marL="0">
               <a:buNone/>
             </a:pPr>
             <a:r>
@@ -12471,7 +12902,7 @@
           <a:bodyPr wrap="square" lIns="0" tIns="0" rIns="0" bIns="0" rtlCol="0" anchor="ctr"/>
           <a:lstStyle/>
           <a:p>
-            <a:pPr marL="0" indent="0" algn="ctr">
+            <a:pPr algn="ctr" indent="0" marL="0">
               <a:buNone/>
             </a:pPr>
             <a:r>
@@ -12557,7 +12988,7 @@
           <a:bodyPr wrap="square" lIns="0" tIns="0" rIns="0" bIns="0" rtlCol="0" anchor="ctr"/>
           <a:lstStyle/>
           <a:p>
-            <a:pPr marL="0" indent="0">
+            <a:pPr indent="0" marL="0">
               <a:buNone/>
             </a:pPr>
             <a:r>
@@ -12596,7 +13027,7 @@
           <a:bodyPr wrap="square" lIns="0" tIns="0" rIns="0" bIns="0" rtlCol="0" anchor="t"/>
           <a:lstStyle/>
           <a:p>
-            <a:pPr marL="0" indent="0">
+            <a:pPr indent="0" marL="0">
               <a:lnSpc>
                 <a:spcPct val="100000"/>
               </a:lnSpc>
@@ -12665,11 +13096,11 @@
           <a:bodyPr wrap="square" lIns="0" tIns="0" rIns="0" bIns="0" rtlCol="0" anchor="ctr"/>
           <a:lstStyle/>
           <a:p>
-            <a:pPr marL="0" indent="0" algn="ctr">
-              <a:buNone/>
-            </a:pPr>
-            <a:r>
-              <a:rPr lang="en-US" sz="900" b="1" kern="0" spc="100" dirty="0">
+            <a:pPr algn="ctr" indent="0" marL="0">
+              <a:buNone/>
+            </a:pPr>
+            <a:r>
+              <a:rPr lang="en-US" sz="900" b="1" spc="100" kern="0" dirty="0">
                 <a:solidFill>
                   <a:srgbClr val="5A05F4"/>
                 </a:solidFill>
@@ -12685,14 +13116,14 @@
       </p:sp>
       <p:pic>
         <p:nvPicPr>
-          <p:cNvPr id="7" name="Image 0" descr="preencoded.png"/>
+          <p:cNvPr id="7" name="Image 0" descr="preencoded.png">    </p:cNvPr>
           <p:cNvPicPr>
             <a:picLocks noChangeAspect="1"/>
           </p:cNvPicPr>
           <p:nvPr/>
         </p:nvPicPr>
         <p:blipFill>
-          <a:blip r:embed="rId3"/>
+          <a:blip r:embed="rId1"/>
           <a:stretch>
             <a:fillRect/>
           </a:stretch>
@@ -12770,7 +13201,7 @@
           <a:bodyPr wrap="square" lIns="0" tIns="0" rIns="0" bIns="0" rtlCol="0" anchor="ctr"/>
           <a:lstStyle/>
           <a:p>
-            <a:pPr marL="0" indent="0" algn="ctr">
+            <a:pPr algn="ctr" indent="0" marL="0">
               <a:buNone/>
             </a:pPr>
             <a:r>
@@ -12809,7 +13240,7 @@
           <a:bodyPr wrap="square" lIns="0" tIns="0" rIns="0" bIns="0" rtlCol="0" anchor="ctr"/>
           <a:lstStyle/>
           <a:p>
-            <a:pPr marL="0" indent="0">
+            <a:pPr indent="0" marL="0">
               <a:buNone/>
             </a:pPr>
             <a:r>
@@ -12848,7 +13279,7 @@
           <a:bodyPr wrap="square" lIns="0" tIns="0" rIns="0" bIns="0" rtlCol="0" anchor="t"/>
           <a:lstStyle/>
           <a:p>
-            <a:pPr marL="0" indent="0">
+            <a:pPr indent="0" marL="0">
               <a:lnSpc>
                 <a:spcPct val="108000"/>
               </a:lnSpc>
@@ -12932,7 +13363,7 @@
           <a:bodyPr wrap="square" lIns="0" tIns="0" rIns="0" bIns="0" rtlCol="0" anchor="ctr"/>
           <a:lstStyle/>
           <a:p>
-            <a:pPr marL="0" indent="0" algn="ctr">
+            <a:pPr algn="ctr" indent="0" marL="0">
               <a:buNone/>
             </a:pPr>
             <a:r>
@@ -12971,7 +13402,7 @@
           <a:bodyPr wrap="square" lIns="0" tIns="0" rIns="0" bIns="0" rtlCol="0" anchor="ctr"/>
           <a:lstStyle/>
           <a:p>
-            <a:pPr marL="0" indent="0">
+            <a:pPr indent="0" marL="0">
               <a:buNone/>
             </a:pPr>
             <a:r>
@@ -13010,7 +13441,7 @@
           <a:bodyPr wrap="square" lIns="0" tIns="0" rIns="0" bIns="0" rtlCol="0" anchor="t"/>
           <a:lstStyle/>
           <a:p>
-            <a:pPr marL="0" indent="0">
+            <a:pPr indent="0" marL="0">
               <a:lnSpc>
                 <a:spcPct val="108000"/>
               </a:lnSpc>
@@ -13094,7 +13525,7 @@
           <a:bodyPr wrap="square" lIns="0" tIns="0" rIns="0" bIns="0" rtlCol="0" anchor="ctr"/>
           <a:lstStyle/>
           <a:p>
-            <a:pPr marL="0" indent="0" algn="ctr">
+            <a:pPr algn="ctr" indent="0" marL="0">
               <a:buNone/>
             </a:pPr>
             <a:r>
@@ -13133,7 +13564,7 @@
           <a:bodyPr wrap="square" lIns="0" tIns="0" rIns="0" bIns="0" rtlCol="0" anchor="ctr"/>
           <a:lstStyle/>
           <a:p>
-            <a:pPr marL="0" indent="0">
+            <a:pPr indent="0" marL="0">
               <a:buNone/>
             </a:pPr>
             <a:r>
@@ -13172,7 +13603,7 @@
           <a:bodyPr wrap="square" lIns="0" tIns="0" rIns="0" bIns="0" rtlCol="0" anchor="t"/>
           <a:lstStyle/>
           <a:p>
-            <a:pPr marL="0" indent="0">
+            <a:pPr indent="0" marL="0">
               <a:lnSpc>
                 <a:spcPct val="108000"/>
               </a:lnSpc>
@@ -13256,7 +13687,7 @@
           <a:bodyPr wrap="square" lIns="0" tIns="0" rIns="0" bIns="0" rtlCol="0" anchor="ctr"/>
           <a:lstStyle/>
           <a:p>
-            <a:pPr marL="0" indent="0" algn="ctr">
+            <a:pPr algn="ctr" indent="0" marL="0">
               <a:buNone/>
             </a:pPr>
             <a:r>
@@ -13295,7 +13726,7 @@
           <a:bodyPr wrap="square" lIns="0" tIns="0" rIns="0" bIns="0" rtlCol="0" anchor="ctr"/>
           <a:lstStyle/>
           <a:p>
-            <a:pPr marL="0" indent="0">
+            <a:pPr indent="0" marL="0">
               <a:buNone/>
             </a:pPr>
             <a:r>
@@ -13334,7 +13765,7 @@
           <a:bodyPr wrap="square" lIns="0" tIns="0" rIns="0" bIns="0" rtlCol="0" anchor="t"/>
           <a:lstStyle/>
           <a:p>
-            <a:pPr marL="0" indent="0">
+            <a:pPr indent="0" marL="0">
               <a:lnSpc>
                 <a:spcPct val="108000"/>
               </a:lnSpc>
@@ -13418,7 +13849,7 @@
           <a:bodyPr wrap="square" lIns="0" tIns="0" rIns="0" bIns="0" rtlCol="0" anchor="ctr"/>
           <a:lstStyle/>
           <a:p>
-            <a:pPr marL="0" indent="0" algn="ctr">
+            <a:pPr algn="ctr" indent="0" marL="0">
               <a:buNone/>
             </a:pPr>
             <a:r>
@@ -13457,7 +13888,7 @@
           <a:bodyPr wrap="square" lIns="0" tIns="0" rIns="0" bIns="0" rtlCol="0" anchor="ctr"/>
           <a:lstStyle/>
           <a:p>
-            <a:pPr marL="0" indent="0">
+            <a:pPr indent="0" marL="0">
               <a:buNone/>
             </a:pPr>
             <a:r>
@@ -13496,7 +13927,7 @@
           <a:bodyPr wrap="square" lIns="0" tIns="0" rIns="0" bIns="0" rtlCol="0" anchor="t"/>
           <a:lstStyle/>
           <a:p>
-            <a:pPr marL="0" indent="0">
+            <a:pPr indent="0" marL="0">
               <a:lnSpc>
                 <a:spcPct val="108000"/>
               </a:lnSpc>
@@ -13519,7 +13950,7 @@
       </p:sp>
       <p:sp>
         <p:nvSpPr>
-          <p:cNvPr id="33" name="Slide Number Placeholder 0"/>
+          <p:cNvPr id="25" name="Slide Number Placeholder 0"/>
           <p:cNvSpPr>
             <a:spLocks noGrp="1"/>
           </p:cNvSpPr>
@@ -13537,7 +13968,7 @@
           </a:prstGeom>
           <a:extLst>
             <a:ext uri="{C572A759-6A51-4108-AA02-DFA0A04FC94B}">
-              <ma14:wrappingTextBoxFlag xmlns="" xmlns:ma14="http://schemas.microsoft.com/office/mac/drawingml/2011/main" val="0"/>
+              <ma14:wrappingTextBoxFlag xmlns:ma14="http://schemas.microsoft.com/office/mac/drawingml/2011/main" val="0"/>
             </a:ext>
           </a:extLst>
         </p:spPr>
@@ -13558,7 +13989,7 @@
           <a:p>
             <a:pPr algn="l"/>
             <a:fld id="{F7021451-1387-4CA6-816F-3879F97B5CBC}" type="slidenum">
-              <a:rPr lang="en-US" b="0"/>
+              <a:rPr b="0" lang="en-US"/>
               <a:t>2</a:t>
             </a:fld>
             <a:endParaRPr lang="en-US"/>
@@ -13633,7 +14064,7 @@
           <a:bodyPr wrap="square" lIns="0" tIns="0" rIns="0" bIns="0" rtlCol="0" anchor="ctr"/>
           <a:lstStyle/>
           <a:p>
-            <a:pPr marL="0" indent="0">
+            <a:pPr indent="0" marL="0">
               <a:buNone/>
             </a:pPr>
             <a:r>
@@ -13694,11 +14125,11 @@
           <a:bodyPr wrap="square" lIns="0" tIns="0" rIns="0" bIns="0" rtlCol="0" anchor="ctr"/>
           <a:lstStyle/>
           <a:p>
-            <a:pPr marL="0" indent="0" algn="ctr">
-              <a:buNone/>
-            </a:pPr>
-            <a:r>
-              <a:rPr lang="en-US" sz="900" b="1" kern="0" spc="100" dirty="0">
+            <a:pPr algn="ctr" indent="0" marL="0">
+              <a:buNone/>
+            </a:pPr>
+            <a:r>
+              <a:rPr lang="en-US" sz="900" b="1" spc="100" kern="0" dirty="0">
                 <a:solidFill>
                   <a:srgbClr val="FFFFFF"/>
                 </a:solidFill>
@@ -13714,14 +14145,14 @@
       </p:sp>
       <p:pic>
         <p:nvPicPr>
-          <p:cNvPr id="6" name="Image 0" descr="preencoded.png"/>
+          <p:cNvPr id="6" name="Image 0" descr="preencoded.png">    </p:cNvPr>
           <p:cNvPicPr>
             <a:picLocks noChangeAspect="1"/>
           </p:cNvPicPr>
           <p:nvPr/>
         </p:nvPicPr>
         <p:blipFill>
-          <a:blip r:embed="rId3"/>
+          <a:blip r:embed="rId1"/>
           <a:stretch>
             <a:fillRect/>
           </a:stretch>
@@ -13799,7 +14230,7 @@
           <a:bodyPr wrap="square" lIns="0" tIns="0" rIns="0" bIns="0" rtlCol="0" anchor="ctr"/>
           <a:lstStyle/>
           <a:p>
-            <a:pPr marL="0" indent="0" algn="ctr">
+            <a:pPr algn="ctr" indent="0" marL="0">
               <a:buNone/>
             </a:pPr>
             <a:r>
@@ -13838,7 +14269,7 @@
           <a:bodyPr wrap="square" lIns="0" tIns="0" rIns="0" bIns="0" rtlCol="0" anchor="ctr"/>
           <a:lstStyle/>
           <a:p>
-            <a:pPr marL="0" indent="0">
+            <a:pPr indent="0" marL="0">
               <a:buNone/>
             </a:pPr>
             <a:r>
@@ -13877,7 +14308,7 @@
           <a:bodyPr wrap="square" lIns="0" tIns="0" rIns="0" bIns="0" rtlCol="0" anchor="t"/>
           <a:lstStyle/>
           <a:p>
-            <a:pPr marL="0" indent="0">
+            <a:pPr indent="0" marL="0">
               <a:lnSpc>
                 <a:spcPct val="108000"/>
               </a:lnSpc>
@@ -13961,7 +14392,7 @@
           <a:bodyPr wrap="square" lIns="0" tIns="0" rIns="0" bIns="0" rtlCol="0" anchor="ctr"/>
           <a:lstStyle/>
           <a:p>
-            <a:pPr marL="0" indent="0" algn="ctr">
+            <a:pPr algn="ctr" indent="0" marL="0">
               <a:buNone/>
             </a:pPr>
             <a:r>
@@ -14000,7 +14431,7 @@
           <a:bodyPr wrap="square" lIns="0" tIns="0" rIns="0" bIns="0" rtlCol="0" anchor="ctr"/>
           <a:lstStyle/>
           <a:p>
-            <a:pPr marL="0" indent="0">
+            <a:pPr indent="0" marL="0">
               <a:buNone/>
             </a:pPr>
             <a:r>
@@ -14039,7 +14470,7 @@
           <a:bodyPr wrap="square" lIns="0" tIns="0" rIns="0" bIns="0" rtlCol="0" anchor="t"/>
           <a:lstStyle/>
           <a:p>
-            <a:pPr marL="0" indent="0">
+            <a:pPr indent="0" marL="0">
               <a:lnSpc>
                 <a:spcPct val="108000"/>
               </a:lnSpc>
@@ -14123,7 +14554,7 @@
           <a:bodyPr wrap="square" lIns="0" tIns="0" rIns="0" bIns="0" rtlCol="0" anchor="ctr"/>
           <a:lstStyle/>
           <a:p>
-            <a:pPr marL="0" indent="0" algn="ctr">
+            <a:pPr algn="ctr" indent="0" marL="0">
               <a:buNone/>
             </a:pPr>
             <a:r>
@@ -14162,7 +14593,7 @@
           <a:bodyPr wrap="square" lIns="0" tIns="0" rIns="0" bIns="0" rtlCol="0" anchor="ctr"/>
           <a:lstStyle/>
           <a:p>
-            <a:pPr marL="0" indent="0">
+            <a:pPr indent="0" marL="0">
               <a:buNone/>
             </a:pPr>
             <a:r>
@@ -14201,7 +14632,7 @@
           <a:bodyPr wrap="square" lIns="0" tIns="0" rIns="0" bIns="0" rtlCol="0" anchor="t"/>
           <a:lstStyle/>
           <a:p>
-            <a:pPr marL="0" indent="0">
+            <a:pPr indent="0" marL="0">
               <a:lnSpc>
                 <a:spcPct val="108000"/>
               </a:lnSpc>
@@ -14285,7 +14716,7 @@
           <a:bodyPr wrap="square" lIns="0" tIns="0" rIns="0" bIns="0" rtlCol="0" anchor="ctr"/>
           <a:lstStyle/>
           <a:p>
-            <a:pPr marL="0" indent="0" algn="ctr">
+            <a:pPr algn="ctr" indent="0" marL="0">
               <a:buNone/>
             </a:pPr>
             <a:r>
@@ -14324,7 +14755,7 @@
           <a:bodyPr wrap="square" lIns="0" tIns="0" rIns="0" bIns="0" rtlCol="0" anchor="ctr"/>
           <a:lstStyle/>
           <a:p>
-            <a:pPr marL="0" indent="0">
+            <a:pPr indent="0" marL="0">
               <a:buNone/>
             </a:pPr>
             <a:r>
@@ -14363,7 +14794,7 @@
           <a:bodyPr wrap="square" lIns="0" tIns="0" rIns="0" bIns="0" rtlCol="0" anchor="t"/>
           <a:lstStyle/>
           <a:p>
-            <a:pPr marL="0" indent="0">
+            <a:pPr indent="0" marL="0">
               <a:lnSpc>
                 <a:spcPct val="108000"/>
               </a:lnSpc>
@@ -14393,7 +14824,7 @@
         <p:spPr>
           <a:xfrm>
             <a:off x="566928" y="5074920"/>
-            <a:ext cx="11247120" cy="1051560"/>
+            <a:ext cx="11064240" cy="1051560"/>
           </a:xfrm>
           <a:prstGeom prst="roundRect">
             <a:avLst>
@@ -14408,14 +14839,34 @@
       </p:sp>
       <p:sp>
         <p:nvSpPr>
-          <p:cNvPr id="28" name="Text 25"/>
-          <p:cNvSpPr/>
-          <p:nvPr/>
-        </p:nvSpPr>
-        <p:spPr>
-          <a:xfrm>
-            <a:off x="786384" y="5202936"/>
-            <a:ext cx="10625328" cy="219456"/>
+          <p:cNvPr id="28" name="Shape 25"/>
+          <p:cNvSpPr/>
+          <p:nvPr/>
+        </p:nvSpPr>
+        <p:spPr>
+          <a:xfrm>
+            <a:off x="749808" y="5445252"/>
+            <a:ext cx="310896" cy="310896"/>
+          </a:xfrm>
+          <a:prstGeom prst="ellipse">
+            <a:avLst/>
+          </a:prstGeom>
+          <a:solidFill>
+            <a:srgbClr val="FFFFFF"/>
+          </a:solidFill>
+          <a:ln/>
+        </p:spPr>
+      </p:sp>
+      <p:sp>
+        <p:nvSpPr>
+          <p:cNvPr id="29" name="Text 26"/>
+          <p:cNvSpPr/>
+          <p:nvPr/>
+        </p:nvSpPr>
+        <p:spPr>
+          <a:xfrm>
+            <a:off x="749808" y="5445252"/>
+            <a:ext cx="310896" cy="310896"/>
           </a:xfrm>
           <a:prstGeom prst="rect">
             <a:avLst/>
@@ -14427,11 +14878,50 @@
           <a:bodyPr wrap="square" lIns="0" tIns="0" rIns="0" bIns="0" rtlCol="0" anchor="ctr"/>
           <a:lstStyle/>
           <a:p>
-            <a:pPr marL="0" indent="0">
-              <a:buNone/>
-            </a:pPr>
-            <a:r>
-              <a:rPr lang="en-US" sz="950" b="1" kern="0" spc="150" dirty="0">
+            <a:pPr algn="ctr" indent="0" marL="0">
+              <a:buNone/>
+            </a:pPr>
+            <a:r>
+              <a:rPr lang="en-US" sz="1200" b="1" dirty="0">
+                <a:solidFill>
+                  <a:srgbClr val="5A05F4"/>
+                </a:solidFill>
+                <a:latin typeface="Arial" pitchFamily="34" charset="0"/>
+                <a:ea typeface="Arial" pitchFamily="34" charset="-122"/>
+                <a:cs typeface="Arial" pitchFamily="34" charset="-120"/>
+              </a:rPr>
+              <a:t>?</a:t>
+            </a:r>
+            <a:endParaRPr lang="en-US" sz="1200" dirty="0"/>
+          </a:p>
+        </p:txBody>
+      </p:sp>
+      <p:sp>
+        <p:nvSpPr>
+          <p:cNvPr id="30" name="Text 27"/>
+          <p:cNvSpPr/>
+          <p:nvPr/>
+        </p:nvSpPr>
+        <p:spPr>
+          <a:xfrm>
+            <a:off x="1243584" y="5202936"/>
+            <a:ext cx="10168128" cy="219456"/>
+          </a:xfrm>
+          <a:prstGeom prst="rect">
+            <a:avLst/>
+          </a:prstGeom>
+          <a:noFill/>
+          <a:ln/>
+        </p:spPr>
+        <p:txBody>
+          <a:bodyPr wrap="square" lIns="0" tIns="0" rIns="0" bIns="0" rtlCol="0" anchor="ctr"/>
+          <a:lstStyle/>
+          <a:p>
+            <a:pPr indent="0" marL="0">
+              <a:buNone/>
+            </a:pPr>
+            <a:r>
+              <a:rPr lang="en-US" sz="950" b="1" spc="150" kern="0" dirty="0">
                 <a:solidFill>
                   <a:srgbClr val="FFFFFF"/>
                 </a:solidFill>
@@ -14447,14 +14937,14 @@
       </p:sp>
       <p:sp>
         <p:nvSpPr>
-          <p:cNvPr id="29" name="Text 26"/>
-          <p:cNvSpPr/>
-          <p:nvPr/>
-        </p:nvSpPr>
-        <p:spPr>
-          <a:xfrm>
-            <a:off x="786384" y="5458968"/>
-            <a:ext cx="10625328" cy="539496"/>
+          <p:cNvPr id="31" name="Text 28"/>
+          <p:cNvSpPr/>
+          <p:nvPr/>
+        </p:nvSpPr>
+        <p:spPr>
+          <a:xfrm>
+            <a:off x="1243584" y="5458968"/>
+            <a:ext cx="10168128" cy="539496"/>
           </a:xfrm>
           <a:prstGeom prst="rect">
             <a:avLst/>
@@ -14466,7 +14956,7 @@
           <a:bodyPr wrap="square" lIns="0" tIns="0" rIns="0" bIns="0" rtlCol="0" anchor="ctr"/>
           <a:lstStyle/>
           <a:p>
-            <a:pPr marL="0" indent="0">
+            <a:pPr indent="0" marL="0">
               <a:lnSpc>
                 <a:spcPct val="112000"/>
               </a:lnSpc>
@@ -14489,7 +14979,7 @@
       </p:sp>
       <p:sp>
         <p:nvSpPr>
-          <p:cNvPr id="30" name="Slide Number Placeholder 0"/>
+          <p:cNvPr id="25" name="Slide Number Placeholder 0"/>
           <p:cNvSpPr>
             <a:spLocks noGrp="1"/>
           </p:cNvSpPr>
@@ -14507,7 +14997,7 @@
           </a:prstGeom>
           <a:extLst>
             <a:ext uri="{C572A759-6A51-4108-AA02-DFA0A04FC94B}">
-              <ma14:wrappingTextBoxFlag xmlns="" xmlns:ma14="http://schemas.microsoft.com/office/mac/drawingml/2011/main" val="0"/>
+              <ma14:wrappingTextBoxFlag xmlns:ma14="http://schemas.microsoft.com/office/mac/drawingml/2011/main" val="0"/>
             </a:ext>
           </a:extLst>
         </p:spPr>
@@ -14528,7 +15018,7 @@
           <a:p>
             <a:pPr algn="l"/>
             <a:fld id="{F7021451-1387-4CA6-816F-3879F97B5CBC}" type="slidenum">
-              <a:rPr lang="en-US" b="0"/>
+              <a:rPr b="0" lang="en-US"/>
               <a:t>20</a:t>
             </a:fld>
             <a:endParaRPr lang="en-US"/>
@@ -14603,7 +15093,7 @@
           <a:bodyPr wrap="square" lIns="0" tIns="0" rIns="0" bIns="0" rtlCol="0" anchor="ctr"/>
           <a:lstStyle/>
           <a:p>
-            <a:pPr marL="0" indent="0">
+            <a:pPr indent="0" marL="0">
               <a:buNone/>
             </a:pPr>
             <a:r>
@@ -14664,11 +15154,11 @@
           <a:bodyPr wrap="square" lIns="0" tIns="0" rIns="0" bIns="0" rtlCol="0" anchor="ctr"/>
           <a:lstStyle/>
           <a:p>
-            <a:pPr marL="0" indent="0" algn="ctr">
-              <a:buNone/>
-            </a:pPr>
-            <a:r>
-              <a:rPr lang="en-US" sz="900" b="1" kern="0" spc="100" dirty="0">
+            <a:pPr algn="ctr" indent="0" marL="0">
+              <a:buNone/>
+            </a:pPr>
+            <a:r>
+              <a:rPr lang="en-US" sz="900" b="1" spc="100" kern="0" dirty="0">
                 <a:solidFill>
                   <a:srgbClr val="FFFFFF"/>
                 </a:solidFill>
@@ -14684,14 +15174,14 @@
       </p:sp>
       <p:pic>
         <p:nvPicPr>
-          <p:cNvPr id="6" name="Image 0" descr="preencoded.png"/>
+          <p:cNvPr id="6" name="Image 0" descr="preencoded.png">    </p:cNvPr>
           <p:cNvPicPr>
             <a:picLocks noChangeAspect="1"/>
           </p:cNvPicPr>
           <p:nvPr/>
         </p:nvPicPr>
         <p:blipFill>
-          <a:blip r:embed="rId3"/>
+          <a:blip r:embed="rId1"/>
           <a:stretch>
             <a:fillRect/>
           </a:stretch>
@@ -14747,7 +15237,7 @@
           <a:bodyPr wrap="square" lIns="0" tIns="0" rIns="0" bIns="0" rtlCol="0" anchor="ctr"/>
           <a:lstStyle/>
           <a:p>
-            <a:pPr marL="0" indent="0" algn="ctr">
+            <a:pPr algn="ctr" indent="0" marL="0">
               <a:buNone/>
             </a:pPr>
             <a:r>
@@ -14786,7 +15276,7 @@
           <a:bodyPr wrap="square" lIns="0" tIns="0" rIns="0" bIns="0" rtlCol="0" anchor="ctr"/>
           <a:lstStyle/>
           <a:p>
-            <a:pPr marL="0" indent="0">
+            <a:pPr indent="0" marL="0">
               <a:buNone/>
             </a:pPr>
             <a:r>
@@ -14800,6 +15290,9 @@
               </a:rPr>
               <a:t>Прочитати конфіг  </a:t>
             </a:r>
+            <a:pPr indent="0" marL="0">
+              <a:buNone/>
+            </a:pPr>
             <a:r>
               <a:rPr lang="en-US" sz="1200" dirty="0">
                 <a:solidFill>
@@ -14856,7 +15349,7 @@
           <a:bodyPr wrap="square" lIns="0" tIns="0" rIns="0" bIns="0" rtlCol="0" anchor="ctr"/>
           <a:lstStyle/>
           <a:p>
-            <a:pPr marL="0" indent="0" algn="ctr">
+            <a:pPr algn="ctr" indent="0" marL="0">
               <a:buNone/>
             </a:pPr>
             <a:r>
@@ -14895,7 +15388,7 @@
           <a:bodyPr wrap="square" lIns="0" tIns="0" rIns="0" bIns="0" rtlCol="0" anchor="ctr"/>
           <a:lstStyle/>
           <a:p>
-            <a:pPr marL="0" indent="0">
+            <a:pPr indent="0" marL="0">
               <a:buNone/>
             </a:pPr>
             <a:r>
@@ -14909,6 +15402,9 @@
               </a:rPr>
               <a:t>Написати роутер  </a:t>
             </a:r>
+            <a:pPr indent="0" marL="0">
+              <a:buNone/>
+            </a:pPr>
             <a:r>
               <a:rPr lang="en-US" sz="1200" dirty="0">
                 <a:solidFill>
@@ -14965,7 +15461,7 @@
           <a:bodyPr wrap="square" lIns="0" tIns="0" rIns="0" bIns="0" rtlCol="0" anchor="ctr"/>
           <a:lstStyle/>
           <a:p>
-            <a:pPr marL="0" indent="0" algn="ctr">
+            <a:pPr algn="ctr" indent="0" marL="0">
               <a:buNone/>
             </a:pPr>
             <a:r>
@@ -15004,7 +15500,7 @@
           <a:bodyPr wrap="square" lIns="0" tIns="0" rIns="0" bIns="0" rtlCol="0" anchor="ctr"/>
           <a:lstStyle/>
           <a:p>
-            <a:pPr marL="0" indent="0">
+            <a:pPr indent="0" marL="0">
               <a:buNone/>
             </a:pPr>
             <a:r>
@@ -15018,6 +15514,9 @@
               </a:rPr>
               <a:t>Побачити розподіл  </a:t>
             </a:r>
+            <a:pPr indent="0" marL="0">
+              <a:buNone/>
+            </a:pPr>
             <a:r>
               <a:rPr lang="en-US" sz="1200" dirty="0">
                 <a:solidFill>
@@ -15074,7 +15573,7 @@
           <a:bodyPr wrap="square" lIns="0" tIns="0" rIns="0" bIns="0" rtlCol="0" anchor="ctr"/>
           <a:lstStyle/>
           <a:p>
-            <a:pPr marL="0" indent="0" algn="ctr">
+            <a:pPr algn="ctr" indent="0" marL="0">
               <a:buNone/>
             </a:pPr>
             <a:r>
@@ -15113,7 +15612,7 @@
           <a:bodyPr wrap="square" lIns="0" tIns="0" rIns="0" bIns="0" rtlCol="0" anchor="ctr"/>
           <a:lstStyle/>
           <a:p>
-            <a:pPr marL="0" indent="0">
+            <a:pPr indent="0" marL="0">
               <a:buNone/>
             </a:pPr>
             <a:r>
@@ -15127,6 +15626,9 @@
               </a:rPr>
               <a:t>Додати «третього» на папері  </a:t>
             </a:r>
+            <a:pPr indent="0" marL="0">
+              <a:buNone/>
+            </a:pPr>
             <a:r>
               <a:rPr lang="en-US" sz="1200" dirty="0">
                 <a:solidFill>
@@ -15183,7 +15685,7 @@
           <a:bodyPr wrap="square" lIns="0" tIns="0" rIns="0" bIns="0" rtlCol="0" anchor="ctr"/>
           <a:lstStyle/>
           <a:p>
-            <a:pPr marL="0" indent="0" algn="ctr">
+            <a:pPr algn="ctr" indent="0" marL="0">
               <a:buNone/>
             </a:pPr>
             <a:r>
@@ -15222,7 +15724,7 @@
           <a:bodyPr wrap="square" lIns="0" tIns="0" rIns="0" bIns="0" rtlCol="0" anchor="ctr"/>
           <a:lstStyle/>
           <a:p>
-            <a:pPr marL="0" indent="0">
+            <a:pPr indent="0" marL="0">
               <a:buNone/>
             </a:pPr>
             <a:r>
@@ -15236,6 +15738,9 @@
               </a:rPr>
               <a:t>Tier-політика · опційно  </a:t>
             </a:r>
+            <a:pPr indent="0" marL="0">
+              <a:buNone/>
+            </a:pPr>
             <a:r>
               <a:rPr lang="en-US" sz="1200" dirty="0">
                 <a:solidFill>
@@ -15271,7 +15776,7 @@
           </a:prstGeom>
           <a:extLst>
             <a:ext uri="{C572A759-6A51-4108-AA02-DFA0A04FC94B}">
-              <ma14:wrappingTextBoxFlag xmlns="" xmlns:ma14="http://schemas.microsoft.com/office/mac/drawingml/2011/main" val="0"/>
+              <ma14:wrappingTextBoxFlag xmlns:ma14="http://schemas.microsoft.com/office/mac/drawingml/2011/main" val="0"/>
             </a:ext>
           </a:extLst>
         </p:spPr>
@@ -15292,7 +15797,7 @@
           <a:p>
             <a:pPr algn="l"/>
             <a:fld id="{F7021451-1387-4CA6-816F-3879F97B5CBC}" type="slidenum">
-              <a:rPr lang="en-US" b="0"/>
+              <a:rPr b="0" lang="en-US"/>
               <a:t>21</a:t>
             </a:fld>
             <a:endParaRPr lang="en-US"/>
@@ -15345,11 +15850,11 @@
           <a:bodyPr wrap="square" lIns="0" tIns="0" rIns="0" bIns="0" rtlCol="0" anchor="ctr"/>
           <a:lstStyle/>
           <a:p>
-            <a:pPr marL="0" indent="0">
-              <a:buNone/>
-            </a:pPr>
-            <a:r>
-              <a:rPr lang="en-US" sz="1200" b="1" kern="0" spc="400" dirty="0">
+            <a:pPr indent="0" marL="0">
+              <a:buNone/>
+            </a:pPr>
+            <a:r>
+              <a:rPr lang="en-US" sz="1200" b="1" spc="400" kern="0" dirty="0">
                 <a:solidFill>
                   <a:srgbClr val="FFFFFF"/>
                 </a:solidFill>
@@ -15384,7 +15889,7 @@
           <a:bodyPr wrap="square" lIns="0" tIns="0" rIns="0" bIns="0" rtlCol="0" anchor="ctr"/>
           <a:lstStyle/>
           <a:p>
-            <a:pPr marL="0" indent="0">
+            <a:pPr indent="0" marL="0">
               <a:buNone/>
             </a:pPr>
             <a:r>
@@ -15423,7 +15928,7 @@
           <a:bodyPr wrap="square" lIns="0" tIns="0" rIns="0" bIns="0" rtlCol="0" anchor="t"/>
           <a:lstStyle/>
           <a:p>
-            <a:pPr marL="0" indent="0">
+            <a:pPr indent="0" marL="0">
               <a:buNone/>
             </a:pPr>
             <a:r>
@@ -15509,7 +16014,7 @@
           <a:bodyPr wrap="square" lIns="0" tIns="0" rIns="0" bIns="0" rtlCol="0" anchor="ctr"/>
           <a:lstStyle/>
           <a:p>
-            <a:pPr marL="0" indent="0">
+            <a:pPr indent="0" marL="0">
               <a:buNone/>
             </a:pPr>
             <a:r>
@@ -15575,11 +16080,11 @@
           <a:bodyPr wrap="square" lIns="0" tIns="0" rIns="0" bIns="0" rtlCol="0" anchor="ctr"/>
           <a:lstStyle/>
           <a:p>
-            <a:pPr marL="0" indent="0" algn="ctr">
-              <a:buNone/>
-            </a:pPr>
-            <a:r>
-              <a:rPr lang="en-US" sz="900" b="1" kern="0" spc="100" dirty="0">
+            <a:pPr algn="ctr" indent="0" marL="0">
+              <a:buNone/>
+            </a:pPr>
+            <a:r>
+              <a:rPr lang="en-US" sz="900" b="1" spc="100" kern="0" dirty="0">
                 <a:solidFill>
                   <a:srgbClr val="1A4FBF"/>
                 </a:solidFill>
@@ -15595,14 +16100,14 @@
       </p:sp>
       <p:pic>
         <p:nvPicPr>
-          <p:cNvPr id="6" name="Image 0" descr="preencoded.png"/>
+          <p:cNvPr id="6" name="Image 0" descr="preencoded.png">    </p:cNvPr>
           <p:cNvPicPr>
             <a:picLocks noChangeAspect="1"/>
           </p:cNvPicPr>
           <p:nvPr/>
         </p:nvPicPr>
         <p:blipFill>
-          <a:blip r:embed="rId3"/>
+          <a:blip r:embed="rId1"/>
           <a:stretch>
             <a:fillRect/>
           </a:stretch>
@@ -15660,7 +16165,7 @@
           <a:bodyPr wrap="square" lIns="0" tIns="0" rIns="0" bIns="0" rtlCol="0" anchor="ctr"/>
           <a:lstStyle/>
           <a:p>
-            <a:pPr marL="0" indent="0">
+            <a:pPr indent="0" marL="0">
               <a:buNone/>
             </a:pPr>
             <a:r>
@@ -15699,7 +16204,7 @@
           <a:bodyPr wrap="square" lIns="0" tIns="0" rIns="0" bIns="0" rtlCol="0" anchor="t"/>
           <a:lstStyle/>
           <a:p>
-            <a:pPr marL="0" indent="0">
+            <a:pPr indent="0" marL="0">
               <a:lnSpc>
                 <a:spcPct val="108000"/>
               </a:lnSpc>
@@ -15763,7 +16268,7 @@
           <a:bodyPr wrap="square" lIns="0" tIns="0" rIns="0" bIns="0" rtlCol="0" anchor="ctr"/>
           <a:lstStyle/>
           <a:p>
-            <a:pPr marL="0" indent="0">
+            <a:pPr indent="0" marL="0">
               <a:buNone/>
             </a:pPr>
             <a:r>
@@ -15802,7 +16307,7 @@
           <a:bodyPr wrap="square" lIns="0" tIns="0" rIns="0" bIns="0" rtlCol="0" anchor="t"/>
           <a:lstStyle/>
           <a:p>
-            <a:pPr marL="0" indent="0">
+            <a:pPr indent="0" marL="0">
               <a:lnSpc>
                 <a:spcPct val="108000"/>
               </a:lnSpc>
@@ -15866,7 +16371,7 @@
           <a:bodyPr wrap="square" lIns="0" tIns="0" rIns="0" bIns="0" rtlCol="0" anchor="ctr"/>
           <a:lstStyle/>
           <a:p>
-            <a:pPr marL="0" indent="0">
+            <a:pPr indent="0" marL="0">
               <a:buNone/>
             </a:pPr>
             <a:r>
@@ -15905,7 +16410,7 @@
           <a:bodyPr wrap="square" lIns="0" tIns="0" rIns="0" bIns="0" rtlCol="0" anchor="t"/>
           <a:lstStyle/>
           <a:p>
-            <a:pPr marL="0" indent="0">
+            <a:pPr indent="0" marL="0">
               <a:lnSpc>
                 <a:spcPct val="108000"/>
               </a:lnSpc>
@@ -15974,7 +16479,7 @@
           <a:bodyPr wrap="square" lIns="0" tIns="0" rIns="0" bIns="0" rtlCol="0" anchor="ctr"/>
           <a:lstStyle/>
           <a:p>
-            <a:pPr marL="0" indent="0">
+            <a:pPr indent="0" marL="0">
               <a:lnSpc>
                 <a:spcPct val="112000"/>
               </a:lnSpc>
@@ -16015,7 +16520,7 @@
           </a:prstGeom>
           <a:extLst>
             <a:ext uri="{C572A759-6A51-4108-AA02-DFA0A04FC94B}">
-              <ma14:wrappingTextBoxFlag xmlns="" xmlns:ma14="http://schemas.microsoft.com/office/mac/drawingml/2011/main" val="0"/>
+              <ma14:wrappingTextBoxFlag xmlns:ma14="http://schemas.microsoft.com/office/mac/drawingml/2011/main" val="0"/>
             </a:ext>
           </a:extLst>
         </p:spPr>
@@ -16036,7 +16541,7 @@
           <a:p>
             <a:pPr algn="l"/>
             <a:fld id="{F7021451-1387-4CA6-816F-3879F97B5CBC}" type="slidenum">
-              <a:rPr lang="en-US" b="0"/>
+              <a:rPr b="0" lang="en-US"/>
               <a:t>23</a:t>
             </a:fld>
             <a:endParaRPr lang="en-US"/>
@@ -16111,7 +16616,7 @@
           <a:bodyPr wrap="square" lIns="0" tIns="0" rIns="0" bIns="0" rtlCol="0" anchor="ctr"/>
           <a:lstStyle/>
           <a:p>
-            <a:pPr marL="0" indent="0">
+            <a:pPr indent="0" marL="0">
               <a:buNone/>
             </a:pPr>
             <a:r>
@@ -16177,11 +16682,11 @@
           <a:bodyPr wrap="square" lIns="0" tIns="0" rIns="0" bIns="0" rtlCol="0" anchor="ctr"/>
           <a:lstStyle/>
           <a:p>
-            <a:pPr marL="0" indent="0" algn="ctr">
-              <a:buNone/>
-            </a:pPr>
-            <a:r>
-              <a:rPr lang="en-US" sz="900" b="1" kern="0" spc="100" dirty="0">
+            <a:pPr algn="ctr" indent="0" marL="0">
+              <a:buNone/>
+            </a:pPr>
+            <a:r>
+              <a:rPr lang="en-US" sz="900" b="1" spc="100" kern="0" dirty="0">
                 <a:solidFill>
                   <a:srgbClr val="1A4FBF"/>
                 </a:solidFill>
@@ -16197,14 +16702,14 @@
       </p:sp>
       <p:pic>
         <p:nvPicPr>
-          <p:cNvPr id="6" name="Image 0" descr="preencoded.png"/>
+          <p:cNvPr id="6" name="Image 0" descr="preencoded.png">    </p:cNvPr>
           <p:cNvPicPr>
             <a:picLocks noChangeAspect="1"/>
           </p:cNvPicPr>
           <p:nvPr/>
         </p:nvPicPr>
         <p:blipFill>
-          <a:blip r:embed="rId3"/>
+          <a:blip r:embed="rId1"/>
           <a:stretch>
             <a:fillRect/>
           </a:stretch>
@@ -16334,7 +16839,7 @@
           <a:bodyPr wrap="square" lIns="0" tIns="0" rIns="0" bIns="0" rtlCol="0" anchor="ctr"/>
           <a:lstStyle/>
           <a:p>
-            <a:pPr marL="0" indent="0">
+            <a:pPr indent="0" marL="0">
               <a:buNone/>
             </a:pPr>
             <a:r>
@@ -16440,7 +16945,7 @@
           <a:bodyPr wrap="square" lIns="0" tIns="0" rIns="0" bIns="0" rtlCol="0" anchor="ctr"/>
           <a:lstStyle/>
           <a:p>
-            <a:pPr marL="0" indent="0">
+            <a:pPr indent="0" marL="0">
               <a:buNone/>
             </a:pPr>
             <a:r>
@@ -16546,7 +17051,7 @@
           <a:bodyPr wrap="square" lIns="0" tIns="0" rIns="0" bIns="0" rtlCol="0" anchor="ctr"/>
           <a:lstStyle/>
           <a:p>
-            <a:pPr marL="0" indent="0">
+            <a:pPr indent="0" marL="0">
               <a:buNone/>
             </a:pPr>
             <a:r>
@@ -16652,7 +17157,7 @@
           <a:bodyPr wrap="square" lIns="0" tIns="0" rIns="0" bIns="0" rtlCol="0" anchor="ctr"/>
           <a:lstStyle/>
           <a:p>
-            <a:pPr marL="0" indent="0">
+            <a:pPr indent="0" marL="0">
               <a:buNone/>
             </a:pPr>
             <a:r>
@@ -16691,7 +17196,7 @@
           <a:bodyPr wrap="square" lIns="0" tIns="0" rIns="0" bIns="0" rtlCol="0" anchor="ctr"/>
           <a:lstStyle/>
           <a:p>
-            <a:pPr marL="0" indent="0">
+            <a:pPr indent="0" marL="0">
               <a:buNone/>
             </a:pPr>
             <a:r>
@@ -16729,7 +17234,7 @@
           </a:prstGeom>
           <a:extLst>
             <a:ext uri="{C572A759-6A51-4108-AA02-DFA0A04FC94B}">
-              <ma14:wrappingTextBoxFlag xmlns="" xmlns:ma14="http://schemas.microsoft.com/office/mac/drawingml/2011/main" val="0"/>
+              <ma14:wrappingTextBoxFlag xmlns:ma14="http://schemas.microsoft.com/office/mac/drawingml/2011/main" val="0"/>
             </a:ext>
           </a:extLst>
         </p:spPr>
@@ -16750,7 +17255,7 @@
           <a:p>
             <a:pPr algn="l"/>
             <a:fld id="{F7021451-1387-4CA6-816F-3879F97B5CBC}" type="slidenum">
-              <a:rPr lang="en-US" b="0"/>
+              <a:rPr b="0" lang="en-US"/>
               <a:t>24</a:t>
             </a:fld>
             <a:endParaRPr lang="en-US"/>
@@ -16825,7 +17330,7 @@
           <a:bodyPr wrap="square" lIns="0" tIns="0" rIns="0" bIns="0" rtlCol="0" anchor="ctr"/>
           <a:lstStyle/>
           <a:p>
-            <a:pPr marL="0" indent="0">
+            <a:pPr indent="0" marL="0">
               <a:buNone/>
             </a:pPr>
             <a:r>
@@ -16891,11 +17396,11 @@
           <a:bodyPr wrap="square" lIns="0" tIns="0" rIns="0" bIns="0" rtlCol="0" anchor="ctr"/>
           <a:lstStyle/>
           <a:p>
-            <a:pPr marL="0" indent="0" algn="ctr">
-              <a:buNone/>
-            </a:pPr>
-            <a:r>
-              <a:rPr lang="en-US" sz="900" b="1" kern="0" spc="100" dirty="0">
+            <a:pPr algn="ctr" indent="0" marL="0">
+              <a:buNone/>
+            </a:pPr>
+            <a:r>
+              <a:rPr lang="en-US" sz="900" b="1" spc="100" kern="0" dirty="0">
                 <a:solidFill>
                   <a:srgbClr val="1A4FBF"/>
                 </a:solidFill>
@@ -16911,14 +17416,14 @@
       </p:sp>
       <p:pic>
         <p:nvPicPr>
-          <p:cNvPr id="6" name="Image 0" descr="preencoded.png"/>
+          <p:cNvPr id="6" name="Image 0" descr="preencoded.png">    </p:cNvPr>
           <p:cNvPicPr>
             <a:picLocks noChangeAspect="1"/>
           </p:cNvPicPr>
           <p:nvPr/>
         </p:nvPicPr>
         <p:blipFill>
-          <a:blip r:embed="rId3"/>
+          <a:blip r:embed="rId1"/>
           <a:stretch>
             <a:fillRect/>
           </a:stretch>
@@ -17046,7 +17551,7 @@
           <a:bodyPr wrap="square" lIns="0" tIns="0" rIns="0" bIns="0" rtlCol="0" anchor="ctr"/>
           <a:lstStyle/>
           <a:p>
-            <a:pPr marL="0" indent="0">
+            <a:pPr indent="0" marL="0">
               <a:buNone/>
             </a:pPr>
             <a:r>
@@ -17060,6 +17565,9 @@
               </a:rPr>
               <a:t>Рішення про модель — у конфізі адаптера   </a:t>
             </a:r>
+            <a:pPr indent="0" marL="0">
+              <a:buNone/>
+            </a:pPr>
             <a:r>
               <a:rPr lang="en-US" sz="1200" dirty="0">
                 <a:solidFill>
@@ -17188,7 +17696,7 @@
           <a:bodyPr wrap="square" lIns="0" tIns="0" rIns="0" bIns="0" rtlCol="0" anchor="ctr"/>
           <a:lstStyle/>
           <a:p>
-            <a:pPr marL="0" indent="0">
+            <a:pPr indent="0" marL="0">
               <a:buNone/>
             </a:pPr>
             <a:r>
@@ -17202,6 +17710,9 @@
               </a:rPr>
               <a:t>Жорстке ім'я моделі по всьому коду   </a:t>
             </a:r>
+            <a:pPr indent="0" marL="0">
+              <a:buNone/>
+            </a:pPr>
             <a:r>
               <a:rPr lang="en-US" sz="1200" dirty="0">
                 <a:solidFill>
@@ -17330,7 +17841,7 @@
           <a:bodyPr wrap="square" lIns="0" tIns="0" rIns="0" bIns="0" rtlCol="0" anchor="ctr"/>
           <a:lstStyle/>
           <a:p>
-            <a:pPr marL="0" indent="0">
+            <a:pPr indent="0" marL="0">
               <a:buNone/>
             </a:pPr>
             <a:r>
@@ -17344,6 +17855,9 @@
               </a:rPr>
               <a:t>Роутинг за випадковим числом   </a:t>
             </a:r>
+            <a:pPr indent="0" marL="0">
+              <a:buNone/>
+            </a:pPr>
             <a:r>
               <a:rPr lang="en-US" sz="1200" dirty="0">
                 <a:solidFill>
@@ -17472,7 +17986,7 @@
           <a:bodyPr wrap="square" lIns="0" tIns="0" rIns="0" bIns="0" rtlCol="0" anchor="ctr"/>
           <a:lstStyle/>
           <a:p>
-            <a:pPr marL="0" indent="0">
+            <a:pPr indent="0" marL="0">
               <a:buNone/>
             </a:pPr>
             <a:r>
@@ -17486,6 +18000,9 @@
               </a:rPr>
               <a:t>Alias у проді   </a:t>
             </a:r>
+            <a:pPr indent="0" marL="0">
+              <a:buNone/>
+            </a:pPr>
             <a:r>
               <a:rPr lang="en-US" sz="1200" dirty="0">
                 <a:solidFill>
@@ -17503,7 +18020,7 @@
       </p:sp>
       <p:sp>
         <p:nvSpPr>
-          <p:cNvPr id="27" name="Slide Number Placeholder 0"/>
+          <p:cNvPr id="25" name="Slide Number Placeholder 0"/>
           <p:cNvSpPr>
             <a:spLocks noGrp="1"/>
           </p:cNvSpPr>
@@ -17521,7 +18038,7 @@
           </a:prstGeom>
           <a:extLst>
             <a:ext uri="{C572A759-6A51-4108-AA02-DFA0A04FC94B}">
-              <ma14:wrappingTextBoxFlag xmlns="" xmlns:ma14="http://schemas.microsoft.com/office/mac/drawingml/2011/main" val="0"/>
+              <ma14:wrappingTextBoxFlag xmlns:ma14="http://schemas.microsoft.com/office/mac/drawingml/2011/main" val="0"/>
             </a:ext>
           </a:extLst>
         </p:spPr>
@@ -17542,7 +18059,7 @@
           <a:p>
             <a:pPr algn="l"/>
             <a:fld id="{F7021451-1387-4CA6-816F-3879F97B5CBC}" type="slidenum">
-              <a:rPr lang="en-US" b="0"/>
+              <a:rPr b="0" lang="en-US"/>
               <a:t>25</a:t>
             </a:fld>
             <a:endParaRPr lang="en-US"/>
@@ -17617,7 +18134,7 @@
           <a:bodyPr wrap="square" lIns="0" tIns="0" rIns="0" bIns="0" rtlCol="0" anchor="ctr"/>
           <a:lstStyle/>
           <a:p>
-            <a:pPr marL="0" indent="0">
+            <a:pPr indent="0" marL="0">
               <a:buNone/>
             </a:pPr>
             <a:r>
@@ -17678,11 +18195,11 @@
           <a:bodyPr wrap="square" lIns="0" tIns="0" rIns="0" bIns="0" rtlCol="0" anchor="ctr"/>
           <a:lstStyle/>
           <a:p>
-            <a:pPr marL="0" indent="0" algn="ctr">
-              <a:buNone/>
-            </a:pPr>
-            <a:r>
-              <a:rPr lang="en-US" sz="900" b="1" kern="0" spc="100" dirty="0">
+            <a:pPr algn="ctr" indent="0" marL="0">
+              <a:buNone/>
+            </a:pPr>
+            <a:r>
+              <a:rPr lang="en-US" sz="900" b="1" spc="100" kern="0" dirty="0">
                 <a:solidFill>
                   <a:srgbClr val="FFFFFF"/>
                 </a:solidFill>
@@ -17698,14 +18215,14 @@
       </p:sp>
       <p:pic>
         <p:nvPicPr>
-          <p:cNvPr id="6" name="Image 0" descr="preencoded.png"/>
+          <p:cNvPr id="6" name="Image 0" descr="preencoded.png">    </p:cNvPr>
           <p:cNvPicPr>
             <a:picLocks noChangeAspect="1"/>
           </p:cNvPicPr>
           <p:nvPr/>
         </p:nvPicPr>
         <p:blipFill>
-          <a:blip r:embed="rId3"/>
+          <a:blip r:embed="rId1"/>
           <a:stretch>
             <a:fillRect/>
           </a:stretch>
@@ -17763,7 +18280,7 @@
           <a:bodyPr wrap="square" lIns="0" tIns="0" rIns="0" bIns="0" rtlCol="0" anchor="ctr"/>
           <a:lstStyle/>
           <a:p>
-            <a:pPr marL="0" indent="0">
+            <a:pPr indent="0" marL="0">
               <a:buNone/>
             </a:pPr>
             <a:r>
@@ -17802,7 +18319,7 @@
           <a:bodyPr wrap="square" lIns="0" tIns="0" rIns="0" bIns="0" rtlCol="0" anchor="t"/>
           <a:lstStyle/>
           <a:p>
-            <a:pPr marL="0" indent="0">
+            <a:pPr indent="0" marL="0">
               <a:lnSpc>
                 <a:spcPct val="108000"/>
               </a:lnSpc>
@@ -17822,7 +18339,7 @@
             <a:endParaRPr lang="en-US" sz="1200" dirty="0"/>
           </a:p>
           <a:p>
-            <a:pPr marL="0" indent="0">
+            <a:pPr indent="0" marL="0">
               <a:lnSpc>
                 <a:spcPct val="108000"/>
               </a:lnSpc>
@@ -17831,7 +18348,7 @@
             <a:endParaRPr lang="en-US" sz="1200" dirty="0"/>
           </a:p>
           <a:p>
-            <a:pPr marL="0" indent="0">
+            <a:pPr indent="0" marL="0">
               <a:lnSpc>
                 <a:spcPct val="108000"/>
               </a:lnSpc>
@@ -17851,7 +18368,7 @@
             <a:endParaRPr lang="en-US" sz="1200" dirty="0"/>
           </a:p>
           <a:p>
-            <a:pPr marL="0" indent="0">
+            <a:pPr indent="0" marL="0">
               <a:lnSpc>
                 <a:spcPct val="108000"/>
               </a:lnSpc>
@@ -17860,7 +18377,7 @@
             <a:endParaRPr lang="en-US" sz="1200" dirty="0"/>
           </a:p>
           <a:p>
-            <a:pPr marL="0" indent="0">
+            <a:pPr indent="0" marL="0">
               <a:lnSpc>
                 <a:spcPct val="108000"/>
               </a:lnSpc>
@@ -17924,7 +18441,7 @@
           <a:bodyPr wrap="square" lIns="0" tIns="0" rIns="0" bIns="0" rtlCol="0" anchor="ctr"/>
           <a:lstStyle/>
           <a:p>
-            <a:pPr marL="0" indent="0">
+            <a:pPr indent="0" marL="0">
               <a:buNone/>
             </a:pPr>
             <a:r>
@@ -17963,7 +18480,7 @@
           <a:bodyPr wrap="square" lIns="0" tIns="0" rIns="0" bIns="0" rtlCol="0" anchor="t"/>
           <a:lstStyle/>
           <a:p>
-            <a:pPr marL="0" indent="0">
+            <a:pPr indent="0" marL="0">
               <a:lnSpc>
                 <a:spcPct val="108000"/>
               </a:lnSpc>
@@ -18032,7 +18549,7 @@
           <a:bodyPr wrap="square" lIns="0" tIns="0" rIns="0" bIns="0" rtlCol="0" anchor="ctr"/>
           <a:lstStyle/>
           <a:p>
-            <a:pPr marL="0" indent="0">
+            <a:pPr indent="0" marL="0">
               <a:buNone/>
             </a:pPr>
             <a:r>
@@ -18071,7 +18588,7 @@
           <a:bodyPr wrap="square" lIns="0" tIns="0" rIns="0" bIns="0" rtlCol="0" anchor="t"/>
           <a:lstStyle/>
           <a:p>
-            <a:pPr marL="0" indent="0">
+            <a:pPr indent="0" marL="0">
               <a:buNone/>
             </a:pPr>
             <a:r>
@@ -18109,7 +18626,7 @@
           </a:prstGeom>
           <a:extLst>
             <a:ext uri="{C572A759-6A51-4108-AA02-DFA0A04FC94B}">
-              <ma14:wrappingTextBoxFlag xmlns="" xmlns:ma14="http://schemas.microsoft.com/office/mac/drawingml/2011/main" val="0"/>
+              <ma14:wrappingTextBoxFlag xmlns:ma14="http://schemas.microsoft.com/office/mac/drawingml/2011/main" val="0"/>
             </a:ext>
           </a:extLst>
         </p:spPr>
@@ -18130,7 +18647,7 @@
           <a:p>
             <a:pPr algn="l"/>
             <a:fld id="{F7021451-1387-4CA6-816F-3879F97B5CBC}" type="slidenum">
-              <a:rPr lang="en-US" b="0"/>
+              <a:rPr b="0" lang="en-US"/>
               <a:t>26</a:t>
             </a:fld>
             <a:endParaRPr lang="en-US"/>
@@ -18183,11 +18700,11 @@
           <a:bodyPr wrap="square" lIns="0" tIns="0" rIns="0" bIns="0" rtlCol="0" anchor="ctr"/>
           <a:lstStyle/>
           <a:p>
-            <a:pPr marL="0" indent="0">
-              <a:buNone/>
-            </a:pPr>
-            <a:r>
-              <a:rPr lang="en-US" sz="1200" b="1" kern="0" spc="400" dirty="0">
+            <a:pPr indent="0" marL="0">
+              <a:buNone/>
+            </a:pPr>
+            <a:r>
+              <a:rPr lang="en-US" sz="1200" b="1" spc="400" kern="0" dirty="0">
                 <a:solidFill>
                   <a:srgbClr val="FFFFFF"/>
                 </a:solidFill>
@@ -18222,11 +18739,11 @@
           <a:bodyPr wrap="square" lIns="0" tIns="0" rIns="0" bIns="0" rtlCol="0" anchor="ctr"/>
           <a:lstStyle/>
           <a:p>
-            <a:pPr marL="0" indent="0">
-              <a:buNone/>
-            </a:pPr>
-            <a:r>
-              <a:rPr lang="en-US" sz="1100" b="1" kern="0" spc="300" dirty="0">
+            <a:pPr indent="0" marL="0">
+              <a:buNone/>
+            </a:pPr>
+            <a:r>
+              <a:rPr lang="en-US" sz="1100" b="1" spc="300" kern="0" dirty="0">
                 <a:solidFill>
                   <a:srgbClr val="C4B3F5"/>
                 </a:solidFill>
@@ -18281,7 +18798,7 @@
           <a:bodyPr wrap="square" lIns="0" tIns="0" rIns="0" bIns="0" rtlCol="0" anchor="t"/>
           <a:lstStyle/>
           <a:p>
-            <a:pPr marL="0" indent="0">
+            <a:pPr indent="0" marL="0">
               <a:lnSpc>
                 <a:spcPct val="110000"/>
               </a:lnSpc>
@@ -18343,7 +18860,7 @@
           <a:bodyPr wrap="square" lIns="0" tIns="0" rIns="0" bIns="0" rtlCol="0" anchor="t"/>
           <a:lstStyle/>
           <a:p>
-            <a:pPr marL="0" indent="0">
+            <a:pPr indent="0" marL="0">
               <a:lnSpc>
                 <a:spcPct val="110000"/>
               </a:lnSpc>
@@ -18405,7 +18922,7 @@
           <a:bodyPr wrap="square" lIns="0" tIns="0" rIns="0" bIns="0" rtlCol="0" anchor="t"/>
           <a:lstStyle/>
           <a:p>
-            <a:pPr marL="0" indent="0">
+            <a:pPr indent="0" marL="0">
               <a:lnSpc>
                 <a:spcPct val="110000"/>
               </a:lnSpc>
@@ -18467,7 +18984,7 @@
           <a:bodyPr wrap="square" lIns="0" tIns="0" rIns="0" bIns="0" rtlCol="0" anchor="t"/>
           <a:lstStyle/>
           <a:p>
-            <a:pPr marL="0" indent="0">
+            <a:pPr indent="0" marL="0">
               <a:lnSpc>
                 <a:spcPct val="110000"/>
               </a:lnSpc>
@@ -18529,7 +19046,7 @@
           <a:bodyPr wrap="square" lIns="0" tIns="0" rIns="0" bIns="0" rtlCol="0" anchor="t"/>
           <a:lstStyle/>
           <a:p>
-            <a:pPr marL="0" indent="0">
+            <a:pPr indent="0" marL="0">
               <a:lnSpc>
                 <a:spcPct val="110000"/>
               </a:lnSpc>
@@ -18598,7 +19115,7 @@
           <a:bodyPr wrap="square" lIns="0" tIns="0" rIns="0" bIns="0" rtlCol="0" anchor="ctr"/>
           <a:lstStyle/>
           <a:p>
-            <a:pPr marL="0" indent="0">
+            <a:pPr indent="0" marL="0">
               <a:buNone/>
             </a:pPr>
             <a:r>
@@ -18637,7 +19154,7 @@
           <a:bodyPr wrap="square" lIns="0" tIns="0" rIns="0" bIns="0" rtlCol="0" anchor="t"/>
           <a:lstStyle/>
           <a:p>
-            <a:pPr marL="0" indent="0">
+            <a:pPr indent="0" marL="0">
               <a:lnSpc>
                 <a:spcPct val="115000"/>
               </a:lnSpc>
@@ -18704,11 +19221,11 @@
           <a:bodyPr wrap="square" lIns="0" tIns="0" rIns="0" bIns="0" rtlCol="0" anchor="ctr"/>
           <a:lstStyle/>
           <a:p>
-            <a:pPr marL="0" indent="0">
-              <a:buNone/>
-            </a:pPr>
-            <a:r>
-              <a:rPr lang="en-US" sz="1200" b="1" kern="0" spc="400" dirty="0">
+            <a:pPr indent="0" marL="0">
+              <a:buNone/>
+            </a:pPr>
+            <a:r>
+              <a:rPr lang="en-US" sz="1200" b="1" spc="400" kern="0" dirty="0">
                 <a:solidFill>
                   <a:srgbClr val="FFFFFF"/>
                 </a:solidFill>
@@ -18743,7 +19260,7 @@
           <a:bodyPr wrap="square" lIns="0" tIns="0" rIns="0" bIns="0" rtlCol="0" anchor="ctr"/>
           <a:lstStyle/>
           <a:p>
-            <a:pPr marL="0" indent="0">
+            <a:pPr indent="0" marL="0">
               <a:buNone/>
             </a:pPr>
             <a:r>
@@ -18829,7 +19346,7 @@
           <a:bodyPr wrap="square" lIns="0" tIns="0" rIns="0" bIns="0" rtlCol="0" anchor="ctr"/>
           <a:lstStyle/>
           <a:p>
-            <a:pPr marL="0" indent="0">
+            <a:pPr indent="0" marL="0">
               <a:buNone/>
             </a:pPr>
             <a:r>
@@ -18895,11 +19412,11 @@
           <a:bodyPr wrap="square" lIns="0" tIns="0" rIns="0" bIns="0" rtlCol="0" anchor="ctr"/>
           <a:lstStyle/>
           <a:p>
-            <a:pPr marL="0" indent="0" algn="ctr">
-              <a:buNone/>
-            </a:pPr>
-            <a:r>
-              <a:rPr lang="en-US" sz="900" b="1" kern="0" spc="100" dirty="0">
+            <a:pPr algn="ctr" indent="0" marL="0">
+              <a:buNone/>
+            </a:pPr>
+            <a:r>
+              <a:rPr lang="en-US" sz="900" b="1" spc="100" kern="0" dirty="0">
                 <a:solidFill>
                   <a:srgbClr val="5A05F4"/>
                 </a:solidFill>
@@ -18915,14 +19432,14 @@
       </p:sp>
       <p:pic>
         <p:nvPicPr>
-          <p:cNvPr id="6" name="Image 0" descr="preencoded.png"/>
+          <p:cNvPr id="6" name="Image 0" descr="preencoded.png">    </p:cNvPr>
           <p:cNvPicPr>
             <a:picLocks noChangeAspect="1"/>
           </p:cNvPicPr>
           <p:nvPr/>
         </p:nvPicPr>
         <p:blipFill>
-          <a:blip r:embed="rId3"/>
+          <a:blip r:embed="rId1"/>
           <a:stretch>
             <a:fillRect/>
           </a:stretch>
@@ -19000,7 +19517,7 @@
           <a:bodyPr wrap="square" lIns="0" tIns="0" rIns="0" bIns="0" rtlCol="0" anchor="ctr"/>
           <a:lstStyle/>
           <a:p>
-            <a:pPr marL="0" indent="0" algn="ctr">
+            <a:pPr algn="ctr" indent="0" marL="0">
               <a:buNone/>
             </a:pPr>
             <a:r>
@@ -19039,7 +19556,7 @@
           <a:bodyPr wrap="square" lIns="0" tIns="0" rIns="0" bIns="0" rtlCol="0" anchor="ctr"/>
           <a:lstStyle/>
           <a:p>
-            <a:pPr marL="0" indent="0">
+            <a:pPr indent="0" marL="0">
               <a:buNone/>
             </a:pPr>
             <a:r>
@@ -19120,7 +19637,7 @@
           <a:bodyPr wrap="square" lIns="0" tIns="0" rIns="0" bIns="0" rtlCol="0" anchor="ctr"/>
           <a:lstStyle/>
           <a:p>
-            <a:pPr marL="0" indent="0" algn="ctr">
+            <a:pPr algn="ctr" indent="0" marL="0">
               <a:buNone/>
             </a:pPr>
             <a:r>
@@ -19159,7 +19676,7 @@
           <a:bodyPr wrap="square" lIns="0" tIns="0" rIns="0" bIns="0" rtlCol="0" anchor="ctr"/>
           <a:lstStyle/>
           <a:p>
-            <a:pPr marL="0" indent="0">
+            <a:pPr indent="0" marL="0">
               <a:buNone/>
             </a:pPr>
             <a:r>
@@ -19240,7 +19757,7 @@
           <a:bodyPr wrap="square" lIns="0" tIns="0" rIns="0" bIns="0" rtlCol="0" anchor="ctr"/>
           <a:lstStyle/>
           <a:p>
-            <a:pPr marL="0" indent="0" algn="ctr">
+            <a:pPr algn="ctr" indent="0" marL="0">
               <a:buNone/>
             </a:pPr>
             <a:r>
@@ -19279,7 +19796,7 @@
           <a:bodyPr wrap="square" lIns="0" tIns="0" rIns="0" bIns="0" rtlCol="0" anchor="ctr"/>
           <a:lstStyle/>
           <a:p>
-            <a:pPr marL="0" indent="0">
+            <a:pPr indent="0" marL="0">
               <a:buNone/>
             </a:pPr>
             <a:r>
@@ -19360,7 +19877,7 @@
           <a:bodyPr wrap="square" lIns="0" tIns="0" rIns="0" bIns="0" rtlCol="0" anchor="ctr"/>
           <a:lstStyle/>
           <a:p>
-            <a:pPr marL="0" indent="0" algn="ctr">
+            <a:pPr algn="ctr" indent="0" marL="0">
               <a:buNone/>
             </a:pPr>
             <a:r>
@@ -19399,7 +19916,7 @@
           <a:bodyPr wrap="square" lIns="0" tIns="0" rIns="0" bIns="0" rtlCol="0" anchor="ctr"/>
           <a:lstStyle/>
           <a:p>
-            <a:pPr marL="0" indent="0">
+            <a:pPr indent="0" marL="0">
               <a:buNone/>
             </a:pPr>
             <a:r>
@@ -19480,7 +19997,7 @@
           <a:bodyPr wrap="square" lIns="0" tIns="0" rIns="0" bIns="0" rtlCol="0" anchor="ctr"/>
           <a:lstStyle/>
           <a:p>
-            <a:pPr marL="0" indent="0" algn="ctr">
+            <a:pPr algn="ctr" indent="0" marL="0">
               <a:buNone/>
             </a:pPr>
             <a:r>
@@ -19519,7 +20036,7 @@
           <a:bodyPr wrap="square" lIns="0" tIns="0" rIns="0" bIns="0" rtlCol="0" anchor="ctr"/>
           <a:lstStyle/>
           <a:p>
-            <a:pPr marL="0" indent="0">
+            <a:pPr indent="0" marL="0">
               <a:buNone/>
             </a:pPr>
             <a:r>
@@ -19600,7 +20117,7 @@
           <a:bodyPr wrap="square" lIns="0" tIns="0" rIns="0" bIns="0" rtlCol="0" anchor="ctr"/>
           <a:lstStyle/>
           <a:p>
-            <a:pPr marL="0" indent="0" algn="ctr">
+            <a:pPr algn="ctr" indent="0" marL="0">
               <a:buNone/>
             </a:pPr>
             <a:r>
@@ -19639,7 +20156,7 @@
           <a:bodyPr wrap="square" lIns="0" tIns="0" rIns="0" bIns="0" rtlCol="0" anchor="ctr"/>
           <a:lstStyle/>
           <a:p>
-            <a:pPr marL="0" indent="0">
+            <a:pPr indent="0" marL="0">
               <a:buNone/>
             </a:pPr>
             <a:r>
@@ -19720,7 +20237,7 @@
           <a:bodyPr wrap="square" lIns="0" tIns="0" rIns="0" bIns="0" rtlCol="0" anchor="ctr"/>
           <a:lstStyle/>
           <a:p>
-            <a:pPr marL="0" indent="0" algn="ctr">
+            <a:pPr algn="ctr" indent="0" marL="0">
               <a:buNone/>
             </a:pPr>
             <a:r>
@@ -19759,7 +20276,7 @@
           <a:bodyPr wrap="square" lIns="0" tIns="0" rIns="0" bIns="0" rtlCol="0" anchor="ctr"/>
           <a:lstStyle/>
           <a:p>
-            <a:pPr marL="0" indent="0">
+            <a:pPr indent="0" marL="0">
               <a:buNone/>
             </a:pPr>
             <a:r>
@@ -19840,7 +20357,7 @@
           <a:bodyPr wrap="square" lIns="0" tIns="0" rIns="0" bIns="0" rtlCol="0" anchor="ctr"/>
           <a:lstStyle/>
           <a:p>
-            <a:pPr marL="0" indent="0" algn="ctr">
+            <a:pPr algn="ctr" indent="0" marL="0">
               <a:buNone/>
             </a:pPr>
             <a:r>
@@ -19879,7 +20396,7 @@
           <a:bodyPr wrap="square" lIns="0" tIns="0" rIns="0" bIns="0" rtlCol="0" anchor="ctr"/>
           <a:lstStyle/>
           <a:p>
-            <a:pPr marL="0" indent="0">
+            <a:pPr indent="0" marL="0">
               <a:buNone/>
             </a:pPr>
             <a:r>
@@ -19960,7 +20477,7 @@
           <a:bodyPr wrap="square" lIns="0" tIns="0" rIns="0" bIns="0" rtlCol="0" anchor="ctr"/>
           <a:lstStyle/>
           <a:p>
-            <a:pPr marL="0" indent="0" algn="ctr">
+            <a:pPr algn="ctr" indent="0" marL="0">
               <a:buNone/>
             </a:pPr>
             <a:r>
@@ -19999,7 +20516,7 @@
           <a:bodyPr wrap="square" lIns="0" tIns="0" rIns="0" bIns="0" rtlCol="0" anchor="ctr"/>
           <a:lstStyle/>
           <a:p>
-            <a:pPr marL="0" indent="0">
+            <a:pPr indent="0" marL="0">
               <a:buNone/>
             </a:pPr>
             <a:r>
@@ -20080,7 +20597,7 @@
           <a:bodyPr wrap="square" lIns="0" tIns="0" rIns="0" bIns="0" rtlCol="0" anchor="ctr"/>
           <a:lstStyle/>
           <a:p>
-            <a:pPr marL="0" indent="0" algn="ctr">
+            <a:pPr algn="ctr" indent="0" marL="0">
               <a:buNone/>
             </a:pPr>
             <a:r>
@@ -20119,7 +20636,7 @@
           <a:bodyPr wrap="square" lIns="0" tIns="0" rIns="0" bIns="0" rtlCol="0" anchor="ctr"/>
           <a:lstStyle/>
           <a:p>
-            <a:pPr marL="0" indent="0">
+            <a:pPr indent="0" marL="0">
               <a:buNone/>
             </a:pPr>
             <a:r>
@@ -20200,7 +20717,7 @@
           <a:bodyPr wrap="square" lIns="0" tIns="0" rIns="0" bIns="0" rtlCol="0" anchor="ctr"/>
           <a:lstStyle/>
           <a:p>
-            <a:pPr marL="0" indent="0" algn="ctr">
+            <a:pPr algn="ctr" indent="0" marL="0">
               <a:buNone/>
             </a:pPr>
             <a:r>
@@ -20239,7 +20756,7 @@
           <a:bodyPr wrap="square" lIns="0" tIns="0" rIns="0" bIns="0" rtlCol="0" anchor="ctr"/>
           <a:lstStyle/>
           <a:p>
-            <a:pPr marL="0" indent="0">
+            <a:pPr indent="0" marL="0">
               <a:buNone/>
             </a:pPr>
             <a:r>
@@ -20266,7 +20783,7 @@
         <p:spPr>
           <a:xfrm>
             <a:off x="566928" y="5779008"/>
-            <a:ext cx="10927080" cy="402336"/>
+            <a:ext cx="11064240" cy="402336"/>
           </a:xfrm>
           <a:prstGeom prst="roundRect">
             <a:avLst>
@@ -20305,7 +20822,7 @@
           <a:bodyPr wrap="square" lIns="0" tIns="0" rIns="0" bIns="0" rtlCol="0" anchor="ctr"/>
           <a:lstStyle/>
           <a:p>
-            <a:pPr marL="0" indent="0">
+            <a:pPr indent="0" marL="0">
               <a:lnSpc>
                 <a:spcPct val="112000"/>
               </a:lnSpc>
@@ -20328,7 +20845,7 @@
       </p:sp>
       <p:sp>
         <p:nvSpPr>
-          <p:cNvPr id="53" name="Slide Number Placeholder 0"/>
+          <p:cNvPr id="25" name="Slide Number Placeholder 0"/>
           <p:cNvSpPr>
             <a:spLocks noGrp="1"/>
           </p:cNvSpPr>
@@ -20346,7 +20863,7 @@
           </a:prstGeom>
           <a:extLst>
             <a:ext uri="{C572A759-6A51-4108-AA02-DFA0A04FC94B}">
-              <ma14:wrappingTextBoxFlag xmlns="" xmlns:ma14="http://schemas.microsoft.com/office/mac/drawingml/2011/main" val="0"/>
+              <ma14:wrappingTextBoxFlag xmlns:ma14="http://schemas.microsoft.com/office/mac/drawingml/2011/main" val="0"/>
             </a:ext>
           </a:extLst>
         </p:spPr>
@@ -20367,7 +20884,7 @@
           <a:p>
             <a:pPr algn="l"/>
             <a:fld id="{F7021451-1387-4CA6-816F-3879F97B5CBC}" type="slidenum">
-              <a:rPr lang="en-US" b="0"/>
+              <a:rPr b="0" lang="en-US"/>
               <a:t>3</a:t>
             </a:fld>
             <a:endParaRPr lang="en-US"/>
@@ -20442,7 +20959,7 @@
           <a:bodyPr wrap="square" lIns="0" tIns="0" rIns="0" bIns="0" rtlCol="0" anchor="ctr"/>
           <a:lstStyle/>
           <a:p>
-            <a:pPr marL="0" indent="0">
+            <a:pPr indent="0" marL="0">
               <a:buNone/>
             </a:pPr>
             <a:r>
@@ -20481,7 +20998,7 @@
           <a:bodyPr wrap="square" lIns="0" tIns="0" rIns="0" bIns="0" rtlCol="0" anchor="t"/>
           <a:lstStyle/>
           <a:p>
-            <a:pPr marL="0" indent="0">
+            <a:pPr indent="0" marL="0">
               <a:lnSpc>
                 <a:spcPct val="100000"/>
               </a:lnSpc>
@@ -20550,11 +21067,11 @@
           <a:bodyPr wrap="square" lIns="0" tIns="0" rIns="0" bIns="0" rtlCol="0" anchor="ctr"/>
           <a:lstStyle/>
           <a:p>
-            <a:pPr marL="0" indent="0" algn="ctr">
-              <a:buNone/>
-            </a:pPr>
-            <a:r>
-              <a:rPr lang="en-US" sz="900" b="1" kern="0" spc="100" dirty="0">
+            <a:pPr algn="ctr" indent="0" marL="0">
+              <a:buNone/>
+            </a:pPr>
+            <a:r>
+              <a:rPr lang="en-US" sz="900" b="1" spc="100" kern="0" dirty="0">
                 <a:solidFill>
                   <a:srgbClr val="5A05F4"/>
                 </a:solidFill>
@@ -20570,14 +21087,14 @@
       </p:sp>
       <p:pic>
         <p:nvPicPr>
-          <p:cNvPr id="7" name="Image 0" descr="preencoded.png"/>
+          <p:cNvPr id="7" name="Image 0" descr="preencoded.png">    </p:cNvPr>
           <p:cNvPicPr>
             <a:picLocks noChangeAspect="1"/>
           </p:cNvPicPr>
           <p:nvPr/>
         </p:nvPicPr>
         <p:blipFill>
-          <a:blip r:embed="rId3"/>
+          <a:blip r:embed="rId1"/>
           <a:stretch>
             <a:fillRect/>
           </a:stretch>
@@ -20640,7 +21157,7 @@
           <a:bodyPr wrap="square" lIns="0" tIns="0" rIns="0" bIns="0" rtlCol="0" anchor="ctr"/>
           <a:lstStyle/>
           <a:p>
-            <a:pPr marL="0" indent="0">
+            <a:pPr indent="0" marL="0">
               <a:buNone/>
             </a:pPr>
             <a:r>
@@ -20679,7 +21196,7 @@
           <a:bodyPr wrap="square" lIns="0" tIns="0" rIns="0" bIns="0" rtlCol="0" anchor="t"/>
           <a:lstStyle/>
           <a:p>
-            <a:pPr marL="0" indent="0">
+            <a:pPr indent="0" marL="0">
               <a:lnSpc>
                 <a:spcPct val="105000"/>
               </a:lnSpc>
@@ -20748,7 +21265,7 @@
           <a:bodyPr wrap="square" lIns="0" tIns="0" rIns="0" bIns="0" rtlCol="0" anchor="ctr"/>
           <a:lstStyle/>
           <a:p>
-            <a:pPr marL="0" indent="0">
+            <a:pPr indent="0" marL="0">
               <a:buNone/>
             </a:pPr>
             <a:r>
@@ -20787,7 +21304,7 @@
           <a:bodyPr wrap="square" lIns="0" tIns="0" rIns="0" bIns="0" rtlCol="0" anchor="t"/>
           <a:lstStyle/>
           <a:p>
-            <a:pPr marL="0" indent="0">
+            <a:pPr indent="0" marL="0">
               <a:lnSpc>
                 <a:spcPct val="105000"/>
               </a:lnSpc>
@@ -20856,7 +21373,7 @@
           <a:bodyPr wrap="square" lIns="0" tIns="0" rIns="0" bIns="0" rtlCol="0" anchor="ctr"/>
           <a:lstStyle/>
           <a:p>
-            <a:pPr marL="0" indent="0">
+            <a:pPr indent="0" marL="0">
               <a:buNone/>
             </a:pPr>
             <a:r>
@@ -20895,7 +21412,7 @@
           <a:bodyPr wrap="square" lIns="0" tIns="0" rIns="0" bIns="0" rtlCol="0" anchor="t"/>
           <a:lstStyle/>
           <a:p>
-            <a:pPr marL="0" indent="0">
+            <a:pPr indent="0" marL="0">
               <a:lnSpc>
                 <a:spcPct val="105000"/>
               </a:lnSpc>
@@ -20964,7 +21481,7 @@
           <a:bodyPr wrap="square" lIns="0" tIns="0" rIns="0" bIns="0" rtlCol="0" anchor="ctr"/>
           <a:lstStyle/>
           <a:p>
-            <a:pPr marL="0" indent="0">
+            <a:pPr indent="0" marL="0">
               <a:buNone/>
             </a:pPr>
             <a:r>
@@ -21003,7 +21520,7 @@
           <a:bodyPr wrap="square" lIns="0" tIns="0" rIns="0" bIns="0" rtlCol="0" anchor="t"/>
           <a:lstStyle/>
           <a:p>
-            <a:pPr marL="0" indent="0">
+            <a:pPr indent="0" marL="0">
               <a:lnSpc>
                 <a:spcPct val="105000"/>
               </a:lnSpc>
@@ -21072,7 +21589,7 @@
           <a:bodyPr wrap="square" lIns="0" tIns="0" rIns="0" bIns="0" rtlCol="0" anchor="ctr"/>
           <a:lstStyle/>
           <a:p>
-            <a:pPr marL="0" indent="0">
+            <a:pPr indent="0" marL="0">
               <a:buNone/>
             </a:pPr>
             <a:r>
@@ -21111,7 +21628,7 @@
           <a:bodyPr wrap="square" lIns="0" tIns="0" rIns="0" bIns="0" rtlCol="0" anchor="t"/>
           <a:lstStyle/>
           <a:p>
-            <a:pPr marL="0" indent="0">
+            <a:pPr indent="0" marL="0">
               <a:lnSpc>
                 <a:spcPct val="105000"/>
               </a:lnSpc>
@@ -21180,7 +21697,7 @@
           <a:bodyPr wrap="square" lIns="0" tIns="0" rIns="0" bIns="0" rtlCol="0" anchor="ctr"/>
           <a:lstStyle/>
           <a:p>
-            <a:pPr marL="0" indent="0">
+            <a:pPr indent="0" marL="0">
               <a:buNone/>
             </a:pPr>
             <a:r>
@@ -21219,7 +21736,7 @@
           <a:bodyPr wrap="square" lIns="0" tIns="0" rIns="0" bIns="0" rtlCol="0" anchor="t"/>
           <a:lstStyle/>
           <a:p>
-            <a:pPr marL="0" indent="0">
+            <a:pPr indent="0" marL="0">
               <a:lnSpc>
                 <a:spcPct val="105000"/>
               </a:lnSpc>
@@ -21288,7 +21805,7 @@
           <a:bodyPr wrap="square" lIns="0" tIns="0" rIns="0" bIns="0" rtlCol="0" anchor="ctr"/>
           <a:lstStyle/>
           <a:p>
-            <a:pPr marL="0" indent="0">
+            <a:pPr indent="0" marL="0">
               <a:lnSpc>
                 <a:spcPct val="112000"/>
               </a:lnSpc>
@@ -21311,7 +21828,7 @@
       </p:sp>
       <p:sp>
         <p:nvSpPr>
-          <p:cNvPr id="28" name="Slide Number Placeholder 0"/>
+          <p:cNvPr id="25" name="Slide Number Placeholder 0"/>
           <p:cNvSpPr>
             <a:spLocks noGrp="1"/>
           </p:cNvSpPr>
@@ -21329,7 +21846,7 @@
           </a:prstGeom>
           <a:extLst>
             <a:ext uri="{C572A759-6A51-4108-AA02-DFA0A04FC94B}">
-              <ma14:wrappingTextBoxFlag xmlns="" xmlns:ma14="http://schemas.microsoft.com/office/mac/drawingml/2011/main" val="0"/>
+              <ma14:wrappingTextBoxFlag xmlns:ma14="http://schemas.microsoft.com/office/mac/drawingml/2011/main" val="0"/>
             </a:ext>
           </a:extLst>
         </p:spPr>
@@ -21350,7 +21867,7 @@
           <a:p>
             <a:pPr algn="l"/>
             <a:fld id="{F7021451-1387-4CA6-816F-3879F97B5CBC}" type="slidenum">
-              <a:rPr lang="en-US" b="0"/>
+              <a:rPr b="0" lang="en-US"/>
               <a:t>4</a:t>
             </a:fld>
             <a:endParaRPr lang="en-US"/>
@@ -21403,11 +21920,11 @@
           <a:bodyPr wrap="square" lIns="0" tIns="0" rIns="0" bIns="0" rtlCol="0" anchor="ctr"/>
           <a:lstStyle/>
           <a:p>
-            <a:pPr marL="0" indent="0">
-              <a:buNone/>
-            </a:pPr>
-            <a:r>
-              <a:rPr lang="en-US" sz="1200" b="1" kern="0" spc="400" dirty="0">
+            <a:pPr indent="0" marL="0">
+              <a:buNone/>
+            </a:pPr>
+            <a:r>
+              <a:rPr lang="en-US" sz="1200" b="1" spc="400" kern="0" dirty="0">
                 <a:solidFill>
                   <a:srgbClr val="FFFFFF"/>
                 </a:solidFill>
@@ -21442,7 +21959,7 @@
           <a:bodyPr wrap="square" lIns="0" tIns="0" rIns="0" bIns="0" rtlCol="0" anchor="ctr"/>
           <a:lstStyle/>
           <a:p>
-            <a:pPr marL="0" indent="0">
+            <a:pPr indent="0" marL="0">
               <a:buNone/>
             </a:pPr>
             <a:r>
@@ -21481,7 +21998,7 @@
           <a:bodyPr wrap="square" lIns="0" tIns="0" rIns="0" bIns="0" rtlCol="0" anchor="t"/>
           <a:lstStyle/>
           <a:p>
-            <a:pPr marL="0" indent="0">
+            <a:pPr indent="0" marL="0">
               <a:buNone/>
             </a:pPr>
             <a:r>
@@ -21567,7 +22084,7 @@
           <a:bodyPr wrap="square" lIns="0" tIns="0" rIns="0" bIns="0" rtlCol="0" anchor="ctr"/>
           <a:lstStyle/>
           <a:p>
-            <a:pPr marL="0" indent="0" algn="l">
+            <a:pPr algn="l" indent="0" marL="0">
               <a:buNone/>
             </a:pPr>
             <a:r>
@@ -21606,7 +22123,7 @@
           <a:bodyPr wrap="square" lIns="0" tIns="0" rIns="0" bIns="0" rtlCol="0" anchor="ctr"/>
           <a:lstStyle/>
           <a:p>
-            <a:pPr marL="0" indent="0">
+            <a:pPr indent="0" marL="0">
               <a:buNone/>
             </a:pPr>
             <a:r>
@@ -21672,11 +22189,11 @@
           <a:bodyPr wrap="square" lIns="0" tIns="0" rIns="0" bIns="0" rtlCol="0" anchor="ctr"/>
           <a:lstStyle/>
           <a:p>
-            <a:pPr marL="0" indent="0" algn="ctr">
-              <a:buNone/>
-            </a:pPr>
-            <a:r>
-              <a:rPr lang="en-US" sz="900" b="1" kern="0" spc="100" dirty="0">
+            <a:pPr algn="ctr" indent="0" marL="0">
+              <a:buNone/>
+            </a:pPr>
+            <a:r>
+              <a:rPr lang="en-US" sz="900" b="1" spc="100" kern="0" dirty="0">
                 <a:solidFill>
                   <a:srgbClr val="5A05F4"/>
                 </a:solidFill>
@@ -21692,14 +22209,14 @@
       </p:sp>
       <p:pic>
         <p:nvPicPr>
-          <p:cNvPr id="7" name="Image 0" descr="preencoded.png"/>
+          <p:cNvPr id="7" name="Image 0" descr="preencoded.png">    </p:cNvPr>
           <p:cNvPicPr>
             <a:picLocks noChangeAspect="1"/>
           </p:cNvPicPr>
           <p:nvPr/>
         </p:nvPicPr>
         <p:blipFill>
-          <a:blip r:embed="rId3"/>
+          <a:blip r:embed="rId1"/>
           <a:stretch>
             <a:fillRect/>
           </a:stretch>
@@ -21777,7 +22294,7 @@
           <a:bodyPr wrap="square" lIns="0" tIns="0" rIns="0" bIns="0" rtlCol="0" anchor="ctr"/>
           <a:lstStyle/>
           <a:p>
-            <a:pPr marL="0" indent="0" algn="ctr">
+            <a:pPr algn="ctr" indent="0" marL="0">
               <a:buNone/>
             </a:pPr>
             <a:r>
@@ -21816,7 +22333,7 @@
           <a:bodyPr wrap="square" lIns="0" tIns="0" rIns="0" bIns="0" rtlCol="0" anchor="ctr"/>
           <a:lstStyle/>
           <a:p>
-            <a:pPr marL="0" indent="0">
+            <a:pPr indent="0" marL="0">
               <a:buNone/>
             </a:pPr>
             <a:r>
@@ -21855,7 +22372,7 @@
           <a:bodyPr wrap="square" lIns="0" tIns="0" rIns="0" bIns="0" rtlCol="0" anchor="t"/>
           <a:lstStyle/>
           <a:p>
-            <a:pPr marL="0" indent="0">
+            <a:pPr indent="0" marL="0">
               <a:lnSpc>
                 <a:spcPct val="108000"/>
               </a:lnSpc>
@@ -21939,7 +22456,7 @@
           <a:bodyPr wrap="square" lIns="0" tIns="0" rIns="0" bIns="0" rtlCol="0" anchor="ctr"/>
           <a:lstStyle/>
           <a:p>
-            <a:pPr marL="0" indent="0" algn="ctr">
+            <a:pPr algn="ctr" indent="0" marL="0">
               <a:buNone/>
             </a:pPr>
             <a:r>
@@ -21978,7 +22495,7 @@
           <a:bodyPr wrap="square" lIns="0" tIns="0" rIns="0" bIns="0" rtlCol="0" anchor="ctr"/>
           <a:lstStyle/>
           <a:p>
-            <a:pPr marL="0" indent="0">
+            <a:pPr indent="0" marL="0">
               <a:buNone/>
             </a:pPr>
             <a:r>
@@ -22017,7 +22534,7 @@
           <a:bodyPr wrap="square" lIns="0" tIns="0" rIns="0" bIns="0" rtlCol="0" anchor="t"/>
           <a:lstStyle/>
           <a:p>
-            <a:pPr marL="0" indent="0">
+            <a:pPr indent="0" marL="0">
               <a:lnSpc>
                 <a:spcPct val="108000"/>
               </a:lnSpc>
@@ -22101,7 +22618,7 @@
           <a:bodyPr wrap="square" lIns="0" tIns="0" rIns="0" bIns="0" rtlCol="0" anchor="ctr"/>
           <a:lstStyle/>
           <a:p>
-            <a:pPr marL="0" indent="0" algn="ctr">
+            <a:pPr algn="ctr" indent="0" marL="0">
               <a:buNone/>
             </a:pPr>
             <a:r>
@@ -22140,7 +22657,7 @@
           <a:bodyPr wrap="square" lIns="0" tIns="0" rIns="0" bIns="0" rtlCol="0" anchor="ctr"/>
           <a:lstStyle/>
           <a:p>
-            <a:pPr marL="0" indent="0">
+            <a:pPr indent="0" marL="0">
               <a:buNone/>
             </a:pPr>
             <a:r>
@@ -22179,7 +22696,7 @@
           <a:bodyPr wrap="square" lIns="0" tIns="0" rIns="0" bIns="0" rtlCol="0" anchor="t"/>
           <a:lstStyle/>
           <a:p>
-            <a:pPr marL="0" indent="0">
+            <a:pPr indent="0" marL="0">
               <a:lnSpc>
                 <a:spcPct val="108000"/>
               </a:lnSpc>
@@ -22209,7 +22726,7 @@
         <p:spPr>
           <a:xfrm>
             <a:off x="566928" y="3977640"/>
-            <a:ext cx="10927080" cy="1371600"/>
+            <a:ext cx="11064240" cy="1371600"/>
           </a:xfrm>
           <a:prstGeom prst="roundRect">
             <a:avLst>
@@ -22224,14 +22741,34 @@
       </p:sp>
       <p:sp>
         <p:nvSpPr>
-          <p:cNvPr id="24" name="Text 21"/>
-          <p:cNvSpPr/>
-          <p:nvPr/>
-        </p:nvSpPr>
-        <p:spPr>
-          <a:xfrm>
-            <a:off x="786384" y="4105656"/>
-            <a:ext cx="10625328" cy="219456"/>
+          <p:cNvPr id="24" name="Shape 21"/>
+          <p:cNvSpPr/>
+          <p:nvPr/>
+        </p:nvSpPr>
+        <p:spPr>
+          <a:xfrm>
+            <a:off x="749808" y="4507992"/>
+            <a:ext cx="310896" cy="310896"/>
+          </a:xfrm>
+          <a:prstGeom prst="ellipse">
+            <a:avLst/>
+          </a:prstGeom>
+          <a:solidFill>
+            <a:srgbClr val="FFFFFF"/>
+          </a:solidFill>
+          <a:ln/>
+        </p:spPr>
+      </p:sp>
+      <p:sp>
+        <p:nvSpPr>
+          <p:cNvPr id="25" name="Text 22"/>
+          <p:cNvSpPr/>
+          <p:nvPr/>
+        </p:nvSpPr>
+        <p:spPr>
+          <a:xfrm>
+            <a:off x="749808" y="4507992"/>
+            <a:ext cx="310896" cy="310896"/>
           </a:xfrm>
           <a:prstGeom prst="rect">
             <a:avLst/>
@@ -22243,11 +22780,50 @@
           <a:bodyPr wrap="square" lIns="0" tIns="0" rIns="0" bIns="0" rtlCol="0" anchor="ctr"/>
           <a:lstStyle/>
           <a:p>
-            <a:pPr marL="0" indent="0">
-              <a:buNone/>
-            </a:pPr>
-            <a:r>
-              <a:rPr lang="en-US" sz="950" b="1" kern="0" spc="150" dirty="0">
+            <a:pPr algn="ctr" indent="0" marL="0">
+              <a:buNone/>
+            </a:pPr>
+            <a:r>
+              <a:rPr lang="en-US" sz="1200" b="1" dirty="0">
+                <a:solidFill>
+                  <a:srgbClr val="5A05F4"/>
+                </a:solidFill>
+                <a:latin typeface="Arial" pitchFamily="34" charset="0"/>
+                <a:ea typeface="Arial" pitchFamily="34" charset="-122"/>
+                <a:cs typeface="Arial" pitchFamily="34" charset="-120"/>
+              </a:rPr>
+              <a:t>?</a:t>
+            </a:r>
+            <a:endParaRPr lang="en-US" sz="1200" dirty="0"/>
+          </a:p>
+        </p:txBody>
+      </p:sp>
+      <p:sp>
+        <p:nvSpPr>
+          <p:cNvPr id="26" name="Text 23"/>
+          <p:cNvSpPr/>
+          <p:nvPr/>
+        </p:nvSpPr>
+        <p:spPr>
+          <a:xfrm>
+            <a:off x="1243584" y="4105656"/>
+            <a:ext cx="10168128" cy="219456"/>
+          </a:xfrm>
+          <a:prstGeom prst="rect">
+            <a:avLst/>
+          </a:prstGeom>
+          <a:noFill/>
+          <a:ln/>
+        </p:spPr>
+        <p:txBody>
+          <a:bodyPr wrap="square" lIns="0" tIns="0" rIns="0" bIns="0" rtlCol="0" anchor="ctr"/>
+          <a:lstStyle/>
+          <a:p>
+            <a:pPr indent="0" marL="0">
+              <a:buNone/>
+            </a:pPr>
+            <a:r>
+              <a:rPr lang="en-US" sz="950" b="1" spc="150" kern="0" dirty="0">
                 <a:solidFill>
                   <a:srgbClr val="FFFFFF"/>
                 </a:solidFill>
@@ -22263,14 +22839,14 @@
       </p:sp>
       <p:sp>
         <p:nvSpPr>
-          <p:cNvPr id="25" name="Text 22"/>
-          <p:cNvSpPr/>
-          <p:nvPr/>
-        </p:nvSpPr>
-        <p:spPr>
-          <a:xfrm>
-            <a:off x="786384" y="4361688"/>
-            <a:ext cx="10625328" cy="859536"/>
+          <p:cNvPr id="27" name="Text 24"/>
+          <p:cNvSpPr/>
+          <p:nvPr/>
+        </p:nvSpPr>
+        <p:spPr>
+          <a:xfrm>
+            <a:off x="1243584" y="4361688"/>
+            <a:ext cx="10168128" cy="859536"/>
           </a:xfrm>
           <a:prstGeom prst="rect">
             <a:avLst/>
@@ -22282,7 +22858,7 @@
           <a:bodyPr wrap="square" lIns="0" tIns="0" rIns="0" bIns="0" rtlCol="0" anchor="ctr"/>
           <a:lstStyle/>
           <a:p>
-            <a:pPr marL="0" indent="0">
+            <a:pPr indent="0" marL="0">
               <a:lnSpc>
                 <a:spcPct val="112000"/>
               </a:lnSpc>
@@ -22305,7 +22881,7 @@
       </p:sp>
       <p:sp>
         <p:nvSpPr>
-          <p:cNvPr id="26" name="Slide Number Placeholder 0"/>
+          <p:cNvPr id="25" name="Slide Number Placeholder 0"/>
           <p:cNvSpPr>
             <a:spLocks noGrp="1"/>
           </p:cNvSpPr>
@@ -22323,7 +22899,7 @@
           </a:prstGeom>
           <a:extLst>
             <a:ext uri="{C572A759-6A51-4108-AA02-DFA0A04FC94B}">
-              <ma14:wrappingTextBoxFlag xmlns="" xmlns:ma14="http://schemas.microsoft.com/office/mac/drawingml/2011/main" val="0"/>
+              <ma14:wrappingTextBoxFlag xmlns:ma14="http://schemas.microsoft.com/office/mac/drawingml/2011/main" val="0"/>
             </a:ext>
           </a:extLst>
         </p:spPr>
@@ -22344,7 +22920,7 @@
           <a:p>
             <a:pPr algn="l"/>
             <a:fld id="{F7021451-1387-4CA6-816F-3879F97B5CBC}" type="slidenum">
-              <a:rPr lang="en-US" b="0"/>
+              <a:rPr b="0" lang="en-US"/>
               <a:t>6</a:t>
             </a:fld>
             <a:endParaRPr lang="en-US"/>
@@ -22419,7 +22995,7 @@
           <a:bodyPr wrap="square" lIns="0" tIns="0" rIns="0" bIns="0" rtlCol="0" anchor="ctr"/>
           <a:lstStyle/>
           <a:p>
-            <a:pPr marL="0" indent="0" algn="l">
+            <a:pPr algn="l" indent="0" marL="0">
               <a:buNone/>
             </a:pPr>
             <a:r>
@@ -22458,7 +23034,7 @@
           <a:bodyPr wrap="square" lIns="0" tIns="0" rIns="0" bIns="0" rtlCol="0" anchor="ctr"/>
           <a:lstStyle/>
           <a:p>
-            <a:pPr marL="0" indent="0">
+            <a:pPr indent="0" marL="0">
               <a:buNone/>
             </a:pPr>
             <a:r>
@@ -22524,11 +23100,11 @@
           <a:bodyPr wrap="square" lIns="0" tIns="0" rIns="0" bIns="0" rtlCol="0" anchor="ctr"/>
           <a:lstStyle/>
           <a:p>
-            <a:pPr marL="0" indent="0" algn="ctr">
-              <a:buNone/>
-            </a:pPr>
-            <a:r>
-              <a:rPr lang="en-US" sz="900" b="1" kern="0" spc="100" dirty="0">
+            <a:pPr algn="ctr" indent="0" marL="0">
+              <a:buNone/>
+            </a:pPr>
+            <a:r>
+              <a:rPr lang="en-US" sz="900" b="1" spc="100" kern="0" dirty="0">
                 <a:solidFill>
                   <a:srgbClr val="5A05F4"/>
                 </a:solidFill>
@@ -22544,14 +23120,14 @@
       </p:sp>
       <p:pic>
         <p:nvPicPr>
-          <p:cNvPr id="7" name="Image 0" descr="preencoded.png"/>
+          <p:cNvPr id="7" name="Image 0" descr="preencoded.png">    </p:cNvPr>
           <p:cNvPicPr>
             <a:picLocks noChangeAspect="1"/>
           </p:cNvPicPr>
           <p:nvPr/>
         </p:nvPicPr>
         <p:blipFill>
-          <a:blip r:embed="rId3"/>
+          <a:blip r:embed="rId1"/>
           <a:stretch>
             <a:fillRect/>
           </a:stretch>
@@ -22609,11 +23185,11 @@
           <a:bodyPr wrap="square" lIns="0" tIns="0" rIns="0" bIns="0" rtlCol="0" anchor="ctr"/>
           <a:lstStyle/>
           <a:p>
-            <a:pPr marL="0" indent="0">
-              <a:buNone/>
-            </a:pPr>
-            <a:r>
-              <a:rPr lang="en-US" sz="1050" b="1" kern="0" spc="200" dirty="0">
+            <a:pPr indent="0" marL="0">
+              <a:buNone/>
+            </a:pPr>
+            <a:r>
+              <a:rPr lang="en-US" sz="1050" b="1" spc="200" kern="0" dirty="0">
                 <a:solidFill>
                   <a:srgbClr val="C9C5F2"/>
                 </a:solidFill>
@@ -22648,7 +23224,7 @@
           <a:bodyPr wrap="square" lIns="0" tIns="0" rIns="0" bIns="0" rtlCol="0" anchor="ctr"/>
           <a:lstStyle/>
           <a:p>
-            <a:pPr marL="0" indent="0">
+            <a:pPr indent="0" marL="0">
               <a:buNone/>
             </a:pPr>
             <a:r>
@@ -22687,7 +23263,7 @@
           <a:bodyPr wrap="square" lIns="0" tIns="0" rIns="0" bIns="0" rtlCol="0" anchor="t"/>
           <a:lstStyle/>
           <a:p>
-            <a:pPr marL="0" indent="0">
+            <a:pPr indent="0" marL="0">
               <a:buNone/>
             </a:pPr>
             <a:r>
@@ -22753,11 +23329,11 @@
           <a:bodyPr wrap="square" lIns="0" tIns="0" rIns="0" bIns="0" rtlCol="0" anchor="ctr"/>
           <a:lstStyle/>
           <a:p>
-            <a:pPr marL="0" indent="0">
-              <a:buNone/>
-            </a:pPr>
-            <a:r>
-              <a:rPr lang="en-US" sz="1050" b="1" kern="0" spc="200" dirty="0">
+            <a:pPr indent="0" marL="0">
+              <a:buNone/>
+            </a:pPr>
+            <a:r>
+              <a:rPr lang="en-US" sz="1050" b="1" spc="200" kern="0" dirty="0">
                 <a:solidFill>
                   <a:srgbClr val="6B6B6B"/>
                 </a:solidFill>
@@ -22792,7 +23368,7 @@
           <a:bodyPr wrap="square" lIns="0" tIns="0" rIns="0" bIns="0" rtlCol="0" anchor="ctr"/>
           <a:lstStyle/>
           <a:p>
-            <a:pPr marL="0" indent="0">
+            <a:pPr indent="0" marL="0">
               <a:buNone/>
             </a:pPr>
             <a:r>
@@ -22831,7 +23407,7 @@
           <a:bodyPr wrap="square" lIns="0" tIns="0" rIns="0" bIns="0" rtlCol="0" anchor="t"/>
           <a:lstStyle/>
           <a:p>
-            <a:pPr marL="0" indent="0">
+            <a:pPr indent="0" marL="0">
               <a:buNone/>
             </a:pPr>
             <a:r>
@@ -22878,14 +23454,34 @@
       </p:sp>
       <p:sp>
         <p:nvSpPr>
-          <p:cNvPr id="17" name="Text 14"/>
-          <p:cNvSpPr/>
-          <p:nvPr/>
-        </p:nvSpPr>
-        <p:spPr>
-          <a:xfrm>
-            <a:off x="786384" y="3739896"/>
-            <a:ext cx="4910328" cy="219456"/>
+          <p:cNvPr id="17" name="Shape 14"/>
+          <p:cNvSpPr/>
+          <p:nvPr/>
+        </p:nvSpPr>
+        <p:spPr>
+          <a:xfrm>
+            <a:off x="749808" y="4325112"/>
+            <a:ext cx="310896" cy="310896"/>
+          </a:xfrm>
+          <a:prstGeom prst="ellipse">
+            <a:avLst/>
+          </a:prstGeom>
+          <a:solidFill>
+            <a:srgbClr val="106B41"/>
+          </a:solidFill>
+          <a:ln/>
+        </p:spPr>
+      </p:sp>
+      <p:sp>
+        <p:nvSpPr>
+          <p:cNvPr id="18" name="Text 15"/>
+          <p:cNvSpPr/>
+          <p:nvPr/>
+        </p:nvSpPr>
+        <p:spPr>
+          <a:xfrm>
+            <a:off x="749808" y="4325112"/>
+            <a:ext cx="310896" cy="310896"/>
           </a:xfrm>
           <a:prstGeom prst="rect">
             <a:avLst/>
@@ -22897,11 +23493,50 @@
           <a:bodyPr wrap="square" lIns="0" tIns="0" rIns="0" bIns="0" rtlCol="0" anchor="ctr"/>
           <a:lstStyle/>
           <a:p>
-            <a:pPr marL="0" indent="0">
-              <a:buNone/>
-            </a:pPr>
-            <a:r>
-              <a:rPr lang="en-US" sz="950" b="1" kern="0" spc="150" dirty="0">
+            <a:pPr algn="ctr" indent="0" marL="0">
+              <a:buNone/>
+            </a:pPr>
+            <a:r>
+              <a:rPr lang="en-US" sz="1200" b="1" dirty="0">
+                <a:solidFill>
+                  <a:srgbClr val="FFFFFF"/>
+                </a:solidFill>
+                <a:latin typeface="Arial" pitchFamily="34" charset="0"/>
+                <a:ea typeface="Arial" pitchFamily="34" charset="-122"/>
+                <a:cs typeface="Arial" pitchFamily="34" charset="-120"/>
+              </a:rPr>
+              <a:t>◆</a:t>
+            </a:r>
+            <a:endParaRPr lang="en-US" sz="1200" dirty="0"/>
+          </a:p>
+        </p:txBody>
+      </p:sp>
+      <p:sp>
+        <p:nvSpPr>
+          <p:cNvPr id="19" name="Text 16"/>
+          <p:cNvSpPr/>
+          <p:nvPr/>
+        </p:nvSpPr>
+        <p:spPr>
+          <a:xfrm>
+            <a:off x="1243584" y="3739896"/>
+            <a:ext cx="4453128" cy="219456"/>
+          </a:xfrm>
+          <a:prstGeom prst="rect">
+            <a:avLst/>
+          </a:prstGeom>
+          <a:noFill/>
+          <a:ln/>
+        </p:spPr>
+        <p:txBody>
+          <a:bodyPr wrap="square" lIns="0" tIns="0" rIns="0" bIns="0" rtlCol="0" anchor="ctr"/>
+          <a:lstStyle/>
+          <a:p>
+            <a:pPr indent="0" marL="0">
+              <a:buNone/>
+            </a:pPr>
+            <a:r>
+              <a:rPr lang="en-US" sz="950" b="1" spc="150" kern="0" dirty="0">
                 <a:solidFill>
                   <a:srgbClr val="106B41"/>
                 </a:solidFill>
@@ -22917,14 +23552,14 @@
       </p:sp>
       <p:sp>
         <p:nvSpPr>
-          <p:cNvPr id="18" name="Text 15"/>
-          <p:cNvSpPr/>
-          <p:nvPr/>
-        </p:nvSpPr>
-        <p:spPr>
-          <a:xfrm>
-            <a:off x="786384" y="3995928"/>
-            <a:ext cx="4910328" cy="1225296"/>
+          <p:cNvPr id="20" name="Text 17"/>
+          <p:cNvSpPr/>
+          <p:nvPr/>
+        </p:nvSpPr>
+        <p:spPr>
+          <a:xfrm>
+            <a:off x="1243584" y="3995928"/>
+            <a:ext cx="4453128" cy="1225296"/>
           </a:xfrm>
           <a:prstGeom prst="rect">
             <a:avLst/>
@@ -22936,7 +23571,7 @@
           <a:bodyPr wrap="square" lIns="0" tIns="0" rIns="0" bIns="0" rtlCol="0" anchor="ctr"/>
           <a:lstStyle/>
           <a:p>
-            <a:pPr marL="0" indent="0">
+            <a:pPr indent="0" marL="0">
               <a:lnSpc>
                 <a:spcPct val="112000"/>
               </a:lnSpc>
@@ -22959,7 +23594,7 @@
       </p:sp>
       <p:sp>
         <p:nvSpPr>
-          <p:cNvPr id="19" name="Shape 16"/>
+          <p:cNvPr id="21" name="Shape 18"/>
           <p:cNvSpPr/>
           <p:nvPr/>
         </p:nvSpPr>
@@ -22986,14 +23621,34 @@
       </p:sp>
       <p:sp>
         <p:nvSpPr>
-          <p:cNvPr id="20" name="Text 17"/>
-          <p:cNvSpPr/>
-          <p:nvPr/>
-        </p:nvSpPr>
-        <p:spPr>
-          <a:xfrm>
-            <a:off x="6501384" y="3739896"/>
-            <a:ext cx="4910328" cy="219456"/>
+          <p:cNvPr id="22" name="Shape 19"/>
+          <p:cNvSpPr/>
+          <p:nvPr/>
+        </p:nvSpPr>
+        <p:spPr>
+          <a:xfrm>
+            <a:off x="6464808" y="4325112"/>
+            <a:ext cx="310896" cy="310896"/>
+          </a:xfrm>
+          <a:prstGeom prst="ellipse">
+            <a:avLst/>
+          </a:prstGeom>
+          <a:solidFill>
+            <a:srgbClr val="B3261E"/>
+          </a:solidFill>
+          <a:ln/>
+        </p:spPr>
+      </p:sp>
+      <p:sp>
+        <p:nvSpPr>
+          <p:cNvPr id="23" name="Text 20"/>
+          <p:cNvSpPr/>
+          <p:nvPr/>
+        </p:nvSpPr>
+        <p:spPr>
+          <a:xfrm>
+            <a:off x="6464808" y="4325112"/>
+            <a:ext cx="310896" cy="310896"/>
           </a:xfrm>
           <a:prstGeom prst="rect">
             <a:avLst/>
@@ -23005,11 +23660,50 @@
           <a:bodyPr wrap="square" lIns="0" tIns="0" rIns="0" bIns="0" rtlCol="0" anchor="ctr"/>
           <a:lstStyle/>
           <a:p>
-            <a:pPr marL="0" indent="0">
-              <a:buNone/>
-            </a:pPr>
-            <a:r>
-              <a:rPr lang="en-US" sz="950" b="1" kern="0" spc="150" dirty="0">
+            <a:pPr algn="ctr" indent="0" marL="0">
+              <a:buNone/>
+            </a:pPr>
+            <a:r>
+              <a:rPr lang="en-US" sz="1200" b="1" dirty="0">
+                <a:solidFill>
+                  <a:srgbClr val="FFFFFF"/>
+                </a:solidFill>
+                <a:latin typeface="Arial" pitchFamily="34" charset="0"/>
+                <a:ea typeface="Arial" pitchFamily="34" charset="-122"/>
+                <a:cs typeface="Arial" pitchFamily="34" charset="-120"/>
+              </a:rPr>
+              <a:t>✕</a:t>
+            </a:r>
+            <a:endParaRPr lang="en-US" sz="1200" dirty="0"/>
+          </a:p>
+        </p:txBody>
+      </p:sp>
+      <p:sp>
+        <p:nvSpPr>
+          <p:cNvPr id="24" name="Text 21"/>
+          <p:cNvSpPr/>
+          <p:nvPr/>
+        </p:nvSpPr>
+        <p:spPr>
+          <a:xfrm>
+            <a:off x="6958584" y="3739896"/>
+            <a:ext cx="4453128" cy="219456"/>
+          </a:xfrm>
+          <a:prstGeom prst="rect">
+            <a:avLst/>
+          </a:prstGeom>
+          <a:noFill/>
+          <a:ln/>
+        </p:spPr>
+        <p:txBody>
+          <a:bodyPr wrap="square" lIns="0" tIns="0" rIns="0" bIns="0" rtlCol="0" anchor="ctr"/>
+          <a:lstStyle/>
+          <a:p>
+            <a:pPr indent="0" marL="0">
+              <a:buNone/>
+            </a:pPr>
+            <a:r>
+              <a:rPr lang="en-US" sz="950" b="1" spc="150" kern="0" dirty="0">
                 <a:solidFill>
                   <a:srgbClr val="B3261E"/>
                 </a:solidFill>
@@ -23025,14 +23719,14 @@
       </p:sp>
       <p:sp>
         <p:nvSpPr>
-          <p:cNvPr id="21" name="Text 18"/>
-          <p:cNvSpPr/>
-          <p:nvPr/>
-        </p:nvSpPr>
-        <p:spPr>
-          <a:xfrm>
-            <a:off x="6501384" y="3995928"/>
-            <a:ext cx="4910328" cy="1225296"/>
+          <p:cNvPr id="25" name="Text 22"/>
+          <p:cNvSpPr/>
+          <p:nvPr/>
+        </p:nvSpPr>
+        <p:spPr>
+          <a:xfrm>
+            <a:off x="6958584" y="3995928"/>
+            <a:ext cx="4453128" cy="1225296"/>
           </a:xfrm>
           <a:prstGeom prst="rect">
             <a:avLst/>
@@ -23044,7 +23738,7 @@
           <a:bodyPr wrap="square" lIns="0" tIns="0" rIns="0" bIns="0" rtlCol="0" anchor="ctr"/>
           <a:lstStyle/>
           <a:p>
-            <a:pPr marL="0" indent="0">
+            <a:pPr indent="0" marL="0">
               <a:lnSpc>
                 <a:spcPct val="112000"/>
               </a:lnSpc>
@@ -23085,7 +23779,7 @@
           </a:prstGeom>
           <a:extLst>
             <a:ext uri="{C572A759-6A51-4108-AA02-DFA0A04FC94B}">
-              <ma14:wrappingTextBoxFlag xmlns="" xmlns:ma14="http://schemas.microsoft.com/office/mac/drawingml/2011/main" val="0"/>
+              <ma14:wrappingTextBoxFlag xmlns:ma14="http://schemas.microsoft.com/office/mac/drawingml/2011/main" val="0"/>
             </a:ext>
           </a:extLst>
         </p:spPr>
@@ -23106,7 +23800,7 @@
           <a:p>
             <a:pPr algn="l"/>
             <a:fld id="{F7021451-1387-4CA6-816F-3879F97B5CBC}" type="slidenum">
-              <a:rPr lang="en-US" b="0"/>
+              <a:rPr b="0" lang="en-US"/>
               <a:t>7</a:t>
             </a:fld>
             <a:endParaRPr lang="en-US"/>
@@ -23181,7 +23875,7 @@
           <a:bodyPr wrap="square" lIns="0" tIns="0" rIns="0" bIns="0" rtlCol="0" anchor="ctr"/>
           <a:lstStyle/>
           <a:p>
-            <a:pPr marL="0" indent="0" algn="l">
+            <a:pPr algn="l" indent="0" marL="0">
               <a:buNone/>
             </a:pPr>
             <a:r>
@@ -23220,7 +23914,7 @@
           <a:bodyPr wrap="square" lIns="0" tIns="0" rIns="0" bIns="0" rtlCol="0" anchor="ctr"/>
           <a:lstStyle/>
           <a:p>
-            <a:pPr marL="0" indent="0">
+            <a:pPr indent="0" marL="0">
               <a:buNone/>
             </a:pPr>
             <a:r>
@@ -23286,11 +23980,11 @@
           <a:bodyPr wrap="square" lIns="0" tIns="0" rIns="0" bIns="0" rtlCol="0" anchor="ctr"/>
           <a:lstStyle/>
           <a:p>
-            <a:pPr marL="0" indent="0" algn="ctr">
-              <a:buNone/>
-            </a:pPr>
-            <a:r>
-              <a:rPr lang="en-US" sz="900" b="1" kern="0" spc="100" dirty="0">
+            <a:pPr algn="ctr" indent="0" marL="0">
+              <a:buNone/>
+            </a:pPr>
+            <a:r>
+              <a:rPr lang="en-US" sz="900" b="1" spc="100" kern="0" dirty="0">
                 <a:solidFill>
                   <a:srgbClr val="5A05F4"/>
                 </a:solidFill>
@@ -23306,14 +24000,14 @@
       </p:sp>
       <p:pic>
         <p:nvPicPr>
-          <p:cNvPr id="7" name="Image 0" descr="preencoded.png"/>
+          <p:cNvPr id="7" name="Image 0" descr="preencoded.png">    </p:cNvPr>
           <p:cNvPicPr>
             <a:picLocks noChangeAspect="1"/>
           </p:cNvPicPr>
           <p:nvPr/>
         </p:nvPicPr>
         <p:blipFill>
-          <a:blip r:embed="rId3"/>
+          <a:blip r:embed="rId1"/>
           <a:stretch>
             <a:fillRect/>
           </a:stretch>
@@ -23376,7 +24070,7 @@
           <a:bodyPr wrap="square" lIns="0" tIns="0" rIns="0" bIns="0" rtlCol="0" anchor="t"/>
           <a:lstStyle/>
           <a:p>
-            <a:pPr marL="0" indent="0">
+            <a:pPr indent="0" marL="0">
               <a:lnSpc>
                 <a:spcPct val="130000"/>
               </a:lnSpc>
@@ -23396,7 +24090,7 @@
             <a:endParaRPr lang="en-US" sz="1100" dirty="0"/>
           </a:p>
           <a:p>
-            <a:pPr marL="0" indent="0">
+            <a:pPr indent="0" marL="0">
               <a:lnSpc>
                 <a:spcPct val="130000"/>
               </a:lnSpc>
@@ -23413,6 +24107,12 @@
               </a:rPr>
               <a:t>  - model_name: </a:t>
             </a:r>
+            <a:pPr indent="0" marL="0">
+              <a:lnSpc>
+                <a:spcPct val="130000"/>
+              </a:lnSpc>
+              <a:buNone/>
+            </a:pPr>
             <a:r>
               <a:rPr lang="en-US" sz="1100" dirty="0">
                 <a:solidFill>
@@ -23427,7 +24127,7 @@
             <a:endParaRPr lang="en-US" sz="1100" dirty="0"/>
           </a:p>
           <a:p>
-            <a:pPr marL="0" indent="0">
+            <a:pPr indent="0" marL="0">
               <a:lnSpc>
                 <a:spcPct val="130000"/>
               </a:lnSpc>
@@ -23447,7 +24147,7 @@
             <a:endParaRPr lang="en-US" sz="1100" dirty="0"/>
           </a:p>
           <a:p>
-            <a:pPr marL="0" indent="0">
+            <a:pPr indent="0" marL="0">
               <a:lnSpc>
                 <a:spcPct val="130000"/>
               </a:lnSpc>
@@ -23467,7 +24167,7 @@
             <a:endParaRPr lang="en-US" sz="1100" dirty="0"/>
           </a:p>
           <a:p>
-            <a:pPr marL="0" indent="0">
+            <a:pPr indent="0" marL="0">
               <a:lnSpc>
                 <a:spcPct val="130000"/>
               </a:lnSpc>
@@ -23487,7 +24187,7 @@
             <a:endParaRPr lang="en-US" sz="1100" dirty="0"/>
           </a:p>
           <a:p>
-            <a:pPr marL="0" indent="0">
+            <a:pPr indent="0" marL="0">
               <a:lnSpc>
                 <a:spcPct val="130000"/>
               </a:lnSpc>
@@ -23504,6 +24204,12 @@
               </a:rPr>
               <a:t>  - model_name: </a:t>
             </a:r>
+            <a:pPr indent="0" marL="0">
+              <a:lnSpc>
+                <a:spcPct val="130000"/>
+              </a:lnSpc>
+              <a:buNone/>
+            </a:pPr>
             <a:r>
               <a:rPr lang="en-US" sz="1100" dirty="0">
                 <a:solidFill>
@@ -23518,7 +24224,7 @@
             <a:endParaRPr lang="en-US" sz="1100" dirty="0"/>
           </a:p>
           <a:p>
-            <a:pPr marL="0" indent="0">
+            <a:pPr indent="0" marL="0">
               <a:lnSpc>
                 <a:spcPct val="130000"/>
               </a:lnSpc>
@@ -23535,6 +24241,12 @@
               </a:rPr>
               <a:t>    litellm_params:   </a:t>
             </a:r>
+            <a:pPr indent="0" marL="0">
+              <a:lnSpc>
+                <a:spcPct val="130000"/>
+              </a:lnSpc>
+              <a:buNone/>
+            </a:pPr>
             <a:r>
               <a:rPr lang="en-US" sz="1100" dirty="0">
                 <a:solidFill>
@@ -23549,7 +24261,7 @@
             <a:endParaRPr lang="en-US" sz="1100" dirty="0"/>
           </a:p>
           <a:p>
-            <a:pPr marL="0" indent="0">
+            <a:pPr indent="0" marL="0">
               <a:lnSpc>
                 <a:spcPct val="130000"/>
               </a:lnSpc>
@@ -23569,7 +24281,7 @@
             <a:endParaRPr lang="en-US" sz="1100" dirty="0"/>
           </a:p>
           <a:p>
-            <a:pPr marL="0" indent="0">
+            <a:pPr indent="0" marL="0">
               <a:lnSpc>
                 <a:spcPct val="130000"/>
               </a:lnSpc>
@@ -23589,7 +24301,7 @@
             <a:endParaRPr lang="en-US" sz="1100" dirty="0"/>
           </a:p>
           <a:p>
-            <a:pPr marL="0" indent="0">
+            <a:pPr indent="0" marL="0">
               <a:lnSpc>
                 <a:spcPct val="130000"/>
               </a:lnSpc>
@@ -23609,7 +24321,7 @@
             <a:endParaRPr lang="en-US" sz="1100" dirty="0"/>
           </a:p>
           <a:p>
-            <a:pPr marL="0" indent="0">
+            <a:pPr indent="0" marL="0">
               <a:lnSpc>
                 <a:spcPct val="130000"/>
               </a:lnSpc>
@@ -23626,6 +24338,12 @@
               </a:rPr>
               <a:t>  num_retries: 0    </a:t>
             </a:r>
+            <a:pPr indent="0" marL="0">
+              <a:lnSpc>
+                <a:spcPct val="130000"/>
+              </a:lnSpc>
+              <a:buNone/>
+            </a:pPr>
             <a:r>
               <a:rPr lang="en-US" sz="1100" dirty="0">
                 <a:solidFill>
@@ -23684,7 +24402,7 @@
           <a:bodyPr wrap="square" lIns="0" tIns="0" rIns="0" bIns="0" rtlCol="0" anchor="ctr"/>
           <a:lstStyle/>
           <a:p>
-            <a:pPr marL="0" indent="0">
+            <a:pPr indent="0" marL="0">
               <a:buNone/>
             </a:pPr>
             <a:r>
@@ -23723,7 +24441,7 @@
           <a:bodyPr wrap="square" lIns="0" tIns="0" rIns="0" bIns="0" rtlCol="0" anchor="t"/>
           <a:lstStyle/>
           <a:p>
-            <a:pPr marL="0" indent="0">
+            <a:pPr indent="0" marL="0">
               <a:lnSpc>
                 <a:spcPct val="108000"/>
               </a:lnSpc>
@@ -23787,7 +24505,7 @@
           <a:bodyPr wrap="square" lIns="0" tIns="0" rIns="0" bIns="0" rtlCol="0" anchor="ctr"/>
           <a:lstStyle/>
           <a:p>
-            <a:pPr marL="0" indent="0">
+            <a:pPr indent="0" marL="0">
               <a:buNone/>
             </a:pPr>
             <a:r>
@@ -23826,7 +24544,7 @@
           <a:bodyPr wrap="square" lIns="0" tIns="0" rIns="0" bIns="0" rtlCol="0" anchor="t"/>
           <a:lstStyle/>
           <a:p>
-            <a:pPr marL="0" indent="0">
+            <a:pPr indent="0" marL="0">
               <a:lnSpc>
                 <a:spcPct val="108000"/>
               </a:lnSpc>
@@ -23890,7 +24608,7 @@
           <a:bodyPr wrap="square" lIns="0" tIns="0" rIns="0" bIns="0" rtlCol="0" anchor="ctr"/>
           <a:lstStyle/>
           <a:p>
-            <a:pPr marL="0" indent="0">
+            <a:pPr indent="0" marL="0">
               <a:buNone/>
             </a:pPr>
             <a:r>
@@ -23929,7 +24647,7 @@
           <a:bodyPr wrap="square" lIns="0" tIns="0" rIns="0" bIns="0" rtlCol="0" anchor="t"/>
           <a:lstStyle/>
           <a:p>
-            <a:pPr marL="0" indent="0">
+            <a:pPr indent="0" marL="0">
               <a:lnSpc>
                 <a:spcPct val="108000"/>
               </a:lnSpc>
@@ -23998,7 +24716,7 @@
           <a:bodyPr wrap="square" lIns="0" tIns="0" rIns="0" bIns="0" rtlCol="0" anchor="ctr"/>
           <a:lstStyle/>
           <a:p>
-            <a:pPr marL="0" indent="0">
+            <a:pPr indent="0" marL="0">
               <a:lnSpc>
                 <a:spcPct val="112000"/>
               </a:lnSpc>
@@ -24039,7 +24757,7 @@
           </a:prstGeom>
           <a:extLst>
             <a:ext uri="{C572A759-6A51-4108-AA02-DFA0A04FC94B}">
-              <ma14:wrappingTextBoxFlag xmlns="" xmlns:ma14="http://schemas.microsoft.com/office/mac/drawingml/2011/main" val="0"/>
+              <ma14:wrappingTextBoxFlag xmlns:ma14="http://schemas.microsoft.com/office/mac/drawingml/2011/main" val="0"/>
             </a:ext>
           </a:extLst>
         </p:spPr>
@@ -24060,7 +24778,7 @@
           <a:p>
             <a:pPr algn="l"/>
             <a:fld id="{F7021451-1387-4CA6-816F-3879F97B5CBC}" type="slidenum">
-              <a:rPr lang="en-US" b="0"/>
+              <a:rPr b="0" lang="en-US"/>
               <a:t>8</a:t>
             </a:fld>
             <a:endParaRPr lang="en-US"/>
@@ -24135,7 +24853,7 @@
           <a:bodyPr wrap="square" lIns="0" tIns="0" rIns="0" bIns="0" rtlCol="0" anchor="ctr"/>
           <a:lstStyle/>
           <a:p>
-            <a:pPr marL="0" indent="0" algn="l">
+            <a:pPr algn="l" indent="0" marL="0">
               <a:buNone/>
             </a:pPr>
             <a:r>
@@ -24174,7 +24892,7 @@
           <a:bodyPr wrap="square" lIns="0" tIns="0" rIns="0" bIns="0" rtlCol="0" anchor="ctr"/>
           <a:lstStyle/>
           <a:p>
-            <a:pPr marL="0" indent="0">
+            <a:pPr indent="0" marL="0">
               <a:buNone/>
             </a:pPr>
             <a:r>
@@ -24240,11 +24958,11 @@
           <a:bodyPr wrap="square" lIns="0" tIns="0" rIns="0" bIns="0" rtlCol="0" anchor="ctr"/>
           <a:lstStyle/>
           <a:p>
-            <a:pPr marL="0" indent="0" algn="ctr">
-              <a:buNone/>
-            </a:pPr>
-            <a:r>
-              <a:rPr lang="en-US" sz="900" b="1" kern="0" spc="100" dirty="0">
+            <a:pPr algn="ctr" indent="0" marL="0">
+              <a:buNone/>
+            </a:pPr>
+            <a:r>
+              <a:rPr lang="en-US" sz="900" b="1" spc="100" kern="0" dirty="0">
                 <a:solidFill>
                   <a:srgbClr val="5A05F4"/>
                 </a:solidFill>
@@ -24260,14 +24978,14 @@
       </p:sp>
       <p:pic>
         <p:nvPicPr>
-          <p:cNvPr id="7" name="Image 0" descr="preencoded.png"/>
+          <p:cNvPr id="7" name="Image 0" descr="preencoded.png">    </p:cNvPr>
           <p:cNvPicPr>
             <a:picLocks noChangeAspect="1"/>
           </p:cNvPicPr>
           <p:nvPr/>
         </p:nvPicPr>
         <p:blipFill>
-          <a:blip r:embed="rId3"/>
+          <a:blip r:embed="rId1"/>
           <a:stretch>
             <a:fillRect/>
           </a:stretch>
@@ -24325,7 +25043,7 @@
           <a:bodyPr wrap="square" lIns="0" tIns="0" rIns="0" bIns="0" rtlCol="0" anchor="ctr"/>
           <a:lstStyle/>
           <a:p>
-            <a:pPr marL="0" indent="0">
+            <a:pPr indent="0" marL="0">
               <a:buNone/>
             </a:pPr>
             <a:r>
@@ -24364,7 +25082,7 @@
           <a:bodyPr wrap="square" lIns="0" tIns="0" rIns="0" bIns="0" rtlCol="0" anchor="t"/>
           <a:lstStyle/>
           <a:p>
-            <a:pPr marL="0" indent="0">
+            <a:pPr indent="0" marL="0">
               <a:lnSpc>
                 <a:spcPct val="108000"/>
               </a:lnSpc>
@@ -24428,7 +25146,7 @@
           <a:bodyPr wrap="square" lIns="0" tIns="0" rIns="0" bIns="0" rtlCol="0" anchor="ctr"/>
           <a:lstStyle/>
           <a:p>
-            <a:pPr marL="0" indent="0">
+            <a:pPr indent="0" marL="0">
               <a:buNone/>
             </a:pPr>
             <a:r>
@@ -24467,7 +25185,7 @@
           <a:bodyPr wrap="square" lIns="0" tIns="0" rIns="0" bIns="0" rtlCol="0" anchor="t"/>
           <a:lstStyle/>
           <a:p>
-            <a:pPr marL="0" indent="0">
+            <a:pPr indent="0" marL="0">
               <a:lnSpc>
                 <a:spcPct val="108000"/>
               </a:lnSpc>
@@ -24559,7 +25277,7 @@
           <a:bodyPr wrap="square" lIns="0" tIns="0" rIns="0" bIns="0" rtlCol="0" anchor="ctr"/>
           <a:lstStyle/>
           <a:p>
-            <a:pPr marL="0" indent="0" algn="ctr">
+            <a:pPr algn="ctr" indent="0" marL="0">
               <a:buNone/>
             </a:pPr>
             <a:r>
@@ -24625,7 +25343,7 @@
           <a:bodyPr wrap="square" lIns="0" tIns="0" rIns="0" bIns="0" rtlCol="0" anchor="ctr"/>
           <a:lstStyle/>
           <a:p>
-            <a:pPr marL="0" indent="0" algn="ctr">
+            <a:pPr algn="ctr" indent="0" marL="0">
               <a:buNone/>
             </a:pPr>
             <a:r>
@@ -24691,7 +25409,7 @@
           <a:bodyPr wrap="square" lIns="0" tIns="0" rIns="0" bIns="0" rtlCol="0" anchor="ctr"/>
           <a:lstStyle/>
           <a:p>
-            <a:pPr marL="0" indent="0" algn="ctr">
+            <a:pPr algn="ctr" indent="0" marL="0">
               <a:buNone/>
             </a:pPr>
             <a:r>
@@ -24730,7 +25448,7 @@
           <a:bodyPr wrap="square" lIns="0" tIns="0" rIns="0" bIns="0" rtlCol="0" anchor="ctr"/>
           <a:lstStyle/>
           <a:p>
-            <a:pPr marL="0" indent="0">
+            <a:pPr indent="0" marL="0">
               <a:buNone/>
             </a:pPr>
             <a:r>
@@ -24769,7 +25487,7 @@
           <a:bodyPr wrap="square" lIns="0" tIns="0" rIns="0" bIns="0" rtlCol="0" anchor="ctr"/>
           <a:lstStyle/>
           <a:p>
-            <a:pPr marL="0" indent="0" algn="r">
+            <a:pPr algn="r" indent="0" marL="0">
               <a:buNone/>
             </a:pPr>
             <a:r>
@@ -24808,11 +25526,11 @@
           <a:bodyPr wrap="square" lIns="0" tIns="0" rIns="0" bIns="0" rtlCol="0" anchor="ctr"/>
           <a:lstStyle/>
           <a:p>
-            <a:pPr marL="0" indent="0">
-              <a:buNone/>
-            </a:pPr>
-            <a:r>
-              <a:rPr lang="en-US" sz="850" kern="0" spc="100" dirty="0">
+            <a:pPr indent="0" marL="0">
+              <a:buNone/>
+            </a:pPr>
+            <a:r>
+              <a:rPr lang="en-US" sz="850" spc="100" kern="0" dirty="0">
                 <a:solidFill>
                   <a:srgbClr val="6B6B6B"/>
                 </a:solidFill>
@@ -24855,14 +25573,34 @@
       </p:sp>
       <p:sp>
         <p:nvSpPr>
-          <p:cNvPr id="25" name="Text 22"/>
-          <p:cNvSpPr/>
-          <p:nvPr/>
-        </p:nvSpPr>
-        <p:spPr>
-          <a:xfrm>
-            <a:off x="786384" y="4626864"/>
-            <a:ext cx="10625328" cy="219456"/>
+          <p:cNvPr id="25" name="Shape 22"/>
+          <p:cNvSpPr/>
+          <p:nvPr/>
+        </p:nvSpPr>
+        <p:spPr>
+          <a:xfrm>
+            <a:off x="749808" y="4869180"/>
+            <a:ext cx="310896" cy="310896"/>
+          </a:xfrm>
+          <a:prstGeom prst="ellipse">
+            <a:avLst/>
+          </a:prstGeom>
+          <a:solidFill>
+            <a:srgbClr val="1A4FBF"/>
+          </a:solidFill>
+          <a:ln/>
+        </p:spPr>
+      </p:sp>
+      <p:sp>
+        <p:nvSpPr>
+          <p:cNvPr id="26" name="Text 23"/>
+          <p:cNvSpPr/>
+          <p:nvPr/>
+        </p:nvSpPr>
+        <p:spPr>
+          <a:xfrm>
+            <a:off x="749808" y="4869180"/>
+            <a:ext cx="310896" cy="310896"/>
           </a:xfrm>
           <a:prstGeom prst="rect">
             <a:avLst/>
@@ -24874,11 +25612,50 @@
           <a:bodyPr wrap="square" lIns="0" tIns="0" rIns="0" bIns="0" rtlCol="0" anchor="ctr"/>
           <a:lstStyle/>
           <a:p>
-            <a:pPr marL="0" indent="0">
-              <a:buNone/>
-            </a:pPr>
-            <a:r>
-              <a:rPr lang="en-US" sz="950" b="1" kern="0" spc="150" dirty="0">
+            <a:pPr algn="ctr" indent="0" marL="0">
+              <a:buNone/>
+            </a:pPr>
+            <a:r>
+              <a:rPr lang="en-US" sz="1200" b="1" dirty="0">
+                <a:solidFill>
+                  <a:srgbClr val="FFFFFF"/>
+                </a:solidFill>
+                <a:latin typeface="Arial" pitchFamily="34" charset="0"/>
+                <a:ea typeface="Arial" pitchFamily="34" charset="-122"/>
+                <a:cs typeface="Arial" pitchFamily="34" charset="-120"/>
+              </a:rPr>
+              <a:t>★</a:t>
+            </a:r>
+            <a:endParaRPr lang="en-US" sz="1200" dirty="0"/>
+          </a:p>
+        </p:txBody>
+      </p:sp>
+      <p:sp>
+        <p:nvSpPr>
+          <p:cNvPr id="27" name="Text 24"/>
+          <p:cNvSpPr/>
+          <p:nvPr/>
+        </p:nvSpPr>
+        <p:spPr>
+          <a:xfrm>
+            <a:off x="1243584" y="4626864"/>
+            <a:ext cx="10168128" cy="219456"/>
+          </a:xfrm>
+          <a:prstGeom prst="rect">
+            <a:avLst/>
+          </a:prstGeom>
+          <a:noFill/>
+          <a:ln/>
+        </p:spPr>
+        <p:txBody>
+          <a:bodyPr wrap="square" lIns="0" tIns="0" rIns="0" bIns="0" rtlCol="0" anchor="ctr"/>
+          <a:lstStyle/>
+          <a:p>
+            <a:pPr indent="0" marL="0">
+              <a:buNone/>
+            </a:pPr>
+            <a:r>
+              <a:rPr lang="en-US" sz="950" b="1" spc="150" kern="0" dirty="0">
                 <a:solidFill>
                   <a:srgbClr val="1A4FBF"/>
                 </a:solidFill>
@@ -24886,7 +25663,7 @@
                 <a:ea typeface="Courier New" pitchFamily="34" charset="-122"/>
                 <a:cs typeface="Courier New" pitchFamily="34" charset="-120"/>
               </a:rPr>
-              <a:t>ЛАЙФХАК</a:t>
+              <a:t>ПОРАДА</a:t>
             </a:r>
             <a:endParaRPr lang="en-US" sz="950" dirty="0"/>
           </a:p>
@@ -24894,14 +25671,14 @@
       </p:sp>
       <p:sp>
         <p:nvSpPr>
-          <p:cNvPr id="26" name="Text 23"/>
-          <p:cNvSpPr/>
-          <p:nvPr/>
-        </p:nvSpPr>
-        <p:spPr>
-          <a:xfrm>
-            <a:off x="786384" y="4882896"/>
-            <a:ext cx="10625328" cy="539496"/>
+          <p:cNvPr id="28" name="Text 25"/>
+          <p:cNvSpPr/>
+          <p:nvPr/>
+        </p:nvSpPr>
+        <p:spPr>
+          <a:xfrm>
+            <a:off x="1243584" y="4882896"/>
+            <a:ext cx="10168128" cy="539496"/>
           </a:xfrm>
           <a:prstGeom prst="rect">
             <a:avLst/>
@@ -24913,7 +25690,7 @@
           <a:bodyPr wrap="square" lIns="0" tIns="0" rIns="0" bIns="0" rtlCol="0" anchor="ctr"/>
           <a:lstStyle/>
           <a:p>
-            <a:pPr marL="0" indent="0">
+            <a:pPr indent="0" marL="0">
               <a:lnSpc>
                 <a:spcPct val="112000"/>
               </a:lnSpc>
@@ -24936,7 +25713,7 @@
       </p:sp>
       <p:sp>
         <p:nvSpPr>
-          <p:cNvPr id="27" name="Shape 24"/>
+          <p:cNvPr id="29" name="Shape 26"/>
           <p:cNvSpPr/>
           <p:nvPr/>
         </p:nvSpPr>
@@ -24958,7 +25735,7 @@
       </p:sp>
       <p:sp>
         <p:nvSpPr>
-          <p:cNvPr id="28" name="Text 25"/>
+          <p:cNvPr id="30" name="Text 27"/>
           <p:cNvSpPr/>
           <p:nvPr/>
         </p:nvSpPr>
@@ -24977,7 +25754,7 @@
           <a:bodyPr wrap="square" lIns="0" tIns="0" rIns="0" bIns="0" rtlCol="0" anchor="ctr"/>
           <a:lstStyle/>
           <a:p>
-            <a:pPr marL="0" indent="0">
+            <a:pPr indent="0" marL="0">
               <a:lnSpc>
                 <a:spcPct val="112000"/>
               </a:lnSpc>
@@ -25000,7 +25777,7 @@
       </p:sp>
       <p:sp>
         <p:nvSpPr>
-          <p:cNvPr id="29" name="Slide Number Placeholder 0"/>
+          <p:cNvPr id="25" name="Slide Number Placeholder 0"/>
           <p:cNvSpPr>
             <a:spLocks noGrp="1"/>
           </p:cNvSpPr>
@@ -25018,7 +25795,7 @@
           </a:prstGeom>
           <a:extLst>
             <a:ext uri="{C572A759-6A51-4108-AA02-DFA0A04FC94B}">
-              <ma14:wrappingTextBoxFlag xmlns="" xmlns:ma14="http://schemas.microsoft.com/office/mac/drawingml/2011/main" val="0"/>
+              <ma14:wrappingTextBoxFlag xmlns:ma14="http://schemas.microsoft.com/office/mac/drawingml/2011/main" val="0"/>
             </a:ext>
           </a:extLst>
         </p:spPr>
@@ -25039,7 +25816,7 @@
           <a:p>
             <a:pPr algn="l"/>
             <a:fld id="{F7021451-1387-4CA6-816F-3879F97B5CBC}" type="slidenum">
-              <a:rPr lang="en-US" b="0"/>
+              <a:rPr b="0" lang="en-US"/>
               <a:t>9</a:t>
             </a:fld>
             <a:endParaRPr lang="en-US"/>
@@ -25347,299 +26124,4 @@
     </a:ext>
   </a:extLst>
 </a:theme>
-</file>
-
-<file path=ppt/theme/theme2.xml><?xml version="1.0" encoding="utf-8"?>
-<a:theme xmlns:a="http://schemas.openxmlformats.org/drawingml/2006/main" name="Office Theme">
-  <a:themeElements>
-    <a:clrScheme name="Office">
-      <a:dk1>
-        <a:sysClr val="windowText" lastClr="000000"/>
-      </a:dk1>
-      <a:lt1>
-        <a:sysClr val="window" lastClr="FFFFFF"/>
-      </a:lt1>
-      <a:dk2>
-        <a:srgbClr val="44546A"/>
-      </a:dk2>
-      <a:lt2>
-        <a:srgbClr val="E7E6E6"/>
-      </a:lt2>
-      <a:accent1>
-        <a:srgbClr val="4472C4"/>
-      </a:accent1>
-      <a:accent2>
-        <a:srgbClr val="ED7D31"/>
-      </a:accent2>
-      <a:accent3>
-        <a:srgbClr val="A5A5A5"/>
-      </a:accent3>
-      <a:accent4>
-        <a:srgbClr val="FFC000"/>
-      </a:accent4>
-      <a:accent5>
-        <a:srgbClr val="5B9BD5"/>
-      </a:accent5>
-      <a:accent6>
-        <a:srgbClr val="70AD47"/>
-      </a:accent6>
-      <a:hlink>
-        <a:srgbClr val="0563C1"/>
-      </a:hlink>
-      <a:folHlink>
-        <a:srgbClr val="954F72"/>
-      </a:folHlink>
-    </a:clrScheme>
-    <a:fontScheme name="Office">
-      <a:majorFont>
-        <a:latin typeface="Calibri Light" panose="020F0302020204030204"/>
-        <a:ea typeface=""/>
-        <a:cs typeface=""/>
-        <a:font script="Jpan" typeface="游ゴシック Light"/>
-        <a:font script="Hang" typeface="맑은 고딕"/>
-        <a:font script="Hans" typeface="等线 Light"/>
-        <a:font script="Hant" typeface="新細明體"/>
-        <a:font script="Arab" typeface="Times New Roman"/>
-        <a:font script="Hebr" typeface="Times New Roman"/>
-        <a:font script="Thai" typeface="Angsana New"/>
-        <a:font script="Ethi" typeface="Nyala"/>
-        <a:font script="Beng" typeface="Vrinda"/>
-        <a:font script="Gujr" typeface="Shruti"/>
-        <a:font script="Khmr" typeface="MoolBoran"/>
-        <a:font script="Knda" typeface="Tunga"/>
-        <a:font script="Guru" typeface="Raavi"/>
-        <a:font script="Cans" typeface="Euphemia"/>
-        <a:font script="Cher" typeface="Plantagenet Cherokee"/>
-        <a:font script="Yiii" typeface="Microsoft Yi Baiti"/>
-        <a:font script="Tibt" typeface="Microsoft Himalaya"/>
-        <a:font script="Thaa" typeface="MV Boli"/>
-        <a:font script="Deva" typeface="Mangal"/>
-        <a:font script="Telu" typeface="Gautami"/>
-        <a:font script="Taml" typeface="Latha"/>
-        <a:font script="Syrc" typeface="Estrangelo Edessa"/>
-        <a:font script="Orya" typeface="Kalinga"/>
-        <a:font script="Mlym" typeface="Kartika"/>
-        <a:font script="Laoo" typeface="DokChampa"/>
-        <a:font script="Sinh" typeface="Iskoola Pota"/>
-        <a:font script="Mong" typeface="Mongolian Baiti"/>
-        <a:font script="Viet" typeface="Times New Roman"/>
-        <a:font script="Uigh" typeface="Microsoft Uighur"/>
-        <a:font script="Geor" typeface="Sylfaen"/>
-        <a:font script="Armn" typeface="Arial"/>
-        <a:font script="Bugi" typeface="Leelawadee UI"/>
-        <a:font script="Bopo" typeface="Microsoft JhengHei"/>
-        <a:font script="Java" typeface="Javanese Text"/>
-        <a:font script="Lisu" typeface="Segoe UI"/>
-        <a:font script="Mymr" typeface="Myanmar Text"/>
-        <a:font script="Nkoo" typeface="Ebrima"/>
-        <a:font script="Olck" typeface="Nirmala UI"/>
-        <a:font script="Osma" typeface="Ebrima"/>
-        <a:font script="Phag" typeface="Phagspa"/>
-        <a:font script="Syrn" typeface="Estrangelo Edessa"/>
-        <a:font script="Syrj" typeface="Estrangelo Edessa"/>
-        <a:font script="Syre" typeface="Estrangelo Edessa"/>
-        <a:font script="Sora" typeface="Nirmala UI"/>
-        <a:font script="Tale" typeface="Microsoft Tai Le"/>
-        <a:font script="Talu" typeface="Microsoft New Tai Lue"/>
-        <a:font script="Tfng" typeface="Ebrima"/>
-      </a:majorFont>
-      <a:minorFont>
-        <a:latin typeface="Calibri" panose="020F0502020204030204"/>
-        <a:ea typeface=""/>
-        <a:cs typeface=""/>
-        <a:font script="Jpan" typeface="游ゴシック"/>
-        <a:font script="Hang" typeface="맑은 고딕"/>
-        <a:font script="Hans" typeface="等线"/>
-        <a:font script="Hant" typeface="新細明體"/>
-        <a:font script="Arab" typeface="Arial"/>
-        <a:font script="Hebr" typeface="Arial"/>
-        <a:font script="Thai" typeface="Cordia New"/>
-        <a:font script="Ethi" typeface="Nyala"/>
-        <a:font script="Beng" typeface="Vrinda"/>
-        <a:font script="Gujr" typeface="Shruti"/>
-        <a:font script="Khmr" typeface="DaunPenh"/>
-        <a:font script="Knda" typeface="Tunga"/>
-        <a:font script="Guru" typeface="Raavi"/>
-        <a:font script="Cans" typeface="Euphemia"/>
-        <a:font script="Cher" typeface="Plantagenet Cherokee"/>
-        <a:font script="Yiii" typeface="Microsoft Yi Baiti"/>
-        <a:font script="Tibt" typeface="Microsoft Himalaya"/>
-        <a:font script="Thaa" typeface="MV Boli"/>
-        <a:font script="Deva" typeface="Mangal"/>
-        <a:font script="Telu" typeface="Gautami"/>
-        <a:font script="Taml" typeface="Latha"/>
-        <a:font script="Syrc" typeface="Estrangelo Edessa"/>
-        <a:font script="Orya" typeface="Kalinga"/>
-        <a:font script="Mlym" typeface="Kartika"/>
-        <a:font script="Laoo" typeface="DokChampa"/>
-        <a:font script="Sinh" typeface="Iskoola Pota"/>
-        <a:font script="Mong" typeface="Mongolian Baiti"/>
-        <a:font script="Viet" typeface="Arial"/>
-        <a:font script="Uigh" typeface="Microsoft Uighur"/>
-        <a:font script="Geor" typeface="Sylfaen"/>
-        <a:font script="Armn" typeface="Arial"/>
-        <a:font script="Bugi" typeface="Leelawadee UI"/>
-        <a:font script="Bopo" typeface="Microsoft JhengHei"/>
-        <a:font script="Java" typeface="Javanese Text"/>
-        <a:font script="Lisu" typeface="Segoe UI"/>
-        <a:font script="Mymr" typeface="Myanmar Text"/>
-        <a:font script="Nkoo" typeface="Ebrima"/>
-        <a:font script="Olck" typeface="Nirmala UI"/>
-        <a:font script="Osma" typeface="Ebrima"/>
-        <a:font script="Phag" typeface="Phagspa"/>
-        <a:font script="Syrn" typeface="Estrangelo Edessa"/>
-        <a:font script="Syrj" typeface="Estrangelo Edessa"/>
-        <a:font script="Syre" typeface="Estrangelo Edessa"/>
-        <a:font script="Sora" typeface="Nirmala UI"/>
-        <a:font script="Tale" typeface="Microsoft Tai Le"/>
-        <a:font script="Talu" typeface="Microsoft New Tai Lue"/>
-        <a:font script="Tfng" typeface="Ebrima"/>
-      </a:minorFont>
-    </a:fontScheme>
-    <a:fmtScheme name="Office">
-      <a:fillStyleLst>
-        <a:solidFill>
-          <a:schemeClr val="phClr"/>
-        </a:solidFill>
-        <a:gradFill rotWithShape="1">
-          <a:gsLst>
-            <a:gs pos="0">
-              <a:schemeClr val="phClr">
-                <a:lumMod val="110000"/>
-                <a:satMod val="105000"/>
-                <a:tint val="67000"/>
-              </a:schemeClr>
-            </a:gs>
-            <a:gs pos="50000">
-              <a:schemeClr val="phClr">
-                <a:lumMod val="105000"/>
-                <a:satMod val="103000"/>
-                <a:tint val="73000"/>
-              </a:schemeClr>
-            </a:gs>
-            <a:gs pos="100000">
-              <a:schemeClr val="phClr">
-                <a:lumMod val="105000"/>
-                <a:satMod val="109000"/>
-                <a:tint val="81000"/>
-              </a:schemeClr>
-            </a:gs>
-          </a:gsLst>
-          <a:lin ang="5400000" scaled="0"/>
-        </a:gradFill>
-        <a:gradFill rotWithShape="1">
-          <a:gsLst>
-            <a:gs pos="0">
-              <a:schemeClr val="phClr">
-                <a:satMod val="103000"/>
-                <a:lumMod val="102000"/>
-                <a:tint val="94000"/>
-              </a:schemeClr>
-            </a:gs>
-            <a:gs pos="50000">
-              <a:schemeClr val="phClr">
-                <a:satMod val="110000"/>
-                <a:lumMod val="100000"/>
-                <a:shade val="100000"/>
-              </a:schemeClr>
-            </a:gs>
-            <a:gs pos="100000">
-              <a:schemeClr val="phClr">
-                <a:lumMod val="99000"/>
-                <a:satMod val="120000"/>
-                <a:shade val="78000"/>
-              </a:schemeClr>
-            </a:gs>
-          </a:gsLst>
-          <a:lin ang="5400000" scaled="0"/>
-        </a:gradFill>
-      </a:fillStyleLst>
-      <a:lnStyleLst>
-        <a:ln w="6350" cap="flat" cmpd="sng" algn="ctr">
-          <a:solidFill>
-            <a:schemeClr val="phClr"/>
-          </a:solidFill>
-          <a:prstDash val="solid"/>
-          <a:miter lim="800000"/>
-        </a:ln>
-        <a:ln w="12700" cap="flat" cmpd="sng" algn="ctr">
-          <a:solidFill>
-            <a:schemeClr val="phClr"/>
-          </a:solidFill>
-          <a:prstDash val="solid"/>
-          <a:miter lim="800000"/>
-        </a:ln>
-        <a:ln w="19050" cap="flat" cmpd="sng" algn="ctr">
-          <a:solidFill>
-            <a:schemeClr val="phClr"/>
-          </a:solidFill>
-          <a:prstDash val="solid"/>
-          <a:miter lim="800000"/>
-        </a:ln>
-      </a:lnStyleLst>
-      <a:effectStyleLst>
-        <a:effectStyle>
-          <a:effectLst/>
-        </a:effectStyle>
-        <a:effectStyle>
-          <a:effectLst/>
-        </a:effectStyle>
-        <a:effectStyle>
-          <a:effectLst>
-            <a:outerShdw blurRad="57150" dist="19050" dir="5400000" algn="ctr" rotWithShape="0">
-              <a:srgbClr val="000000">
-                <a:alpha val="63000"/>
-              </a:srgbClr>
-            </a:outerShdw>
-          </a:effectLst>
-        </a:effectStyle>
-      </a:effectStyleLst>
-      <a:bgFillStyleLst>
-        <a:solidFill>
-          <a:schemeClr val="phClr"/>
-        </a:solidFill>
-        <a:solidFill>
-          <a:schemeClr val="phClr">
-            <a:tint val="95000"/>
-            <a:satMod val="170000"/>
-          </a:schemeClr>
-        </a:solidFill>
-        <a:gradFill rotWithShape="1">
-          <a:gsLst>
-            <a:gs pos="0">
-              <a:schemeClr val="phClr">
-                <a:tint val="93000"/>
-                <a:satMod val="150000"/>
-                <a:shade val="98000"/>
-                <a:lumMod val="102000"/>
-              </a:schemeClr>
-            </a:gs>
-            <a:gs pos="50000">
-              <a:schemeClr val="phClr">
-                <a:tint val="98000"/>
-                <a:satMod val="130000"/>
-                <a:shade val="90000"/>
-                <a:lumMod val="103000"/>
-              </a:schemeClr>
-            </a:gs>
-            <a:gs pos="100000">
-              <a:schemeClr val="phClr">
-                <a:shade val="63000"/>
-                <a:satMod val="120000"/>
-              </a:schemeClr>
-            </a:gs>
-          </a:gsLst>
-          <a:lin ang="5400000" scaled="0"/>
-        </a:gradFill>
-      </a:bgFillStyleLst>
-    </a:fmtScheme>
-  </a:themeElements>
-  <a:objectDefaults/>
-  <a:extraClrSchemeLst/>
-  <a:extLst>
-    <a:ext uri="{05A4C25C-085E-4340-85A3-A5531E510DB2}">
-      <thm15:themeFamily xmlns:thm15="http://schemas.microsoft.com/office/thememl/2012/main" name="Office Theme" id="{62F939B6-93AF-4DB8-9C6B-D6C7DFDC589F}" vid="{4A3C46E8-61CC-4603-A589-7422A47A8E4A}"/>
-    </a:ext>
-  </a:extLst>
-</a:theme>
 </file>
--- a/docs/decks/L03.pptx
+++ b/docs/decks/L03.pptx
@@ -3610,7 +3610,7 @@
                 <a:ea typeface="Courier New" pitchFamily="34" charset="-122"/>
                 <a:cs typeface="Courier New" pitchFamily="34" charset="-120"/>
               </a:rPr>
-              <a:t>ТИЖДЕНЬ 2 · УРОК 3 З 12</a:t>
+              <a:t>ТИЖДЕНЬ 2 · ТЕМА 3 З 12</a:t>
             </a:r>
             <a:endParaRPr lang="en-US" sz="1200" dirty="0"/>
           </a:p>
@@ -4225,7 +4225,7 @@
                 <a:ea typeface="Unbounded" pitchFamily="34" charset="-122"/>
                 <a:cs typeface="Unbounded" pitchFamily="34" charset="-120"/>
               </a:rPr>
-              <a:t>Route(): роутер на десять рядків</a:t>
+              <a:t>Route() як єдина точка вибору моделі</a:t>
             </a:r>
             <a:endParaRPr lang="en-US" sz="2400" dirty="0"/>
           </a:p>
@@ -4239,7 +4239,7 @@
         </p:nvSpPr>
         <p:spPr>
           <a:xfrm>
-            <a:off x="1280160" y="1024128"/>
+            <a:off x="1280160" y="1218895"/>
             <a:ext cx="777240" cy="256032"/>
           </a:xfrm>
           <a:prstGeom prst="roundRect">
@@ -4266,7 +4266,7 @@
         </p:nvSpPr>
         <p:spPr>
           <a:xfrm>
-            <a:off x="1280160" y="1024128"/>
+            <a:off x="1280160" y="1218895"/>
             <a:ext cx="777240" cy="256032"/>
           </a:xfrm>
           <a:prstGeom prst="rect">
@@ -5052,7 +5052,7 @@
                 <a:ea typeface="Unbounded" pitchFamily="34" charset="-122"/>
                 <a:cs typeface="Unbounded" pitchFamily="34" charset="-120"/>
               </a:rPr>
-              <a:t>Що ще каже цей код — властивості, які варто знати</a:t>
+              <a:t>Межі та тестування простого роутера</a:t>
             </a:r>
             <a:endParaRPr lang="en-US" sz="2400" dirty="0"/>
           </a:p>
@@ -5904,7 +5904,7 @@
                 <a:ea typeface="Unbounded" pitchFamily="34" charset="-122"/>
                 <a:cs typeface="Unbounded" pitchFamily="34" charset="-120"/>
               </a:rPr>
-              <a:t>Маршрут — за задачею, не за текстом-в-лоб</a:t>
+              <a:t>Маршрутизація за задачею: інтент, контекст і рівень міркування</a:t>
             </a:r>
             <a:endParaRPr lang="en-US" sz="2400" dirty="0"/>
           </a:p>
@@ -5918,7 +5918,7 @@
         </p:nvSpPr>
         <p:spPr>
           <a:xfrm>
-            <a:off x="1280160" y="1218895"/>
+            <a:off x="1280160" y="1413662"/>
             <a:ext cx="777240" cy="256032"/>
           </a:xfrm>
           <a:prstGeom prst="roundRect">
@@ -5945,7 +5945,7 @@
         </p:nvSpPr>
         <p:spPr>
           <a:xfrm>
-            <a:off x="1280160" y="1218895"/>
+            <a:off x="1280160" y="1413662"/>
             <a:ext cx="777240" cy="256032"/>
           </a:xfrm>
           <a:prstGeom prst="rect">
@@ -6461,7 +6461,7 @@
                 <a:ea typeface="Montserrat" pitchFamily="34" charset="-122"/>
                 <a:cs typeface="Montserrat" pitchFamily="34" charset="-120"/>
               </a:rPr>
-              <a:t>Дешеве — дешевій моделі, складне — сильній, рішення — задокументоване. Якщо не можете пояснити маршрут словами, у вас не політика, а випадковість.</a:t>
+              <a:t>Дешеве — дешевій моделі, складне — сильній, рішення — задокументоване. Якщо не можете пояснити маршрут словами, у Вас не політика, а випадковість.</a:t>
             </a:r>
             <a:endParaRPr lang="en-US" sz="1300" dirty="0"/>
           </a:p>
@@ -6634,7 +6634,7 @@
                 <a:ea typeface="Unbounded" pitchFamily="34" charset="-122"/>
                 <a:cs typeface="Unbounded" pitchFamily="34" charset="-120"/>
               </a:rPr>
-              <a:t>Скільки коштує саме рішення</a:t>
+              <a:t>Вартість рішення про маршрут</a:t>
             </a:r>
             <a:endParaRPr lang="en-US" sz="2400" dirty="0"/>
           </a:p>
@@ -7816,7 +7816,7 @@
                 <a:ea typeface="Unbounded" pitchFamily="34" charset="-122"/>
                 <a:cs typeface="Unbounded" pitchFamily="34" charset="-120"/>
               </a:rPr>
-              <a:t>Один користувач — один маршрут</a:t>
+              <a:t>Стабільний маршрут у межах розмови</a:t>
             </a:r>
             <a:endParaRPr lang="en-US" sz="2400" dirty="0"/>
           </a:p>
@@ -8662,7 +8662,7 @@
                 <a:ea typeface="Unbounded" pitchFamily="34" charset="-122"/>
                 <a:cs typeface="Unbounded" pitchFamily="34" charset="-120"/>
               </a:rPr>
-              <a:t>«У нас одна модель» — усе одно є що маршрутизувати</a:t>
+              <a:t>Маршрутизація в системі з однією моделлю</a:t>
             </a:r>
             <a:endParaRPr lang="en-US" sz="2400" dirty="0"/>
           </a:p>
@@ -9557,7 +9557,7 @@
                           <a:ea typeface="Montserrat" pitchFamily="34" charset="-122"/>
                           <a:cs typeface="Montserrat" pitchFamily="34" charset="-120"/>
                         </a:rPr>
-                        <a:t>той самий реєстр з уроку 2</a:t>
+                        <a:t>той самий реєстр з Теми 2</a:t>
                       </a:r>
                       <a:endParaRPr lang="en-US" sz="1150" dirty="0">
                         <a:latin typeface="Montserrat" charset="0"/>
@@ -10055,7 +10055,7 @@
                 <a:ea typeface="Unbounded" pitchFamily="34" charset="-122"/>
                 <a:cs typeface="Unbounded" pitchFamily="34" charset="-120"/>
               </a:rPr>
-              <a:t>Fallback-порядок: політика, яку сьогодні оголосимо</a:t>
+              <a:t>Fallback: резервний маршрут після збою</a:t>
             </a:r>
             <a:endParaRPr lang="en-US" sz="2400" dirty="0"/>
           </a:p>
@@ -10728,7 +10728,7 @@
                 <a:ea typeface="Unbounded" pitchFamily="34" charset="-122"/>
                 <a:cs typeface="Unbounded" pitchFamily="34" charset="-120"/>
               </a:rPr>
-              <a:t>Додати провайдера — без зміни коду</a:t>
+              <a:t>Підключення нового провайдера через адаптер</a:t>
             </a:r>
             <a:endParaRPr lang="en-US" sz="2400" dirty="0"/>
           </a:p>
@@ -10833,11 +10833,11 @@
         <p:spPr>
           <a:xfrm>
             <a:off x="566928" y="1737360"/>
-            <a:ext cx="11064240" cy="1737360"/>
+            <a:ext cx="11064240" cy="2011680"/>
           </a:xfrm>
           <a:prstGeom prst="roundRect">
             <a:avLst>
-              <a:gd name="adj" fmla="val 6316"/>
+              <a:gd name="adj" fmla="val 5455"/>
             </a:avLst>
           </a:prstGeom>
           <a:solidFill>
@@ -10860,7 +10860,7 @@
         <p:spPr>
           <a:xfrm>
             <a:off x="786384" y="1883664"/>
-            <a:ext cx="10625328" cy="1444752"/>
+            <a:ext cx="10625328" cy="1719072"/>
           </a:xfrm>
           <a:prstGeom prst="rect">
             <a:avLst/>
@@ -10944,7 +10944,7 @@
                 <a:ea typeface="Courier New" pitchFamily="34" charset="-122"/>
                 <a:cs typeface="Courier New" pitchFamily="34" charset="-120"/>
               </a:rPr>
-              <a:t>      model: azure/gpt-5</a:t>
+              <a:t>      model: azure/&lt;azure-deployment-name&gt;</a:t>
             </a:r>
             <a:endParaRPr lang="en-US" sz="1200" dirty="0"/>
           </a:p>
@@ -10988,6 +10988,26 @@
             </a:r>
             <a:endParaRPr lang="en-US" sz="1200" dirty="0"/>
           </a:p>
+          <a:p>
+            <a:pPr indent="0" marL="0">
+              <a:lnSpc>
+                <a:spcPct val="130000"/>
+              </a:lnSpc>
+              <a:buNone/>
+            </a:pPr>
+            <a:r>
+              <a:rPr lang="en-US" sz="1200" dirty="0">
+                <a:solidFill>
+                  <a:srgbClr val="D8D4E4"/>
+                </a:solidFill>
+                <a:latin typeface="Courier New" pitchFamily="34" charset="0"/>
+                <a:ea typeface="Courier New" pitchFamily="34" charset="-122"/>
+                <a:cs typeface="Courier New" pitchFamily="34" charset="-120"/>
+              </a:rPr>
+              <a:t>      api_version: os.environ/AZURE_API_VERSION</a:t>
+            </a:r>
+            <a:endParaRPr lang="en-US" sz="1200" dirty="0"/>
+          </a:p>
         </p:txBody>
       </p:sp>
       <p:sp>
@@ -10998,7 +11018,7 @@
         </p:nvSpPr>
         <p:spPr>
           <a:xfrm>
-            <a:off x="566928" y="3794760"/>
+            <a:off x="566928" y="4023360"/>
             <a:ext cx="3383280" cy="713232"/>
           </a:xfrm>
           <a:prstGeom prst="roundRect">
@@ -11020,7 +11040,7 @@
         </p:nvSpPr>
         <p:spPr>
           <a:xfrm>
-            <a:off x="621792" y="3794760"/>
+            <a:off x="621792" y="4023360"/>
             <a:ext cx="3273552" cy="713232"/>
           </a:xfrm>
           <a:prstGeom prst="rect">
@@ -11059,7 +11079,7 @@
         </p:nvSpPr>
         <p:spPr>
           <a:xfrm>
-            <a:off x="4041648" y="4151376"/>
+            <a:off x="4041648" y="4379976"/>
             <a:ext cx="164592" cy="0"/>
           </a:xfrm>
           <a:prstGeom prst="line">
@@ -11082,7 +11102,7 @@
         </p:nvSpPr>
         <p:spPr>
           <a:xfrm rot="5400000">
-            <a:off x="4169664" y="4082796"/>
+            <a:off x="4169664" y="4311396"/>
             <a:ext cx="146304" cy="137160"/>
           </a:xfrm>
           <a:prstGeom prst="triangle">
@@ -11102,7 +11122,7 @@
         </p:nvSpPr>
         <p:spPr>
           <a:xfrm>
-            <a:off x="4407408" y="3794760"/>
+            <a:off x="4407408" y="4023360"/>
             <a:ext cx="3383280" cy="713232"/>
           </a:xfrm>
           <a:prstGeom prst="roundRect">
@@ -11124,7 +11144,7 @@
         </p:nvSpPr>
         <p:spPr>
           <a:xfrm>
-            <a:off x="4462272" y="3794760"/>
+            <a:off x="4462272" y="4023360"/>
             <a:ext cx="3273552" cy="713232"/>
           </a:xfrm>
           <a:prstGeom prst="rect">
@@ -11163,7 +11183,7 @@
         </p:nvSpPr>
         <p:spPr>
           <a:xfrm>
-            <a:off x="7882128" y="4151376"/>
+            <a:off x="7882128" y="4379976"/>
             <a:ext cx="164592" cy="0"/>
           </a:xfrm>
           <a:prstGeom prst="line">
@@ -11186,7 +11206,7 @@
         </p:nvSpPr>
         <p:spPr>
           <a:xfrm rot="5400000">
-            <a:off x="8010144" y="4082796"/>
+            <a:off x="8010144" y="4311396"/>
             <a:ext cx="146304" cy="137160"/>
           </a:xfrm>
           <a:prstGeom prst="triangle">
@@ -11206,7 +11226,7 @@
         </p:nvSpPr>
         <p:spPr>
           <a:xfrm>
-            <a:off x="8247888" y="3794760"/>
+            <a:off x="8247888" y="4023360"/>
             <a:ext cx="3383280" cy="713232"/>
           </a:xfrm>
           <a:prstGeom prst="roundRect">
@@ -11228,7 +11248,7 @@
         </p:nvSpPr>
         <p:spPr>
           <a:xfrm>
-            <a:off x="8302752" y="3794760"/>
+            <a:off x="8302752" y="4023360"/>
             <a:ext cx="3273552" cy="713232"/>
           </a:xfrm>
           <a:prstGeom prst="rect">
@@ -11267,7 +11287,7 @@
         </p:nvSpPr>
         <p:spPr>
           <a:xfrm>
-            <a:off x="566928" y="4754880"/>
+            <a:off x="566928" y="4937760"/>
             <a:ext cx="11064240" cy="1097280"/>
           </a:xfrm>
           <a:prstGeom prst="roundRect">
@@ -11294,7 +11314,7 @@
         </p:nvSpPr>
         <p:spPr>
           <a:xfrm>
-            <a:off x="749808" y="5148072"/>
+            <a:off x="749808" y="5330952"/>
             <a:ext cx="310896" cy="310896"/>
           </a:xfrm>
           <a:prstGeom prst="ellipse">
@@ -11314,7 +11334,7 @@
         </p:nvSpPr>
         <p:spPr>
           <a:xfrm>
-            <a:off x="749808" y="5148072"/>
+            <a:off x="749808" y="5330952"/>
             <a:ext cx="310896" cy="310896"/>
           </a:xfrm>
           <a:prstGeom prst="rect">
@@ -11353,7 +11373,7 @@
         </p:nvSpPr>
         <p:spPr>
           <a:xfrm>
-            <a:off x="1243584" y="4882896"/>
+            <a:off x="1243584" y="5065776"/>
             <a:ext cx="10168128" cy="219456"/>
           </a:xfrm>
           <a:prstGeom prst="rect">
@@ -11392,7 +11412,7 @@
         </p:nvSpPr>
         <p:spPr>
           <a:xfrm>
-            <a:off x="1243584" y="5138928"/>
+            <a:off x="1243584" y="5321808"/>
             <a:ext cx="10168128" cy="585216"/>
           </a:xfrm>
           <a:prstGeom prst="rect">
@@ -11593,7 +11613,7 @@
                 <a:ea typeface="Unbounded" pitchFamily="34" charset="-122"/>
                 <a:cs typeface="Unbounded" pitchFamily="34" charset="-120"/>
               </a:rPr>
-              <a:t>Третій маршрут: tier-система</a:t>
+              <a:t>Tier-система маршрутизації</a:t>
             </a:r>
             <a:endParaRPr lang="en-US" sz="2400" dirty="0"/>
           </a:p>
@@ -13000,7 +13020,7 @@
                 <a:ea typeface="Unbounded" pitchFamily="34" charset="-122"/>
                 <a:cs typeface="Unbounded" pitchFamily="34" charset="-120"/>
               </a:rPr>
-              <a:t>Що ви зможете після уроку</a:t>
+              <a:t>Що Ви зможете після теми</a:t>
             </a:r>
             <a:endParaRPr lang="en-US" sz="2400" dirty="0"/>
           </a:p>
@@ -14076,7 +14096,7 @@
                 <a:ea typeface="Unbounded" pitchFamily="34" charset="-122"/>
                 <a:cs typeface="Unbounded" pitchFamily="34" charset="-120"/>
               </a:rPr>
-              <a:t>Зараз ви побачите — і навіщо</a:t>
+              <a:t>Зараз Ви побачите — і навіщо</a:t>
             </a:r>
             <a:endParaRPr lang="en-US" sz="2400" dirty="0"/>
           </a:p>
@@ -14971,7 +14991,7 @@
                 <a:ea typeface="Montserrat" pitchFamily="34" charset="-122"/>
                 <a:cs typeface="Montserrat" pitchFamily="34" charset="-120"/>
               </a:rPr>
-              <a:t>Побачити перший операційний доказ, що routing працює: не «код написаний», а «трафік розведений». Різниця між цими формулюваннями і є темою уроку.</a:t>
+              <a:t>Побачити перший операційний доказ, що routing працює: не «код написаний», а «трафік розведений». Різниця між цими формулюваннями і є темою теми.</a:t>
             </a:r>
             <a:endParaRPr lang="en-US" sz="1300" dirty="0"/>
           </a:p>
@@ -15105,7 +15125,7 @@
                 <a:ea typeface="Unbounded" pitchFamily="34" charset="-122"/>
                 <a:cs typeface="Unbounded" pitchFamily="34" charset="-120"/>
               </a:rPr>
-              <a:t>Лабораторна: чотири частини + опційна</a:t>
+              <a:t>Лабораторна робота: налаштуйте маршрутизацію та перевірте її на трафіку</a:t>
             </a:r>
             <a:endParaRPr lang="en-US" sz="2400" dirty="0"/>
           </a:p>
@@ -15119,7 +15139,7 @@
         </p:nvSpPr>
         <p:spPr>
           <a:xfrm>
-            <a:off x="566928" y="1218895"/>
+            <a:off x="566928" y="1413662"/>
             <a:ext cx="950976" cy="256032"/>
           </a:xfrm>
           <a:prstGeom prst="roundRect">
@@ -15141,7 +15161,7 @@
         </p:nvSpPr>
         <p:spPr>
           <a:xfrm>
-            <a:off x="566928" y="1218895"/>
+            <a:off x="566928" y="1413662"/>
             <a:ext cx="950976" cy="256032"/>
           </a:xfrm>
           <a:prstGeom prst="rect">
@@ -15940,7 +15960,7 @@
                 <a:ea typeface="Montserrat" pitchFamily="34" charset="-122"/>
                 <a:cs typeface="Montserrat" pitchFamily="34" charset="-120"/>
               </a:rPr>
-              <a:t>що це довело · перевір себе · антипатерни тижня</a:t>
+              <a:t>що це довело · перевір себе · антипатерни маршрутизації</a:t>
             </a:r>
             <a:endParaRPr lang="en-US" sz="1500" dirty="0"/>
           </a:p>
@@ -16494,7 +16514,7 @@
                 <a:ea typeface="Montserrat" pitchFamily="34" charset="-122"/>
                 <a:cs typeface="Montserrat" pitchFamily="34" charset="-120"/>
               </a:rPr>
-              <a:t>Це фундамент тижня «Routing + cost»: наступного уроку на те саме поле model ляже вартість кожного запиту — і розподіл трафіку стане розподілом грошей.</a:t>
+              <a:t>Це фундамент тижня «Routing + cost»: у наступній темі на те саме поле model ляже вартість кожного запиту — і розподіл трафіку стане розподілом грошей.</a:t>
             </a:r>
             <a:endParaRPr lang="en-US" sz="1300" dirty="0"/>
           </a:p>
@@ -17342,7 +17362,7 @@
                 <a:ea typeface="Unbounded" pitchFamily="34" charset="-122"/>
                 <a:cs typeface="Unbounded" pitchFamily="34" charset="-120"/>
               </a:rPr>
-              <a:t>Антипатерни тижня</a:t>
+              <a:t>Антипатерни маршрутизації</a:t>
             </a:r>
             <a:endParaRPr lang="en-US" sz="2400" dirty="0"/>
           </a:p>
@@ -17867,7 +17887,7 @@
                 <a:ea typeface="Montserrat" pitchFamily="34" charset="-122"/>
                 <a:cs typeface="Montserrat" pitchFamily="34" charset="-120"/>
               </a:rPr>
-              <a:t>непередбачувано для користувача, невідтворювано для вас</a:t>
+              <a:t>непередбачувано для користувача, невідтворювано для Вас</a:t>
             </a:r>
             <a:endParaRPr lang="en-US" sz="1350" dirty="0"/>
           </a:p>
@@ -18012,7 +18032,7 @@
                 <a:ea typeface="Montserrat" pitchFamily="34" charset="-122"/>
                 <a:cs typeface="Montserrat" pitchFamily="34" charset="-120"/>
               </a:rPr>
-              <a:t>модель оновлюється під вами без жодної вашої дії</a:t>
+              <a:t>модель оновлюється під Вами без жодної Вашої дії</a:t>
             </a:r>
             <a:endParaRPr lang="en-US" sz="1350" dirty="0"/>
           </a:p>
@@ -18561,7 +18581,7 @@
                 <a:ea typeface="Montserrat" pitchFamily="34" charset="-122"/>
                 <a:cs typeface="Montserrat" pitchFamily="34" charset="-120"/>
               </a:rPr>
-              <a:t>ДЗ тижня 2 — після наступного уроку</a:t>
+              <a:t>ДЗ тижня 2 — після наступної теми</a:t>
             </a:r>
             <a:endParaRPr lang="en-US" sz="1500" dirty="0"/>
           </a:p>
@@ -18600,7 +18620,7 @@
                 <a:ea typeface="Montserrat" pitchFamily="34" charset="-122"/>
                 <a:cs typeface="Montserrat" pitchFamily="34" charset="-120"/>
               </a:rPr>
-              <a:t>Воно об'єднує routing і cost: сьогоднішня частина вже у вас в руках, після уроку 4 додасться облік вартості — і тиждень здається одним PR. Критерії — у файлі ДЗ після наступного уроку.</a:t>
+              <a:t>Воно об'єднує routing і cost: сьогоднішня частина вже у Вас в руках, після Теми 4 додасться облік вартості — і тиждень здається одним PR. Критерії — у файлі ДЗ після наступної теми.</a:t>
             </a:r>
             <a:endParaRPr lang="en-US" sz="1250" dirty="0"/>
           </a:p>
@@ -18751,7 +18771,7 @@
                 <a:ea typeface="Courier New" pitchFamily="34" charset="-122"/>
                 <a:cs typeface="Courier New" pitchFamily="34" charset="-120"/>
               </a:rPr>
-              <a:t>ПІДСУМОК УРОКУ 3</a:t>
+              <a:t>ПІДСУМОК ТЕМИ 3</a:t>
             </a:r>
             <a:endParaRPr lang="en-US" sz="1100" dirty="0"/>
           </a:p>
@@ -19127,7 +19147,7 @@
                 <a:ea typeface="Montserrat" pitchFamily="34" charset="-122"/>
                 <a:cs typeface="Montserrat" pitchFamily="34" charset="-120"/>
               </a:rPr>
-              <a:t>Наступний крок → Урок 4 · Токеноміка і cost attribution</a:t>
+              <a:t>Наступний крок → Тема 4 · Токеноміка і cost attribution</a:t>
             </a:r>
             <a:endParaRPr lang="en-US" sz="1500" dirty="0"/>
           </a:p>
@@ -19169,7 +19189,7 @@
                 <a:ea typeface="Montserrat" pitchFamily="34" charset="-122"/>
                 <a:cs typeface="Montserrat" pitchFamily="34" charset="-120"/>
               </a:rPr>
-              <a:t>Трафік розведений — тепер порахуємо, скільки він коштує. Наступного уроку на поле model ляже вартість кожного запиту: звідки беруться цифри, чому «звернення» дорожче за «виклик» і як за три GROUP BY знайти, куди пішов бюджет.</a:t>
+              <a:t>Трафік розведений — тепер порахуємо, скільки він коштує. У наступній темі на поле model ляже вартість кожного запиту: звідки беруться цифри, чому «звернення» дорожче за «виклик» і як за три GROUP BY знайти, куди пішов бюджет.</a:t>
             </a:r>
             <a:endParaRPr lang="en-US" sz="1250" dirty="0"/>
           </a:p>
@@ -19568,7 +19588,7 @@
                 <a:ea typeface="Montserrat" pitchFamily="34" charset="-122"/>
                 <a:cs typeface="Montserrat" pitchFamily="34" charset="-120"/>
               </a:rPr>
-              <a:t>Три біди однієї моделі</a:t>
+              <a:t>Проблеми однієї моделі</a:t>
             </a:r>
             <a:endParaRPr lang="en-US" sz="1450" dirty="0"/>
           </a:p>
@@ -19808,7 +19828,7 @@
                 <a:ea typeface="Montserrat" pitchFamily="34" charset="-122"/>
                 <a:cs typeface="Montserrat" pitchFamily="34" charset="-120"/>
               </a:rPr>
-              <a:t>Розтин конфіга; alias vs snapshot</a:t>
+              <a:t>Дві моделі на mock; alias vs snapshot</a:t>
             </a:r>
             <a:endParaRPr lang="en-US" sz="1450" dirty="0"/>
           </a:p>
@@ -19928,7 +19948,7 @@
                 <a:ea typeface="Montserrat" pitchFamily="34" charset="-122"/>
                 <a:cs typeface="Montserrat" pitchFamily="34" charset="-120"/>
               </a:rPr>
-              <a:t>Route(): одна точка рішення</a:t>
+              <a:t>Route(): одна точка вибору</a:t>
             </a:r>
             <a:endParaRPr lang="en-US" sz="1450" dirty="0"/>
           </a:p>
@@ -20048,7 +20068,7 @@
                 <a:ea typeface="Montserrat" pitchFamily="34" charset="-122"/>
                 <a:cs typeface="Montserrat" pitchFamily="34" charset="-120"/>
               </a:rPr>
-              <a:t>Маршрут за задачею</a:t>
+              <a:t>Маршрутизація за задачею</a:t>
             </a:r>
             <a:endParaRPr lang="en-US" sz="1450" dirty="0"/>
           </a:p>
@@ -20168,7 +20188,7 @@
                 <a:ea typeface="Montserrat" pitchFamily="34" charset="-122"/>
                 <a:cs typeface="Montserrat" pitchFamily="34" charset="-120"/>
               </a:rPr>
-              <a:t>Ціна самого рішення</a:t>
+              <a:t>Вартість і стабільність</a:t>
             </a:r>
             <a:endParaRPr lang="en-US" sz="1450" dirty="0"/>
           </a:p>
@@ -20288,7 +20308,7 @@
                 <a:ea typeface="Montserrat" pitchFamily="34" charset="-122"/>
                 <a:cs typeface="Montserrat" pitchFamily="34" charset="-120"/>
               </a:rPr>
-              <a:t>Fallback-порядок як політика</a:t>
+              <a:t>Fallback: резервний маршрут</a:t>
             </a:r>
             <a:endParaRPr lang="en-US" sz="1450" dirty="0"/>
           </a:p>
@@ -20408,7 +20428,7 @@
                 <a:ea typeface="Montserrat" pitchFamily="34" charset="-122"/>
                 <a:cs typeface="Montserrat" pitchFamily="34" charset="-120"/>
               </a:rPr>
-              <a:t>Додати провайдера без коду</a:t>
+              <a:t>Новий провайдер через адаптер</a:t>
             </a:r>
             <a:endParaRPr lang="en-US" sz="1450" dirty="0"/>
           </a:p>
@@ -21013,7 +21033,7 @@
                 <a:ea typeface="Montserrat" pitchFamily="34" charset="-122"/>
                 <a:cs typeface="Montserrat" pitchFamily="34" charset="-120"/>
               </a:rPr>
-              <a:t>Шість слів сьогоднішнього уроку</a:t>
+              <a:t>Шість слів сьогоднішньої теми</a:t>
             </a:r>
             <a:endParaRPr lang="en-US" sz="1300" dirty="0"/>
           </a:p>
@@ -22135,7 +22155,7 @@
                 <a:ea typeface="Unbounded" pitchFamily="34" charset="-122"/>
                 <a:cs typeface="Unbounded" pitchFamily="34" charset="-120"/>
               </a:rPr>
-              <a:t>Три біди однієї моделі</a:t>
+              <a:t>Проблеми використання однієї моделі</a:t>
             </a:r>
             <a:endParaRPr lang="en-US" sz="2400" dirty="0"/>
           </a:p>
@@ -22149,7 +22169,7 @@
         </p:nvSpPr>
         <p:spPr>
           <a:xfrm>
-            <a:off x="1280160" y="1024128"/>
+            <a:off x="1280160" y="1218895"/>
             <a:ext cx="777240" cy="256032"/>
           </a:xfrm>
           <a:prstGeom prst="roundRect">
@@ -22176,7 +22196,7 @@
         </p:nvSpPr>
         <p:spPr>
           <a:xfrm>
-            <a:off x="1280160" y="1024128"/>
+            <a:off x="1280160" y="1218895"/>
             <a:ext cx="777240" cy="256032"/>
           </a:xfrm>
           <a:prstGeom prst="rect">
@@ -22549,7 +22569,7 @@
                 <a:ea typeface="Montserrat" pitchFamily="34" charset="-122"/>
                 <a:cs typeface="Montserrat" pitchFamily="34" charset="-120"/>
               </a:rPr>
-              <a:t>один провайдер — одна точка відмови, яка вам не належить; плану Б не існує теоретично</a:t>
+              <a:t>один провайдер — одна точка відмови, яка Вам не належить; плану Б не існує теоретично</a:t>
             </a:r>
             <a:endParaRPr lang="en-US" sz="1200" dirty="0"/>
           </a:p>
@@ -22873,7 +22893,7 @@
                 <a:ea typeface="Montserrat" pitchFamily="34" charset="-122"/>
                 <a:cs typeface="Montserrat" pitchFamily="34" charset="-120"/>
               </a:rPr>
-              <a:t>Маршрутизація — перший механізм тижня «гроші»: вона розводить трафік за задачами, і саме на ній тримається все, що рахуватимемо наступного уроку.</a:t>
+              <a:t>Маршрутизація — перший механізм тижня «гроші»: вона розводить трафік за задачами, і саме на ній тримається все, що рахуватимемо у наступній темі.</a:t>
             </a:r>
             <a:endParaRPr lang="en-US" sz="1300" dirty="0"/>
           </a:p>
@@ -23046,7 +23066,7 @@
                 <a:ea typeface="Unbounded" pitchFamily="34" charset="-122"/>
                 <a:cs typeface="Unbounded" pitchFamily="34" charset="-120"/>
               </a:rPr>
-              <a:t>Сервіс вирішує. Адаптер виконує.</a:t>
+              <a:t>Розподіл відповідальності: сервіс вирішує, адаптер виконує</a:t>
             </a:r>
             <a:endParaRPr lang="en-US" sz="2400" dirty="0"/>
           </a:p>
@@ -23060,7 +23080,7 @@
         </p:nvSpPr>
         <p:spPr>
           <a:xfrm>
-            <a:off x="1280160" y="1218895"/>
+            <a:off x="1280160" y="1413662"/>
             <a:ext cx="777240" cy="256032"/>
           </a:xfrm>
           <a:prstGeom prst="roundRect">
@@ -23087,7 +23107,7 @@
         </p:nvSpPr>
         <p:spPr>
           <a:xfrm>
-            <a:off x="1280160" y="1218895"/>
+            <a:off x="1280160" y="1413662"/>
             <a:ext cx="777240" cy="256032"/>
           </a:xfrm>
           <a:prstGeom prst="rect">
@@ -23926,7 +23946,7 @@
                 <a:ea typeface="Unbounded" pitchFamily="34" charset="-122"/>
                 <a:cs typeface="Unbounded" pitchFamily="34" charset="-120"/>
               </a:rPr>
-              <a:t>Розтин конфіга: дві «моделі» на одному mock</a:t>
+              <a:t>Дві логічні моделі на одному mock-провайдері</a:t>
             </a:r>
             <a:endParaRPr lang="en-US" sz="2400" dirty="0"/>
           </a:p>
@@ -24904,7 +24924,7 @@
                 <a:ea typeface="Unbounded" pitchFamily="34" charset="-122"/>
                 <a:cs typeface="Unbounded" pitchFamily="34" charset="-120"/>
               </a:rPr>
-              <a:t>«Модель» за назвою — не та сама модель</a:t>
+              <a:t>Alias і snapshot моделі</a:t>
             </a:r>
             <a:endParaRPr lang="en-US" sz="2400" dirty="0"/>
           </a:p>
@@ -24918,7 +24938,7 @@
         </p:nvSpPr>
         <p:spPr>
           <a:xfrm>
-            <a:off x="1280160" y="1218895"/>
+            <a:off x="1280160" y="1024128"/>
             <a:ext cx="777240" cy="256032"/>
           </a:xfrm>
           <a:prstGeom prst="roundRect">
@@ -24945,7 +24965,7 @@
         </p:nvSpPr>
         <p:spPr>
           <a:xfrm>
-            <a:off x="1280160" y="1218895"/>
+            <a:off x="1280160" y="1024128"/>
             <a:ext cx="777240" cy="256032"/>
           </a:xfrm>
           <a:prstGeom prst="rect">
@@ -25200,7 +25220,7 @@
                 <a:ea typeface="Montserrat" pitchFamily="34" charset="-122"/>
                 <a:cs typeface="Montserrat" pitchFamily="34" charset="-120"/>
               </a:rPr>
-              <a:t>не змінюється під вами, але й не оновлюється сама — і колись її виведуть з обігу</a:t>
+              <a:t>не змінюється під Вами, але й не оновлюється сама — і колись її виведуть з обігу</a:t>
             </a:r>
             <a:endParaRPr lang="en-US" sz="1200" dirty="0"/>
           </a:p>
@@ -25460,7 +25480,7 @@
                 <a:ea typeface="Courier New" pitchFamily="34" charset="-122"/>
                 <a:cs typeface="Courier New" pitchFamily="34" charset="-120"/>
               </a:rPr>
-              <a:t>snapshot — ви прибиті сюди</a:t>
+              <a:t>snapshot — Ви прибиті сюди</a:t>
             </a:r>
             <a:endParaRPr lang="en-US" sz="900" dirty="0"/>
           </a:p>
@@ -25499,7 +25519,7 @@
                 <a:ea typeface="Courier New" pitchFamily="34" charset="-122"/>
                 <a:cs typeface="Courier New" pitchFamily="34" charset="-120"/>
               </a:rPr>
-              <a:t>alias — ви завжди тут, і воно рухається</a:t>
+              <a:t>alias — Ви завжди тут, і воно рухається</a:t>
             </a:r>
             <a:endParaRPr lang="en-US" sz="900" dirty="0"/>
           </a:p>

--- a/docs/decks/L03.pptx
+++ b/docs/decks/L03.pptx
@@ -5157,11 +5157,11 @@
         <p:spPr>
           <a:xfrm>
             <a:off x="566928" y="1737360"/>
-            <a:ext cx="3520440" cy="1828800"/>
+            <a:ext cx="3520440" cy="1691640"/>
           </a:xfrm>
           <a:prstGeom prst="roundRect">
             <a:avLst>
-              <a:gd name="adj" fmla="val 6000"/>
+              <a:gd name="adj" fmla="val 6486"/>
             </a:avLst>
           </a:prstGeom>
           <a:solidFill>
@@ -5277,7 +5277,7 @@
         <p:spPr>
           <a:xfrm>
             <a:off x="768096" y="2423160"/>
-            <a:ext cx="3118104" cy="987552"/>
+            <a:ext cx="3118104" cy="850392"/>
           </a:xfrm>
           <a:prstGeom prst="rect">
             <a:avLst/>
@@ -5319,11 +5319,11 @@
         <p:spPr>
           <a:xfrm>
             <a:off x="4270248" y="1737360"/>
-            <a:ext cx="3520440" cy="1828800"/>
+            <a:ext cx="3520440" cy="1691640"/>
           </a:xfrm>
           <a:prstGeom prst="roundRect">
             <a:avLst>
-              <a:gd name="adj" fmla="val 6000"/>
+              <a:gd name="adj" fmla="val 6486"/>
             </a:avLst>
           </a:prstGeom>
           <a:solidFill>
@@ -5439,7 +5439,7 @@
         <p:spPr>
           <a:xfrm>
             <a:off x="4471416" y="2423160"/>
-            <a:ext cx="3118104" cy="987552"/>
+            <a:ext cx="3118104" cy="850392"/>
           </a:xfrm>
           <a:prstGeom prst="rect">
             <a:avLst/>
@@ -5481,11 +5481,11 @@
         <p:spPr>
           <a:xfrm>
             <a:off x="7973568" y="1737360"/>
-            <a:ext cx="3520440" cy="1828800"/>
+            <a:ext cx="3520440" cy="1691640"/>
           </a:xfrm>
           <a:prstGeom prst="roundRect">
             <a:avLst>
-              <a:gd name="adj" fmla="val 6000"/>
+              <a:gd name="adj" fmla="val 6486"/>
             </a:avLst>
           </a:prstGeom>
           <a:solidFill>
@@ -5601,7 +5601,7 @@
         <p:spPr>
           <a:xfrm>
             <a:off x="8174736" y="2423160"/>
-            <a:ext cx="3118104" cy="987552"/>
+            <a:ext cx="3118104" cy="850392"/>
           </a:xfrm>
           <a:prstGeom prst="rect">
             <a:avLst/>
@@ -5642,13 +5642,134 @@
         </p:nvSpPr>
         <p:spPr>
           <a:xfrm>
-            <a:off x="566928" y="3977640"/>
-            <a:ext cx="11064240" cy="1371600"/>
+            <a:off x="566928" y="3657600"/>
+            <a:ext cx="3931920" cy="548640"/>
           </a:xfrm>
           <a:prstGeom prst="roundRect">
             <a:avLst>
-              <a:gd name="adj" fmla="val 8000"/>
+              <a:gd name="adj" fmla="val 16667"/>
             </a:avLst>
+          </a:prstGeom>
+          <a:solidFill>
+            <a:srgbClr val="000000"/>
+          </a:solidFill>
+          <a:ln/>
+        </p:spPr>
+      </p:sp>
+      <p:sp>
+        <p:nvSpPr>
+          <p:cNvPr id="24" name="Text 21"/>
+          <p:cNvSpPr/>
+          <p:nvPr/>
+        </p:nvSpPr>
+        <p:spPr>
+          <a:xfrm>
+            <a:off x="621792" y="3657600"/>
+            <a:ext cx="3822192" cy="548640"/>
+          </a:xfrm>
+          <a:prstGeom prst="rect">
+            <a:avLst/>
+          </a:prstGeom>
+          <a:noFill/>
+          <a:ln/>
+        </p:spPr>
+        <p:txBody>
+          <a:bodyPr wrap="square" lIns="0" tIns="0" rIns="0" bIns="0" rtlCol="0" anchor="ctr"/>
+          <a:lstStyle/>
+          <a:p>
+            <a:pPr algn="ctr" indent="0" marL="0">
+              <a:buNone/>
+            </a:pPr>
+            <a:r>
+              <a:rPr lang="en-US" sz="1100" dirty="0">
+                <a:solidFill>
+                  <a:srgbClr val="FFFFFF"/>
+                </a:solidFill>
+                <a:latin typeface="Courier New" pitchFamily="34" charset="0"/>
+                <a:ea typeface="Courier New" pitchFamily="34" charset="-122"/>
+                <a:cs typeface="Courier New" pitchFamily="34" charset="-120"/>
+              </a:rPr>
+              <a:t>«дякую, але хочу повернути гроші»</a:t>
+            </a:r>
+            <a:endParaRPr lang="en-US" sz="1100" dirty="0"/>
+          </a:p>
+        </p:txBody>
+      </p:sp>
+      <p:sp>
+        <p:nvSpPr>
+          <p:cNvPr id="25" name="Text 22"/>
+          <p:cNvSpPr/>
+          <p:nvPr/>
+        </p:nvSpPr>
+        <p:spPr>
+          <a:xfrm>
+            <a:off x="566928" y="4242816"/>
+            <a:ext cx="3931920" cy="274320"/>
+          </a:xfrm>
+          <a:prstGeom prst="rect">
+            <a:avLst/>
+          </a:prstGeom>
+          <a:noFill/>
+          <a:ln/>
+        </p:spPr>
+        <p:txBody>
+          <a:bodyPr wrap="square" lIns="0" tIns="0" rIns="0" bIns="0" rtlCol="0" anchor="ctr"/>
+          <a:lstStyle/>
+          <a:p>
+            <a:pPr algn="ctr" indent="0" marL="0">
+              <a:buNone/>
+            </a:pPr>
+            <a:r>
+              <a:rPr lang="en-US" sz="1000" dirty="0">
+                <a:solidFill>
+                  <a:srgbClr val="6B6B6B"/>
+                </a:solidFill>
+                <a:latin typeface="Montserrat" pitchFamily="34" charset="0"/>
+                <a:ea typeface="Montserrat" pitchFamily="34" charset="-122"/>
+                <a:cs typeface="Montserrat" pitchFamily="34" charset="-120"/>
+              </a:rPr>
+              <a:t>вхід: подяка + ескалація</a:t>
+            </a:r>
+            <a:endParaRPr lang="en-US" sz="1000" dirty="0"/>
+          </a:p>
+        </p:txBody>
+      </p:sp>
+      <p:sp>
+        <p:nvSpPr>
+          <p:cNvPr id="26" name="Shape 23"/>
+          <p:cNvSpPr/>
+          <p:nvPr/>
+        </p:nvSpPr>
+        <p:spPr>
+          <a:xfrm>
+            <a:off x="4590288" y="3931920"/>
+            <a:ext cx="164592" cy="0"/>
+          </a:xfrm>
+          <a:prstGeom prst="line">
+            <a:avLst/>
+          </a:prstGeom>
+          <a:noFill/>
+          <a:ln w="15875">
+            <a:solidFill>
+              <a:srgbClr val="5A05F4"/>
+            </a:solidFill>
+            <a:prstDash val="solid"/>
+          </a:ln>
+        </p:spPr>
+      </p:sp>
+      <p:sp>
+        <p:nvSpPr>
+          <p:cNvPr id="27" name="Shape 24"/>
+          <p:cNvSpPr/>
+          <p:nvPr/>
+        </p:nvSpPr>
+        <p:spPr>
+          <a:xfrm rot="5400000">
+            <a:off x="4718304" y="3863340"/>
+            <a:ext cx="146304" cy="137160"/>
+          </a:xfrm>
+          <a:prstGeom prst="triangle">
+            <a:avLst/>
           </a:prstGeom>
           <a:solidFill>
             <a:srgbClr val="5A05F4"/>
@@ -5658,14 +5779,36 @@
       </p:sp>
       <p:sp>
         <p:nvSpPr>
-          <p:cNvPr id="24" name="Text 21"/>
-          <p:cNvSpPr/>
-          <p:nvPr/>
-        </p:nvSpPr>
-        <p:spPr>
-          <a:xfrm>
-            <a:off x="786384" y="4105656"/>
-            <a:ext cx="10625328" cy="219456"/>
+          <p:cNvPr id="28" name="Shape 25"/>
+          <p:cNvSpPr/>
+          <p:nvPr/>
+        </p:nvSpPr>
+        <p:spPr>
+          <a:xfrm>
+            <a:off x="4956048" y="3657600"/>
+            <a:ext cx="3108960" cy="548640"/>
+          </a:xfrm>
+          <a:prstGeom prst="roundRect">
+            <a:avLst>
+              <a:gd name="adj" fmla="val 16667"/>
+            </a:avLst>
+          </a:prstGeom>
+          <a:solidFill>
+            <a:srgbClr val="000000"/>
+          </a:solidFill>
+          <a:ln/>
+        </p:spPr>
+      </p:sp>
+      <p:sp>
+        <p:nvSpPr>
+          <p:cNvPr id="29" name="Text 26"/>
+          <p:cNvSpPr/>
+          <p:nvPr/>
+        </p:nvSpPr>
+        <p:spPr>
+          <a:xfrm>
+            <a:off x="5010912" y="3657600"/>
+            <a:ext cx="2999232" cy="548640"/>
           </a:xfrm>
           <a:prstGeom prst="rect">
             <a:avLst/>
@@ -5677,18 +5820,261 @@
           <a:bodyPr wrap="square" lIns="0" tIns="0" rIns="0" bIns="0" rtlCol="0" anchor="ctr"/>
           <a:lstStyle/>
           <a:p>
-            <a:pPr indent="0" marL="0">
-              <a:buNone/>
-            </a:pPr>
-            <a:r>
-              <a:rPr lang="en-US" sz="950" b="1" spc="150" kern="0" dirty="0">
-                <a:solidFill>
-                  <a:srgbClr val="FFFFFF"/>
+            <a:pPr algn="ctr" indent="0" marL="0">
+              <a:buNone/>
+            </a:pPr>
+            <a:r>
+              <a:rPr lang="en-US" sz="1100" b="1" dirty="0">
+                <a:solidFill>
+                  <a:srgbClr val="A98BFF"/>
                 </a:solidFill>
                 <a:latin typeface="Courier New" pitchFamily="34" charset="0"/>
                 <a:ea typeface="Courier New" pitchFamily="34" charset="-122"/>
                 <a:cs typeface="Courier New" pitchFamily="34" charset="-120"/>
               </a:rPr>
+              <a:t>Route()</a:t>
+            </a:r>
+            <a:endParaRPr lang="en-US" sz="1100" dirty="0"/>
+          </a:p>
+        </p:txBody>
+      </p:sp>
+      <p:sp>
+        <p:nvSpPr>
+          <p:cNvPr id="30" name="Text 27"/>
+          <p:cNvSpPr/>
+          <p:nvPr/>
+        </p:nvSpPr>
+        <p:spPr>
+          <a:xfrm>
+            <a:off x="4956048" y="4242816"/>
+            <a:ext cx="3108960" cy="274320"/>
+          </a:xfrm>
+          <a:prstGeom prst="rect">
+            <a:avLst/>
+          </a:prstGeom>
+          <a:noFill/>
+          <a:ln/>
+        </p:spPr>
+        <p:txBody>
+          <a:bodyPr wrap="square" lIns="0" tIns="0" rIns="0" bIns="0" rtlCol="0" anchor="ctr"/>
+          <a:lstStyle/>
+          <a:p>
+            <a:pPr algn="ctr" indent="0" marL="0">
+              <a:buNone/>
+            </a:pPr>
+            <a:r>
+              <a:rPr lang="en-US" sz="1000" dirty="0">
+                <a:solidFill>
+                  <a:srgbClr val="6B6B6B"/>
+                </a:solidFill>
+                <a:latin typeface="Montserrat" pitchFamily="34" charset="0"/>
+                <a:ea typeface="Montserrat" pitchFamily="34" charset="-122"/>
+                <a:cs typeface="Montserrat" pitchFamily="34" charset="-120"/>
+              </a:rPr>
+              <a:t>чиста функція</a:t>
+            </a:r>
+            <a:endParaRPr lang="en-US" sz="1000" dirty="0"/>
+          </a:p>
+        </p:txBody>
+      </p:sp>
+      <p:sp>
+        <p:nvSpPr>
+          <p:cNvPr id="31" name="Shape 28"/>
+          <p:cNvSpPr/>
+          <p:nvPr/>
+        </p:nvSpPr>
+        <p:spPr>
+          <a:xfrm>
+            <a:off x="8156448" y="3931920"/>
+            <a:ext cx="164592" cy="0"/>
+          </a:xfrm>
+          <a:prstGeom prst="line">
+            <a:avLst/>
+          </a:prstGeom>
+          <a:noFill/>
+          <a:ln w="15875">
+            <a:solidFill>
+              <a:srgbClr val="5A05F4"/>
+            </a:solidFill>
+            <a:prstDash val="solid"/>
+          </a:ln>
+        </p:spPr>
+      </p:sp>
+      <p:sp>
+        <p:nvSpPr>
+          <p:cNvPr id="32" name="Shape 29"/>
+          <p:cNvSpPr/>
+          <p:nvPr/>
+        </p:nvSpPr>
+        <p:spPr>
+          <a:xfrm rot="5400000">
+            <a:off x="8284464" y="3863340"/>
+            <a:ext cx="146304" cy="137160"/>
+          </a:xfrm>
+          <a:prstGeom prst="triangle">
+            <a:avLst/>
+          </a:prstGeom>
+          <a:solidFill>
+            <a:srgbClr val="5A05F4"/>
+          </a:solidFill>
+          <a:ln/>
+        </p:spPr>
+      </p:sp>
+      <p:sp>
+        <p:nvSpPr>
+          <p:cNvPr id="33" name="Shape 30"/>
+          <p:cNvSpPr/>
+          <p:nvPr/>
+        </p:nvSpPr>
+        <p:spPr>
+          <a:xfrm>
+            <a:off x="8522208" y="3657600"/>
+            <a:ext cx="3108960" cy="548640"/>
+          </a:xfrm>
+          <a:prstGeom prst="roundRect">
+            <a:avLst>
+              <a:gd name="adj" fmla="val 16667"/>
+            </a:avLst>
+          </a:prstGeom>
+          <a:solidFill>
+            <a:srgbClr val="000000"/>
+          </a:solidFill>
+          <a:ln/>
+        </p:spPr>
+      </p:sp>
+      <p:sp>
+        <p:nvSpPr>
+          <p:cNvPr id="34" name="Text 31"/>
+          <p:cNvSpPr/>
+          <p:nvPr/>
+        </p:nvSpPr>
+        <p:spPr>
+          <a:xfrm>
+            <a:off x="8577072" y="3657600"/>
+            <a:ext cx="2999232" cy="548640"/>
+          </a:xfrm>
+          <a:prstGeom prst="rect">
+            <a:avLst/>
+          </a:prstGeom>
+          <a:noFill/>
+          <a:ln/>
+        </p:spPr>
+        <p:txBody>
+          <a:bodyPr wrap="square" lIns="0" tIns="0" rIns="0" bIns="0" rtlCol="0" anchor="ctr"/>
+          <a:lstStyle/>
+          <a:p>
+            <a:pPr algn="ctr" indent="0" marL="0">
+              <a:buNone/>
+            </a:pPr>
+            <a:r>
+              <a:rPr lang="en-US" sz="1100" b="1" dirty="0">
+                <a:solidFill>
+                  <a:srgbClr val="3FCF8E"/>
+                </a:solidFill>
+                <a:latin typeface="Courier New" pitchFamily="34" charset="0"/>
+                <a:ea typeface="Courier New" pitchFamily="34" charset="-122"/>
+                <a:cs typeface="Courier New" pitchFamily="34" charset="-120"/>
+              </a:rPr>
+              <a:t>mock-strong</a:t>
+            </a:r>
+            <a:endParaRPr lang="en-US" sz="1100" dirty="0"/>
+          </a:p>
+        </p:txBody>
+      </p:sp>
+      <p:sp>
+        <p:nvSpPr>
+          <p:cNvPr id="35" name="Text 32"/>
+          <p:cNvSpPr/>
+          <p:nvPr/>
+        </p:nvSpPr>
+        <p:spPr>
+          <a:xfrm>
+            <a:off x="8522208" y="4242816"/>
+            <a:ext cx="3108960" cy="274320"/>
+          </a:xfrm>
+          <a:prstGeom prst="rect">
+            <a:avLst/>
+          </a:prstGeom>
+          <a:noFill/>
+          <a:ln/>
+        </p:spPr>
+        <p:txBody>
+          <a:bodyPr wrap="square" lIns="0" tIns="0" rIns="0" bIns="0" rtlCol="0" anchor="ctr"/>
+          <a:lstStyle/>
+          <a:p>
+            <a:pPr algn="ctr" indent="0" marL="0">
+              <a:buNone/>
+            </a:pPr>
+            <a:r>
+              <a:rPr lang="en-US" sz="1000" dirty="0">
+                <a:solidFill>
+                  <a:srgbClr val="6B6B6B"/>
+                </a:solidFill>
+                <a:latin typeface="Montserrat" pitchFamily="34" charset="0"/>
+                <a:ea typeface="Montserrat" pitchFamily="34" charset="-122"/>
+                <a:cs typeface="Montserrat" pitchFamily="34" charset="-120"/>
+              </a:rPr>
+              <a:t>сумнів — на користь дорожчого</a:t>
+            </a:r>
+            <a:endParaRPr lang="en-US" sz="1000" dirty="0"/>
+          </a:p>
+        </p:txBody>
+      </p:sp>
+      <p:sp>
+        <p:nvSpPr>
+          <p:cNvPr id="36" name="Shape 33"/>
+          <p:cNvSpPr/>
+          <p:nvPr/>
+        </p:nvSpPr>
+        <p:spPr>
+          <a:xfrm>
+            <a:off x="566928" y="4800600"/>
+            <a:ext cx="11064240" cy="1097280"/>
+          </a:xfrm>
+          <a:prstGeom prst="roundRect">
+            <a:avLst>
+              <a:gd name="adj" fmla="val 10000"/>
+            </a:avLst>
+          </a:prstGeom>
+          <a:solidFill>
+            <a:srgbClr val="5A05F4"/>
+          </a:solidFill>
+          <a:ln/>
+        </p:spPr>
+      </p:sp>
+      <p:sp>
+        <p:nvSpPr>
+          <p:cNvPr id="37" name="Text 34"/>
+          <p:cNvSpPr/>
+          <p:nvPr/>
+        </p:nvSpPr>
+        <p:spPr>
+          <a:xfrm>
+            <a:off x="786384" y="4928616"/>
+            <a:ext cx="10625328" cy="219456"/>
+          </a:xfrm>
+          <a:prstGeom prst="rect">
+            <a:avLst/>
+          </a:prstGeom>
+          <a:noFill/>
+          <a:ln/>
+        </p:spPr>
+        <p:txBody>
+          <a:bodyPr wrap="square" lIns="0" tIns="0" rIns="0" bIns="0" rtlCol="0" anchor="ctr"/>
+          <a:lstStyle/>
+          <a:p>
+            <a:pPr indent="0" marL="0">
+              <a:buNone/>
+            </a:pPr>
+            <a:r>
+              <a:rPr lang="en-US" sz="950" b="1" spc="150" kern="0" dirty="0">
+                <a:solidFill>
+                  <a:srgbClr val="FFFFFF"/>
+                </a:solidFill>
+                <a:latin typeface="Courier New" pitchFamily="34" charset="0"/>
+                <a:ea typeface="Courier New" pitchFamily="34" charset="-122"/>
+                <a:cs typeface="Courier New" pitchFamily="34" charset="-120"/>
+              </a:rPr>
               <a:t>З ОДНИМ РЕАЛЬНИМ КЛЮЧЕМ РОУТЕР ВИРОДЖУЄТЬСЯ</a:t>
             </a:r>
             <a:endParaRPr lang="en-US" sz="950" dirty="0"/>
@@ -5697,14 +6083,14 @@
       </p:sp>
       <p:sp>
         <p:nvSpPr>
-          <p:cNvPr id="25" name="Text 22"/>
-          <p:cNvSpPr/>
-          <p:nvPr/>
-        </p:nvSpPr>
-        <p:spPr>
-          <a:xfrm>
-            <a:off x="786384" y="4361688"/>
-            <a:ext cx="10625328" cy="859536"/>
+          <p:cNvPr id="38" name="Text 35"/>
+          <p:cNvSpPr/>
+          <p:nvPr/>
+        </p:nvSpPr>
+        <p:spPr>
+          <a:xfrm>
+            <a:off x="786384" y="5184648"/>
+            <a:ext cx="10625328" cy="585216"/>
           </a:xfrm>
           <a:prstGeom prst="rect">
             <a:avLst/>
@@ -22260,11 +22646,11 @@
         <p:spPr>
           <a:xfrm>
             <a:off x="566928" y="1737360"/>
-            <a:ext cx="3520440" cy="1874520"/>
+            <a:ext cx="3520440" cy="1691640"/>
           </a:xfrm>
           <a:prstGeom prst="roundRect">
             <a:avLst>
-              <a:gd name="adj" fmla="val 5854"/>
+              <a:gd name="adj" fmla="val 6486"/>
             </a:avLst>
           </a:prstGeom>
           <a:solidFill>
@@ -22380,7 +22766,7 @@
         <p:spPr>
           <a:xfrm>
             <a:off x="768096" y="2423160"/>
-            <a:ext cx="3118104" cy="1033272"/>
+            <a:ext cx="3118104" cy="850392"/>
           </a:xfrm>
           <a:prstGeom prst="rect">
             <a:avLst/>
@@ -22422,11 +22808,11 @@
         <p:spPr>
           <a:xfrm>
             <a:off x="4270248" y="1737360"/>
-            <a:ext cx="3520440" cy="1874520"/>
+            <a:ext cx="3520440" cy="1691640"/>
           </a:xfrm>
           <a:prstGeom prst="roundRect">
             <a:avLst>
-              <a:gd name="adj" fmla="val 5854"/>
+              <a:gd name="adj" fmla="val 6486"/>
             </a:avLst>
           </a:prstGeom>
           <a:solidFill>
@@ -22542,7 +22928,7 @@
         <p:spPr>
           <a:xfrm>
             <a:off x="4471416" y="2423160"/>
-            <a:ext cx="3118104" cy="1033272"/>
+            <a:ext cx="3118104" cy="850392"/>
           </a:xfrm>
           <a:prstGeom prst="rect">
             <a:avLst/>
@@ -22584,11 +22970,11 @@
         <p:spPr>
           <a:xfrm>
             <a:off x="7973568" y="1737360"/>
-            <a:ext cx="3520440" cy="1874520"/>
+            <a:ext cx="3520440" cy="1691640"/>
           </a:xfrm>
           <a:prstGeom prst="roundRect">
             <a:avLst>
-              <a:gd name="adj" fmla="val 5854"/>
+              <a:gd name="adj" fmla="val 6486"/>
             </a:avLst>
           </a:prstGeom>
           <a:solidFill>
@@ -22704,7 +23090,7 @@
         <p:spPr>
           <a:xfrm>
             <a:off x="8174736" y="2423160"/>
-            <a:ext cx="3118104" cy="1033272"/>
+            <a:ext cx="3118104" cy="850392"/>
           </a:xfrm>
           <a:prstGeom prst="rect">
             <a:avLst/>
@@ -22739,18 +23125,218 @@
       </p:sp>
       <p:sp>
         <p:nvSpPr>
-          <p:cNvPr id="23" name="Shape 20"/>
-          <p:cNvSpPr/>
-          <p:nvPr/>
-        </p:nvSpPr>
-        <p:spPr>
-          <a:xfrm>
-            <a:off x="566928" y="3977640"/>
-            <a:ext cx="11064240" cy="1371600"/>
+          <p:cNvPr id="23" name="Text 20"/>
+          <p:cNvSpPr/>
+          <p:nvPr/>
+        </p:nvSpPr>
+        <p:spPr>
+          <a:xfrm>
+            <a:off x="566928" y="3657600"/>
+            <a:ext cx="2761488" cy="384048"/>
+          </a:xfrm>
+          <a:prstGeom prst="rect">
+            <a:avLst/>
+          </a:prstGeom>
+          <a:noFill/>
+          <a:ln/>
+        </p:spPr>
+        <p:txBody>
+          <a:bodyPr wrap="square" lIns="0" tIns="0" rIns="0" bIns="0" rtlCol="0" anchor="ctr"/>
+          <a:lstStyle/>
+          <a:p>
+            <a:pPr algn="l" indent="0" marL="0">
+              <a:buNone/>
+            </a:pPr>
+            <a:r>
+              <a:rPr lang="en-US" sz="1250" dirty="0">
+                <a:solidFill>
+                  <a:srgbClr val="000000"/>
+                </a:solidFill>
+                <a:latin typeface="Montserrat" pitchFamily="34" charset="0"/>
+                <a:ea typeface="Montserrat" pitchFamily="34" charset="-122"/>
+                <a:cs typeface="Montserrat" pitchFamily="34" charset="-120"/>
+              </a:rPr>
+              <a:t>FAQ через сильну модель</a:t>
+            </a:r>
+            <a:endParaRPr lang="en-US" sz="1250" dirty="0"/>
+          </a:p>
+        </p:txBody>
+      </p:sp>
+      <p:sp>
+        <p:nvSpPr>
+          <p:cNvPr id="24" name="Shape 21"/>
+          <p:cNvSpPr/>
+          <p:nvPr/>
+        </p:nvSpPr>
+        <p:spPr>
+          <a:xfrm>
+            <a:off x="3493008" y="3726729"/>
+            <a:ext cx="4389120" cy="245791"/>
           </a:xfrm>
           <a:prstGeom prst="roundRect">
             <a:avLst>
-              <a:gd name="adj" fmla="val 8000"/>
+              <a:gd name="adj" fmla="val 18601"/>
+            </a:avLst>
+          </a:prstGeom>
+          <a:solidFill>
+            <a:srgbClr val="B3261E"/>
+          </a:solidFill>
+          <a:ln/>
+        </p:spPr>
+      </p:sp>
+      <p:sp>
+        <p:nvSpPr>
+          <p:cNvPr id="25" name="Text 22"/>
+          <p:cNvSpPr/>
+          <p:nvPr/>
+        </p:nvSpPr>
+        <p:spPr>
+          <a:xfrm>
+            <a:off x="8110728" y="3657600"/>
+            <a:ext cx="3291840" cy="384048"/>
+          </a:xfrm>
+          <a:prstGeom prst="rect">
+            <a:avLst/>
+          </a:prstGeom>
+          <a:noFill/>
+          <a:ln/>
+        </p:spPr>
+        <p:txBody>
+          <a:bodyPr wrap="square" lIns="0" tIns="0" rIns="0" bIns="0" rtlCol="0" anchor="ctr"/>
+          <a:lstStyle/>
+          <a:p>
+            <a:pPr indent="0" marL="0">
+              <a:buNone/>
+            </a:pPr>
+            <a:r>
+              <a:rPr lang="en-US" sz="1150" b="1" dirty="0">
+                <a:solidFill>
+                  <a:srgbClr val="B3261E"/>
+                </a:solidFill>
+                <a:latin typeface="Montserrat" pitchFamily="34" charset="0"/>
+                <a:ea typeface="Montserrat" pitchFamily="34" charset="-122"/>
+                <a:cs typeface="Montserrat" pitchFamily="34" charset="-120"/>
+              </a:rPr>
+              <a:t>×10 — порядок вартості</a:t>
+            </a:r>
+            <a:endParaRPr lang="en-US" sz="1150" dirty="0"/>
+          </a:p>
+        </p:txBody>
+      </p:sp>
+      <p:sp>
+        <p:nvSpPr>
+          <p:cNvPr id="26" name="Text 23"/>
+          <p:cNvSpPr/>
+          <p:nvPr/>
+        </p:nvSpPr>
+        <p:spPr>
+          <a:xfrm>
+            <a:off x="566928" y="4187952"/>
+            <a:ext cx="2761488" cy="384048"/>
+          </a:xfrm>
+          <a:prstGeom prst="rect">
+            <a:avLst/>
+          </a:prstGeom>
+          <a:noFill/>
+          <a:ln/>
+        </p:spPr>
+        <p:txBody>
+          <a:bodyPr wrap="square" lIns="0" tIns="0" rIns="0" bIns="0" rtlCol="0" anchor="ctr"/>
+          <a:lstStyle/>
+          <a:p>
+            <a:pPr algn="l" indent="0" marL="0">
+              <a:buNone/>
+            </a:pPr>
+            <a:r>
+              <a:rPr lang="en-US" sz="1250" dirty="0">
+                <a:solidFill>
+                  <a:srgbClr val="000000"/>
+                </a:solidFill>
+                <a:latin typeface="Montserrat" pitchFamily="34" charset="0"/>
+                <a:ea typeface="Montserrat" pitchFamily="34" charset="-122"/>
+                <a:cs typeface="Montserrat" pitchFamily="34" charset="-120"/>
+              </a:rPr>
+              <a:t>той самий FAQ через дешеву</a:t>
+            </a:r>
+            <a:endParaRPr lang="en-US" sz="1250" dirty="0"/>
+          </a:p>
+        </p:txBody>
+      </p:sp>
+      <p:sp>
+        <p:nvSpPr>
+          <p:cNvPr id="27" name="Shape 24"/>
+          <p:cNvSpPr/>
+          <p:nvPr/>
+        </p:nvSpPr>
+        <p:spPr>
+          <a:xfrm>
+            <a:off x="3493008" y="4257081"/>
+            <a:ext cx="438912" cy="245791"/>
+          </a:xfrm>
+          <a:prstGeom prst="roundRect">
+            <a:avLst>
+              <a:gd name="adj" fmla="val 18601"/>
+            </a:avLst>
+          </a:prstGeom>
+          <a:solidFill>
+            <a:srgbClr val="106B41"/>
+          </a:solidFill>
+          <a:ln/>
+        </p:spPr>
+      </p:sp>
+      <p:sp>
+        <p:nvSpPr>
+          <p:cNvPr id="28" name="Text 25"/>
+          <p:cNvSpPr/>
+          <p:nvPr/>
+        </p:nvSpPr>
+        <p:spPr>
+          <a:xfrm>
+            <a:off x="8110728" y="4187952"/>
+            <a:ext cx="3291840" cy="384048"/>
+          </a:xfrm>
+          <a:prstGeom prst="rect">
+            <a:avLst/>
+          </a:prstGeom>
+          <a:noFill/>
+          <a:ln/>
+        </p:spPr>
+        <p:txBody>
+          <a:bodyPr wrap="square" lIns="0" tIns="0" rIns="0" bIns="0" rtlCol="0" anchor="ctr"/>
+          <a:lstStyle/>
+          <a:p>
+            <a:pPr indent="0" marL="0">
+              <a:buNone/>
+            </a:pPr>
+            <a:r>
+              <a:rPr lang="en-US" sz="1150" b="1" dirty="0">
+                <a:solidFill>
+                  <a:srgbClr val="106B41"/>
+                </a:solidFill>
+                <a:latin typeface="Montserrat" pitchFamily="34" charset="0"/>
+                <a:ea typeface="Montserrat" pitchFamily="34" charset="-122"/>
+                <a:cs typeface="Montserrat" pitchFamily="34" charset="-120"/>
+              </a:rPr>
+              <a:t>×1 — та сама відповідь</a:t>
+            </a:r>
+            <a:endParaRPr lang="en-US" sz="1150" dirty="0"/>
+          </a:p>
+        </p:txBody>
+      </p:sp>
+      <p:sp>
+        <p:nvSpPr>
+          <p:cNvPr id="29" name="Shape 26"/>
+          <p:cNvSpPr/>
+          <p:nvPr/>
+        </p:nvSpPr>
+        <p:spPr>
+          <a:xfrm>
+            <a:off x="566928" y="4754880"/>
+            <a:ext cx="11064240" cy="1097280"/>
+          </a:xfrm>
+          <a:prstGeom prst="roundRect">
+            <a:avLst>
+              <a:gd name="adj" fmla="val 10000"/>
             </a:avLst>
           </a:prstGeom>
           <a:solidFill>
@@ -22761,13 +23347,13 @@
       </p:sp>
       <p:sp>
         <p:nvSpPr>
-          <p:cNvPr id="24" name="Shape 21"/>
-          <p:cNvSpPr/>
-          <p:nvPr/>
-        </p:nvSpPr>
-        <p:spPr>
-          <a:xfrm>
-            <a:off x="749808" y="4507992"/>
+          <p:cNvPr id="30" name="Shape 27"/>
+          <p:cNvSpPr/>
+          <p:nvPr/>
+        </p:nvSpPr>
+        <p:spPr>
+          <a:xfrm>
+            <a:off x="749808" y="5148072"/>
             <a:ext cx="310896" cy="310896"/>
           </a:xfrm>
           <a:prstGeom prst="ellipse">
@@ -22781,13 +23367,13 @@
       </p:sp>
       <p:sp>
         <p:nvSpPr>
-          <p:cNvPr id="25" name="Text 22"/>
-          <p:cNvSpPr/>
-          <p:nvPr/>
-        </p:nvSpPr>
-        <p:spPr>
-          <a:xfrm>
-            <a:off x="749808" y="4507992"/>
+          <p:cNvPr id="31" name="Text 28"/>
+          <p:cNvSpPr/>
+          <p:nvPr/>
+        </p:nvSpPr>
+        <p:spPr>
+          <a:xfrm>
+            <a:off x="749808" y="5148072"/>
             <a:ext cx="310896" cy="310896"/>
           </a:xfrm>
           <a:prstGeom prst="rect">
@@ -22820,13 +23406,13 @@
       </p:sp>
       <p:sp>
         <p:nvSpPr>
-          <p:cNvPr id="26" name="Text 23"/>
-          <p:cNvSpPr/>
-          <p:nvPr/>
-        </p:nvSpPr>
-        <p:spPr>
-          <a:xfrm>
-            <a:off x="1243584" y="4105656"/>
+          <p:cNvPr id="32" name="Text 29"/>
+          <p:cNvSpPr/>
+          <p:nvPr/>
+        </p:nvSpPr>
+        <p:spPr>
+          <a:xfrm>
+            <a:off x="1243584" y="4882896"/>
             <a:ext cx="10168128" cy="219456"/>
           </a:xfrm>
           <a:prstGeom prst="rect">
@@ -22859,14 +23445,14 @@
       </p:sp>
       <p:sp>
         <p:nvSpPr>
-          <p:cNvPr id="27" name="Text 24"/>
-          <p:cNvSpPr/>
-          <p:nvPr/>
-        </p:nvSpPr>
-        <p:spPr>
-          <a:xfrm>
-            <a:off x="1243584" y="4361688"/>
-            <a:ext cx="10168128" cy="859536"/>
+          <p:cNvPr id="33" name="Text 30"/>
+          <p:cNvSpPr/>
+          <p:nvPr/>
+        </p:nvSpPr>
+        <p:spPr>
+          <a:xfrm>
+            <a:off x="1243584" y="5138928"/>
+            <a:ext cx="10168128" cy="585216"/>
           </a:xfrm>
           <a:prstGeom prst="rect">
             <a:avLst/>

--- a/docs/decks/L03.pptx
+++ b/docs/decks/L03.pptx
@@ -14582,7 +14582,7 @@
         <p:spPr>
           <a:xfrm>
             <a:off x="566928" y="1737360"/>
-            <a:ext cx="5532120" cy="1463040"/>
+            <a:ext cx="3611880" cy="1463040"/>
           </a:xfrm>
           <a:prstGeom prst="roundRect">
             <a:avLst>
@@ -14663,7 +14663,7 @@
         <p:spPr>
           <a:xfrm>
             <a:off x="1280160" y="1892808"/>
-            <a:ext cx="4617720" cy="438912"/>
+            <a:ext cx="2697480" cy="438912"/>
           </a:xfrm>
           <a:prstGeom prst="rect">
             <a:avLst/>
@@ -14702,7 +14702,7 @@
         <p:spPr>
           <a:xfrm>
             <a:off x="768096" y="2423160"/>
-            <a:ext cx="5129784" cy="621792"/>
+            <a:ext cx="3209544" cy="621792"/>
           </a:xfrm>
           <a:prstGeom prst="rect">
             <a:avLst/>
@@ -14743,8 +14743,8 @@
         </p:nvSpPr>
         <p:spPr>
           <a:xfrm>
-            <a:off x="6281928" y="1737360"/>
-            <a:ext cx="5532120" cy="1463040"/>
+            <a:off x="4361688" y="1737360"/>
+            <a:ext cx="3611880" cy="1463040"/>
           </a:xfrm>
           <a:prstGeom prst="roundRect">
             <a:avLst>
@@ -14765,7 +14765,7 @@
         </p:nvSpPr>
         <p:spPr>
           <a:xfrm>
-            <a:off x="6483096" y="1920240"/>
+            <a:off x="4562856" y="1920240"/>
             <a:ext cx="384048" cy="384048"/>
           </a:xfrm>
           <a:prstGeom prst="ellipse">
@@ -14785,7 +14785,7 @@
         </p:nvSpPr>
         <p:spPr>
           <a:xfrm>
-            <a:off x="6483096" y="1920240"/>
+            <a:off x="4562856" y="1920240"/>
             <a:ext cx="384048" cy="384048"/>
           </a:xfrm>
           <a:prstGeom prst="rect">
@@ -14824,8 +14824,8 @@
         </p:nvSpPr>
         <p:spPr>
           <a:xfrm>
-            <a:off x="6995160" y="1892808"/>
-            <a:ext cx="4617720" cy="438912"/>
+            <a:off x="5074920" y="1892808"/>
+            <a:ext cx="2697480" cy="438912"/>
           </a:xfrm>
           <a:prstGeom prst="rect">
             <a:avLst/>
@@ -14863,8 +14863,8 @@
         </p:nvSpPr>
         <p:spPr>
           <a:xfrm>
-            <a:off x="6483096" y="2423160"/>
-            <a:ext cx="5129784" cy="621792"/>
+            <a:off x="4562856" y="2423160"/>
+            <a:ext cx="3209544" cy="621792"/>
           </a:xfrm>
           <a:prstGeom prst="rect">
             <a:avLst/>
@@ -14906,7 +14906,7 @@
         <p:spPr>
           <a:xfrm>
             <a:off x="566928" y="3383280"/>
-            <a:ext cx="5532120" cy="1463040"/>
+            <a:ext cx="3611880" cy="1463040"/>
           </a:xfrm>
           <a:prstGeom prst="roundRect">
             <a:avLst>
@@ -14987,7 +14987,7 @@
         <p:spPr>
           <a:xfrm>
             <a:off x="1280160" y="3538728"/>
-            <a:ext cx="4617720" cy="438912"/>
+            <a:ext cx="2697480" cy="438912"/>
           </a:xfrm>
           <a:prstGeom prst="rect">
             <a:avLst/>
@@ -15026,7 +15026,7 @@
         <p:spPr>
           <a:xfrm>
             <a:off x="768096" y="4069080"/>
-            <a:ext cx="5129784" cy="621792"/>
+            <a:ext cx="3209544" cy="621792"/>
           </a:xfrm>
           <a:prstGeom prst="rect">
             <a:avLst/>
@@ -15067,8 +15067,8 @@
         </p:nvSpPr>
         <p:spPr>
           <a:xfrm>
-            <a:off x="6281928" y="3383280"/>
-            <a:ext cx="5532120" cy="1463040"/>
+            <a:off x="4361688" y="3383280"/>
+            <a:ext cx="3611880" cy="1463040"/>
           </a:xfrm>
           <a:prstGeom prst="roundRect">
             <a:avLst>
@@ -15089,7 +15089,7 @@
         </p:nvSpPr>
         <p:spPr>
           <a:xfrm>
-            <a:off x="6483096" y="3566160"/>
+            <a:off x="4562856" y="3566160"/>
             <a:ext cx="384048" cy="384048"/>
           </a:xfrm>
           <a:prstGeom prst="ellipse">
@@ -15109,7 +15109,7 @@
         </p:nvSpPr>
         <p:spPr>
           <a:xfrm>
-            <a:off x="6483096" y="3566160"/>
+            <a:off x="4562856" y="3566160"/>
             <a:ext cx="384048" cy="384048"/>
           </a:xfrm>
           <a:prstGeom prst="rect">
@@ -15148,8 +15148,8 @@
         </p:nvSpPr>
         <p:spPr>
           <a:xfrm>
-            <a:off x="6995160" y="3538728"/>
-            <a:ext cx="4617720" cy="438912"/>
+            <a:off x="5074920" y="3538728"/>
+            <a:ext cx="2697480" cy="438912"/>
           </a:xfrm>
           <a:prstGeom prst="rect">
             <a:avLst/>
@@ -15187,8 +15187,8 @@
         </p:nvSpPr>
         <p:spPr>
           <a:xfrm>
-            <a:off x="6483096" y="4069080"/>
-            <a:ext cx="5129784" cy="621792"/>
+            <a:off x="4562856" y="4069080"/>
+            <a:ext cx="3209544" cy="621792"/>
           </a:xfrm>
           <a:prstGeom prst="rect">
             <a:avLst/>
@@ -15229,6 +15229,445 @@
         </p:nvSpPr>
         <p:spPr>
           <a:xfrm>
+            <a:off x="8156448" y="1737360"/>
+            <a:ext cx="3474720" cy="3108960"/>
+          </a:xfrm>
+          <a:prstGeom prst="roundRect">
+            <a:avLst>
+              <a:gd name="adj" fmla="val 2353"/>
+            </a:avLst>
+          </a:prstGeom>
+          <a:solidFill>
+            <a:srgbClr val="0A0810"/>
+          </a:solidFill>
+          <a:ln w="12700">
+            <a:solidFill>
+              <a:srgbClr val="D9D9D9"/>
+            </a:solidFill>
+            <a:prstDash val="solid"/>
+          </a:ln>
+        </p:spPr>
+      </p:sp>
+      <p:sp>
+        <p:nvSpPr>
+          <p:cNvPr id="28" name="Shape 25"/>
+          <p:cNvSpPr/>
+          <p:nvPr/>
+        </p:nvSpPr>
+        <p:spPr>
+          <a:xfrm>
+            <a:off x="8284464" y="1856232"/>
+            <a:ext cx="73152" cy="73152"/>
+          </a:xfrm>
+          <a:prstGeom prst="ellipse">
+            <a:avLst/>
+          </a:prstGeom>
+          <a:solidFill>
+            <a:srgbClr val="FF6B6B"/>
+          </a:solidFill>
+          <a:ln/>
+        </p:spPr>
+      </p:sp>
+      <p:sp>
+        <p:nvSpPr>
+          <p:cNvPr id="29" name="Shape 26"/>
+          <p:cNvSpPr/>
+          <p:nvPr/>
+        </p:nvSpPr>
+        <p:spPr>
+          <a:xfrm>
+            <a:off x="8430768" y="1856232"/>
+            <a:ext cx="73152" cy="73152"/>
+          </a:xfrm>
+          <a:prstGeom prst="ellipse">
+            <a:avLst/>
+          </a:prstGeom>
+          <a:solidFill>
+            <a:srgbClr val="6BA0F8"/>
+          </a:solidFill>
+          <a:ln/>
+        </p:spPr>
+      </p:sp>
+      <p:sp>
+        <p:nvSpPr>
+          <p:cNvPr id="30" name="Shape 27"/>
+          <p:cNvSpPr/>
+          <p:nvPr/>
+        </p:nvSpPr>
+        <p:spPr>
+          <a:xfrm>
+            <a:off x="8577072" y="1856232"/>
+            <a:ext cx="73152" cy="73152"/>
+          </a:xfrm>
+          <a:prstGeom prst="ellipse">
+            <a:avLst/>
+          </a:prstGeom>
+          <a:solidFill>
+            <a:srgbClr val="3FCF8E"/>
+          </a:solidFill>
+          <a:ln/>
+        </p:spPr>
+      </p:sp>
+      <p:sp>
+        <p:nvSpPr>
+          <p:cNvPr id="31" name="Text 28"/>
+          <p:cNvSpPr/>
+          <p:nvPr/>
+        </p:nvSpPr>
+        <p:spPr>
+          <a:xfrm>
+            <a:off x="8759952" y="1737360"/>
+            <a:ext cx="2761488" cy="310896"/>
+          </a:xfrm>
+          <a:prstGeom prst="rect">
+            <a:avLst/>
+          </a:prstGeom>
+          <a:noFill/>
+          <a:ln/>
+        </p:spPr>
+        <p:txBody>
+          <a:bodyPr wrap="square" lIns="0" tIns="0" rIns="0" bIns="0" rtlCol="0" anchor="ctr"/>
+          <a:lstStyle/>
+          <a:p>
+            <a:pPr indent="0" marL="0">
+              <a:buNone/>
+            </a:pPr>
+            <a:r>
+              <a:rPr lang="en-US" sz="800" dirty="0">
+                <a:solidFill>
+                  <a:srgbClr val="9A94AA"/>
+                </a:solidFill>
+                <a:latin typeface="Courier New" pitchFamily="34" charset="0"/>
+                <a:ea typeface="Courier New" pitchFamily="34" charset="-122"/>
+                <a:cs typeface="Courier New" pitchFamily="34" charset="-120"/>
+              </a:rPr>
+              <a:t>psql · requests</a:t>
+            </a:r>
+            <a:endParaRPr lang="en-US" sz="800" dirty="0"/>
+          </a:p>
+        </p:txBody>
+      </p:sp>
+      <p:sp>
+        <p:nvSpPr>
+          <p:cNvPr id="32" name="Shape 29"/>
+          <p:cNvSpPr/>
+          <p:nvPr/>
+        </p:nvSpPr>
+        <p:spPr>
+          <a:xfrm>
+            <a:off x="8156448" y="2048256"/>
+            <a:ext cx="3474720" cy="0"/>
+          </a:xfrm>
+          <a:prstGeom prst="line">
+            <a:avLst/>
+          </a:prstGeom>
+          <a:noFill/>
+          <a:ln w="9525">
+            <a:solidFill>
+              <a:srgbClr val="2A2438"/>
+            </a:solidFill>
+            <a:prstDash val="solid"/>
+          </a:ln>
+        </p:spPr>
+      </p:sp>
+      <p:sp>
+        <p:nvSpPr>
+          <p:cNvPr id="33" name="Text 30"/>
+          <p:cNvSpPr/>
+          <p:nvPr/>
+        </p:nvSpPr>
+        <p:spPr>
+          <a:xfrm>
+            <a:off x="8321040" y="2157984"/>
+            <a:ext cx="3145536" cy="221513"/>
+          </a:xfrm>
+          <a:prstGeom prst="rect">
+            <a:avLst/>
+          </a:prstGeom>
+          <a:noFill/>
+          <a:ln/>
+        </p:spPr>
+        <p:txBody>
+          <a:bodyPr wrap="square" lIns="0" tIns="0" rIns="0" bIns="0" rtlCol="0" anchor="ctr"/>
+          <a:lstStyle/>
+          <a:p>
+            <a:pPr indent="0" marL="0">
+              <a:buNone/>
+            </a:pPr>
+            <a:r>
+              <a:rPr lang="en-US" sz="950" dirty="0">
+                <a:solidFill>
+                  <a:srgbClr val="D8D4E4"/>
+                </a:solidFill>
+                <a:latin typeface="Courier New" pitchFamily="34" charset="0"/>
+                <a:ea typeface="Courier New" pitchFamily="34" charset="-122"/>
+                <a:cs typeface="Courier New" pitchFamily="34" charset="-120"/>
+              </a:rPr>
+              <a:t>SELECT model, count(*)</a:t>
+            </a:r>
+            <a:endParaRPr lang="en-US" sz="950" dirty="0"/>
+          </a:p>
+        </p:txBody>
+      </p:sp>
+      <p:sp>
+        <p:nvSpPr>
+          <p:cNvPr id="34" name="Text 31"/>
+          <p:cNvSpPr/>
+          <p:nvPr/>
+        </p:nvSpPr>
+        <p:spPr>
+          <a:xfrm>
+            <a:off x="8321040" y="2379497"/>
+            <a:ext cx="3145536" cy="221513"/>
+          </a:xfrm>
+          <a:prstGeom prst="rect">
+            <a:avLst/>
+          </a:prstGeom>
+          <a:noFill/>
+          <a:ln/>
+        </p:spPr>
+        <p:txBody>
+          <a:bodyPr wrap="square" lIns="0" tIns="0" rIns="0" bIns="0" rtlCol="0" anchor="ctr"/>
+          <a:lstStyle/>
+          <a:p>
+            <a:pPr indent="0" marL="0">
+              <a:buNone/>
+            </a:pPr>
+            <a:r>
+              <a:rPr lang="en-US" sz="950" dirty="0">
+                <a:solidFill>
+                  <a:srgbClr val="D8D4E4"/>
+                </a:solidFill>
+                <a:latin typeface="Courier New" pitchFamily="34" charset="0"/>
+                <a:ea typeface="Courier New" pitchFamily="34" charset="-122"/>
+                <a:cs typeface="Courier New" pitchFamily="34" charset="-120"/>
+              </a:rPr>
+              <a:t>  FROM requests</a:t>
+            </a:r>
+            <a:endParaRPr lang="en-US" sz="950" dirty="0"/>
+          </a:p>
+        </p:txBody>
+      </p:sp>
+      <p:sp>
+        <p:nvSpPr>
+          <p:cNvPr id="35" name="Text 32"/>
+          <p:cNvSpPr/>
+          <p:nvPr/>
+        </p:nvSpPr>
+        <p:spPr>
+          <a:xfrm>
+            <a:off x="8321040" y="2601011"/>
+            <a:ext cx="3145536" cy="221513"/>
+          </a:xfrm>
+          <a:prstGeom prst="rect">
+            <a:avLst/>
+          </a:prstGeom>
+          <a:noFill/>
+          <a:ln/>
+        </p:spPr>
+        <p:txBody>
+          <a:bodyPr wrap="square" lIns="0" tIns="0" rIns="0" bIns="0" rtlCol="0" anchor="ctr"/>
+          <a:lstStyle/>
+          <a:p>
+            <a:pPr indent="0" marL="0">
+              <a:buNone/>
+            </a:pPr>
+            <a:r>
+              <a:rPr lang="en-US" sz="950" dirty="0">
+                <a:solidFill>
+                  <a:srgbClr val="D8D4E4"/>
+                </a:solidFill>
+                <a:latin typeface="Courier New" pitchFamily="34" charset="0"/>
+                <a:ea typeface="Courier New" pitchFamily="34" charset="-122"/>
+                <a:cs typeface="Courier New" pitchFamily="34" charset="-120"/>
+              </a:rPr>
+              <a:t>  GROUP BY model;</a:t>
+            </a:r>
+            <a:endParaRPr lang="en-US" sz="950" dirty="0"/>
+          </a:p>
+        </p:txBody>
+      </p:sp>
+      <p:sp>
+        <p:nvSpPr>
+          <p:cNvPr id="36" name="Text 33"/>
+          <p:cNvSpPr/>
+          <p:nvPr/>
+        </p:nvSpPr>
+        <p:spPr>
+          <a:xfrm>
+            <a:off x="8321040" y="2822524"/>
+            <a:ext cx="3145536" cy="221513"/>
+          </a:xfrm>
+          <a:prstGeom prst="rect">
+            <a:avLst/>
+          </a:prstGeom>
+          <a:noFill/>
+          <a:ln/>
+        </p:spPr>
+        <p:txBody>
+          <a:bodyPr wrap="square" lIns="0" tIns="0" rIns="0" bIns="0" rtlCol="0" anchor="ctr"/>
+          <a:lstStyle/>
+          <a:p>
+            <a:pPr indent="0" marL="0">
+              <a:buNone/>
+            </a:pPr>
+            <a:endParaRPr lang="en-US" sz="950" dirty="0"/>
+          </a:p>
+        </p:txBody>
+      </p:sp>
+      <p:sp>
+        <p:nvSpPr>
+          <p:cNvPr id="37" name="Text 34"/>
+          <p:cNvSpPr/>
+          <p:nvPr/>
+        </p:nvSpPr>
+        <p:spPr>
+          <a:xfrm>
+            <a:off x="8321040" y="3044038"/>
+            <a:ext cx="3145536" cy="221513"/>
+          </a:xfrm>
+          <a:prstGeom prst="rect">
+            <a:avLst/>
+          </a:prstGeom>
+          <a:noFill/>
+          <a:ln/>
+        </p:spPr>
+        <p:txBody>
+          <a:bodyPr wrap="square" lIns="0" tIns="0" rIns="0" bIns="0" rtlCol="0" anchor="ctr"/>
+          <a:lstStyle/>
+          <a:p>
+            <a:pPr indent="0" marL="0">
+              <a:buNone/>
+            </a:pPr>
+            <a:r>
+              <a:rPr lang="en-US" sz="950" dirty="0">
+                <a:solidFill>
+                  <a:srgbClr val="3FCF8E"/>
+                </a:solidFill>
+                <a:latin typeface="Courier New" pitchFamily="34" charset="0"/>
+                <a:ea typeface="Courier New" pitchFamily="34" charset="-122"/>
+                <a:cs typeface="Courier New" pitchFamily="34" charset="-120"/>
+              </a:rPr>
+              <a:t> mock-mini   |  7</a:t>
+            </a:r>
+            <a:endParaRPr lang="en-US" sz="950" dirty="0"/>
+          </a:p>
+        </p:txBody>
+      </p:sp>
+      <p:sp>
+        <p:nvSpPr>
+          <p:cNvPr id="38" name="Text 35"/>
+          <p:cNvSpPr/>
+          <p:nvPr/>
+        </p:nvSpPr>
+        <p:spPr>
+          <a:xfrm>
+            <a:off x="8321040" y="3265551"/>
+            <a:ext cx="3145536" cy="221513"/>
+          </a:xfrm>
+          <a:prstGeom prst="rect">
+            <a:avLst/>
+          </a:prstGeom>
+          <a:noFill/>
+          <a:ln/>
+        </p:spPr>
+        <p:txBody>
+          <a:bodyPr wrap="square" lIns="0" tIns="0" rIns="0" bIns="0" rtlCol="0" anchor="ctr"/>
+          <a:lstStyle/>
+          <a:p>
+            <a:pPr indent="0" marL="0">
+              <a:buNone/>
+            </a:pPr>
+            <a:r>
+              <a:rPr lang="en-US" sz="950" dirty="0">
+                <a:solidFill>
+                  <a:srgbClr val="A98BFF"/>
+                </a:solidFill>
+                <a:latin typeface="Courier New" pitchFamily="34" charset="0"/>
+                <a:ea typeface="Courier New" pitchFamily="34" charset="-122"/>
+                <a:cs typeface="Courier New" pitchFamily="34" charset="-120"/>
+              </a:rPr>
+              <a:t> mock-strong |  3</a:t>
+            </a:r>
+            <a:endParaRPr lang="en-US" sz="950" dirty="0"/>
+          </a:p>
+        </p:txBody>
+      </p:sp>
+      <p:sp>
+        <p:nvSpPr>
+          <p:cNvPr id="39" name="Text 36"/>
+          <p:cNvSpPr/>
+          <p:nvPr/>
+        </p:nvSpPr>
+        <p:spPr>
+          <a:xfrm>
+            <a:off x="8321040" y="3487064"/>
+            <a:ext cx="3145536" cy="221513"/>
+          </a:xfrm>
+          <a:prstGeom prst="rect">
+            <a:avLst/>
+          </a:prstGeom>
+          <a:noFill/>
+          <a:ln/>
+        </p:spPr>
+        <p:txBody>
+          <a:bodyPr wrap="square" lIns="0" tIns="0" rIns="0" bIns="0" rtlCol="0" anchor="ctr"/>
+          <a:lstStyle/>
+          <a:p>
+            <a:pPr indent="0" marL="0">
+              <a:buNone/>
+            </a:pPr>
+            <a:endParaRPr lang="en-US" sz="950" dirty="0"/>
+          </a:p>
+        </p:txBody>
+      </p:sp>
+      <p:sp>
+        <p:nvSpPr>
+          <p:cNvPr id="40" name="Text 37"/>
+          <p:cNvSpPr/>
+          <p:nvPr/>
+        </p:nvSpPr>
+        <p:spPr>
+          <a:xfrm>
+            <a:off x="8321040" y="3708578"/>
+            <a:ext cx="3145536" cy="221513"/>
+          </a:xfrm>
+          <a:prstGeom prst="rect">
+            <a:avLst/>
+          </a:prstGeom>
+          <a:noFill/>
+          <a:ln/>
+        </p:spPr>
+        <p:txBody>
+          <a:bodyPr wrap="square" lIns="0" tIns="0" rIns="0" bIns="0" rtlCol="0" anchor="ctr"/>
+          <a:lstStyle/>
+          <a:p>
+            <a:pPr indent="0" marL="0">
+              <a:buNone/>
+            </a:pPr>
+            <a:r>
+              <a:rPr lang="en-US" sz="950" dirty="0">
+                <a:solidFill>
+                  <a:srgbClr val="3FCF8E"/>
+                </a:solidFill>
+                <a:latin typeface="Courier New" pitchFamily="34" charset="0"/>
+                <a:ea typeface="Courier New" pitchFamily="34" charset="-122"/>
+                <a:cs typeface="Courier New" pitchFamily="34" charset="-120"/>
+              </a:rPr>
+              <a:t>трафік розведений ✓</a:t>
+            </a:r>
+            <a:endParaRPr lang="en-US" sz="950" dirty="0"/>
+          </a:p>
+        </p:txBody>
+      </p:sp>
+      <p:sp>
+        <p:nvSpPr>
+          <p:cNvPr id="41" name="Shape 38"/>
+          <p:cNvSpPr/>
+          <p:nvPr/>
+        </p:nvSpPr>
+        <p:spPr>
+          <a:xfrm>
             <a:off x="566928" y="5074920"/>
             <a:ext cx="11064240" cy="1051560"/>
           </a:xfrm>
@@ -15245,7 +15684,7 @@
       </p:sp>
       <p:sp>
         <p:nvSpPr>
-          <p:cNvPr id="28" name="Shape 25"/>
+          <p:cNvPr id="42" name="Shape 39"/>
           <p:cNvSpPr/>
           <p:nvPr/>
         </p:nvSpPr>
@@ -15265,7 +15704,7 @@
       </p:sp>
       <p:sp>
         <p:nvSpPr>
-          <p:cNvPr id="29" name="Text 26"/>
+          <p:cNvPr id="43" name="Text 40"/>
           <p:cNvSpPr/>
           <p:nvPr/>
         </p:nvSpPr>
@@ -15304,7 +15743,7 @@
       </p:sp>
       <p:sp>
         <p:nvSpPr>
-          <p:cNvPr id="30" name="Text 27"/>
+          <p:cNvPr id="44" name="Text 41"/>
           <p:cNvSpPr/>
           <p:nvPr/>
         </p:nvSpPr>
@@ -15343,7 +15782,7 @@
       </p:sp>
       <p:sp>
         <p:nvSpPr>
-          <p:cNvPr id="31" name="Text 28"/>
+          <p:cNvPr id="45" name="Text 42"/>
           <p:cNvSpPr/>
           <p:nvPr/>
         </p:nvSpPr>
@@ -16537,11 +16976,11 @@
         <p:spPr>
           <a:xfrm>
             <a:off x="566928" y="1737360"/>
-            <a:ext cx="3566160" cy="2148840"/>
+            <a:ext cx="7223760" cy="1051560"/>
           </a:xfrm>
           <a:prstGeom prst="roundRect">
             <a:avLst>
-              <a:gd name="adj" fmla="val 5106"/>
+              <a:gd name="adj" fmla="val 10435"/>
             </a:avLst>
           </a:prstGeom>
           <a:solidFill>
@@ -16559,7 +16998,7 @@
         <p:spPr>
           <a:xfrm>
             <a:off x="768096" y="1892808"/>
-            <a:ext cx="3163824" cy="438912"/>
+            <a:ext cx="6821424" cy="438912"/>
           </a:xfrm>
           <a:prstGeom prst="rect">
             <a:avLst/>
@@ -16598,7 +17037,7 @@
         <p:spPr>
           <a:xfrm>
             <a:off x="768096" y="2423160"/>
-            <a:ext cx="3163824" cy="1307592"/>
+            <a:ext cx="6821424" cy="210312"/>
           </a:xfrm>
           <a:prstGeom prst="rect">
             <a:avLst/>
@@ -16639,12 +17078,12 @@
         </p:nvSpPr>
         <p:spPr>
           <a:xfrm>
-            <a:off x="4315968" y="1737360"/>
-            <a:ext cx="3566160" cy="2148840"/>
+            <a:off x="566928" y="2926080"/>
+            <a:ext cx="7223760" cy="1051560"/>
           </a:xfrm>
           <a:prstGeom prst="roundRect">
             <a:avLst>
-              <a:gd name="adj" fmla="val 5106"/>
+              <a:gd name="adj" fmla="val 10435"/>
             </a:avLst>
           </a:prstGeom>
           <a:solidFill>
@@ -16661,8 +17100,8 @@
         </p:nvSpPr>
         <p:spPr>
           <a:xfrm>
-            <a:off x="4517136" y="1892808"/>
-            <a:ext cx="3163824" cy="438912"/>
+            <a:off x="768096" y="3081528"/>
+            <a:ext cx="6821424" cy="438912"/>
           </a:xfrm>
           <a:prstGeom prst="rect">
             <a:avLst/>
@@ -16700,8 +17139,8 @@
         </p:nvSpPr>
         <p:spPr>
           <a:xfrm>
-            <a:off x="4517136" y="2423160"/>
-            <a:ext cx="3163824" cy="1307592"/>
+            <a:off x="768096" y="3611880"/>
+            <a:ext cx="6821424" cy="210312"/>
           </a:xfrm>
           <a:prstGeom prst="rect">
             <a:avLst/>
@@ -16742,12 +17181,12 @@
         </p:nvSpPr>
         <p:spPr>
           <a:xfrm>
-            <a:off x="8065008" y="1737360"/>
-            <a:ext cx="3566160" cy="2148840"/>
+            <a:off x="566928" y="4114800"/>
+            <a:ext cx="7223760" cy="1051560"/>
           </a:xfrm>
           <a:prstGeom prst="roundRect">
             <a:avLst>
-              <a:gd name="adj" fmla="val 5106"/>
+              <a:gd name="adj" fmla="val 10435"/>
             </a:avLst>
           </a:prstGeom>
           <a:solidFill>
@@ -16764,8 +17203,8 @@
         </p:nvSpPr>
         <p:spPr>
           <a:xfrm>
-            <a:off x="8266176" y="1892808"/>
-            <a:ext cx="3163824" cy="438912"/>
+            <a:off x="768096" y="4270248"/>
+            <a:ext cx="6821424" cy="438912"/>
           </a:xfrm>
           <a:prstGeom prst="rect">
             <a:avLst/>
@@ -16803,8 +17242,8 @@
         </p:nvSpPr>
         <p:spPr>
           <a:xfrm>
-            <a:off x="8266176" y="2423160"/>
-            <a:ext cx="3163824" cy="1307592"/>
+            <a:off x="768096" y="4800600"/>
+            <a:ext cx="6821424" cy="210312"/>
           </a:xfrm>
           <a:prstGeom prst="rect">
             <a:avLst/>
@@ -16845,12 +17284,501 @@
         </p:nvSpPr>
         <p:spPr>
           <a:xfrm>
-            <a:off x="566928" y="4297680"/>
-            <a:ext cx="11064240" cy="1600200"/>
+            <a:off x="8156448" y="1737360"/>
+            <a:ext cx="3474720" cy="3429000"/>
           </a:xfrm>
           <a:prstGeom prst="roundRect">
             <a:avLst>
-              <a:gd name="adj" fmla="val 6857"/>
+              <a:gd name="adj" fmla="val 2133"/>
+            </a:avLst>
+          </a:prstGeom>
+          <a:solidFill>
+            <a:srgbClr val="0A0810"/>
+          </a:solidFill>
+          <a:ln w="12700">
+            <a:solidFill>
+              <a:srgbClr val="D9D9D9"/>
+            </a:solidFill>
+            <a:prstDash val="solid"/>
+          </a:ln>
+        </p:spPr>
+      </p:sp>
+      <p:sp>
+        <p:nvSpPr>
+          <p:cNvPr id="17" name="Shape 14"/>
+          <p:cNvSpPr/>
+          <p:nvPr/>
+        </p:nvSpPr>
+        <p:spPr>
+          <a:xfrm>
+            <a:off x="8284464" y="1856232"/>
+            <a:ext cx="73152" cy="73152"/>
+          </a:xfrm>
+          <a:prstGeom prst="ellipse">
+            <a:avLst/>
+          </a:prstGeom>
+          <a:solidFill>
+            <a:srgbClr val="FF6B6B"/>
+          </a:solidFill>
+          <a:ln/>
+        </p:spPr>
+      </p:sp>
+      <p:sp>
+        <p:nvSpPr>
+          <p:cNvPr id="18" name="Shape 15"/>
+          <p:cNvSpPr/>
+          <p:nvPr/>
+        </p:nvSpPr>
+        <p:spPr>
+          <a:xfrm>
+            <a:off x="8430768" y="1856232"/>
+            <a:ext cx="73152" cy="73152"/>
+          </a:xfrm>
+          <a:prstGeom prst="ellipse">
+            <a:avLst/>
+          </a:prstGeom>
+          <a:solidFill>
+            <a:srgbClr val="6BA0F8"/>
+          </a:solidFill>
+          <a:ln/>
+        </p:spPr>
+      </p:sp>
+      <p:sp>
+        <p:nvSpPr>
+          <p:cNvPr id="19" name="Shape 16"/>
+          <p:cNvSpPr/>
+          <p:nvPr/>
+        </p:nvSpPr>
+        <p:spPr>
+          <a:xfrm>
+            <a:off x="8577072" y="1856232"/>
+            <a:ext cx="73152" cy="73152"/>
+          </a:xfrm>
+          <a:prstGeom prst="ellipse">
+            <a:avLst/>
+          </a:prstGeom>
+          <a:solidFill>
+            <a:srgbClr val="3FCF8E"/>
+          </a:solidFill>
+          <a:ln/>
+        </p:spPr>
+      </p:sp>
+      <p:sp>
+        <p:nvSpPr>
+          <p:cNvPr id="20" name="Text 17"/>
+          <p:cNvSpPr/>
+          <p:nvPr/>
+        </p:nvSpPr>
+        <p:spPr>
+          <a:xfrm>
+            <a:off x="8759952" y="1737360"/>
+            <a:ext cx="2761488" cy="310896"/>
+          </a:xfrm>
+          <a:prstGeom prst="rect">
+            <a:avLst/>
+          </a:prstGeom>
+          <a:noFill/>
+          <a:ln/>
+        </p:spPr>
+        <p:txBody>
+          <a:bodyPr wrap="square" lIns="0" tIns="0" rIns="0" bIns="0" rtlCol="0" anchor="ctr"/>
+          <a:lstStyle/>
+          <a:p>
+            <a:pPr indent="0" marL="0">
+              <a:buNone/>
+            </a:pPr>
+            <a:r>
+              <a:rPr lang="en-US" sz="800" dirty="0">
+                <a:solidFill>
+                  <a:srgbClr val="9A94AA"/>
+                </a:solidFill>
+                <a:latin typeface="Courier New" pitchFamily="34" charset="0"/>
+                <a:ea typeface="Courier New" pitchFamily="34" charset="-122"/>
+                <a:cs typeface="Courier New" pitchFamily="34" charset="-120"/>
+              </a:rPr>
+              <a:t>gateway/litellm-config.yaml</a:t>
+            </a:r>
+            <a:endParaRPr lang="en-US" sz="800" dirty="0"/>
+          </a:p>
+        </p:txBody>
+      </p:sp>
+      <p:sp>
+        <p:nvSpPr>
+          <p:cNvPr id="21" name="Shape 18"/>
+          <p:cNvSpPr/>
+          <p:nvPr/>
+        </p:nvSpPr>
+        <p:spPr>
+          <a:xfrm>
+            <a:off x="8156448" y="2048256"/>
+            <a:ext cx="3474720" cy="0"/>
+          </a:xfrm>
+          <a:prstGeom prst="line">
+            <a:avLst/>
+          </a:prstGeom>
+          <a:noFill/>
+          <a:ln w="9525">
+            <a:solidFill>
+              <a:srgbClr val="2A2438"/>
+            </a:solidFill>
+            <a:prstDash val="solid"/>
+          </a:ln>
+        </p:spPr>
+      </p:sp>
+      <p:sp>
+        <p:nvSpPr>
+          <p:cNvPr id="22" name="Text 19"/>
+          <p:cNvSpPr/>
+          <p:nvPr/>
+        </p:nvSpPr>
+        <p:spPr>
+          <a:xfrm>
+            <a:off x="8321040" y="2157984"/>
+            <a:ext cx="3145536" cy="221513"/>
+          </a:xfrm>
+          <a:prstGeom prst="rect">
+            <a:avLst/>
+          </a:prstGeom>
+          <a:noFill/>
+          <a:ln/>
+        </p:spPr>
+        <p:txBody>
+          <a:bodyPr wrap="square" lIns="0" tIns="0" rIns="0" bIns="0" rtlCol="0" anchor="ctr"/>
+          <a:lstStyle/>
+          <a:p>
+            <a:pPr indent="0" marL="0">
+              <a:buNone/>
+            </a:pPr>
+            <a:r>
+              <a:rPr lang="en-US" sz="950" dirty="0">
+                <a:solidFill>
+                  <a:srgbClr val="D8D4E4"/>
+                </a:solidFill>
+                <a:latin typeface="Courier New" pitchFamily="34" charset="0"/>
+                <a:ea typeface="Courier New" pitchFamily="34" charset="-122"/>
+                <a:cs typeface="Courier New" pitchFamily="34" charset="-120"/>
+              </a:rPr>
+              <a:t>model_list:</a:t>
+            </a:r>
+            <a:endParaRPr lang="en-US" sz="950" dirty="0"/>
+          </a:p>
+        </p:txBody>
+      </p:sp>
+      <p:sp>
+        <p:nvSpPr>
+          <p:cNvPr id="23" name="Text 20"/>
+          <p:cNvSpPr/>
+          <p:nvPr/>
+        </p:nvSpPr>
+        <p:spPr>
+          <a:xfrm>
+            <a:off x="8321040" y="2379497"/>
+            <a:ext cx="3145536" cy="221513"/>
+          </a:xfrm>
+          <a:prstGeom prst="rect">
+            <a:avLst/>
+          </a:prstGeom>
+          <a:noFill/>
+          <a:ln/>
+        </p:spPr>
+        <p:txBody>
+          <a:bodyPr wrap="square" lIns="0" tIns="0" rIns="0" bIns="0" rtlCol="0" anchor="ctr"/>
+          <a:lstStyle/>
+          <a:p>
+            <a:pPr indent="0" marL="0">
+              <a:buNone/>
+            </a:pPr>
+            <a:r>
+              <a:rPr lang="en-US" sz="950" dirty="0">
+                <a:solidFill>
+                  <a:srgbClr val="3FCF8E"/>
+                </a:solidFill>
+                <a:latin typeface="Courier New" pitchFamily="34" charset="0"/>
+                <a:ea typeface="Courier New" pitchFamily="34" charset="-122"/>
+                <a:cs typeface="Courier New" pitchFamily="34" charset="-120"/>
+              </a:rPr>
+              <a:t>  - model_name: mock-mini</a:t>
+            </a:r>
+            <a:endParaRPr lang="en-US" sz="950" dirty="0"/>
+          </a:p>
+        </p:txBody>
+      </p:sp>
+      <p:sp>
+        <p:nvSpPr>
+          <p:cNvPr id="24" name="Text 21"/>
+          <p:cNvSpPr/>
+          <p:nvPr/>
+        </p:nvSpPr>
+        <p:spPr>
+          <a:xfrm>
+            <a:off x="8321040" y="2601011"/>
+            <a:ext cx="3145536" cy="221513"/>
+          </a:xfrm>
+          <a:prstGeom prst="rect">
+            <a:avLst/>
+          </a:prstGeom>
+          <a:noFill/>
+          <a:ln/>
+        </p:spPr>
+        <p:txBody>
+          <a:bodyPr wrap="square" lIns="0" tIns="0" rIns="0" bIns="0" rtlCol="0" anchor="ctr"/>
+          <a:lstStyle/>
+          <a:p>
+            <a:pPr indent="0" marL="0">
+              <a:buNone/>
+            </a:pPr>
+            <a:r>
+              <a:rPr lang="en-US" sz="950" dirty="0">
+                <a:solidFill>
+                  <a:srgbClr val="A98BFF"/>
+                </a:solidFill>
+                <a:latin typeface="Courier New" pitchFamily="34" charset="0"/>
+                <a:ea typeface="Courier New" pitchFamily="34" charset="-122"/>
+                <a:cs typeface="Courier New" pitchFamily="34" charset="-120"/>
+              </a:rPr>
+              <a:t>  - model_name: mock-strong</a:t>
+            </a:r>
+            <a:endParaRPr lang="en-US" sz="950" dirty="0"/>
+          </a:p>
+        </p:txBody>
+      </p:sp>
+      <p:sp>
+        <p:nvSpPr>
+          <p:cNvPr id="25" name="Text 22"/>
+          <p:cNvSpPr/>
+          <p:nvPr/>
+        </p:nvSpPr>
+        <p:spPr>
+          <a:xfrm>
+            <a:off x="8321040" y="2822524"/>
+            <a:ext cx="3145536" cy="221513"/>
+          </a:xfrm>
+          <a:prstGeom prst="rect">
+            <a:avLst/>
+          </a:prstGeom>
+          <a:noFill/>
+          <a:ln/>
+        </p:spPr>
+        <p:txBody>
+          <a:bodyPr wrap="square" lIns="0" tIns="0" rIns="0" bIns="0" rtlCol="0" anchor="ctr"/>
+          <a:lstStyle/>
+          <a:p>
+            <a:pPr indent="0" marL="0">
+              <a:buNone/>
+            </a:pPr>
+            <a:r>
+              <a:rPr lang="en-US" sz="950" dirty="0">
+                <a:solidFill>
+                  <a:srgbClr val="6BA0F8"/>
+                </a:solidFill>
+                <a:latin typeface="Courier New" pitchFamily="34" charset="0"/>
+                <a:ea typeface="Courier New" pitchFamily="34" charset="-122"/>
+                <a:cs typeface="Courier New" pitchFamily="34" charset="-120"/>
+              </a:rPr>
+              <a:t>  - model_name: azure-gpt-5</a:t>
+            </a:r>
+            <a:endParaRPr lang="en-US" sz="950" dirty="0"/>
+          </a:p>
+        </p:txBody>
+      </p:sp>
+      <p:sp>
+        <p:nvSpPr>
+          <p:cNvPr id="26" name="Text 23"/>
+          <p:cNvSpPr/>
+          <p:nvPr/>
+        </p:nvSpPr>
+        <p:spPr>
+          <a:xfrm>
+            <a:off x="8321040" y="3044038"/>
+            <a:ext cx="3145536" cy="221513"/>
+          </a:xfrm>
+          <a:prstGeom prst="rect">
+            <a:avLst/>
+          </a:prstGeom>
+          <a:noFill/>
+          <a:ln/>
+        </p:spPr>
+        <p:txBody>
+          <a:bodyPr wrap="square" lIns="0" tIns="0" rIns="0" bIns="0" rtlCol="0" anchor="ctr"/>
+          <a:lstStyle/>
+          <a:p>
+            <a:pPr indent="0" marL="0">
+              <a:buNone/>
+            </a:pPr>
+            <a:r>
+              <a:rPr lang="en-US" sz="950" dirty="0">
+                <a:solidFill>
+                  <a:srgbClr val="D8D4E4"/>
+                </a:solidFill>
+                <a:latin typeface="Courier New" pitchFamily="34" charset="0"/>
+                <a:ea typeface="Courier New" pitchFamily="34" charset="-122"/>
+                <a:cs typeface="Courier New" pitchFamily="34" charset="-120"/>
+              </a:rPr>
+              <a:t>    litellm_params:</a:t>
+            </a:r>
+            <a:endParaRPr lang="en-US" sz="950" dirty="0"/>
+          </a:p>
+        </p:txBody>
+      </p:sp>
+      <p:sp>
+        <p:nvSpPr>
+          <p:cNvPr id="27" name="Text 24"/>
+          <p:cNvSpPr/>
+          <p:nvPr/>
+        </p:nvSpPr>
+        <p:spPr>
+          <a:xfrm>
+            <a:off x="8321040" y="3265551"/>
+            <a:ext cx="3145536" cy="221513"/>
+          </a:xfrm>
+          <a:prstGeom prst="rect">
+            <a:avLst/>
+          </a:prstGeom>
+          <a:noFill/>
+          <a:ln/>
+        </p:spPr>
+        <p:txBody>
+          <a:bodyPr wrap="square" lIns="0" tIns="0" rIns="0" bIns="0" rtlCol="0" anchor="ctr"/>
+          <a:lstStyle/>
+          <a:p>
+            <a:pPr indent="0" marL="0">
+              <a:buNone/>
+            </a:pPr>
+            <a:r>
+              <a:rPr lang="en-US" sz="950" dirty="0">
+                <a:solidFill>
+                  <a:srgbClr val="D8D4E4"/>
+                </a:solidFill>
+                <a:latin typeface="Courier New" pitchFamily="34" charset="0"/>
+                <a:ea typeface="Courier New" pitchFamily="34" charset="-122"/>
+                <a:cs typeface="Courier New" pitchFamily="34" charset="-120"/>
+              </a:rPr>
+              <a:t>      model: azure/&lt;deployment&gt;</a:t>
+            </a:r>
+            <a:endParaRPr lang="en-US" sz="950" dirty="0"/>
+          </a:p>
+        </p:txBody>
+      </p:sp>
+      <p:sp>
+        <p:nvSpPr>
+          <p:cNvPr id="28" name="Text 25"/>
+          <p:cNvSpPr/>
+          <p:nvPr/>
+        </p:nvSpPr>
+        <p:spPr>
+          <a:xfrm>
+            <a:off x="8321040" y="3487064"/>
+            <a:ext cx="3145536" cy="221513"/>
+          </a:xfrm>
+          <a:prstGeom prst="rect">
+            <a:avLst/>
+          </a:prstGeom>
+          <a:noFill/>
+          <a:ln/>
+        </p:spPr>
+        <p:txBody>
+          <a:bodyPr wrap="square" lIns="0" tIns="0" rIns="0" bIns="0" rtlCol="0" anchor="ctr"/>
+          <a:lstStyle/>
+          <a:p>
+            <a:pPr indent="0" marL="0">
+              <a:buNone/>
+            </a:pPr>
+            <a:r>
+              <a:rPr lang="en-US" sz="950" dirty="0">
+                <a:solidFill>
+                  <a:srgbClr val="D8D4E4"/>
+                </a:solidFill>
+                <a:latin typeface="Courier New" pitchFamily="34" charset="0"/>
+                <a:ea typeface="Courier New" pitchFamily="34" charset="-122"/>
+                <a:cs typeface="Courier New" pitchFamily="34" charset="-120"/>
+              </a:rPr>
+              <a:t>      api_key: os.environ/…</a:t>
+            </a:r>
+            <a:endParaRPr lang="en-US" sz="950" dirty="0"/>
+          </a:p>
+        </p:txBody>
+      </p:sp>
+      <p:sp>
+        <p:nvSpPr>
+          <p:cNvPr id="29" name="Text 26"/>
+          <p:cNvSpPr/>
+          <p:nvPr/>
+        </p:nvSpPr>
+        <p:spPr>
+          <a:xfrm>
+            <a:off x="8321040" y="3708578"/>
+            <a:ext cx="3145536" cy="221513"/>
+          </a:xfrm>
+          <a:prstGeom prst="rect">
+            <a:avLst/>
+          </a:prstGeom>
+          <a:noFill/>
+          <a:ln/>
+        </p:spPr>
+        <p:txBody>
+          <a:bodyPr wrap="square" lIns="0" tIns="0" rIns="0" bIns="0" rtlCol="0" anchor="ctr"/>
+          <a:lstStyle/>
+          <a:p>
+            <a:pPr indent="0" marL="0">
+              <a:buNone/>
+            </a:pPr>
+            <a:endParaRPr lang="en-US" sz="950" dirty="0"/>
+          </a:p>
+        </p:txBody>
+      </p:sp>
+      <p:sp>
+        <p:nvSpPr>
+          <p:cNvPr id="30" name="Text 27"/>
+          <p:cNvSpPr/>
+          <p:nvPr/>
+        </p:nvSpPr>
+        <p:spPr>
+          <a:xfrm>
+            <a:off x="8321040" y="3930091"/>
+            <a:ext cx="3145536" cy="221513"/>
+          </a:xfrm>
+          <a:prstGeom prst="rect">
+            <a:avLst/>
+          </a:prstGeom>
+          <a:noFill/>
+          <a:ln/>
+        </p:spPr>
+        <p:txBody>
+          <a:bodyPr wrap="square" lIns="0" tIns="0" rIns="0" bIns="0" rtlCol="0" anchor="ctr"/>
+          <a:lstStyle/>
+          <a:p>
+            <a:pPr indent="0" marL="0">
+              <a:buNone/>
+            </a:pPr>
+            <a:r>
+              <a:rPr lang="en-US" sz="950" dirty="0">
+                <a:solidFill>
+                  <a:srgbClr val="3FCF8E"/>
+                </a:solidFill>
+                <a:latin typeface="Courier New" pitchFamily="34" charset="0"/>
+                <a:ea typeface="Courier New" pitchFamily="34" charset="-122"/>
+                <a:cs typeface="Courier New" pitchFamily="34" charset="-120"/>
+              </a:rPr>
+              <a:t>service/: 0 рядків змінено</a:t>
+            </a:r>
+            <a:endParaRPr lang="en-US" sz="950" dirty="0"/>
+          </a:p>
+        </p:txBody>
+      </p:sp>
+      <p:sp>
+        <p:nvSpPr>
+          <p:cNvPr id="31" name="Shape 28"/>
+          <p:cNvSpPr/>
+          <p:nvPr/>
+        </p:nvSpPr>
+        <p:spPr>
+          <a:xfrm>
+            <a:off x="566928" y="5349240"/>
+            <a:ext cx="11064240" cy="731520"/>
+          </a:xfrm>
+          <a:prstGeom prst="roundRect">
+            <a:avLst>
+              <a:gd name="adj" fmla="val 15000"/>
             </a:avLst>
           </a:prstGeom>
           <a:solidFill>
@@ -16866,14 +17794,14 @@
       </p:sp>
       <p:sp>
         <p:nvSpPr>
-          <p:cNvPr id="17" name="Text 14"/>
-          <p:cNvSpPr/>
-          <p:nvPr/>
-        </p:nvSpPr>
-        <p:spPr>
-          <a:xfrm>
-            <a:off x="786384" y="4443984"/>
-            <a:ext cx="10625328" cy="1307592"/>
+          <p:cNvPr id="32" name="Text 29"/>
+          <p:cNvSpPr/>
+          <p:nvPr/>
+        </p:nvSpPr>
+        <p:spPr>
+          <a:xfrm>
+            <a:off x="786384" y="5495544"/>
+            <a:ext cx="10625328" cy="438912"/>
           </a:xfrm>
           <a:prstGeom prst="rect">
             <a:avLst/>

--- a/docs/decks/L03.pptx
+++ b/docs/decks/L03.pptx
@@ -15816,7 +15816,7 @@
                 <a:ea typeface="Montserrat" pitchFamily="34" charset="-122"/>
                 <a:cs typeface="Montserrat" pitchFamily="34" charset="-120"/>
               </a:rPr>
-              <a:t>Побачити перший операційний доказ, що routing працює: не «код написаний», а «трафік розведений». Різниця між цими формулюваннями і є темою теми.</a:t>
+              <a:t>Побачити перший операційний доказ, що routing працює: не «код написаний», а «трафік розведений». Різниця між цими формулюваннями — і є суть сьогоднішньої теми.</a:t>
             </a:r>
             <a:endParaRPr lang="en-US" sz="1300" dirty="0"/>
           </a:p>
@@ -16785,7 +16785,7 @@
                 <a:ea typeface="Montserrat" pitchFamily="34" charset="-122"/>
                 <a:cs typeface="Montserrat" pitchFamily="34" charset="-120"/>
               </a:rPr>
-              <a:t>що це довело · перевір себе · антипатерни маршрутизації</a:t>
+              <a:t>що це довело · перевірте себе · антипатерни маршрутизації</a:t>
             </a:r>
             <a:endParaRPr lang="en-US" sz="1500" dirty="0"/>
           </a:p>
@@ -17270,7 +17270,7 @@
                 <a:ea typeface="Montserrat" pitchFamily="34" charset="-122"/>
                 <a:cs typeface="Montserrat" pitchFamily="34" charset="-120"/>
               </a:rPr>
-              <a:t>«третій провайдер» = один YAML-блок і нуль рядків коду</a:t>
+              <a:t>«третій провайдер» = один YAML-блок; у коді — лише рядок у Route()</a:t>
             </a:r>
             <a:endParaRPr lang="en-US" sz="1200" dirty="0"/>
           </a:p>
@@ -17962,7 +17962,7 @@
                 <a:ea typeface="Unbounded" pitchFamily="34" charset="-122"/>
                 <a:cs typeface="Unbounded" pitchFamily="34" charset="-120"/>
               </a:rPr>
-              <a:t>Перевір себе</a:t>
+              <a:t>Перевірте себе</a:t>
             </a:r>
             <a:endParaRPr lang="en-US" sz="2400" dirty="0"/>
           </a:p>
@@ -24407,7 +24407,7 @@
                 <a:ea typeface="Montserrat" pitchFamily="34" charset="-122"/>
                 <a:cs typeface="Montserrat" pitchFamily="34" charset="-120"/>
               </a:rPr>
-              <a:t>Маршрутизація — перший механізм тижня «гроші»: вона розводить трафік за задачами, і саме на ній тримається все, що рахуватимемо у наступній темі.</a:t>
+              <a:t>Маршрутизація — перший механізм тижня «Routing + cost»: вона розводить трафік за задачами, і саме на ній тримається все, що рахуватимемо у наступній темі.</a:t>
             </a:r>
             <a:endParaRPr lang="en-US" sz="1300" dirty="0"/>
           </a:p>
